--- a/DCR_Collaboration_API_Presentation.pptx
+++ b/DCR_Collaboration_API_Presentation.pptx
@@ -56,6 +56,11 @@
     <p:sldId id="304" r:id="rId55"/>
     <p:sldId id="305" r:id="rId56"/>
     <p:sldId id="306" r:id="rId57"/>
+    <p:sldId id="307" r:id="rId58"/>
+    <p:sldId id="308" r:id="rId59"/>
+    <p:sldId id="309" r:id="rId60"/>
+    <p:sldId id="310" r:id="rId61"/>
+    <p:sldId id="311" r:id="rId62"/>
   </p:sldIdLst>
   <p:sldSz cx="12191695" cy="6858000" type="screen4x3"/>
   <p:notesSz cx="6858000" cy="9144000"/>
@@ -4156,7 +4161,7 @@
                 </a:solidFill>
                 <a:latin typeface="Segoe UI"/>
               </a:rPr>
-              <a:t>DCR Collaboration API v2 | SFSEAPAC | 2026   ·   10 / 51</a:t>
+              <a:t>DCR Collaboration API v2 | SFSEAPAC | 2026   ·   10 / 56</a:t>
             </a:r>
           </a:p>
         </p:txBody>
@@ -4639,7 +4644,7 @@
                 </a:solidFill>
                 <a:latin typeface="Segoe UI"/>
               </a:rPr>
-              <a:t>DCR Collaboration API v2 | SFSEAPAC | 2026   ·   11 / 51</a:t>
+              <a:t>DCR Collaboration API v2 | SFSEAPAC | 2026   ·   11 / 56</a:t>
             </a:r>
           </a:p>
         </p:txBody>
@@ -6102,7 +6107,7 @@
                 </a:solidFill>
                 <a:latin typeface="Segoe UI"/>
               </a:rPr>
-              <a:t>DCR Collaboration API v2 | SFSEAPAC | 2026   ·   13 / 51</a:t>
+              <a:t>DCR Collaboration API v2 | SFSEAPAC | 2026   ·   13 / 56</a:t>
             </a:r>
           </a:p>
         </p:txBody>
@@ -7214,7 +7219,7 @@
                 </a:solidFill>
                 <a:latin typeface="Segoe UI"/>
               </a:rPr>
-              <a:t>DCR Collaboration API v2 | SFSEAPAC | 2026   ·   14 / 51</a:t>
+              <a:t>DCR Collaboration API v2 | SFSEAPAC | 2026   ·   14 / 56</a:t>
             </a:r>
           </a:p>
         </p:txBody>
@@ -8513,7 +8518,7 @@
                 </a:solidFill>
                 <a:latin typeface="Segoe UI"/>
               </a:rPr>
-              <a:t>DCR Collaboration API v2 | SFSEAPAC | 2026   ·   16 / 51</a:t>
+              <a:t>DCR Collaboration API v2 | SFSEAPAC | 2026   ·   16 / 56</a:t>
             </a:r>
           </a:p>
         </p:txBody>
@@ -9461,7 +9466,7 @@
                 </a:solidFill>
                 <a:latin typeface="Segoe UI"/>
               </a:rPr>
-              <a:t>DCR Collaboration API v2 | SFSEAPAC | 2026   ·   17 / 51</a:t>
+              <a:t>DCR Collaboration API v2 | SFSEAPAC | 2026   ·   17 / 56</a:t>
             </a:r>
           </a:p>
         </p:txBody>
@@ -10573,7 +10578,7 @@
                 </a:solidFill>
                 <a:latin typeface="Segoe UI"/>
               </a:rPr>
-              <a:t>DCR Collaboration API v2 | SFSEAPAC | 2026   ·   18 / 51</a:t>
+              <a:t>DCR Collaboration API v2 | SFSEAPAC | 2026   ·   18 / 56</a:t>
             </a:r>
           </a:p>
         </p:txBody>
@@ -11521,7 +11526,7 @@
                 </a:solidFill>
                 <a:latin typeface="Segoe UI"/>
               </a:rPr>
-              <a:t>DCR Collaboration API v2 | SFSEAPAC | 2026   ·   19 / 51</a:t>
+              <a:t>DCR Collaboration API v2 | SFSEAPAC | 2026   ·   19 / 56</a:t>
             </a:r>
           </a:p>
         </p:txBody>
@@ -13090,7 +13095,7 @@
                 </a:solidFill>
                 <a:latin typeface="Segoe UI"/>
               </a:rPr>
-              <a:t>DCR Collaboration API v2 | SFSEAPAC | 2026   ·   2 / 51</a:t>
+              <a:t>DCR Collaboration API v2 | SFSEAPAC | 2026   ·   2 / 56</a:t>
             </a:r>
           </a:p>
         </p:txBody>
@@ -14202,7 +14207,7 @@
                 </a:solidFill>
                 <a:latin typeface="Segoe UI"/>
               </a:rPr>
-              <a:t>DCR Collaboration API v2 | SFSEAPAC | 2026   ·   20 / 51</a:t>
+              <a:t>DCR Collaboration API v2 | SFSEAPAC | 2026   ·   20 / 56</a:t>
             </a:r>
           </a:p>
         </p:txBody>
@@ -14937,7 +14942,7 @@
                 </a:solidFill>
                 <a:latin typeface="Segoe UI"/>
               </a:rPr>
-              <a:t>DCR Collaboration API v2 | SFSEAPAC | 2026   ·   21 / 51</a:t>
+              <a:t>DCR Collaboration API v2 | SFSEAPAC | 2026   ·   21 / 56</a:t>
             </a:r>
           </a:p>
         </p:txBody>
@@ -16236,7 +16241,7 @@
                 </a:solidFill>
                 <a:latin typeface="Segoe UI"/>
               </a:rPr>
-              <a:t>DCR Collaboration API v2 | SFSEAPAC | 2026   ·   23 / 51</a:t>
+              <a:t>DCR Collaboration API v2 | SFSEAPAC | 2026   ·   23 / 56</a:t>
             </a:r>
           </a:p>
         </p:txBody>
@@ -17348,7 +17353,7 @@
                 </a:solidFill>
                 <a:latin typeface="Segoe UI"/>
               </a:rPr>
-              <a:t>DCR Collaboration API v2 | SFSEAPAC | 2026   ·   24 / 51</a:t>
+              <a:t>DCR Collaboration API v2 | SFSEAPAC | 2026   ·   24 / 56</a:t>
             </a:r>
           </a:p>
         </p:txBody>
@@ -18296,7 +18301,7 @@
                 </a:solidFill>
                 <a:latin typeface="Segoe UI"/>
               </a:rPr>
-              <a:t>DCR Collaboration API v2 | SFSEAPAC | 2026   ·   25 / 51</a:t>
+              <a:t>DCR Collaboration API v2 | SFSEAPAC | 2026   ·   25 / 56</a:t>
             </a:r>
           </a:p>
         </p:txBody>
@@ -19209,7 +19214,7 @@
                 </a:solidFill>
                 <a:latin typeface="Segoe UI"/>
               </a:rPr>
-              <a:t>DCR Collaboration API v2 | SFSEAPAC | 2026   ·   26 / 51</a:t>
+              <a:t>DCR Collaboration API v2 | SFSEAPAC | 2026   ·   26 / 56</a:t>
             </a:r>
           </a:p>
         </p:txBody>
@@ -19692,7 +19697,7 @@
                 </a:solidFill>
                 <a:latin typeface="Segoe UI"/>
               </a:rPr>
-              <a:t>DCR Collaboration API v2 | SFSEAPAC | 2026   ·   27 / 51</a:t>
+              <a:t>DCR Collaboration API v2 | SFSEAPAC | 2026   ·   27 / 56</a:t>
             </a:r>
           </a:p>
         </p:txBody>
@@ -20804,7 +20809,7 @@
                 </a:solidFill>
                 <a:latin typeface="Segoe UI"/>
               </a:rPr>
-              <a:t>DCR Collaboration API v2 | SFSEAPAC | 2026   ·   28 / 51</a:t>
+              <a:t>DCR Collaboration API v2 | SFSEAPAC | 2026   ·   28 / 56</a:t>
             </a:r>
           </a:p>
         </p:txBody>
@@ -21989,7 +21994,7 @@
                 </a:solidFill>
                 <a:latin typeface="Segoe UI"/>
               </a:rPr>
-              <a:t>DCR Collaboration API v2 | SFSEAPAC | 2026   ·   30 / 51</a:t>
+              <a:t>DCR Collaboration API v2 | SFSEAPAC | 2026   ·   30 / 56</a:t>
             </a:r>
           </a:p>
         </p:txBody>
@@ -22528,7 +22533,7 @@
                 </a:solidFill>
                 <a:latin typeface="Segoe UI"/>
               </a:rPr>
-              <a:t>DCR Collaboration API v2 | SFSEAPAC | 2026   ·   31 / 51</a:t>
+              <a:t>DCR Collaboration API v2 | SFSEAPAC | 2026   ·   31 / 56</a:t>
             </a:r>
           </a:p>
         </p:txBody>
@@ -23067,7 +23072,7 @@
                 </a:solidFill>
                 <a:latin typeface="Segoe UI"/>
               </a:rPr>
-              <a:t>DCR Collaboration API v2 | SFSEAPAC | 2026   ·   32 / 51</a:t>
+              <a:t>DCR Collaboration API v2 | SFSEAPAC | 2026   ·   32 / 56</a:t>
             </a:r>
           </a:p>
         </p:txBody>
@@ -23550,7 +23555,7 @@
                 </a:solidFill>
                 <a:latin typeface="Segoe UI"/>
               </a:rPr>
-              <a:t>DCR Collaboration API v2 | SFSEAPAC | 2026   ·   33 / 51</a:t>
+              <a:t>DCR Collaboration API v2 | SFSEAPAC | 2026   ·   33 / 56</a:t>
             </a:r>
           </a:p>
         </p:txBody>
@@ -24033,7 +24038,7 @@
                 </a:solidFill>
                 <a:latin typeface="Segoe UI"/>
               </a:rPr>
-              <a:t>DCR Collaboration API v2 | SFSEAPAC | 2026   ·   34 / 51</a:t>
+              <a:t>DCR Collaboration API v2 | SFSEAPAC | 2026   ·   34 / 56</a:t>
             </a:r>
           </a:p>
         </p:txBody>
@@ -24516,7 +24521,7 @@
                 </a:solidFill>
                 <a:latin typeface="Segoe UI"/>
               </a:rPr>
-              <a:t>DCR Collaboration API v2 | SFSEAPAC | 2026   ·   35 / 51</a:t>
+              <a:t>DCR Collaboration API v2 | SFSEAPAC | 2026   ·   35 / 56</a:t>
             </a:r>
           </a:p>
         </p:txBody>
@@ -25628,7 +25633,7 @@
                 </a:solidFill>
                 <a:latin typeface="Segoe UI"/>
               </a:rPr>
-              <a:t>DCR Collaboration API v2 | SFSEAPAC | 2026   ·   36 / 51</a:t>
+              <a:t>DCR Collaboration API v2 | SFSEAPAC | 2026   ·   36 / 56</a:t>
             </a:r>
           </a:p>
         </p:txBody>
@@ -27091,7 +27096,7 @@
                 </a:solidFill>
                 <a:latin typeface="Segoe UI"/>
               </a:rPr>
-              <a:t>DCR Collaboration API v2 | SFSEAPAC | 2026   ·   38 / 51</a:t>
+              <a:t>DCR Collaboration API v2 | SFSEAPAC | 2026   ·   38 / 56</a:t>
             </a:r>
           </a:p>
         </p:txBody>
@@ -28144,7 +28149,7 @@
                 </a:solidFill>
                 <a:latin typeface="Segoe UI"/>
               </a:rPr>
-              <a:t>DCR Collaboration API v2 | SFSEAPAC | 2026   ·   39 / 51</a:t>
+              <a:t>DCR Collaboration API v2 | SFSEAPAC | 2026   ·   39 / 56</a:t>
             </a:r>
           </a:p>
         </p:txBody>
@@ -29256,7 +29261,7 @@
                 </a:solidFill>
                 <a:latin typeface="Segoe UI"/>
               </a:rPr>
-              <a:t>DCR Collaboration API v2 | SFSEAPAC | 2026   ·   4 / 51</a:t>
+              <a:t>DCR Collaboration API v2 | SFSEAPAC | 2026   ·   4 / 56</a:t>
             </a:r>
           </a:p>
         </p:txBody>
@@ -30309,7 +30314,7 @@
                 </a:solidFill>
                 <a:latin typeface="Segoe UI"/>
               </a:rPr>
-              <a:t>DCR Collaboration API v2 | SFSEAPAC | 2026   ·   40 / 51</a:t>
+              <a:t>DCR Collaboration API v2 | SFSEAPAC | 2026   ·   40 / 56</a:t>
             </a:r>
           </a:p>
         </p:txBody>
@@ -31362,7 +31367,7 @@
                 </a:solidFill>
                 <a:latin typeface="Segoe UI"/>
               </a:rPr>
-              <a:t>DCR Collaboration API v2 | SFSEAPAC | 2026   ·   41 / 51</a:t>
+              <a:t>DCR Collaboration API v2 | SFSEAPAC | 2026   ·   41 / 56</a:t>
             </a:r>
           </a:p>
         </p:txBody>
@@ -32464,7 +32469,7 @@
                 </a:solidFill>
                 <a:latin typeface="Segoe UI"/>
               </a:rPr>
-              <a:t>DCR Collaboration API v2 | SFSEAPAC | 2026   ·   42 / 51</a:t>
+              <a:t>DCR Collaboration API v2 | SFSEAPAC | 2026   ·   42 / 56</a:t>
             </a:r>
           </a:p>
         </p:txBody>
@@ -33510,7 +33515,7 @@
                 </a:solidFill>
                 <a:latin typeface="Segoe UI"/>
               </a:rPr>
-              <a:t>DCR Collaboration API v2 | SFSEAPAC | 2026   ·   43 / 51</a:t>
+              <a:t>DCR Collaboration API v2 | SFSEAPAC | 2026   ·   43 / 56</a:t>
             </a:r>
           </a:p>
         </p:txBody>
@@ -34622,7 +34627,7 @@
                 </a:solidFill>
                 <a:latin typeface="Segoe UI"/>
               </a:rPr>
-              <a:t>DCR Collaboration API v2 | SFSEAPAC | 2026   ·   44 / 51</a:t>
+              <a:t>DCR Collaboration API v2 | SFSEAPAC | 2026   ·   44 / 56</a:t>
             </a:r>
           </a:p>
         </p:txBody>
@@ -35734,7 +35739,7 @@
                 </a:solidFill>
                 <a:latin typeface="Segoe UI"/>
               </a:rPr>
-              <a:t>DCR Collaboration API v2 | SFSEAPAC | 2026   ·   45 / 51</a:t>
+              <a:t>DCR Collaboration API v2 | SFSEAPAC | 2026   ·   45 / 56</a:t>
             </a:r>
           </a:p>
         </p:txBody>
@@ -36085,7 +36090,7 @@
                 </a:solidFill>
                 <a:latin typeface="Calibri Light"/>
               </a:rPr>
-              <a:t>SUMMARY</a:t>
+              <a:t>1-PARTITION BENCHMARK (150M × 1M)</a:t>
             </a:r>
           </a:p>
         </p:txBody>
@@ -36303,21 +36308,146 @@
                 </a:solidFill>
                 <a:latin typeface="Calibri Light"/>
               </a:rPr>
-              <a:t>Production-Ready Performance</a:t>
+              <a:t>1-Partition Analysis + Activation 1007 cols (GEN2_XLARGE)</a:t>
+            </a:r>
+          </a:p>
+        </p:txBody>
+      </p:sp>
+      <p:sp>
+        <p:nvSpPr>
+          <p:cNvPr id="7" name="Rounded Rectangle 6"/>
+          <p:cNvSpPr/>
+          <p:nvPr/>
+        </p:nvSpPr>
+        <p:spPr>
+          <a:xfrm>
+            <a:off x="640080" y="1554480"/>
+            <a:ext cx="2522143" cy="4572000"/>
+          </a:xfrm>
+          <a:prstGeom prst="roundRect">
+            <a:avLst/>
+          </a:prstGeom>
+          <a:solidFill>
+            <a:srgbClr val="EEF5FA"/>
+          </a:solidFill>
+          <a:ln>
+            <a:noFill/>
+          </a:ln>
+        </p:spPr>
+        <p:style>
+          <a:lnRef idx="1">
+            <a:schemeClr val="accent1"/>
+          </a:lnRef>
+          <a:fillRef idx="3">
+            <a:schemeClr val="accent1"/>
+          </a:fillRef>
+          <a:effectRef idx="2">
+            <a:schemeClr val="accent1"/>
+          </a:effectRef>
+          <a:fontRef idx="minor">
+            <a:schemeClr val="lt1"/>
+          </a:fontRef>
+        </p:style>
+        <p:txBody>
+          <a:bodyPr rtlCol="0" anchor="ctr"/>
+          <a:lstStyle/>
+          <a:p>
+            <a:pPr algn="ctr"/>
+          </a:p>
+        </p:txBody>
+      </p:sp>
+      <p:sp>
+        <p:nvSpPr>
+          <p:cNvPr id="8" name="Rectangle 7"/>
+          <p:cNvSpPr/>
+          <p:nvPr/>
+        </p:nvSpPr>
+        <p:spPr>
+          <a:xfrm>
+            <a:off x="640080" y="1554480"/>
+            <a:ext cx="2522143" cy="54864"/>
+          </a:xfrm>
+          <a:prstGeom prst="rect">
+            <a:avLst/>
+          </a:prstGeom>
+          <a:solidFill>
+            <a:srgbClr val="29B5E8"/>
+          </a:solidFill>
+          <a:ln>
+            <a:noFill/>
+          </a:ln>
+        </p:spPr>
+        <p:style>
+          <a:lnRef idx="1">
+            <a:schemeClr val="accent1"/>
+          </a:lnRef>
+          <a:fillRef idx="3">
+            <a:schemeClr val="accent1"/>
+          </a:fillRef>
+          <a:effectRef idx="2">
+            <a:schemeClr val="accent1"/>
+          </a:effectRef>
+          <a:fontRef idx="minor">
+            <a:schemeClr val="lt1"/>
+          </a:fontRef>
+        </p:style>
+        <p:txBody>
+          <a:bodyPr rtlCol="0" anchor="ctr"/>
+          <a:lstStyle/>
+          <a:p>
+            <a:pPr algn="ctr"/>
+          </a:p>
+        </p:txBody>
+      </p:sp>
+      <p:sp>
+        <p:nvSpPr>
+          <p:cNvPr id="9" name="TextBox 8"/>
+          <p:cNvSpPr txBox="1"/>
+          <p:nvPr/>
+        </p:nvSpPr>
+        <p:spPr>
+          <a:xfrm>
+            <a:off x="822960" y="2286000"/>
+            <a:ext cx="2156383" cy="1645920"/>
+          </a:xfrm>
+          <a:prstGeom prst="rect">
+            <a:avLst/>
+          </a:prstGeom>
+          <a:noFill/>
+        </p:spPr>
+        <p:txBody>
+          <a:bodyPr wrap="square" lIns="73152" rIns="73152" tIns="36576" bIns="36576" anchor="ctr">
+            <a:spAutoFit/>
+          </a:bodyPr>
+          <a:lstStyle/>
+          <a:p>
+            <a:pPr algn="ctr">
+              <a:lnSpc>
+                <a:spcPts val="6200"/>
+              </a:lnSpc>
+            </a:pPr>
+            <a:r>
+              <a:rPr sz="4800" b="1" i="0">
+                <a:solidFill>
+                  <a:srgbClr val="29B5E8"/>
+                </a:solidFill>
+                <a:latin typeface="Calibri Light"/>
+              </a:rPr>
+              <a:t>39s</a:t>
             </a:r>
           </a:p>
         </p:txBody>
       </p:sp>
       <p:cxnSp>
         <p:nvCxnSpPr>
-          <p:cNvPr id="7" name="Connector 6"/>
+          <p:cNvPr id="10" name="Connector 9"/>
           <p:cNvCxnSpPr/>
           <p:nvPr/>
         </p:nvCxnSpPr>
         <p:spPr>
           <a:xfrm>
-            <a:off x="548640" y="1234440"/>
-            <a:ext cx="11094415" cy="0"/>
+            <a:off x="1005840" y="4114800"/>
+            <a:ext cx="1790623" cy="0"/>
           </a:xfrm>
           <a:prstGeom prst="line">
             <a:avLst/>
@@ -36345,14 +36475,53 @@
       </p:cxnSp>
       <p:sp>
         <p:nvSpPr>
-          <p:cNvPr id="8" name="Rounded Rectangle 7"/>
+          <p:cNvPr id="11" name="TextBox 10"/>
+          <p:cNvSpPr txBox="1"/>
+          <p:nvPr/>
+        </p:nvSpPr>
+        <p:spPr>
+          <a:xfrm>
+            <a:off x="822960" y="4297680"/>
+            <a:ext cx="2156383" cy="1645920"/>
+          </a:xfrm>
+          <a:prstGeom prst="rect">
+            <a:avLst/>
+          </a:prstGeom>
+          <a:noFill/>
+        </p:spPr>
+        <p:txBody>
+          <a:bodyPr wrap="square" lIns="73152" rIns="73152" tIns="36576" bIns="36576" anchor="t">
+            <a:spAutoFit/>
+          </a:bodyPr>
+          <a:lstStyle/>
+          <a:p>
+            <a:pPr algn="ctr">
+              <a:lnSpc>
+                <a:spcPts val="2100"/>
+              </a:lnSpc>
+            </a:pPr>
+            <a:r>
+              <a:rPr sz="1500" b="0" i="0">
+                <a:solidFill>
+                  <a:srgbClr val="5D6D7E"/>
+                </a:solidFill>
+                <a:latin typeface="Segoe UI"/>
+              </a:rPr>
+              <a:t>Analysis (150M × 1M overlap count) — 0.17 credits</a:t>
+            </a:r>
+          </a:p>
+        </p:txBody>
+      </p:sp>
+      <p:sp>
+        <p:nvSpPr>
+          <p:cNvPr id="12" name="Rounded Rectangle 11"/>
           <p:cNvSpPr/>
           <p:nvPr/>
         </p:nvSpPr>
         <p:spPr>
           <a:xfrm>
-            <a:off x="640080" y="1554480"/>
-            <a:ext cx="10911535" cy="804672"/>
+            <a:off x="3436543" y="1554480"/>
+            <a:ext cx="2522143" cy="4572000"/>
           </a:xfrm>
           <a:prstGeom prst="roundRect">
             <a:avLst/>
@@ -36388,20 +36557,20 @@
       </p:sp>
       <p:sp>
         <p:nvSpPr>
-          <p:cNvPr id="9" name="Oval 8"/>
+          <p:cNvPr id="13" name="Rectangle 12"/>
           <p:cNvSpPr/>
           <p:nvPr/>
         </p:nvSpPr>
         <p:spPr>
           <a:xfrm>
-            <a:off x="914400" y="1691640"/>
-            <a:ext cx="411480" cy="411480"/>
-          </a:xfrm>
-          <a:prstGeom prst="ellipse">
-            <a:avLst/>
-          </a:prstGeom>
-          <a:solidFill>
-            <a:srgbClr val="29B5E8"/>
+            <a:off x="3436543" y="1554480"/>
+            <a:ext cx="2522143" cy="54864"/>
+          </a:xfrm>
+          <a:prstGeom prst="rect">
+            <a:avLst/>
+          </a:prstGeom>
+          <a:solidFill>
+            <a:srgbClr val="11567F"/>
           </a:solidFill>
           <a:ln>
             <a:noFill/>
@@ -36431,14 +36600,14 @@
       </p:sp>
       <p:sp>
         <p:nvSpPr>
-          <p:cNvPr id="10" name="TextBox 9"/>
+          <p:cNvPr id="14" name="TextBox 13"/>
           <p:cNvSpPr txBox="1"/>
           <p:nvPr/>
         </p:nvSpPr>
         <p:spPr>
           <a:xfrm>
-            <a:off x="914400" y="1691640"/>
-            <a:ext cx="411480" cy="411480"/>
+            <a:off x="3619423" y="2286000"/>
+            <a:ext cx="2156383" cy="1645920"/>
           </a:xfrm>
           <a:prstGeom prst="rect">
             <a:avLst/>
@@ -36453,31 +36622,191 @@
           <a:p>
             <a:pPr algn="ctr">
               <a:lnSpc>
-                <a:spcPts val="1600"/>
-              </a:lnSpc>
-            </a:pPr>
-            <a:r>
-              <a:rPr sz="1300" b="1" i="0">
-                <a:solidFill>
-                  <a:srgbClr val="FFFFFF"/>
-                </a:solidFill>
-                <a:latin typeface="Segoe UI"/>
-              </a:rPr>
-              <a:t>01</a:t>
-            </a:r>
-          </a:p>
-        </p:txBody>
-      </p:sp>
-      <p:sp>
-        <p:nvSpPr>
-          <p:cNvPr id="11" name="TextBox 10"/>
+                <a:spcPts val="6200"/>
+              </a:lnSpc>
+            </a:pPr>
+            <a:r>
+              <a:rPr sz="4800" b="1" i="0">
+                <a:solidFill>
+                  <a:srgbClr val="11567F"/>
+                </a:solidFill>
+                <a:latin typeface="Calibri Light"/>
+              </a:rPr>
+              <a:t>71m</a:t>
+            </a:r>
+          </a:p>
+        </p:txBody>
+      </p:sp>
+      <p:cxnSp>
+        <p:nvCxnSpPr>
+          <p:cNvPr id="15" name="Connector 14"/>
+          <p:cNvCxnSpPr/>
+          <p:nvPr/>
+        </p:nvCxnSpPr>
+        <p:spPr>
+          <a:xfrm>
+            <a:off x="3802303" y="4114800"/>
+            <a:ext cx="1790623" cy="0"/>
+          </a:xfrm>
+          <a:prstGeom prst="line">
+            <a:avLst/>
+          </a:prstGeom>
+          <a:ln w="12700">
+            <a:solidFill>
+              <a:srgbClr val="DEE3EA"/>
+            </a:solidFill>
+          </a:ln>
+        </p:spPr>
+        <p:style>
+          <a:lnRef idx="2">
+            <a:schemeClr val="accent1"/>
+          </a:lnRef>
+          <a:fillRef idx="0">
+            <a:schemeClr val="accent1"/>
+          </a:fillRef>
+          <a:effectRef idx="1">
+            <a:schemeClr val="accent1"/>
+          </a:effectRef>
+          <a:fontRef idx="minor">
+            <a:schemeClr val="tx1"/>
+          </a:fontRef>
+        </p:style>
+      </p:cxnSp>
+      <p:sp>
+        <p:nvSpPr>
+          <p:cNvPr id="16" name="TextBox 15"/>
           <p:cNvSpPr txBox="1"/>
           <p:nvPr/>
         </p:nvSpPr>
         <p:spPr>
           <a:xfrm>
-            <a:off x="1554480" y="1627632"/>
-            <a:ext cx="9601200" cy="768096"/>
+            <a:off x="3619423" y="4297680"/>
+            <a:ext cx="2156383" cy="1645920"/>
+          </a:xfrm>
+          <a:prstGeom prst="rect">
+            <a:avLst/>
+          </a:prstGeom>
+          <a:noFill/>
+        </p:spPr>
+        <p:txBody>
+          <a:bodyPr wrap="square" lIns="73152" rIns="73152" tIns="36576" bIns="36576" anchor="t">
+            <a:spAutoFit/>
+          </a:bodyPr>
+          <a:lstStyle/>
+          <a:p>
+            <a:pPr algn="ctr">
+              <a:lnSpc>
+                <a:spcPts val="2100"/>
+              </a:lnSpc>
+            </a:pPr>
+            <a:r>
+              <a:rPr sz="1500" b="0" i="0">
+                <a:solidFill>
+                  <a:srgbClr val="5D6D7E"/>
+                </a:solidFill>
+                <a:latin typeface="Segoe UI"/>
+              </a:rPr>
+              <a:t>Activation 1007 cols (700k rows × 1007 keys) — 19.04 credits</a:t>
+            </a:r>
+          </a:p>
+        </p:txBody>
+      </p:sp>
+      <p:sp>
+        <p:nvSpPr>
+          <p:cNvPr id="17" name="Rounded Rectangle 16"/>
+          <p:cNvSpPr/>
+          <p:nvPr/>
+        </p:nvSpPr>
+        <p:spPr>
+          <a:xfrm>
+            <a:off x="6233006" y="1554480"/>
+            <a:ext cx="2522143" cy="4572000"/>
+          </a:xfrm>
+          <a:prstGeom prst="roundRect">
+            <a:avLst/>
+          </a:prstGeom>
+          <a:solidFill>
+            <a:srgbClr val="EEF5FA"/>
+          </a:solidFill>
+          <a:ln>
+            <a:noFill/>
+          </a:ln>
+        </p:spPr>
+        <p:style>
+          <a:lnRef idx="1">
+            <a:schemeClr val="accent1"/>
+          </a:lnRef>
+          <a:fillRef idx="3">
+            <a:schemeClr val="accent1"/>
+          </a:fillRef>
+          <a:effectRef idx="2">
+            <a:schemeClr val="accent1"/>
+          </a:effectRef>
+          <a:fontRef idx="minor">
+            <a:schemeClr val="lt1"/>
+          </a:fontRef>
+        </p:style>
+        <p:txBody>
+          <a:bodyPr rtlCol="0" anchor="ctr"/>
+          <a:lstStyle/>
+          <a:p>
+            <a:pPr algn="ctr"/>
+          </a:p>
+        </p:txBody>
+      </p:sp>
+      <p:sp>
+        <p:nvSpPr>
+          <p:cNvPr id="18" name="Rectangle 17"/>
+          <p:cNvSpPr/>
+          <p:nvPr/>
+        </p:nvSpPr>
+        <p:spPr>
+          <a:xfrm>
+            <a:off x="6233006" y="1554480"/>
+            <a:ext cx="2522143" cy="54864"/>
+          </a:xfrm>
+          <a:prstGeom prst="rect">
+            <a:avLst/>
+          </a:prstGeom>
+          <a:solidFill>
+            <a:srgbClr val="71D3DC"/>
+          </a:solidFill>
+          <a:ln>
+            <a:noFill/>
+          </a:ln>
+        </p:spPr>
+        <p:style>
+          <a:lnRef idx="1">
+            <a:schemeClr val="accent1"/>
+          </a:lnRef>
+          <a:fillRef idx="3">
+            <a:schemeClr val="accent1"/>
+          </a:fillRef>
+          <a:effectRef idx="2">
+            <a:schemeClr val="accent1"/>
+          </a:effectRef>
+          <a:fontRef idx="minor">
+            <a:schemeClr val="lt1"/>
+          </a:fontRef>
+        </p:style>
+        <p:txBody>
+          <a:bodyPr rtlCol="0" anchor="ctr"/>
+          <a:lstStyle/>
+          <a:p>
+            <a:pPr algn="ctr"/>
+          </a:p>
+        </p:txBody>
+      </p:sp>
+      <p:sp>
+        <p:nvSpPr>
+          <p:cNvPr id="19" name="TextBox 18"/>
+          <p:cNvSpPr txBox="1"/>
+          <p:nvPr/>
+        </p:nvSpPr>
+        <p:spPr>
+          <a:xfrm>
+            <a:off x="6415886" y="2286000"/>
+            <a:ext cx="2156383" cy="1645920"/>
           </a:xfrm>
           <a:prstGeom prst="rect">
             <a:avLst/>
@@ -36490,39 +36819,113 @@
           </a:bodyPr>
           <a:lstStyle/>
           <a:p>
-            <a:pPr algn="l">
-              <a:lnSpc>
-                <a:spcPts val="2000"/>
-              </a:lnSpc>
-            </a:pPr>
-            <a:r>
-              <a:rPr sz="1600" b="0" i="0">
-                <a:solidFill>
-                  <a:srgbClr val="2C3E50"/>
-                </a:solidFill>
-                <a:latin typeface="Segoe UI"/>
-              </a:rPr>
-              <a:t>Proven at scale — 1.2B rows × 1001 kolom full-scan dalam 2 menit 16 detik via single-query</a:t>
-            </a:r>
-          </a:p>
-        </p:txBody>
-      </p:sp>
-      <p:sp>
-        <p:nvSpPr>
-          <p:cNvPr id="12" name="Rounded Rectangle 11"/>
+            <a:pPr algn="ctr">
+              <a:lnSpc>
+                <a:spcPts val="6200"/>
+              </a:lnSpc>
+            </a:pPr>
+            <a:r>
+              <a:rPr sz="4800" b="1" i="0">
+                <a:solidFill>
+                  <a:srgbClr val="71D3DC"/>
+                </a:solidFill>
+                <a:latin typeface="Calibri Light"/>
+              </a:rPr>
+              <a:t>71m</a:t>
+            </a:r>
+          </a:p>
+        </p:txBody>
+      </p:sp>
+      <p:cxnSp>
+        <p:nvCxnSpPr>
+          <p:cNvPr id="20" name="Connector 19"/>
+          <p:cNvCxnSpPr/>
+          <p:nvPr/>
+        </p:nvCxnSpPr>
+        <p:spPr>
+          <a:xfrm>
+            <a:off x="6598766" y="4114800"/>
+            <a:ext cx="1790623" cy="0"/>
+          </a:xfrm>
+          <a:prstGeom prst="line">
+            <a:avLst/>
+          </a:prstGeom>
+          <a:ln w="12700">
+            <a:solidFill>
+              <a:srgbClr val="DEE3EA"/>
+            </a:solidFill>
+          </a:ln>
+        </p:spPr>
+        <p:style>
+          <a:lnRef idx="2">
+            <a:schemeClr val="accent1"/>
+          </a:lnRef>
+          <a:fillRef idx="0">
+            <a:schemeClr val="accent1"/>
+          </a:fillRef>
+          <a:effectRef idx="1">
+            <a:schemeClr val="accent1"/>
+          </a:effectRef>
+          <a:fontRef idx="minor">
+            <a:schemeClr val="tx1"/>
+          </a:fontRef>
+        </p:style>
+      </p:cxnSp>
+      <p:sp>
+        <p:nvSpPr>
+          <p:cNvPr id="21" name="TextBox 20"/>
+          <p:cNvSpPr txBox="1"/>
+          <p:nvPr/>
+        </p:nvSpPr>
+        <p:spPr>
+          <a:xfrm>
+            <a:off x="6415886" y="4297680"/>
+            <a:ext cx="2156383" cy="1645920"/>
+          </a:xfrm>
+          <a:prstGeom prst="rect">
+            <a:avLst/>
+          </a:prstGeom>
+          <a:noFill/>
+        </p:spPr>
+        <p:txBody>
+          <a:bodyPr wrap="square" lIns="73152" rIns="73152" tIns="36576" bIns="36576" anchor="t">
+            <a:spAutoFit/>
+          </a:bodyPr>
+          <a:lstStyle/>
+          <a:p>
+            <a:pPr algn="ctr">
+              <a:lnSpc>
+                <a:spcPts val="2100"/>
+              </a:lnSpc>
+            </a:pPr>
+            <a:r>
+              <a:rPr sz="1500" b="0" i="0">
+                <a:solidFill>
+                  <a:srgbClr val="5D6D7E"/>
+                </a:solidFill>
+                <a:latin typeface="Segoe UI"/>
+              </a:rPr>
+              <a:t>23s Total end-to-end — 19.04 credits ($74.3)</a:t>
+            </a:r>
+          </a:p>
+        </p:txBody>
+      </p:sp>
+      <p:sp>
+        <p:nvSpPr>
+          <p:cNvPr id="22" name="Rounded Rectangle 21"/>
           <p:cNvSpPr/>
           <p:nvPr/>
         </p:nvSpPr>
         <p:spPr>
           <a:xfrm>
-            <a:off x="640080" y="2468880"/>
-            <a:ext cx="10911535" cy="804672"/>
+            <a:off x="9029469" y="1554480"/>
+            <a:ext cx="2522143" cy="4572000"/>
           </a:xfrm>
           <a:prstGeom prst="roundRect">
             <a:avLst/>
           </a:prstGeom>
           <a:solidFill>
-            <a:srgbClr val="F4F8FB"/>
+            <a:srgbClr val="EEF5FA"/>
           </a:solidFill>
           <a:ln>
             <a:noFill/>
@@ -36552,20 +36955,20 @@
       </p:sp>
       <p:sp>
         <p:nvSpPr>
-          <p:cNvPr id="13" name="Oval 12"/>
+          <p:cNvPr id="23" name="Rectangle 22"/>
           <p:cNvSpPr/>
           <p:nvPr/>
         </p:nvSpPr>
         <p:spPr>
           <a:xfrm>
-            <a:off x="914400" y="2606040"/>
-            <a:ext cx="411480" cy="411480"/>
-          </a:xfrm>
-          <a:prstGeom prst="ellipse">
-            <a:avLst/>
-          </a:prstGeom>
-          <a:solidFill>
-            <a:srgbClr val="11567F"/>
+            <a:off x="9029469" y="1554480"/>
+            <a:ext cx="2522143" cy="54864"/>
+          </a:xfrm>
+          <a:prstGeom prst="rect">
+            <a:avLst/>
+          </a:prstGeom>
+          <a:solidFill>
+            <a:srgbClr val="FF9F36"/>
           </a:solidFill>
           <a:ln>
             <a:noFill/>
@@ -36595,14 +36998,14 @@
       </p:sp>
       <p:sp>
         <p:nvSpPr>
-          <p:cNvPr id="14" name="TextBox 13"/>
+          <p:cNvPr id="24" name="TextBox 23"/>
           <p:cNvSpPr txBox="1"/>
           <p:nvPr/>
         </p:nvSpPr>
         <p:spPr>
           <a:xfrm>
-            <a:off x="914400" y="2606040"/>
-            <a:ext cx="411480" cy="411480"/>
+            <a:off x="9212349" y="2286000"/>
+            <a:ext cx="2156383" cy="1645920"/>
           </a:xfrm>
           <a:prstGeom prst="rect">
             <a:avLst/>
@@ -36617,474 +37020,56 @@
           <a:p>
             <a:pPr algn="ctr">
               <a:lnSpc>
-                <a:spcPts val="1600"/>
-              </a:lnSpc>
-            </a:pPr>
-            <a:r>
-              <a:rPr sz="1300" b="1" i="0">
-                <a:solidFill>
-                  <a:srgbClr val="FFFFFF"/>
-                </a:solidFill>
-                <a:latin typeface="Segoe UI"/>
-              </a:rPr>
-              <a:t>02</a:t>
-            </a:r>
-          </a:p>
-        </p:txBody>
-      </p:sp>
-      <p:sp>
-        <p:nvSpPr>
-          <p:cNvPr id="15" name="TextBox 14"/>
-          <p:cNvSpPr txBox="1"/>
-          <p:nvPr/>
-        </p:nvSpPr>
-        <p:spPr>
-          <a:xfrm>
-            <a:off x="1554480" y="2542032"/>
-            <a:ext cx="9601200" cy="768096"/>
-          </a:xfrm>
-          <a:prstGeom prst="rect">
-            <a:avLst/>
-          </a:prstGeom>
-          <a:noFill/>
-        </p:spPr>
-        <p:txBody>
-          <a:bodyPr wrap="square" lIns="73152" rIns="73152" tIns="36576" bIns="36576" anchor="ctr">
-            <a:spAutoFit/>
-          </a:bodyPr>
-          <a:lstStyle/>
-          <a:p>
-            <a:pPr algn="l">
-              <a:lnSpc>
-                <a:spcPts val="2000"/>
-              </a:lnSpc>
-            </a:pPr>
-            <a:r>
-              <a:rPr sz="1600" b="0" i="0">
-                <a:solidFill>
-                  <a:srgbClr val="2C3E50"/>
-                </a:solidFill>
-                <a:latin typeface="Segoe UI"/>
-              </a:rPr>
-              <a:t>5× faster than per-partition loop — 1 RUN call menggantikan 8 sequential calls</a:t>
-            </a:r>
-          </a:p>
-        </p:txBody>
-      </p:sp>
-      <p:sp>
-        <p:nvSpPr>
-          <p:cNvPr id="16" name="Rounded Rectangle 15"/>
-          <p:cNvSpPr/>
-          <p:nvPr/>
-        </p:nvSpPr>
-        <p:spPr>
-          <a:xfrm>
-            <a:off x="640080" y="3383280"/>
-            <a:ext cx="10911535" cy="804672"/>
-          </a:xfrm>
-          <a:prstGeom prst="roundRect">
-            <a:avLst/>
-          </a:prstGeom>
-          <a:solidFill>
-            <a:srgbClr val="EEF5FA"/>
-          </a:solidFill>
-          <a:ln>
-            <a:noFill/>
-          </a:ln>
-        </p:spPr>
-        <p:style>
-          <a:lnRef idx="1">
-            <a:schemeClr val="accent1"/>
-          </a:lnRef>
-          <a:fillRef idx="3">
-            <a:schemeClr val="accent1"/>
-          </a:fillRef>
-          <a:effectRef idx="2">
-            <a:schemeClr val="accent1"/>
-          </a:effectRef>
-          <a:fontRef idx="minor">
-            <a:schemeClr val="lt1"/>
-          </a:fontRef>
-        </p:style>
-        <p:txBody>
-          <a:bodyPr rtlCol="0" anchor="ctr"/>
-          <a:lstStyle/>
-          <a:p>
-            <a:pPr algn="ctr"/>
-          </a:p>
-        </p:txBody>
-      </p:sp>
-      <p:sp>
-        <p:nvSpPr>
-          <p:cNvPr id="17" name="Oval 16"/>
-          <p:cNvSpPr/>
-          <p:nvPr/>
-        </p:nvSpPr>
-        <p:spPr>
-          <a:xfrm>
-            <a:off x="914400" y="3520440"/>
-            <a:ext cx="411480" cy="411480"/>
-          </a:xfrm>
-          <a:prstGeom prst="ellipse">
-            <a:avLst/>
-          </a:prstGeom>
-          <a:solidFill>
-            <a:srgbClr val="71D3DC"/>
-          </a:solidFill>
-          <a:ln>
-            <a:noFill/>
-          </a:ln>
-        </p:spPr>
-        <p:style>
-          <a:lnRef idx="1">
-            <a:schemeClr val="accent1"/>
-          </a:lnRef>
-          <a:fillRef idx="3">
-            <a:schemeClr val="accent1"/>
-          </a:fillRef>
-          <a:effectRef idx="2">
-            <a:schemeClr val="accent1"/>
-          </a:effectRef>
-          <a:fontRef idx="minor">
-            <a:schemeClr val="lt1"/>
-          </a:fontRef>
-        </p:style>
-        <p:txBody>
-          <a:bodyPr rtlCol="0" anchor="ctr"/>
-          <a:lstStyle/>
-          <a:p>
-            <a:pPr algn="ctr"/>
-          </a:p>
-        </p:txBody>
-      </p:sp>
-      <p:sp>
-        <p:nvSpPr>
-          <p:cNvPr id="18" name="TextBox 17"/>
-          <p:cNvSpPr txBox="1"/>
-          <p:nvPr/>
-        </p:nvSpPr>
-        <p:spPr>
-          <a:xfrm>
-            <a:off x="914400" y="3520440"/>
-            <a:ext cx="411480" cy="411480"/>
-          </a:xfrm>
-          <a:prstGeom prst="rect">
-            <a:avLst/>
-          </a:prstGeom>
-          <a:noFill/>
-        </p:spPr>
-        <p:txBody>
-          <a:bodyPr wrap="square" lIns="73152" rIns="73152" tIns="36576" bIns="36576" anchor="ctr">
-            <a:spAutoFit/>
-          </a:bodyPr>
-          <a:lstStyle/>
-          <a:p>
-            <a:pPr algn="ctr">
-              <a:lnSpc>
-                <a:spcPts val="1600"/>
-              </a:lnSpc>
-            </a:pPr>
-            <a:r>
-              <a:rPr sz="1300" b="1" i="0">
-                <a:solidFill>
-                  <a:srgbClr val="FFFFFF"/>
-                </a:solidFill>
-                <a:latin typeface="Segoe UI"/>
-              </a:rPr>
-              <a:t>03</a:t>
-            </a:r>
-          </a:p>
-        </p:txBody>
-      </p:sp>
-      <p:sp>
-        <p:nvSpPr>
-          <p:cNvPr id="19" name="TextBox 18"/>
-          <p:cNvSpPr txBox="1"/>
-          <p:nvPr/>
-        </p:nvSpPr>
-        <p:spPr>
-          <a:xfrm>
-            <a:off x="1554480" y="3456432"/>
-            <a:ext cx="9601200" cy="768096"/>
-          </a:xfrm>
-          <a:prstGeom prst="rect">
-            <a:avLst/>
-          </a:prstGeom>
-          <a:noFill/>
-        </p:spPr>
-        <p:txBody>
-          <a:bodyPr wrap="square" lIns="73152" rIns="73152" tIns="36576" bIns="36576" anchor="ctr">
-            <a:spAutoFit/>
-          </a:bodyPr>
-          <a:lstStyle/>
-          <a:p>
-            <a:pPr algn="l">
-              <a:lnSpc>
-                <a:spcPts val="2000"/>
-              </a:lnSpc>
-            </a:pPr>
-            <a:r>
-              <a:rPr sz="1600" b="0" i="0">
-                <a:solidFill>
-                  <a:srgbClr val="2C3E50"/>
-                </a:solidFill>
-                <a:latin typeface="Segoe UI"/>
-              </a:rPr>
-              <a:t>80% compute cost savings — 0.61 credits vs 3.02 credits per run @ GEN2_XLARGE</a:t>
-            </a:r>
-          </a:p>
-        </p:txBody>
-      </p:sp>
-      <p:sp>
-        <p:nvSpPr>
-          <p:cNvPr id="20" name="Rounded Rectangle 19"/>
-          <p:cNvSpPr/>
-          <p:nvPr/>
-        </p:nvSpPr>
-        <p:spPr>
-          <a:xfrm>
-            <a:off x="640080" y="4297680"/>
-            <a:ext cx="10911535" cy="804672"/>
-          </a:xfrm>
-          <a:prstGeom prst="roundRect">
-            <a:avLst/>
-          </a:prstGeom>
-          <a:solidFill>
-            <a:srgbClr val="F4F8FB"/>
-          </a:solidFill>
-          <a:ln>
-            <a:noFill/>
-          </a:ln>
-        </p:spPr>
-        <p:style>
-          <a:lnRef idx="1">
-            <a:schemeClr val="accent1"/>
-          </a:lnRef>
-          <a:fillRef idx="3">
-            <a:schemeClr val="accent1"/>
-          </a:fillRef>
-          <a:effectRef idx="2">
-            <a:schemeClr val="accent1"/>
-          </a:effectRef>
-          <a:fontRef idx="minor">
-            <a:schemeClr val="lt1"/>
-          </a:fontRef>
-        </p:style>
-        <p:txBody>
-          <a:bodyPr rtlCol="0" anchor="ctr"/>
-          <a:lstStyle/>
-          <a:p>
-            <a:pPr algn="ctr"/>
-          </a:p>
-        </p:txBody>
-      </p:sp>
-      <p:sp>
-        <p:nvSpPr>
-          <p:cNvPr id="21" name="Oval 20"/>
-          <p:cNvSpPr/>
-          <p:nvPr/>
-        </p:nvSpPr>
-        <p:spPr>
-          <a:xfrm>
-            <a:off x="914400" y="4434840"/>
-            <a:ext cx="411480" cy="411480"/>
-          </a:xfrm>
-          <a:prstGeom prst="ellipse">
-            <a:avLst/>
-          </a:prstGeom>
-          <a:solidFill>
-            <a:srgbClr val="FF9F36"/>
-          </a:solidFill>
-          <a:ln>
-            <a:noFill/>
-          </a:ln>
-        </p:spPr>
-        <p:style>
-          <a:lnRef idx="1">
-            <a:schemeClr val="accent1"/>
-          </a:lnRef>
-          <a:fillRef idx="3">
-            <a:schemeClr val="accent1"/>
-          </a:fillRef>
-          <a:effectRef idx="2">
-            <a:schemeClr val="accent1"/>
-          </a:effectRef>
-          <a:fontRef idx="minor">
-            <a:schemeClr val="lt1"/>
-          </a:fontRef>
-        </p:style>
-        <p:txBody>
-          <a:bodyPr rtlCol="0" anchor="ctr"/>
-          <a:lstStyle/>
-          <a:p>
-            <a:pPr algn="ctr"/>
-          </a:p>
-        </p:txBody>
-      </p:sp>
-      <p:sp>
-        <p:nvSpPr>
-          <p:cNvPr id="22" name="TextBox 21"/>
-          <p:cNvSpPr txBox="1"/>
-          <p:nvPr/>
-        </p:nvSpPr>
-        <p:spPr>
-          <a:xfrm>
-            <a:off x="914400" y="4434840"/>
-            <a:ext cx="411480" cy="411480"/>
-          </a:xfrm>
-          <a:prstGeom prst="rect">
-            <a:avLst/>
-          </a:prstGeom>
-          <a:noFill/>
-        </p:spPr>
-        <p:txBody>
-          <a:bodyPr wrap="square" lIns="73152" rIns="73152" tIns="36576" bIns="36576" anchor="ctr">
-            <a:spAutoFit/>
-          </a:bodyPr>
-          <a:lstStyle/>
-          <a:p>
-            <a:pPr algn="ctr">
-              <a:lnSpc>
-                <a:spcPts val="1600"/>
-              </a:lnSpc>
-            </a:pPr>
-            <a:r>
-              <a:rPr sz="1300" b="1" i="0">
-                <a:solidFill>
-                  <a:srgbClr val="FFFFFF"/>
-                </a:solidFill>
-                <a:latin typeface="Segoe UI"/>
-              </a:rPr>
-              <a:t>04</a:t>
-            </a:r>
-          </a:p>
-        </p:txBody>
-      </p:sp>
-      <p:sp>
-        <p:nvSpPr>
-          <p:cNvPr id="23" name="TextBox 22"/>
-          <p:cNvSpPr txBox="1"/>
-          <p:nvPr/>
-        </p:nvSpPr>
-        <p:spPr>
-          <a:xfrm>
-            <a:off x="1554480" y="4370832"/>
-            <a:ext cx="9601200" cy="768096"/>
-          </a:xfrm>
-          <a:prstGeom prst="rect">
-            <a:avLst/>
-          </a:prstGeom>
-          <a:noFill/>
-        </p:spPr>
-        <p:txBody>
-          <a:bodyPr wrap="square" lIns="73152" rIns="73152" tIns="36576" bIns="36576" anchor="ctr">
-            <a:spAutoFit/>
-          </a:bodyPr>
-          <a:lstStyle/>
-          <a:p>
-            <a:pPr algn="l">
-              <a:lnSpc>
-                <a:spcPts val="2000"/>
-              </a:lnSpc>
-            </a:pPr>
-            <a:r>
-              <a:rPr sz="1600" b="0" i="0">
-                <a:solidFill>
-                  <a:srgbClr val="2C3E50"/>
-                </a:solidFill>
-                <a:latin typeface="Segoe UI"/>
-              </a:rPr>
-              <a:t>3.37M unique audience tuples exported secara secure tanpa data movement</a:t>
-            </a:r>
-          </a:p>
-        </p:txBody>
-      </p:sp>
-      <p:sp>
-        <p:nvSpPr>
-          <p:cNvPr id="24" name="Rounded Rectangle 23"/>
-          <p:cNvSpPr/>
-          <p:nvPr/>
-        </p:nvSpPr>
-        <p:spPr>
-          <a:xfrm>
-            <a:off x="640080" y="5212080"/>
-            <a:ext cx="10911535" cy="804672"/>
-          </a:xfrm>
-          <a:prstGeom prst="roundRect">
-            <a:avLst/>
-          </a:prstGeom>
-          <a:solidFill>
-            <a:srgbClr val="EEF5FA"/>
-          </a:solidFill>
-          <a:ln>
-            <a:noFill/>
-          </a:ln>
-        </p:spPr>
-        <p:style>
-          <a:lnRef idx="1">
-            <a:schemeClr val="accent1"/>
-          </a:lnRef>
-          <a:fillRef idx="3">
-            <a:schemeClr val="accent1"/>
-          </a:fillRef>
-          <a:effectRef idx="2">
-            <a:schemeClr val="accent1"/>
-          </a:effectRef>
-          <a:fontRef idx="minor">
-            <a:schemeClr val="lt1"/>
-          </a:fontRef>
-        </p:style>
-        <p:txBody>
-          <a:bodyPr rtlCol="0" anchor="ctr"/>
-          <a:lstStyle/>
-          <a:p>
-            <a:pPr algn="ctr"/>
-          </a:p>
-        </p:txBody>
-      </p:sp>
-      <p:sp>
-        <p:nvSpPr>
-          <p:cNvPr id="25" name="Oval 24"/>
-          <p:cNvSpPr/>
-          <p:nvPr/>
-        </p:nvSpPr>
-        <p:spPr>
-          <a:xfrm>
-            <a:off x="914400" y="5349240"/>
-            <a:ext cx="411480" cy="411480"/>
-          </a:xfrm>
-          <a:prstGeom prst="ellipse">
-            <a:avLst/>
-          </a:prstGeom>
-          <a:solidFill>
-            <a:srgbClr val="29B5E8"/>
-          </a:solidFill>
-          <a:ln>
-            <a:noFill/>
-          </a:ln>
-        </p:spPr>
-        <p:style>
-          <a:lnRef idx="1">
-            <a:schemeClr val="accent1"/>
-          </a:lnRef>
-          <a:fillRef idx="3">
-            <a:schemeClr val="accent1"/>
-          </a:fillRef>
-          <a:effectRef idx="2">
-            <a:schemeClr val="accent1"/>
-          </a:effectRef>
-          <a:fontRef idx="minor">
-            <a:schemeClr val="lt1"/>
-          </a:fontRef>
-        </p:style>
-        <p:txBody>
-          <a:bodyPr rtlCol="0" anchor="ctr"/>
-          <a:lstStyle/>
-          <a:p>
-            <a:pPr algn="ctr"/>
-          </a:p>
-        </p:txBody>
-      </p:sp>
+                <a:spcPts val="6200"/>
+              </a:lnSpc>
+            </a:pPr>
+            <a:r>
+              <a:rPr sz="4800" b="1" i="0">
+                <a:solidFill>
+                  <a:srgbClr val="FF9F36"/>
+                </a:solidFill>
+                <a:latin typeface="Calibri Light"/>
+              </a:rPr>
+              <a:t>700k</a:t>
+            </a:r>
+          </a:p>
+        </p:txBody>
+      </p:sp>
+      <p:cxnSp>
+        <p:nvCxnSpPr>
+          <p:cNvPr id="25" name="Connector 24"/>
+          <p:cNvCxnSpPr/>
+          <p:nvPr/>
+        </p:nvCxnSpPr>
+        <p:spPr>
+          <a:xfrm>
+            <a:off x="9395229" y="4114800"/>
+            <a:ext cx="1790623" cy="0"/>
+          </a:xfrm>
+          <a:prstGeom prst="line">
+            <a:avLst/>
+          </a:prstGeom>
+          <a:ln w="12700">
+            <a:solidFill>
+              <a:srgbClr val="DEE3EA"/>
+            </a:solidFill>
+          </a:ln>
+        </p:spPr>
+        <p:style>
+          <a:lnRef idx="2">
+            <a:schemeClr val="accent1"/>
+          </a:lnRef>
+          <a:fillRef idx="0">
+            <a:schemeClr val="accent1"/>
+          </a:fillRef>
+          <a:effectRef idx="1">
+            <a:schemeClr val="accent1"/>
+          </a:effectRef>
+          <a:fontRef idx="minor">
+            <a:schemeClr val="tx1"/>
+          </a:fontRef>
+        </p:style>
+      </p:cxnSp>
       <p:sp>
         <p:nvSpPr>
           <p:cNvPr id="26" name="TextBox 25"/>
@@ -37093,86 +37078,8 @@
         </p:nvSpPr>
         <p:spPr>
           <a:xfrm>
-            <a:off x="914400" y="5349240"/>
-            <a:ext cx="411480" cy="411480"/>
-          </a:xfrm>
-          <a:prstGeom prst="rect">
-            <a:avLst/>
-          </a:prstGeom>
-          <a:noFill/>
-        </p:spPr>
-        <p:txBody>
-          <a:bodyPr wrap="square" lIns="73152" rIns="73152" tIns="36576" bIns="36576" anchor="ctr">
-            <a:spAutoFit/>
-          </a:bodyPr>
-          <a:lstStyle/>
-          <a:p>
-            <a:pPr algn="ctr">
-              <a:lnSpc>
-                <a:spcPts val="1600"/>
-              </a:lnSpc>
-            </a:pPr>
-            <a:r>
-              <a:rPr sz="1300" b="1" i="0">
-                <a:solidFill>
-                  <a:srgbClr val="FFFFFF"/>
-                </a:solidFill>
-                <a:latin typeface="Segoe UI"/>
-              </a:rPr>
-              <a:t>05</a:t>
-            </a:r>
-          </a:p>
-        </p:txBody>
-      </p:sp>
-      <p:sp>
-        <p:nvSpPr>
-          <p:cNvPr id="27" name="TextBox 26"/>
-          <p:cNvSpPr txBox="1"/>
-          <p:nvPr/>
-        </p:nvSpPr>
-        <p:spPr>
-          <a:xfrm>
-            <a:off x="1554480" y="5285232"/>
-            <a:ext cx="9601200" cy="768096"/>
-          </a:xfrm>
-          <a:prstGeom prst="rect">
-            <a:avLst/>
-          </a:prstGeom>
-          <a:noFill/>
-        </p:spPr>
-        <p:txBody>
-          <a:bodyPr wrap="square" lIns="73152" rIns="73152" tIns="36576" bIns="36576" anchor="ctr">
-            <a:spAutoFit/>
-          </a:bodyPr>
-          <a:lstStyle/>
-          <a:p>
-            <a:pPr algn="l">
-              <a:lnSpc>
-                <a:spcPts val="2000"/>
-              </a:lnSpc>
-            </a:pPr>
-            <a:r>
-              <a:rPr sz="1600" b="0" i="0">
-                <a:solidFill>
-                  <a:srgbClr val="2C3E50"/>
-                </a:solidFill>
-                <a:latin typeface="Segoe UI"/>
-              </a:rPr>
-              <a:t>Privacy-preserving by design — UU PDP &amp; POJK compliant dengan full audit trail</a:t>
-            </a:r>
-          </a:p>
-        </p:txBody>
-      </p:sp>
-      <p:sp>
-        <p:nvSpPr>
-          <p:cNvPr id="28" name="TextBox 27"/>
-          <p:cNvSpPr txBox="1"/>
-          <p:nvPr/>
-        </p:nvSpPr>
-        <p:spPr>
-          <a:xfrm>
-            <a:off x="548640" y="6446520"/>
-            <a:ext cx="9144000" cy="274320"/>
+            <a:off x="9212349" y="4297680"/>
+            <a:ext cx="2156383" cy="1645920"/>
           </a:xfrm>
           <a:prstGeom prst="rect">
             <a:avLst/>
@@ -37185,6 +37092,45 @@
           </a:bodyPr>
           <a:lstStyle/>
           <a:p>
+            <a:pPr algn="ctr">
+              <a:lnSpc>
+                <a:spcPts val="2100"/>
+              </a:lnSpc>
+            </a:pPr>
+            <a:r>
+              <a:rPr sz="1500" b="0" i="0">
+                <a:solidFill>
+                  <a:srgbClr val="5D6D7E"/>
+                </a:solidFill>
+                <a:latin typeface="Segoe UI"/>
+              </a:rPr>
+              <a:t>Matched records exported</a:t>
+            </a:r>
+          </a:p>
+        </p:txBody>
+      </p:sp>
+      <p:sp>
+        <p:nvSpPr>
+          <p:cNvPr id="27" name="TextBox 26"/>
+          <p:cNvSpPr txBox="1"/>
+          <p:nvPr/>
+        </p:nvSpPr>
+        <p:spPr>
+          <a:xfrm>
+            <a:off x="548640" y="6446520"/>
+            <a:ext cx="9144000" cy="274320"/>
+          </a:xfrm>
+          <a:prstGeom prst="rect">
+            <a:avLst/>
+          </a:prstGeom>
+          <a:noFill/>
+        </p:spPr>
+        <p:txBody>
+          <a:bodyPr wrap="square" lIns="73152" rIns="73152" tIns="36576" bIns="36576" anchor="t">
+            <a:spAutoFit/>
+          </a:bodyPr>
+          <a:lstStyle/>
+          <a:p>
             <a:pPr algn="l">
               <a:lnSpc>
                 <a:spcPts val="1100"/>
@@ -37197,7 +37143,7 @@
                 </a:solidFill>
                 <a:latin typeface="Segoe UI"/>
               </a:rPr>
-              <a:t>DCR Collaboration API v2 | SFSEAPAC | 2026   ·   47 / 51</a:t>
+              <a:t>DCR Collaboration API v2 | SFSEAPAC | 2026   ·   47 / 56</a:t>
             </a:r>
           </a:p>
         </p:txBody>
@@ -37415,7 +37361,7 @@
                 </a:solidFill>
                 <a:latin typeface="Calibri Light"/>
               </a:rPr>
-              <a:t>Bottom Line</a:t>
+              <a:t>1-Partition vs All-8-Partitions (1007 cols, GEN2_XLARGE)</a:t>
             </a:r>
           </a:p>
         </p:txBody>
@@ -37457,14 +37403,256 @@
       </p:cxnSp>
       <p:sp>
         <p:nvSpPr>
-          <p:cNvPr id="8" name="TextBox 7"/>
+          <p:cNvPr id="8" name="Rounded Rectangle 7"/>
+          <p:cNvSpPr/>
+          <p:nvPr/>
+        </p:nvSpPr>
+        <p:spPr>
+          <a:xfrm>
+            <a:off x="640080" y="1508760"/>
+            <a:ext cx="5318607" cy="4754880"/>
+          </a:xfrm>
+          <a:prstGeom prst="roundRect">
+            <a:avLst/>
+          </a:prstGeom>
+          <a:solidFill>
+            <a:srgbClr val="EEF5FA"/>
+          </a:solidFill>
+          <a:ln>
+            <a:noFill/>
+          </a:ln>
+        </p:spPr>
+        <p:style>
+          <a:lnRef idx="1">
+            <a:schemeClr val="accent1"/>
+          </a:lnRef>
+          <a:fillRef idx="3">
+            <a:schemeClr val="accent1"/>
+          </a:fillRef>
+          <a:effectRef idx="2">
+            <a:schemeClr val="accent1"/>
+          </a:effectRef>
+          <a:fontRef idx="minor">
+            <a:schemeClr val="lt1"/>
+          </a:fontRef>
+        </p:style>
+        <p:txBody>
+          <a:bodyPr rtlCol="0" anchor="ctr"/>
+          <a:lstStyle/>
+          <a:p>
+            <a:pPr algn="ctr"/>
+          </a:p>
+        </p:txBody>
+      </p:sp>
+      <p:sp>
+        <p:nvSpPr>
+          <p:cNvPr id="9" name="Rectangle 8"/>
+          <p:cNvSpPr/>
+          <p:nvPr/>
+        </p:nvSpPr>
+        <p:spPr>
+          <a:xfrm>
+            <a:off x="640080" y="1508760"/>
+            <a:ext cx="5318607" cy="54864"/>
+          </a:xfrm>
+          <a:prstGeom prst="rect">
+            <a:avLst/>
+          </a:prstGeom>
+          <a:solidFill>
+            <a:srgbClr val="29B5E8"/>
+          </a:solidFill>
+          <a:ln>
+            <a:noFill/>
+          </a:ln>
+        </p:spPr>
+        <p:style>
+          <a:lnRef idx="1">
+            <a:schemeClr val="accent1"/>
+          </a:lnRef>
+          <a:fillRef idx="3">
+            <a:schemeClr val="accent1"/>
+          </a:fillRef>
+          <a:effectRef idx="2">
+            <a:schemeClr val="accent1"/>
+          </a:effectRef>
+          <a:fontRef idx="minor">
+            <a:schemeClr val="lt1"/>
+          </a:fontRef>
+        </p:style>
+        <p:txBody>
+          <a:bodyPr rtlCol="0" anchor="ctr"/>
+          <a:lstStyle/>
+          <a:p>
+            <a:pPr algn="ctr"/>
+          </a:p>
+        </p:txBody>
+      </p:sp>
+      <p:sp>
+        <p:nvSpPr>
+          <p:cNvPr id="10" name="Oval 9"/>
+          <p:cNvSpPr/>
+          <p:nvPr/>
+        </p:nvSpPr>
+        <p:spPr>
+          <a:xfrm>
+            <a:off x="914400" y="1828800"/>
+            <a:ext cx="457200" cy="457200"/>
+          </a:xfrm>
+          <a:prstGeom prst="ellipse">
+            <a:avLst/>
+          </a:prstGeom>
+          <a:solidFill>
+            <a:srgbClr val="29B5E8"/>
+          </a:solidFill>
+          <a:ln>
+            <a:noFill/>
+          </a:ln>
+        </p:spPr>
+        <p:style>
+          <a:lnRef idx="1">
+            <a:schemeClr val="accent1"/>
+          </a:lnRef>
+          <a:fillRef idx="3">
+            <a:schemeClr val="accent1"/>
+          </a:fillRef>
+          <a:effectRef idx="2">
+            <a:schemeClr val="accent1"/>
+          </a:effectRef>
+          <a:fontRef idx="minor">
+            <a:schemeClr val="lt1"/>
+          </a:fontRef>
+        </p:style>
+        <p:txBody>
+          <a:bodyPr rtlCol="0" anchor="ctr"/>
+          <a:lstStyle/>
+          <a:p>
+            <a:pPr algn="ctr"/>
+          </a:p>
+        </p:txBody>
+      </p:sp>
+      <p:sp>
+        <p:nvSpPr>
+          <p:cNvPr id="11" name="TextBox 10"/>
           <p:cNvSpPr txBox="1"/>
           <p:nvPr/>
         </p:nvSpPr>
         <p:spPr>
           <a:xfrm>
-            <a:off x="731520" y="1508760"/>
-            <a:ext cx="10515600" cy="4754880"/>
+            <a:off x="914400" y="1828800"/>
+            <a:ext cx="457200" cy="457200"/>
+          </a:xfrm>
+          <a:prstGeom prst="rect">
+            <a:avLst/>
+          </a:prstGeom>
+          <a:noFill/>
+        </p:spPr>
+        <p:txBody>
+          <a:bodyPr wrap="square" lIns="73152" rIns="73152" tIns="36576" bIns="36576" anchor="ctr">
+            <a:spAutoFit/>
+          </a:bodyPr>
+          <a:lstStyle/>
+          <a:p>
+            <a:pPr algn="ctr">
+              <a:lnSpc>
+                <a:spcPts val="1800"/>
+              </a:lnSpc>
+            </a:pPr>
+            <a:r>
+              <a:rPr sz="1400" b="1" i="0">
+                <a:solidFill>
+                  <a:srgbClr val="FFFFFF"/>
+                </a:solidFill>
+                <a:latin typeface="Segoe UI"/>
+              </a:rPr>
+              <a:t>01</a:t>
+            </a:r>
+          </a:p>
+        </p:txBody>
+      </p:sp>
+      <p:sp>
+        <p:nvSpPr>
+          <p:cNvPr id="12" name="TextBox 11"/>
+          <p:cNvSpPr txBox="1"/>
+          <p:nvPr/>
+        </p:nvSpPr>
+        <p:spPr>
+          <a:xfrm>
+            <a:off x="1508760" y="1856232"/>
+            <a:ext cx="4221327" cy="411480"/>
+          </a:xfrm>
+          <a:prstGeom prst="rect">
+            <a:avLst/>
+          </a:prstGeom>
+          <a:noFill/>
+        </p:spPr>
+        <p:txBody>
+          <a:bodyPr wrap="square" lIns="73152" rIns="73152" tIns="36576" bIns="36576" anchor="ctr">
+            <a:spAutoFit/>
+          </a:bodyPr>
+          <a:lstStyle/>
+          <a:p>
+            <a:pPr algn="l">
+              <a:lnSpc>
+                <a:spcPts val="2300"/>
+              </a:lnSpc>
+            </a:pPr>
+            <a:r>
+              <a:rPr sz="1800" b="1" i="0">
+                <a:solidFill>
+                  <a:srgbClr val="11567F"/>
+                </a:solidFill>
+                <a:latin typeface="Calibri Light"/>
+              </a:rPr>
+              <a:t>1 Partition (150M × 1M)</a:t>
+            </a:r>
+          </a:p>
+        </p:txBody>
+      </p:sp>
+      <p:cxnSp>
+        <p:nvCxnSpPr>
+          <p:cNvPr id="13" name="Connector 12"/>
+          <p:cNvCxnSpPr/>
+          <p:nvPr/>
+        </p:nvCxnSpPr>
+        <p:spPr>
+          <a:xfrm>
+            <a:off x="822960" y="2468880"/>
+            <a:ext cx="4952847" cy="0"/>
+          </a:xfrm>
+          <a:prstGeom prst="line">
+            <a:avLst/>
+          </a:prstGeom>
+          <a:ln w="12700">
+            <a:solidFill>
+              <a:srgbClr val="D5DCE3"/>
+            </a:solidFill>
+          </a:ln>
+        </p:spPr>
+        <p:style>
+          <a:lnRef idx="2">
+            <a:schemeClr val="accent1"/>
+          </a:lnRef>
+          <a:fillRef idx="0">
+            <a:schemeClr val="accent1"/>
+          </a:fillRef>
+          <a:effectRef idx="1">
+            <a:schemeClr val="accent1"/>
+          </a:effectRef>
+          <a:fontRef idx="minor">
+            <a:schemeClr val="tx1"/>
+          </a:fontRef>
+        </p:style>
+      </p:cxnSp>
+      <p:sp>
+        <p:nvSpPr>
+          <p:cNvPr id="14" name="TextBox 13"/>
+          <p:cNvSpPr txBox="1"/>
+          <p:nvPr/>
+        </p:nvSpPr>
+        <p:spPr>
+          <a:xfrm>
+            <a:off x="822960" y="2606040"/>
+            <a:ext cx="4952847" cy="3383280"/>
           </a:xfrm>
           <a:prstGeom prst="rect">
             <a:avLst/>
@@ -37479,7 +37667,7 @@
           <a:p>
             <a:pPr>
               <a:lnSpc>
-                <a:spcPts val="2500"/>
+                <a:spcPts val="2400"/>
               </a:lnSpc>
               <a:spcAft>
                 <a:spcPts val="1000"/>
@@ -37495,19 +37683,19 @@
               <a:t>●  </a:t>
             </a:r>
             <a:r>
-              <a:rPr sz="1600">
+              <a:rPr sz="1500">
                 <a:solidFill>
                   <a:srgbClr val="2C3E50"/>
                 </a:solidFill>
                 <a:latin typeface="Segoe UI"/>
               </a:rPr>
-              <a:t>2m</a:t>
+              <a:t>71 min total</a:t>
             </a:r>
           </a:p>
           <a:p>
             <a:pPr>
               <a:lnSpc>
-                <a:spcPts val="2500"/>
+                <a:spcPts val="2400"/>
               </a:lnSpc>
               <a:spcAft>
                 <a:spcPts val="1000"/>
@@ -37523,19 +37711,19 @@
               <a:t>●  </a:t>
             </a:r>
             <a:r>
-              <a:rPr sz="1600">
+              <a:rPr sz="1500">
                 <a:solidFill>
                   <a:srgbClr val="2C3E50"/>
                 </a:solidFill>
                 <a:latin typeface="Segoe UI"/>
               </a:rPr>
-              <a:t>16s End-to-end single-query full-scan</a:t>
+              <a:t>19.04 credits</a:t>
             </a:r>
           </a:p>
           <a:p>
             <a:pPr>
               <a:lnSpc>
-                <a:spcPts val="2500"/>
+                <a:spcPts val="2400"/>
               </a:lnSpc>
               <a:spcAft>
                 <a:spcPts val="1000"/>
@@ -37551,19 +37739,19 @@
               <a:t>●  </a:t>
             </a:r>
             <a:r>
-              <a:rPr sz="1600">
+              <a:rPr sz="1500">
                 <a:solidFill>
                   <a:srgbClr val="2C3E50"/>
                 </a:solidFill>
                 <a:latin typeface="Segoe UI"/>
               </a:rPr>
-              <a:t>0.61</a:t>
+              <a:t>700k rows exported</a:t>
             </a:r>
           </a:p>
           <a:p>
             <a:pPr>
               <a:lnSpc>
-                <a:spcPts val="2500"/>
+                <a:spcPts val="2400"/>
               </a:lnSpc>
               <a:spcAft>
                 <a:spcPts val="1000"/>
@@ -37579,19 +37767,284 @@
               <a:t>●  </a:t>
             </a:r>
             <a:r>
-              <a:rPr sz="1600">
+              <a:rPr sz="1500">
                 <a:solidFill>
                   <a:srgbClr val="2C3E50"/>
                 </a:solidFill>
                 <a:latin typeface="Segoe UI"/>
               </a:rPr>
-              <a:t>Credits per run (80% cheaper than loop)</a:t>
-            </a:r>
-          </a:p>
+              <a:t>$74.3 per run</a:t>
+            </a:r>
+          </a:p>
+        </p:txBody>
+      </p:sp>
+      <p:sp>
+        <p:nvSpPr>
+          <p:cNvPr id="15" name="Rounded Rectangle 14"/>
+          <p:cNvSpPr/>
+          <p:nvPr/>
+        </p:nvSpPr>
+        <p:spPr>
+          <a:xfrm>
+            <a:off x="6233007" y="1508760"/>
+            <a:ext cx="5318607" cy="4754880"/>
+          </a:xfrm>
+          <a:prstGeom prst="roundRect">
+            <a:avLst/>
+          </a:prstGeom>
+          <a:solidFill>
+            <a:srgbClr val="EEF5FA"/>
+          </a:solidFill>
+          <a:ln>
+            <a:noFill/>
+          </a:ln>
+        </p:spPr>
+        <p:style>
+          <a:lnRef idx="1">
+            <a:schemeClr val="accent1"/>
+          </a:lnRef>
+          <a:fillRef idx="3">
+            <a:schemeClr val="accent1"/>
+          </a:fillRef>
+          <a:effectRef idx="2">
+            <a:schemeClr val="accent1"/>
+          </a:effectRef>
+          <a:fontRef idx="minor">
+            <a:schemeClr val="lt1"/>
+          </a:fontRef>
+        </p:style>
+        <p:txBody>
+          <a:bodyPr rtlCol="0" anchor="ctr"/>
+          <a:lstStyle/>
+          <a:p>
+            <a:pPr algn="ctr"/>
+          </a:p>
+        </p:txBody>
+      </p:sp>
+      <p:sp>
+        <p:nvSpPr>
+          <p:cNvPr id="16" name="Rectangle 15"/>
+          <p:cNvSpPr/>
+          <p:nvPr/>
+        </p:nvSpPr>
+        <p:spPr>
+          <a:xfrm>
+            <a:off x="6233007" y="1508760"/>
+            <a:ext cx="5318607" cy="54864"/>
+          </a:xfrm>
+          <a:prstGeom prst="rect">
+            <a:avLst/>
+          </a:prstGeom>
+          <a:solidFill>
+            <a:srgbClr val="11567F"/>
+          </a:solidFill>
+          <a:ln>
+            <a:noFill/>
+          </a:ln>
+        </p:spPr>
+        <p:style>
+          <a:lnRef idx="1">
+            <a:schemeClr val="accent1"/>
+          </a:lnRef>
+          <a:fillRef idx="3">
+            <a:schemeClr val="accent1"/>
+          </a:fillRef>
+          <a:effectRef idx="2">
+            <a:schemeClr val="accent1"/>
+          </a:effectRef>
+          <a:fontRef idx="minor">
+            <a:schemeClr val="lt1"/>
+          </a:fontRef>
+        </p:style>
+        <p:txBody>
+          <a:bodyPr rtlCol="0" anchor="ctr"/>
+          <a:lstStyle/>
+          <a:p>
+            <a:pPr algn="ctr"/>
+          </a:p>
+        </p:txBody>
+      </p:sp>
+      <p:sp>
+        <p:nvSpPr>
+          <p:cNvPr id="17" name="Oval 16"/>
+          <p:cNvSpPr/>
+          <p:nvPr/>
+        </p:nvSpPr>
+        <p:spPr>
+          <a:xfrm>
+            <a:off x="6507327" y="1828800"/>
+            <a:ext cx="457200" cy="457200"/>
+          </a:xfrm>
+          <a:prstGeom prst="ellipse">
+            <a:avLst/>
+          </a:prstGeom>
+          <a:solidFill>
+            <a:srgbClr val="11567F"/>
+          </a:solidFill>
+          <a:ln>
+            <a:noFill/>
+          </a:ln>
+        </p:spPr>
+        <p:style>
+          <a:lnRef idx="1">
+            <a:schemeClr val="accent1"/>
+          </a:lnRef>
+          <a:fillRef idx="3">
+            <a:schemeClr val="accent1"/>
+          </a:fillRef>
+          <a:effectRef idx="2">
+            <a:schemeClr val="accent1"/>
+          </a:effectRef>
+          <a:fontRef idx="minor">
+            <a:schemeClr val="lt1"/>
+          </a:fontRef>
+        </p:style>
+        <p:txBody>
+          <a:bodyPr rtlCol="0" anchor="ctr"/>
+          <a:lstStyle/>
+          <a:p>
+            <a:pPr algn="ctr"/>
+          </a:p>
+        </p:txBody>
+      </p:sp>
+      <p:sp>
+        <p:nvSpPr>
+          <p:cNvPr id="18" name="TextBox 17"/>
+          <p:cNvSpPr txBox="1"/>
+          <p:nvPr/>
+        </p:nvSpPr>
+        <p:spPr>
+          <a:xfrm>
+            <a:off x="6507327" y="1828800"/>
+            <a:ext cx="457200" cy="457200"/>
+          </a:xfrm>
+          <a:prstGeom prst="rect">
+            <a:avLst/>
+          </a:prstGeom>
+          <a:noFill/>
+        </p:spPr>
+        <p:txBody>
+          <a:bodyPr wrap="square" lIns="73152" rIns="73152" tIns="36576" bIns="36576" anchor="ctr">
+            <a:spAutoFit/>
+          </a:bodyPr>
+          <a:lstStyle/>
+          <a:p>
+            <a:pPr algn="ctr">
+              <a:lnSpc>
+                <a:spcPts val="1800"/>
+              </a:lnSpc>
+            </a:pPr>
+            <a:r>
+              <a:rPr sz="1400" b="1" i="0">
+                <a:solidFill>
+                  <a:srgbClr val="FFFFFF"/>
+                </a:solidFill>
+                <a:latin typeface="Segoe UI"/>
+              </a:rPr>
+              <a:t>02</a:t>
+            </a:r>
+          </a:p>
+        </p:txBody>
+      </p:sp>
+      <p:sp>
+        <p:nvSpPr>
+          <p:cNvPr id="19" name="TextBox 18"/>
+          <p:cNvSpPr txBox="1"/>
+          <p:nvPr/>
+        </p:nvSpPr>
+        <p:spPr>
+          <a:xfrm>
+            <a:off x="7101687" y="1856232"/>
+            <a:ext cx="4221327" cy="411480"/>
+          </a:xfrm>
+          <a:prstGeom prst="rect">
+            <a:avLst/>
+          </a:prstGeom>
+          <a:noFill/>
+        </p:spPr>
+        <p:txBody>
+          <a:bodyPr wrap="square" lIns="73152" rIns="73152" tIns="36576" bIns="36576" anchor="ctr">
+            <a:spAutoFit/>
+          </a:bodyPr>
+          <a:lstStyle/>
+          <a:p>
+            <a:pPr algn="l">
+              <a:lnSpc>
+                <a:spcPts val="2300"/>
+              </a:lnSpc>
+            </a:pPr>
+            <a:r>
+              <a:rPr sz="1800" b="1" i="0">
+                <a:solidFill>
+                  <a:srgbClr val="11567F"/>
+                </a:solidFill>
+                <a:latin typeface="Calibri Light"/>
+              </a:rPr>
+              <a:t>8 Partitions (1.2B × 8M)</a:t>
+            </a:r>
+          </a:p>
+        </p:txBody>
+      </p:sp>
+      <p:cxnSp>
+        <p:nvCxnSpPr>
+          <p:cNvPr id="20" name="Connector 19"/>
+          <p:cNvCxnSpPr/>
+          <p:nvPr/>
+        </p:nvCxnSpPr>
+        <p:spPr>
+          <a:xfrm>
+            <a:off x="6415887" y="2468880"/>
+            <a:ext cx="4952847" cy="0"/>
+          </a:xfrm>
+          <a:prstGeom prst="line">
+            <a:avLst/>
+          </a:prstGeom>
+          <a:ln w="12700">
+            <a:solidFill>
+              <a:srgbClr val="D5DCE3"/>
+            </a:solidFill>
+          </a:ln>
+        </p:spPr>
+        <p:style>
+          <a:lnRef idx="2">
+            <a:schemeClr val="accent1"/>
+          </a:lnRef>
+          <a:fillRef idx="0">
+            <a:schemeClr val="accent1"/>
+          </a:fillRef>
+          <a:effectRef idx="1">
+            <a:schemeClr val="accent1"/>
+          </a:effectRef>
+          <a:fontRef idx="minor">
+            <a:schemeClr val="tx1"/>
+          </a:fontRef>
+        </p:style>
+      </p:cxnSp>
+      <p:sp>
+        <p:nvSpPr>
+          <p:cNvPr id="21" name="TextBox 20"/>
+          <p:cNvSpPr txBox="1"/>
+          <p:nvPr/>
+        </p:nvSpPr>
+        <p:spPr>
+          <a:xfrm>
+            <a:off x="6415887" y="2606040"/>
+            <a:ext cx="4952847" cy="3383280"/>
+          </a:xfrm>
+          <a:prstGeom prst="rect">
+            <a:avLst/>
+          </a:prstGeom>
+          <a:noFill/>
+        </p:spPr>
+        <p:txBody>
+          <a:bodyPr wrap="square" lIns="73152" rIns="73152">
+            <a:spAutoFit/>
+          </a:bodyPr>
+          <a:lstStyle/>
           <a:p>
             <a:pPr>
               <a:lnSpc>
-                <a:spcPts val="2500"/>
+                <a:spcPts val="2400"/>
               </a:lnSpc>
               <a:spcAft>
                 <a:spcPts val="1000"/>
@@ -37600,26 +38053,26 @@
             <a:r>
               <a:rPr sz="800">
                 <a:solidFill>
-                  <a:srgbClr val="29B5E8"/>
+                  <a:srgbClr val="11567F"/>
                 </a:solidFill>
                 <a:latin typeface="Segoe UI"/>
               </a:rPr>
               <a:t>●  </a:t>
             </a:r>
             <a:r>
-              <a:rPr sz="1600">
+              <a:rPr sz="1500">
                 <a:solidFill>
                   <a:srgbClr val="2C3E50"/>
                 </a:solidFill>
                 <a:latin typeface="Segoe UI"/>
               </a:rPr>
-              <a:t>1.2B</a:t>
+              <a:t>83 min total (1.18× longer)</a:t>
             </a:r>
           </a:p>
           <a:p>
             <a:pPr>
               <a:lnSpc>
-                <a:spcPts val="2500"/>
+                <a:spcPts val="2400"/>
               </a:lnSpc>
               <a:spcAft>
                 <a:spcPts val="1000"/>
@@ -37628,26 +38081,26 @@
             <a:r>
               <a:rPr sz="800">
                 <a:solidFill>
-                  <a:srgbClr val="29B5E8"/>
+                  <a:srgbClr val="11567F"/>
                 </a:solidFill>
                 <a:latin typeface="Segoe UI"/>
               </a:rPr>
               <a:t>●  </a:t>
             </a:r>
             <a:r>
-              <a:rPr sz="1600">
+              <a:rPr sz="1500">
                 <a:solidFill>
                   <a:srgbClr val="2C3E50"/>
                 </a:solidFill>
                 <a:latin typeface="Segoe UI"/>
               </a:rPr>
-              <a:t>Provider rows fully scanned in 1 query</a:t>
+              <a:t>22.2 credits (1.18× more)</a:t>
             </a:r>
           </a:p>
           <a:p>
             <a:pPr>
               <a:lnSpc>
-                <a:spcPts val="2500"/>
+                <a:spcPts val="2400"/>
               </a:lnSpc>
               <a:spcAft>
                 <a:spcPts val="1000"/>
@@ -37656,26 +38109,26 @@
             <a:r>
               <a:rPr sz="800">
                 <a:solidFill>
-                  <a:srgbClr val="29B5E8"/>
+                  <a:srgbClr val="11567F"/>
                 </a:solidFill>
                 <a:latin typeface="Segoe UI"/>
               </a:rPr>
               <a:t>●  </a:t>
             </a:r>
             <a:r>
-              <a:rPr sz="1600">
+              <a:rPr sz="1500">
                 <a:solidFill>
                   <a:srgbClr val="2C3E50"/>
                 </a:solidFill>
                 <a:latin typeface="Segoe UI"/>
               </a:rPr>
-              <a:t>3.37M</a:t>
+              <a:t>44.8M rows exported (64×)</a:t>
             </a:r>
           </a:p>
           <a:p>
             <a:pPr>
               <a:lnSpc>
-                <a:spcPts val="2500"/>
+                <a:spcPts val="2400"/>
               </a:lnSpc>
               <a:spcAft>
                 <a:spcPts val="1000"/>
@@ -37684,27 +38137,27 @@
             <a:r>
               <a:rPr sz="800">
                 <a:solidFill>
-                  <a:srgbClr val="29B5E8"/>
+                  <a:srgbClr val="11567F"/>
                 </a:solidFill>
                 <a:latin typeface="Segoe UI"/>
               </a:rPr>
               <a:t>●  </a:t>
             </a:r>
             <a:r>
-              <a:rPr sz="1600">
+              <a:rPr sz="1500">
                 <a:solidFill>
                   <a:srgbClr val="2C3E50"/>
                 </a:solidFill>
                 <a:latin typeface="Segoe UI"/>
               </a:rPr>
-              <a:t>Unique audience tuples (identical in both modes)</a:t>
-            </a:r>
-          </a:p>
-        </p:txBody>
-      </p:sp>
-      <p:sp>
-        <p:nvSpPr>
-          <p:cNvPr id="9" name="TextBox 8"/>
+              <a:t>$86.6 per run</a:t>
+            </a:r>
+          </a:p>
+        </p:txBody>
+      </p:sp>
+      <p:sp>
+        <p:nvSpPr>
+          <p:cNvPr id="22" name="TextBox 21"/>
           <p:cNvSpPr txBox="1"/>
           <p:nvPr/>
         </p:nvSpPr>
@@ -37736,7 +38189,7 @@
                 </a:solidFill>
                 <a:latin typeface="Segoe UI"/>
               </a:rPr>
-              <a:t>DCR Collaboration API v2 | SFSEAPAC | 2026   ·   48 / 51</a:t>
+              <a:t>DCR Collaboration API v2 | SFSEAPAC | 2026   ·   48 / 56</a:t>
             </a:r>
           </a:p>
         </p:txBody>
@@ -37954,7 +38407,7 @@
                 </a:solidFill>
                 <a:latin typeface="Calibri Light"/>
               </a:rPr>
-              <a:t>References &amp; Code Repository</a:t>
+              <a:t>Master Benchmark Matrix — Semua Konfigurasi</a:t>
             </a:r>
           </a:p>
         </p:txBody>
@@ -37996,100 +38449,14 @@
       </p:cxnSp>
       <p:sp>
         <p:nvSpPr>
-          <p:cNvPr id="8" name="Rounded Rectangle 7"/>
-          <p:cNvSpPr/>
-          <p:nvPr/>
-        </p:nvSpPr>
-        <p:spPr>
-          <a:xfrm>
-            <a:off x="640080" y="1554480"/>
-            <a:ext cx="10911535" cy="804672"/>
-          </a:xfrm>
-          <a:prstGeom prst="roundRect">
-            <a:avLst/>
-          </a:prstGeom>
-          <a:solidFill>
-            <a:srgbClr val="EEF5FA"/>
-          </a:solidFill>
-          <a:ln>
-            <a:noFill/>
-          </a:ln>
-        </p:spPr>
-        <p:style>
-          <a:lnRef idx="1">
-            <a:schemeClr val="accent1"/>
-          </a:lnRef>
-          <a:fillRef idx="3">
-            <a:schemeClr val="accent1"/>
-          </a:fillRef>
-          <a:effectRef idx="2">
-            <a:schemeClr val="accent1"/>
-          </a:effectRef>
-          <a:fontRef idx="minor">
-            <a:schemeClr val="lt1"/>
-          </a:fontRef>
-        </p:style>
-        <p:txBody>
-          <a:bodyPr rtlCol="0" anchor="ctr"/>
-          <a:lstStyle/>
-          <a:p>
-            <a:pPr algn="ctr"/>
-          </a:p>
-        </p:txBody>
-      </p:sp>
-      <p:sp>
-        <p:nvSpPr>
-          <p:cNvPr id="9" name="Oval 8"/>
-          <p:cNvSpPr/>
-          <p:nvPr/>
-        </p:nvSpPr>
-        <p:spPr>
-          <a:xfrm>
-            <a:off x="914400" y="1691640"/>
-            <a:ext cx="411480" cy="411480"/>
-          </a:xfrm>
-          <a:prstGeom prst="ellipse">
-            <a:avLst/>
-          </a:prstGeom>
-          <a:solidFill>
-            <a:srgbClr val="29B5E8"/>
-          </a:solidFill>
-          <a:ln>
-            <a:noFill/>
-          </a:ln>
-        </p:spPr>
-        <p:style>
-          <a:lnRef idx="1">
-            <a:schemeClr val="accent1"/>
-          </a:lnRef>
-          <a:fillRef idx="3">
-            <a:schemeClr val="accent1"/>
-          </a:fillRef>
-          <a:effectRef idx="2">
-            <a:schemeClr val="accent1"/>
-          </a:effectRef>
-          <a:fontRef idx="minor">
-            <a:schemeClr val="lt1"/>
-          </a:fontRef>
-        </p:style>
-        <p:txBody>
-          <a:bodyPr rtlCol="0" anchor="ctr"/>
-          <a:lstStyle/>
-          <a:p>
-            <a:pPr algn="ctr"/>
-          </a:p>
-        </p:txBody>
-      </p:sp>
-      <p:sp>
-        <p:nvSpPr>
-          <p:cNvPr id="10" name="TextBox 9"/>
+          <p:cNvPr id="8" name="TextBox 7"/>
           <p:cNvSpPr txBox="1"/>
           <p:nvPr/>
         </p:nvSpPr>
         <p:spPr>
           <a:xfrm>
-            <a:off x="914400" y="1691640"/>
-            <a:ext cx="411480" cy="411480"/>
+            <a:off x="731520" y="1508760"/>
+            <a:ext cx="10515600" cy="4754880"/>
           </a:xfrm>
           <a:prstGeom prst="rect">
             <a:avLst/>
@@ -38097,726 +38464,211 @@
           <a:noFill/>
         </p:spPr>
         <p:txBody>
-          <a:bodyPr wrap="square" lIns="73152" rIns="73152" tIns="36576" bIns="36576" anchor="ctr">
+          <a:bodyPr wrap="square" lIns="73152" rIns="73152">
             <a:spAutoFit/>
           </a:bodyPr>
           <a:lstStyle/>
           <a:p>
-            <a:pPr algn="ctr">
-              <a:lnSpc>
-                <a:spcPts val="1600"/>
-              </a:lnSpc>
-            </a:pPr>
-            <a:r>
-              <a:rPr sz="1300" b="1" i="0">
-                <a:solidFill>
-                  <a:srgbClr val="FFFFFF"/>
-                </a:solidFill>
-                <a:latin typeface="Segoe UI"/>
-              </a:rPr>
-              <a:t>01</a:t>
-            </a:r>
-          </a:p>
-        </p:txBody>
-      </p:sp>
-      <p:sp>
-        <p:nvSpPr>
-          <p:cNvPr id="11" name="TextBox 10"/>
-          <p:cNvSpPr txBox="1"/>
-          <p:nvPr/>
-        </p:nvSpPr>
-        <p:spPr>
-          <a:xfrm>
-            <a:off x="1554480" y="1627632"/>
-            <a:ext cx="9601200" cy="768096"/>
-          </a:xfrm>
-          <a:prstGeom prst="rect">
-            <a:avLst/>
-          </a:prstGeom>
-          <a:noFill/>
-        </p:spPr>
-        <p:txBody>
-          <a:bodyPr wrap="square" lIns="73152" rIns="73152" tIns="36576" bIns="36576" anchor="ctr">
-            <a:spAutoFit/>
-          </a:bodyPr>
-          <a:lstStyle/>
-          <a:p>
-            <a:pPr algn="l">
-              <a:lnSpc>
-                <a:spcPts val="2000"/>
-              </a:lnSpc>
-            </a:pPr>
-            <a:r>
-              <a:rPr sz="1600" b="0" i="0">
+            <a:pPr>
+              <a:lnSpc>
+                <a:spcPts val="2500"/>
+              </a:lnSpc>
+              <a:spcAft>
+                <a:spcPts val="1000"/>
+              </a:spcAft>
+            </a:pPr>
+            <a:r>
+              <a:rPr sz="800">
+                <a:solidFill>
+                  <a:srgbClr val="29B5E8"/>
+                </a:solidFill>
+                <a:latin typeface="Segoe UI"/>
+              </a:rPr>
+              <a:t>●  </a:t>
+            </a:r>
+            <a:r>
+              <a:rPr sz="1600">
                 <a:solidFill>
                   <a:srgbClr val="2C3E50"/>
                 </a:solidFill>
                 <a:latin typeface="Segoe UI"/>
               </a:rPr>
-              <a:t>GitHub — https://github.com/arzamuhammad/dcr-collaboration-api</a:t>
-            </a:r>
-          </a:p>
-        </p:txBody>
-      </p:sp>
-      <p:sp>
-        <p:nvSpPr>
-          <p:cNvPr id="12" name="Rounded Rectangle 11"/>
-          <p:cNvSpPr/>
-          <p:nvPr/>
-        </p:nvSpPr>
-        <p:spPr>
-          <a:xfrm>
-            <a:off x="640080" y="2468880"/>
-            <a:ext cx="10911535" cy="804672"/>
-          </a:xfrm>
-          <a:prstGeom prst="roundRect">
-            <a:avLst/>
-          </a:prstGeom>
-          <a:solidFill>
-            <a:srgbClr val="F4F8FB"/>
-          </a:solidFill>
-          <a:ln>
-            <a:noFill/>
-          </a:ln>
-        </p:spPr>
-        <p:style>
-          <a:lnRef idx="1">
-            <a:schemeClr val="accent1"/>
-          </a:lnRef>
-          <a:fillRef idx="3">
-            <a:schemeClr val="accent1"/>
-          </a:fillRef>
-          <a:effectRef idx="2">
-            <a:schemeClr val="accent1"/>
-          </a:effectRef>
-          <a:fontRef idx="minor">
-            <a:schemeClr val="lt1"/>
-          </a:fontRef>
-        </p:style>
-        <p:txBody>
-          <a:bodyPr rtlCol="0" anchor="ctr"/>
-          <a:lstStyle/>
-          <a:p>
-            <a:pPr algn="ctr"/>
-          </a:p>
-        </p:txBody>
-      </p:sp>
-      <p:sp>
-        <p:nvSpPr>
-          <p:cNvPr id="13" name="Oval 12"/>
-          <p:cNvSpPr/>
-          <p:nvPr/>
-        </p:nvSpPr>
-        <p:spPr>
-          <a:xfrm>
-            <a:off x="914400" y="2606040"/>
-            <a:ext cx="411480" cy="411480"/>
-          </a:xfrm>
-          <a:prstGeom prst="ellipse">
-            <a:avLst/>
-          </a:prstGeom>
-          <a:solidFill>
-            <a:srgbClr val="11567F"/>
-          </a:solidFill>
-          <a:ln>
-            <a:noFill/>
-          </a:ln>
-        </p:spPr>
-        <p:style>
-          <a:lnRef idx="1">
-            <a:schemeClr val="accent1"/>
-          </a:lnRef>
-          <a:fillRef idx="3">
-            <a:schemeClr val="accent1"/>
-          </a:fillRef>
-          <a:effectRef idx="2">
-            <a:schemeClr val="accent1"/>
-          </a:effectRef>
-          <a:fontRef idx="minor">
-            <a:schemeClr val="lt1"/>
-          </a:fontRef>
-        </p:style>
-        <p:txBody>
-          <a:bodyPr rtlCol="0" anchor="ctr"/>
-          <a:lstStyle/>
-          <a:p>
-            <a:pPr algn="ctr"/>
-          </a:p>
-        </p:txBody>
-      </p:sp>
-      <p:sp>
-        <p:nvSpPr>
-          <p:cNvPr id="14" name="TextBox 13"/>
-          <p:cNvSpPr txBox="1"/>
-          <p:nvPr/>
-        </p:nvSpPr>
-        <p:spPr>
-          <a:xfrm>
-            <a:off x="914400" y="2606040"/>
-            <a:ext cx="411480" cy="411480"/>
-          </a:xfrm>
-          <a:prstGeom prst="rect">
-            <a:avLst/>
-          </a:prstGeom>
-          <a:noFill/>
-        </p:spPr>
-        <p:txBody>
-          <a:bodyPr wrap="square" lIns="73152" rIns="73152" tIns="36576" bIns="36576" anchor="ctr">
-            <a:spAutoFit/>
-          </a:bodyPr>
-          <a:lstStyle/>
-          <a:p>
-            <a:pPr algn="ctr">
-              <a:lnSpc>
-                <a:spcPts val="1600"/>
-              </a:lnSpc>
-            </a:pPr>
-            <a:r>
-              <a:rPr sz="1300" b="1" i="0">
-                <a:solidFill>
-                  <a:srgbClr val="FFFFFF"/>
-                </a:solidFill>
-                <a:latin typeface="Segoe UI"/>
-              </a:rPr>
-              <a:t>02</a:t>
-            </a:r>
-          </a:p>
-        </p:txBody>
-      </p:sp>
-      <p:sp>
-        <p:nvSpPr>
-          <p:cNvPr id="15" name="TextBox 14"/>
-          <p:cNvSpPr txBox="1"/>
-          <p:nvPr/>
-        </p:nvSpPr>
-        <p:spPr>
-          <a:xfrm>
-            <a:off x="1554480" y="2542032"/>
-            <a:ext cx="9601200" cy="768096"/>
-          </a:xfrm>
-          <a:prstGeom prst="rect">
-            <a:avLst/>
-          </a:prstGeom>
-          <a:noFill/>
-        </p:spPr>
-        <p:txBody>
-          <a:bodyPr wrap="square" lIns="73152" rIns="73152" tIns="36576" bIns="36576" anchor="ctr">
-            <a:spAutoFit/>
-          </a:bodyPr>
-          <a:lstStyle/>
-          <a:p>
-            <a:pPr algn="l">
-              <a:lnSpc>
-                <a:spcPts val="2000"/>
-              </a:lnSpc>
-            </a:pPr>
-            <a:r>
-              <a:rPr sz="1600" b="0" i="0">
+              <a:t>1-part analysis 6 cols @ XL — 39 s, 0.17 credits, $0.67</a:t>
+            </a:r>
+          </a:p>
+          <a:p>
+            <a:pPr>
+              <a:lnSpc>
+                <a:spcPts val="2500"/>
+              </a:lnSpc>
+              <a:spcAft>
+                <a:spcPts val="1000"/>
+              </a:spcAft>
+            </a:pPr>
+            <a:r>
+              <a:rPr sz="800">
+                <a:solidFill>
+                  <a:srgbClr val="29B5E8"/>
+                </a:solidFill>
+                <a:latin typeface="Segoe UI"/>
+              </a:rPr>
+              <a:t>●  </a:t>
+            </a:r>
+            <a:r>
+              <a:rPr sz="1600">
                 <a:solidFill>
                   <a:srgbClr val="2C3E50"/>
                 </a:solidFill>
                 <a:latin typeface="Segoe UI"/>
               </a:rPr>
-              <a:t>Contains — provider_workflow.sql, consumer_workflow.sql, README dengan battle-tested fixes</a:t>
-            </a:r>
-          </a:p>
-        </p:txBody>
-      </p:sp>
-      <p:sp>
-        <p:nvSpPr>
-          <p:cNvPr id="16" name="Rounded Rectangle 15"/>
-          <p:cNvSpPr/>
-          <p:nvPr/>
-        </p:nvSpPr>
-        <p:spPr>
-          <a:xfrm>
-            <a:off x="640080" y="3383280"/>
-            <a:ext cx="10911535" cy="804672"/>
-          </a:xfrm>
-          <a:prstGeom prst="roundRect">
-            <a:avLst/>
-          </a:prstGeom>
-          <a:solidFill>
-            <a:srgbClr val="EEF5FA"/>
-          </a:solidFill>
-          <a:ln>
-            <a:noFill/>
-          </a:ln>
-        </p:spPr>
-        <p:style>
-          <a:lnRef idx="1">
-            <a:schemeClr val="accent1"/>
-          </a:lnRef>
-          <a:fillRef idx="3">
-            <a:schemeClr val="accent1"/>
-          </a:fillRef>
-          <a:effectRef idx="2">
-            <a:schemeClr val="accent1"/>
-          </a:effectRef>
-          <a:fontRef idx="minor">
-            <a:schemeClr val="lt1"/>
-          </a:fontRef>
-        </p:style>
-        <p:txBody>
-          <a:bodyPr rtlCol="0" anchor="ctr"/>
-          <a:lstStyle/>
-          <a:p>
-            <a:pPr algn="ctr"/>
-          </a:p>
-        </p:txBody>
-      </p:sp>
-      <p:sp>
-        <p:nvSpPr>
-          <p:cNvPr id="17" name="Oval 16"/>
-          <p:cNvSpPr/>
-          <p:nvPr/>
-        </p:nvSpPr>
-        <p:spPr>
-          <a:xfrm>
-            <a:off x="914400" y="3520440"/>
-            <a:ext cx="411480" cy="411480"/>
-          </a:xfrm>
-          <a:prstGeom prst="ellipse">
-            <a:avLst/>
-          </a:prstGeom>
-          <a:solidFill>
-            <a:srgbClr val="71D3DC"/>
-          </a:solidFill>
-          <a:ln>
-            <a:noFill/>
-          </a:ln>
-        </p:spPr>
-        <p:style>
-          <a:lnRef idx="1">
-            <a:schemeClr val="accent1"/>
-          </a:lnRef>
-          <a:fillRef idx="3">
-            <a:schemeClr val="accent1"/>
-          </a:fillRef>
-          <a:effectRef idx="2">
-            <a:schemeClr val="accent1"/>
-          </a:effectRef>
-          <a:fontRef idx="minor">
-            <a:schemeClr val="lt1"/>
-          </a:fontRef>
-        </p:style>
-        <p:txBody>
-          <a:bodyPr rtlCol="0" anchor="ctr"/>
-          <a:lstStyle/>
-          <a:p>
-            <a:pPr algn="ctr"/>
-          </a:p>
-        </p:txBody>
-      </p:sp>
-      <p:sp>
-        <p:nvSpPr>
-          <p:cNvPr id="18" name="TextBox 17"/>
-          <p:cNvSpPr txBox="1"/>
-          <p:nvPr/>
-        </p:nvSpPr>
-        <p:spPr>
-          <a:xfrm>
-            <a:off x="914400" y="3520440"/>
-            <a:ext cx="411480" cy="411480"/>
-          </a:xfrm>
-          <a:prstGeom prst="rect">
-            <a:avLst/>
-          </a:prstGeom>
-          <a:noFill/>
-        </p:spPr>
-        <p:txBody>
-          <a:bodyPr wrap="square" lIns="73152" rIns="73152" tIns="36576" bIns="36576" anchor="ctr">
-            <a:spAutoFit/>
-          </a:bodyPr>
-          <a:lstStyle/>
-          <a:p>
-            <a:pPr algn="ctr">
-              <a:lnSpc>
-                <a:spcPts val="1600"/>
-              </a:lnSpc>
-            </a:pPr>
-            <a:r>
-              <a:rPr sz="1300" b="1" i="0">
-                <a:solidFill>
-                  <a:srgbClr val="FFFFFF"/>
-                </a:solidFill>
-                <a:latin typeface="Segoe UI"/>
-              </a:rPr>
-              <a:t>03</a:t>
-            </a:r>
-          </a:p>
-        </p:txBody>
-      </p:sp>
-      <p:sp>
-        <p:nvSpPr>
-          <p:cNvPr id="19" name="TextBox 18"/>
-          <p:cNvSpPr txBox="1"/>
-          <p:nvPr/>
-        </p:nvSpPr>
-        <p:spPr>
-          <a:xfrm>
-            <a:off x="1554480" y="3456432"/>
-            <a:ext cx="9601200" cy="768096"/>
-          </a:xfrm>
-          <a:prstGeom prst="rect">
-            <a:avLst/>
-          </a:prstGeom>
-          <a:noFill/>
-        </p:spPr>
-        <p:txBody>
-          <a:bodyPr wrap="square" lIns="73152" rIns="73152" tIns="36576" bIns="36576" anchor="ctr">
-            <a:spAutoFit/>
-          </a:bodyPr>
-          <a:lstStyle/>
-          <a:p>
-            <a:pPr algn="l">
-              <a:lnSpc>
-                <a:spcPts val="2000"/>
-              </a:lnSpc>
-            </a:pPr>
-            <a:r>
-              <a:rPr sz="1600" b="0" i="0">
+              <a:t>8-part analysis 6 cols @ XL — 57 s, 0.25 credits, $0.99</a:t>
+            </a:r>
+          </a:p>
+          <a:p>
+            <a:pPr>
+              <a:lnSpc>
+                <a:spcPts val="2500"/>
+              </a:lnSpc>
+              <a:spcAft>
+                <a:spcPts val="1000"/>
+              </a:spcAft>
+            </a:pPr>
+            <a:r>
+              <a:rPr sz="800">
+                <a:solidFill>
+                  <a:srgbClr val="29B5E8"/>
+                </a:solidFill>
+                <a:latin typeface="Segoe UI"/>
+              </a:rPr>
+              <a:t>●  </a:t>
+            </a:r>
+            <a:r>
+              <a:rPr sz="1600">
                 <a:solidFill>
                   <a:srgbClr val="2C3E50"/>
                 </a:solidFill>
                 <a:latin typeface="Segoe UI"/>
               </a:rPr>
-              <a:t>Snowflake Docs — docs.snowflake.com/en/user-guide/cleanrooms/v2/about</a:t>
-            </a:r>
-          </a:p>
-        </p:txBody>
-      </p:sp>
-      <p:sp>
-        <p:nvSpPr>
-          <p:cNvPr id="20" name="Rounded Rectangle 19"/>
-          <p:cNvSpPr/>
-          <p:nvPr/>
-        </p:nvSpPr>
-        <p:spPr>
-          <a:xfrm>
-            <a:off x="640080" y="4297680"/>
-            <a:ext cx="10911535" cy="804672"/>
-          </a:xfrm>
-          <a:prstGeom prst="roundRect">
-            <a:avLst/>
-          </a:prstGeom>
-          <a:solidFill>
-            <a:srgbClr val="F4F8FB"/>
-          </a:solidFill>
-          <a:ln>
-            <a:noFill/>
-          </a:ln>
-        </p:spPr>
-        <p:style>
-          <a:lnRef idx="1">
-            <a:schemeClr val="accent1"/>
-          </a:lnRef>
-          <a:fillRef idx="3">
-            <a:schemeClr val="accent1"/>
-          </a:fillRef>
-          <a:effectRef idx="2">
-            <a:schemeClr val="accent1"/>
-          </a:effectRef>
-          <a:fontRef idx="minor">
-            <a:schemeClr val="lt1"/>
-          </a:fontRef>
-        </p:style>
-        <p:txBody>
-          <a:bodyPr rtlCol="0" anchor="ctr"/>
-          <a:lstStyle/>
-          <a:p>
-            <a:pPr algn="ctr"/>
-          </a:p>
-        </p:txBody>
-      </p:sp>
-      <p:sp>
-        <p:nvSpPr>
-          <p:cNvPr id="21" name="Oval 20"/>
-          <p:cNvSpPr/>
-          <p:nvPr/>
-        </p:nvSpPr>
-        <p:spPr>
-          <a:xfrm>
-            <a:off x="914400" y="4434840"/>
-            <a:ext cx="411480" cy="411480"/>
-          </a:xfrm>
-          <a:prstGeom prst="ellipse">
-            <a:avLst/>
-          </a:prstGeom>
-          <a:solidFill>
-            <a:srgbClr val="FF9F36"/>
-          </a:solidFill>
-          <a:ln>
-            <a:noFill/>
-          </a:ln>
-        </p:spPr>
-        <p:style>
-          <a:lnRef idx="1">
-            <a:schemeClr val="accent1"/>
-          </a:lnRef>
-          <a:fillRef idx="3">
-            <a:schemeClr val="accent1"/>
-          </a:fillRef>
-          <a:effectRef idx="2">
-            <a:schemeClr val="accent1"/>
-          </a:effectRef>
-          <a:fontRef idx="minor">
-            <a:schemeClr val="lt1"/>
-          </a:fontRef>
-        </p:style>
-        <p:txBody>
-          <a:bodyPr rtlCol="0" anchor="ctr"/>
-          <a:lstStyle/>
-          <a:p>
-            <a:pPr algn="ctr"/>
-          </a:p>
-        </p:txBody>
-      </p:sp>
-      <p:sp>
-        <p:nvSpPr>
-          <p:cNvPr id="22" name="TextBox 21"/>
-          <p:cNvSpPr txBox="1"/>
-          <p:nvPr/>
-        </p:nvSpPr>
-        <p:spPr>
-          <a:xfrm>
-            <a:off x="914400" y="4434840"/>
-            <a:ext cx="411480" cy="411480"/>
-          </a:xfrm>
-          <a:prstGeom prst="rect">
-            <a:avLst/>
-          </a:prstGeom>
-          <a:noFill/>
-        </p:spPr>
-        <p:txBody>
-          <a:bodyPr wrap="square" lIns="73152" rIns="73152" tIns="36576" bIns="36576" anchor="ctr">
-            <a:spAutoFit/>
-          </a:bodyPr>
-          <a:lstStyle/>
-          <a:p>
-            <a:pPr algn="ctr">
-              <a:lnSpc>
-                <a:spcPts val="1600"/>
-              </a:lnSpc>
-            </a:pPr>
-            <a:r>
-              <a:rPr sz="1300" b="1" i="0">
-                <a:solidFill>
-                  <a:srgbClr val="FFFFFF"/>
-                </a:solidFill>
-                <a:latin typeface="Segoe UI"/>
-              </a:rPr>
-              <a:t>04</a:t>
-            </a:r>
-          </a:p>
-        </p:txBody>
-      </p:sp>
-      <p:sp>
-        <p:nvSpPr>
-          <p:cNvPr id="23" name="TextBox 22"/>
-          <p:cNvSpPr txBox="1"/>
-          <p:nvPr/>
-        </p:nvSpPr>
-        <p:spPr>
-          <a:xfrm>
-            <a:off x="1554480" y="4370832"/>
-            <a:ext cx="9601200" cy="768096"/>
-          </a:xfrm>
-          <a:prstGeom prst="rect">
-            <a:avLst/>
-          </a:prstGeom>
-          <a:noFill/>
-        </p:spPr>
-        <p:txBody>
-          <a:bodyPr wrap="square" lIns="73152" rIns="73152" tIns="36576" bIns="36576" anchor="ctr">
-            <a:spAutoFit/>
-          </a:bodyPr>
-          <a:lstStyle/>
-          <a:p>
-            <a:pPr algn="l">
-              <a:lnSpc>
-                <a:spcPts val="2000"/>
-              </a:lnSpc>
-            </a:pPr>
-            <a:r>
-              <a:rPr sz="1600" b="0" i="0">
+              <a:t>1-part activation 6 cols @ XL — 79 s, 0.35 credits, $1.37</a:t>
+            </a:r>
+          </a:p>
+          <a:p>
+            <a:pPr>
+              <a:lnSpc>
+                <a:spcPts val="2500"/>
+              </a:lnSpc>
+              <a:spcAft>
+                <a:spcPts val="1000"/>
+              </a:spcAft>
+            </a:pPr>
+            <a:r>
+              <a:rPr sz="800">
+                <a:solidFill>
+                  <a:srgbClr val="29B5E8"/>
+                </a:solidFill>
+                <a:latin typeface="Segoe UI"/>
+              </a:rPr>
+              <a:t>●  </a:t>
+            </a:r>
+            <a:r>
+              <a:rPr sz="1600">
                 <a:solidFill>
                   <a:srgbClr val="2C3E50"/>
                 </a:solidFill>
                 <a:latin typeface="Segoe UI"/>
               </a:rPr>
-              <a:t>Spec Reference — docs.snowflake.com/en/user-guide/cleanrooms/v2/spec-reference</a:t>
-            </a:r>
-          </a:p>
-        </p:txBody>
-      </p:sp>
-      <p:sp>
-        <p:nvSpPr>
-          <p:cNvPr id="24" name="Rounded Rectangle 23"/>
-          <p:cNvSpPr/>
-          <p:nvPr/>
-        </p:nvSpPr>
-        <p:spPr>
-          <a:xfrm>
-            <a:off x="640080" y="5212080"/>
-            <a:ext cx="10911535" cy="804672"/>
-          </a:xfrm>
-          <a:prstGeom prst="roundRect">
-            <a:avLst/>
-          </a:prstGeom>
-          <a:solidFill>
-            <a:srgbClr val="EEF5FA"/>
-          </a:solidFill>
-          <a:ln>
-            <a:noFill/>
-          </a:ln>
-        </p:spPr>
-        <p:style>
-          <a:lnRef idx="1">
-            <a:schemeClr val="accent1"/>
-          </a:lnRef>
-          <a:fillRef idx="3">
-            <a:schemeClr val="accent1"/>
-          </a:fillRef>
-          <a:effectRef idx="2">
-            <a:schemeClr val="accent1"/>
-          </a:effectRef>
-          <a:fontRef idx="minor">
-            <a:schemeClr val="lt1"/>
-          </a:fontRef>
-        </p:style>
-        <p:txBody>
-          <a:bodyPr rtlCol="0" anchor="ctr"/>
-          <a:lstStyle/>
-          <a:p>
-            <a:pPr algn="ctr"/>
-          </a:p>
-        </p:txBody>
-      </p:sp>
-      <p:sp>
-        <p:nvSpPr>
-          <p:cNvPr id="25" name="Oval 24"/>
-          <p:cNvSpPr/>
-          <p:nvPr/>
-        </p:nvSpPr>
-        <p:spPr>
-          <a:xfrm>
-            <a:off x="914400" y="5349240"/>
-            <a:ext cx="411480" cy="411480"/>
-          </a:xfrm>
-          <a:prstGeom prst="ellipse">
-            <a:avLst/>
-          </a:prstGeom>
-          <a:solidFill>
-            <a:srgbClr val="29B5E8"/>
-          </a:solidFill>
-          <a:ln>
-            <a:noFill/>
-          </a:ln>
-        </p:spPr>
-        <p:style>
-          <a:lnRef idx="1">
-            <a:schemeClr val="accent1"/>
-          </a:lnRef>
-          <a:fillRef idx="3">
-            <a:schemeClr val="accent1"/>
-          </a:fillRef>
-          <a:effectRef idx="2">
-            <a:schemeClr val="accent1"/>
-          </a:effectRef>
-          <a:fontRef idx="minor">
-            <a:schemeClr val="lt1"/>
-          </a:fontRef>
-        </p:style>
-        <p:txBody>
-          <a:bodyPr rtlCol="0" anchor="ctr"/>
-          <a:lstStyle/>
-          <a:p>
-            <a:pPr algn="ctr"/>
-          </a:p>
-        </p:txBody>
-      </p:sp>
-      <p:sp>
-        <p:nvSpPr>
-          <p:cNvPr id="26" name="TextBox 25"/>
-          <p:cNvSpPr txBox="1"/>
-          <p:nvPr/>
-        </p:nvSpPr>
-        <p:spPr>
-          <a:xfrm>
-            <a:off x="914400" y="5349240"/>
-            <a:ext cx="411480" cy="411480"/>
-          </a:xfrm>
-          <a:prstGeom prst="rect">
-            <a:avLst/>
-          </a:prstGeom>
-          <a:noFill/>
-        </p:spPr>
-        <p:txBody>
-          <a:bodyPr wrap="square" lIns="73152" rIns="73152" tIns="36576" bIns="36576" anchor="ctr">
-            <a:spAutoFit/>
-          </a:bodyPr>
-          <a:lstStyle/>
-          <a:p>
-            <a:pPr algn="ctr">
-              <a:lnSpc>
-                <a:spcPts val="1600"/>
-              </a:lnSpc>
-            </a:pPr>
-            <a:r>
-              <a:rPr sz="1300" b="1" i="0">
-                <a:solidFill>
-                  <a:srgbClr val="FFFFFF"/>
-                </a:solidFill>
-                <a:latin typeface="Segoe UI"/>
-              </a:rPr>
-              <a:t>05</a:t>
-            </a:r>
-          </a:p>
-        </p:txBody>
-      </p:sp>
-      <p:sp>
-        <p:nvSpPr>
-          <p:cNvPr id="27" name="TextBox 26"/>
-          <p:cNvSpPr txBox="1"/>
-          <p:nvPr/>
-        </p:nvSpPr>
-        <p:spPr>
-          <a:xfrm>
-            <a:off x="1554480" y="5285232"/>
-            <a:ext cx="9601200" cy="768096"/>
-          </a:xfrm>
-          <a:prstGeom prst="rect">
-            <a:avLst/>
-          </a:prstGeom>
-          <a:noFill/>
-        </p:spPr>
-        <p:txBody>
-          <a:bodyPr wrap="square" lIns="73152" rIns="73152" tIns="36576" bIns="36576" anchor="ctr">
-            <a:spAutoFit/>
-          </a:bodyPr>
-          <a:lstStyle/>
-          <a:p>
-            <a:pPr algn="l">
-              <a:lnSpc>
-                <a:spcPts val="2000"/>
-              </a:lnSpc>
-            </a:pPr>
-            <a:r>
-              <a:rPr sz="1600" b="0" i="0">
+              <a:t>8-part activation 6 cols @ XL — 79 s, 0.35 credits, $1.37</a:t>
+            </a:r>
+          </a:p>
+          <a:p>
+            <a:pPr>
+              <a:lnSpc>
+                <a:spcPts val="2500"/>
+              </a:lnSpc>
+              <a:spcAft>
+                <a:spcPts val="1000"/>
+              </a:spcAft>
+            </a:pPr>
+            <a:r>
+              <a:rPr sz="800">
+                <a:solidFill>
+                  <a:srgbClr val="29B5E8"/>
+                </a:solidFill>
+                <a:latin typeface="Segoe UI"/>
+              </a:rPr>
+              <a:t>●  </a:t>
+            </a:r>
+            <a:r>
+              <a:rPr sz="1600">
                 <a:solidFill>
                   <a:srgbClr val="2C3E50"/>
                 </a:solidFill>
                 <a:latin typeface="Segoe UI"/>
               </a:rPr>
-              <a:t>API Reference — docs.snowflake.com/en/user-guide/cleanrooms/v2/v2-api-reference</a:t>
-            </a:r>
-          </a:p>
-        </p:txBody>
-      </p:sp>
-      <p:sp>
-        <p:nvSpPr>
-          <p:cNvPr id="28" name="TextBox 27"/>
+              <a:t>1-part activation 1007 cols @ XL — 71 min, 19.04 credits, $74.3 ← NEW</a:t>
+            </a:r>
+          </a:p>
+          <a:p>
+            <a:pPr>
+              <a:lnSpc>
+                <a:spcPts val="2500"/>
+              </a:lnSpc>
+              <a:spcAft>
+                <a:spcPts val="1000"/>
+              </a:spcAft>
+            </a:pPr>
+            <a:r>
+              <a:rPr sz="800">
+                <a:solidFill>
+                  <a:srgbClr val="29B5E8"/>
+                </a:solidFill>
+                <a:latin typeface="Segoe UI"/>
+              </a:rPr>
+              <a:t>●  </a:t>
+            </a:r>
+            <a:r>
+              <a:rPr sz="1600">
+                <a:solidFill>
+                  <a:srgbClr val="2C3E50"/>
+                </a:solidFill>
+                <a:latin typeface="Segoe UI"/>
+              </a:rPr>
+              <a:t>8-part activation 1007 cols @ XL — 83 min, 22.2 credits, $86.6</a:t>
+            </a:r>
+          </a:p>
+          <a:p>
+            <a:pPr>
+              <a:lnSpc>
+                <a:spcPts val="2500"/>
+              </a:lnSpc>
+              <a:spcAft>
+                <a:spcPts val="1000"/>
+              </a:spcAft>
+            </a:pPr>
+            <a:r>
+              <a:rPr sz="800">
+                <a:solidFill>
+                  <a:srgbClr val="29B5E8"/>
+                </a:solidFill>
+                <a:latin typeface="Segoe UI"/>
+              </a:rPr>
+              <a:t>●  </a:t>
+            </a:r>
+            <a:r>
+              <a:rPr sz="1600">
+                <a:solidFill>
+                  <a:srgbClr val="2C3E50"/>
+                </a:solidFill>
+                <a:latin typeface="Segoe UI"/>
+              </a:rPr>
+              <a:t>8-part activation 1007 cols @ 2XL — 45 min, 23.8 credits, $93.0</a:t>
+            </a:r>
+          </a:p>
+        </p:txBody>
+      </p:sp>
+      <p:sp>
+        <p:nvSpPr>
+          <p:cNvPr id="9" name="TextBox 8"/>
           <p:cNvSpPr txBox="1"/>
           <p:nvPr/>
         </p:nvSpPr>
@@ -38848,7 +38700,7 @@
                 </a:solidFill>
                 <a:latin typeface="Segoe UI"/>
               </a:rPr>
-              <a:t>DCR Collaboration API v2 | SFSEAPAC | 2026   ·   49 / 51</a:t>
+              <a:t>DCR Collaboration API v2 | SFSEAPAC | 2026   ·   49 / 56</a:t>
             </a:r>
           </a:p>
         </p:txBody>
@@ -39499,7 +39351,7 @@
                 </a:solidFill>
                 <a:latin typeface="Segoe UI"/>
               </a:rPr>
-              <a:t>DCR Collaboration API v2 | SFSEAPAC | 2026   ·   5 / 51</a:t>
+              <a:t>DCR Collaboration API v2 | SFSEAPAC | 2026   ·   5 / 56</a:t>
             </a:r>
           </a:p>
         </p:txBody>
@@ -39518,7 +39370,7 @@
     <p:bg>
       <p:bgPr>
         <a:solidFill>
-          <a:srgbClr val="0D1B2A"/>
+          <a:srgbClr val="FFFFFF"/>
         </a:solidFill>
         <a:effectLst/>
       </p:bgPr>
@@ -39538,14 +39390,14 @@
         </p:nvSpPr>
         <p:spPr>
           <a:xfrm>
-            <a:off x="9905695" y="-731520"/>
-            <a:ext cx="2743200" cy="2743200"/>
+            <a:off x="9631375" y="-914400"/>
+            <a:ext cx="3200400" cy="3200400"/>
           </a:xfrm>
           <a:prstGeom prst="ellipse">
             <a:avLst/>
           </a:prstGeom>
           <a:solidFill>
-            <a:srgbClr val="223850"/>
+            <a:srgbClr val="D6EFF8"/>
           </a:solidFill>
           <a:ln>
             <a:noFill/>
@@ -39581,14 +39433,14 @@
         </p:nvSpPr>
         <p:spPr>
           <a:xfrm>
-            <a:off x="8076895" y="5486400"/>
+            <a:off x="-640080" y="5029200"/>
             <a:ext cx="1828800" cy="1828800"/>
           </a:xfrm>
           <a:prstGeom prst="ellipse">
             <a:avLst/>
           </a:prstGeom>
           <a:solidFill>
-            <a:srgbClr val="1F344C"/>
+            <a:srgbClr val="E8F4FD"/>
           </a:solidFill>
           <a:ln>
             <a:noFill/>
@@ -39616,103 +39468,9 @@
           </a:p>
         </p:txBody>
       </p:sp>
-      <p:sp>
-        <p:nvSpPr>
-          <p:cNvPr id="4" name="Oval 3"/>
-          <p:cNvSpPr/>
-          <p:nvPr/>
-        </p:nvSpPr>
-        <p:spPr>
-          <a:xfrm>
-            <a:off x="-457200" y="4572000"/>
-            <a:ext cx="1371600" cy="1371600"/>
-          </a:xfrm>
-          <a:prstGeom prst="ellipse">
-            <a:avLst/>
-          </a:prstGeom>
-          <a:solidFill>
-            <a:srgbClr val="20354D"/>
-          </a:solidFill>
-          <a:ln>
-            <a:noFill/>
-          </a:ln>
-        </p:spPr>
-        <p:style>
-          <a:lnRef idx="1">
-            <a:schemeClr val="accent1"/>
-          </a:lnRef>
-          <a:fillRef idx="3">
-            <a:schemeClr val="accent1"/>
-          </a:fillRef>
-          <a:effectRef idx="2">
-            <a:schemeClr val="accent1"/>
-          </a:effectRef>
-          <a:fontRef idx="minor">
-            <a:schemeClr val="lt1"/>
-          </a:fontRef>
-        </p:style>
-        <p:txBody>
-          <a:bodyPr rtlCol="0" anchor="ctr"/>
-          <a:lstStyle/>
-          <a:p>
-            <a:pPr algn="ctr"/>
-          </a:p>
-        </p:txBody>
-      </p:sp>
-      <p:sp>
-        <p:nvSpPr>
-          <p:cNvPr id="5" name="Rectangle 4"/>
-          <p:cNvSpPr/>
-          <p:nvPr/>
-        </p:nvSpPr>
-        <p:spPr>
-          <a:xfrm>
-            <a:off x="0" y="0"/>
-            <a:ext cx="12191695" cy="54864"/>
-          </a:xfrm>
-          <a:prstGeom prst="rect">
-            <a:avLst/>
-          </a:prstGeom>
-          <a:gradFill rotWithShape="1">
-            <a:gsLst>
-              <a:gs pos="0">
-                <a:srgbClr val="29B5E8"/>
-              </a:gs>
-              <a:gs pos="100000">
-                <a:srgbClr val="71D3DC"/>
-              </a:gs>
-            </a:gsLst>
-            <a:lin scaled="0" ang="16200000"/>
-          </a:gradFill>
-          <a:ln>
-            <a:noFill/>
-          </a:ln>
-        </p:spPr>
-        <p:style>
-          <a:lnRef idx="1">
-            <a:schemeClr val="accent1"/>
-          </a:lnRef>
-          <a:fillRef idx="3">
-            <a:schemeClr val="accent1"/>
-          </a:fillRef>
-          <a:effectRef idx="2">
-            <a:schemeClr val="accent1"/>
-          </a:effectRef>
-          <a:fontRef idx="minor">
-            <a:schemeClr val="lt1"/>
-          </a:fontRef>
-        </p:style>
-        <p:txBody>
-          <a:bodyPr rtlCol="0" anchor="ctr"/>
-          <a:lstStyle/>
-          <a:p>
-            <a:pPr algn="ctr"/>
-          </a:p>
-        </p:txBody>
-      </p:sp>
       <p:pic>
         <p:nvPicPr>
-          <p:cNvPr id="6" name="Picture 5" descr="snowflake_icon_white.png"/>
+          <p:cNvPr id="4" name="Picture 3" descr="snowflake_icon_blue.png"/>
           <p:cNvPicPr>
             <a:picLocks noChangeAspect="1"/>
           </p:cNvPicPr>
@@ -39726,8 +39484,8 @@
         </p:blipFill>
         <p:spPr>
           <a:xfrm>
-            <a:off x="11368735" y="320040"/>
-            <a:ext cx="399301" cy="365760"/>
+            <a:off x="11414455" y="320040"/>
+            <a:ext cx="349389" cy="320040"/>
           </a:xfrm>
           <a:prstGeom prst="rect">
             <a:avLst/>
@@ -39736,20 +39494,20 @@
       </p:pic>
       <p:sp>
         <p:nvSpPr>
-          <p:cNvPr id="7" name="Oval 6"/>
+          <p:cNvPr id="5" name="Rectangle 4"/>
           <p:cNvSpPr/>
           <p:nvPr/>
         </p:nvSpPr>
         <p:spPr>
           <a:xfrm>
-            <a:off x="914400" y="1371600"/>
-            <a:ext cx="1097280" cy="1097280"/>
-          </a:xfrm>
-          <a:prstGeom prst="ellipse">
-            <a:avLst/>
-          </a:prstGeom>
-          <a:solidFill>
-            <a:srgbClr val="15283C"/>
+            <a:off x="548640" y="457200"/>
+            <a:ext cx="54864" cy="502920"/>
+          </a:xfrm>
+          <a:prstGeom prst="rect">
+            <a:avLst/>
+          </a:prstGeom>
+          <a:solidFill>
+            <a:srgbClr val="29B5E8"/>
           </a:solidFill>
           <a:ln>
             <a:noFill/>
@@ -39779,14 +39537,14 @@
       </p:sp>
       <p:sp>
         <p:nvSpPr>
-          <p:cNvPr id="8" name="TextBox 7"/>
+          <p:cNvPr id="6" name="TextBox 5"/>
           <p:cNvSpPr txBox="1"/>
           <p:nvPr/>
         </p:nvSpPr>
         <p:spPr>
           <a:xfrm>
-            <a:off x="777240" y="1005840"/>
-            <a:ext cx="1371600" cy="1645920"/>
+            <a:off x="777240" y="411480"/>
+            <a:ext cx="10058400" cy="640080"/>
           </a:xfrm>
           <a:prstGeom prst="rect">
             <a:avLst/>
@@ -39801,31 +39559,886 @@
           <a:p>
             <a:pPr algn="l">
               <a:lnSpc>
-                <a:spcPts val="15600"/>
-              </a:lnSpc>
-            </a:pPr>
-            <a:r>
-              <a:rPr sz="12000" b="0" i="0">
-                <a:solidFill>
-                  <a:srgbClr val="29B5E8"/>
-                </a:solidFill>
-                <a:latin typeface="Georgia"/>
-              </a:rPr>
-              <a:t>“</a:t>
-            </a:r>
-          </a:p>
-        </p:txBody>
-      </p:sp>
-      <p:sp>
-        <p:nvSpPr>
-          <p:cNvPr id="9" name="TextBox 8"/>
+                <a:spcPts val="3900"/>
+              </a:lnSpc>
+            </a:pPr>
+            <a:r>
+              <a:rPr sz="3000" b="1" i="0">
+                <a:solidFill>
+                  <a:srgbClr val="1B2A3D"/>
+                </a:solidFill>
+                <a:latin typeface="Calibri Light"/>
+              </a:rPr>
+              <a:t>Insight — 64× Rows tapi Hanya 1.18× Lebih Lama</a:t>
+            </a:r>
+          </a:p>
+        </p:txBody>
+      </p:sp>
+      <p:cxnSp>
+        <p:nvCxnSpPr>
+          <p:cNvPr id="7" name="Connector 6"/>
+          <p:cNvCxnSpPr/>
+          <p:nvPr/>
+        </p:nvCxnSpPr>
+        <p:spPr>
+          <a:xfrm>
+            <a:off x="548640" y="1234440"/>
+            <a:ext cx="11094415" cy="0"/>
+          </a:xfrm>
+          <a:prstGeom prst="line">
+            <a:avLst/>
+          </a:prstGeom>
+          <a:ln w="12700">
+            <a:solidFill>
+              <a:srgbClr val="DEE3EA"/>
+            </a:solidFill>
+          </a:ln>
+        </p:spPr>
+        <p:style>
+          <a:lnRef idx="2">
+            <a:schemeClr val="accent1"/>
+          </a:lnRef>
+          <a:fillRef idx="0">
+            <a:schemeClr val="accent1"/>
+          </a:fillRef>
+          <a:effectRef idx="1">
+            <a:schemeClr val="accent1"/>
+          </a:effectRef>
+          <a:fontRef idx="minor">
+            <a:schemeClr val="tx1"/>
+          </a:fontRef>
+        </p:style>
+      </p:cxnSp>
+      <p:sp>
+        <p:nvSpPr>
+          <p:cNvPr id="8" name="Rounded Rectangle 7"/>
+          <p:cNvSpPr/>
+          <p:nvPr/>
+        </p:nvSpPr>
+        <p:spPr>
+          <a:xfrm>
+            <a:off x="640080" y="1554480"/>
+            <a:ext cx="10911535" cy="804672"/>
+          </a:xfrm>
+          <a:prstGeom prst="roundRect">
+            <a:avLst/>
+          </a:prstGeom>
+          <a:solidFill>
+            <a:srgbClr val="EEF5FA"/>
+          </a:solidFill>
+          <a:ln>
+            <a:noFill/>
+          </a:ln>
+        </p:spPr>
+        <p:style>
+          <a:lnRef idx="1">
+            <a:schemeClr val="accent1"/>
+          </a:lnRef>
+          <a:fillRef idx="3">
+            <a:schemeClr val="accent1"/>
+          </a:fillRef>
+          <a:effectRef idx="2">
+            <a:schemeClr val="accent1"/>
+          </a:effectRef>
+          <a:fontRef idx="minor">
+            <a:schemeClr val="lt1"/>
+          </a:fontRef>
+        </p:style>
+        <p:txBody>
+          <a:bodyPr rtlCol="0" anchor="ctr"/>
+          <a:lstStyle/>
+          <a:p>
+            <a:pPr algn="ctr"/>
+          </a:p>
+        </p:txBody>
+      </p:sp>
+      <p:sp>
+        <p:nvSpPr>
+          <p:cNvPr id="9" name="Oval 8"/>
+          <p:cNvSpPr/>
+          <p:nvPr/>
+        </p:nvSpPr>
+        <p:spPr>
+          <a:xfrm>
+            <a:off x="914400" y="1691640"/>
+            <a:ext cx="411480" cy="411480"/>
+          </a:xfrm>
+          <a:prstGeom prst="ellipse">
+            <a:avLst/>
+          </a:prstGeom>
+          <a:solidFill>
+            <a:srgbClr val="29B5E8"/>
+          </a:solidFill>
+          <a:ln>
+            <a:noFill/>
+          </a:ln>
+        </p:spPr>
+        <p:style>
+          <a:lnRef idx="1">
+            <a:schemeClr val="accent1"/>
+          </a:lnRef>
+          <a:fillRef idx="3">
+            <a:schemeClr val="accent1"/>
+          </a:fillRef>
+          <a:effectRef idx="2">
+            <a:schemeClr val="accent1"/>
+          </a:effectRef>
+          <a:fontRef idx="minor">
+            <a:schemeClr val="lt1"/>
+          </a:fontRef>
+        </p:style>
+        <p:txBody>
+          <a:bodyPr rtlCol="0" anchor="ctr"/>
+          <a:lstStyle/>
+          <a:p>
+            <a:pPr algn="ctr"/>
+          </a:p>
+        </p:txBody>
+      </p:sp>
+      <p:sp>
+        <p:nvSpPr>
+          <p:cNvPr id="10" name="TextBox 9"/>
           <p:cNvSpPr txBox="1"/>
           <p:nvPr/>
         </p:nvSpPr>
         <p:spPr>
           <a:xfrm>
-            <a:off x="1371600" y="2560320"/>
-            <a:ext cx="9601200" cy="2560320"/>
+            <a:off x="914400" y="1691640"/>
+            <a:ext cx="411480" cy="411480"/>
+          </a:xfrm>
+          <a:prstGeom prst="rect">
+            <a:avLst/>
+          </a:prstGeom>
+          <a:noFill/>
+        </p:spPr>
+        <p:txBody>
+          <a:bodyPr wrap="square" lIns="73152" rIns="73152" tIns="36576" bIns="36576" anchor="ctr">
+            <a:spAutoFit/>
+          </a:bodyPr>
+          <a:lstStyle/>
+          <a:p>
+            <a:pPr algn="ctr">
+              <a:lnSpc>
+                <a:spcPts val="1600"/>
+              </a:lnSpc>
+            </a:pPr>
+            <a:r>
+              <a:rPr sz="1300" b="1" i="0">
+                <a:solidFill>
+                  <a:srgbClr val="FFFFFF"/>
+                </a:solidFill>
+                <a:latin typeface="Segoe UI"/>
+              </a:rPr>
+              <a:t>01</a:t>
+            </a:r>
+          </a:p>
+        </p:txBody>
+      </p:sp>
+      <p:sp>
+        <p:nvSpPr>
+          <p:cNvPr id="11" name="TextBox 10"/>
+          <p:cNvSpPr txBox="1"/>
+          <p:nvPr/>
+        </p:nvSpPr>
+        <p:spPr>
+          <a:xfrm>
+            <a:off x="1554480" y="1627632"/>
+            <a:ext cx="9601200" cy="768096"/>
+          </a:xfrm>
+          <a:prstGeom prst="rect">
+            <a:avLst/>
+          </a:prstGeom>
+          <a:noFill/>
+        </p:spPr>
+        <p:txBody>
+          <a:bodyPr wrap="square" lIns="73152" rIns="73152" tIns="36576" bIns="36576" anchor="ctr">
+            <a:spAutoFit/>
+          </a:bodyPr>
+          <a:lstStyle/>
+          <a:p>
+            <a:pPr algn="l">
+              <a:lnSpc>
+                <a:spcPts val="2000"/>
+              </a:lnSpc>
+            </a:pPr>
+            <a:r>
+              <a:rPr sz="1600" b="0" i="0">
+                <a:solidFill>
+                  <a:srgbClr val="2C3E50"/>
+                </a:solidFill>
+                <a:latin typeface="Segoe UI"/>
+              </a:rPr>
+              <a:t>secure_run_v2 bottleneck bukan volume data, tapi VARIANT serialization overhead per 1007 keys</a:t>
+            </a:r>
+          </a:p>
+        </p:txBody>
+      </p:sp>
+      <p:sp>
+        <p:nvSpPr>
+          <p:cNvPr id="12" name="Rounded Rectangle 11"/>
+          <p:cNvSpPr/>
+          <p:nvPr/>
+        </p:nvSpPr>
+        <p:spPr>
+          <a:xfrm>
+            <a:off x="640080" y="2468880"/>
+            <a:ext cx="10911535" cy="804672"/>
+          </a:xfrm>
+          <a:prstGeom prst="roundRect">
+            <a:avLst/>
+          </a:prstGeom>
+          <a:solidFill>
+            <a:srgbClr val="F4F8FB"/>
+          </a:solidFill>
+          <a:ln>
+            <a:noFill/>
+          </a:ln>
+        </p:spPr>
+        <p:style>
+          <a:lnRef idx="1">
+            <a:schemeClr val="accent1"/>
+          </a:lnRef>
+          <a:fillRef idx="3">
+            <a:schemeClr val="accent1"/>
+          </a:fillRef>
+          <a:effectRef idx="2">
+            <a:schemeClr val="accent1"/>
+          </a:effectRef>
+          <a:fontRef idx="minor">
+            <a:schemeClr val="lt1"/>
+          </a:fontRef>
+        </p:style>
+        <p:txBody>
+          <a:bodyPr rtlCol="0" anchor="ctr"/>
+          <a:lstStyle/>
+          <a:p>
+            <a:pPr algn="ctr"/>
+          </a:p>
+        </p:txBody>
+      </p:sp>
+      <p:sp>
+        <p:nvSpPr>
+          <p:cNvPr id="13" name="Oval 12"/>
+          <p:cNvSpPr/>
+          <p:nvPr/>
+        </p:nvSpPr>
+        <p:spPr>
+          <a:xfrm>
+            <a:off x="914400" y="2606040"/>
+            <a:ext cx="411480" cy="411480"/>
+          </a:xfrm>
+          <a:prstGeom prst="ellipse">
+            <a:avLst/>
+          </a:prstGeom>
+          <a:solidFill>
+            <a:srgbClr val="11567F"/>
+          </a:solidFill>
+          <a:ln>
+            <a:noFill/>
+          </a:ln>
+        </p:spPr>
+        <p:style>
+          <a:lnRef idx="1">
+            <a:schemeClr val="accent1"/>
+          </a:lnRef>
+          <a:fillRef idx="3">
+            <a:schemeClr val="accent1"/>
+          </a:fillRef>
+          <a:effectRef idx="2">
+            <a:schemeClr val="accent1"/>
+          </a:effectRef>
+          <a:fontRef idx="minor">
+            <a:schemeClr val="lt1"/>
+          </a:fontRef>
+        </p:style>
+        <p:txBody>
+          <a:bodyPr rtlCol="0" anchor="ctr"/>
+          <a:lstStyle/>
+          <a:p>
+            <a:pPr algn="ctr"/>
+          </a:p>
+        </p:txBody>
+      </p:sp>
+      <p:sp>
+        <p:nvSpPr>
+          <p:cNvPr id="14" name="TextBox 13"/>
+          <p:cNvSpPr txBox="1"/>
+          <p:nvPr/>
+        </p:nvSpPr>
+        <p:spPr>
+          <a:xfrm>
+            <a:off x="914400" y="2606040"/>
+            <a:ext cx="411480" cy="411480"/>
+          </a:xfrm>
+          <a:prstGeom prst="rect">
+            <a:avLst/>
+          </a:prstGeom>
+          <a:noFill/>
+        </p:spPr>
+        <p:txBody>
+          <a:bodyPr wrap="square" lIns="73152" rIns="73152" tIns="36576" bIns="36576" anchor="ctr">
+            <a:spAutoFit/>
+          </a:bodyPr>
+          <a:lstStyle/>
+          <a:p>
+            <a:pPr algn="ctr">
+              <a:lnSpc>
+                <a:spcPts val="1600"/>
+              </a:lnSpc>
+            </a:pPr>
+            <a:r>
+              <a:rPr sz="1300" b="1" i="0">
+                <a:solidFill>
+                  <a:srgbClr val="FFFFFF"/>
+                </a:solidFill>
+                <a:latin typeface="Segoe UI"/>
+              </a:rPr>
+              <a:t>02</a:t>
+            </a:r>
+          </a:p>
+        </p:txBody>
+      </p:sp>
+      <p:sp>
+        <p:nvSpPr>
+          <p:cNvPr id="15" name="TextBox 14"/>
+          <p:cNvSpPr txBox="1"/>
+          <p:nvPr/>
+        </p:nvSpPr>
+        <p:spPr>
+          <a:xfrm>
+            <a:off x="1554480" y="2542032"/>
+            <a:ext cx="9601200" cy="768096"/>
+          </a:xfrm>
+          <a:prstGeom prst="rect">
+            <a:avLst/>
+          </a:prstGeom>
+          <a:noFill/>
+        </p:spPr>
+        <p:txBody>
+          <a:bodyPr wrap="square" lIns="73152" rIns="73152" tIns="36576" bIns="36576" anchor="ctr">
+            <a:spAutoFit/>
+          </a:bodyPr>
+          <a:lstStyle/>
+          <a:p>
+            <a:pPr algn="l">
+              <a:lnSpc>
+                <a:spcPts val="2000"/>
+              </a:lnSpc>
+            </a:pPr>
+            <a:r>
+              <a:rPr sz="1600" b="0" i="0">
+                <a:solidFill>
+                  <a:srgbClr val="2C3E50"/>
+                </a:solidFill>
+                <a:latin typeface="Segoe UI"/>
+              </a:rPr>
+              <a:t>700k rows (1 part) vs 44.8M rows (8 part) → hanya ~13 min delta (18% slower)</a:t>
+            </a:r>
+          </a:p>
+        </p:txBody>
+      </p:sp>
+      <p:sp>
+        <p:nvSpPr>
+          <p:cNvPr id="16" name="Rounded Rectangle 15"/>
+          <p:cNvSpPr/>
+          <p:nvPr/>
+        </p:nvSpPr>
+        <p:spPr>
+          <a:xfrm>
+            <a:off x="640080" y="3383280"/>
+            <a:ext cx="10911535" cy="804672"/>
+          </a:xfrm>
+          <a:prstGeom prst="roundRect">
+            <a:avLst/>
+          </a:prstGeom>
+          <a:solidFill>
+            <a:srgbClr val="EEF5FA"/>
+          </a:solidFill>
+          <a:ln>
+            <a:noFill/>
+          </a:ln>
+        </p:spPr>
+        <p:style>
+          <a:lnRef idx="1">
+            <a:schemeClr val="accent1"/>
+          </a:lnRef>
+          <a:fillRef idx="3">
+            <a:schemeClr val="accent1"/>
+          </a:fillRef>
+          <a:effectRef idx="2">
+            <a:schemeClr val="accent1"/>
+          </a:effectRef>
+          <a:fontRef idx="minor">
+            <a:schemeClr val="lt1"/>
+          </a:fontRef>
+        </p:style>
+        <p:txBody>
+          <a:bodyPr rtlCol="0" anchor="ctr"/>
+          <a:lstStyle/>
+          <a:p>
+            <a:pPr algn="ctr"/>
+          </a:p>
+        </p:txBody>
+      </p:sp>
+      <p:sp>
+        <p:nvSpPr>
+          <p:cNvPr id="17" name="Oval 16"/>
+          <p:cNvSpPr/>
+          <p:nvPr/>
+        </p:nvSpPr>
+        <p:spPr>
+          <a:xfrm>
+            <a:off x="914400" y="3520440"/>
+            <a:ext cx="411480" cy="411480"/>
+          </a:xfrm>
+          <a:prstGeom prst="ellipse">
+            <a:avLst/>
+          </a:prstGeom>
+          <a:solidFill>
+            <a:srgbClr val="71D3DC"/>
+          </a:solidFill>
+          <a:ln>
+            <a:noFill/>
+          </a:ln>
+        </p:spPr>
+        <p:style>
+          <a:lnRef idx="1">
+            <a:schemeClr val="accent1"/>
+          </a:lnRef>
+          <a:fillRef idx="3">
+            <a:schemeClr val="accent1"/>
+          </a:fillRef>
+          <a:effectRef idx="2">
+            <a:schemeClr val="accent1"/>
+          </a:effectRef>
+          <a:fontRef idx="minor">
+            <a:schemeClr val="lt1"/>
+          </a:fontRef>
+        </p:style>
+        <p:txBody>
+          <a:bodyPr rtlCol="0" anchor="ctr"/>
+          <a:lstStyle/>
+          <a:p>
+            <a:pPr algn="ctr"/>
+          </a:p>
+        </p:txBody>
+      </p:sp>
+      <p:sp>
+        <p:nvSpPr>
+          <p:cNvPr id="18" name="TextBox 17"/>
+          <p:cNvSpPr txBox="1"/>
+          <p:nvPr/>
+        </p:nvSpPr>
+        <p:spPr>
+          <a:xfrm>
+            <a:off x="914400" y="3520440"/>
+            <a:ext cx="411480" cy="411480"/>
+          </a:xfrm>
+          <a:prstGeom prst="rect">
+            <a:avLst/>
+          </a:prstGeom>
+          <a:noFill/>
+        </p:spPr>
+        <p:txBody>
+          <a:bodyPr wrap="square" lIns="73152" rIns="73152" tIns="36576" bIns="36576" anchor="ctr">
+            <a:spAutoFit/>
+          </a:bodyPr>
+          <a:lstStyle/>
+          <a:p>
+            <a:pPr algn="ctr">
+              <a:lnSpc>
+                <a:spcPts val="1600"/>
+              </a:lnSpc>
+            </a:pPr>
+            <a:r>
+              <a:rPr sz="1300" b="1" i="0">
+                <a:solidFill>
+                  <a:srgbClr val="FFFFFF"/>
+                </a:solidFill>
+                <a:latin typeface="Segoe UI"/>
+              </a:rPr>
+              <a:t>03</a:t>
+            </a:r>
+          </a:p>
+        </p:txBody>
+      </p:sp>
+      <p:sp>
+        <p:nvSpPr>
+          <p:cNvPr id="19" name="TextBox 18"/>
+          <p:cNvSpPr txBox="1"/>
+          <p:nvPr/>
+        </p:nvSpPr>
+        <p:spPr>
+          <a:xfrm>
+            <a:off x="1554480" y="3456432"/>
+            <a:ext cx="9601200" cy="768096"/>
+          </a:xfrm>
+          <a:prstGeom prst="rect">
+            <a:avLst/>
+          </a:prstGeom>
+          <a:noFill/>
+        </p:spPr>
+        <p:txBody>
+          <a:bodyPr wrap="square" lIns="73152" rIns="73152" tIns="36576" bIns="36576" anchor="ctr">
+            <a:spAutoFit/>
+          </a:bodyPr>
+          <a:lstStyle/>
+          <a:p>
+            <a:pPr algn="l">
+              <a:lnSpc>
+                <a:spcPts val="2000"/>
+              </a:lnSpc>
+            </a:pPr>
+            <a:r>
+              <a:rPr sz="1600" b="0" i="0">
+                <a:solidFill>
+                  <a:srgbClr val="2C3E50"/>
+                </a:solidFill>
+                <a:latin typeface="Segoe UI"/>
+              </a:rPr>
+              <a:t>Framework latency native-app (validate, build, serialize) dominasi — data scan cepat</a:t>
+            </a:r>
+          </a:p>
+        </p:txBody>
+      </p:sp>
+      <p:sp>
+        <p:nvSpPr>
+          <p:cNvPr id="20" name="Rounded Rectangle 19"/>
+          <p:cNvSpPr/>
+          <p:nvPr/>
+        </p:nvSpPr>
+        <p:spPr>
+          <a:xfrm>
+            <a:off x="640080" y="4297680"/>
+            <a:ext cx="10911535" cy="804672"/>
+          </a:xfrm>
+          <a:prstGeom prst="roundRect">
+            <a:avLst/>
+          </a:prstGeom>
+          <a:solidFill>
+            <a:srgbClr val="F4F8FB"/>
+          </a:solidFill>
+          <a:ln>
+            <a:noFill/>
+          </a:ln>
+        </p:spPr>
+        <p:style>
+          <a:lnRef idx="1">
+            <a:schemeClr val="accent1"/>
+          </a:lnRef>
+          <a:fillRef idx="3">
+            <a:schemeClr val="accent1"/>
+          </a:fillRef>
+          <a:effectRef idx="2">
+            <a:schemeClr val="accent1"/>
+          </a:effectRef>
+          <a:fontRef idx="minor">
+            <a:schemeClr val="lt1"/>
+          </a:fontRef>
+        </p:style>
+        <p:txBody>
+          <a:bodyPr rtlCol="0" anchor="ctr"/>
+          <a:lstStyle/>
+          <a:p>
+            <a:pPr algn="ctr"/>
+          </a:p>
+        </p:txBody>
+      </p:sp>
+      <p:sp>
+        <p:nvSpPr>
+          <p:cNvPr id="21" name="Oval 20"/>
+          <p:cNvSpPr/>
+          <p:nvPr/>
+        </p:nvSpPr>
+        <p:spPr>
+          <a:xfrm>
+            <a:off x="914400" y="4434840"/>
+            <a:ext cx="411480" cy="411480"/>
+          </a:xfrm>
+          <a:prstGeom prst="ellipse">
+            <a:avLst/>
+          </a:prstGeom>
+          <a:solidFill>
+            <a:srgbClr val="FF9F36"/>
+          </a:solidFill>
+          <a:ln>
+            <a:noFill/>
+          </a:ln>
+        </p:spPr>
+        <p:style>
+          <a:lnRef idx="1">
+            <a:schemeClr val="accent1"/>
+          </a:lnRef>
+          <a:fillRef idx="3">
+            <a:schemeClr val="accent1"/>
+          </a:fillRef>
+          <a:effectRef idx="2">
+            <a:schemeClr val="accent1"/>
+          </a:effectRef>
+          <a:fontRef idx="minor">
+            <a:schemeClr val="lt1"/>
+          </a:fontRef>
+        </p:style>
+        <p:txBody>
+          <a:bodyPr rtlCol="0" anchor="ctr"/>
+          <a:lstStyle/>
+          <a:p>
+            <a:pPr algn="ctr"/>
+          </a:p>
+        </p:txBody>
+      </p:sp>
+      <p:sp>
+        <p:nvSpPr>
+          <p:cNvPr id="22" name="TextBox 21"/>
+          <p:cNvSpPr txBox="1"/>
+          <p:nvPr/>
+        </p:nvSpPr>
+        <p:spPr>
+          <a:xfrm>
+            <a:off x="914400" y="4434840"/>
+            <a:ext cx="411480" cy="411480"/>
+          </a:xfrm>
+          <a:prstGeom prst="rect">
+            <a:avLst/>
+          </a:prstGeom>
+          <a:noFill/>
+        </p:spPr>
+        <p:txBody>
+          <a:bodyPr wrap="square" lIns="73152" rIns="73152" tIns="36576" bIns="36576" anchor="ctr">
+            <a:spAutoFit/>
+          </a:bodyPr>
+          <a:lstStyle/>
+          <a:p>
+            <a:pPr algn="ctr">
+              <a:lnSpc>
+                <a:spcPts val="1600"/>
+              </a:lnSpc>
+            </a:pPr>
+            <a:r>
+              <a:rPr sz="1300" b="1" i="0">
+                <a:solidFill>
+                  <a:srgbClr val="FFFFFF"/>
+                </a:solidFill>
+                <a:latin typeface="Segoe UI"/>
+              </a:rPr>
+              <a:t>04</a:t>
+            </a:r>
+          </a:p>
+        </p:txBody>
+      </p:sp>
+      <p:sp>
+        <p:nvSpPr>
+          <p:cNvPr id="23" name="TextBox 22"/>
+          <p:cNvSpPr txBox="1"/>
+          <p:nvPr/>
+        </p:nvSpPr>
+        <p:spPr>
+          <a:xfrm>
+            <a:off x="1554480" y="4370832"/>
+            <a:ext cx="9601200" cy="768096"/>
+          </a:xfrm>
+          <a:prstGeom prst="rect">
+            <a:avLst/>
+          </a:prstGeom>
+          <a:noFill/>
+        </p:spPr>
+        <p:txBody>
+          <a:bodyPr wrap="square" lIns="73152" rIns="73152" tIns="36576" bIns="36576" anchor="ctr">
+            <a:spAutoFit/>
+          </a:bodyPr>
+          <a:lstStyle/>
+          <a:p>
+            <a:pPr algn="l">
+              <a:lnSpc>
+                <a:spcPts val="2000"/>
+              </a:lnSpc>
+            </a:pPr>
+            <a:r>
+              <a:rPr sz="1600" b="0" i="0">
+                <a:solidFill>
+                  <a:srgbClr val="2C3E50"/>
+                </a:solidFill>
+                <a:latin typeface="Segoe UI"/>
+              </a:rPr>
+              <a:t>Implikasi — menambah partisi MURAH secara incremental kalau 1007 cols sudah di-export</a:t>
+            </a:r>
+          </a:p>
+        </p:txBody>
+      </p:sp>
+      <p:sp>
+        <p:nvSpPr>
+          <p:cNvPr id="24" name="Rounded Rectangle 23"/>
+          <p:cNvSpPr/>
+          <p:nvPr/>
+        </p:nvSpPr>
+        <p:spPr>
+          <a:xfrm>
+            <a:off x="640080" y="5212080"/>
+            <a:ext cx="10911535" cy="804672"/>
+          </a:xfrm>
+          <a:prstGeom prst="roundRect">
+            <a:avLst/>
+          </a:prstGeom>
+          <a:solidFill>
+            <a:srgbClr val="EEF5FA"/>
+          </a:solidFill>
+          <a:ln>
+            <a:noFill/>
+          </a:ln>
+        </p:spPr>
+        <p:style>
+          <a:lnRef idx="1">
+            <a:schemeClr val="accent1"/>
+          </a:lnRef>
+          <a:fillRef idx="3">
+            <a:schemeClr val="accent1"/>
+          </a:fillRef>
+          <a:effectRef idx="2">
+            <a:schemeClr val="accent1"/>
+          </a:effectRef>
+          <a:fontRef idx="minor">
+            <a:schemeClr val="lt1"/>
+          </a:fontRef>
+        </p:style>
+        <p:txBody>
+          <a:bodyPr rtlCol="0" anchor="ctr"/>
+          <a:lstStyle/>
+          <a:p>
+            <a:pPr algn="ctr"/>
+          </a:p>
+        </p:txBody>
+      </p:sp>
+      <p:sp>
+        <p:nvSpPr>
+          <p:cNvPr id="25" name="Oval 24"/>
+          <p:cNvSpPr/>
+          <p:nvPr/>
+        </p:nvSpPr>
+        <p:spPr>
+          <a:xfrm>
+            <a:off x="914400" y="5349240"/>
+            <a:ext cx="411480" cy="411480"/>
+          </a:xfrm>
+          <a:prstGeom prst="ellipse">
+            <a:avLst/>
+          </a:prstGeom>
+          <a:solidFill>
+            <a:srgbClr val="29B5E8"/>
+          </a:solidFill>
+          <a:ln>
+            <a:noFill/>
+          </a:ln>
+        </p:spPr>
+        <p:style>
+          <a:lnRef idx="1">
+            <a:schemeClr val="accent1"/>
+          </a:lnRef>
+          <a:fillRef idx="3">
+            <a:schemeClr val="accent1"/>
+          </a:fillRef>
+          <a:effectRef idx="2">
+            <a:schemeClr val="accent1"/>
+          </a:effectRef>
+          <a:fontRef idx="minor">
+            <a:schemeClr val="lt1"/>
+          </a:fontRef>
+        </p:style>
+        <p:txBody>
+          <a:bodyPr rtlCol="0" anchor="ctr"/>
+          <a:lstStyle/>
+          <a:p>
+            <a:pPr algn="ctr"/>
+          </a:p>
+        </p:txBody>
+      </p:sp>
+      <p:sp>
+        <p:nvSpPr>
+          <p:cNvPr id="26" name="TextBox 25"/>
+          <p:cNvSpPr txBox="1"/>
+          <p:nvPr/>
+        </p:nvSpPr>
+        <p:spPr>
+          <a:xfrm>
+            <a:off x="914400" y="5349240"/>
+            <a:ext cx="411480" cy="411480"/>
+          </a:xfrm>
+          <a:prstGeom prst="rect">
+            <a:avLst/>
+          </a:prstGeom>
+          <a:noFill/>
+        </p:spPr>
+        <p:txBody>
+          <a:bodyPr wrap="square" lIns="73152" rIns="73152" tIns="36576" bIns="36576" anchor="ctr">
+            <a:spAutoFit/>
+          </a:bodyPr>
+          <a:lstStyle/>
+          <a:p>
+            <a:pPr algn="ctr">
+              <a:lnSpc>
+                <a:spcPts val="1600"/>
+              </a:lnSpc>
+            </a:pPr>
+            <a:r>
+              <a:rPr sz="1300" b="1" i="0">
+                <a:solidFill>
+                  <a:srgbClr val="FFFFFF"/>
+                </a:solidFill>
+                <a:latin typeface="Segoe UI"/>
+              </a:rPr>
+              <a:t>05</a:t>
+            </a:r>
+          </a:p>
+        </p:txBody>
+      </p:sp>
+      <p:sp>
+        <p:nvSpPr>
+          <p:cNvPr id="27" name="TextBox 26"/>
+          <p:cNvSpPr txBox="1"/>
+          <p:nvPr/>
+        </p:nvSpPr>
+        <p:spPr>
+          <a:xfrm>
+            <a:off x="1554480" y="5285232"/>
+            <a:ext cx="9601200" cy="768096"/>
+          </a:xfrm>
+          <a:prstGeom prst="rect">
+            <a:avLst/>
+          </a:prstGeom>
+          <a:noFill/>
+        </p:spPr>
+        <p:txBody>
+          <a:bodyPr wrap="square" lIns="73152" rIns="73152" tIns="36576" bIns="36576" anchor="ctr">
+            <a:spAutoFit/>
+          </a:bodyPr>
+          <a:lstStyle/>
+          <a:p>
+            <a:pPr algn="l">
+              <a:lnSpc>
+                <a:spcPts val="2000"/>
+              </a:lnSpc>
+            </a:pPr>
+            <a:r>
+              <a:rPr sz="1600" b="0" i="0">
+                <a:solidFill>
+                  <a:srgbClr val="2C3E50"/>
+                </a:solidFill>
+                <a:latin typeface="Segoe UI"/>
+              </a:rPr>
+              <a:t>Mau optimisasi cost → KURANGI KOLOM (6 cols = 0.35 cr), bukan kurangi rows</a:t>
+            </a:r>
+          </a:p>
+        </p:txBody>
+      </p:sp>
+      <p:sp>
+        <p:nvSpPr>
+          <p:cNvPr id="28" name="TextBox 27"/>
+          <p:cNvSpPr txBox="1"/>
+          <p:nvPr/>
+        </p:nvSpPr>
+        <p:spPr>
+          <a:xfrm>
+            <a:off x="548640" y="6446520"/>
+            <a:ext cx="9144000" cy="274320"/>
           </a:xfrm>
           <a:prstGeom prst="rect">
             <a:avLst/>
@@ -39840,99 +40453,17 @@
           <a:p>
             <a:pPr algn="l">
               <a:lnSpc>
-                <a:spcPts val="3900"/>
-              </a:lnSpc>
-            </a:pPr>
-            <a:r>
-              <a:rPr sz="2600" b="0" i="1">
-                <a:solidFill>
-                  <a:srgbClr val="FFFFFF"/>
-                </a:solidFill>
-                <a:latin typeface="Georgia"/>
-              </a:rPr>
-              <a:t>1.2B rows joined with 8M in 2 minutes 16 seconds, 0.61 credits, single query, zero raw data exchange — this is the future of secure multi-party analytics.</a:t>
-            </a:r>
-          </a:p>
-        </p:txBody>
-      </p:sp>
-      <p:sp>
-        <p:nvSpPr>
-          <p:cNvPr id="10" name="Rectangle 9"/>
-          <p:cNvSpPr/>
-          <p:nvPr/>
-        </p:nvSpPr>
-        <p:spPr>
-          <a:xfrm>
-            <a:off x="1371600" y="5394960"/>
-            <a:ext cx="731520" cy="36576"/>
-          </a:xfrm>
-          <a:prstGeom prst="rect">
-            <a:avLst/>
-          </a:prstGeom>
-          <a:solidFill>
-            <a:srgbClr val="29B5E8"/>
-          </a:solidFill>
-          <a:ln>
-            <a:noFill/>
-          </a:ln>
-        </p:spPr>
-        <p:style>
-          <a:lnRef idx="1">
-            <a:schemeClr val="accent1"/>
-          </a:lnRef>
-          <a:fillRef idx="3">
-            <a:schemeClr val="accent1"/>
-          </a:fillRef>
-          <a:effectRef idx="2">
-            <a:schemeClr val="accent1"/>
-          </a:effectRef>
-          <a:fontRef idx="minor">
-            <a:schemeClr val="lt1"/>
-          </a:fontRef>
-        </p:style>
-        <p:txBody>
-          <a:bodyPr rtlCol="0" anchor="ctr"/>
-          <a:lstStyle/>
-          <a:p>
-            <a:pPr algn="ctr"/>
-          </a:p>
-        </p:txBody>
-      </p:sp>
-      <p:sp>
-        <p:nvSpPr>
-          <p:cNvPr id="11" name="TextBox 10"/>
-          <p:cNvSpPr txBox="1"/>
-          <p:nvPr/>
-        </p:nvSpPr>
-        <p:spPr>
-          <a:xfrm>
-            <a:off x="1371600" y="5577840"/>
-            <a:ext cx="7315200" cy="365760"/>
-          </a:xfrm>
-          <a:prstGeom prst="rect">
-            <a:avLst/>
-          </a:prstGeom>
-          <a:noFill/>
-        </p:spPr>
-        <p:txBody>
-          <a:bodyPr wrap="square" lIns="73152" rIns="73152" tIns="36576" bIns="36576" anchor="t">
-            <a:spAutoFit/>
-          </a:bodyPr>
-          <a:lstStyle/>
-          <a:p>
-            <a:pPr algn="l">
-              <a:lnSpc>
-                <a:spcPts val="1800"/>
-              </a:lnSpc>
-            </a:pPr>
-            <a:r>
-              <a:rPr sz="1400" b="1" i="0">
-                <a:solidFill>
-                  <a:srgbClr val="71D3DC"/>
-                </a:solidFill>
-                <a:latin typeface="Segoe UI"/>
-              </a:rPr>
-              <a:t>DCR Single-Query Benchmark</a:t>
+                <a:spcPts val="1100"/>
+              </a:lnSpc>
+            </a:pPr>
+            <a:r>
+              <a:rPr sz="900" b="0" i="0">
+                <a:solidFill>
+                  <a:srgbClr val="95A5A6"/>
+                </a:solidFill>
+                <a:latin typeface="Segoe UI"/>
+              </a:rPr>
+              <a:t>DCR Collaboration API v2 | SFSEAPAC | 2026   ·   50 / 56</a:t>
             </a:r>
           </a:p>
         </p:txBody>
@@ -40100,6 +40631,3553 @@
         </p:nvSpPr>
         <p:spPr>
           <a:xfrm>
+            <a:off x="0" y="6793992"/>
+            <a:ext cx="12191695" cy="64008"/>
+          </a:xfrm>
+          <a:prstGeom prst="rect">
+            <a:avLst/>
+          </a:prstGeom>
+          <a:gradFill rotWithShape="1">
+            <a:gsLst>
+              <a:gs pos="0">
+                <a:srgbClr val="29B5E8"/>
+              </a:gs>
+              <a:gs pos="100000">
+                <a:srgbClr val="71D3DC"/>
+              </a:gs>
+            </a:gsLst>
+            <a:lin scaled="0" ang="16200000"/>
+          </a:gradFill>
+          <a:ln>
+            <a:noFill/>
+          </a:ln>
+        </p:spPr>
+        <p:style>
+          <a:lnRef idx="1">
+            <a:schemeClr val="accent1"/>
+          </a:lnRef>
+          <a:fillRef idx="3">
+            <a:schemeClr val="accent1"/>
+          </a:fillRef>
+          <a:effectRef idx="2">
+            <a:schemeClr val="accent1"/>
+          </a:effectRef>
+          <a:fontRef idx="minor">
+            <a:schemeClr val="lt1"/>
+          </a:fontRef>
+        </p:style>
+        <p:txBody>
+          <a:bodyPr rtlCol="0" anchor="ctr"/>
+          <a:lstStyle/>
+          <a:p>
+            <a:pPr algn="ctr"/>
+          </a:p>
+        </p:txBody>
+      </p:sp>
+      <p:pic>
+        <p:nvPicPr>
+          <p:cNvPr id="6" name="Picture 5" descr="snowflake_icon_white.png"/>
+          <p:cNvPicPr>
+            <a:picLocks noChangeAspect="1"/>
+          </p:cNvPicPr>
+          <p:nvPr/>
+        </p:nvPicPr>
+        <p:blipFill>
+          <a:blip r:embed="rId2"/>
+          <a:stretch>
+            <a:fillRect/>
+          </a:stretch>
+        </p:blipFill>
+        <p:spPr>
+          <a:xfrm>
+            <a:off x="11323015" y="320040"/>
+            <a:ext cx="449214" cy="411480"/>
+          </a:xfrm>
+          <a:prstGeom prst="rect">
+            <a:avLst/>
+          </a:prstGeom>
+        </p:spPr>
+      </p:pic>
+      <p:sp>
+        <p:nvSpPr>
+          <p:cNvPr id="7" name="Oval 6"/>
+          <p:cNvSpPr/>
+          <p:nvPr/>
+        </p:nvSpPr>
+        <p:spPr>
+          <a:xfrm>
+            <a:off x="822960" y="2103120"/>
+            <a:ext cx="457200" cy="457200"/>
+          </a:xfrm>
+          <a:prstGeom prst="ellipse">
+            <a:avLst/>
+          </a:prstGeom>
+          <a:solidFill>
+            <a:srgbClr val="29B5E8"/>
+          </a:solidFill>
+          <a:ln>
+            <a:noFill/>
+          </a:ln>
+        </p:spPr>
+        <p:style>
+          <a:lnRef idx="1">
+            <a:schemeClr val="accent1"/>
+          </a:lnRef>
+          <a:fillRef idx="3">
+            <a:schemeClr val="accent1"/>
+          </a:fillRef>
+          <a:effectRef idx="2">
+            <a:schemeClr val="accent1"/>
+          </a:effectRef>
+          <a:fontRef idx="minor">
+            <a:schemeClr val="lt1"/>
+          </a:fontRef>
+        </p:style>
+        <p:txBody>
+          <a:bodyPr rtlCol="0" anchor="ctr"/>
+          <a:lstStyle/>
+          <a:p>
+            <a:pPr algn="ctr"/>
+          </a:p>
+        </p:txBody>
+      </p:sp>
+      <p:sp>
+        <p:nvSpPr>
+          <p:cNvPr id="8" name="TextBox 7"/>
+          <p:cNvSpPr txBox="1"/>
+          <p:nvPr/>
+        </p:nvSpPr>
+        <p:spPr>
+          <a:xfrm>
+            <a:off x="822960" y="2103120"/>
+            <a:ext cx="457200" cy="457200"/>
+          </a:xfrm>
+          <a:prstGeom prst="rect">
+            <a:avLst/>
+          </a:prstGeom>
+          <a:noFill/>
+        </p:spPr>
+        <p:txBody>
+          <a:bodyPr wrap="square" lIns="73152" rIns="73152" tIns="36576" bIns="36576" anchor="ctr">
+            <a:spAutoFit/>
+          </a:bodyPr>
+          <a:lstStyle/>
+          <a:p>
+            <a:pPr algn="ctr">
+              <a:lnSpc>
+                <a:spcPts val="2300"/>
+              </a:lnSpc>
+            </a:pPr>
+            <a:r>
+              <a:rPr sz="1800" b="0" i="0">
+                <a:solidFill>
+                  <a:srgbClr val="FFFFFF"/>
+                </a:solidFill>
+                <a:latin typeface="Segoe UI"/>
+              </a:rPr>
+              <a:t>✦</a:t>
+            </a:r>
+          </a:p>
+        </p:txBody>
+      </p:sp>
+      <p:sp>
+        <p:nvSpPr>
+          <p:cNvPr id="9" name="TextBox 8"/>
+          <p:cNvSpPr txBox="1"/>
+          <p:nvPr/>
+        </p:nvSpPr>
+        <p:spPr>
+          <a:xfrm>
+            <a:off x="1554480" y="2011680"/>
+            <a:ext cx="9144000" cy="2286000"/>
+          </a:xfrm>
+          <a:prstGeom prst="rect">
+            <a:avLst/>
+          </a:prstGeom>
+          <a:noFill/>
+        </p:spPr>
+        <p:txBody>
+          <a:bodyPr wrap="square" lIns="73152" rIns="73152" tIns="36576" bIns="36576" anchor="t">
+            <a:spAutoFit/>
+          </a:bodyPr>
+          <a:lstStyle/>
+          <a:p>
+            <a:pPr algn="l">
+              <a:lnSpc>
+                <a:spcPts val="5400"/>
+              </a:lnSpc>
+            </a:pPr>
+            <a:r>
+              <a:rPr sz="5200" b="1" i="0">
+                <a:solidFill>
+                  <a:srgbClr val="FFFFFF"/>
+                </a:solidFill>
+                <a:latin typeface="Calibri Light"/>
+              </a:rPr>
+              <a:t>SUMMARY</a:t>
+            </a:r>
+          </a:p>
+        </p:txBody>
+      </p:sp>
+    </p:spTree>
+  </p:cSld>
+  <p:clrMapOvr>
+    <a:masterClrMapping/>
+  </p:clrMapOvr>
+</p:sld>
+</file>
+
+<file path=ppt/slides/slide52.xml><?xml version="1.0" encoding="utf-8"?>
+<p:sld xmlns:a="http://schemas.openxmlformats.org/drawingml/2006/main" xmlns:p="http://schemas.openxmlformats.org/presentationml/2006/main" xmlns:r="http://schemas.openxmlformats.org/officeDocument/2006/relationships">
+  <p:cSld>
+    <p:bg>
+      <p:bgPr>
+        <a:solidFill>
+          <a:srgbClr val="FFFFFF"/>
+        </a:solidFill>
+        <a:effectLst/>
+      </p:bgPr>
+    </p:bg>
+    <p:spTree>
+      <p:nvGrpSpPr>
+        <p:cNvPr id="1" name=""/>
+        <p:cNvGrpSpPr/>
+        <p:nvPr/>
+      </p:nvGrpSpPr>
+      <p:grpSpPr/>
+      <p:sp>
+        <p:nvSpPr>
+          <p:cNvPr id="2" name="Oval 1"/>
+          <p:cNvSpPr/>
+          <p:nvPr/>
+        </p:nvSpPr>
+        <p:spPr>
+          <a:xfrm>
+            <a:off x="9631375" y="-914400"/>
+            <a:ext cx="3200400" cy="3200400"/>
+          </a:xfrm>
+          <a:prstGeom prst="ellipse">
+            <a:avLst/>
+          </a:prstGeom>
+          <a:solidFill>
+            <a:srgbClr val="D6EFF8"/>
+          </a:solidFill>
+          <a:ln>
+            <a:noFill/>
+          </a:ln>
+        </p:spPr>
+        <p:style>
+          <a:lnRef idx="1">
+            <a:schemeClr val="accent1"/>
+          </a:lnRef>
+          <a:fillRef idx="3">
+            <a:schemeClr val="accent1"/>
+          </a:fillRef>
+          <a:effectRef idx="2">
+            <a:schemeClr val="accent1"/>
+          </a:effectRef>
+          <a:fontRef idx="minor">
+            <a:schemeClr val="lt1"/>
+          </a:fontRef>
+        </p:style>
+        <p:txBody>
+          <a:bodyPr rtlCol="0" anchor="ctr"/>
+          <a:lstStyle/>
+          <a:p>
+            <a:pPr algn="ctr"/>
+          </a:p>
+        </p:txBody>
+      </p:sp>
+      <p:sp>
+        <p:nvSpPr>
+          <p:cNvPr id="3" name="Oval 2"/>
+          <p:cNvSpPr/>
+          <p:nvPr/>
+        </p:nvSpPr>
+        <p:spPr>
+          <a:xfrm>
+            <a:off x="-640080" y="5029200"/>
+            <a:ext cx="1828800" cy="1828800"/>
+          </a:xfrm>
+          <a:prstGeom prst="ellipse">
+            <a:avLst/>
+          </a:prstGeom>
+          <a:solidFill>
+            <a:srgbClr val="E8F4FD"/>
+          </a:solidFill>
+          <a:ln>
+            <a:noFill/>
+          </a:ln>
+        </p:spPr>
+        <p:style>
+          <a:lnRef idx="1">
+            <a:schemeClr val="accent1"/>
+          </a:lnRef>
+          <a:fillRef idx="3">
+            <a:schemeClr val="accent1"/>
+          </a:fillRef>
+          <a:effectRef idx="2">
+            <a:schemeClr val="accent1"/>
+          </a:effectRef>
+          <a:fontRef idx="minor">
+            <a:schemeClr val="lt1"/>
+          </a:fontRef>
+        </p:style>
+        <p:txBody>
+          <a:bodyPr rtlCol="0" anchor="ctr"/>
+          <a:lstStyle/>
+          <a:p>
+            <a:pPr algn="ctr"/>
+          </a:p>
+        </p:txBody>
+      </p:sp>
+      <p:pic>
+        <p:nvPicPr>
+          <p:cNvPr id="4" name="Picture 3" descr="snowflake_icon_blue.png"/>
+          <p:cNvPicPr>
+            <a:picLocks noChangeAspect="1"/>
+          </p:cNvPicPr>
+          <p:nvPr/>
+        </p:nvPicPr>
+        <p:blipFill>
+          <a:blip r:embed="rId2"/>
+          <a:stretch>
+            <a:fillRect/>
+          </a:stretch>
+        </p:blipFill>
+        <p:spPr>
+          <a:xfrm>
+            <a:off x="11414455" y="320040"/>
+            <a:ext cx="349389" cy="320040"/>
+          </a:xfrm>
+          <a:prstGeom prst="rect">
+            <a:avLst/>
+          </a:prstGeom>
+        </p:spPr>
+      </p:pic>
+      <p:sp>
+        <p:nvSpPr>
+          <p:cNvPr id="5" name="Rectangle 4"/>
+          <p:cNvSpPr/>
+          <p:nvPr/>
+        </p:nvSpPr>
+        <p:spPr>
+          <a:xfrm>
+            <a:off x="548640" y="457200"/>
+            <a:ext cx="54864" cy="502920"/>
+          </a:xfrm>
+          <a:prstGeom prst="rect">
+            <a:avLst/>
+          </a:prstGeom>
+          <a:solidFill>
+            <a:srgbClr val="29B5E8"/>
+          </a:solidFill>
+          <a:ln>
+            <a:noFill/>
+          </a:ln>
+        </p:spPr>
+        <p:style>
+          <a:lnRef idx="1">
+            <a:schemeClr val="accent1"/>
+          </a:lnRef>
+          <a:fillRef idx="3">
+            <a:schemeClr val="accent1"/>
+          </a:fillRef>
+          <a:effectRef idx="2">
+            <a:schemeClr val="accent1"/>
+          </a:effectRef>
+          <a:fontRef idx="minor">
+            <a:schemeClr val="lt1"/>
+          </a:fontRef>
+        </p:style>
+        <p:txBody>
+          <a:bodyPr rtlCol="0" anchor="ctr"/>
+          <a:lstStyle/>
+          <a:p>
+            <a:pPr algn="ctr"/>
+          </a:p>
+        </p:txBody>
+      </p:sp>
+      <p:sp>
+        <p:nvSpPr>
+          <p:cNvPr id="6" name="TextBox 5"/>
+          <p:cNvSpPr txBox="1"/>
+          <p:nvPr/>
+        </p:nvSpPr>
+        <p:spPr>
+          <a:xfrm>
+            <a:off x="777240" y="411480"/>
+            <a:ext cx="10058400" cy="640080"/>
+          </a:xfrm>
+          <a:prstGeom prst="rect">
+            <a:avLst/>
+          </a:prstGeom>
+          <a:noFill/>
+        </p:spPr>
+        <p:txBody>
+          <a:bodyPr wrap="square" lIns="73152" rIns="73152" tIns="36576" bIns="36576" anchor="t">
+            <a:spAutoFit/>
+          </a:bodyPr>
+          <a:lstStyle/>
+          <a:p>
+            <a:pPr algn="l">
+              <a:lnSpc>
+                <a:spcPts val="3900"/>
+              </a:lnSpc>
+            </a:pPr>
+            <a:r>
+              <a:rPr sz="3000" b="1" i="0">
+                <a:solidFill>
+                  <a:srgbClr val="1B2A3D"/>
+                </a:solidFill>
+                <a:latin typeface="Calibri Light"/>
+              </a:rPr>
+              <a:t>Production-Ready Performance</a:t>
+            </a:r>
+          </a:p>
+        </p:txBody>
+      </p:sp>
+      <p:cxnSp>
+        <p:nvCxnSpPr>
+          <p:cNvPr id="7" name="Connector 6"/>
+          <p:cNvCxnSpPr/>
+          <p:nvPr/>
+        </p:nvCxnSpPr>
+        <p:spPr>
+          <a:xfrm>
+            <a:off x="548640" y="1234440"/>
+            <a:ext cx="11094415" cy="0"/>
+          </a:xfrm>
+          <a:prstGeom prst="line">
+            <a:avLst/>
+          </a:prstGeom>
+          <a:ln w="12700">
+            <a:solidFill>
+              <a:srgbClr val="DEE3EA"/>
+            </a:solidFill>
+          </a:ln>
+        </p:spPr>
+        <p:style>
+          <a:lnRef idx="2">
+            <a:schemeClr val="accent1"/>
+          </a:lnRef>
+          <a:fillRef idx="0">
+            <a:schemeClr val="accent1"/>
+          </a:fillRef>
+          <a:effectRef idx="1">
+            <a:schemeClr val="accent1"/>
+          </a:effectRef>
+          <a:fontRef idx="minor">
+            <a:schemeClr val="tx1"/>
+          </a:fontRef>
+        </p:style>
+      </p:cxnSp>
+      <p:sp>
+        <p:nvSpPr>
+          <p:cNvPr id="8" name="Rounded Rectangle 7"/>
+          <p:cNvSpPr/>
+          <p:nvPr/>
+        </p:nvSpPr>
+        <p:spPr>
+          <a:xfrm>
+            <a:off x="640080" y="1554480"/>
+            <a:ext cx="10911535" cy="804672"/>
+          </a:xfrm>
+          <a:prstGeom prst="roundRect">
+            <a:avLst/>
+          </a:prstGeom>
+          <a:solidFill>
+            <a:srgbClr val="EEF5FA"/>
+          </a:solidFill>
+          <a:ln>
+            <a:noFill/>
+          </a:ln>
+        </p:spPr>
+        <p:style>
+          <a:lnRef idx="1">
+            <a:schemeClr val="accent1"/>
+          </a:lnRef>
+          <a:fillRef idx="3">
+            <a:schemeClr val="accent1"/>
+          </a:fillRef>
+          <a:effectRef idx="2">
+            <a:schemeClr val="accent1"/>
+          </a:effectRef>
+          <a:fontRef idx="minor">
+            <a:schemeClr val="lt1"/>
+          </a:fontRef>
+        </p:style>
+        <p:txBody>
+          <a:bodyPr rtlCol="0" anchor="ctr"/>
+          <a:lstStyle/>
+          <a:p>
+            <a:pPr algn="ctr"/>
+          </a:p>
+        </p:txBody>
+      </p:sp>
+      <p:sp>
+        <p:nvSpPr>
+          <p:cNvPr id="9" name="Oval 8"/>
+          <p:cNvSpPr/>
+          <p:nvPr/>
+        </p:nvSpPr>
+        <p:spPr>
+          <a:xfrm>
+            <a:off x="914400" y="1691640"/>
+            <a:ext cx="411480" cy="411480"/>
+          </a:xfrm>
+          <a:prstGeom prst="ellipse">
+            <a:avLst/>
+          </a:prstGeom>
+          <a:solidFill>
+            <a:srgbClr val="29B5E8"/>
+          </a:solidFill>
+          <a:ln>
+            <a:noFill/>
+          </a:ln>
+        </p:spPr>
+        <p:style>
+          <a:lnRef idx="1">
+            <a:schemeClr val="accent1"/>
+          </a:lnRef>
+          <a:fillRef idx="3">
+            <a:schemeClr val="accent1"/>
+          </a:fillRef>
+          <a:effectRef idx="2">
+            <a:schemeClr val="accent1"/>
+          </a:effectRef>
+          <a:fontRef idx="minor">
+            <a:schemeClr val="lt1"/>
+          </a:fontRef>
+        </p:style>
+        <p:txBody>
+          <a:bodyPr rtlCol="0" anchor="ctr"/>
+          <a:lstStyle/>
+          <a:p>
+            <a:pPr algn="ctr"/>
+          </a:p>
+        </p:txBody>
+      </p:sp>
+      <p:sp>
+        <p:nvSpPr>
+          <p:cNvPr id="10" name="TextBox 9"/>
+          <p:cNvSpPr txBox="1"/>
+          <p:nvPr/>
+        </p:nvSpPr>
+        <p:spPr>
+          <a:xfrm>
+            <a:off x="914400" y="1691640"/>
+            <a:ext cx="411480" cy="411480"/>
+          </a:xfrm>
+          <a:prstGeom prst="rect">
+            <a:avLst/>
+          </a:prstGeom>
+          <a:noFill/>
+        </p:spPr>
+        <p:txBody>
+          <a:bodyPr wrap="square" lIns="73152" rIns="73152" tIns="36576" bIns="36576" anchor="ctr">
+            <a:spAutoFit/>
+          </a:bodyPr>
+          <a:lstStyle/>
+          <a:p>
+            <a:pPr algn="ctr">
+              <a:lnSpc>
+                <a:spcPts val="1600"/>
+              </a:lnSpc>
+            </a:pPr>
+            <a:r>
+              <a:rPr sz="1300" b="1" i="0">
+                <a:solidFill>
+                  <a:srgbClr val="FFFFFF"/>
+                </a:solidFill>
+                <a:latin typeface="Segoe UI"/>
+              </a:rPr>
+              <a:t>01</a:t>
+            </a:r>
+          </a:p>
+        </p:txBody>
+      </p:sp>
+      <p:sp>
+        <p:nvSpPr>
+          <p:cNvPr id="11" name="TextBox 10"/>
+          <p:cNvSpPr txBox="1"/>
+          <p:nvPr/>
+        </p:nvSpPr>
+        <p:spPr>
+          <a:xfrm>
+            <a:off x="1554480" y="1627632"/>
+            <a:ext cx="9601200" cy="768096"/>
+          </a:xfrm>
+          <a:prstGeom prst="rect">
+            <a:avLst/>
+          </a:prstGeom>
+          <a:noFill/>
+        </p:spPr>
+        <p:txBody>
+          <a:bodyPr wrap="square" lIns="73152" rIns="73152" tIns="36576" bIns="36576" anchor="ctr">
+            <a:spAutoFit/>
+          </a:bodyPr>
+          <a:lstStyle/>
+          <a:p>
+            <a:pPr algn="l">
+              <a:lnSpc>
+                <a:spcPts val="2000"/>
+              </a:lnSpc>
+            </a:pPr>
+            <a:r>
+              <a:rPr sz="1600" b="0" i="0">
+                <a:solidFill>
+                  <a:srgbClr val="2C3E50"/>
+                </a:solidFill>
+                <a:latin typeface="Segoe UI"/>
+              </a:rPr>
+              <a:t>Proven at scale — 1.2B rows × 1001 kolom full-scan dalam 2 menit 16 detik via single-query</a:t>
+            </a:r>
+          </a:p>
+        </p:txBody>
+      </p:sp>
+      <p:sp>
+        <p:nvSpPr>
+          <p:cNvPr id="12" name="Rounded Rectangle 11"/>
+          <p:cNvSpPr/>
+          <p:nvPr/>
+        </p:nvSpPr>
+        <p:spPr>
+          <a:xfrm>
+            <a:off x="640080" y="2468880"/>
+            <a:ext cx="10911535" cy="804672"/>
+          </a:xfrm>
+          <a:prstGeom prst="roundRect">
+            <a:avLst/>
+          </a:prstGeom>
+          <a:solidFill>
+            <a:srgbClr val="F4F8FB"/>
+          </a:solidFill>
+          <a:ln>
+            <a:noFill/>
+          </a:ln>
+        </p:spPr>
+        <p:style>
+          <a:lnRef idx="1">
+            <a:schemeClr val="accent1"/>
+          </a:lnRef>
+          <a:fillRef idx="3">
+            <a:schemeClr val="accent1"/>
+          </a:fillRef>
+          <a:effectRef idx="2">
+            <a:schemeClr val="accent1"/>
+          </a:effectRef>
+          <a:fontRef idx="minor">
+            <a:schemeClr val="lt1"/>
+          </a:fontRef>
+        </p:style>
+        <p:txBody>
+          <a:bodyPr rtlCol="0" anchor="ctr"/>
+          <a:lstStyle/>
+          <a:p>
+            <a:pPr algn="ctr"/>
+          </a:p>
+        </p:txBody>
+      </p:sp>
+      <p:sp>
+        <p:nvSpPr>
+          <p:cNvPr id="13" name="Oval 12"/>
+          <p:cNvSpPr/>
+          <p:nvPr/>
+        </p:nvSpPr>
+        <p:spPr>
+          <a:xfrm>
+            <a:off x="914400" y="2606040"/>
+            <a:ext cx="411480" cy="411480"/>
+          </a:xfrm>
+          <a:prstGeom prst="ellipse">
+            <a:avLst/>
+          </a:prstGeom>
+          <a:solidFill>
+            <a:srgbClr val="11567F"/>
+          </a:solidFill>
+          <a:ln>
+            <a:noFill/>
+          </a:ln>
+        </p:spPr>
+        <p:style>
+          <a:lnRef idx="1">
+            <a:schemeClr val="accent1"/>
+          </a:lnRef>
+          <a:fillRef idx="3">
+            <a:schemeClr val="accent1"/>
+          </a:fillRef>
+          <a:effectRef idx="2">
+            <a:schemeClr val="accent1"/>
+          </a:effectRef>
+          <a:fontRef idx="minor">
+            <a:schemeClr val="lt1"/>
+          </a:fontRef>
+        </p:style>
+        <p:txBody>
+          <a:bodyPr rtlCol="0" anchor="ctr"/>
+          <a:lstStyle/>
+          <a:p>
+            <a:pPr algn="ctr"/>
+          </a:p>
+        </p:txBody>
+      </p:sp>
+      <p:sp>
+        <p:nvSpPr>
+          <p:cNvPr id="14" name="TextBox 13"/>
+          <p:cNvSpPr txBox="1"/>
+          <p:nvPr/>
+        </p:nvSpPr>
+        <p:spPr>
+          <a:xfrm>
+            <a:off x="914400" y="2606040"/>
+            <a:ext cx="411480" cy="411480"/>
+          </a:xfrm>
+          <a:prstGeom prst="rect">
+            <a:avLst/>
+          </a:prstGeom>
+          <a:noFill/>
+        </p:spPr>
+        <p:txBody>
+          <a:bodyPr wrap="square" lIns="73152" rIns="73152" tIns="36576" bIns="36576" anchor="ctr">
+            <a:spAutoFit/>
+          </a:bodyPr>
+          <a:lstStyle/>
+          <a:p>
+            <a:pPr algn="ctr">
+              <a:lnSpc>
+                <a:spcPts val="1600"/>
+              </a:lnSpc>
+            </a:pPr>
+            <a:r>
+              <a:rPr sz="1300" b="1" i="0">
+                <a:solidFill>
+                  <a:srgbClr val="FFFFFF"/>
+                </a:solidFill>
+                <a:latin typeface="Segoe UI"/>
+              </a:rPr>
+              <a:t>02</a:t>
+            </a:r>
+          </a:p>
+        </p:txBody>
+      </p:sp>
+      <p:sp>
+        <p:nvSpPr>
+          <p:cNvPr id="15" name="TextBox 14"/>
+          <p:cNvSpPr txBox="1"/>
+          <p:nvPr/>
+        </p:nvSpPr>
+        <p:spPr>
+          <a:xfrm>
+            <a:off x="1554480" y="2542032"/>
+            <a:ext cx="9601200" cy="768096"/>
+          </a:xfrm>
+          <a:prstGeom prst="rect">
+            <a:avLst/>
+          </a:prstGeom>
+          <a:noFill/>
+        </p:spPr>
+        <p:txBody>
+          <a:bodyPr wrap="square" lIns="73152" rIns="73152" tIns="36576" bIns="36576" anchor="ctr">
+            <a:spAutoFit/>
+          </a:bodyPr>
+          <a:lstStyle/>
+          <a:p>
+            <a:pPr algn="l">
+              <a:lnSpc>
+                <a:spcPts val="2000"/>
+              </a:lnSpc>
+            </a:pPr>
+            <a:r>
+              <a:rPr sz="1600" b="0" i="0">
+                <a:solidFill>
+                  <a:srgbClr val="2C3E50"/>
+                </a:solidFill>
+                <a:latin typeface="Segoe UI"/>
+              </a:rPr>
+              <a:t>5× faster than per-partition loop — 1 RUN call menggantikan 8 sequential calls</a:t>
+            </a:r>
+          </a:p>
+        </p:txBody>
+      </p:sp>
+      <p:sp>
+        <p:nvSpPr>
+          <p:cNvPr id="16" name="Rounded Rectangle 15"/>
+          <p:cNvSpPr/>
+          <p:nvPr/>
+        </p:nvSpPr>
+        <p:spPr>
+          <a:xfrm>
+            <a:off x="640080" y="3383280"/>
+            <a:ext cx="10911535" cy="804672"/>
+          </a:xfrm>
+          <a:prstGeom prst="roundRect">
+            <a:avLst/>
+          </a:prstGeom>
+          <a:solidFill>
+            <a:srgbClr val="EEF5FA"/>
+          </a:solidFill>
+          <a:ln>
+            <a:noFill/>
+          </a:ln>
+        </p:spPr>
+        <p:style>
+          <a:lnRef idx="1">
+            <a:schemeClr val="accent1"/>
+          </a:lnRef>
+          <a:fillRef idx="3">
+            <a:schemeClr val="accent1"/>
+          </a:fillRef>
+          <a:effectRef idx="2">
+            <a:schemeClr val="accent1"/>
+          </a:effectRef>
+          <a:fontRef idx="minor">
+            <a:schemeClr val="lt1"/>
+          </a:fontRef>
+        </p:style>
+        <p:txBody>
+          <a:bodyPr rtlCol="0" anchor="ctr"/>
+          <a:lstStyle/>
+          <a:p>
+            <a:pPr algn="ctr"/>
+          </a:p>
+        </p:txBody>
+      </p:sp>
+      <p:sp>
+        <p:nvSpPr>
+          <p:cNvPr id="17" name="Oval 16"/>
+          <p:cNvSpPr/>
+          <p:nvPr/>
+        </p:nvSpPr>
+        <p:spPr>
+          <a:xfrm>
+            <a:off x="914400" y="3520440"/>
+            <a:ext cx="411480" cy="411480"/>
+          </a:xfrm>
+          <a:prstGeom prst="ellipse">
+            <a:avLst/>
+          </a:prstGeom>
+          <a:solidFill>
+            <a:srgbClr val="71D3DC"/>
+          </a:solidFill>
+          <a:ln>
+            <a:noFill/>
+          </a:ln>
+        </p:spPr>
+        <p:style>
+          <a:lnRef idx="1">
+            <a:schemeClr val="accent1"/>
+          </a:lnRef>
+          <a:fillRef idx="3">
+            <a:schemeClr val="accent1"/>
+          </a:fillRef>
+          <a:effectRef idx="2">
+            <a:schemeClr val="accent1"/>
+          </a:effectRef>
+          <a:fontRef idx="minor">
+            <a:schemeClr val="lt1"/>
+          </a:fontRef>
+        </p:style>
+        <p:txBody>
+          <a:bodyPr rtlCol="0" anchor="ctr"/>
+          <a:lstStyle/>
+          <a:p>
+            <a:pPr algn="ctr"/>
+          </a:p>
+        </p:txBody>
+      </p:sp>
+      <p:sp>
+        <p:nvSpPr>
+          <p:cNvPr id="18" name="TextBox 17"/>
+          <p:cNvSpPr txBox="1"/>
+          <p:nvPr/>
+        </p:nvSpPr>
+        <p:spPr>
+          <a:xfrm>
+            <a:off x="914400" y="3520440"/>
+            <a:ext cx="411480" cy="411480"/>
+          </a:xfrm>
+          <a:prstGeom prst="rect">
+            <a:avLst/>
+          </a:prstGeom>
+          <a:noFill/>
+        </p:spPr>
+        <p:txBody>
+          <a:bodyPr wrap="square" lIns="73152" rIns="73152" tIns="36576" bIns="36576" anchor="ctr">
+            <a:spAutoFit/>
+          </a:bodyPr>
+          <a:lstStyle/>
+          <a:p>
+            <a:pPr algn="ctr">
+              <a:lnSpc>
+                <a:spcPts val="1600"/>
+              </a:lnSpc>
+            </a:pPr>
+            <a:r>
+              <a:rPr sz="1300" b="1" i="0">
+                <a:solidFill>
+                  <a:srgbClr val="FFFFFF"/>
+                </a:solidFill>
+                <a:latin typeface="Segoe UI"/>
+              </a:rPr>
+              <a:t>03</a:t>
+            </a:r>
+          </a:p>
+        </p:txBody>
+      </p:sp>
+      <p:sp>
+        <p:nvSpPr>
+          <p:cNvPr id="19" name="TextBox 18"/>
+          <p:cNvSpPr txBox="1"/>
+          <p:nvPr/>
+        </p:nvSpPr>
+        <p:spPr>
+          <a:xfrm>
+            <a:off x="1554480" y="3456432"/>
+            <a:ext cx="9601200" cy="768096"/>
+          </a:xfrm>
+          <a:prstGeom prst="rect">
+            <a:avLst/>
+          </a:prstGeom>
+          <a:noFill/>
+        </p:spPr>
+        <p:txBody>
+          <a:bodyPr wrap="square" lIns="73152" rIns="73152" tIns="36576" bIns="36576" anchor="ctr">
+            <a:spAutoFit/>
+          </a:bodyPr>
+          <a:lstStyle/>
+          <a:p>
+            <a:pPr algn="l">
+              <a:lnSpc>
+                <a:spcPts val="2000"/>
+              </a:lnSpc>
+            </a:pPr>
+            <a:r>
+              <a:rPr sz="1600" b="0" i="0">
+                <a:solidFill>
+                  <a:srgbClr val="2C3E50"/>
+                </a:solidFill>
+                <a:latin typeface="Segoe UI"/>
+              </a:rPr>
+              <a:t>80% compute cost savings — 0.61 credits vs 3.02 credits per run @ GEN2_XLARGE</a:t>
+            </a:r>
+          </a:p>
+        </p:txBody>
+      </p:sp>
+      <p:sp>
+        <p:nvSpPr>
+          <p:cNvPr id="20" name="Rounded Rectangle 19"/>
+          <p:cNvSpPr/>
+          <p:nvPr/>
+        </p:nvSpPr>
+        <p:spPr>
+          <a:xfrm>
+            <a:off x="640080" y="4297680"/>
+            <a:ext cx="10911535" cy="804672"/>
+          </a:xfrm>
+          <a:prstGeom prst="roundRect">
+            <a:avLst/>
+          </a:prstGeom>
+          <a:solidFill>
+            <a:srgbClr val="F4F8FB"/>
+          </a:solidFill>
+          <a:ln>
+            <a:noFill/>
+          </a:ln>
+        </p:spPr>
+        <p:style>
+          <a:lnRef idx="1">
+            <a:schemeClr val="accent1"/>
+          </a:lnRef>
+          <a:fillRef idx="3">
+            <a:schemeClr val="accent1"/>
+          </a:fillRef>
+          <a:effectRef idx="2">
+            <a:schemeClr val="accent1"/>
+          </a:effectRef>
+          <a:fontRef idx="minor">
+            <a:schemeClr val="lt1"/>
+          </a:fontRef>
+        </p:style>
+        <p:txBody>
+          <a:bodyPr rtlCol="0" anchor="ctr"/>
+          <a:lstStyle/>
+          <a:p>
+            <a:pPr algn="ctr"/>
+          </a:p>
+        </p:txBody>
+      </p:sp>
+      <p:sp>
+        <p:nvSpPr>
+          <p:cNvPr id="21" name="Oval 20"/>
+          <p:cNvSpPr/>
+          <p:nvPr/>
+        </p:nvSpPr>
+        <p:spPr>
+          <a:xfrm>
+            <a:off x="914400" y="4434840"/>
+            <a:ext cx="411480" cy="411480"/>
+          </a:xfrm>
+          <a:prstGeom prst="ellipse">
+            <a:avLst/>
+          </a:prstGeom>
+          <a:solidFill>
+            <a:srgbClr val="FF9F36"/>
+          </a:solidFill>
+          <a:ln>
+            <a:noFill/>
+          </a:ln>
+        </p:spPr>
+        <p:style>
+          <a:lnRef idx="1">
+            <a:schemeClr val="accent1"/>
+          </a:lnRef>
+          <a:fillRef idx="3">
+            <a:schemeClr val="accent1"/>
+          </a:fillRef>
+          <a:effectRef idx="2">
+            <a:schemeClr val="accent1"/>
+          </a:effectRef>
+          <a:fontRef idx="minor">
+            <a:schemeClr val="lt1"/>
+          </a:fontRef>
+        </p:style>
+        <p:txBody>
+          <a:bodyPr rtlCol="0" anchor="ctr"/>
+          <a:lstStyle/>
+          <a:p>
+            <a:pPr algn="ctr"/>
+          </a:p>
+        </p:txBody>
+      </p:sp>
+      <p:sp>
+        <p:nvSpPr>
+          <p:cNvPr id="22" name="TextBox 21"/>
+          <p:cNvSpPr txBox="1"/>
+          <p:nvPr/>
+        </p:nvSpPr>
+        <p:spPr>
+          <a:xfrm>
+            <a:off x="914400" y="4434840"/>
+            <a:ext cx="411480" cy="411480"/>
+          </a:xfrm>
+          <a:prstGeom prst="rect">
+            <a:avLst/>
+          </a:prstGeom>
+          <a:noFill/>
+        </p:spPr>
+        <p:txBody>
+          <a:bodyPr wrap="square" lIns="73152" rIns="73152" tIns="36576" bIns="36576" anchor="ctr">
+            <a:spAutoFit/>
+          </a:bodyPr>
+          <a:lstStyle/>
+          <a:p>
+            <a:pPr algn="ctr">
+              <a:lnSpc>
+                <a:spcPts val="1600"/>
+              </a:lnSpc>
+            </a:pPr>
+            <a:r>
+              <a:rPr sz="1300" b="1" i="0">
+                <a:solidFill>
+                  <a:srgbClr val="FFFFFF"/>
+                </a:solidFill>
+                <a:latin typeface="Segoe UI"/>
+              </a:rPr>
+              <a:t>04</a:t>
+            </a:r>
+          </a:p>
+        </p:txBody>
+      </p:sp>
+      <p:sp>
+        <p:nvSpPr>
+          <p:cNvPr id="23" name="TextBox 22"/>
+          <p:cNvSpPr txBox="1"/>
+          <p:nvPr/>
+        </p:nvSpPr>
+        <p:spPr>
+          <a:xfrm>
+            <a:off x="1554480" y="4370832"/>
+            <a:ext cx="9601200" cy="768096"/>
+          </a:xfrm>
+          <a:prstGeom prst="rect">
+            <a:avLst/>
+          </a:prstGeom>
+          <a:noFill/>
+        </p:spPr>
+        <p:txBody>
+          <a:bodyPr wrap="square" lIns="73152" rIns="73152" tIns="36576" bIns="36576" anchor="ctr">
+            <a:spAutoFit/>
+          </a:bodyPr>
+          <a:lstStyle/>
+          <a:p>
+            <a:pPr algn="l">
+              <a:lnSpc>
+                <a:spcPts val="2000"/>
+              </a:lnSpc>
+            </a:pPr>
+            <a:r>
+              <a:rPr sz="1600" b="0" i="0">
+                <a:solidFill>
+                  <a:srgbClr val="2C3E50"/>
+                </a:solidFill>
+                <a:latin typeface="Segoe UI"/>
+              </a:rPr>
+              <a:t>3.37M unique audience tuples exported secara secure tanpa data movement</a:t>
+            </a:r>
+          </a:p>
+        </p:txBody>
+      </p:sp>
+      <p:sp>
+        <p:nvSpPr>
+          <p:cNvPr id="24" name="Rounded Rectangle 23"/>
+          <p:cNvSpPr/>
+          <p:nvPr/>
+        </p:nvSpPr>
+        <p:spPr>
+          <a:xfrm>
+            <a:off x="640080" y="5212080"/>
+            <a:ext cx="10911535" cy="804672"/>
+          </a:xfrm>
+          <a:prstGeom prst="roundRect">
+            <a:avLst/>
+          </a:prstGeom>
+          <a:solidFill>
+            <a:srgbClr val="EEF5FA"/>
+          </a:solidFill>
+          <a:ln>
+            <a:noFill/>
+          </a:ln>
+        </p:spPr>
+        <p:style>
+          <a:lnRef idx="1">
+            <a:schemeClr val="accent1"/>
+          </a:lnRef>
+          <a:fillRef idx="3">
+            <a:schemeClr val="accent1"/>
+          </a:fillRef>
+          <a:effectRef idx="2">
+            <a:schemeClr val="accent1"/>
+          </a:effectRef>
+          <a:fontRef idx="minor">
+            <a:schemeClr val="lt1"/>
+          </a:fontRef>
+        </p:style>
+        <p:txBody>
+          <a:bodyPr rtlCol="0" anchor="ctr"/>
+          <a:lstStyle/>
+          <a:p>
+            <a:pPr algn="ctr"/>
+          </a:p>
+        </p:txBody>
+      </p:sp>
+      <p:sp>
+        <p:nvSpPr>
+          <p:cNvPr id="25" name="Oval 24"/>
+          <p:cNvSpPr/>
+          <p:nvPr/>
+        </p:nvSpPr>
+        <p:spPr>
+          <a:xfrm>
+            <a:off x="914400" y="5349240"/>
+            <a:ext cx="411480" cy="411480"/>
+          </a:xfrm>
+          <a:prstGeom prst="ellipse">
+            <a:avLst/>
+          </a:prstGeom>
+          <a:solidFill>
+            <a:srgbClr val="29B5E8"/>
+          </a:solidFill>
+          <a:ln>
+            <a:noFill/>
+          </a:ln>
+        </p:spPr>
+        <p:style>
+          <a:lnRef idx="1">
+            <a:schemeClr val="accent1"/>
+          </a:lnRef>
+          <a:fillRef idx="3">
+            <a:schemeClr val="accent1"/>
+          </a:fillRef>
+          <a:effectRef idx="2">
+            <a:schemeClr val="accent1"/>
+          </a:effectRef>
+          <a:fontRef idx="minor">
+            <a:schemeClr val="lt1"/>
+          </a:fontRef>
+        </p:style>
+        <p:txBody>
+          <a:bodyPr rtlCol="0" anchor="ctr"/>
+          <a:lstStyle/>
+          <a:p>
+            <a:pPr algn="ctr"/>
+          </a:p>
+        </p:txBody>
+      </p:sp>
+      <p:sp>
+        <p:nvSpPr>
+          <p:cNvPr id="26" name="TextBox 25"/>
+          <p:cNvSpPr txBox="1"/>
+          <p:nvPr/>
+        </p:nvSpPr>
+        <p:spPr>
+          <a:xfrm>
+            <a:off x="914400" y="5349240"/>
+            <a:ext cx="411480" cy="411480"/>
+          </a:xfrm>
+          <a:prstGeom prst="rect">
+            <a:avLst/>
+          </a:prstGeom>
+          <a:noFill/>
+        </p:spPr>
+        <p:txBody>
+          <a:bodyPr wrap="square" lIns="73152" rIns="73152" tIns="36576" bIns="36576" anchor="ctr">
+            <a:spAutoFit/>
+          </a:bodyPr>
+          <a:lstStyle/>
+          <a:p>
+            <a:pPr algn="ctr">
+              <a:lnSpc>
+                <a:spcPts val="1600"/>
+              </a:lnSpc>
+            </a:pPr>
+            <a:r>
+              <a:rPr sz="1300" b="1" i="0">
+                <a:solidFill>
+                  <a:srgbClr val="FFFFFF"/>
+                </a:solidFill>
+                <a:latin typeface="Segoe UI"/>
+              </a:rPr>
+              <a:t>05</a:t>
+            </a:r>
+          </a:p>
+        </p:txBody>
+      </p:sp>
+      <p:sp>
+        <p:nvSpPr>
+          <p:cNvPr id="27" name="TextBox 26"/>
+          <p:cNvSpPr txBox="1"/>
+          <p:nvPr/>
+        </p:nvSpPr>
+        <p:spPr>
+          <a:xfrm>
+            <a:off x="1554480" y="5285232"/>
+            <a:ext cx="9601200" cy="768096"/>
+          </a:xfrm>
+          <a:prstGeom prst="rect">
+            <a:avLst/>
+          </a:prstGeom>
+          <a:noFill/>
+        </p:spPr>
+        <p:txBody>
+          <a:bodyPr wrap="square" lIns="73152" rIns="73152" tIns="36576" bIns="36576" anchor="ctr">
+            <a:spAutoFit/>
+          </a:bodyPr>
+          <a:lstStyle/>
+          <a:p>
+            <a:pPr algn="l">
+              <a:lnSpc>
+                <a:spcPts val="2000"/>
+              </a:lnSpc>
+            </a:pPr>
+            <a:r>
+              <a:rPr sz="1600" b="0" i="0">
+                <a:solidFill>
+                  <a:srgbClr val="2C3E50"/>
+                </a:solidFill>
+                <a:latin typeface="Segoe UI"/>
+              </a:rPr>
+              <a:t>Privacy-preserving by design — UU PDP &amp; POJK compliant dengan full audit trail</a:t>
+            </a:r>
+          </a:p>
+        </p:txBody>
+      </p:sp>
+      <p:sp>
+        <p:nvSpPr>
+          <p:cNvPr id="28" name="TextBox 27"/>
+          <p:cNvSpPr txBox="1"/>
+          <p:nvPr/>
+        </p:nvSpPr>
+        <p:spPr>
+          <a:xfrm>
+            <a:off x="548640" y="6446520"/>
+            <a:ext cx="9144000" cy="274320"/>
+          </a:xfrm>
+          <a:prstGeom prst="rect">
+            <a:avLst/>
+          </a:prstGeom>
+          <a:noFill/>
+        </p:spPr>
+        <p:txBody>
+          <a:bodyPr wrap="square" lIns="73152" rIns="73152" tIns="36576" bIns="36576" anchor="t">
+            <a:spAutoFit/>
+          </a:bodyPr>
+          <a:lstStyle/>
+          <a:p>
+            <a:pPr algn="l">
+              <a:lnSpc>
+                <a:spcPts val="1100"/>
+              </a:lnSpc>
+            </a:pPr>
+            <a:r>
+              <a:rPr sz="900" b="0" i="0">
+                <a:solidFill>
+                  <a:srgbClr val="95A5A6"/>
+                </a:solidFill>
+                <a:latin typeface="Segoe UI"/>
+              </a:rPr>
+              <a:t>DCR Collaboration API v2 | SFSEAPAC | 2026   ·   52 / 56</a:t>
+            </a:r>
+          </a:p>
+        </p:txBody>
+      </p:sp>
+    </p:spTree>
+  </p:cSld>
+  <p:clrMapOvr>
+    <a:masterClrMapping/>
+  </p:clrMapOvr>
+</p:sld>
+</file>
+
+<file path=ppt/slides/slide53.xml><?xml version="1.0" encoding="utf-8"?>
+<p:sld xmlns:a="http://schemas.openxmlformats.org/drawingml/2006/main" xmlns:p="http://schemas.openxmlformats.org/presentationml/2006/main" xmlns:r="http://schemas.openxmlformats.org/officeDocument/2006/relationships">
+  <p:cSld>
+    <p:bg>
+      <p:bgPr>
+        <a:solidFill>
+          <a:srgbClr val="FFFFFF"/>
+        </a:solidFill>
+        <a:effectLst/>
+      </p:bgPr>
+    </p:bg>
+    <p:spTree>
+      <p:nvGrpSpPr>
+        <p:cNvPr id="1" name=""/>
+        <p:cNvGrpSpPr/>
+        <p:nvPr/>
+      </p:nvGrpSpPr>
+      <p:grpSpPr/>
+      <p:sp>
+        <p:nvSpPr>
+          <p:cNvPr id="2" name="Oval 1"/>
+          <p:cNvSpPr/>
+          <p:nvPr/>
+        </p:nvSpPr>
+        <p:spPr>
+          <a:xfrm>
+            <a:off x="9631375" y="-914400"/>
+            <a:ext cx="3200400" cy="3200400"/>
+          </a:xfrm>
+          <a:prstGeom prst="ellipse">
+            <a:avLst/>
+          </a:prstGeom>
+          <a:solidFill>
+            <a:srgbClr val="D6EFF8"/>
+          </a:solidFill>
+          <a:ln>
+            <a:noFill/>
+          </a:ln>
+        </p:spPr>
+        <p:style>
+          <a:lnRef idx="1">
+            <a:schemeClr val="accent1"/>
+          </a:lnRef>
+          <a:fillRef idx="3">
+            <a:schemeClr val="accent1"/>
+          </a:fillRef>
+          <a:effectRef idx="2">
+            <a:schemeClr val="accent1"/>
+          </a:effectRef>
+          <a:fontRef idx="minor">
+            <a:schemeClr val="lt1"/>
+          </a:fontRef>
+        </p:style>
+        <p:txBody>
+          <a:bodyPr rtlCol="0" anchor="ctr"/>
+          <a:lstStyle/>
+          <a:p>
+            <a:pPr algn="ctr"/>
+          </a:p>
+        </p:txBody>
+      </p:sp>
+      <p:sp>
+        <p:nvSpPr>
+          <p:cNvPr id="3" name="Oval 2"/>
+          <p:cNvSpPr/>
+          <p:nvPr/>
+        </p:nvSpPr>
+        <p:spPr>
+          <a:xfrm>
+            <a:off x="-640080" y="5029200"/>
+            <a:ext cx="1828800" cy="1828800"/>
+          </a:xfrm>
+          <a:prstGeom prst="ellipse">
+            <a:avLst/>
+          </a:prstGeom>
+          <a:solidFill>
+            <a:srgbClr val="E8F4FD"/>
+          </a:solidFill>
+          <a:ln>
+            <a:noFill/>
+          </a:ln>
+        </p:spPr>
+        <p:style>
+          <a:lnRef idx="1">
+            <a:schemeClr val="accent1"/>
+          </a:lnRef>
+          <a:fillRef idx="3">
+            <a:schemeClr val="accent1"/>
+          </a:fillRef>
+          <a:effectRef idx="2">
+            <a:schemeClr val="accent1"/>
+          </a:effectRef>
+          <a:fontRef idx="minor">
+            <a:schemeClr val="lt1"/>
+          </a:fontRef>
+        </p:style>
+        <p:txBody>
+          <a:bodyPr rtlCol="0" anchor="ctr"/>
+          <a:lstStyle/>
+          <a:p>
+            <a:pPr algn="ctr"/>
+          </a:p>
+        </p:txBody>
+      </p:sp>
+      <p:pic>
+        <p:nvPicPr>
+          <p:cNvPr id="4" name="Picture 3" descr="snowflake_icon_blue.png"/>
+          <p:cNvPicPr>
+            <a:picLocks noChangeAspect="1"/>
+          </p:cNvPicPr>
+          <p:nvPr/>
+        </p:nvPicPr>
+        <p:blipFill>
+          <a:blip r:embed="rId2"/>
+          <a:stretch>
+            <a:fillRect/>
+          </a:stretch>
+        </p:blipFill>
+        <p:spPr>
+          <a:xfrm>
+            <a:off x="11414455" y="320040"/>
+            <a:ext cx="349389" cy="320040"/>
+          </a:xfrm>
+          <a:prstGeom prst="rect">
+            <a:avLst/>
+          </a:prstGeom>
+        </p:spPr>
+      </p:pic>
+      <p:sp>
+        <p:nvSpPr>
+          <p:cNvPr id="5" name="Rectangle 4"/>
+          <p:cNvSpPr/>
+          <p:nvPr/>
+        </p:nvSpPr>
+        <p:spPr>
+          <a:xfrm>
+            <a:off x="548640" y="457200"/>
+            <a:ext cx="54864" cy="502920"/>
+          </a:xfrm>
+          <a:prstGeom prst="rect">
+            <a:avLst/>
+          </a:prstGeom>
+          <a:solidFill>
+            <a:srgbClr val="29B5E8"/>
+          </a:solidFill>
+          <a:ln>
+            <a:noFill/>
+          </a:ln>
+        </p:spPr>
+        <p:style>
+          <a:lnRef idx="1">
+            <a:schemeClr val="accent1"/>
+          </a:lnRef>
+          <a:fillRef idx="3">
+            <a:schemeClr val="accent1"/>
+          </a:fillRef>
+          <a:effectRef idx="2">
+            <a:schemeClr val="accent1"/>
+          </a:effectRef>
+          <a:fontRef idx="minor">
+            <a:schemeClr val="lt1"/>
+          </a:fontRef>
+        </p:style>
+        <p:txBody>
+          <a:bodyPr rtlCol="0" anchor="ctr"/>
+          <a:lstStyle/>
+          <a:p>
+            <a:pPr algn="ctr"/>
+          </a:p>
+        </p:txBody>
+      </p:sp>
+      <p:sp>
+        <p:nvSpPr>
+          <p:cNvPr id="6" name="TextBox 5"/>
+          <p:cNvSpPr txBox="1"/>
+          <p:nvPr/>
+        </p:nvSpPr>
+        <p:spPr>
+          <a:xfrm>
+            <a:off x="777240" y="411480"/>
+            <a:ext cx="10058400" cy="640080"/>
+          </a:xfrm>
+          <a:prstGeom prst="rect">
+            <a:avLst/>
+          </a:prstGeom>
+          <a:noFill/>
+        </p:spPr>
+        <p:txBody>
+          <a:bodyPr wrap="square" lIns="73152" rIns="73152" tIns="36576" bIns="36576" anchor="t">
+            <a:spAutoFit/>
+          </a:bodyPr>
+          <a:lstStyle/>
+          <a:p>
+            <a:pPr algn="l">
+              <a:lnSpc>
+                <a:spcPts val="3900"/>
+              </a:lnSpc>
+            </a:pPr>
+            <a:r>
+              <a:rPr sz="3000" b="1" i="0">
+                <a:solidFill>
+                  <a:srgbClr val="1B2A3D"/>
+                </a:solidFill>
+                <a:latin typeface="Calibri Light"/>
+              </a:rPr>
+              <a:t>Bottom Line</a:t>
+            </a:r>
+          </a:p>
+        </p:txBody>
+      </p:sp>
+      <p:cxnSp>
+        <p:nvCxnSpPr>
+          <p:cNvPr id="7" name="Connector 6"/>
+          <p:cNvCxnSpPr/>
+          <p:nvPr/>
+        </p:nvCxnSpPr>
+        <p:spPr>
+          <a:xfrm>
+            <a:off x="548640" y="1234440"/>
+            <a:ext cx="11094415" cy="0"/>
+          </a:xfrm>
+          <a:prstGeom prst="line">
+            <a:avLst/>
+          </a:prstGeom>
+          <a:ln w="12700">
+            <a:solidFill>
+              <a:srgbClr val="DEE3EA"/>
+            </a:solidFill>
+          </a:ln>
+        </p:spPr>
+        <p:style>
+          <a:lnRef idx="2">
+            <a:schemeClr val="accent1"/>
+          </a:lnRef>
+          <a:fillRef idx="0">
+            <a:schemeClr val="accent1"/>
+          </a:fillRef>
+          <a:effectRef idx="1">
+            <a:schemeClr val="accent1"/>
+          </a:effectRef>
+          <a:fontRef idx="minor">
+            <a:schemeClr val="tx1"/>
+          </a:fontRef>
+        </p:style>
+      </p:cxnSp>
+      <p:sp>
+        <p:nvSpPr>
+          <p:cNvPr id="8" name="TextBox 7"/>
+          <p:cNvSpPr txBox="1"/>
+          <p:nvPr/>
+        </p:nvSpPr>
+        <p:spPr>
+          <a:xfrm>
+            <a:off x="731520" y="1508760"/>
+            <a:ext cx="10515600" cy="4754880"/>
+          </a:xfrm>
+          <a:prstGeom prst="rect">
+            <a:avLst/>
+          </a:prstGeom>
+          <a:noFill/>
+        </p:spPr>
+        <p:txBody>
+          <a:bodyPr wrap="square" lIns="73152" rIns="73152">
+            <a:spAutoFit/>
+          </a:bodyPr>
+          <a:lstStyle/>
+          <a:p>
+            <a:pPr>
+              <a:lnSpc>
+                <a:spcPts val="2500"/>
+              </a:lnSpc>
+              <a:spcAft>
+                <a:spcPts val="1000"/>
+              </a:spcAft>
+            </a:pPr>
+            <a:r>
+              <a:rPr sz="800">
+                <a:solidFill>
+                  <a:srgbClr val="29B5E8"/>
+                </a:solidFill>
+                <a:latin typeface="Segoe UI"/>
+              </a:rPr>
+              <a:t>●  </a:t>
+            </a:r>
+            <a:r>
+              <a:rPr sz="1600">
+                <a:solidFill>
+                  <a:srgbClr val="2C3E50"/>
+                </a:solidFill>
+                <a:latin typeface="Segoe UI"/>
+              </a:rPr>
+              <a:t>2m</a:t>
+            </a:r>
+          </a:p>
+          <a:p>
+            <a:pPr>
+              <a:lnSpc>
+                <a:spcPts val="2500"/>
+              </a:lnSpc>
+              <a:spcAft>
+                <a:spcPts val="1000"/>
+              </a:spcAft>
+            </a:pPr>
+            <a:r>
+              <a:rPr sz="800">
+                <a:solidFill>
+                  <a:srgbClr val="29B5E8"/>
+                </a:solidFill>
+                <a:latin typeface="Segoe UI"/>
+              </a:rPr>
+              <a:t>●  </a:t>
+            </a:r>
+            <a:r>
+              <a:rPr sz="1600">
+                <a:solidFill>
+                  <a:srgbClr val="2C3E50"/>
+                </a:solidFill>
+                <a:latin typeface="Segoe UI"/>
+              </a:rPr>
+              <a:t>16s End-to-end single-query full-scan</a:t>
+            </a:r>
+          </a:p>
+          <a:p>
+            <a:pPr>
+              <a:lnSpc>
+                <a:spcPts val="2500"/>
+              </a:lnSpc>
+              <a:spcAft>
+                <a:spcPts val="1000"/>
+              </a:spcAft>
+            </a:pPr>
+            <a:r>
+              <a:rPr sz="800">
+                <a:solidFill>
+                  <a:srgbClr val="29B5E8"/>
+                </a:solidFill>
+                <a:latin typeface="Segoe UI"/>
+              </a:rPr>
+              <a:t>●  </a:t>
+            </a:r>
+            <a:r>
+              <a:rPr sz="1600">
+                <a:solidFill>
+                  <a:srgbClr val="2C3E50"/>
+                </a:solidFill>
+                <a:latin typeface="Segoe UI"/>
+              </a:rPr>
+              <a:t>0.61</a:t>
+            </a:r>
+          </a:p>
+          <a:p>
+            <a:pPr>
+              <a:lnSpc>
+                <a:spcPts val="2500"/>
+              </a:lnSpc>
+              <a:spcAft>
+                <a:spcPts val="1000"/>
+              </a:spcAft>
+            </a:pPr>
+            <a:r>
+              <a:rPr sz="800">
+                <a:solidFill>
+                  <a:srgbClr val="29B5E8"/>
+                </a:solidFill>
+                <a:latin typeface="Segoe UI"/>
+              </a:rPr>
+              <a:t>●  </a:t>
+            </a:r>
+            <a:r>
+              <a:rPr sz="1600">
+                <a:solidFill>
+                  <a:srgbClr val="2C3E50"/>
+                </a:solidFill>
+                <a:latin typeface="Segoe UI"/>
+              </a:rPr>
+              <a:t>Credits per run (80% cheaper than loop)</a:t>
+            </a:r>
+          </a:p>
+          <a:p>
+            <a:pPr>
+              <a:lnSpc>
+                <a:spcPts val="2500"/>
+              </a:lnSpc>
+              <a:spcAft>
+                <a:spcPts val="1000"/>
+              </a:spcAft>
+            </a:pPr>
+            <a:r>
+              <a:rPr sz="800">
+                <a:solidFill>
+                  <a:srgbClr val="29B5E8"/>
+                </a:solidFill>
+                <a:latin typeface="Segoe UI"/>
+              </a:rPr>
+              <a:t>●  </a:t>
+            </a:r>
+            <a:r>
+              <a:rPr sz="1600">
+                <a:solidFill>
+                  <a:srgbClr val="2C3E50"/>
+                </a:solidFill>
+                <a:latin typeface="Segoe UI"/>
+              </a:rPr>
+              <a:t>1.2B</a:t>
+            </a:r>
+          </a:p>
+          <a:p>
+            <a:pPr>
+              <a:lnSpc>
+                <a:spcPts val="2500"/>
+              </a:lnSpc>
+              <a:spcAft>
+                <a:spcPts val="1000"/>
+              </a:spcAft>
+            </a:pPr>
+            <a:r>
+              <a:rPr sz="800">
+                <a:solidFill>
+                  <a:srgbClr val="29B5E8"/>
+                </a:solidFill>
+                <a:latin typeface="Segoe UI"/>
+              </a:rPr>
+              <a:t>●  </a:t>
+            </a:r>
+            <a:r>
+              <a:rPr sz="1600">
+                <a:solidFill>
+                  <a:srgbClr val="2C3E50"/>
+                </a:solidFill>
+                <a:latin typeface="Segoe UI"/>
+              </a:rPr>
+              <a:t>Provider rows fully scanned in 1 query</a:t>
+            </a:r>
+          </a:p>
+          <a:p>
+            <a:pPr>
+              <a:lnSpc>
+                <a:spcPts val="2500"/>
+              </a:lnSpc>
+              <a:spcAft>
+                <a:spcPts val="1000"/>
+              </a:spcAft>
+            </a:pPr>
+            <a:r>
+              <a:rPr sz="800">
+                <a:solidFill>
+                  <a:srgbClr val="29B5E8"/>
+                </a:solidFill>
+                <a:latin typeface="Segoe UI"/>
+              </a:rPr>
+              <a:t>●  </a:t>
+            </a:r>
+            <a:r>
+              <a:rPr sz="1600">
+                <a:solidFill>
+                  <a:srgbClr val="2C3E50"/>
+                </a:solidFill>
+                <a:latin typeface="Segoe UI"/>
+              </a:rPr>
+              <a:t>3.37M</a:t>
+            </a:r>
+          </a:p>
+          <a:p>
+            <a:pPr>
+              <a:lnSpc>
+                <a:spcPts val="2500"/>
+              </a:lnSpc>
+              <a:spcAft>
+                <a:spcPts val="1000"/>
+              </a:spcAft>
+            </a:pPr>
+            <a:r>
+              <a:rPr sz="800">
+                <a:solidFill>
+                  <a:srgbClr val="29B5E8"/>
+                </a:solidFill>
+                <a:latin typeface="Segoe UI"/>
+              </a:rPr>
+              <a:t>●  </a:t>
+            </a:r>
+            <a:r>
+              <a:rPr sz="1600">
+                <a:solidFill>
+                  <a:srgbClr val="2C3E50"/>
+                </a:solidFill>
+                <a:latin typeface="Segoe UI"/>
+              </a:rPr>
+              <a:t>Unique audience tuples (identical in both modes)</a:t>
+            </a:r>
+          </a:p>
+        </p:txBody>
+      </p:sp>
+      <p:sp>
+        <p:nvSpPr>
+          <p:cNvPr id="9" name="TextBox 8"/>
+          <p:cNvSpPr txBox="1"/>
+          <p:nvPr/>
+        </p:nvSpPr>
+        <p:spPr>
+          <a:xfrm>
+            <a:off x="548640" y="6446520"/>
+            <a:ext cx="9144000" cy="274320"/>
+          </a:xfrm>
+          <a:prstGeom prst="rect">
+            <a:avLst/>
+          </a:prstGeom>
+          <a:noFill/>
+        </p:spPr>
+        <p:txBody>
+          <a:bodyPr wrap="square" lIns="73152" rIns="73152" tIns="36576" bIns="36576" anchor="t">
+            <a:spAutoFit/>
+          </a:bodyPr>
+          <a:lstStyle/>
+          <a:p>
+            <a:pPr algn="l">
+              <a:lnSpc>
+                <a:spcPts val="1100"/>
+              </a:lnSpc>
+            </a:pPr>
+            <a:r>
+              <a:rPr sz="900" b="0" i="0">
+                <a:solidFill>
+                  <a:srgbClr val="95A5A6"/>
+                </a:solidFill>
+                <a:latin typeface="Segoe UI"/>
+              </a:rPr>
+              <a:t>DCR Collaboration API v2 | SFSEAPAC | 2026   ·   53 / 56</a:t>
+            </a:r>
+          </a:p>
+        </p:txBody>
+      </p:sp>
+    </p:spTree>
+  </p:cSld>
+  <p:clrMapOvr>
+    <a:masterClrMapping/>
+  </p:clrMapOvr>
+</p:sld>
+</file>
+
+<file path=ppt/slides/slide54.xml><?xml version="1.0" encoding="utf-8"?>
+<p:sld xmlns:a="http://schemas.openxmlformats.org/drawingml/2006/main" xmlns:p="http://schemas.openxmlformats.org/presentationml/2006/main" xmlns:r="http://schemas.openxmlformats.org/officeDocument/2006/relationships">
+  <p:cSld>
+    <p:bg>
+      <p:bgPr>
+        <a:solidFill>
+          <a:srgbClr val="FFFFFF"/>
+        </a:solidFill>
+        <a:effectLst/>
+      </p:bgPr>
+    </p:bg>
+    <p:spTree>
+      <p:nvGrpSpPr>
+        <p:cNvPr id="1" name=""/>
+        <p:cNvGrpSpPr/>
+        <p:nvPr/>
+      </p:nvGrpSpPr>
+      <p:grpSpPr/>
+      <p:sp>
+        <p:nvSpPr>
+          <p:cNvPr id="2" name="Oval 1"/>
+          <p:cNvSpPr/>
+          <p:nvPr/>
+        </p:nvSpPr>
+        <p:spPr>
+          <a:xfrm>
+            <a:off x="9631375" y="-914400"/>
+            <a:ext cx="3200400" cy="3200400"/>
+          </a:xfrm>
+          <a:prstGeom prst="ellipse">
+            <a:avLst/>
+          </a:prstGeom>
+          <a:solidFill>
+            <a:srgbClr val="D6EFF8"/>
+          </a:solidFill>
+          <a:ln>
+            <a:noFill/>
+          </a:ln>
+        </p:spPr>
+        <p:style>
+          <a:lnRef idx="1">
+            <a:schemeClr val="accent1"/>
+          </a:lnRef>
+          <a:fillRef idx="3">
+            <a:schemeClr val="accent1"/>
+          </a:fillRef>
+          <a:effectRef idx="2">
+            <a:schemeClr val="accent1"/>
+          </a:effectRef>
+          <a:fontRef idx="minor">
+            <a:schemeClr val="lt1"/>
+          </a:fontRef>
+        </p:style>
+        <p:txBody>
+          <a:bodyPr rtlCol="0" anchor="ctr"/>
+          <a:lstStyle/>
+          <a:p>
+            <a:pPr algn="ctr"/>
+          </a:p>
+        </p:txBody>
+      </p:sp>
+      <p:sp>
+        <p:nvSpPr>
+          <p:cNvPr id="3" name="Oval 2"/>
+          <p:cNvSpPr/>
+          <p:nvPr/>
+        </p:nvSpPr>
+        <p:spPr>
+          <a:xfrm>
+            <a:off x="-640080" y="5029200"/>
+            <a:ext cx="1828800" cy="1828800"/>
+          </a:xfrm>
+          <a:prstGeom prst="ellipse">
+            <a:avLst/>
+          </a:prstGeom>
+          <a:solidFill>
+            <a:srgbClr val="E8F4FD"/>
+          </a:solidFill>
+          <a:ln>
+            <a:noFill/>
+          </a:ln>
+        </p:spPr>
+        <p:style>
+          <a:lnRef idx="1">
+            <a:schemeClr val="accent1"/>
+          </a:lnRef>
+          <a:fillRef idx="3">
+            <a:schemeClr val="accent1"/>
+          </a:fillRef>
+          <a:effectRef idx="2">
+            <a:schemeClr val="accent1"/>
+          </a:effectRef>
+          <a:fontRef idx="minor">
+            <a:schemeClr val="lt1"/>
+          </a:fontRef>
+        </p:style>
+        <p:txBody>
+          <a:bodyPr rtlCol="0" anchor="ctr"/>
+          <a:lstStyle/>
+          <a:p>
+            <a:pPr algn="ctr"/>
+          </a:p>
+        </p:txBody>
+      </p:sp>
+      <p:pic>
+        <p:nvPicPr>
+          <p:cNvPr id="4" name="Picture 3" descr="snowflake_icon_blue.png"/>
+          <p:cNvPicPr>
+            <a:picLocks noChangeAspect="1"/>
+          </p:cNvPicPr>
+          <p:nvPr/>
+        </p:nvPicPr>
+        <p:blipFill>
+          <a:blip r:embed="rId2"/>
+          <a:stretch>
+            <a:fillRect/>
+          </a:stretch>
+        </p:blipFill>
+        <p:spPr>
+          <a:xfrm>
+            <a:off x="11414455" y="320040"/>
+            <a:ext cx="349389" cy="320040"/>
+          </a:xfrm>
+          <a:prstGeom prst="rect">
+            <a:avLst/>
+          </a:prstGeom>
+        </p:spPr>
+      </p:pic>
+      <p:sp>
+        <p:nvSpPr>
+          <p:cNvPr id="5" name="Rectangle 4"/>
+          <p:cNvSpPr/>
+          <p:nvPr/>
+        </p:nvSpPr>
+        <p:spPr>
+          <a:xfrm>
+            <a:off x="548640" y="457200"/>
+            <a:ext cx="54864" cy="502920"/>
+          </a:xfrm>
+          <a:prstGeom prst="rect">
+            <a:avLst/>
+          </a:prstGeom>
+          <a:solidFill>
+            <a:srgbClr val="29B5E8"/>
+          </a:solidFill>
+          <a:ln>
+            <a:noFill/>
+          </a:ln>
+        </p:spPr>
+        <p:style>
+          <a:lnRef idx="1">
+            <a:schemeClr val="accent1"/>
+          </a:lnRef>
+          <a:fillRef idx="3">
+            <a:schemeClr val="accent1"/>
+          </a:fillRef>
+          <a:effectRef idx="2">
+            <a:schemeClr val="accent1"/>
+          </a:effectRef>
+          <a:fontRef idx="minor">
+            <a:schemeClr val="lt1"/>
+          </a:fontRef>
+        </p:style>
+        <p:txBody>
+          <a:bodyPr rtlCol="0" anchor="ctr"/>
+          <a:lstStyle/>
+          <a:p>
+            <a:pPr algn="ctr"/>
+          </a:p>
+        </p:txBody>
+      </p:sp>
+      <p:sp>
+        <p:nvSpPr>
+          <p:cNvPr id="6" name="TextBox 5"/>
+          <p:cNvSpPr txBox="1"/>
+          <p:nvPr/>
+        </p:nvSpPr>
+        <p:spPr>
+          <a:xfrm>
+            <a:off x="777240" y="411480"/>
+            <a:ext cx="10058400" cy="640080"/>
+          </a:xfrm>
+          <a:prstGeom prst="rect">
+            <a:avLst/>
+          </a:prstGeom>
+          <a:noFill/>
+        </p:spPr>
+        <p:txBody>
+          <a:bodyPr wrap="square" lIns="73152" rIns="73152" tIns="36576" bIns="36576" anchor="t">
+            <a:spAutoFit/>
+          </a:bodyPr>
+          <a:lstStyle/>
+          <a:p>
+            <a:pPr algn="l">
+              <a:lnSpc>
+                <a:spcPts val="3900"/>
+              </a:lnSpc>
+            </a:pPr>
+            <a:r>
+              <a:rPr sz="3000" b="1" i="0">
+                <a:solidFill>
+                  <a:srgbClr val="1B2A3D"/>
+                </a:solidFill>
+                <a:latin typeface="Calibri Light"/>
+              </a:rPr>
+              <a:t>References &amp; Code Repository</a:t>
+            </a:r>
+          </a:p>
+        </p:txBody>
+      </p:sp>
+      <p:cxnSp>
+        <p:nvCxnSpPr>
+          <p:cNvPr id="7" name="Connector 6"/>
+          <p:cNvCxnSpPr/>
+          <p:nvPr/>
+        </p:nvCxnSpPr>
+        <p:spPr>
+          <a:xfrm>
+            <a:off x="548640" y="1234440"/>
+            <a:ext cx="11094415" cy="0"/>
+          </a:xfrm>
+          <a:prstGeom prst="line">
+            <a:avLst/>
+          </a:prstGeom>
+          <a:ln w="12700">
+            <a:solidFill>
+              <a:srgbClr val="DEE3EA"/>
+            </a:solidFill>
+          </a:ln>
+        </p:spPr>
+        <p:style>
+          <a:lnRef idx="2">
+            <a:schemeClr val="accent1"/>
+          </a:lnRef>
+          <a:fillRef idx="0">
+            <a:schemeClr val="accent1"/>
+          </a:fillRef>
+          <a:effectRef idx="1">
+            <a:schemeClr val="accent1"/>
+          </a:effectRef>
+          <a:fontRef idx="minor">
+            <a:schemeClr val="tx1"/>
+          </a:fontRef>
+        </p:style>
+      </p:cxnSp>
+      <p:sp>
+        <p:nvSpPr>
+          <p:cNvPr id="8" name="Rounded Rectangle 7"/>
+          <p:cNvSpPr/>
+          <p:nvPr/>
+        </p:nvSpPr>
+        <p:spPr>
+          <a:xfrm>
+            <a:off x="640080" y="1554480"/>
+            <a:ext cx="10911535" cy="804672"/>
+          </a:xfrm>
+          <a:prstGeom prst="roundRect">
+            <a:avLst/>
+          </a:prstGeom>
+          <a:solidFill>
+            <a:srgbClr val="EEF5FA"/>
+          </a:solidFill>
+          <a:ln>
+            <a:noFill/>
+          </a:ln>
+        </p:spPr>
+        <p:style>
+          <a:lnRef idx="1">
+            <a:schemeClr val="accent1"/>
+          </a:lnRef>
+          <a:fillRef idx="3">
+            <a:schemeClr val="accent1"/>
+          </a:fillRef>
+          <a:effectRef idx="2">
+            <a:schemeClr val="accent1"/>
+          </a:effectRef>
+          <a:fontRef idx="minor">
+            <a:schemeClr val="lt1"/>
+          </a:fontRef>
+        </p:style>
+        <p:txBody>
+          <a:bodyPr rtlCol="0" anchor="ctr"/>
+          <a:lstStyle/>
+          <a:p>
+            <a:pPr algn="ctr"/>
+          </a:p>
+        </p:txBody>
+      </p:sp>
+      <p:sp>
+        <p:nvSpPr>
+          <p:cNvPr id="9" name="Oval 8"/>
+          <p:cNvSpPr/>
+          <p:nvPr/>
+        </p:nvSpPr>
+        <p:spPr>
+          <a:xfrm>
+            <a:off x="914400" y="1691640"/>
+            <a:ext cx="411480" cy="411480"/>
+          </a:xfrm>
+          <a:prstGeom prst="ellipse">
+            <a:avLst/>
+          </a:prstGeom>
+          <a:solidFill>
+            <a:srgbClr val="29B5E8"/>
+          </a:solidFill>
+          <a:ln>
+            <a:noFill/>
+          </a:ln>
+        </p:spPr>
+        <p:style>
+          <a:lnRef idx="1">
+            <a:schemeClr val="accent1"/>
+          </a:lnRef>
+          <a:fillRef idx="3">
+            <a:schemeClr val="accent1"/>
+          </a:fillRef>
+          <a:effectRef idx="2">
+            <a:schemeClr val="accent1"/>
+          </a:effectRef>
+          <a:fontRef idx="minor">
+            <a:schemeClr val="lt1"/>
+          </a:fontRef>
+        </p:style>
+        <p:txBody>
+          <a:bodyPr rtlCol="0" anchor="ctr"/>
+          <a:lstStyle/>
+          <a:p>
+            <a:pPr algn="ctr"/>
+          </a:p>
+        </p:txBody>
+      </p:sp>
+      <p:sp>
+        <p:nvSpPr>
+          <p:cNvPr id="10" name="TextBox 9"/>
+          <p:cNvSpPr txBox="1"/>
+          <p:nvPr/>
+        </p:nvSpPr>
+        <p:spPr>
+          <a:xfrm>
+            <a:off x="914400" y="1691640"/>
+            <a:ext cx="411480" cy="411480"/>
+          </a:xfrm>
+          <a:prstGeom prst="rect">
+            <a:avLst/>
+          </a:prstGeom>
+          <a:noFill/>
+        </p:spPr>
+        <p:txBody>
+          <a:bodyPr wrap="square" lIns="73152" rIns="73152" tIns="36576" bIns="36576" anchor="ctr">
+            <a:spAutoFit/>
+          </a:bodyPr>
+          <a:lstStyle/>
+          <a:p>
+            <a:pPr algn="ctr">
+              <a:lnSpc>
+                <a:spcPts val="1600"/>
+              </a:lnSpc>
+            </a:pPr>
+            <a:r>
+              <a:rPr sz="1300" b="1" i="0">
+                <a:solidFill>
+                  <a:srgbClr val="FFFFFF"/>
+                </a:solidFill>
+                <a:latin typeface="Segoe UI"/>
+              </a:rPr>
+              <a:t>01</a:t>
+            </a:r>
+          </a:p>
+        </p:txBody>
+      </p:sp>
+      <p:sp>
+        <p:nvSpPr>
+          <p:cNvPr id="11" name="TextBox 10"/>
+          <p:cNvSpPr txBox="1"/>
+          <p:nvPr/>
+        </p:nvSpPr>
+        <p:spPr>
+          <a:xfrm>
+            <a:off x="1554480" y="1627632"/>
+            <a:ext cx="9601200" cy="768096"/>
+          </a:xfrm>
+          <a:prstGeom prst="rect">
+            <a:avLst/>
+          </a:prstGeom>
+          <a:noFill/>
+        </p:spPr>
+        <p:txBody>
+          <a:bodyPr wrap="square" lIns="73152" rIns="73152" tIns="36576" bIns="36576" anchor="ctr">
+            <a:spAutoFit/>
+          </a:bodyPr>
+          <a:lstStyle/>
+          <a:p>
+            <a:pPr algn="l">
+              <a:lnSpc>
+                <a:spcPts val="2000"/>
+              </a:lnSpc>
+            </a:pPr>
+            <a:r>
+              <a:rPr sz="1600" b="0" i="0">
+                <a:solidFill>
+                  <a:srgbClr val="2C3E50"/>
+                </a:solidFill>
+                <a:latin typeface="Segoe UI"/>
+              </a:rPr>
+              <a:t>GitHub — https://github.com/arzamuhammad/dcr-collaboration-api</a:t>
+            </a:r>
+          </a:p>
+        </p:txBody>
+      </p:sp>
+      <p:sp>
+        <p:nvSpPr>
+          <p:cNvPr id="12" name="Rounded Rectangle 11"/>
+          <p:cNvSpPr/>
+          <p:nvPr/>
+        </p:nvSpPr>
+        <p:spPr>
+          <a:xfrm>
+            <a:off x="640080" y="2468880"/>
+            <a:ext cx="10911535" cy="804672"/>
+          </a:xfrm>
+          <a:prstGeom prst="roundRect">
+            <a:avLst/>
+          </a:prstGeom>
+          <a:solidFill>
+            <a:srgbClr val="F4F8FB"/>
+          </a:solidFill>
+          <a:ln>
+            <a:noFill/>
+          </a:ln>
+        </p:spPr>
+        <p:style>
+          <a:lnRef idx="1">
+            <a:schemeClr val="accent1"/>
+          </a:lnRef>
+          <a:fillRef idx="3">
+            <a:schemeClr val="accent1"/>
+          </a:fillRef>
+          <a:effectRef idx="2">
+            <a:schemeClr val="accent1"/>
+          </a:effectRef>
+          <a:fontRef idx="minor">
+            <a:schemeClr val="lt1"/>
+          </a:fontRef>
+        </p:style>
+        <p:txBody>
+          <a:bodyPr rtlCol="0" anchor="ctr"/>
+          <a:lstStyle/>
+          <a:p>
+            <a:pPr algn="ctr"/>
+          </a:p>
+        </p:txBody>
+      </p:sp>
+      <p:sp>
+        <p:nvSpPr>
+          <p:cNvPr id="13" name="Oval 12"/>
+          <p:cNvSpPr/>
+          <p:nvPr/>
+        </p:nvSpPr>
+        <p:spPr>
+          <a:xfrm>
+            <a:off x="914400" y="2606040"/>
+            <a:ext cx="411480" cy="411480"/>
+          </a:xfrm>
+          <a:prstGeom prst="ellipse">
+            <a:avLst/>
+          </a:prstGeom>
+          <a:solidFill>
+            <a:srgbClr val="11567F"/>
+          </a:solidFill>
+          <a:ln>
+            <a:noFill/>
+          </a:ln>
+        </p:spPr>
+        <p:style>
+          <a:lnRef idx="1">
+            <a:schemeClr val="accent1"/>
+          </a:lnRef>
+          <a:fillRef idx="3">
+            <a:schemeClr val="accent1"/>
+          </a:fillRef>
+          <a:effectRef idx="2">
+            <a:schemeClr val="accent1"/>
+          </a:effectRef>
+          <a:fontRef idx="minor">
+            <a:schemeClr val="lt1"/>
+          </a:fontRef>
+        </p:style>
+        <p:txBody>
+          <a:bodyPr rtlCol="0" anchor="ctr"/>
+          <a:lstStyle/>
+          <a:p>
+            <a:pPr algn="ctr"/>
+          </a:p>
+        </p:txBody>
+      </p:sp>
+      <p:sp>
+        <p:nvSpPr>
+          <p:cNvPr id="14" name="TextBox 13"/>
+          <p:cNvSpPr txBox="1"/>
+          <p:nvPr/>
+        </p:nvSpPr>
+        <p:spPr>
+          <a:xfrm>
+            <a:off x="914400" y="2606040"/>
+            <a:ext cx="411480" cy="411480"/>
+          </a:xfrm>
+          <a:prstGeom prst="rect">
+            <a:avLst/>
+          </a:prstGeom>
+          <a:noFill/>
+        </p:spPr>
+        <p:txBody>
+          <a:bodyPr wrap="square" lIns="73152" rIns="73152" tIns="36576" bIns="36576" anchor="ctr">
+            <a:spAutoFit/>
+          </a:bodyPr>
+          <a:lstStyle/>
+          <a:p>
+            <a:pPr algn="ctr">
+              <a:lnSpc>
+                <a:spcPts val="1600"/>
+              </a:lnSpc>
+            </a:pPr>
+            <a:r>
+              <a:rPr sz="1300" b="1" i="0">
+                <a:solidFill>
+                  <a:srgbClr val="FFFFFF"/>
+                </a:solidFill>
+                <a:latin typeface="Segoe UI"/>
+              </a:rPr>
+              <a:t>02</a:t>
+            </a:r>
+          </a:p>
+        </p:txBody>
+      </p:sp>
+      <p:sp>
+        <p:nvSpPr>
+          <p:cNvPr id="15" name="TextBox 14"/>
+          <p:cNvSpPr txBox="1"/>
+          <p:nvPr/>
+        </p:nvSpPr>
+        <p:spPr>
+          <a:xfrm>
+            <a:off x="1554480" y="2542032"/>
+            <a:ext cx="9601200" cy="768096"/>
+          </a:xfrm>
+          <a:prstGeom prst="rect">
+            <a:avLst/>
+          </a:prstGeom>
+          <a:noFill/>
+        </p:spPr>
+        <p:txBody>
+          <a:bodyPr wrap="square" lIns="73152" rIns="73152" tIns="36576" bIns="36576" anchor="ctr">
+            <a:spAutoFit/>
+          </a:bodyPr>
+          <a:lstStyle/>
+          <a:p>
+            <a:pPr algn="l">
+              <a:lnSpc>
+                <a:spcPts val="2000"/>
+              </a:lnSpc>
+            </a:pPr>
+            <a:r>
+              <a:rPr sz="1600" b="0" i="0">
+                <a:solidFill>
+                  <a:srgbClr val="2C3E50"/>
+                </a:solidFill>
+                <a:latin typeface="Segoe UI"/>
+              </a:rPr>
+              <a:t>Contains — provider_workflow.sql, consumer_workflow.sql, README dengan battle-tested fixes</a:t>
+            </a:r>
+          </a:p>
+        </p:txBody>
+      </p:sp>
+      <p:sp>
+        <p:nvSpPr>
+          <p:cNvPr id="16" name="Rounded Rectangle 15"/>
+          <p:cNvSpPr/>
+          <p:nvPr/>
+        </p:nvSpPr>
+        <p:spPr>
+          <a:xfrm>
+            <a:off x="640080" y="3383280"/>
+            <a:ext cx="10911535" cy="804672"/>
+          </a:xfrm>
+          <a:prstGeom prst="roundRect">
+            <a:avLst/>
+          </a:prstGeom>
+          <a:solidFill>
+            <a:srgbClr val="EEF5FA"/>
+          </a:solidFill>
+          <a:ln>
+            <a:noFill/>
+          </a:ln>
+        </p:spPr>
+        <p:style>
+          <a:lnRef idx="1">
+            <a:schemeClr val="accent1"/>
+          </a:lnRef>
+          <a:fillRef idx="3">
+            <a:schemeClr val="accent1"/>
+          </a:fillRef>
+          <a:effectRef idx="2">
+            <a:schemeClr val="accent1"/>
+          </a:effectRef>
+          <a:fontRef idx="minor">
+            <a:schemeClr val="lt1"/>
+          </a:fontRef>
+        </p:style>
+        <p:txBody>
+          <a:bodyPr rtlCol="0" anchor="ctr"/>
+          <a:lstStyle/>
+          <a:p>
+            <a:pPr algn="ctr"/>
+          </a:p>
+        </p:txBody>
+      </p:sp>
+      <p:sp>
+        <p:nvSpPr>
+          <p:cNvPr id="17" name="Oval 16"/>
+          <p:cNvSpPr/>
+          <p:nvPr/>
+        </p:nvSpPr>
+        <p:spPr>
+          <a:xfrm>
+            <a:off x="914400" y="3520440"/>
+            <a:ext cx="411480" cy="411480"/>
+          </a:xfrm>
+          <a:prstGeom prst="ellipse">
+            <a:avLst/>
+          </a:prstGeom>
+          <a:solidFill>
+            <a:srgbClr val="71D3DC"/>
+          </a:solidFill>
+          <a:ln>
+            <a:noFill/>
+          </a:ln>
+        </p:spPr>
+        <p:style>
+          <a:lnRef idx="1">
+            <a:schemeClr val="accent1"/>
+          </a:lnRef>
+          <a:fillRef idx="3">
+            <a:schemeClr val="accent1"/>
+          </a:fillRef>
+          <a:effectRef idx="2">
+            <a:schemeClr val="accent1"/>
+          </a:effectRef>
+          <a:fontRef idx="minor">
+            <a:schemeClr val="lt1"/>
+          </a:fontRef>
+        </p:style>
+        <p:txBody>
+          <a:bodyPr rtlCol="0" anchor="ctr"/>
+          <a:lstStyle/>
+          <a:p>
+            <a:pPr algn="ctr"/>
+          </a:p>
+        </p:txBody>
+      </p:sp>
+      <p:sp>
+        <p:nvSpPr>
+          <p:cNvPr id="18" name="TextBox 17"/>
+          <p:cNvSpPr txBox="1"/>
+          <p:nvPr/>
+        </p:nvSpPr>
+        <p:spPr>
+          <a:xfrm>
+            <a:off x="914400" y="3520440"/>
+            <a:ext cx="411480" cy="411480"/>
+          </a:xfrm>
+          <a:prstGeom prst="rect">
+            <a:avLst/>
+          </a:prstGeom>
+          <a:noFill/>
+        </p:spPr>
+        <p:txBody>
+          <a:bodyPr wrap="square" lIns="73152" rIns="73152" tIns="36576" bIns="36576" anchor="ctr">
+            <a:spAutoFit/>
+          </a:bodyPr>
+          <a:lstStyle/>
+          <a:p>
+            <a:pPr algn="ctr">
+              <a:lnSpc>
+                <a:spcPts val="1600"/>
+              </a:lnSpc>
+            </a:pPr>
+            <a:r>
+              <a:rPr sz="1300" b="1" i="0">
+                <a:solidFill>
+                  <a:srgbClr val="FFFFFF"/>
+                </a:solidFill>
+                <a:latin typeface="Segoe UI"/>
+              </a:rPr>
+              <a:t>03</a:t>
+            </a:r>
+          </a:p>
+        </p:txBody>
+      </p:sp>
+      <p:sp>
+        <p:nvSpPr>
+          <p:cNvPr id="19" name="TextBox 18"/>
+          <p:cNvSpPr txBox="1"/>
+          <p:nvPr/>
+        </p:nvSpPr>
+        <p:spPr>
+          <a:xfrm>
+            <a:off x="1554480" y="3456432"/>
+            <a:ext cx="9601200" cy="768096"/>
+          </a:xfrm>
+          <a:prstGeom prst="rect">
+            <a:avLst/>
+          </a:prstGeom>
+          <a:noFill/>
+        </p:spPr>
+        <p:txBody>
+          <a:bodyPr wrap="square" lIns="73152" rIns="73152" tIns="36576" bIns="36576" anchor="ctr">
+            <a:spAutoFit/>
+          </a:bodyPr>
+          <a:lstStyle/>
+          <a:p>
+            <a:pPr algn="l">
+              <a:lnSpc>
+                <a:spcPts val="2000"/>
+              </a:lnSpc>
+            </a:pPr>
+            <a:r>
+              <a:rPr sz="1600" b="0" i="0">
+                <a:solidFill>
+                  <a:srgbClr val="2C3E50"/>
+                </a:solidFill>
+                <a:latin typeface="Segoe UI"/>
+              </a:rPr>
+              <a:t>Snowflake Docs — docs.snowflake.com/en/user-guide/cleanrooms/v2/about</a:t>
+            </a:r>
+          </a:p>
+        </p:txBody>
+      </p:sp>
+      <p:sp>
+        <p:nvSpPr>
+          <p:cNvPr id="20" name="Rounded Rectangle 19"/>
+          <p:cNvSpPr/>
+          <p:nvPr/>
+        </p:nvSpPr>
+        <p:spPr>
+          <a:xfrm>
+            <a:off x="640080" y="4297680"/>
+            <a:ext cx="10911535" cy="804672"/>
+          </a:xfrm>
+          <a:prstGeom prst="roundRect">
+            <a:avLst/>
+          </a:prstGeom>
+          <a:solidFill>
+            <a:srgbClr val="F4F8FB"/>
+          </a:solidFill>
+          <a:ln>
+            <a:noFill/>
+          </a:ln>
+        </p:spPr>
+        <p:style>
+          <a:lnRef idx="1">
+            <a:schemeClr val="accent1"/>
+          </a:lnRef>
+          <a:fillRef idx="3">
+            <a:schemeClr val="accent1"/>
+          </a:fillRef>
+          <a:effectRef idx="2">
+            <a:schemeClr val="accent1"/>
+          </a:effectRef>
+          <a:fontRef idx="minor">
+            <a:schemeClr val="lt1"/>
+          </a:fontRef>
+        </p:style>
+        <p:txBody>
+          <a:bodyPr rtlCol="0" anchor="ctr"/>
+          <a:lstStyle/>
+          <a:p>
+            <a:pPr algn="ctr"/>
+          </a:p>
+        </p:txBody>
+      </p:sp>
+      <p:sp>
+        <p:nvSpPr>
+          <p:cNvPr id="21" name="Oval 20"/>
+          <p:cNvSpPr/>
+          <p:nvPr/>
+        </p:nvSpPr>
+        <p:spPr>
+          <a:xfrm>
+            <a:off x="914400" y="4434840"/>
+            <a:ext cx="411480" cy="411480"/>
+          </a:xfrm>
+          <a:prstGeom prst="ellipse">
+            <a:avLst/>
+          </a:prstGeom>
+          <a:solidFill>
+            <a:srgbClr val="FF9F36"/>
+          </a:solidFill>
+          <a:ln>
+            <a:noFill/>
+          </a:ln>
+        </p:spPr>
+        <p:style>
+          <a:lnRef idx="1">
+            <a:schemeClr val="accent1"/>
+          </a:lnRef>
+          <a:fillRef idx="3">
+            <a:schemeClr val="accent1"/>
+          </a:fillRef>
+          <a:effectRef idx="2">
+            <a:schemeClr val="accent1"/>
+          </a:effectRef>
+          <a:fontRef idx="minor">
+            <a:schemeClr val="lt1"/>
+          </a:fontRef>
+        </p:style>
+        <p:txBody>
+          <a:bodyPr rtlCol="0" anchor="ctr"/>
+          <a:lstStyle/>
+          <a:p>
+            <a:pPr algn="ctr"/>
+          </a:p>
+        </p:txBody>
+      </p:sp>
+      <p:sp>
+        <p:nvSpPr>
+          <p:cNvPr id="22" name="TextBox 21"/>
+          <p:cNvSpPr txBox="1"/>
+          <p:nvPr/>
+        </p:nvSpPr>
+        <p:spPr>
+          <a:xfrm>
+            <a:off x="914400" y="4434840"/>
+            <a:ext cx="411480" cy="411480"/>
+          </a:xfrm>
+          <a:prstGeom prst="rect">
+            <a:avLst/>
+          </a:prstGeom>
+          <a:noFill/>
+        </p:spPr>
+        <p:txBody>
+          <a:bodyPr wrap="square" lIns="73152" rIns="73152" tIns="36576" bIns="36576" anchor="ctr">
+            <a:spAutoFit/>
+          </a:bodyPr>
+          <a:lstStyle/>
+          <a:p>
+            <a:pPr algn="ctr">
+              <a:lnSpc>
+                <a:spcPts val="1600"/>
+              </a:lnSpc>
+            </a:pPr>
+            <a:r>
+              <a:rPr sz="1300" b="1" i="0">
+                <a:solidFill>
+                  <a:srgbClr val="FFFFFF"/>
+                </a:solidFill>
+                <a:latin typeface="Segoe UI"/>
+              </a:rPr>
+              <a:t>04</a:t>
+            </a:r>
+          </a:p>
+        </p:txBody>
+      </p:sp>
+      <p:sp>
+        <p:nvSpPr>
+          <p:cNvPr id="23" name="TextBox 22"/>
+          <p:cNvSpPr txBox="1"/>
+          <p:nvPr/>
+        </p:nvSpPr>
+        <p:spPr>
+          <a:xfrm>
+            <a:off x="1554480" y="4370832"/>
+            <a:ext cx="9601200" cy="768096"/>
+          </a:xfrm>
+          <a:prstGeom prst="rect">
+            <a:avLst/>
+          </a:prstGeom>
+          <a:noFill/>
+        </p:spPr>
+        <p:txBody>
+          <a:bodyPr wrap="square" lIns="73152" rIns="73152" tIns="36576" bIns="36576" anchor="ctr">
+            <a:spAutoFit/>
+          </a:bodyPr>
+          <a:lstStyle/>
+          <a:p>
+            <a:pPr algn="l">
+              <a:lnSpc>
+                <a:spcPts val="2000"/>
+              </a:lnSpc>
+            </a:pPr>
+            <a:r>
+              <a:rPr sz="1600" b="0" i="0">
+                <a:solidFill>
+                  <a:srgbClr val="2C3E50"/>
+                </a:solidFill>
+                <a:latin typeface="Segoe UI"/>
+              </a:rPr>
+              <a:t>Spec Reference — docs.snowflake.com/en/user-guide/cleanrooms/v2/spec-reference</a:t>
+            </a:r>
+          </a:p>
+        </p:txBody>
+      </p:sp>
+      <p:sp>
+        <p:nvSpPr>
+          <p:cNvPr id="24" name="Rounded Rectangle 23"/>
+          <p:cNvSpPr/>
+          <p:nvPr/>
+        </p:nvSpPr>
+        <p:spPr>
+          <a:xfrm>
+            <a:off x="640080" y="5212080"/>
+            <a:ext cx="10911535" cy="804672"/>
+          </a:xfrm>
+          <a:prstGeom prst="roundRect">
+            <a:avLst/>
+          </a:prstGeom>
+          <a:solidFill>
+            <a:srgbClr val="EEF5FA"/>
+          </a:solidFill>
+          <a:ln>
+            <a:noFill/>
+          </a:ln>
+        </p:spPr>
+        <p:style>
+          <a:lnRef idx="1">
+            <a:schemeClr val="accent1"/>
+          </a:lnRef>
+          <a:fillRef idx="3">
+            <a:schemeClr val="accent1"/>
+          </a:fillRef>
+          <a:effectRef idx="2">
+            <a:schemeClr val="accent1"/>
+          </a:effectRef>
+          <a:fontRef idx="minor">
+            <a:schemeClr val="lt1"/>
+          </a:fontRef>
+        </p:style>
+        <p:txBody>
+          <a:bodyPr rtlCol="0" anchor="ctr"/>
+          <a:lstStyle/>
+          <a:p>
+            <a:pPr algn="ctr"/>
+          </a:p>
+        </p:txBody>
+      </p:sp>
+      <p:sp>
+        <p:nvSpPr>
+          <p:cNvPr id="25" name="Oval 24"/>
+          <p:cNvSpPr/>
+          <p:nvPr/>
+        </p:nvSpPr>
+        <p:spPr>
+          <a:xfrm>
+            <a:off x="914400" y="5349240"/>
+            <a:ext cx="411480" cy="411480"/>
+          </a:xfrm>
+          <a:prstGeom prst="ellipse">
+            <a:avLst/>
+          </a:prstGeom>
+          <a:solidFill>
+            <a:srgbClr val="29B5E8"/>
+          </a:solidFill>
+          <a:ln>
+            <a:noFill/>
+          </a:ln>
+        </p:spPr>
+        <p:style>
+          <a:lnRef idx="1">
+            <a:schemeClr val="accent1"/>
+          </a:lnRef>
+          <a:fillRef idx="3">
+            <a:schemeClr val="accent1"/>
+          </a:fillRef>
+          <a:effectRef idx="2">
+            <a:schemeClr val="accent1"/>
+          </a:effectRef>
+          <a:fontRef idx="minor">
+            <a:schemeClr val="lt1"/>
+          </a:fontRef>
+        </p:style>
+        <p:txBody>
+          <a:bodyPr rtlCol="0" anchor="ctr"/>
+          <a:lstStyle/>
+          <a:p>
+            <a:pPr algn="ctr"/>
+          </a:p>
+        </p:txBody>
+      </p:sp>
+      <p:sp>
+        <p:nvSpPr>
+          <p:cNvPr id="26" name="TextBox 25"/>
+          <p:cNvSpPr txBox="1"/>
+          <p:nvPr/>
+        </p:nvSpPr>
+        <p:spPr>
+          <a:xfrm>
+            <a:off x="914400" y="5349240"/>
+            <a:ext cx="411480" cy="411480"/>
+          </a:xfrm>
+          <a:prstGeom prst="rect">
+            <a:avLst/>
+          </a:prstGeom>
+          <a:noFill/>
+        </p:spPr>
+        <p:txBody>
+          <a:bodyPr wrap="square" lIns="73152" rIns="73152" tIns="36576" bIns="36576" anchor="ctr">
+            <a:spAutoFit/>
+          </a:bodyPr>
+          <a:lstStyle/>
+          <a:p>
+            <a:pPr algn="ctr">
+              <a:lnSpc>
+                <a:spcPts val="1600"/>
+              </a:lnSpc>
+            </a:pPr>
+            <a:r>
+              <a:rPr sz="1300" b="1" i="0">
+                <a:solidFill>
+                  <a:srgbClr val="FFFFFF"/>
+                </a:solidFill>
+                <a:latin typeface="Segoe UI"/>
+              </a:rPr>
+              <a:t>05</a:t>
+            </a:r>
+          </a:p>
+        </p:txBody>
+      </p:sp>
+      <p:sp>
+        <p:nvSpPr>
+          <p:cNvPr id="27" name="TextBox 26"/>
+          <p:cNvSpPr txBox="1"/>
+          <p:nvPr/>
+        </p:nvSpPr>
+        <p:spPr>
+          <a:xfrm>
+            <a:off x="1554480" y="5285232"/>
+            <a:ext cx="9601200" cy="768096"/>
+          </a:xfrm>
+          <a:prstGeom prst="rect">
+            <a:avLst/>
+          </a:prstGeom>
+          <a:noFill/>
+        </p:spPr>
+        <p:txBody>
+          <a:bodyPr wrap="square" lIns="73152" rIns="73152" tIns="36576" bIns="36576" anchor="ctr">
+            <a:spAutoFit/>
+          </a:bodyPr>
+          <a:lstStyle/>
+          <a:p>
+            <a:pPr algn="l">
+              <a:lnSpc>
+                <a:spcPts val="2000"/>
+              </a:lnSpc>
+            </a:pPr>
+            <a:r>
+              <a:rPr sz="1600" b="0" i="0">
+                <a:solidFill>
+                  <a:srgbClr val="2C3E50"/>
+                </a:solidFill>
+                <a:latin typeface="Segoe UI"/>
+              </a:rPr>
+              <a:t>API Reference — docs.snowflake.com/en/user-guide/cleanrooms/v2/v2-api-reference</a:t>
+            </a:r>
+          </a:p>
+        </p:txBody>
+      </p:sp>
+      <p:sp>
+        <p:nvSpPr>
+          <p:cNvPr id="28" name="TextBox 27"/>
+          <p:cNvSpPr txBox="1"/>
+          <p:nvPr/>
+        </p:nvSpPr>
+        <p:spPr>
+          <a:xfrm>
+            <a:off x="548640" y="6446520"/>
+            <a:ext cx="9144000" cy="274320"/>
+          </a:xfrm>
+          <a:prstGeom prst="rect">
+            <a:avLst/>
+          </a:prstGeom>
+          <a:noFill/>
+        </p:spPr>
+        <p:txBody>
+          <a:bodyPr wrap="square" lIns="73152" rIns="73152" tIns="36576" bIns="36576" anchor="t">
+            <a:spAutoFit/>
+          </a:bodyPr>
+          <a:lstStyle/>
+          <a:p>
+            <a:pPr algn="l">
+              <a:lnSpc>
+                <a:spcPts val="1100"/>
+              </a:lnSpc>
+            </a:pPr>
+            <a:r>
+              <a:rPr sz="900" b="0" i="0">
+                <a:solidFill>
+                  <a:srgbClr val="95A5A6"/>
+                </a:solidFill>
+                <a:latin typeface="Segoe UI"/>
+              </a:rPr>
+              <a:t>DCR Collaboration API v2 | SFSEAPAC | 2026   ·   54 / 56</a:t>
+            </a:r>
+          </a:p>
+        </p:txBody>
+      </p:sp>
+    </p:spTree>
+  </p:cSld>
+  <p:clrMapOvr>
+    <a:masterClrMapping/>
+  </p:clrMapOvr>
+</p:sld>
+</file>
+
+<file path=ppt/slides/slide55.xml><?xml version="1.0" encoding="utf-8"?>
+<p:sld xmlns:a="http://schemas.openxmlformats.org/drawingml/2006/main" xmlns:p="http://schemas.openxmlformats.org/presentationml/2006/main" xmlns:r="http://schemas.openxmlformats.org/officeDocument/2006/relationships">
+  <p:cSld>
+    <p:bg>
+      <p:bgPr>
+        <a:solidFill>
+          <a:srgbClr val="0D1B2A"/>
+        </a:solidFill>
+        <a:effectLst/>
+      </p:bgPr>
+    </p:bg>
+    <p:spTree>
+      <p:nvGrpSpPr>
+        <p:cNvPr id="1" name=""/>
+        <p:cNvGrpSpPr/>
+        <p:nvPr/>
+      </p:nvGrpSpPr>
+      <p:grpSpPr/>
+      <p:sp>
+        <p:nvSpPr>
+          <p:cNvPr id="2" name="Oval 1"/>
+          <p:cNvSpPr/>
+          <p:nvPr/>
+        </p:nvSpPr>
+        <p:spPr>
+          <a:xfrm>
+            <a:off x="9905695" y="-731520"/>
+            <a:ext cx="2743200" cy="2743200"/>
+          </a:xfrm>
+          <a:prstGeom prst="ellipse">
+            <a:avLst/>
+          </a:prstGeom>
+          <a:solidFill>
+            <a:srgbClr val="223850"/>
+          </a:solidFill>
+          <a:ln>
+            <a:noFill/>
+          </a:ln>
+        </p:spPr>
+        <p:style>
+          <a:lnRef idx="1">
+            <a:schemeClr val="accent1"/>
+          </a:lnRef>
+          <a:fillRef idx="3">
+            <a:schemeClr val="accent1"/>
+          </a:fillRef>
+          <a:effectRef idx="2">
+            <a:schemeClr val="accent1"/>
+          </a:effectRef>
+          <a:fontRef idx="minor">
+            <a:schemeClr val="lt1"/>
+          </a:fontRef>
+        </p:style>
+        <p:txBody>
+          <a:bodyPr rtlCol="0" anchor="ctr"/>
+          <a:lstStyle/>
+          <a:p>
+            <a:pPr algn="ctr"/>
+          </a:p>
+        </p:txBody>
+      </p:sp>
+      <p:sp>
+        <p:nvSpPr>
+          <p:cNvPr id="3" name="Oval 2"/>
+          <p:cNvSpPr/>
+          <p:nvPr/>
+        </p:nvSpPr>
+        <p:spPr>
+          <a:xfrm>
+            <a:off x="8076895" y="5486400"/>
+            <a:ext cx="1828800" cy="1828800"/>
+          </a:xfrm>
+          <a:prstGeom prst="ellipse">
+            <a:avLst/>
+          </a:prstGeom>
+          <a:solidFill>
+            <a:srgbClr val="1F344C"/>
+          </a:solidFill>
+          <a:ln>
+            <a:noFill/>
+          </a:ln>
+        </p:spPr>
+        <p:style>
+          <a:lnRef idx="1">
+            <a:schemeClr val="accent1"/>
+          </a:lnRef>
+          <a:fillRef idx="3">
+            <a:schemeClr val="accent1"/>
+          </a:fillRef>
+          <a:effectRef idx="2">
+            <a:schemeClr val="accent1"/>
+          </a:effectRef>
+          <a:fontRef idx="minor">
+            <a:schemeClr val="lt1"/>
+          </a:fontRef>
+        </p:style>
+        <p:txBody>
+          <a:bodyPr rtlCol="0" anchor="ctr"/>
+          <a:lstStyle/>
+          <a:p>
+            <a:pPr algn="ctr"/>
+          </a:p>
+        </p:txBody>
+      </p:sp>
+      <p:sp>
+        <p:nvSpPr>
+          <p:cNvPr id="4" name="Oval 3"/>
+          <p:cNvSpPr/>
+          <p:nvPr/>
+        </p:nvSpPr>
+        <p:spPr>
+          <a:xfrm>
+            <a:off x="-457200" y="4572000"/>
+            <a:ext cx="1371600" cy="1371600"/>
+          </a:xfrm>
+          <a:prstGeom prst="ellipse">
+            <a:avLst/>
+          </a:prstGeom>
+          <a:solidFill>
+            <a:srgbClr val="20354D"/>
+          </a:solidFill>
+          <a:ln>
+            <a:noFill/>
+          </a:ln>
+        </p:spPr>
+        <p:style>
+          <a:lnRef idx="1">
+            <a:schemeClr val="accent1"/>
+          </a:lnRef>
+          <a:fillRef idx="3">
+            <a:schemeClr val="accent1"/>
+          </a:fillRef>
+          <a:effectRef idx="2">
+            <a:schemeClr val="accent1"/>
+          </a:effectRef>
+          <a:fontRef idx="minor">
+            <a:schemeClr val="lt1"/>
+          </a:fontRef>
+        </p:style>
+        <p:txBody>
+          <a:bodyPr rtlCol="0" anchor="ctr"/>
+          <a:lstStyle/>
+          <a:p>
+            <a:pPr algn="ctr"/>
+          </a:p>
+        </p:txBody>
+      </p:sp>
+      <p:sp>
+        <p:nvSpPr>
+          <p:cNvPr id="5" name="Rectangle 4"/>
+          <p:cNvSpPr/>
+          <p:nvPr/>
+        </p:nvSpPr>
+        <p:spPr>
+          <a:xfrm>
+            <a:off x="0" y="0"/>
+            <a:ext cx="12191695" cy="54864"/>
+          </a:xfrm>
+          <a:prstGeom prst="rect">
+            <a:avLst/>
+          </a:prstGeom>
+          <a:gradFill rotWithShape="1">
+            <a:gsLst>
+              <a:gs pos="0">
+                <a:srgbClr val="29B5E8"/>
+              </a:gs>
+              <a:gs pos="100000">
+                <a:srgbClr val="71D3DC"/>
+              </a:gs>
+            </a:gsLst>
+            <a:lin scaled="0" ang="16200000"/>
+          </a:gradFill>
+          <a:ln>
+            <a:noFill/>
+          </a:ln>
+        </p:spPr>
+        <p:style>
+          <a:lnRef idx="1">
+            <a:schemeClr val="accent1"/>
+          </a:lnRef>
+          <a:fillRef idx="3">
+            <a:schemeClr val="accent1"/>
+          </a:fillRef>
+          <a:effectRef idx="2">
+            <a:schemeClr val="accent1"/>
+          </a:effectRef>
+          <a:fontRef idx="minor">
+            <a:schemeClr val="lt1"/>
+          </a:fontRef>
+        </p:style>
+        <p:txBody>
+          <a:bodyPr rtlCol="0" anchor="ctr"/>
+          <a:lstStyle/>
+          <a:p>
+            <a:pPr algn="ctr"/>
+          </a:p>
+        </p:txBody>
+      </p:sp>
+      <p:pic>
+        <p:nvPicPr>
+          <p:cNvPr id="6" name="Picture 5" descr="snowflake_icon_white.png"/>
+          <p:cNvPicPr>
+            <a:picLocks noChangeAspect="1"/>
+          </p:cNvPicPr>
+          <p:nvPr/>
+        </p:nvPicPr>
+        <p:blipFill>
+          <a:blip r:embed="rId2"/>
+          <a:stretch>
+            <a:fillRect/>
+          </a:stretch>
+        </p:blipFill>
+        <p:spPr>
+          <a:xfrm>
+            <a:off x="11368735" y="320040"/>
+            <a:ext cx="399301" cy="365760"/>
+          </a:xfrm>
+          <a:prstGeom prst="rect">
+            <a:avLst/>
+          </a:prstGeom>
+        </p:spPr>
+      </p:pic>
+      <p:sp>
+        <p:nvSpPr>
+          <p:cNvPr id="7" name="Oval 6"/>
+          <p:cNvSpPr/>
+          <p:nvPr/>
+        </p:nvSpPr>
+        <p:spPr>
+          <a:xfrm>
+            <a:off x="914400" y="1371600"/>
+            <a:ext cx="1097280" cy="1097280"/>
+          </a:xfrm>
+          <a:prstGeom prst="ellipse">
+            <a:avLst/>
+          </a:prstGeom>
+          <a:solidFill>
+            <a:srgbClr val="15283C"/>
+          </a:solidFill>
+          <a:ln>
+            <a:noFill/>
+          </a:ln>
+        </p:spPr>
+        <p:style>
+          <a:lnRef idx="1">
+            <a:schemeClr val="accent1"/>
+          </a:lnRef>
+          <a:fillRef idx="3">
+            <a:schemeClr val="accent1"/>
+          </a:fillRef>
+          <a:effectRef idx="2">
+            <a:schemeClr val="accent1"/>
+          </a:effectRef>
+          <a:fontRef idx="minor">
+            <a:schemeClr val="lt1"/>
+          </a:fontRef>
+        </p:style>
+        <p:txBody>
+          <a:bodyPr rtlCol="0" anchor="ctr"/>
+          <a:lstStyle/>
+          <a:p>
+            <a:pPr algn="ctr"/>
+          </a:p>
+        </p:txBody>
+      </p:sp>
+      <p:sp>
+        <p:nvSpPr>
+          <p:cNvPr id="8" name="TextBox 7"/>
+          <p:cNvSpPr txBox="1"/>
+          <p:nvPr/>
+        </p:nvSpPr>
+        <p:spPr>
+          <a:xfrm>
+            <a:off x="777240" y="1005840"/>
+            <a:ext cx="1371600" cy="1645920"/>
+          </a:xfrm>
+          <a:prstGeom prst="rect">
+            <a:avLst/>
+          </a:prstGeom>
+          <a:noFill/>
+        </p:spPr>
+        <p:txBody>
+          <a:bodyPr wrap="square" lIns="73152" rIns="73152" tIns="36576" bIns="36576" anchor="t">
+            <a:spAutoFit/>
+          </a:bodyPr>
+          <a:lstStyle/>
+          <a:p>
+            <a:pPr algn="l">
+              <a:lnSpc>
+                <a:spcPts val="15600"/>
+              </a:lnSpc>
+            </a:pPr>
+            <a:r>
+              <a:rPr sz="12000" b="0" i="0">
+                <a:solidFill>
+                  <a:srgbClr val="29B5E8"/>
+                </a:solidFill>
+                <a:latin typeface="Georgia"/>
+              </a:rPr>
+              <a:t>“</a:t>
+            </a:r>
+          </a:p>
+        </p:txBody>
+      </p:sp>
+      <p:sp>
+        <p:nvSpPr>
+          <p:cNvPr id="9" name="TextBox 8"/>
+          <p:cNvSpPr txBox="1"/>
+          <p:nvPr/>
+        </p:nvSpPr>
+        <p:spPr>
+          <a:xfrm>
+            <a:off x="1371600" y="2560320"/>
+            <a:ext cx="9601200" cy="2560320"/>
+          </a:xfrm>
+          <a:prstGeom prst="rect">
+            <a:avLst/>
+          </a:prstGeom>
+          <a:noFill/>
+        </p:spPr>
+        <p:txBody>
+          <a:bodyPr wrap="square" lIns="73152" rIns="73152" tIns="36576" bIns="36576" anchor="t">
+            <a:spAutoFit/>
+          </a:bodyPr>
+          <a:lstStyle/>
+          <a:p>
+            <a:pPr algn="l">
+              <a:lnSpc>
+                <a:spcPts val="3900"/>
+              </a:lnSpc>
+            </a:pPr>
+            <a:r>
+              <a:rPr sz="2600" b="0" i="1">
+                <a:solidFill>
+                  <a:srgbClr val="FFFFFF"/>
+                </a:solidFill>
+                <a:latin typeface="Georgia"/>
+              </a:rPr>
+              <a:t>1.2B rows joined with 8M in 2 minutes 16 seconds, 0.61 credits, single query, zero raw data exchange — this is the future of secure multi-party analytics.</a:t>
+            </a:r>
+          </a:p>
+        </p:txBody>
+      </p:sp>
+      <p:sp>
+        <p:nvSpPr>
+          <p:cNvPr id="10" name="Rectangle 9"/>
+          <p:cNvSpPr/>
+          <p:nvPr/>
+        </p:nvSpPr>
+        <p:spPr>
+          <a:xfrm>
+            <a:off x="1371600" y="5394960"/>
+            <a:ext cx="731520" cy="36576"/>
+          </a:xfrm>
+          <a:prstGeom prst="rect">
+            <a:avLst/>
+          </a:prstGeom>
+          <a:solidFill>
+            <a:srgbClr val="29B5E8"/>
+          </a:solidFill>
+          <a:ln>
+            <a:noFill/>
+          </a:ln>
+        </p:spPr>
+        <p:style>
+          <a:lnRef idx="1">
+            <a:schemeClr val="accent1"/>
+          </a:lnRef>
+          <a:fillRef idx="3">
+            <a:schemeClr val="accent1"/>
+          </a:fillRef>
+          <a:effectRef idx="2">
+            <a:schemeClr val="accent1"/>
+          </a:effectRef>
+          <a:fontRef idx="minor">
+            <a:schemeClr val="lt1"/>
+          </a:fontRef>
+        </p:style>
+        <p:txBody>
+          <a:bodyPr rtlCol="0" anchor="ctr"/>
+          <a:lstStyle/>
+          <a:p>
+            <a:pPr algn="ctr"/>
+          </a:p>
+        </p:txBody>
+      </p:sp>
+      <p:sp>
+        <p:nvSpPr>
+          <p:cNvPr id="11" name="TextBox 10"/>
+          <p:cNvSpPr txBox="1"/>
+          <p:nvPr/>
+        </p:nvSpPr>
+        <p:spPr>
+          <a:xfrm>
+            <a:off x="1371600" y="5577840"/>
+            <a:ext cx="7315200" cy="365760"/>
+          </a:xfrm>
+          <a:prstGeom prst="rect">
+            <a:avLst/>
+          </a:prstGeom>
+          <a:noFill/>
+        </p:spPr>
+        <p:txBody>
+          <a:bodyPr wrap="square" lIns="73152" rIns="73152" tIns="36576" bIns="36576" anchor="t">
+            <a:spAutoFit/>
+          </a:bodyPr>
+          <a:lstStyle/>
+          <a:p>
+            <a:pPr algn="l">
+              <a:lnSpc>
+                <a:spcPts val="1800"/>
+              </a:lnSpc>
+            </a:pPr>
+            <a:r>
+              <a:rPr sz="1400" b="1" i="0">
+                <a:solidFill>
+                  <a:srgbClr val="71D3DC"/>
+                </a:solidFill>
+                <a:latin typeface="Segoe UI"/>
+              </a:rPr>
+              <a:t>DCR Single-Query Benchmark</a:t>
+            </a:r>
+          </a:p>
+        </p:txBody>
+      </p:sp>
+    </p:spTree>
+  </p:cSld>
+  <p:clrMapOvr>
+    <a:masterClrMapping/>
+  </p:clrMapOvr>
+</p:sld>
+</file>
+
+<file path=ppt/slides/slide56.xml><?xml version="1.0" encoding="utf-8"?>
+<p:sld xmlns:a="http://schemas.openxmlformats.org/drawingml/2006/main" xmlns:p="http://schemas.openxmlformats.org/presentationml/2006/main" xmlns:r="http://schemas.openxmlformats.org/officeDocument/2006/relationships">
+  <p:cSld>
+    <p:bg>
+      <p:bgPr>
+        <a:solidFill>
+          <a:srgbClr val="1B2A3D"/>
+        </a:solidFill>
+        <a:effectLst/>
+      </p:bgPr>
+    </p:bg>
+    <p:spTree>
+      <p:nvGrpSpPr>
+        <p:cNvPr id="1" name=""/>
+        <p:cNvGrpSpPr/>
+        <p:nvPr/>
+      </p:nvGrpSpPr>
+      <p:grpSpPr/>
+      <p:sp>
+        <p:nvSpPr>
+          <p:cNvPr id="2" name="Oval 1"/>
+          <p:cNvSpPr/>
+          <p:nvPr/>
+        </p:nvSpPr>
+        <p:spPr>
+          <a:xfrm>
+            <a:off x="9905695" y="-731520"/>
+            <a:ext cx="2743200" cy="2743200"/>
+          </a:xfrm>
+          <a:prstGeom prst="ellipse">
+            <a:avLst/>
+          </a:prstGeom>
+          <a:solidFill>
+            <a:srgbClr val="223850"/>
+          </a:solidFill>
+          <a:ln>
+            <a:noFill/>
+          </a:ln>
+        </p:spPr>
+        <p:style>
+          <a:lnRef idx="1">
+            <a:schemeClr val="accent1"/>
+          </a:lnRef>
+          <a:fillRef idx="3">
+            <a:schemeClr val="accent1"/>
+          </a:fillRef>
+          <a:effectRef idx="2">
+            <a:schemeClr val="accent1"/>
+          </a:effectRef>
+          <a:fontRef idx="minor">
+            <a:schemeClr val="lt1"/>
+          </a:fontRef>
+        </p:style>
+        <p:txBody>
+          <a:bodyPr rtlCol="0" anchor="ctr"/>
+          <a:lstStyle/>
+          <a:p>
+            <a:pPr algn="ctr"/>
+          </a:p>
+        </p:txBody>
+      </p:sp>
+      <p:sp>
+        <p:nvSpPr>
+          <p:cNvPr id="3" name="Oval 2"/>
+          <p:cNvSpPr/>
+          <p:nvPr/>
+        </p:nvSpPr>
+        <p:spPr>
+          <a:xfrm>
+            <a:off x="8076895" y="5486400"/>
+            <a:ext cx="1828800" cy="1828800"/>
+          </a:xfrm>
+          <a:prstGeom prst="ellipse">
+            <a:avLst/>
+          </a:prstGeom>
+          <a:solidFill>
+            <a:srgbClr val="1F344C"/>
+          </a:solidFill>
+          <a:ln>
+            <a:noFill/>
+          </a:ln>
+        </p:spPr>
+        <p:style>
+          <a:lnRef idx="1">
+            <a:schemeClr val="accent1"/>
+          </a:lnRef>
+          <a:fillRef idx="3">
+            <a:schemeClr val="accent1"/>
+          </a:fillRef>
+          <a:effectRef idx="2">
+            <a:schemeClr val="accent1"/>
+          </a:effectRef>
+          <a:fontRef idx="minor">
+            <a:schemeClr val="lt1"/>
+          </a:fontRef>
+        </p:style>
+        <p:txBody>
+          <a:bodyPr rtlCol="0" anchor="ctr"/>
+          <a:lstStyle/>
+          <a:p>
+            <a:pPr algn="ctr"/>
+          </a:p>
+        </p:txBody>
+      </p:sp>
+      <p:sp>
+        <p:nvSpPr>
+          <p:cNvPr id="4" name="Oval 3"/>
+          <p:cNvSpPr/>
+          <p:nvPr/>
+        </p:nvSpPr>
+        <p:spPr>
+          <a:xfrm>
+            <a:off x="-457200" y="4572000"/>
+            <a:ext cx="1371600" cy="1371600"/>
+          </a:xfrm>
+          <a:prstGeom prst="ellipse">
+            <a:avLst/>
+          </a:prstGeom>
+          <a:solidFill>
+            <a:srgbClr val="20354D"/>
+          </a:solidFill>
+          <a:ln>
+            <a:noFill/>
+          </a:ln>
+        </p:spPr>
+        <p:style>
+          <a:lnRef idx="1">
+            <a:schemeClr val="accent1"/>
+          </a:lnRef>
+          <a:fillRef idx="3">
+            <a:schemeClr val="accent1"/>
+          </a:fillRef>
+          <a:effectRef idx="2">
+            <a:schemeClr val="accent1"/>
+          </a:effectRef>
+          <a:fontRef idx="minor">
+            <a:schemeClr val="lt1"/>
+          </a:fontRef>
+        </p:style>
+        <p:txBody>
+          <a:bodyPr rtlCol="0" anchor="ctr"/>
+          <a:lstStyle/>
+          <a:p>
+            <a:pPr algn="ctr"/>
+          </a:p>
+        </p:txBody>
+      </p:sp>
+      <p:sp>
+        <p:nvSpPr>
+          <p:cNvPr id="5" name="Rectangle 4"/>
+          <p:cNvSpPr/>
+          <p:nvPr/>
+        </p:nvSpPr>
+        <p:spPr>
+          <a:xfrm>
             <a:off x="0" y="0"/>
             <a:ext cx="12191695" cy="54864"/>
           </a:xfrm>
@@ -41637,7 +45715,7 @@
                 </a:solidFill>
                 <a:latin typeface="Segoe UI"/>
               </a:rPr>
-              <a:t>DCR Collaboration API v2 | SFSEAPAC | 2026   ·   7 / 51</a:t>
+              <a:t>DCR Collaboration API v2 | SFSEAPAC | 2026   ·   7 / 56</a:t>
             </a:r>
           </a:p>
         </p:txBody>
@@ -42749,7 +46827,7 @@
                 </a:solidFill>
                 <a:latin typeface="Segoe UI"/>
               </a:rPr>
-              <a:t>DCR Collaboration API v2 | SFSEAPAC | 2026   ·   8 / 51</a:t>
+              <a:t>DCR Collaboration API v2 | SFSEAPAC | 2026   ·   8 / 56</a:t>
             </a:r>
           </a:p>
         </p:txBody>

--- a/DCR_Collaboration_API_Presentation.pptx
+++ b/DCR_Collaboration_API_Presentation.pptx
@@ -61,6 +61,10 @@
     <p:sldId id="309" r:id="rId60"/>
     <p:sldId id="310" r:id="rId61"/>
     <p:sldId id="311" r:id="rId62"/>
+    <p:sldId id="312" r:id="rId63"/>
+    <p:sldId id="313" r:id="rId64"/>
+    <p:sldId id="314" r:id="rId65"/>
+    <p:sldId id="315" r:id="rId66"/>
   </p:sldIdLst>
   <p:sldSz cx="12191695" cy="6858000" type="screen4x3"/>
   <p:notesSz cx="6858000" cy="9144000"/>
@@ -4161,7 +4165,7 @@
                 </a:solidFill>
                 <a:latin typeface="Segoe UI"/>
               </a:rPr>
-              <a:t>DCR Collaboration API v2 | SFSEAPAC | 2026   ·   10 / 56</a:t>
+              <a:t>DCR Collaboration API v2 | SFSEAPAC | 2026   ·   10 / 60</a:t>
             </a:r>
           </a:p>
         </p:txBody>
@@ -4644,7 +4648,7 @@
                 </a:solidFill>
                 <a:latin typeface="Segoe UI"/>
               </a:rPr>
-              <a:t>DCR Collaboration API v2 | SFSEAPAC | 2026   ·   11 / 56</a:t>
+              <a:t>DCR Collaboration API v2 | SFSEAPAC | 2026   ·   11 / 60</a:t>
             </a:r>
           </a:p>
         </p:txBody>
@@ -6107,7 +6111,7 @@
                 </a:solidFill>
                 <a:latin typeface="Segoe UI"/>
               </a:rPr>
-              <a:t>DCR Collaboration API v2 | SFSEAPAC | 2026   ·   13 / 56</a:t>
+              <a:t>DCR Collaboration API v2 | SFSEAPAC | 2026   ·   13 / 60</a:t>
             </a:r>
           </a:p>
         </p:txBody>
@@ -7219,7 +7223,7 @@
                 </a:solidFill>
                 <a:latin typeface="Segoe UI"/>
               </a:rPr>
-              <a:t>DCR Collaboration API v2 | SFSEAPAC | 2026   ·   14 / 56</a:t>
+              <a:t>DCR Collaboration API v2 | SFSEAPAC | 2026   ·   14 / 60</a:t>
             </a:r>
           </a:p>
         </p:txBody>
@@ -8518,7 +8522,7 @@
                 </a:solidFill>
                 <a:latin typeface="Segoe UI"/>
               </a:rPr>
-              <a:t>DCR Collaboration API v2 | SFSEAPAC | 2026   ·   16 / 56</a:t>
+              <a:t>DCR Collaboration API v2 | SFSEAPAC | 2026   ·   16 / 60</a:t>
             </a:r>
           </a:p>
         </p:txBody>
@@ -9466,7 +9470,7 @@
                 </a:solidFill>
                 <a:latin typeface="Segoe UI"/>
               </a:rPr>
-              <a:t>DCR Collaboration API v2 | SFSEAPAC | 2026   ·   17 / 56</a:t>
+              <a:t>DCR Collaboration API v2 | SFSEAPAC | 2026   ·   17 / 60</a:t>
             </a:r>
           </a:p>
         </p:txBody>
@@ -10578,7 +10582,7 @@
                 </a:solidFill>
                 <a:latin typeface="Segoe UI"/>
               </a:rPr>
-              <a:t>DCR Collaboration API v2 | SFSEAPAC | 2026   ·   18 / 56</a:t>
+              <a:t>DCR Collaboration API v2 | SFSEAPAC | 2026   ·   18 / 60</a:t>
             </a:r>
           </a:p>
         </p:txBody>
@@ -11526,7 +11530,7 @@
                 </a:solidFill>
                 <a:latin typeface="Segoe UI"/>
               </a:rPr>
-              <a:t>DCR Collaboration API v2 | SFSEAPAC | 2026   ·   19 / 56</a:t>
+              <a:t>DCR Collaboration API v2 | SFSEAPAC | 2026   ·   19 / 60</a:t>
             </a:r>
           </a:p>
         </p:txBody>
@@ -13095,7 +13099,7 @@
                 </a:solidFill>
                 <a:latin typeface="Segoe UI"/>
               </a:rPr>
-              <a:t>DCR Collaboration API v2 | SFSEAPAC | 2026   ·   2 / 56</a:t>
+              <a:t>DCR Collaboration API v2 | SFSEAPAC | 2026   ·   2 / 60</a:t>
             </a:r>
           </a:p>
         </p:txBody>
@@ -14207,7 +14211,7 @@
                 </a:solidFill>
                 <a:latin typeface="Segoe UI"/>
               </a:rPr>
-              <a:t>DCR Collaboration API v2 | SFSEAPAC | 2026   ·   20 / 56</a:t>
+              <a:t>DCR Collaboration API v2 | SFSEAPAC | 2026   ·   20 / 60</a:t>
             </a:r>
           </a:p>
         </p:txBody>
@@ -14942,7 +14946,7 @@
                 </a:solidFill>
                 <a:latin typeface="Segoe UI"/>
               </a:rPr>
-              <a:t>DCR Collaboration API v2 | SFSEAPAC | 2026   ·   21 / 56</a:t>
+              <a:t>DCR Collaboration API v2 | SFSEAPAC | 2026   ·   21 / 60</a:t>
             </a:r>
           </a:p>
         </p:txBody>
@@ -16241,7 +16245,7 @@
                 </a:solidFill>
                 <a:latin typeface="Segoe UI"/>
               </a:rPr>
-              <a:t>DCR Collaboration API v2 | SFSEAPAC | 2026   ·   23 / 56</a:t>
+              <a:t>DCR Collaboration API v2 | SFSEAPAC | 2026   ·   23 / 60</a:t>
             </a:r>
           </a:p>
         </p:txBody>
@@ -17353,7 +17357,7 @@
                 </a:solidFill>
                 <a:latin typeface="Segoe UI"/>
               </a:rPr>
-              <a:t>DCR Collaboration API v2 | SFSEAPAC | 2026   ·   24 / 56</a:t>
+              <a:t>DCR Collaboration API v2 | SFSEAPAC | 2026   ·   24 / 60</a:t>
             </a:r>
           </a:p>
         </p:txBody>
@@ -18301,7 +18305,7 @@
                 </a:solidFill>
                 <a:latin typeface="Segoe UI"/>
               </a:rPr>
-              <a:t>DCR Collaboration API v2 | SFSEAPAC | 2026   ·   25 / 56</a:t>
+              <a:t>DCR Collaboration API v2 | SFSEAPAC | 2026   ·   25 / 60</a:t>
             </a:r>
           </a:p>
         </p:txBody>
@@ -19214,7 +19218,7 @@
                 </a:solidFill>
                 <a:latin typeface="Segoe UI"/>
               </a:rPr>
-              <a:t>DCR Collaboration API v2 | SFSEAPAC | 2026   ·   26 / 56</a:t>
+              <a:t>DCR Collaboration API v2 | SFSEAPAC | 2026   ·   26 / 60</a:t>
             </a:r>
           </a:p>
         </p:txBody>
@@ -19697,7 +19701,7 @@
                 </a:solidFill>
                 <a:latin typeface="Segoe UI"/>
               </a:rPr>
-              <a:t>DCR Collaboration API v2 | SFSEAPAC | 2026   ·   27 / 56</a:t>
+              <a:t>DCR Collaboration API v2 | SFSEAPAC | 2026   ·   27 / 60</a:t>
             </a:r>
           </a:p>
         </p:txBody>
@@ -20809,7 +20813,7 @@
                 </a:solidFill>
                 <a:latin typeface="Segoe UI"/>
               </a:rPr>
-              <a:t>DCR Collaboration API v2 | SFSEAPAC | 2026   ·   28 / 56</a:t>
+              <a:t>DCR Collaboration API v2 | SFSEAPAC | 2026   ·   28 / 60</a:t>
             </a:r>
           </a:p>
         </p:txBody>
@@ -21994,7 +21998,7 @@
                 </a:solidFill>
                 <a:latin typeface="Segoe UI"/>
               </a:rPr>
-              <a:t>DCR Collaboration API v2 | SFSEAPAC | 2026   ·   30 / 56</a:t>
+              <a:t>DCR Collaboration API v2 | SFSEAPAC | 2026   ·   30 / 60</a:t>
             </a:r>
           </a:p>
         </p:txBody>
@@ -22533,7 +22537,7 @@
                 </a:solidFill>
                 <a:latin typeface="Segoe UI"/>
               </a:rPr>
-              <a:t>DCR Collaboration API v2 | SFSEAPAC | 2026   ·   31 / 56</a:t>
+              <a:t>DCR Collaboration API v2 | SFSEAPAC | 2026   ·   31 / 60</a:t>
             </a:r>
           </a:p>
         </p:txBody>
@@ -23072,7 +23076,7 @@
                 </a:solidFill>
                 <a:latin typeface="Segoe UI"/>
               </a:rPr>
-              <a:t>DCR Collaboration API v2 | SFSEAPAC | 2026   ·   32 / 56</a:t>
+              <a:t>DCR Collaboration API v2 | SFSEAPAC | 2026   ·   32 / 60</a:t>
             </a:r>
           </a:p>
         </p:txBody>
@@ -23555,7 +23559,7 @@
                 </a:solidFill>
                 <a:latin typeface="Segoe UI"/>
               </a:rPr>
-              <a:t>DCR Collaboration API v2 | SFSEAPAC | 2026   ·   33 / 56</a:t>
+              <a:t>DCR Collaboration API v2 | SFSEAPAC | 2026   ·   33 / 60</a:t>
             </a:r>
           </a:p>
         </p:txBody>
@@ -24038,7 +24042,7 @@
                 </a:solidFill>
                 <a:latin typeface="Segoe UI"/>
               </a:rPr>
-              <a:t>DCR Collaboration API v2 | SFSEAPAC | 2026   ·   34 / 56</a:t>
+              <a:t>DCR Collaboration API v2 | SFSEAPAC | 2026   ·   34 / 60</a:t>
             </a:r>
           </a:p>
         </p:txBody>
@@ -24521,7 +24525,7 @@
                 </a:solidFill>
                 <a:latin typeface="Segoe UI"/>
               </a:rPr>
-              <a:t>DCR Collaboration API v2 | SFSEAPAC | 2026   ·   35 / 56</a:t>
+              <a:t>DCR Collaboration API v2 | SFSEAPAC | 2026   ·   35 / 60</a:t>
             </a:r>
           </a:p>
         </p:txBody>
@@ -25633,7 +25637,7 @@
                 </a:solidFill>
                 <a:latin typeface="Segoe UI"/>
               </a:rPr>
-              <a:t>DCR Collaboration API v2 | SFSEAPAC | 2026   ·   36 / 56</a:t>
+              <a:t>DCR Collaboration API v2 | SFSEAPAC | 2026   ·   36 / 60</a:t>
             </a:r>
           </a:p>
         </p:txBody>
@@ -27096,7 +27100,7 @@
                 </a:solidFill>
                 <a:latin typeface="Segoe UI"/>
               </a:rPr>
-              <a:t>DCR Collaboration API v2 | SFSEAPAC | 2026   ·   38 / 56</a:t>
+              <a:t>DCR Collaboration API v2 | SFSEAPAC | 2026   ·   38 / 60</a:t>
             </a:r>
           </a:p>
         </p:txBody>
@@ -28149,7 +28153,7 @@
                 </a:solidFill>
                 <a:latin typeface="Segoe UI"/>
               </a:rPr>
-              <a:t>DCR Collaboration API v2 | SFSEAPAC | 2026   ·   39 / 56</a:t>
+              <a:t>DCR Collaboration API v2 | SFSEAPAC | 2026   ·   39 / 60</a:t>
             </a:r>
           </a:p>
         </p:txBody>
@@ -29261,7 +29265,7 @@
                 </a:solidFill>
                 <a:latin typeface="Segoe UI"/>
               </a:rPr>
-              <a:t>DCR Collaboration API v2 | SFSEAPAC | 2026   ·   4 / 56</a:t>
+              <a:t>DCR Collaboration API v2 | SFSEAPAC | 2026   ·   4 / 60</a:t>
             </a:r>
           </a:p>
         </p:txBody>
@@ -30314,7 +30318,7 @@
                 </a:solidFill>
                 <a:latin typeface="Segoe UI"/>
               </a:rPr>
-              <a:t>DCR Collaboration API v2 | SFSEAPAC | 2026   ·   40 / 56</a:t>
+              <a:t>DCR Collaboration API v2 | SFSEAPAC | 2026   ·   40 / 60</a:t>
             </a:r>
           </a:p>
         </p:txBody>
@@ -31367,7 +31371,7 @@
                 </a:solidFill>
                 <a:latin typeface="Segoe UI"/>
               </a:rPr>
-              <a:t>DCR Collaboration API v2 | SFSEAPAC | 2026   ·   41 / 56</a:t>
+              <a:t>DCR Collaboration API v2 | SFSEAPAC | 2026   ·   41 / 60</a:t>
             </a:r>
           </a:p>
         </p:txBody>
@@ -32469,7 +32473,7 @@
                 </a:solidFill>
                 <a:latin typeface="Segoe UI"/>
               </a:rPr>
-              <a:t>DCR Collaboration API v2 | SFSEAPAC | 2026   ·   42 / 56</a:t>
+              <a:t>DCR Collaboration API v2 | SFSEAPAC | 2026   ·   42 / 60</a:t>
             </a:r>
           </a:p>
         </p:txBody>
@@ -33515,7 +33519,7 @@
                 </a:solidFill>
                 <a:latin typeface="Segoe UI"/>
               </a:rPr>
-              <a:t>DCR Collaboration API v2 | SFSEAPAC | 2026   ·   43 / 56</a:t>
+              <a:t>DCR Collaboration API v2 | SFSEAPAC | 2026   ·   43 / 60</a:t>
             </a:r>
           </a:p>
         </p:txBody>
@@ -34627,7 +34631,7 @@
                 </a:solidFill>
                 <a:latin typeface="Segoe UI"/>
               </a:rPr>
-              <a:t>DCR Collaboration API v2 | SFSEAPAC | 2026   ·   44 / 56</a:t>
+              <a:t>DCR Collaboration API v2 | SFSEAPAC | 2026   ·   44 / 60</a:t>
             </a:r>
           </a:p>
         </p:txBody>
@@ -35739,7 +35743,7 @@
                 </a:solidFill>
                 <a:latin typeface="Segoe UI"/>
               </a:rPr>
-              <a:t>DCR Collaboration API v2 | SFSEAPAC | 2026   ·   45 / 56</a:t>
+              <a:t>DCR Collaboration API v2 | SFSEAPAC | 2026   ·   45 / 60</a:t>
             </a:r>
           </a:p>
         </p:txBody>
@@ -37143,7 +37147,7 @@
                 </a:solidFill>
                 <a:latin typeface="Segoe UI"/>
               </a:rPr>
-              <a:t>DCR Collaboration API v2 | SFSEAPAC | 2026   ·   47 / 56</a:t>
+              <a:t>DCR Collaboration API v2 | SFSEAPAC | 2026   ·   47 / 60</a:t>
             </a:r>
           </a:p>
         </p:txBody>
@@ -38189,7 +38193,7 @@
                 </a:solidFill>
                 <a:latin typeface="Segoe UI"/>
               </a:rPr>
-              <a:t>DCR Collaboration API v2 | SFSEAPAC | 2026   ·   48 / 56</a:t>
+              <a:t>DCR Collaboration API v2 | SFSEAPAC | 2026   ·   48 / 60</a:t>
             </a:r>
           </a:p>
         </p:txBody>
@@ -38407,7 +38411,7 @@
                 </a:solidFill>
                 <a:latin typeface="Calibri Light"/>
               </a:rPr>
-              <a:t>Master Benchmark Matrix — Semua Konfigurasi</a:t>
+              <a:t>Master Benchmark Matrix — Semua Konfigurasi (XL only)</a:t>
             </a:r>
           </a:p>
         </p:txBody>
@@ -38700,7 +38704,7 @@
                 </a:solidFill>
                 <a:latin typeface="Segoe UI"/>
               </a:rPr>
-              <a:t>DCR Collaboration API v2 | SFSEAPAC | 2026   ·   49 / 56</a:t>
+              <a:t>DCR Collaboration API v2 | SFSEAPAC | 2026   ·   49 / 60</a:t>
             </a:r>
           </a:p>
         </p:txBody>
@@ -39351,7 +39355,7 @@
                 </a:solidFill>
                 <a:latin typeface="Segoe UI"/>
               </a:rPr>
-              <a:t>DCR Collaboration API v2 | SFSEAPAC | 2026   ·   5 / 56</a:t>
+              <a:t>DCR Collaboration API v2 | SFSEAPAC | 2026   ·   5 / 60</a:t>
             </a:r>
           </a:p>
         </p:txBody>
@@ -40463,7 +40467,7 @@
                 </a:solidFill>
                 <a:latin typeface="Segoe UI"/>
               </a:rPr>
-              <a:t>DCR Collaboration API v2 | SFSEAPAC | 2026   ·   50 / 56</a:t>
+              <a:t>DCR Collaboration API v2 | SFSEAPAC | 2026   ·   50 / 60</a:t>
             </a:r>
           </a:p>
         </p:txBody>
@@ -40482,7 +40486,7 @@
     <p:bg>
       <p:bgPr>
         <a:solidFill>
-          <a:srgbClr val="1B2A3D"/>
+          <a:srgbClr val="FFFFFF"/>
         </a:solidFill>
         <a:effectLst/>
       </p:bgPr>
@@ -40502,14 +40506,14 @@
         </p:nvSpPr>
         <p:spPr>
           <a:xfrm>
-            <a:off x="9905695" y="-731520"/>
-            <a:ext cx="2743200" cy="2743200"/>
+            <a:off x="9631375" y="-914400"/>
+            <a:ext cx="3200400" cy="3200400"/>
           </a:xfrm>
           <a:prstGeom prst="ellipse">
             <a:avLst/>
           </a:prstGeom>
           <a:solidFill>
-            <a:srgbClr val="223850"/>
+            <a:srgbClr val="D6EFF8"/>
           </a:solidFill>
           <a:ln>
             <a:noFill/>
@@ -40545,14 +40549,14 @@
         </p:nvSpPr>
         <p:spPr>
           <a:xfrm>
-            <a:off x="8076895" y="5486400"/>
+            <a:off x="-640080" y="5029200"/>
             <a:ext cx="1828800" cy="1828800"/>
           </a:xfrm>
           <a:prstGeom prst="ellipse">
             <a:avLst/>
           </a:prstGeom>
           <a:solidFill>
-            <a:srgbClr val="1F344C"/>
+            <a:srgbClr val="E8F4FD"/>
           </a:solidFill>
           <a:ln>
             <a:noFill/>
@@ -40580,103 +40584,9 @@
           </a:p>
         </p:txBody>
       </p:sp>
-      <p:sp>
-        <p:nvSpPr>
-          <p:cNvPr id="4" name="Oval 3"/>
-          <p:cNvSpPr/>
-          <p:nvPr/>
-        </p:nvSpPr>
-        <p:spPr>
-          <a:xfrm>
-            <a:off x="-457200" y="4572000"/>
-            <a:ext cx="1371600" cy="1371600"/>
-          </a:xfrm>
-          <a:prstGeom prst="ellipse">
-            <a:avLst/>
-          </a:prstGeom>
-          <a:solidFill>
-            <a:srgbClr val="20354D"/>
-          </a:solidFill>
-          <a:ln>
-            <a:noFill/>
-          </a:ln>
-        </p:spPr>
-        <p:style>
-          <a:lnRef idx="1">
-            <a:schemeClr val="accent1"/>
-          </a:lnRef>
-          <a:fillRef idx="3">
-            <a:schemeClr val="accent1"/>
-          </a:fillRef>
-          <a:effectRef idx="2">
-            <a:schemeClr val="accent1"/>
-          </a:effectRef>
-          <a:fontRef idx="minor">
-            <a:schemeClr val="lt1"/>
-          </a:fontRef>
-        </p:style>
-        <p:txBody>
-          <a:bodyPr rtlCol="0" anchor="ctr"/>
-          <a:lstStyle/>
-          <a:p>
-            <a:pPr algn="ctr"/>
-          </a:p>
-        </p:txBody>
-      </p:sp>
-      <p:sp>
-        <p:nvSpPr>
-          <p:cNvPr id="5" name="Rectangle 4"/>
-          <p:cNvSpPr/>
-          <p:nvPr/>
-        </p:nvSpPr>
-        <p:spPr>
-          <a:xfrm>
-            <a:off x="0" y="6793992"/>
-            <a:ext cx="12191695" cy="64008"/>
-          </a:xfrm>
-          <a:prstGeom prst="rect">
-            <a:avLst/>
-          </a:prstGeom>
-          <a:gradFill rotWithShape="1">
-            <a:gsLst>
-              <a:gs pos="0">
-                <a:srgbClr val="29B5E8"/>
-              </a:gs>
-              <a:gs pos="100000">
-                <a:srgbClr val="71D3DC"/>
-              </a:gs>
-            </a:gsLst>
-            <a:lin scaled="0" ang="16200000"/>
-          </a:gradFill>
-          <a:ln>
-            <a:noFill/>
-          </a:ln>
-        </p:spPr>
-        <p:style>
-          <a:lnRef idx="1">
-            <a:schemeClr val="accent1"/>
-          </a:lnRef>
-          <a:fillRef idx="3">
-            <a:schemeClr val="accent1"/>
-          </a:fillRef>
-          <a:effectRef idx="2">
-            <a:schemeClr val="accent1"/>
-          </a:effectRef>
-          <a:fontRef idx="minor">
-            <a:schemeClr val="lt1"/>
-          </a:fontRef>
-        </p:style>
-        <p:txBody>
-          <a:bodyPr rtlCol="0" anchor="ctr"/>
-          <a:lstStyle/>
-          <a:p>
-            <a:pPr algn="ctr"/>
-          </a:p>
-        </p:txBody>
-      </p:sp>
       <p:pic>
         <p:nvPicPr>
-          <p:cNvPr id="6" name="Picture 5" descr="snowflake_icon_white.png"/>
+          <p:cNvPr id="4" name="Picture 3" descr="snowflake_icon_blue.png"/>
           <p:cNvPicPr>
             <a:picLocks noChangeAspect="1"/>
           </p:cNvPicPr>
@@ -40690,8 +40600,8 @@
         </p:blipFill>
         <p:spPr>
           <a:xfrm>
-            <a:off x="11323015" y="320040"/>
-            <a:ext cx="449214" cy="411480"/>
+            <a:off x="11414455" y="320040"/>
+            <a:ext cx="349389" cy="320040"/>
           </a:xfrm>
           <a:prstGeom prst="rect">
             <a:avLst/>
@@ -40700,16 +40610,16 @@
       </p:pic>
       <p:sp>
         <p:nvSpPr>
-          <p:cNvPr id="7" name="Oval 6"/>
+          <p:cNvPr id="5" name="Rectangle 4"/>
           <p:cNvSpPr/>
           <p:nvPr/>
         </p:nvSpPr>
         <p:spPr>
           <a:xfrm>
-            <a:off x="822960" y="2103120"/>
-            <a:ext cx="457200" cy="457200"/>
-          </a:xfrm>
-          <a:prstGeom prst="ellipse">
+            <a:off x="548640" y="457200"/>
+            <a:ext cx="54864" cy="502920"/>
+          </a:xfrm>
+          <a:prstGeom prst="rect">
             <a:avLst/>
           </a:prstGeom>
           <a:solidFill>
@@ -40743,14 +40653,139 @@
       </p:sp>
       <p:sp>
         <p:nvSpPr>
-          <p:cNvPr id="8" name="TextBox 7"/>
+          <p:cNvPr id="6" name="TextBox 5"/>
           <p:cNvSpPr txBox="1"/>
           <p:nvPr/>
         </p:nvSpPr>
         <p:spPr>
           <a:xfrm>
-            <a:off x="822960" y="2103120"/>
-            <a:ext cx="457200" cy="457200"/>
+            <a:off x="777240" y="411480"/>
+            <a:ext cx="10058400" cy="640080"/>
+          </a:xfrm>
+          <a:prstGeom prst="rect">
+            <a:avLst/>
+          </a:prstGeom>
+          <a:noFill/>
+        </p:spPr>
+        <p:txBody>
+          <a:bodyPr wrap="square" lIns="73152" rIns="73152" tIns="36576" bIns="36576" anchor="t">
+            <a:spAutoFit/>
+          </a:bodyPr>
+          <a:lstStyle/>
+          <a:p>
+            <a:pPr algn="l">
+              <a:lnSpc>
+                <a:spcPts val="3900"/>
+              </a:lnSpc>
+            </a:pPr>
+            <a:r>
+              <a:rPr sz="3000" b="1" i="0">
+                <a:solidFill>
+                  <a:srgbClr val="1B2A3D"/>
+                </a:solidFill>
+                <a:latin typeface="Calibri Light"/>
+              </a:rPr>
+              <a:t>1-Partition Analysis + Activation 1007 cols (GEN2_2XLARGE)</a:t>
+            </a:r>
+          </a:p>
+        </p:txBody>
+      </p:sp>
+      <p:sp>
+        <p:nvSpPr>
+          <p:cNvPr id="7" name="Rounded Rectangle 6"/>
+          <p:cNvSpPr/>
+          <p:nvPr/>
+        </p:nvSpPr>
+        <p:spPr>
+          <a:xfrm>
+            <a:off x="640080" y="1554480"/>
+            <a:ext cx="2522143" cy="4572000"/>
+          </a:xfrm>
+          <a:prstGeom prst="roundRect">
+            <a:avLst/>
+          </a:prstGeom>
+          <a:solidFill>
+            <a:srgbClr val="EEF5FA"/>
+          </a:solidFill>
+          <a:ln>
+            <a:noFill/>
+          </a:ln>
+        </p:spPr>
+        <p:style>
+          <a:lnRef idx="1">
+            <a:schemeClr val="accent1"/>
+          </a:lnRef>
+          <a:fillRef idx="3">
+            <a:schemeClr val="accent1"/>
+          </a:fillRef>
+          <a:effectRef idx="2">
+            <a:schemeClr val="accent1"/>
+          </a:effectRef>
+          <a:fontRef idx="minor">
+            <a:schemeClr val="lt1"/>
+          </a:fontRef>
+        </p:style>
+        <p:txBody>
+          <a:bodyPr rtlCol="0" anchor="ctr"/>
+          <a:lstStyle/>
+          <a:p>
+            <a:pPr algn="ctr"/>
+          </a:p>
+        </p:txBody>
+      </p:sp>
+      <p:sp>
+        <p:nvSpPr>
+          <p:cNvPr id="8" name="Rectangle 7"/>
+          <p:cNvSpPr/>
+          <p:nvPr/>
+        </p:nvSpPr>
+        <p:spPr>
+          <a:xfrm>
+            <a:off x="640080" y="1554480"/>
+            <a:ext cx="2522143" cy="54864"/>
+          </a:xfrm>
+          <a:prstGeom prst="rect">
+            <a:avLst/>
+          </a:prstGeom>
+          <a:solidFill>
+            <a:srgbClr val="29B5E8"/>
+          </a:solidFill>
+          <a:ln>
+            <a:noFill/>
+          </a:ln>
+        </p:spPr>
+        <p:style>
+          <a:lnRef idx="1">
+            <a:schemeClr val="accent1"/>
+          </a:lnRef>
+          <a:fillRef idx="3">
+            <a:schemeClr val="accent1"/>
+          </a:fillRef>
+          <a:effectRef idx="2">
+            <a:schemeClr val="accent1"/>
+          </a:effectRef>
+          <a:fontRef idx="minor">
+            <a:schemeClr val="lt1"/>
+          </a:fontRef>
+        </p:style>
+        <p:txBody>
+          <a:bodyPr rtlCol="0" anchor="ctr"/>
+          <a:lstStyle/>
+          <a:p>
+            <a:pPr algn="ctr"/>
+          </a:p>
+        </p:txBody>
+      </p:sp>
+      <p:sp>
+        <p:nvSpPr>
+          <p:cNvPr id="9" name="TextBox 8"/>
+          <p:cNvSpPr txBox="1"/>
+          <p:nvPr/>
+        </p:nvSpPr>
+        <p:spPr>
+          <a:xfrm>
+            <a:off x="822960" y="2286000"/>
+            <a:ext cx="2156383" cy="1645920"/>
           </a:xfrm>
           <a:prstGeom prst="rect">
             <a:avLst/>
@@ -40765,31 +40800,66 @@
           <a:p>
             <a:pPr algn="ctr">
               <a:lnSpc>
-                <a:spcPts val="2300"/>
-              </a:lnSpc>
-            </a:pPr>
-            <a:r>
-              <a:rPr sz="1800" b="0" i="0">
-                <a:solidFill>
-                  <a:srgbClr val="FFFFFF"/>
-                </a:solidFill>
-                <a:latin typeface="Segoe UI"/>
-              </a:rPr>
-              <a:t>✦</a:t>
-            </a:r>
-          </a:p>
-        </p:txBody>
-      </p:sp>
-      <p:sp>
-        <p:nvSpPr>
-          <p:cNvPr id="9" name="TextBox 8"/>
+                <a:spcPts val="6200"/>
+              </a:lnSpc>
+            </a:pPr>
+            <a:r>
+              <a:rPr sz="4800" b="1" i="0">
+                <a:solidFill>
+                  <a:srgbClr val="29B5E8"/>
+                </a:solidFill>
+                <a:latin typeface="Calibri Light"/>
+              </a:rPr>
+              <a:t>28s</a:t>
+            </a:r>
+          </a:p>
+        </p:txBody>
+      </p:sp>
+      <p:cxnSp>
+        <p:nvCxnSpPr>
+          <p:cNvPr id="10" name="Connector 9"/>
+          <p:cNvCxnSpPr/>
+          <p:nvPr/>
+        </p:nvCxnSpPr>
+        <p:spPr>
+          <a:xfrm>
+            <a:off x="1005840" y="4114800"/>
+            <a:ext cx="1790623" cy="0"/>
+          </a:xfrm>
+          <a:prstGeom prst="line">
+            <a:avLst/>
+          </a:prstGeom>
+          <a:ln w="12700">
+            <a:solidFill>
+              <a:srgbClr val="DEE3EA"/>
+            </a:solidFill>
+          </a:ln>
+        </p:spPr>
+        <p:style>
+          <a:lnRef idx="2">
+            <a:schemeClr val="accent1"/>
+          </a:lnRef>
+          <a:fillRef idx="0">
+            <a:schemeClr val="accent1"/>
+          </a:fillRef>
+          <a:effectRef idx="1">
+            <a:schemeClr val="accent1"/>
+          </a:effectRef>
+          <a:fontRef idx="minor">
+            <a:schemeClr val="tx1"/>
+          </a:fontRef>
+        </p:style>
+      </p:cxnSp>
+      <p:sp>
+        <p:nvSpPr>
+          <p:cNvPr id="11" name="TextBox 10"/>
           <p:cNvSpPr txBox="1"/>
           <p:nvPr/>
         </p:nvSpPr>
         <p:spPr>
           <a:xfrm>
-            <a:off x="1554480" y="2011680"/>
-            <a:ext cx="9144000" cy="2286000"/>
+            <a:off x="822960" y="4297680"/>
+            <a:ext cx="2156383" cy="1645920"/>
           </a:xfrm>
           <a:prstGeom prst="rect">
             <a:avLst/>
@@ -40802,19 +40872,655 @@
           </a:bodyPr>
           <a:lstStyle/>
           <a:p>
+            <a:pPr algn="ctr">
+              <a:lnSpc>
+                <a:spcPts val="2100"/>
+              </a:lnSpc>
+            </a:pPr>
+            <a:r>
+              <a:rPr sz="1500" b="0" i="0">
+                <a:solidFill>
+                  <a:srgbClr val="5D6D7E"/>
+                </a:solidFill>
+                <a:latin typeface="Segoe UI"/>
+              </a:rPr>
+              <a:t>Analysis (150M × 1M overlap count) — 0.25 credits</a:t>
+            </a:r>
+          </a:p>
+        </p:txBody>
+      </p:sp>
+      <p:sp>
+        <p:nvSpPr>
+          <p:cNvPr id="12" name="Rounded Rectangle 11"/>
+          <p:cNvSpPr/>
+          <p:nvPr/>
+        </p:nvSpPr>
+        <p:spPr>
+          <a:xfrm>
+            <a:off x="3436543" y="1554480"/>
+            <a:ext cx="2522143" cy="4572000"/>
+          </a:xfrm>
+          <a:prstGeom prst="roundRect">
+            <a:avLst/>
+          </a:prstGeom>
+          <a:solidFill>
+            <a:srgbClr val="EEF5FA"/>
+          </a:solidFill>
+          <a:ln>
+            <a:noFill/>
+          </a:ln>
+        </p:spPr>
+        <p:style>
+          <a:lnRef idx="1">
+            <a:schemeClr val="accent1"/>
+          </a:lnRef>
+          <a:fillRef idx="3">
+            <a:schemeClr val="accent1"/>
+          </a:fillRef>
+          <a:effectRef idx="2">
+            <a:schemeClr val="accent1"/>
+          </a:effectRef>
+          <a:fontRef idx="minor">
+            <a:schemeClr val="lt1"/>
+          </a:fontRef>
+        </p:style>
+        <p:txBody>
+          <a:bodyPr rtlCol="0" anchor="ctr"/>
+          <a:lstStyle/>
+          <a:p>
+            <a:pPr algn="ctr"/>
+          </a:p>
+        </p:txBody>
+      </p:sp>
+      <p:sp>
+        <p:nvSpPr>
+          <p:cNvPr id="13" name="Rectangle 12"/>
+          <p:cNvSpPr/>
+          <p:nvPr/>
+        </p:nvSpPr>
+        <p:spPr>
+          <a:xfrm>
+            <a:off x="3436543" y="1554480"/>
+            <a:ext cx="2522143" cy="54864"/>
+          </a:xfrm>
+          <a:prstGeom prst="rect">
+            <a:avLst/>
+          </a:prstGeom>
+          <a:solidFill>
+            <a:srgbClr val="11567F"/>
+          </a:solidFill>
+          <a:ln>
+            <a:noFill/>
+          </a:ln>
+        </p:spPr>
+        <p:style>
+          <a:lnRef idx="1">
+            <a:schemeClr val="accent1"/>
+          </a:lnRef>
+          <a:fillRef idx="3">
+            <a:schemeClr val="accent1"/>
+          </a:fillRef>
+          <a:effectRef idx="2">
+            <a:schemeClr val="accent1"/>
+          </a:effectRef>
+          <a:fontRef idx="minor">
+            <a:schemeClr val="lt1"/>
+          </a:fontRef>
+        </p:style>
+        <p:txBody>
+          <a:bodyPr rtlCol="0" anchor="ctr"/>
+          <a:lstStyle/>
+          <a:p>
+            <a:pPr algn="ctr"/>
+          </a:p>
+        </p:txBody>
+      </p:sp>
+      <p:sp>
+        <p:nvSpPr>
+          <p:cNvPr id="14" name="TextBox 13"/>
+          <p:cNvSpPr txBox="1"/>
+          <p:nvPr/>
+        </p:nvSpPr>
+        <p:spPr>
+          <a:xfrm>
+            <a:off x="3619423" y="2286000"/>
+            <a:ext cx="2156383" cy="1645920"/>
+          </a:xfrm>
+          <a:prstGeom prst="rect">
+            <a:avLst/>
+          </a:prstGeom>
+          <a:noFill/>
+        </p:spPr>
+        <p:txBody>
+          <a:bodyPr wrap="square" lIns="73152" rIns="73152" tIns="36576" bIns="36576" anchor="ctr">
+            <a:spAutoFit/>
+          </a:bodyPr>
+          <a:lstStyle/>
+          <a:p>
+            <a:pPr algn="ctr">
+              <a:lnSpc>
+                <a:spcPts val="6200"/>
+              </a:lnSpc>
+            </a:pPr>
+            <a:r>
+              <a:rPr sz="4800" b="1" i="0">
+                <a:solidFill>
+                  <a:srgbClr val="11567F"/>
+                </a:solidFill>
+                <a:latin typeface="Calibri Light"/>
+              </a:rPr>
+              <a:t>38m</a:t>
+            </a:r>
+          </a:p>
+        </p:txBody>
+      </p:sp>
+      <p:cxnSp>
+        <p:nvCxnSpPr>
+          <p:cNvPr id="15" name="Connector 14"/>
+          <p:cNvCxnSpPr/>
+          <p:nvPr/>
+        </p:nvCxnSpPr>
+        <p:spPr>
+          <a:xfrm>
+            <a:off x="3802303" y="4114800"/>
+            <a:ext cx="1790623" cy="0"/>
+          </a:xfrm>
+          <a:prstGeom prst="line">
+            <a:avLst/>
+          </a:prstGeom>
+          <a:ln w="12700">
+            <a:solidFill>
+              <a:srgbClr val="DEE3EA"/>
+            </a:solidFill>
+          </a:ln>
+        </p:spPr>
+        <p:style>
+          <a:lnRef idx="2">
+            <a:schemeClr val="accent1"/>
+          </a:lnRef>
+          <a:fillRef idx="0">
+            <a:schemeClr val="accent1"/>
+          </a:fillRef>
+          <a:effectRef idx="1">
+            <a:schemeClr val="accent1"/>
+          </a:effectRef>
+          <a:fontRef idx="minor">
+            <a:schemeClr val="tx1"/>
+          </a:fontRef>
+        </p:style>
+      </p:cxnSp>
+      <p:sp>
+        <p:nvSpPr>
+          <p:cNvPr id="16" name="TextBox 15"/>
+          <p:cNvSpPr txBox="1"/>
+          <p:nvPr/>
+        </p:nvSpPr>
+        <p:spPr>
+          <a:xfrm>
+            <a:off x="3619423" y="4297680"/>
+            <a:ext cx="2156383" cy="1645920"/>
+          </a:xfrm>
+          <a:prstGeom prst="rect">
+            <a:avLst/>
+          </a:prstGeom>
+          <a:noFill/>
+        </p:spPr>
+        <p:txBody>
+          <a:bodyPr wrap="square" lIns="73152" rIns="73152" tIns="36576" bIns="36576" anchor="t">
+            <a:spAutoFit/>
+          </a:bodyPr>
+          <a:lstStyle/>
+          <a:p>
+            <a:pPr algn="ctr">
+              <a:lnSpc>
+                <a:spcPts val="2100"/>
+              </a:lnSpc>
+            </a:pPr>
+            <a:r>
+              <a:rPr sz="1500" b="0" i="0">
+                <a:solidFill>
+                  <a:srgbClr val="5D6D7E"/>
+                </a:solidFill>
+                <a:latin typeface="Segoe UI"/>
+              </a:rPr>
+              <a:t>Activation 1007 cols (700k rows × 1007 keys) — 20.10 credits</a:t>
+            </a:r>
+          </a:p>
+        </p:txBody>
+      </p:sp>
+      <p:sp>
+        <p:nvSpPr>
+          <p:cNvPr id="17" name="Rounded Rectangle 16"/>
+          <p:cNvSpPr/>
+          <p:nvPr/>
+        </p:nvSpPr>
+        <p:spPr>
+          <a:xfrm>
+            <a:off x="6233006" y="1554480"/>
+            <a:ext cx="2522143" cy="4572000"/>
+          </a:xfrm>
+          <a:prstGeom prst="roundRect">
+            <a:avLst/>
+          </a:prstGeom>
+          <a:solidFill>
+            <a:srgbClr val="EEF5FA"/>
+          </a:solidFill>
+          <a:ln>
+            <a:noFill/>
+          </a:ln>
+        </p:spPr>
+        <p:style>
+          <a:lnRef idx="1">
+            <a:schemeClr val="accent1"/>
+          </a:lnRef>
+          <a:fillRef idx="3">
+            <a:schemeClr val="accent1"/>
+          </a:fillRef>
+          <a:effectRef idx="2">
+            <a:schemeClr val="accent1"/>
+          </a:effectRef>
+          <a:fontRef idx="minor">
+            <a:schemeClr val="lt1"/>
+          </a:fontRef>
+        </p:style>
+        <p:txBody>
+          <a:bodyPr rtlCol="0" anchor="ctr"/>
+          <a:lstStyle/>
+          <a:p>
+            <a:pPr algn="ctr"/>
+          </a:p>
+        </p:txBody>
+      </p:sp>
+      <p:sp>
+        <p:nvSpPr>
+          <p:cNvPr id="18" name="Rectangle 17"/>
+          <p:cNvSpPr/>
+          <p:nvPr/>
+        </p:nvSpPr>
+        <p:spPr>
+          <a:xfrm>
+            <a:off x="6233006" y="1554480"/>
+            <a:ext cx="2522143" cy="54864"/>
+          </a:xfrm>
+          <a:prstGeom prst="rect">
+            <a:avLst/>
+          </a:prstGeom>
+          <a:solidFill>
+            <a:srgbClr val="71D3DC"/>
+          </a:solidFill>
+          <a:ln>
+            <a:noFill/>
+          </a:ln>
+        </p:spPr>
+        <p:style>
+          <a:lnRef idx="1">
+            <a:schemeClr val="accent1"/>
+          </a:lnRef>
+          <a:fillRef idx="3">
+            <a:schemeClr val="accent1"/>
+          </a:fillRef>
+          <a:effectRef idx="2">
+            <a:schemeClr val="accent1"/>
+          </a:effectRef>
+          <a:fontRef idx="minor">
+            <a:schemeClr val="lt1"/>
+          </a:fontRef>
+        </p:style>
+        <p:txBody>
+          <a:bodyPr rtlCol="0" anchor="ctr"/>
+          <a:lstStyle/>
+          <a:p>
+            <a:pPr algn="ctr"/>
+          </a:p>
+        </p:txBody>
+      </p:sp>
+      <p:sp>
+        <p:nvSpPr>
+          <p:cNvPr id="19" name="TextBox 18"/>
+          <p:cNvSpPr txBox="1"/>
+          <p:nvPr/>
+        </p:nvSpPr>
+        <p:spPr>
+          <a:xfrm>
+            <a:off x="6415886" y="2286000"/>
+            <a:ext cx="2156383" cy="1645920"/>
+          </a:xfrm>
+          <a:prstGeom prst="rect">
+            <a:avLst/>
+          </a:prstGeom>
+          <a:noFill/>
+        </p:spPr>
+        <p:txBody>
+          <a:bodyPr wrap="square" lIns="73152" rIns="73152" tIns="36576" bIns="36576" anchor="ctr">
+            <a:spAutoFit/>
+          </a:bodyPr>
+          <a:lstStyle/>
+          <a:p>
+            <a:pPr algn="ctr">
+              <a:lnSpc>
+                <a:spcPts val="6200"/>
+              </a:lnSpc>
+            </a:pPr>
+            <a:r>
+              <a:rPr sz="4800" b="1" i="0">
+                <a:solidFill>
+                  <a:srgbClr val="71D3DC"/>
+                </a:solidFill>
+                <a:latin typeface="Calibri Light"/>
+              </a:rPr>
+              <a:t>38m</a:t>
+            </a:r>
+          </a:p>
+        </p:txBody>
+      </p:sp>
+      <p:cxnSp>
+        <p:nvCxnSpPr>
+          <p:cNvPr id="20" name="Connector 19"/>
+          <p:cNvCxnSpPr/>
+          <p:nvPr/>
+        </p:nvCxnSpPr>
+        <p:spPr>
+          <a:xfrm>
+            <a:off x="6598766" y="4114800"/>
+            <a:ext cx="1790623" cy="0"/>
+          </a:xfrm>
+          <a:prstGeom prst="line">
+            <a:avLst/>
+          </a:prstGeom>
+          <a:ln w="12700">
+            <a:solidFill>
+              <a:srgbClr val="DEE3EA"/>
+            </a:solidFill>
+          </a:ln>
+        </p:spPr>
+        <p:style>
+          <a:lnRef idx="2">
+            <a:schemeClr val="accent1"/>
+          </a:lnRef>
+          <a:fillRef idx="0">
+            <a:schemeClr val="accent1"/>
+          </a:fillRef>
+          <a:effectRef idx="1">
+            <a:schemeClr val="accent1"/>
+          </a:effectRef>
+          <a:fontRef idx="minor">
+            <a:schemeClr val="tx1"/>
+          </a:fontRef>
+        </p:style>
+      </p:cxnSp>
+      <p:sp>
+        <p:nvSpPr>
+          <p:cNvPr id="21" name="TextBox 20"/>
+          <p:cNvSpPr txBox="1"/>
+          <p:nvPr/>
+        </p:nvSpPr>
+        <p:spPr>
+          <a:xfrm>
+            <a:off x="6415886" y="4297680"/>
+            <a:ext cx="2156383" cy="1645920"/>
+          </a:xfrm>
+          <a:prstGeom prst="rect">
+            <a:avLst/>
+          </a:prstGeom>
+          <a:noFill/>
+        </p:spPr>
+        <p:txBody>
+          <a:bodyPr wrap="square" lIns="73152" rIns="73152" tIns="36576" bIns="36576" anchor="t">
+            <a:spAutoFit/>
+          </a:bodyPr>
+          <a:lstStyle/>
+          <a:p>
+            <a:pPr algn="ctr">
+              <a:lnSpc>
+                <a:spcPts val="2100"/>
+              </a:lnSpc>
+            </a:pPr>
+            <a:r>
+              <a:rPr sz="1500" b="0" i="0">
+                <a:solidFill>
+                  <a:srgbClr val="5D6D7E"/>
+                </a:solidFill>
+                <a:latin typeface="Segoe UI"/>
+              </a:rPr>
+              <a:t>9s Total end-to-end — 20.35 credits ($79.4)</a:t>
+            </a:r>
+          </a:p>
+        </p:txBody>
+      </p:sp>
+      <p:sp>
+        <p:nvSpPr>
+          <p:cNvPr id="22" name="Rounded Rectangle 21"/>
+          <p:cNvSpPr/>
+          <p:nvPr/>
+        </p:nvSpPr>
+        <p:spPr>
+          <a:xfrm>
+            <a:off x="9029469" y="1554480"/>
+            <a:ext cx="2522143" cy="4572000"/>
+          </a:xfrm>
+          <a:prstGeom prst="roundRect">
+            <a:avLst/>
+          </a:prstGeom>
+          <a:solidFill>
+            <a:srgbClr val="EEF5FA"/>
+          </a:solidFill>
+          <a:ln>
+            <a:noFill/>
+          </a:ln>
+        </p:spPr>
+        <p:style>
+          <a:lnRef idx="1">
+            <a:schemeClr val="accent1"/>
+          </a:lnRef>
+          <a:fillRef idx="3">
+            <a:schemeClr val="accent1"/>
+          </a:fillRef>
+          <a:effectRef idx="2">
+            <a:schemeClr val="accent1"/>
+          </a:effectRef>
+          <a:fontRef idx="minor">
+            <a:schemeClr val="lt1"/>
+          </a:fontRef>
+        </p:style>
+        <p:txBody>
+          <a:bodyPr rtlCol="0" anchor="ctr"/>
+          <a:lstStyle/>
+          <a:p>
+            <a:pPr algn="ctr"/>
+          </a:p>
+        </p:txBody>
+      </p:sp>
+      <p:sp>
+        <p:nvSpPr>
+          <p:cNvPr id="23" name="Rectangle 22"/>
+          <p:cNvSpPr/>
+          <p:nvPr/>
+        </p:nvSpPr>
+        <p:spPr>
+          <a:xfrm>
+            <a:off x="9029469" y="1554480"/>
+            <a:ext cx="2522143" cy="54864"/>
+          </a:xfrm>
+          <a:prstGeom prst="rect">
+            <a:avLst/>
+          </a:prstGeom>
+          <a:solidFill>
+            <a:srgbClr val="FF9F36"/>
+          </a:solidFill>
+          <a:ln>
+            <a:noFill/>
+          </a:ln>
+        </p:spPr>
+        <p:style>
+          <a:lnRef idx="1">
+            <a:schemeClr val="accent1"/>
+          </a:lnRef>
+          <a:fillRef idx="3">
+            <a:schemeClr val="accent1"/>
+          </a:fillRef>
+          <a:effectRef idx="2">
+            <a:schemeClr val="accent1"/>
+          </a:effectRef>
+          <a:fontRef idx="minor">
+            <a:schemeClr val="lt1"/>
+          </a:fontRef>
+        </p:style>
+        <p:txBody>
+          <a:bodyPr rtlCol="0" anchor="ctr"/>
+          <a:lstStyle/>
+          <a:p>
+            <a:pPr algn="ctr"/>
+          </a:p>
+        </p:txBody>
+      </p:sp>
+      <p:sp>
+        <p:nvSpPr>
+          <p:cNvPr id="24" name="TextBox 23"/>
+          <p:cNvSpPr txBox="1"/>
+          <p:nvPr/>
+        </p:nvSpPr>
+        <p:spPr>
+          <a:xfrm>
+            <a:off x="9212349" y="2286000"/>
+            <a:ext cx="2156383" cy="1645920"/>
+          </a:xfrm>
+          <a:prstGeom prst="rect">
+            <a:avLst/>
+          </a:prstGeom>
+          <a:noFill/>
+        </p:spPr>
+        <p:txBody>
+          <a:bodyPr wrap="square" lIns="73152" rIns="73152" tIns="36576" bIns="36576" anchor="ctr">
+            <a:spAutoFit/>
+          </a:bodyPr>
+          <a:lstStyle/>
+          <a:p>
+            <a:pPr algn="ctr">
+              <a:lnSpc>
+                <a:spcPts val="6200"/>
+              </a:lnSpc>
+            </a:pPr>
+            <a:r>
+              <a:rPr sz="4800" b="1" i="0">
+                <a:solidFill>
+                  <a:srgbClr val="FF9F36"/>
+                </a:solidFill>
+                <a:latin typeface="Calibri Light"/>
+              </a:rPr>
+              <a:t>1.87x</a:t>
+            </a:r>
+          </a:p>
+        </p:txBody>
+      </p:sp>
+      <p:cxnSp>
+        <p:nvCxnSpPr>
+          <p:cNvPr id="25" name="Connector 24"/>
+          <p:cNvCxnSpPr/>
+          <p:nvPr/>
+        </p:nvCxnSpPr>
+        <p:spPr>
+          <a:xfrm>
+            <a:off x="9395229" y="4114800"/>
+            <a:ext cx="1790623" cy="0"/>
+          </a:xfrm>
+          <a:prstGeom prst="line">
+            <a:avLst/>
+          </a:prstGeom>
+          <a:ln w="12700">
+            <a:solidFill>
+              <a:srgbClr val="DEE3EA"/>
+            </a:solidFill>
+          </a:ln>
+        </p:spPr>
+        <p:style>
+          <a:lnRef idx="2">
+            <a:schemeClr val="accent1"/>
+          </a:lnRef>
+          <a:fillRef idx="0">
+            <a:schemeClr val="accent1"/>
+          </a:fillRef>
+          <a:effectRef idx="1">
+            <a:schemeClr val="accent1"/>
+          </a:effectRef>
+          <a:fontRef idx="minor">
+            <a:schemeClr val="tx1"/>
+          </a:fontRef>
+        </p:style>
+      </p:cxnSp>
+      <p:sp>
+        <p:nvSpPr>
+          <p:cNvPr id="26" name="TextBox 25"/>
+          <p:cNvSpPr txBox="1"/>
+          <p:nvPr/>
+        </p:nvSpPr>
+        <p:spPr>
+          <a:xfrm>
+            <a:off x="9212349" y="4297680"/>
+            <a:ext cx="2156383" cy="1645920"/>
+          </a:xfrm>
+          <a:prstGeom prst="rect">
+            <a:avLst/>
+          </a:prstGeom>
+          <a:noFill/>
+        </p:spPr>
+        <p:txBody>
+          <a:bodyPr wrap="square" lIns="73152" rIns="73152" tIns="36576" bIns="36576" anchor="t">
+            <a:spAutoFit/>
+          </a:bodyPr>
+          <a:lstStyle/>
+          <a:p>
+            <a:pPr algn="ctr">
+              <a:lnSpc>
+                <a:spcPts val="2100"/>
+              </a:lnSpc>
+            </a:pPr>
+            <a:r>
+              <a:rPr sz="1500" b="0" i="0">
+                <a:solidFill>
+                  <a:srgbClr val="5D6D7E"/>
+                </a:solidFill>
+                <a:latin typeface="Segoe UI"/>
+              </a:rPr>
+              <a:t>Faster vs XL, cost +6.9%</a:t>
+            </a:r>
+          </a:p>
+        </p:txBody>
+      </p:sp>
+      <p:sp>
+        <p:nvSpPr>
+          <p:cNvPr id="27" name="TextBox 26"/>
+          <p:cNvSpPr txBox="1"/>
+          <p:nvPr/>
+        </p:nvSpPr>
+        <p:spPr>
+          <a:xfrm>
+            <a:off x="548640" y="6446520"/>
+            <a:ext cx="9144000" cy="274320"/>
+          </a:xfrm>
+          <a:prstGeom prst="rect">
+            <a:avLst/>
+          </a:prstGeom>
+          <a:noFill/>
+        </p:spPr>
+        <p:txBody>
+          <a:bodyPr wrap="square" lIns="73152" rIns="73152" tIns="36576" bIns="36576" anchor="t">
+            <a:spAutoFit/>
+          </a:bodyPr>
+          <a:lstStyle/>
+          <a:p>
             <a:pPr algn="l">
               <a:lnSpc>
-                <a:spcPts val="5400"/>
-              </a:lnSpc>
-            </a:pPr>
-            <a:r>
-              <a:rPr sz="5200" b="1" i="0">
-                <a:solidFill>
-                  <a:srgbClr val="FFFFFF"/>
-                </a:solidFill>
-                <a:latin typeface="Calibri Light"/>
-              </a:rPr>
-              <a:t>SUMMARY</a:t>
+                <a:spcPts val="1100"/>
+              </a:lnSpc>
+            </a:pPr>
+            <a:r>
+              <a:rPr sz="900" b="0" i="0">
+                <a:solidFill>
+                  <a:srgbClr val="95A5A6"/>
+                </a:solidFill>
+                <a:latin typeface="Segoe UI"/>
+              </a:rPr>
+              <a:t>DCR Collaboration API v2 | SFSEAPAC | 2026   ·   51 / 60</a:t>
             </a:r>
           </a:p>
         </p:txBody>
@@ -41032,7 +41738,7 @@
                 </a:solidFill>
                 <a:latin typeface="Calibri Light"/>
               </a:rPr>
-              <a:t>Production-Ready Performance</a:t>
+              <a:t>1-Partition 1007 cols — XL vs 2XL</a:t>
             </a:r>
           </a:p>
         </p:txBody>
@@ -41080,8 +41786,8 @@
         </p:nvSpPr>
         <p:spPr>
           <a:xfrm>
-            <a:off x="640080" y="1554480"/>
-            <a:ext cx="10911535" cy="804672"/>
+            <a:off x="640080" y="1508760"/>
+            <a:ext cx="5318607" cy="4754880"/>
           </a:xfrm>
           <a:prstGeom prst="roundRect">
             <a:avLst/>
@@ -41117,16 +41823,16 @@
       </p:sp>
       <p:sp>
         <p:nvSpPr>
-          <p:cNvPr id="9" name="Oval 8"/>
+          <p:cNvPr id="9" name="Rectangle 8"/>
           <p:cNvSpPr/>
           <p:nvPr/>
         </p:nvSpPr>
         <p:spPr>
           <a:xfrm>
-            <a:off x="914400" y="1691640"/>
-            <a:ext cx="411480" cy="411480"/>
-          </a:xfrm>
-          <a:prstGeom prst="ellipse">
+            <a:off x="640080" y="1508760"/>
+            <a:ext cx="5318607" cy="54864"/>
+          </a:xfrm>
+          <a:prstGeom prst="rect">
             <a:avLst/>
           </a:prstGeom>
           <a:solidFill>
@@ -41160,14 +41866,57 @@
       </p:sp>
       <p:sp>
         <p:nvSpPr>
-          <p:cNvPr id="10" name="TextBox 9"/>
+          <p:cNvPr id="10" name="Oval 9"/>
+          <p:cNvSpPr/>
+          <p:nvPr/>
+        </p:nvSpPr>
+        <p:spPr>
+          <a:xfrm>
+            <a:off x="914400" y="1828800"/>
+            <a:ext cx="457200" cy="457200"/>
+          </a:xfrm>
+          <a:prstGeom prst="ellipse">
+            <a:avLst/>
+          </a:prstGeom>
+          <a:solidFill>
+            <a:srgbClr val="29B5E8"/>
+          </a:solidFill>
+          <a:ln>
+            <a:noFill/>
+          </a:ln>
+        </p:spPr>
+        <p:style>
+          <a:lnRef idx="1">
+            <a:schemeClr val="accent1"/>
+          </a:lnRef>
+          <a:fillRef idx="3">
+            <a:schemeClr val="accent1"/>
+          </a:fillRef>
+          <a:effectRef idx="2">
+            <a:schemeClr val="accent1"/>
+          </a:effectRef>
+          <a:fontRef idx="minor">
+            <a:schemeClr val="lt1"/>
+          </a:fontRef>
+        </p:style>
+        <p:txBody>
+          <a:bodyPr rtlCol="0" anchor="ctr"/>
+          <a:lstStyle/>
+          <a:p>
+            <a:pPr algn="ctr"/>
+          </a:p>
+        </p:txBody>
+      </p:sp>
+      <p:sp>
+        <p:nvSpPr>
+          <p:cNvPr id="11" name="TextBox 10"/>
           <p:cNvSpPr txBox="1"/>
           <p:nvPr/>
         </p:nvSpPr>
         <p:spPr>
           <a:xfrm>
-            <a:off x="914400" y="1691640"/>
-            <a:ext cx="411480" cy="411480"/>
+            <a:off x="914400" y="1828800"/>
+            <a:ext cx="457200" cy="457200"/>
           </a:xfrm>
           <a:prstGeom prst="rect">
             <a:avLst/>
@@ -41182,11 +41931,11 @@
           <a:p>
             <a:pPr algn="ctr">
               <a:lnSpc>
-                <a:spcPts val="1600"/>
-              </a:lnSpc>
-            </a:pPr>
-            <a:r>
-              <a:rPr sz="1300" b="1" i="0">
+                <a:spcPts val="1800"/>
+              </a:lnSpc>
+            </a:pPr>
+            <a:r>
+              <a:rPr sz="1400" b="1" i="0">
                 <a:solidFill>
                   <a:srgbClr val="FFFFFF"/>
                 </a:solidFill>
@@ -41199,14 +41948,14 @@
       </p:sp>
       <p:sp>
         <p:nvSpPr>
-          <p:cNvPr id="11" name="TextBox 10"/>
+          <p:cNvPr id="12" name="TextBox 11"/>
           <p:cNvSpPr txBox="1"/>
           <p:nvPr/>
         </p:nvSpPr>
         <p:spPr>
           <a:xfrm>
-            <a:off x="1554480" y="1627632"/>
-            <a:ext cx="9601200" cy="768096"/>
+            <a:off x="1508760" y="1856232"/>
+            <a:ext cx="4221327" cy="411480"/>
           </a:xfrm>
           <a:prstGeom prst="rect">
             <a:avLst/>
@@ -41221,37 +41970,207 @@
           <a:p>
             <a:pPr algn="l">
               <a:lnSpc>
-                <a:spcPts val="2000"/>
-              </a:lnSpc>
-            </a:pPr>
-            <a:r>
-              <a:rPr sz="1600" b="0" i="0">
+                <a:spcPts val="2300"/>
+              </a:lnSpc>
+            </a:pPr>
+            <a:r>
+              <a:rPr sz="1800" b="1" i="0">
+                <a:solidFill>
+                  <a:srgbClr val="11567F"/>
+                </a:solidFill>
+                <a:latin typeface="Calibri Light"/>
+              </a:rPr>
+              <a:t>GEN2_XLARGE (16 cr/hr)</a:t>
+            </a:r>
+          </a:p>
+        </p:txBody>
+      </p:sp>
+      <p:cxnSp>
+        <p:nvCxnSpPr>
+          <p:cNvPr id="13" name="Connector 12"/>
+          <p:cNvCxnSpPr/>
+          <p:nvPr/>
+        </p:nvCxnSpPr>
+        <p:spPr>
+          <a:xfrm>
+            <a:off x="822960" y="2468880"/>
+            <a:ext cx="4952847" cy="0"/>
+          </a:xfrm>
+          <a:prstGeom prst="line">
+            <a:avLst/>
+          </a:prstGeom>
+          <a:ln w="12700">
+            <a:solidFill>
+              <a:srgbClr val="D5DCE3"/>
+            </a:solidFill>
+          </a:ln>
+        </p:spPr>
+        <p:style>
+          <a:lnRef idx="2">
+            <a:schemeClr val="accent1"/>
+          </a:lnRef>
+          <a:fillRef idx="0">
+            <a:schemeClr val="accent1"/>
+          </a:fillRef>
+          <a:effectRef idx="1">
+            <a:schemeClr val="accent1"/>
+          </a:effectRef>
+          <a:fontRef idx="minor">
+            <a:schemeClr val="tx1"/>
+          </a:fontRef>
+        </p:style>
+      </p:cxnSp>
+      <p:sp>
+        <p:nvSpPr>
+          <p:cNvPr id="14" name="TextBox 13"/>
+          <p:cNvSpPr txBox="1"/>
+          <p:nvPr/>
+        </p:nvSpPr>
+        <p:spPr>
+          <a:xfrm>
+            <a:off x="822960" y="2606040"/>
+            <a:ext cx="4952847" cy="3383280"/>
+          </a:xfrm>
+          <a:prstGeom prst="rect">
+            <a:avLst/>
+          </a:prstGeom>
+          <a:noFill/>
+        </p:spPr>
+        <p:txBody>
+          <a:bodyPr wrap="square" lIns="73152" rIns="73152">
+            <a:spAutoFit/>
+          </a:bodyPr>
+          <a:lstStyle/>
+          <a:p>
+            <a:pPr>
+              <a:lnSpc>
+                <a:spcPts val="2400"/>
+              </a:lnSpc>
+              <a:spcAft>
+                <a:spcPts val="1000"/>
+              </a:spcAft>
+            </a:pPr>
+            <a:r>
+              <a:rPr sz="800">
+                <a:solidFill>
+                  <a:srgbClr val="29B5E8"/>
+                </a:solidFill>
+                <a:latin typeface="Segoe UI"/>
+              </a:rPr>
+              <a:t>●  </a:t>
+            </a:r>
+            <a:r>
+              <a:rPr sz="1500">
                 <a:solidFill>
                   <a:srgbClr val="2C3E50"/>
                 </a:solidFill>
                 <a:latin typeface="Segoe UI"/>
               </a:rPr>
-              <a:t>Proven at scale — 1.2B rows × 1001 kolom full-scan dalam 2 menit 16 detik via single-query</a:t>
-            </a:r>
-          </a:p>
-        </p:txBody>
-      </p:sp>
-      <p:sp>
-        <p:nvSpPr>
-          <p:cNvPr id="12" name="Rounded Rectangle 11"/>
+              <a:t>71 min 23s total</a:t>
+            </a:r>
+          </a:p>
+          <a:p>
+            <a:pPr>
+              <a:lnSpc>
+                <a:spcPts val="2400"/>
+              </a:lnSpc>
+              <a:spcAft>
+                <a:spcPts val="1000"/>
+              </a:spcAft>
+            </a:pPr>
+            <a:r>
+              <a:rPr sz="800">
+                <a:solidFill>
+                  <a:srgbClr val="29B5E8"/>
+                </a:solidFill>
+                <a:latin typeface="Segoe UI"/>
+              </a:rPr>
+              <a:t>●  </a:t>
+            </a:r>
+            <a:r>
+              <a:rPr sz="1500">
+                <a:solidFill>
+                  <a:srgbClr val="2C3E50"/>
+                </a:solidFill>
+                <a:latin typeface="Segoe UI"/>
+              </a:rPr>
+              <a:t>19.04 credits</a:t>
+            </a:r>
+          </a:p>
+          <a:p>
+            <a:pPr>
+              <a:lnSpc>
+                <a:spcPts val="2400"/>
+              </a:lnSpc>
+              <a:spcAft>
+                <a:spcPts val="1000"/>
+              </a:spcAft>
+            </a:pPr>
+            <a:r>
+              <a:rPr sz="800">
+                <a:solidFill>
+                  <a:srgbClr val="29B5E8"/>
+                </a:solidFill>
+                <a:latin typeface="Segoe UI"/>
+              </a:rPr>
+              <a:t>●  </a:t>
+            </a:r>
+            <a:r>
+              <a:rPr sz="1500">
+                <a:solidFill>
+                  <a:srgbClr val="2C3E50"/>
+                </a:solidFill>
+                <a:latin typeface="Segoe UI"/>
+              </a:rPr>
+              <a:t>$74.3 per run</a:t>
+            </a:r>
+          </a:p>
+          <a:p>
+            <a:pPr>
+              <a:lnSpc>
+                <a:spcPts val="2400"/>
+              </a:lnSpc>
+              <a:spcAft>
+                <a:spcPts val="1000"/>
+              </a:spcAft>
+            </a:pPr>
+            <a:r>
+              <a:rPr sz="800">
+                <a:solidFill>
+                  <a:srgbClr val="29B5E8"/>
+                </a:solidFill>
+                <a:latin typeface="Segoe UI"/>
+              </a:rPr>
+              <a:t>●  </a:t>
+            </a:r>
+            <a:r>
+              <a:rPr sz="1500">
+                <a:solidFill>
+                  <a:srgbClr val="2C3E50"/>
+                </a:solidFill>
+                <a:latin typeface="Segoe UI"/>
+              </a:rPr>
+              <a:t>Cost-optimized</a:t>
+            </a:r>
+          </a:p>
+        </p:txBody>
+      </p:sp>
+      <p:sp>
+        <p:nvSpPr>
+          <p:cNvPr id="15" name="Rounded Rectangle 14"/>
           <p:cNvSpPr/>
           <p:nvPr/>
         </p:nvSpPr>
         <p:spPr>
           <a:xfrm>
-            <a:off x="640080" y="2468880"/>
-            <a:ext cx="10911535" cy="804672"/>
+            <a:off x="6233007" y="1508760"/>
+            <a:ext cx="5318607" cy="4754880"/>
           </a:xfrm>
           <a:prstGeom prst="roundRect">
             <a:avLst/>
           </a:prstGeom>
           <a:solidFill>
-            <a:srgbClr val="F4F8FB"/>
+            <a:srgbClr val="EEF5FA"/>
           </a:solidFill>
           <a:ln>
             <a:noFill/>
@@ -41281,16 +42200,16 @@
       </p:sp>
       <p:sp>
         <p:nvSpPr>
-          <p:cNvPr id="13" name="Oval 12"/>
+          <p:cNvPr id="16" name="Rectangle 15"/>
           <p:cNvSpPr/>
           <p:nvPr/>
         </p:nvSpPr>
         <p:spPr>
           <a:xfrm>
-            <a:off x="914400" y="2606040"/>
-            <a:ext cx="411480" cy="411480"/>
-          </a:xfrm>
-          <a:prstGeom prst="ellipse">
+            <a:off x="6233007" y="1508760"/>
+            <a:ext cx="5318607" cy="54864"/>
+          </a:xfrm>
+          <a:prstGeom prst="rect">
             <a:avLst/>
           </a:prstGeom>
           <a:solidFill>
@@ -41324,14 +42243,57 @@
       </p:sp>
       <p:sp>
         <p:nvSpPr>
-          <p:cNvPr id="14" name="TextBox 13"/>
+          <p:cNvPr id="17" name="Oval 16"/>
+          <p:cNvSpPr/>
+          <p:nvPr/>
+        </p:nvSpPr>
+        <p:spPr>
+          <a:xfrm>
+            <a:off x="6507327" y="1828800"/>
+            <a:ext cx="457200" cy="457200"/>
+          </a:xfrm>
+          <a:prstGeom prst="ellipse">
+            <a:avLst/>
+          </a:prstGeom>
+          <a:solidFill>
+            <a:srgbClr val="11567F"/>
+          </a:solidFill>
+          <a:ln>
+            <a:noFill/>
+          </a:ln>
+        </p:spPr>
+        <p:style>
+          <a:lnRef idx="1">
+            <a:schemeClr val="accent1"/>
+          </a:lnRef>
+          <a:fillRef idx="3">
+            <a:schemeClr val="accent1"/>
+          </a:fillRef>
+          <a:effectRef idx="2">
+            <a:schemeClr val="accent1"/>
+          </a:effectRef>
+          <a:fontRef idx="minor">
+            <a:schemeClr val="lt1"/>
+          </a:fontRef>
+        </p:style>
+        <p:txBody>
+          <a:bodyPr rtlCol="0" anchor="ctr"/>
+          <a:lstStyle/>
+          <a:p>
+            <a:pPr algn="ctr"/>
+          </a:p>
+        </p:txBody>
+      </p:sp>
+      <p:sp>
+        <p:nvSpPr>
+          <p:cNvPr id="18" name="TextBox 17"/>
           <p:cNvSpPr txBox="1"/>
           <p:nvPr/>
         </p:nvSpPr>
         <p:spPr>
           <a:xfrm>
-            <a:off x="914400" y="2606040"/>
-            <a:ext cx="411480" cy="411480"/>
+            <a:off x="6507327" y="1828800"/>
+            <a:ext cx="457200" cy="457200"/>
           </a:xfrm>
           <a:prstGeom prst="rect">
             <a:avLst/>
@@ -41346,11 +42308,11 @@
           <a:p>
             <a:pPr algn="ctr">
               <a:lnSpc>
-                <a:spcPts val="1600"/>
-              </a:lnSpc>
-            </a:pPr>
-            <a:r>
-              <a:rPr sz="1300" b="1" i="0">
+                <a:spcPts val="1800"/>
+              </a:lnSpc>
+            </a:pPr>
+            <a:r>
+              <a:rPr sz="1400" b="1" i="0">
                 <a:solidFill>
                   <a:srgbClr val="FFFFFF"/>
                 </a:solidFill>
@@ -41363,14 +42325,14 @@
       </p:sp>
       <p:sp>
         <p:nvSpPr>
-          <p:cNvPr id="15" name="TextBox 14"/>
+          <p:cNvPr id="19" name="TextBox 18"/>
           <p:cNvSpPr txBox="1"/>
           <p:nvPr/>
         </p:nvSpPr>
         <p:spPr>
           <a:xfrm>
-            <a:off x="1554480" y="2542032"/>
-            <a:ext cx="9601200" cy="768096"/>
+            <a:off x="7101687" y="1856232"/>
+            <a:ext cx="4221327" cy="411480"/>
           </a:xfrm>
           <a:prstGeom prst="rect">
             <a:avLst/>
@@ -41385,117 +42347,66 @@
           <a:p>
             <a:pPr algn="l">
               <a:lnSpc>
-                <a:spcPts val="2000"/>
-              </a:lnSpc>
-            </a:pPr>
-            <a:r>
-              <a:rPr sz="1600" b="0" i="0">
-                <a:solidFill>
-                  <a:srgbClr val="2C3E50"/>
-                </a:solidFill>
-                <a:latin typeface="Segoe UI"/>
-              </a:rPr>
-              <a:t>5× faster than per-partition loop — 1 RUN call menggantikan 8 sequential calls</a:t>
-            </a:r>
-          </a:p>
-        </p:txBody>
-      </p:sp>
-      <p:sp>
-        <p:nvSpPr>
-          <p:cNvPr id="16" name="Rounded Rectangle 15"/>
-          <p:cNvSpPr/>
-          <p:nvPr/>
-        </p:nvSpPr>
-        <p:spPr>
-          <a:xfrm>
-            <a:off x="640080" y="3383280"/>
-            <a:ext cx="10911535" cy="804672"/>
-          </a:xfrm>
-          <a:prstGeom prst="roundRect">
-            <a:avLst/>
-          </a:prstGeom>
-          <a:solidFill>
-            <a:srgbClr val="EEF5FA"/>
-          </a:solidFill>
-          <a:ln>
-            <a:noFill/>
-          </a:ln>
-        </p:spPr>
-        <p:style>
-          <a:lnRef idx="1">
-            <a:schemeClr val="accent1"/>
-          </a:lnRef>
-          <a:fillRef idx="3">
-            <a:schemeClr val="accent1"/>
-          </a:fillRef>
-          <a:effectRef idx="2">
-            <a:schemeClr val="accent1"/>
-          </a:effectRef>
-          <a:fontRef idx="minor">
-            <a:schemeClr val="lt1"/>
-          </a:fontRef>
-        </p:style>
-        <p:txBody>
-          <a:bodyPr rtlCol="0" anchor="ctr"/>
-          <a:lstStyle/>
-          <a:p>
-            <a:pPr algn="ctr"/>
-          </a:p>
-        </p:txBody>
-      </p:sp>
-      <p:sp>
-        <p:nvSpPr>
-          <p:cNvPr id="17" name="Oval 16"/>
-          <p:cNvSpPr/>
-          <p:nvPr/>
-        </p:nvSpPr>
-        <p:spPr>
-          <a:xfrm>
-            <a:off x="914400" y="3520440"/>
-            <a:ext cx="411480" cy="411480"/>
-          </a:xfrm>
-          <a:prstGeom prst="ellipse">
-            <a:avLst/>
-          </a:prstGeom>
-          <a:solidFill>
-            <a:srgbClr val="71D3DC"/>
-          </a:solidFill>
-          <a:ln>
-            <a:noFill/>
-          </a:ln>
-        </p:spPr>
-        <p:style>
-          <a:lnRef idx="1">
-            <a:schemeClr val="accent1"/>
-          </a:lnRef>
-          <a:fillRef idx="3">
-            <a:schemeClr val="accent1"/>
-          </a:fillRef>
-          <a:effectRef idx="2">
-            <a:schemeClr val="accent1"/>
-          </a:effectRef>
-          <a:fontRef idx="minor">
-            <a:schemeClr val="lt1"/>
-          </a:fontRef>
-        </p:style>
-        <p:txBody>
-          <a:bodyPr rtlCol="0" anchor="ctr"/>
-          <a:lstStyle/>
-          <a:p>
-            <a:pPr algn="ctr"/>
-          </a:p>
-        </p:txBody>
-      </p:sp>
-      <p:sp>
-        <p:nvSpPr>
-          <p:cNvPr id="18" name="TextBox 17"/>
+                <a:spcPts val="2300"/>
+              </a:lnSpc>
+            </a:pPr>
+            <a:r>
+              <a:rPr sz="1800" b="1" i="0">
+                <a:solidFill>
+                  <a:srgbClr val="11567F"/>
+                </a:solidFill>
+                <a:latin typeface="Calibri Light"/>
+              </a:rPr>
+              <a:t>GEN2_2XLARGE (32 cr/hr) ✓</a:t>
+            </a:r>
+          </a:p>
+        </p:txBody>
+      </p:sp>
+      <p:cxnSp>
+        <p:nvCxnSpPr>
+          <p:cNvPr id="20" name="Connector 19"/>
+          <p:cNvCxnSpPr/>
+          <p:nvPr/>
+        </p:nvCxnSpPr>
+        <p:spPr>
+          <a:xfrm>
+            <a:off x="6415887" y="2468880"/>
+            <a:ext cx="4952847" cy="0"/>
+          </a:xfrm>
+          <a:prstGeom prst="line">
+            <a:avLst/>
+          </a:prstGeom>
+          <a:ln w="12700">
+            <a:solidFill>
+              <a:srgbClr val="D5DCE3"/>
+            </a:solidFill>
+          </a:ln>
+        </p:spPr>
+        <p:style>
+          <a:lnRef idx="2">
+            <a:schemeClr val="accent1"/>
+          </a:lnRef>
+          <a:fillRef idx="0">
+            <a:schemeClr val="accent1"/>
+          </a:fillRef>
+          <a:effectRef idx="1">
+            <a:schemeClr val="accent1"/>
+          </a:effectRef>
+          <a:fontRef idx="minor">
+            <a:schemeClr val="tx1"/>
+          </a:fontRef>
+        </p:style>
+      </p:cxnSp>
+      <p:sp>
+        <p:nvSpPr>
+          <p:cNvPr id="21" name="TextBox 20"/>
           <p:cNvSpPr txBox="1"/>
           <p:nvPr/>
         </p:nvSpPr>
         <p:spPr>
           <a:xfrm>
-            <a:off x="914400" y="3520440"/>
-            <a:ext cx="411480" cy="411480"/>
+            <a:off x="6415887" y="2606040"/>
+            <a:ext cx="4952847" cy="3383280"/>
           </a:xfrm>
           <a:prstGeom prst="rect">
             <a:avLst/>
@@ -41503,398 +42414,127 @@
           <a:noFill/>
         </p:spPr>
         <p:txBody>
-          <a:bodyPr wrap="square" lIns="73152" rIns="73152" tIns="36576" bIns="36576" anchor="ctr">
+          <a:bodyPr wrap="square" lIns="73152" rIns="73152">
             <a:spAutoFit/>
           </a:bodyPr>
           <a:lstStyle/>
           <a:p>
-            <a:pPr algn="ctr">
-              <a:lnSpc>
-                <a:spcPts val="1600"/>
-              </a:lnSpc>
-            </a:pPr>
-            <a:r>
-              <a:rPr sz="1300" b="1" i="0">
-                <a:solidFill>
-                  <a:srgbClr val="FFFFFF"/>
-                </a:solidFill>
-                <a:latin typeface="Segoe UI"/>
-              </a:rPr>
-              <a:t>03</a:t>
-            </a:r>
-          </a:p>
-        </p:txBody>
-      </p:sp>
-      <p:sp>
-        <p:nvSpPr>
-          <p:cNvPr id="19" name="TextBox 18"/>
-          <p:cNvSpPr txBox="1"/>
-          <p:nvPr/>
-        </p:nvSpPr>
-        <p:spPr>
-          <a:xfrm>
-            <a:off x="1554480" y="3456432"/>
-            <a:ext cx="9601200" cy="768096"/>
-          </a:xfrm>
-          <a:prstGeom prst="rect">
-            <a:avLst/>
-          </a:prstGeom>
-          <a:noFill/>
-        </p:spPr>
-        <p:txBody>
-          <a:bodyPr wrap="square" lIns="73152" rIns="73152" tIns="36576" bIns="36576" anchor="ctr">
-            <a:spAutoFit/>
-          </a:bodyPr>
-          <a:lstStyle/>
-          <a:p>
-            <a:pPr algn="l">
-              <a:lnSpc>
-                <a:spcPts val="2000"/>
-              </a:lnSpc>
-            </a:pPr>
-            <a:r>
-              <a:rPr sz="1600" b="0" i="0">
+            <a:pPr>
+              <a:lnSpc>
+                <a:spcPts val="2400"/>
+              </a:lnSpc>
+              <a:spcAft>
+                <a:spcPts val="1000"/>
+              </a:spcAft>
+            </a:pPr>
+            <a:r>
+              <a:rPr sz="800">
+                <a:solidFill>
+                  <a:srgbClr val="11567F"/>
+                </a:solidFill>
+                <a:latin typeface="Segoe UI"/>
+              </a:rPr>
+              <a:t>●  </a:t>
+            </a:r>
+            <a:r>
+              <a:rPr sz="1500">
                 <a:solidFill>
                   <a:srgbClr val="2C3E50"/>
                 </a:solidFill>
                 <a:latin typeface="Segoe UI"/>
               </a:rPr>
-              <a:t>80% compute cost savings — 0.61 credits vs 3.02 credits per run @ GEN2_XLARGE</a:t>
-            </a:r>
-          </a:p>
-        </p:txBody>
-      </p:sp>
-      <p:sp>
-        <p:nvSpPr>
-          <p:cNvPr id="20" name="Rounded Rectangle 19"/>
-          <p:cNvSpPr/>
-          <p:nvPr/>
-        </p:nvSpPr>
-        <p:spPr>
-          <a:xfrm>
-            <a:off x="640080" y="4297680"/>
-            <a:ext cx="10911535" cy="804672"/>
-          </a:xfrm>
-          <a:prstGeom prst="roundRect">
-            <a:avLst/>
-          </a:prstGeom>
-          <a:solidFill>
-            <a:srgbClr val="F4F8FB"/>
-          </a:solidFill>
-          <a:ln>
-            <a:noFill/>
-          </a:ln>
-        </p:spPr>
-        <p:style>
-          <a:lnRef idx="1">
-            <a:schemeClr val="accent1"/>
-          </a:lnRef>
-          <a:fillRef idx="3">
-            <a:schemeClr val="accent1"/>
-          </a:fillRef>
-          <a:effectRef idx="2">
-            <a:schemeClr val="accent1"/>
-          </a:effectRef>
-          <a:fontRef idx="minor">
-            <a:schemeClr val="lt1"/>
-          </a:fontRef>
-        </p:style>
-        <p:txBody>
-          <a:bodyPr rtlCol="0" anchor="ctr"/>
-          <a:lstStyle/>
-          <a:p>
-            <a:pPr algn="ctr"/>
-          </a:p>
-        </p:txBody>
-      </p:sp>
-      <p:sp>
-        <p:nvSpPr>
-          <p:cNvPr id="21" name="Oval 20"/>
-          <p:cNvSpPr/>
-          <p:nvPr/>
-        </p:nvSpPr>
-        <p:spPr>
-          <a:xfrm>
-            <a:off x="914400" y="4434840"/>
-            <a:ext cx="411480" cy="411480"/>
-          </a:xfrm>
-          <a:prstGeom prst="ellipse">
-            <a:avLst/>
-          </a:prstGeom>
-          <a:solidFill>
-            <a:srgbClr val="FF9F36"/>
-          </a:solidFill>
-          <a:ln>
-            <a:noFill/>
-          </a:ln>
-        </p:spPr>
-        <p:style>
-          <a:lnRef idx="1">
-            <a:schemeClr val="accent1"/>
-          </a:lnRef>
-          <a:fillRef idx="3">
-            <a:schemeClr val="accent1"/>
-          </a:fillRef>
-          <a:effectRef idx="2">
-            <a:schemeClr val="accent1"/>
-          </a:effectRef>
-          <a:fontRef idx="minor">
-            <a:schemeClr val="lt1"/>
-          </a:fontRef>
-        </p:style>
-        <p:txBody>
-          <a:bodyPr rtlCol="0" anchor="ctr"/>
-          <a:lstStyle/>
-          <a:p>
-            <a:pPr algn="ctr"/>
+              <a:t>38 min 9s total (1.87× faster)</a:t>
+            </a:r>
+          </a:p>
+          <a:p>
+            <a:pPr>
+              <a:lnSpc>
+                <a:spcPts val="2400"/>
+              </a:lnSpc>
+              <a:spcAft>
+                <a:spcPts val="1000"/>
+              </a:spcAft>
+            </a:pPr>
+            <a:r>
+              <a:rPr sz="800">
+                <a:solidFill>
+                  <a:srgbClr val="11567F"/>
+                </a:solidFill>
+                <a:latin typeface="Segoe UI"/>
+              </a:rPr>
+              <a:t>●  </a:t>
+            </a:r>
+            <a:r>
+              <a:rPr sz="1500">
+                <a:solidFill>
+                  <a:srgbClr val="2C3E50"/>
+                </a:solidFill>
+                <a:latin typeface="Segoe UI"/>
+              </a:rPr>
+              <a:t>20.35 credits (+6.9%)</a:t>
+            </a:r>
+          </a:p>
+          <a:p>
+            <a:pPr>
+              <a:lnSpc>
+                <a:spcPts val="2400"/>
+              </a:lnSpc>
+              <a:spcAft>
+                <a:spcPts val="1000"/>
+              </a:spcAft>
+            </a:pPr>
+            <a:r>
+              <a:rPr sz="800">
+                <a:solidFill>
+                  <a:srgbClr val="11567F"/>
+                </a:solidFill>
+                <a:latin typeface="Segoe UI"/>
+              </a:rPr>
+              <a:t>●  </a:t>
+            </a:r>
+            <a:r>
+              <a:rPr sz="1500">
+                <a:solidFill>
+                  <a:srgbClr val="2C3E50"/>
+                </a:solidFill>
+                <a:latin typeface="Segoe UI"/>
+              </a:rPr>
+              <a:t>$79.4 per run</a:t>
+            </a:r>
+          </a:p>
+          <a:p>
+            <a:pPr>
+              <a:lnSpc>
+                <a:spcPts val="2400"/>
+              </a:lnSpc>
+              <a:spcAft>
+                <a:spcPts val="1000"/>
+              </a:spcAft>
+            </a:pPr>
+            <a:r>
+              <a:rPr sz="800">
+                <a:solidFill>
+                  <a:srgbClr val="11567F"/>
+                </a:solidFill>
+                <a:latin typeface="Segoe UI"/>
+              </a:rPr>
+              <a:t>●  </a:t>
+            </a:r>
+            <a:r>
+              <a:rPr sz="1500">
+                <a:solidFill>
+                  <a:srgbClr val="2C3E50"/>
+                </a:solidFill>
+                <a:latin typeface="Segoe UI"/>
+              </a:rPr>
+              <a:t>SLA winner untuk single partition</a:t>
+            </a:r>
           </a:p>
         </p:txBody>
       </p:sp>
       <p:sp>
         <p:nvSpPr>
           <p:cNvPr id="22" name="TextBox 21"/>
-          <p:cNvSpPr txBox="1"/>
-          <p:nvPr/>
-        </p:nvSpPr>
-        <p:spPr>
-          <a:xfrm>
-            <a:off x="914400" y="4434840"/>
-            <a:ext cx="411480" cy="411480"/>
-          </a:xfrm>
-          <a:prstGeom prst="rect">
-            <a:avLst/>
-          </a:prstGeom>
-          <a:noFill/>
-        </p:spPr>
-        <p:txBody>
-          <a:bodyPr wrap="square" lIns="73152" rIns="73152" tIns="36576" bIns="36576" anchor="ctr">
-            <a:spAutoFit/>
-          </a:bodyPr>
-          <a:lstStyle/>
-          <a:p>
-            <a:pPr algn="ctr">
-              <a:lnSpc>
-                <a:spcPts val="1600"/>
-              </a:lnSpc>
-            </a:pPr>
-            <a:r>
-              <a:rPr sz="1300" b="1" i="0">
-                <a:solidFill>
-                  <a:srgbClr val="FFFFFF"/>
-                </a:solidFill>
-                <a:latin typeface="Segoe UI"/>
-              </a:rPr>
-              <a:t>04</a:t>
-            </a:r>
-          </a:p>
-        </p:txBody>
-      </p:sp>
-      <p:sp>
-        <p:nvSpPr>
-          <p:cNvPr id="23" name="TextBox 22"/>
-          <p:cNvSpPr txBox="1"/>
-          <p:nvPr/>
-        </p:nvSpPr>
-        <p:spPr>
-          <a:xfrm>
-            <a:off x="1554480" y="4370832"/>
-            <a:ext cx="9601200" cy="768096"/>
-          </a:xfrm>
-          <a:prstGeom prst="rect">
-            <a:avLst/>
-          </a:prstGeom>
-          <a:noFill/>
-        </p:spPr>
-        <p:txBody>
-          <a:bodyPr wrap="square" lIns="73152" rIns="73152" tIns="36576" bIns="36576" anchor="ctr">
-            <a:spAutoFit/>
-          </a:bodyPr>
-          <a:lstStyle/>
-          <a:p>
-            <a:pPr algn="l">
-              <a:lnSpc>
-                <a:spcPts val="2000"/>
-              </a:lnSpc>
-            </a:pPr>
-            <a:r>
-              <a:rPr sz="1600" b="0" i="0">
-                <a:solidFill>
-                  <a:srgbClr val="2C3E50"/>
-                </a:solidFill>
-                <a:latin typeface="Segoe UI"/>
-              </a:rPr>
-              <a:t>3.37M unique audience tuples exported secara secure tanpa data movement</a:t>
-            </a:r>
-          </a:p>
-        </p:txBody>
-      </p:sp>
-      <p:sp>
-        <p:nvSpPr>
-          <p:cNvPr id="24" name="Rounded Rectangle 23"/>
-          <p:cNvSpPr/>
-          <p:nvPr/>
-        </p:nvSpPr>
-        <p:spPr>
-          <a:xfrm>
-            <a:off x="640080" y="5212080"/>
-            <a:ext cx="10911535" cy="804672"/>
-          </a:xfrm>
-          <a:prstGeom prst="roundRect">
-            <a:avLst/>
-          </a:prstGeom>
-          <a:solidFill>
-            <a:srgbClr val="EEF5FA"/>
-          </a:solidFill>
-          <a:ln>
-            <a:noFill/>
-          </a:ln>
-        </p:spPr>
-        <p:style>
-          <a:lnRef idx="1">
-            <a:schemeClr val="accent1"/>
-          </a:lnRef>
-          <a:fillRef idx="3">
-            <a:schemeClr val="accent1"/>
-          </a:fillRef>
-          <a:effectRef idx="2">
-            <a:schemeClr val="accent1"/>
-          </a:effectRef>
-          <a:fontRef idx="minor">
-            <a:schemeClr val="lt1"/>
-          </a:fontRef>
-        </p:style>
-        <p:txBody>
-          <a:bodyPr rtlCol="0" anchor="ctr"/>
-          <a:lstStyle/>
-          <a:p>
-            <a:pPr algn="ctr"/>
-          </a:p>
-        </p:txBody>
-      </p:sp>
-      <p:sp>
-        <p:nvSpPr>
-          <p:cNvPr id="25" name="Oval 24"/>
-          <p:cNvSpPr/>
-          <p:nvPr/>
-        </p:nvSpPr>
-        <p:spPr>
-          <a:xfrm>
-            <a:off x="914400" y="5349240"/>
-            <a:ext cx="411480" cy="411480"/>
-          </a:xfrm>
-          <a:prstGeom prst="ellipse">
-            <a:avLst/>
-          </a:prstGeom>
-          <a:solidFill>
-            <a:srgbClr val="29B5E8"/>
-          </a:solidFill>
-          <a:ln>
-            <a:noFill/>
-          </a:ln>
-        </p:spPr>
-        <p:style>
-          <a:lnRef idx="1">
-            <a:schemeClr val="accent1"/>
-          </a:lnRef>
-          <a:fillRef idx="3">
-            <a:schemeClr val="accent1"/>
-          </a:fillRef>
-          <a:effectRef idx="2">
-            <a:schemeClr val="accent1"/>
-          </a:effectRef>
-          <a:fontRef idx="minor">
-            <a:schemeClr val="lt1"/>
-          </a:fontRef>
-        </p:style>
-        <p:txBody>
-          <a:bodyPr rtlCol="0" anchor="ctr"/>
-          <a:lstStyle/>
-          <a:p>
-            <a:pPr algn="ctr"/>
-          </a:p>
-        </p:txBody>
-      </p:sp>
-      <p:sp>
-        <p:nvSpPr>
-          <p:cNvPr id="26" name="TextBox 25"/>
-          <p:cNvSpPr txBox="1"/>
-          <p:nvPr/>
-        </p:nvSpPr>
-        <p:spPr>
-          <a:xfrm>
-            <a:off x="914400" y="5349240"/>
-            <a:ext cx="411480" cy="411480"/>
-          </a:xfrm>
-          <a:prstGeom prst="rect">
-            <a:avLst/>
-          </a:prstGeom>
-          <a:noFill/>
-        </p:spPr>
-        <p:txBody>
-          <a:bodyPr wrap="square" lIns="73152" rIns="73152" tIns="36576" bIns="36576" anchor="ctr">
-            <a:spAutoFit/>
-          </a:bodyPr>
-          <a:lstStyle/>
-          <a:p>
-            <a:pPr algn="ctr">
-              <a:lnSpc>
-                <a:spcPts val="1600"/>
-              </a:lnSpc>
-            </a:pPr>
-            <a:r>
-              <a:rPr sz="1300" b="1" i="0">
-                <a:solidFill>
-                  <a:srgbClr val="FFFFFF"/>
-                </a:solidFill>
-                <a:latin typeface="Segoe UI"/>
-              </a:rPr>
-              <a:t>05</a:t>
-            </a:r>
-          </a:p>
-        </p:txBody>
-      </p:sp>
-      <p:sp>
-        <p:nvSpPr>
-          <p:cNvPr id="27" name="TextBox 26"/>
-          <p:cNvSpPr txBox="1"/>
-          <p:nvPr/>
-        </p:nvSpPr>
-        <p:spPr>
-          <a:xfrm>
-            <a:off x="1554480" y="5285232"/>
-            <a:ext cx="9601200" cy="768096"/>
-          </a:xfrm>
-          <a:prstGeom prst="rect">
-            <a:avLst/>
-          </a:prstGeom>
-          <a:noFill/>
-        </p:spPr>
-        <p:txBody>
-          <a:bodyPr wrap="square" lIns="73152" rIns="73152" tIns="36576" bIns="36576" anchor="ctr">
-            <a:spAutoFit/>
-          </a:bodyPr>
-          <a:lstStyle/>
-          <a:p>
-            <a:pPr algn="l">
-              <a:lnSpc>
-                <a:spcPts val="2000"/>
-              </a:lnSpc>
-            </a:pPr>
-            <a:r>
-              <a:rPr sz="1600" b="0" i="0">
-                <a:solidFill>
-                  <a:srgbClr val="2C3E50"/>
-                </a:solidFill>
-                <a:latin typeface="Segoe UI"/>
-              </a:rPr>
-              <a:t>Privacy-preserving by design — UU PDP &amp; POJK compliant dengan full audit trail</a:t>
-            </a:r>
-          </a:p>
-        </p:txBody>
-      </p:sp>
-      <p:sp>
-        <p:nvSpPr>
-          <p:cNvPr id="28" name="TextBox 27"/>
           <p:cNvSpPr txBox="1"/>
           <p:nvPr/>
         </p:nvSpPr>
@@ -41926,7 +42566,7 @@
                 </a:solidFill>
                 <a:latin typeface="Segoe UI"/>
               </a:rPr>
-              <a:t>DCR Collaboration API v2 | SFSEAPAC | 2026   ·   52 / 56</a:t>
+              <a:t>DCR Collaboration API v2 | SFSEAPAC | 2026   ·   52 / 60</a:t>
             </a:r>
           </a:p>
         </p:txBody>
@@ -42144,7 +42784,7 @@
                 </a:solidFill>
                 <a:latin typeface="Calibri Light"/>
               </a:rPr>
-              <a:t>Bottom Line</a:t>
+              <a:t>Sub-Step Breakdown — 1-Partition 1007 cols (XL vs 2XL)</a:t>
             </a:r>
           </a:p>
         </p:txBody>
@@ -42186,14 +42826,100 @@
       </p:cxnSp>
       <p:sp>
         <p:nvSpPr>
-          <p:cNvPr id="8" name="TextBox 7"/>
+          <p:cNvPr id="8" name="Rounded Rectangle 7"/>
+          <p:cNvSpPr/>
+          <p:nvPr/>
+        </p:nvSpPr>
+        <p:spPr>
+          <a:xfrm>
+            <a:off x="640080" y="1554480"/>
+            <a:ext cx="10911535" cy="804672"/>
+          </a:xfrm>
+          <a:prstGeom prst="roundRect">
+            <a:avLst/>
+          </a:prstGeom>
+          <a:solidFill>
+            <a:srgbClr val="EEF5FA"/>
+          </a:solidFill>
+          <a:ln>
+            <a:noFill/>
+          </a:ln>
+        </p:spPr>
+        <p:style>
+          <a:lnRef idx="1">
+            <a:schemeClr val="accent1"/>
+          </a:lnRef>
+          <a:fillRef idx="3">
+            <a:schemeClr val="accent1"/>
+          </a:fillRef>
+          <a:effectRef idx="2">
+            <a:schemeClr val="accent1"/>
+          </a:effectRef>
+          <a:fontRef idx="minor">
+            <a:schemeClr val="lt1"/>
+          </a:fontRef>
+        </p:style>
+        <p:txBody>
+          <a:bodyPr rtlCol="0" anchor="ctr"/>
+          <a:lstStyle/>
+          <a:p>
+            <a:pPr algn="ctr"/>
+          </a:p>
+        </p:txBody>
+      </p:sp>
+      <p:sp>
+        <p:nvSpPr>
+          <p:cNvPr id="9" name="Oval 8"/>
+          <p:cNvSpPr/>
+          <p:nvPr/>
+        </p:nvSpPr>
+        <p:spPr>
+          <a:xfrm>
+            <a:off x="914400" y="1691640"/>
+            <a:ext cx="411480" cy="411480"/>
+          </a:xfrm>
+          <a:prstGeom prst="ellipse">
+            <a:avLst/>
+          </a:prstGeom>
+          <a:solidFill>
+            <a:srgbClr val="29B5E8"/>
+          </a:solidFill>
+          <a:ln>
+            <a:noFill/>
+          </a:ln>
+        </p:spPr>
+        <p:style>
+          <a:lnRef idx="1">
+            <a:schemeClr val="accent1"/>
+          </a:lnRef>
+          <a:fillRef idx="3">
+            <a:schemeClr val="accent1"/>
+          </a:fillRef>
+          <a:effectRef idx="2">
+            <a:schemeClr val="accent1"/>
+          </a:effectRef>
+          <a:fontRef idx="minor">
+            <a:schemeClr val="lt1"/>
+          </a:fontRef>
+        </p:style>
+        <p:txBody>
+          <a:bodyPr rtlCol="0" anchor="ctr"/>
+          <a:lstStyle/>
+          <a:p>
+            <a:pPr algn="ctr"/>
+          </a:p>
+        </p:txBody>
+      </p:sp>
+      <p:sp>
+        <p:nvSpPr>
+          <p:cNvPr id="10" name="TextBox 9"/>
           <p:cNvSpPr txBox="1"/>
           <p:nvPr/>
         </p:nvSpPr>
         <p:spPr>
           <a:xfrm>
-            <a:off x="731520" y="1508760"/>
-            <a:ext cx="10515600" cy="4754880"/>
+            <a:off x="914400" y="1691640"/>
+            <a:ext cx="411480" cy="411480"/>
           </a:xfrm>
           <a:prstGeom prst="rect">
             <a:avLst/>
@@ -42201,239 +42927,726 @@
           <a:noFill/>
         </p:spPr>
         <p:txBody>
-          <a:bodyPr wrap="square" lIns="73152" rIns="73152">
+          <a:bodyPr wrap="square" lIns="73152" rIns="73152" tIns="36576" bIns="36576" anchor="ctr">
             <a:spAutoFit/>
           </a:bodyPr>
           <a:lstStyle/>
           <a:p>
-            <a:pPr>
-              <a:lnSpc>
-                <a:spcPts val="2500"/>
-              </a:lnSpc>
-              <a:spcAft>
-                <a:spcPts val="1000"/>
-              </a:spcAft>
-            </a:pPr>
-            <a:r>
-              <a:rPr sz="800">
-                <a:solidFill>
-                  <a:srgbClr val="29B5E8"/>
-                </a:solidFill>
-                <a:latin typeface="Segoe UI"/>
-              </a:rPr>
-              <a:t>●  </a:t>
-            </a:r>
-            <a:r>
-              <a:rPr sz="1600">
+            <a:pPr algn="ctr">
+              <a:lnSpc>
+                <a:spcPts val="1600"/>
+              </a:lnSpc>
+            </a:pPr>
+            <a:r>
+              <a:rPr sz="1300" b="1" i="0">
+                <a:solidFill>
+                  <a:srgbClr val="FFFFFF"/>
+                </a:solidFill>
+                <a:latin typeface="Segoe UI"/>
+              </a:rPr>
+              <a:t>01</a:t>
+            </a:r>
+          </a:p>
+        </p:txBody>
+      </p:sp>
+      <p:sp>
+        <p:nvSpPr>
+          <p:cNvPr id="11" name="TextBox 10"/>
+          <p:cNvSpPr txBox="1"/>
+          <p:nvPr/>
+        </p:nvSpPr>
+        <p:spPr>
+          <a:xfrm>
+            <a:off x="1554480" y="1627632"/>
+            <a:ext cx="9601200" cy="768096"/>
+          </a:xfrm>
+          <a:prstGeom prst="rect">
+            <a:avLst/>
+          </a:prstGeom>
+          <a:noFill/>
+        </p:spPr>
+        <p:txBody>
+          <a:bodyPr wrap="square" lIns="73152" rIns="73152" tIns="36576" bIns="36576" anchor="ctr">
+            <a:spAutoFit/>
+          </a:bodyPr>
+          <a:lstStyle/>
+          <a:p>
+            <a:pPr algn="l">
+              <a:lnSpc>
+                <a:spcPts val="2000"/>
+              </a:lnSpc>
+            </a:pPr>
+            <a:r>
+              <a:rPr sz="1600" b="0" i="0">
                 <a:solidFill>
                   <a:srgbClr val="2C3E50"/>
                 </a:solidFill>
                 <a:latin typeface="Segoe UI"/>
               </a:rPr>
-              <a:t>2m</a:t>
-            </a:r>
-          </a:p>
-          <a:p>
-            <a:pPr>
-              <a:lnSpc>
-                <a:spcPts val="2500"/>
-              </a:lnSpc>
-              <a:spcAft>
-                <a:spcPts val="1000"/>
-              </a:spcAft>
-            </a:pPr>
-            <a:r>
-              <a:rPr sz="800">
-                <a:solidFill>
-                  <a:srgbClr val="29B5E8"/>
-                </a:solidFill>
-                <a:latin typeface="Segoe UI"/>
-              </a:rPr>
-              <a:t>●  </a:t>
-            </a:r>
-            <a:r>
-              <a:rPr sz="1600">
+              <a:t>secure_run_v2 — XL: 4214 s (70m 15s) | 2XL: 2234 s (37m 14s) — 1.89× speedup</a:t>
+            </a:r>
+          </a:p>
+        </p:txBody>
+      </p:sp>
+      <p:sp>
+        <p:nvSpPr>
+          <p:cNvPr id="12" name="Rounded Rectangle 11"/>
+          <p:cNvSpPr/>
+          <p:nvPr/>
+        </p:nvSpPr>
+        <p:spPr>
+          <a:xfrm>
+            <a:off x="640080" y="2468880"/>
+            <a:ext cx="10911535" cy="804672"/>
+          </a:xfrm>
+          <a:prstGeom prst="roundRect">
+            <a:avLst/>
+          </a:prstGeom>
+          <a:solidFill>
+            <a:srgbClr val="F4F8FB"/>
+          </a:solidFill>
+          <a:ln>
+            <a:noFill/>
+          </a:ln>
+        </p:spPr>
+        <p:style>
+          <a:lnRef idx="1">
+            <a:schemeClr val="accent1"/>
+          </a:lnRef>
+          <a:fillRef idx="3">
+            <a:schemeClr val="accent1"/>
+          </a:fillRef>
+          <a:effectRef idx="2">
+            <a:schemeClr val="accent1"/>
+          </a:effectRef>
+          <a:fontRef idx="minor">
+            <a:schemeClr val="lt1"/>
+          </a:fontRef>
+        </p:style>
+        <p:txBody>
+          <a:bodyPr rtlCol="0" anchor="ctr"/>
+          <a:lstStyle/>
+          <a:p>
+            <a:pPr algn="ctr"/>
+          </a:p>
+        </p:txBody>
+      </p:sp>
+      <p:sp>
+        <p:nvSpPr>
+          <p:cNvPr id="13" name="Oval 12"/>
+          <p:cNvSpPr/>
+          <p:nvPr/>
+        </p:nvSpPr>
+        <p:spPr>
+          <a:xfrm>
+            <a:off x="914400" y="2606040"/>
+            <a:ext cx="411480" cy="411480"/>
+          </a:xfrm>
+          <a:prstGeom prst="ellipse">
+            <a:avLst/>
+          </a:prstGeom>
+          <a:solidFill>
+            <a:srgbClr val="11567F"/>
+          </a:solidFill>
+          <a:ln>
+            <a:noFill/>
+          </a:ln>
+        </p:spPr>
+        <p:style>
+          <a:lnRef idx="1">
+            <a:schemeClr val="accent1"/>
+          </a:lnRef>
+          <a:fillRef idx="3">
+            <a:schemeClr val="accent1"/>
+          </a:fillRef>
+          <a:effectRef idx="2">
+            <a:schemeClr val="accent1"/>
+          </a:effectRef>
+          <a:fontRef idx="minor">
+            <a:schemeClr val="lt1"/>
+          </a:fontRef>
+        </p:style>
+        <p:txBody>
+          <a:bodyPr rtlCol="0" anchor="ctr"/>
+          <a:lstStyle/>
+          <a:p>
+            <a:pPr algn="ctr"/>
+          </a:p>
+        </p:txBody>
+      </p:sp>
+      <p:sp>
+        <p:nvSpPr>
+          <p:cNvPr id="14" name="TextBox 13"/>
+          <p:cNvSpPr txBox="1"/>
+          <p:nvPr/>
+        </p:nvSpPr>
+        <p:spPr>
+          <a:xfrm>
+            <a:off x="914400" y="2606040"/>
+            <a:ext cx="411480" cy="411480"/>
+          </a:xfrm>
+          <a:prstGeom prst="rect">
+            <a:avLst/>
+          </a:prstGeom>
+          <a:noFill/>
+        </p:spPr>
+        <p:txBody>
+          <a:bodyPr wrap="square" lIns="73152" rIns="73152" tIns="36576" bIns="36576" anchor="ctr">
+            <a:spAutoFit/>
+          </a:bodyPr>
+          <a:lstStyle/>
+          <a:p>
+            <a:pPr algn="ctr">
+              <a:lnSpc>
+                <a:spcPts val="1600"/>
+              </a:lnSpc>
+            </a:pPr>
+            <a:r>
+              <a:rPr sz="1300" b="1" i="0">
+                <a:solidFill>
+                  <a:srgbClr val="FFFFFF"/>
+                </a:solidFill>
+                <a:latin typeface="Segoe UI"/>
+              </a:rPr>
+              <a:t>02</a:t>
+            </a:r>
+          </a:p>
+        </p:txBody>
+      </p:sp>
+      <p:sp>
+        <p:nvSpPr>
+          <p:cNvPr id="15" name="TextBox 14"/>
+          <p:cNvSpPr txBox="1"/>
+          <p:nvPr/>
+        </p:nvSpPr>
+        <p:spPr>
+          <a:xfrm>
+            <a:off x="1554480" y="2542032"/>
+            <a:ext cx="9601200" cy="768096"/>
+          </a:xfrm>
+          <a:prstGeom prst="rect">
+            <a:avLst/>
+          </a:prstGeom>
+          <a:noFill/>
+        </p:spPr>
+        <p:txBody>
+          <a:bodyPr wrap="square" lIns="73152" rIns="73152" tIns="36576" bIns="36576" anchor="ctr">
+            <a:spAutoFit/>
+          </a:bodyPr>
+          <a:lstStyle/>
+          <a:p>
+            <a:pPr algn="l">
+              <a:lnSpc>
+                <a:spcPts val="2000"/>
+              </a:lnSpc>
+            </a:pPr>
+            <a:r>
+              <a:rPr sz="1600" b="0" i="0">
                 <a:solidFill>
                   <a:srgbClr val="2C3E50"/>
                 </a:solidFill>
                 <a:latin typeface="Segoe UI"/>
               </a:rPr>
-              <a:t>16s End-to-end single-query full-scan</a:t>
-            </a:r>
-          </a:p>
-          <a:p>
-            <a:pPr>
-              <a:lnSpc>
-                <a:spcPts val="2500"/>
-              </a:lnSpc>
-              <a:spcAft>
-                <a:spcPts val="1000"/>
-              </a:spcAft>
-            </a:pPr>
-            <a:r>
-              <a:rPr sz="800">
-                <a:solidFill>
-                  <a:srgbClr val="29B5E8"/>
-                </a:solidFill>
-                <a:latin typeface="Segoe UI"/>
-              </a:rPr>
-              <a:t>●  </a:t>
-            </a:r>
-            <a:r>
-              <a:rPr sz="1600">
+              <a:t>direct_activation_to_runner — XL: 12.3 s | 2XL: 10.4 s — 1.18× speedup</a:t>
+            </a:r>
+          </a:p>
+        </p:txBody>
+      </p:sp>
+      <p:sp>
+        <p:nvSpPr>
+          <p:cNvPr id="16" name="Rounded Rectangle 15"/>
+          <p:cNvSpPr/>
+          <p:nvPr/>
+        </p:nvSpPr>
+        <p:spPr>
+          <a:xfrm>
+            <a:off x="640080" y="3383280"/>
+            <a:ext cx="10911535" cy="804672"/>
+          </a:xfrm>
+          <a:prstGeom prst="roundRect">
+            <a:avLst/>
+          </a:prstGeom>
+          <a:solidFill>
+            <a:srgbClr val="EEF5FA"/>
+          </a:solidFill>
+          <a:ln>
+            <a:noFill/>
+          </a:ln>
+        </p:spPr>
+        <p:style>
+          <a:lnRef idx="1">
+            <a:schemeClr val="accent1"/>
+          </a:lnRef>
+          <a:fillRef idx="3">
+            <a:schemeClr val="accent1"/>
+          </a:fillRef>
+          <a:effectRef idx="2">
+            <a:schemeClr val="accent1"/>
+          </a:effectRef>
+          <a:fontRef idx="minor">
+            <a:schemeClr val="lt1"/>
+          </a:fontRef>
+        </p:style>
+        <p:txBody>
+          <a:bodyPr rtlCol="0" anchor="ctr"/>
+          <a:lstStyle/>
+          <a:p>
+            <a:pPr algn="ctr"/>
+          </a:p>
+        </p:txBody>
+      </p:sp>
+      <p:sp>
+        <p:nvSpPr>
+          <p:cNvPr id="17" name="Oval 16"/>
+          <p:cNvSpPr/>
+          <p:nvPr/>
+        </p:nvSpPr>
+        <p:spPr>
+          <a:xfrm>
+            <a:off x="914400" y="3520440"/>
+            <a:ext cx="411480" cy="411480"/>
+          </a:xfrm>
+          <a:prstGeom prst="ellipse">
+            <a:avLst/>
+          </a:prstGeom>
+          <a:solidFill>
+            <a:srgbClr val="71D3DC"/>
+          </a:solidFill>
+          <a:ln>
+            <a:noFill/>
+          </a:ln>
+        </p:spPr>
+        <p:style>
+          <a:lnRef idx="1">
+            <a:schemeClr val="accent1"/>
+          </a:lnRef>
+          <a:fillRef idx="3">
+            <a:schemeClr val="accent1"/>
+          </a:fillRef>
+          <a:effectRef idx="2">
+            <a:schemeClr val="accent1"/>
+          </a:effectRef>
+          <a:fontRef idx="minor">
+            <a:schemeClr val="lt1"/>
+          </a:fontRef>
+        </p:style>
+        <p:txBody>
+          <a:bodyPr rtlCol="0" anchor="ctr"/>
+          <a:lstStyle/>
+          <a:p>
+            <a:pPr algn="ctr"/>
+          </a:p>
+        </p:txBody>
+      </p:sp>
+      <p:sp>
+        <p:nvSpPr>
+          <p:cNvPr id="18" name="TextBox 17"/>
+          <p:cNvSpPr txBox="1"/>
+          <p:nvPr/>
+        </p:nvSpPr>
+        <p:spPr>
+          <a:xfrm>
+            <a:off x="914400" y="3520440"/>
+            <a:ext cx="411480" cy="411480"/>
+          </a:xfrm>
+          <a:prstGeom prst="rect">
+            <a:avLst/>
+          </a:prstGeom>
+          <a:noFill/>
+        </p:spPr>
+        <p:txBody>
+          <a:bodyPr wrap="square" lIns="73152" rIns="73152" tIns="36576" bIns="36576" anchor="ctr">
+            <a:spAutoFit/>
+          </a:bodyPr>
+          <a:lstStyle/>
+          <a:p>
+            <a:pPr algn="ctr">
+              <a:lnSpc>
+                <a:spcPts val="1600"/>
+              </a:lnSpc>
+            </a:pPr>
+            <a:r>
+              <a:rPr sz="1300" b="1" i="0">
+                <a:solidFill>
+                  <a:srgbClr val="FFFFFF"/>
+                </a:solidFill>
+                <a:latin typeface="Segoe UI"/>
+              </a:rPr>
+              <a:t>03</a:t>
+            </a:r>
+          </a:p>
+        </p:txBody>
+      </p:sp>
+      <p:sp>
+        <p:nvSpPr>
+          <p:cNvPr id="19" name="TextBox 18"/>
+          <p:cNvSpPr txBox="1"/>
+          <p:nvPr/>
+        </p:nvSpPr>
+        <p:spPr>
+          <a:xfrm>
+            <a:off x="1554480" y="3456432"/>
+            <a:ext cx="9601200" cy="768096"/>
+          </a:xfrm>
+          <a:prstGeom prst="rect">
+            <a:avLst/>
+          </a:prstGeom>
+          <a:noFill/>
+        </p:spPr>
+        <p:txBody>
+          <a:bodyPr wrap="square" lIns="73152" rIns="73152" tIns="36576" bIns="36576" anchor="ctr">
+            <a:spAutoFit/>
+          </a:bodyPr>
+          <a:lstStyle/>
+          <a:p>
+            <a:pPr algn="l">
+              <a:lnSpc>
+                <a:spcPts val="2000"/>
+              </a:lnSpc>
+            </a:pPr>
+            <a:r>
+              <a:rPr sz="1600" b="0" i="0">
                 <a:solidFill>
                   <a:srgbClr val="2C3E50"/>
                 </a:solidFill>
                 <a:latin typeface="Segoe UI"/>
               </a:rPr>
-              <a:t>0.61</a:t>
-            </a:r>
-          </a:p>
-          <a:p>
-            <a:pPr>
-              <a:lnSpc>
-                <a:spcPts val="2500"/>
-              </a:lnSpc>
-              <a:spcAft>
-                <a:spcPts val="1000"/>
-              </a:spcAft>
-            </a:pPr>
-            <a:r>
-              <a:rPr sz="800">
-                <a:solidFill>
-                  <a:srgbClr val="29B5E8"/>
-                </a:solidFill>
-                <a:latin typeface="Segoe UI"/>
-              </a:rPr>
-              <a:t>●  </a:t>
-            </a:r>
-            <a:r>
-              <a:rPr sz="1600">
+              <a:t>INSERT to SEGMENT_RECORDS — XL: 5.7 s | 2XL: 5.3 s — 1.07× speedup</a:t>
+            </a:r>
+          </a:p>
+        </p:txBody>
+      </p:sp>
+      <p:sp>
+        <p:nvSpPr>
+          <p:cNvPr id="20" name="Rounded Rectangle 19"/>
+          <p:cNvSpPr/>
+          <p:nvPr/>
+        </p:nvSpPr>
+        <p:spPr>
+          <a:xfrm>
+            <a:off x="640080" y="4297680"/>
+            <a:ext cx="10911535" cy="804672"/>
+          </a:xfrm>
+          <a:prstGeom prst="roundRect">
+            <a:avLst/>
+          </a:prstGeom>
+          <a:solidFill>
+            <a:srgbClr val="F4F8FB"/>
+          </a:solidFill>
+          <a:ln>
+            <a:noFill/>
+          </a:ln>
+        </p:spPr>
+        <p:style>
+          <a:lnRef idx="1">
+            <a:schemeClr val="accent1"/>
+          </a:lnRef>
+          <a:fillRef idx="3">
+            <a:schemeClr val="accent1"/>
+          </a:fillRef>
+          <a:effectRef idx="2">
+            <a:schemeClr val="accent1"/>
+          </a:effectRef>
+          <a:fontRef idx="minor">
+            <a:schemeClr val="lt1"/>
+          </a:fontRef>
+        </p:style>
+        <p:txBody>
+          <a:bodyPr rtlCol="0" anchor="ctr"/>
+          <a:lstStyle/>
+          <a:p>
+            <a:pPr algn="ctr"/>
+          </a:p>
+        </p:txBody>
+      </p:sp>
+      <p:sp>
+        <p:nvSpPr>
+          <p:cNvPr id="21" name="Oval 20"/>
+          <p:cNvSpPr/>
+          <p:nvPr/>
+        </p:nvSpPr>
+        <p:spPr>
+          <a:xfrm>
+            <a:off x="914400" y="4434840"/>
+            <a:ext cx="411480" cy="411480"/>
+          </a:xfrm>
+          <a:prstGeom prst="ellipse">
+            <a:avLst/>
+          </a:prstGeom>
+          <a:solidFill>
+            <a:srgbClr val="FF9F36"/>
+          </a:solidFill>
+          <a:ln>
+            <a:noFill/>
+          </a:ln>
+        </p:spPr>
+        <p:style>
+          <a:lnRef idx="1">
+            <a:schemeClr val="accent1"/>
+          </a:lnRef>
+          <a:fillRef idx="3">
+            <a:schemeClr val="accent1"/>
+          </a:fillRef>
+          <a:effectRef idx="2">
+            <a:schemeClr val="accent1"/>
+          </a:effectRef>
+          <a:fontRef idx="minor">
+            <a:schemeClr val="lt1"/>
+          </a:fontRef>
+        </p:style>
+        <p:txBody>
+          <a:bodyPr rtlCol="0" anchor="ctr"/>
+          <a:lstStyle/>
+          <a:p>
+            <a:pPr algn="ctr"/>
+          </a:p>
+        </p:txBody>
+      </p:sp>
+      <p:sp>
+        <p:nvSpPr>
+          <p:cNvPr id="22" name="TextBox 21"/>
+          <p:cNvSpPr txBox="1"/>
+          <p:nvPr/>
+        </p:nvSpPr>
+        <p:spPr>
+          <a:xfrm>
+            <a:off x="914400" y="4434840"/>
+            <a:ext cx="411480" cy="411480"/>
+          </a:xfrm>
+          <a:prstGeom prst="rect">
+            <a:avLst/>
+          </a:prstGeom>
+          <a:noFill/>
+        </p:spPr>
+        <p:txBody>
+          <a:bodyPr wrap="square" lIns="73152" rIns="73152" tIns="36576" bIns="36576" anchor="ctr">
+            <a:spAutoFit/>
+          </a:bodyPr>
+          <a:lstStyle/>
+          <a:p>
+            <a:pPr algn="ctr">
+              <a:lnSpc>
+                <a:spcPts val="1600"/>
+              </a:lnSpc>
+            </a:pPr>
+            <a:r>
+              <a:rPr sz="1300" b="1" i="0">
+                <a:solidFill>
+                  <a:srgbClr val="FFFFFF"/>
+                </a:solidFill>
+                <a:latin typeface="Segoe UI"/>
+              </a:rPr>
+              <a:t>04</a:t>
+            </a:r>
+          </a:p>
+        </p:txBody>
+      </p:sp>
+      <p:sp>
+        <p:nvSpPr>
+          <p:cNvPr id="23" name="TextBox 22"/>
+          <p:cNvSpPr txBox="1"/>
+          <p:nvPr/>
+        </p:nvSpPr>
+        <p:spPr>
+          <a:xfrm>
+            <a:off x="1554480" y="4370832"/>
+            <a:ext cx="9601200" cy="768096"/>
+          </a:xfrm>
+          <a:prstGeom prst="rect">
+            <a:avLst/>
+          </a:prstGeom>
+          <a:noFill/>
+        </p:spPr>
+        <p:txBody>
+          <a:bodyPr wrap="square" lIns="73152" rIns="73152" tIns="36576" bIns="36576" anchor="ctr">
+            <a:spAutoFit/>
+          </a:bodyPr>
+          <a:lstStyle/>
+          <a:p>
+            <a:pPr algn="l">
+              <a:lnSpc>
+                <a:spcPts val="2000"/>
+              </a:lnSpc>
+            </a:pPr>
+            <a:r>
+              <a:rPr sz="1600" b="0" i="0">
                 <a:solidFill>
                   <a:srgbClr val="2C3E50"/>
                 </a:solidFill>
                 <a:latin typeface="Segoe UI"/>
               </a:rPr>
-              <a:t>Credits per run (80% cheaper than loop)</a:t>
-            </a:r>
-          </a:p>
-          <a:p>
-            <a:pPr>
-              <a:lnSpc>
-                <a:spcPts val="2500"/>
-              </a:lnSpc>
-              <a:spcAft>
-                <a:spcPts val="1000"/>
-              </a:spcAft>
-            </a:pPr>
-            <a:r>
-              <a:rPr sz="800">
-                <a:solidFill>
-                  <a:srgbClr val="29B5E8"/>
-                </a:solidFill>
-                <a:latin typeface="Segoe UI"/>
-              </a:rPr>
-              <a:t>●  </a:t>
-            </a:r>
-            <a:r>
-              <a:rPr sz="1600">
+              <a:t>Total activation — XL: 71 min | 2XL: 38 min — 1.88× speedup</a:t>
+            </a:r>
+          </a:p>
+        </p:txBody>
+      </p:sp>
+      <p:sp>
+        <p:nvSpPr>
+          <p:cNvPr id="24" name="Rounded Rectangle 23"/>
+          <p:cNvSpPr/>
+          <p:nvPr/>
+        </p:nvSpPr>
+        <p:spPr>
+          <a:xfrm>
+            <a:off x="640080" y="5212080"/>
+            <a:ext cx="10911535" cy="804672"/>
+          </a:xfrm>
+          <a:prstGeom prst="roundRect">
+            <a:avLst/>
+          </a:prstGeom>
+          <a:solidFill>
+            <a:srgbClr val="EEF5FA"/>
+          </a:solidFill>
+          <a:ln>
+            <a:noFill/>
+          </a:ln>
+        </p:spPr>
+        <p:style>
+          <a:lnRef idx="1">
+            <a:schemeClr val="accent1"/>
+          </a:lnRef>
+          <a:fillRef idx="3">
+            <a:schemeClr val="accent1"/>
+          </a:fillRef>
+          <a:effectRef idx="2">
+            <a:schemeClr val="accent1"/>
+          </a:effectRef>
+          <a:fontRef idx="minor">
+            <a:schemeClr val="lt1"/>
+          </a:fontRef>
+        </p:style>
+        <p:txBody>
+          <a:bodyPr rtlCol="0" anchor="ctr"/>
+          <a:lstStyle/>
+          <a:p>
+            <a:pPr algn="ctr"/>
+          </a:p>
+        </p:txBody>
+      </p:sp>
+      <p:sp>
+        <p:nvSpPr>
+          <p:cNvPr id="25" name="Oval 24"/>
+          <p:cNvSpPr/>
+          <p:nvPr/>
+        </p:nvSpPr>
+        <p:spPr>
+          <a:xfrm>
+            <a:off x="914400" y="5349240"/>
+            <a:ext cx="411480" cy="411480"/>
+          </a:xfrm>
+          <a:prstGeom prst="ellipse">
+            <a:avLst/>
+          </a:prstGeom>
+          <a:solidFill>
+            <a:srgbClr val="29B5E8"/>
+          </a:solidFill>
+          <a:ln>
+            <a:noFill/>
+          </a:ln>
+        </p:spPr>
+        <p:style>
+          <a:lnRef idx="1">
+            <a:schemeClr val="accent1"/>
+          </a:lnRef>
+          <a:fillRef idx="3">
+            <a:schemeClr val="accent1"/>
+          </a:fillRef>
+          <a:effectRef idx="2">
+            <a:schemeClr val="accent1"/>
+          </a:effectRef>
+          <a:fontRef idx="minor">
+            <a:schemeClr val="lt1"/>
+          </a:fontRef>
+        </p:style>
+        <p:txBody>
+          <a:bodyPr rtlCol="0" anchor="ctr"/>
+          <a:lstStyle/>
+          <a:p>
+            <a:pPr algn="ctr"/>
+          </a:p>
+        </p:txBody>
+      </p:sp>
+      <p:sp>
+        <p:nvSpPr>
+          <p:cNvPr id="26" name="TextBox 25"/>
+          <p:cNvSpPr txBox="1"/>
+          <p:nvPr/>
+        </p:nvSpPr>
+        <p:spPr>
+          <a:xfrm>
+            <a:off x="914400" y="5349240"/>
+            <a:ext cx="411480" cy="411480"/>
+          </a:xfrm>
+          <a:prstGeom prst="rect">
+            <a:avLst/>
+          </a:prstGeom>
+          <a:noFill/>
+        </p:spPr>
+        <p:txBody>
+          <a:bodyPr wrap="square" lIns="73152" rIns="73152" tIns="36576" bIns="36576" anchor="ctr">
+            <a:spAutoFit/>
+          </a:bodyPr>
+          <a:lstStyle/>
+          <a:p>
+            <a:pPr algn="ctr">
+              <a:lnSpc>
+                <a:spcPts val="1600"/>
+              </a:lnSpc>
+            </a:pPr>
+            <a:r>
+              <a:rPr sz="1300" b="1" i="0">
+                <a:solidFill>
+                  <a:srgbClr val="FFFFFF"/>
+                </a:solidFill>
+                <a:latin typeface="Segoe UI"/>
+              </a:rPr>
+              <a:t>05</a:t>
+            </a:r>
+          </a:p>
+        </p:txBody>
+      </p:sp>
+      <p:sp>
+        <p:nvSpPr>
+          <p:cNvPr id="27" name="TextBox 26"/>
+          <p:cNvSpPr txBox="1"/>
+          <p:nvPr/>
+        </p:nvSpPr>
+        <p:spPr>
+          <a:xfrm>
+            <a:off x="1554480" y="5285232"/>
+            <a:ext cx="9601200" cy="768096"/>
+          </a:xfrm>
+          <a:prstGeom prst="rect">
+            <a:avLst/>
+          </a:prstGeom>
+          <a:noFill/>
+        </p:spPr>
+        <p:txBody>
+          <a:bodyPr wrap="square" lIns="73152" rIns="73152" tIns="36576" bIns="36576" anchor="ctr">
+            <a:spAutoFit/>
+          </a:bodyPr>
+          <a:lstStyle/>
+          <a:p>
+            <a:pPr algn="l">
+              <a:lnSpc>
+                <a:spcPts val="2000"/>
+              </a:lnSpc>
+            </a:pPr>
+            <a:r>
+              <a:rPr sz="1600" b="0" i="0">
                 <a:solidFill>
                   <a:srgbClr val="2C3E50"/>
                 </a:solidFill>
                 <a:latin typeface="Segoe UI"/>
               </a:rPr>
-              <a:t>1.2B</a:t>
-            </a:r>
-          </a:p>
-          <a:p>
-            <a:pPr>
-              <a:lnSpc>
-                <a:spcPts val="2500"/>
-              </a:lnSpc>
-              <a:spcAft>
-                <a:spcPts val="1000"/>
-              </a:spcAft>
-            </a:pPr>
-            <a:r>
-              <a:rPr sz="800">
-                <a:solidFill>
-                  <a:srgbClr val="29B5E8"/>
-                </a:solidFill>
-                <a:latin typeface="Segoe UI"/>
-              </a:rPr>
-              <a:t>●  </a:t>
-            </a:r>
-            <a:r>
-              <a:rPr sz="1600">
-                <a:solidFill>
-                  <a:srgbClr val="2C3E50"/>
-                </a:solidFill>
-                <a:latin typeface="Segoe UI"/>
-              </a:rPr>
-              <a:t>Provider rows fully scanned in 1 query</a:t>
-            </a:r>
-          </a:p>
-          <a:p>
-            <a:pPr>
-              <a:lnSpc>
-                <a:spcPts val="2500"/>
-              </a:lnSpc>
-              <a:spcAft>
-                <a:spcPts val="1000"/>
-              </a:spcAft>
-            </a:pPr>
-            <a:r>
-              <a:rPr sz="800">
-                <a:solidFill>
-                  <a:srgbClr val="29B5E8"/>
-                </a:solidFill>
-                <a:latin typeface="Segoe UI"/>
-              </a:rPr>
-              <a:t>●  </a:t>
-            </a:r>
-            <a:r>
-              <a:rPr sz="1600">
-                <a:solidFill>
-                  <a:srgbClr val="2C3E50"/>
-                </a:solidFill>
-                <a:latin typeface="Segoe UI"/>
-              </a:rPr>
-              <a:t>3.37M</a:t>
-            </a:r>
-          </a:p>
-          <a:p>
-            <a:pPr>
-              <a:lnSpc>
-                <a:spcPts val="2500"/>
-              </a:lnSpc>
-              <a:spcAft>
-                <a:spcPts val="1000"/>
-              </a:spcAft>
-            </a:pPr>
-            <a:r>
-              <a:rPr sz="800">
-                <a:solidFill>
-                  <a:srgbClr val="29B5E8"/>
-                </a:solidFill>
-                <a:latin typeface="Segoe UI"/>
-              </a:rPr>
-              <a:t>●  </a:t>
-            </a:r>
-            <a:r>
-              <a:rPr sz="1600">
-                <a:solidFill>
-                  <a:srgbClr val="2C3E50"/>
-                </a:solidFill>
-                <a:latin typeface="Segoe UI"/>
-              </a:rPr>
-              <a:t>Unique audience tuples (identical in both modes)</a:t>
-            </a:r>
-          </a:p>
-        </p:txBody>
-      </p:sp>
-      <p:sp>
-        <p:nvSpPr>
-          <p:cNvPr id="9" name="TextBox 8"/>
+              <a:t>secure_run_v2 DOMINATES 99% — write phase nyaris tidak scale dengan warehouse size</a:t>
+            </a:r>
+          </a:p>
+        </p:txBody>
+      </p:sp>
+      <p:sp>
+        <p:nvSpPr>
+          <p:cNvPr id="28" name="TextBox 27"/>
           <p:cNvSpPr txBox="1"/>
           <p:nvPr/>
         </p:nvSpPr>
@@ -42465,7 +43678,7 @@
                 </a:solidFill>
                 <a:latin typeface="Segoe UI"/>
               </a:rPr>
-              <a:t>DCR Collaboration API v2 | SFSEAPAC | 2026   ·   53 / 56</a:t>
+              <a:t>DCR Collaboration API v2 | SFSEAPAC | 2026   ·   53 / 60</a:t>
             </a:r>
           </a:p>
         </p:txBody>
@@ -42683,7 +43896,7 @@
                 </a:solidFill>
                 <a:latin typeface="Calibri Light"/>
               </a:rPr>
-              <a:t>References &amp; Code Repository</a:t>
+              <a:t>Master Benchmark Matrix — All 8 Configurations</a:t>
             </a:r>
           </a:p>
         </p:txBody>
@@ -42725,100 +43938,14 @@
       </p:cxnSp>
       <p:sp>
         <p:nvSpPr>
-          <p:cNvPr id="8" name="Rounded Rectangle 7"/>
-          <p:cNvSpPr/>
-          <p:nvPr/>
-        </p:nvSpPr>
-        <p:spPr>
-          <a:xfrm>
-            <a:off x="640080" y="1554480"/>
-            <a:ext cx="10911535" cy="804672"/>
-          </a:xfrm>
-          <a:prstGeom prst="roundRect">
-            <a:avLst/>
-          </a:prstGeom>
-          <a:solidFill>
-            <a:srgbClr val="EEF5FA"/>
-          </a:solidFill>
-          <a:ln>
-            <a:noFill/>
-          </a:ln>
-        </p:spPr>
-        <p:style>
-          <a:lnRef idx="1">
-            <a:schemeClr val="accent1"/>
-          </a:lnRef>
-          <a:fillRef idx="3">
-            <a:schemeClr val="accent1"/>
-          </a:fillRef>
-          <a:effectRef idx="2">
-            <a:schemeClr val="accent1"/>
-          </a:effectRef>
-          <a:fontRef idx="minor">
-            <a:schemeClr val="lt1"/>
-          </a:fontRef>
-        </p:style>
-        <p:txBody>
-          <a:bodyPr rtlCol="0" anchor="ctr"/>
-          <a:lstStyle/>
-          <a:p>
-            <a:pPr algn="ctr"/>
-          </a:p>
-        </p:txBody>
-      </p:sp>
-      <p:sp>
-        <p:nvSpPr>
-          <p:cNvPr id="9" name="Oval 8"/>
-          <p:cNvSpPr/>
-          <p:nvPr/>
-        </p:nvSpPr>
-        <p:spPr>
-          <a:xfrm>
-            <a:off x="914400" y="1691640"/>
-            <a:ext cx="411480" cy="411480"/>
-          </a:xfrm>
-          <a:prstGeom prst="ellipse">
-            <a:avLst/>
-          </a:prstGeom>
-          <a:solidFill>
-            <a:srgbClr val="29B5E8"/>
-          </a:solidFill>
-          <a:ln>
-            <a:noFill/>
-          </a:ln>
-        </p:spPr>
-        <p:style>
-          <a:lnRef idx="1">
-            <a:schemeClr val="accent1"/>
-          </a:lnRef>
-          <a:fillRef idx="3">
-            <a:schemeClr val="accent1"/>
-          </a:fillRef>
-          <a:effectRef idx="2">
-            <a:schemeClr val="accent1"/>
-          </a:effectRef>
-          <a:fontRef idx="minor">
-            <a:schemeClr val="lt1"/>
-          </a:fontRef>
-        </p:style>
-        <p:txBody>
-          <a:bodyPr rtlCol="0" anchor="ctr"/>
-          <a:lstStyle/>
-          <a:p>
-            <a:pPr algn="ctr"/>
-          </a:p>
-        </p:txBody>
-      </p:sp>
-      <p:sp>
-        <p:nvSpPr>
-          <p:cNvPr id="10" name="TextBox 9"/>
+          <p:cNvPr id="8" name="TextBox 7"/>
           <p:cNvSpPr txBox="1"/>
           <p:nvPr/>
         </p:nvSpPr>
         <p:spPr>
           <a:xfrm>
-            <a:off x="914400" y="1691640"/>
-            <a:ext cx="411480" cy="411480"/>
+            <a:off x="731520" y="1508760"/>
+            <a:ext cx="10515600" cy="4754880"/>
           </a:xfrm>
           <a:prstGeom prst="rect">
             <a:avLst/>
@@ -42826,726 +43953,239 @@
           <a:noFill/>
         </p:spPr>
         <p:txBody>
-          <a:bodyPr wrap="square" lIns="73152" rIns="73152" tIns="36576" bIns="36576" anchor="ctr">
+          <a:bodyPr wrap="square" lIns="73152" rIns="73152">
             <a:spAutoFit/>
           </a:bodyPr>
           <a:lstStyle/>
           <a:p>
-            <a:pPr algn="ctr">
-              <a:lnSpc>
-                <a:spcPts val="1600"/>
-              </a:lnSpc>
-            </a:pPr>
-            <a:r>
-              <a:rPr sz="1300" b="1" i="0">
-                <a:solidFill>
-                  <a:srgbClr val="FFFFFF"/>
-                </a:solidFill>
-                <a:latin typeface="Segoe UI"/>
-              </a:rPr>
-              <a:t>01</a:t>
-            </a:r>
-          </a:p>
-        </p:txBody>
-      </p:sp>
-      <p:sp>
-        <p:nvSpPr>
-          <p:cNvPr id="11" name="TextBox 10"/>
-          <p:cNvSpPr txBox="1"/>
-          <p:nvPr/>
-        </p:nvSpPr>
-        <p:spPr>
-          <a:xfrm>
-            <a:off x="1554480" y="1627632"/>
-            <a:ext cx="9601200" cy="768096"/>
-          </a:xfrm>
-          <a:prstGeom prst="rect">
-            <a:avLst/>
-          </a:prstGeom>
-          <a:noFill/>
-        </p:spPr>
-        <p:txBody>
-          <a:bodyPr wrap="square" lIns="73152" rIns="73152" tIns="36576" bIns="36576" anchor="ctr">
-            <a:spAutoFit/>
-          </a:bodyPr>
-          <a:lstStyle/>
-          <a:p>
-            <a:pPr algn="l">
-              <a:lnSpc>
-                <a:spcPts val="2000"/>
-              </a:lnSpc>
-            </a:pPr>
-            <a:r>
-              <a:rPr sz="1600" b="0" i="0">
+            <a:pPr>
+              <a:lnSpc>
+                <a:spcPts val="2500"/>
+              </a:lnSpc>
+              <a:spcAft>
+                <a:spcPts val="1000"/>
+              </a:spcAft>
+            </a:pPr>
+            <a:r>
+              <a:rPr sz="800">
+                <a:solidFill>
+                  <a:srgbClr val="29B5E8"/>
+                </a:solidFill>
+                <a:latin typeface="Segoe UI"/>
+              </a:rPr>
+              <a:t>●  </a:t>
+            </a:r>
+            <a:r>
+              <a:rPr sz="1600">
                 <a:solidFill>
                   <a:srgbClr val="2C3E50"/>
                 </a:solidFill>
                 <a:latin typeface="Segoe UI"/>
               </a:rPr>
-              <a:t>GitHub — https://github.com/arzamuhammad/dcr-collaboration-api</a:t>
-            </a:r>
-          </a:p>
-        </p:txBody>
-      </p:sp>
-      <p:sp>
-        <p:nvSpPr>
-          <p:cNvPr id="12" name="Rounded Rectangle 11"/>
-          <p:cNvSpPr/>
-          <p:nvPr/>
-        </p:nvSpPr>
-        <p:spPr>
-          <a:xfrm>
-            <a:off x="640080" y="2468880"/>
-            <a:ext cx="10911535" cy="804672"/>
-          </a:xfrm>
-          <a:prstGeom prst="roundRect">
-            <a:avLst/>
-          </a:prstGeom>
-          <a:solidFill>
-            <a:srgbClr val="F4F8FB"/>
-          </a:solidFill>
-          <a:ln>
-            <a:noFill/>
-          </a:ln>
-        </p:spPr>
-        <p:style>
-          <a:lnRef idx="1">
-            <a:schemeClr val="accent1"/>
-          </a:lnRef>
-          <a:fillRef idx="3">
-            <a:schemeClr val="accent1"/>
-          </a:fillRef>
-          <a:effectRef idx="2">
-            <a:schemeClr val="accent1"/>
-          </a:effectRef>
-          <a:fontRef idx="minor">
-            <a:schemeClr val="lt1"/>
-          </a:fontRef>
-        </p:style>
-        <p:txBody>
-          <a:bodyPr rtlCol="0" anchor="ctr"/>
-          <a:lstStyle/>
-          <a:p>
-            <a:pPr algn="ctr"/>
-          </a:p>
-        </p:txBody>
-      </p:sp>
-      <p:sp>
-        <p:nvSpPr>
-          <p:cNvPr id="13" name="Oval 12"/>
-          <p:cNvSpPr/>
-          <p:nvPr/>
-        </p:nvSpPr>
-        <p:spPr>
-          <a:xfrm>
-            <a:off x="914400" y="2606040"/>
-            <a:ext cx="411480" cy="411480"/>
-          </a:xfrm>
-          <a:prstGeom prst="ellipse">
-            <a:avLst/>
-          </a:prstGeom>
-          <a:solidFill>
-            <a:srgbClr val="11567F"/>
-          </a:solidFill>
-          <a:ln>
-            <a:noFill/>
-          </a:ln>
-        </p:spPr>
-        <p:style>
-          <a:lnRef idx="1">
-            <a:schemeClr val="accent1"/>
-          </a:lnRef>
-          <a:fillRef idx="3">
-            <a:schemeClr val="accent1"/>
-          </a:fillRef>
-          <a:effectRef idx="2">
-            <a:schemeClr val="accent1"/>
-          </a:effectRef>
-          <a:fontRef idx="minor">
-            <a:schemeClr val="lt1"/>
-          </a:fontRef>
-        </p:style>
-        <p:txBody>
-          <a:bodyPr rtlCol="0" anchor="ctr"/>
-          <a:lstStyle/>
-          <a:p>
-            <a:pPr algn="ctr"/>
-          </a:p>
-        </p:txBody>
-      </p:sp>
-      <p:sp>
-        <p:nvSpPr>
-          <p:cNvPr id="14" name="TextBox 13"/>
-          <p:cNvSpPr txBox="1"/>
-          <p:nvPr/>
-        </p:nvSpPr>
-        <p:spPr>
-          <a:xfrm>
-            <a:off x="914400" y="2606040"/>
-            <a:ext cx="411480" cy="411480"/>
-          </a:xfrm>
-          <a:prstGeom prst="rect">
-            <a:avLst/>
-          </a:prstGeom>
-          <a:noFill/>
-        </p:spPr>
-        <p:txBody>
-          <a:bodyPr wrap="square" lIns="73152" rIns="73152" tIns="36576" bIns="36576" anchor="ctr">
-            <a:spAutoFit/>
-          </a:bodyPr>
-          <a:lstStyle/>
-          <a:p>
-            <a:pPr algn="ctr">
-              <a:lnSpc>
-                <a:spcPts val="1600"/>
-              </a:lnSpc>
-            </a:pPr>
-            <a:r>
-              <a:rPr sz="1300" b="1" i="0">
-                <a:solidFill>
-                  <a:srgbClr val="FFFFFF"/>
-                </a:solidFill>
-                <a:latin typeface="Segoe UI"/>
-              </a:rPr>
-              <a:t>02</a:t>
-            </a:r>
-          </a:p>
-        </p:txBody>
-      </p:sp>
-      <p:sp>
-        <p:nvSpPr>
-          <p:cNvPr id="15" name="TextBox 14"/>
-          <p:cNvSpPr txBox="1"/>
-          <p:nvPr/>
-        </p:nvSpPr>
-        <p:spPr>
-          <a:xfrm>
-            <a:off x="1554480" y="2542032"/>
-            <a:ext cx="9601200" cy="768096"/>
-          </a:xfrm>
-          <a:prstGeom prst="rect">
-            <a:avLst/>
-          </a:prstGeom>
-          <a:noFill/>
-        </p:spPr>
-        <p:txBody>
-          <a:bodyPr wrap="square" lIns="73152" rIns="73152" tIns="36576" bIns="36576" anchor="ctr">
-            <a:spAutoFit/>
-          </a:bodyPr>
-          <a:lstStyle/>
-          <a:p>
-            <a:pPr algn="l">
-              <a:lnSpc>
-                <a:spcPts val="2000"/>
-              </a:lnSpc>
-            </a:pPr>
-            <a:r>
-              <a:rPr sz="1600" b="0" i="0">
+              <a:t>1-part analysis 6 cols @ XL — 39 s, 0.17 credits, $0.67</a:t>
+            </a:r>
+          </a:p>
+          <a:p>
+            <a:pPr>
+              <a:lnSpc>
+                <a:spcPts val="2500"/>
+              </a:lnSpc>
+              <a:spcAft>
+                <a:spcPts val="1000"/>
+              </a:spcAft>
+            </a:pPr>
+            <a:r>
+              <a:rPr sz="800">
+                <a:solidFill>
+                  <a:srgbClr val="29B5E8"/>
+                </a:solidFill>
+                <a:latin typeface="Segoe UI"/>
+              </a:rPr>
+              <a:t>●  </a:t>
+            </a:r>
+            <a:r>
+              <a:rPr sz="1600">
                 <a:solidFill>
                   <a:srgbClr val="2C3E50"/>
                 </a:solidFill>
                 <a:latin typeface="Segoe UI"/>
               </a:rPr>
-              <a:t>Contains — provider_workflow.sql, consumer_workflow.sql, README dengan battle-tested fixes</a:t>
-            </a:r>
-          </a:p>
-        </p:txBody>
-      </p:sp>
-      <p:sp>
-        <p:nvSpPr>
-          <p:cNvPr id="16" name="Rounded Rectangle 15"/>
-          <p:cNvSpPr/>
-          <p:nvPr/>
-        </p:nvSpPr>
-        <p:spPr>
-          <a:xfrm>
-            <a:off x="640080" y="3383280"/>
-            <a:ext cx="10911535" cy="804672"/>
-          </a:xfrm>
-          <a:prstGeom prst="roundRect">
-            <a:avLst/>
-          </a:prstGeom>
-          <a:solidFill>
-            <a:srgbClr val="EEF5FA"/>
-          </a:solidFill>
-          <a:ln>
-            <a:noFill/>
-          </a:ln>
-        </p:spPr>
-        <p:style>
-          <a:lnRef idx="1">
-            <a:schemeClr val="accent1"/>
-          </a:lnRef>
-          <a:fillRef idx="3">
-            <a:schemeClr val="accent1"/>
-          </a:fillRef>
-          <a:effectRef idx="2">
-            <a:schemeClr val="accent1"/>
-          </a:effectRef>
-          <a:fontRef idx="minor">
-            <a:schemeClr val="lt1"/>
-          </a:fontRef>
-        </p:style>
-        <p:txBody>
-          <a:bodyPr rtlCol="0" anchor="ctr"/>
-          <a:lstStyle/>
-          <a:p>
-            <a:pPr algn="ctr"/>
-          </a:p>
-        </p:txBody>
-      </p:sp>
-      <p:sp>
-        <p:nvSpPr>
-          <p:cNvPr id="17" name="Oval 16"/>
-          <p:cNvSpPr/>
-          <p:nvPr/>
-        </p:nvSpPr>
-        <p:spPr>
-          <a:xfrm>
-            <a:off x="914400" y="3520440"/>
-            <a:ext cx="411480" cy="411480"/>
-          </a:xfrm>
-          <a:prstGeom prst="ellipse">
-            <a:avLst/>
-          </a:prstGeom>
-          <a:solidFill>
-            <a:srgbClr val="71D3DC"/>
-          </a:solidFill>
-          <a:ln>
-            <a:noFill/>
-          </a:ln>
-        </p:spPr>
-        <p:style>
-          <a:lnRef idx="1">
-            <a:schemeClr val="accent1"/>
-          </a:lnRef>
-          <a:fillRef idx="3">
-            <a:schemeClr val="accent1"/>
-          </a:fillRef>
-          <a:effectRef idx="2">
-            <a:schemeClr val="accent1"/>
-          </a:effectRef>
-          <a:fontRef idx="minor">
-            <a:schemeClr val="lt1"/>
-          </a:fontRef>
-        </p:style>
-        <p:txBody>
-          <a:bodyPr rtlCol="0" anchor="ctr"/>
-          <a:lstStyle/>
-          <a:p>
-            <a:pPr algn="ctr"/>
-          </a:p>
-        </p:txBody>
-      </p:sp>
-      <p:sp>
-        <p:nvSpPr>
-          <p:cNvPr id="18" name="TextBox 17"/>
-          <p:cNvSpPr txBox="1"/>
-          <p:nvPr/>
-        </p:nvSpPr>
-        <p:spPr>
-          <a:xfrm>
-            <a:off x="914400" y="3520440"/>
-            <a:ext cx="411480" cy="411480"/>
-          </a:xfrm>
-          <a:prstGeom prst="rect">
-            <a:avLst/>
-          </a:prstGeom>
-          <a:noFill/>
-        </p:spPr>
-        <p:txBody>
-          <a:bodyPr wrap="square" lIns="73152" rIns="73152" tIns="36576" bIns="36576" anchor="ctr">
-            <a:spAutoFit/>
-          </a:bodyPr>
-          <a:lstStyle/>
-          <a:p>
-            <a:pPr algn="ctr">
-              <a:lnSpc>
-                <a:spcPts val="1600"/>
-              </a:lnSpc>
-            </a:pPr>
-            <a:r>
-              <a:rPr sz="1300" b="1" i="0">
-                <a:solidFill>
-                  <a:srgbClr val="FFFFFF"/>
-                </a:solidFill>
-                <a:latin typeface="Segoe UI"/>
-              </a:rPr>
-              <a:t>03</a:t>
-            </a:r>
-          </a:p>
-        </p:txBody>
-      </p:sp>
-      <p:sp>
-        <p:nvSpPr>
-          <p:cNvPr id="19" name="TextBox 18"/>
-          <p:cNvSpPr txBox="1"/>
-          <p:nvPr/>
-        </p:nvSpPr>
-        <p:spPr>
-          <a:xfrm>
-            <a:off x="1554480" y="3456432"/>
-            <a:ext cx="9601200" cy="768096"/>
-          </a:xfrm>
-          <a:prstGeom prst="rect">
-            <a:avLst/>
-          </a:prstGeom>
-          <a:noFill/>
-        </p:spPr>
-        <p:txBody>
-          <a:bodyPr wrap="square" lIns="73152" rIns="73152" tIns="36576" bIns="36576" anchor="ctr">
-            <a:spAutoFit/>
-          </a:bodyPr>
-          <a:lstStyle/>
-          <a:p>
-            <a:pPr algn="l">
-              <a:lnSpc>
-                <a:spcPts val="2000"/>
-              </a:lnSpc>
-            </a:pPr>
-            <a:r>
-              <a:rPr sz="1600" b="0" i="0">
+              <a:t>8-part analysis 6 cols @ XL — 57 s, 0.25 credits, $0.99</a:t>
+            </a:r>
+          </a:p>
+          <a:p>
+            <a:pPr>
+              <a:lnSpc>
+                <a:spcPts val="2500"/>
+              </a:lnSpc>
+              <a:spcAft>
+                <a:spcPts val="1000"/>
+              </a:spcAft>
+            </a:pPr>
+            <a:r>
+              <a:rPr sz="800">
+                <a:solidFill>
+                  <a:srgbClr val="29B5E8"/>
+                </a:solidFill>
+                <a:latin typeface="Segoe UI"/>
+              </a:rPr>
+              <a:t>●  </a:t>
+            </a:r>
+            <a:r>
+              <a:rPr sz="1600">
                 <a:solidFill>
                   <a:srgbClr val="2C3E50"/>
                 </a:solidFill>
                 <a:latin typeface="Segoe UI"/>
               </a:rPr>
-              <a:t>Snowflake Docs — docs.snowflake.com/en/user-guide/cleanrooms/v2/about</a:t>
-            </a:r>
-          </a:p>
-        </p:txBody>
-      </p:sp>
-      <p:sp>
-        <p:nvSpPr>
-          <p:cNvPr id="20" name="Rounded Rectangle 19"/>
-          <p:cNvSpPr/>
-          <p:nvPr/>
-        </p:nvSpPr>
-        <p:spPr>
-          <a:xfrm>
-            <a:off x="640080" y="4297680"/>
-            <a:ext cx="10911535" cy="804672"/>
-          </a:xfrm>
-          <a:prstGeom prst="roundRect">
-            <a:avLst/>
-          </a:prstGeom>
-          <a:solidFill>
-            <a:srgbClr val="F4F8FB"/>
-          </a:solidFill>
-          <a:ln>
-            <a:noFill/>
-          </a:ln>
-        </p:spPr>
-        <p:style>
-          <a:lnRef idx="1">
-            <a:schemeClr val="accent1"/>
-          </a:lnRef>
-          <a:fillRef idx="3">
-            <a:schemeClr val="accent1"/>
-          </a:fillRef>
-          <a:effectRef idx="2">
-            <a:schemeClr val="accent1"/>
-          </a:effectRef>
-          <a:fontRef idx="minor">
-            <a:schemeClr val="lt1"/>
-          </a:fontRef>
-        </p:style>
-        <p:txBody>
-          <a:bodyPr rtlCol="0" anchor="ctr"/>
-          <a:lstStyle/>
-          <a:p>
-            <a:pPr algn="ctr"/>
-          </a:p>
-        </p:txBody>
-      </p:sp>
-      <p:sp>
-        <p:nvSpPr>
-          <p:cNvPr id="21" name="Oval 20"/>
-          <p:cNvSpPr/>
-          <p:nvPr/>
-        </p:nvSpPr>
-        <p:spPr>
-          <a:xfrm>
-            <a:off x="914400" y="4434840"/>
-            <a:ext cx="411480" cy="411480"/>
-          </a:xfrm>
-          <a:prstGeom prst="ellipse">
-            <a:avLst/>
-          </a:prstGeom>
-          <a:solidFill>
-            <a:srgbClr val="FF9F36"/>
-          </a:solidFill>
-          <a:ln>
-            <a:noFill/>
-          </a:ln>
-        </p:spPr>
-        <p:style>
-          <a:lnRef idx="1">
-            <a:schemeClr val="accent1"/>
-          </a:lnRef>
-          <a:fillRef idx="3">
-            <a:schemeClr val="accent1"/>
-          </a:fillRef>
-          <a:effectRef idx="2">
-            <a:schemeClr val="accent1"/>
-          </a:effectRef>
-          <a:fontRef idx="minor">
-            <a:schemeClr val="lt1"/>
-          </a:fontRef>
-        </p:style>
-        <p:txBody>
-          <a:bodyPr rtlCol="0" anchor="ctr"/>
-          <a:lstStyle/>
-          <a:p>
-            <a:pPr algn="ctr"/>
-          </a:p>
-        </p:txBody>
-      </p:sp>
-      <p:sp>
-        <p:nvSpPr>
-          <p:cNvPr id="22" name="TextBox 21"/>
-          <p:cNvSpPr txBox="1"/>
-          <p:nvPr/>
-        </p:nvSpPr>
-        <p:spPr>
-          <a:xfrm>
-            <a:off x="914400" y="4434840"/>
-            <a:ext cx="411480" cy="411480"/>
-          </a:xfrm>
-          <a:prstGeom prst="rect">
-            <a:avLst/>
-          </a:prstGeom>
-          <a:noFill/>
-        </p:spPr>
-        <p:txBody>
-          <a:bodyPr wrap="square" lIns="73152" rIns="73152" tIns="36576" bIns="36576" anchor="ctr">
-            <a:spAutoFit/>
-          </a:bodyPr>
-          <a:lstStyle/>
-          <a:p>
-            <a:pPr algn="ctr">
-              <a:lnSpc>
-                <a:spcPts val="1600"/>
-              </a:lnSpc>
-            </a:pPr>
-            <a:r>
-              <a:rPr sz="1300" b="1" i="0">
-                <a:solidFill>
-                  <a:srgbClr val="FFFFFF"/>
-                </a:solidFill>
-                <a:latin typeface="Segoe UI"/>
-              </a:rPr>
-              <a:t>04</a:t>
-            </a:r>
-          </a:p>
-        </p:txBody>
-      </p:sp>
-      <p:sp>
-        <p:nvSpPr>
-          <p:cNvPr id="23" name="TextBox 22"/>
-          <p:cNvSpPr txBox="1"/>
-          <p:nvPr/>
-        </p:nvSpPr>
-        <p:spPr>
-          <a:xfrm>
-            <a:off x="1554480" y="4370832"/>
-            <a:ext cx="9601200" cy="768096"/>
-          </a:xfrm>
-          <a:prstGeom prst="rect">
-            <a:avLst/>
-          </a:prstGeom>
-          <a:noFill/>
-        </p:spPr>
-        <p:txBody>
-          <a:bodyPr wrap="square" lIns="73152" rIns="73152" tIns="36576" bIns="36576" anchor="ctr">
-            <a:spAutoFit/>
-          </a:bodyPr>
-          <a:lstStyle/>
-          <a:p>
-            <a:pPr algn="l">
-              <a:lnSpc>
-                <a:spcPts val="2000"/>
-              </a:lnSpc>
-            </a:pPr>
-            <a:r>
-              <a:rPr sz="1600" b="0" i="0">
+              <a:t>1-part activation 6 cols @ XL — 79 s, 0.35 credits, $1.37</a:t>
+            </a:r>
+          </a:p>
+          <a:p>
+            <a:pPr>
+              <a:lnSpc>
+                <a:spcPts val="2500"/>
+              </a:lnSpc>
+              <a:spcAft>
+                <a:spcPts val="1000"/>
+              </a:spcAft>
+            </a:pPr>
+            <a:r>
+              <a:rPr sz="800">
+                <a:solidFill>
+                  <a:srgbClr val="29B5E8"/>
+                </a:solidFill>
+                <a:latin typeface="Segoe UI"/>
+              </a:rPr>
+              <a:t>●  </a:t>
+            </a:r>
+            <a:r>
+              <a:rPr sz="1600">
                 <a:solidFill>
                   <a:srgbClr val="2C3E50"/>
                 </a:solidFill>
                 <a:latin typeface="Segoe UI"/>
               </a:rPr>
-              <a:t>Spec Reference — docs.snowflake.com/en/user-guide/cleanrooms/v2/spec-reference</a:t>
-            </a:r>
-          </a:p>
-        </p:txBody>
-      </p:sp>
-      <p:sp>
-        <p:nvSpPr>
-          <p:cNvPr id="24" name="Rounded Rectangle 23"/>
-          <p:cNvSpPr/>
-          <p:nvPr/>
-        </p:nvSpPr>
-        <p:spPr>
-          <a:xfrm>
-            <a:off x="640080" y="5212080"/>
-            <a:ext cx="10911535" cy="804672"/>
-          </a:xfrm>
-          <a:prstGeom prst="roundRect">
-            <a:avLst/>
-          </a:prstGeom>
-          <a:solidFill>
-            <a:srgbClr val="EEF5FA"/>
-          </a:solidFill>
-          <a:ln>
-            <a:noFill/>
-          </a:ln>
-        </p:spPr>
-        <p:style>
-          <a:lnRef idx="1">
-            <a:schemeClr val="accent1"/>
-          </a:lnRef>
-          <a:fillRef idx="3">
-            <a:schemeClr val="accent1"/>
-          </a:fillRef>
-          <a:effectRef idx="2">
-            <a:schemeClr val="accent1"/>
-          </a:effectRef>
-          <a:fontRef idx="minor">
-            <a:schemeClr val="lt1"/>
-          </a:fontRef>
-        </p:style>
-        <p:txBody>
-          <a:bodyPr rtlCol="0" anchor="ctr"/>
-          <a:lstStyle/>
-          <a:p>
-            <a:pPr algn="ctr"/>
-          </a:p>
-        </p:txBody>
-      </p:sp>
-      <p:sp>
-        <p:nvSpPr>
-          <p:cNvPr id="25" name="Oval 24"/>
-          <p:cNvSpPr/>
-          <p:nvPr/>
-        </p:nvSpPr>
-        <p:spPr>
-          <a:xfrm>
-            <a:off x="914400" y="5349240"/>
-            <a:ext cx="411480" cy="411480"/>
-          </a:xfrm>
-          <a:prstGeom prst="ellipse">
-            <a:avLst/>
-          </a:prstGeom>
-          <a:solidFill>
-            <a:srgbClr val="29B5E8"/>
-          </a:solidFill>
-          <a:ln>
-            <a:noFill/>
-          </a:ln>
-        </p:spPr>
-        <p:style>
-          <a:lnRef idx="1">
-            <a:schemeClr val="accent1"/>
-          </a:lnRef>
-          <a:fillRef idx="3">
-            <a:schemeClr val="accent1"/>
-          </a:fillRef>
-          <a:effectRef idx="2">
-            <a:schemeClr val="accent1"/>
-          </a:effectRef>
-          <a:fontRef idx="minor">
-            <a:schemeClr val="lt1"/>
-          </a:fontRef>
-        </p:style>
-        <p:txBody>
-          <a:bodyPr rtlCol="0" anchor="ctr"/>
-          <a:lstStyle/>
-          <a:p>
-            <a:pPr algn="ctr"/>
-          </a:p>
-        </p:txBody>
-      </p:sp>
-      <p:sp>
-        <p:nvSpPr>
-          <p:cNvPr id="26" name="TextBox 25"/>
-          <p:cNvSpPr txBox="1"/>
-          <p:nvPr/>
-        </p:nvSpPr>
-        <p:spPr>
-          <a:xfrm>
-            <a:off x="914400" y="5349240"/>
-            <a:ext cx="411480" cy="411480"/>
-          </a:xfrm>
-          <a:prstGeom prst="rect">
-            <a:avLst/>
-          </a:prstGeom>
-          <a:noFill/>
-        </p:spPr>
-        <p:txBody>
-          <a:bodyPr wrap="square" lIns="73152" rIns="73152" tIns="36576" bIns="36576" anchor="ctr">
-            <a:spAutoFit/>
-          </a:bodyPr>
-          <a:lstStyle/>
-          <a:p>
-            <a:pPr algn="ctr">
-              <a:lnSpc>
-                <a:spcPts val="1600"/>
-              </a:lnSpc>
-            </a:pPr>
-            <a:r>
-              <a:rPr sz="1300" b="1" i="0">
-                <a:solidFill>
-                  <a:srgbClr val="FFFFFF"/>
-                </a:solidFill>
-                <a:latin typeface="Segoe UI"/>
-              </a:rPr>
-              <a:t>05</a:t>
-            </a:r>
-          </a:p>
-        </p:txBody>
-      </p:sp>
-      <p:sp>
-        <p:nvSpPr>
-          <p:cNvPr id="27" name="TextBox 26"/>
-          <p:cNvSpPr txBox="1"/>
-          <p:nvPr/>
-        </p:nvSpPr>
-        <p:spPr>
-          <a:xfrm>
-            <a:off x="1554480" y="5285232"/>
-            <a:ext cx="9601200" cy="768096"/>
-          </a:xfrm>
-          <a:prstGeom prst="rect">
-            <a:avLst/>
-          </a:prstGeom>
-          <a:noFill/>
-        </p:spPr>
-        <p:txBody>
-          <a:bodyPr wrap="square" lIns="73152" rIns="73152" tIns="36576" bIns="36576" anchor="ctr">
-            <a:spAutoFit/>
-          </a:bodyPr>
-          <a:lstStyle/>
-          <a:p>
-            <a:pPr algn="l">
-              <a:lnSpc>
-                <a:spcPts val="2000"/>
-              </a:lnSpc>
-            </a:pPr>
-            <a:r>
-              <a:rPr sz="1600" b="0" i="0">
+              <a:t>8-part activation 6 cols @ XL — 79 s, 0.35 credits, $1.37</a:t>
+            </a:r>
+          </a:p>
+          <a:p>
+            <a:pPr>
+              <a:lnSpc>
+                <a:spcPts val="2500"/>
+              </a:lnSpc>
+              <a:spcAft>
+                <a:spcPts val="1000"/>
+              </a:spcAft>
+            </a:pPr>
+            <a:r>
+              <a:rPr sz="800">
+                <a:solidFill>
+                  <a:srgbClr val="29B5E8"/>
+                </a:solidFill>
+                <a:latin typeface="Segoe UI"/>
+              </a:rPr>
+              <a:t>●  </a:t>
+            </a:r>
+            <a:r>
+              <a:rPr sz="1600">
                 <a:solidFill>
                   <a:srgbClr val="2C3E50"/>
                 </a:solidFill>
                 <a:latin typeface="Segoe UI"/>
               </a:rPr>
-              <a:t>API Reference — docs.snowflake.com/en/user-guide/cleanrooms/v2/v2-api-reference</a:t>
-            </a:r>
-          </a:p>
-        </p:txBody>
-      </p:sp>
-      <p:sp>
-        <p:nvSpPr>
-          <p:cNvPr id="28" name="TextBox 27"/>
+              <a:t>1-part activation 1007 cols @ XL — 71 min, 19.04 credits, $74.3</a:t>
+            </a:r>
+          </a:p>
+          <a:p>
+            <a:pPr>
+              <a:lnSpc>
+                <a:spcPts val="2500"/>
+              </a:lnSpc>
+              <a:spcAft>
+                <a:spcPts val="1000"/>
+              </a:spcAft>
+            </a:pPr>
+            <a:r>
+              <a:rPr sz="800">
+                <a:solidFill>
+                  <a:srgbClr val="29B5E8"/>
+                </a:solidFill>
+                <a:latin typeface="Segoe UI"/>
+              </a:rPr>
+              <a:t>●  </a:t>
+            </a:r>
+            <a:r>
+              <a:rPr sz="1600">
+                <a:solidFill>
+                  <a:srgbClr val="2C3E50"/>
+                </a:solidFill>
+                <a:latin typeface="Segoe UI"/>
+              </a:rPr>
+              <a:t>8-part activation 1007 cols @ XL — 83 min, 22.2 credits, $86.6</a:t>
+            </a:r>
+          </a:p>
+          <a:p>
+            <a:pPr>
+              <a:lnSpc>
+                <a:spcPts val="2500"/>
+              </a:lnSpc>
+              <a:spcAft>
+                <a:spcPts val="1000"/>
+              </a:spcAft>
+            </a:pPr>
+            <a:r>
+              <a:rPr sz="800">
+                <a:solidFill>
+                  <a:srgbClr val="29B5E8"/>
+                </a:solidFill>
+                <a:latin typeface="Segoe UI"/>
+              </a:rPr>
+              <a:t>●  </a:t>
+            </a:r>
+            <a:r>
+              <a:rPr sz="1600">
+                <a:solidFill>
+                  <a:srgbClr val="2C3E50"/>
+                </a:solidFill>
+                <a:latin typeface="Segoe UI"/>
+              </a:rPr>
+              <a:t>8-part activation 1007 cols @ 2XL — 45 min, 23.8 credits, $93.0</a:t>
+            </a:r>
+          </a:p>
+          <a:p>
+            <a:pPr>
+              <a:lnSpc>
+                <a:spcPts val="2500"/>
+              </a:lnSpc>
+              <a:spcAft>
+                <a:spcPts val="1000"/>
+              </a:spcAft>
+            </a:pPr>
+            <a:r>
+              <a:rPr sz="800">
+                <a:solidFill>
+                  <a:srgbClr val="29B5E8"/>
+                </a:solidFill>
+                <a:latin typeface="Segoe UI"/>
+              </a:rPr>
+              <a:t>●  </a:t>
+            </a:r>
+            <a:r>
+              <a:rPr sz="1600">
+                <a:solidFill>
+                  <a:srgbClr val="2C3E50"/>
+                </a:solidFill>
+                <a:latin typeface="Segoe UI"/>
+              </a:rPr>
+              <a:t>1-part activation 1007 cols @ 2XL — 38 min, 20.35 credits, $79.4 ← NEW</a:t>
+            </a:r>
+          </a:p>
+        </p:txBody>
+      </p:sp>
+      <p:sp>
+        <p:nvSpPr>
+          <p:cNvPr id="9" name="TextBox 8"/>
           <p:cNvSpPr txBox="1"/>
           <p:nvPr/>
         </p:nvSpPr>
@@ -43577,7 +44217,7 @@
                 </a:solidFill>
                 <a:latin typeface="Segoe UI"/>
               </a:rPr>
-              <a:t>DCR Collaboration API v2 | SFSEAPAC | 2026   ·   54 / 56</a:t>
+              <a:t>DCR Collaboration API v2 | SFSEAPAC | 2026   ·   54 / 60</a:t>
             </a:r>
           </a:p>
         </p:txBody>
@@ -43591,6 +44231,3120 @@
 </file>
 
 <file path=ppt/slides/slide55.xml><?xml version="1.0" encoding="utf-8"?>
+<p:sld xmlns:a="http://schemas.openxmlformats.org/drawingml/2006/main" xmlns:p="http://schemas.openxmlformats.org/presentationml/2006/main" xmlns:r="http://schemas.openxmlformats.org/officeDocument/2006/relationships">
+  <p:cSld>
+    <p:bg>
+      <p:bgPr>
+        <a:solidFill>
+          <a:srgbClr val="1B2A3D"/>
+        </a:solidFill>
+        <a:effectLst/>
+      </p:bgPr>
+    </p:bg>
+    <p:spTree>
+      <p:nvGrpSpPr>
+        <p:cNvPr id="1" name=""/>
+        <p:cNvGrpSpPr/>
+        <p:nvPr/>
+      </p:nvGrpSpPr>
+      <p:grpSpPr/>
+      <p:sp>
+        <p:nvSpPr>
+          <p:cNvPr id="2" name="Oval 1"/>
+          <p:cNvSpPr/>
+          <p:nvPr/>
+        </p:nvSpPr>
+        <p:spPr>
+          <a:xfrm>
+            <a:off x="9905695" y="-731520"/>
+            <a:ext cx="2743200" cy="2743200"/>
+          </a:xfrm>
+          <a:prstGeom prst="ellipse">
+            <a:avLst/>
+          </a:prstGeom>
+          <a:solidFill>
+            <a:srgbClr val="223850"/>
+          </a:solidFill>
+          <a:ln>
+            <a:noFill/>
+          </a:ln>
+        </p:spPr>
+        <p:style>
+          <a:lnRef idx="1">
+            <a:schemeClr val="accent1"/>
+          </a:lnRef>
+          <a:fillRef idx="3">
+            <a:schemeClr val="accent1"/>
+          </a:fillRef>
+          <a:effectRef idx="2">
+            <a:schemeClr val="accent1"/>
+          </a:effectRef>
+          <a:fontRef idx="minor">
+            <a:schemeClr val="lt1"/>
+          </a:fontRef>
+        </p:style>
+        <p:txBody>
+          <a:bodyPr rtlCol="0" anchor="ctr"/>
+          <a:lstStyle/>
+          <a:p>
+            <a:pPr algn="ctr"/>
+          </a:p>
+        </p:txBody>
+      </p:sp>
+      <p:sp>
+        <p:nvSpPr>
+          <p:cNvPr id="3" name="Oval 2"/>
+          <p:cNvSpPr/>
+          <p:nvPr/>
+        </p:nvSpPr>
+        <p:spPr>
+          <a:xfrm>
+            <a:off x="8076895" y="5486400"/>
+            <a:ext cx="1828800" cy="1828800"/>
+          </a:xfrm>
+          <a:prstGeom prst="ellipse">
+            <a:avLst/>
+          </a:prstGeom>
+          <a:solidFill>
+            <a:srgbClr val="1F344C"/>
+          </a:solidFill>
+          <a:ln>
+            <a:noFill/>
+          </a:ln>
+        </p:spPr>
+        <p:style>
+          <a:lnRef idx="1">
+            <a:schemeClr val="accent1"/>
+          </a:lnRef>
+          <a:fillRef idx="3">
+            <a:schemeClr val="accent1"/>
+          </a:fillRef>
+          <a:effectRef idx="2">
+            <a:schemeClr val="accent1"/>
+          </a:effectRef>
+          <a:fontRef idx="minor">
+            <a:schemeClr val="lt1"/>
+          </a:fontRef>
+        </p:style>
+        <p:txBody>
+          <a:bodyPr rtlCol="0" anchor="ctr"/>
+          <a:lstStyle/>
+          <a:p>
+            <a:pPr algn="ctr"/>
+          </a:p>
+        </p:txBody>
+      </p:sp>
+      <p:sp>
+        <p:nvSpPr>
+          <p:cNvPr id="4" name="Oval 3"/>
+          <p:cNvSpPr/>
+          <p:nvPr/>
+        </p:nvSpPr>
+        <p:spPr>
+          <a:xfrm>
+            <a:off x="-457200" y="4572000"/>
+            <a:ext cx="1371600" cy="1371600"/>
+          </a:xfrm>
+          <a:prstGeom prst="ellipse">
+            <a:avLst/>
+          </a:prstGeom>
+          <a:solidFill>
+            <a:srgbClr val="20354D"/>
+          </a:solidFill>
+          <a:ln>
+            <a:noFill/>
+          </a:ln>
+        </p:spPr>
+        <p:style>
+          <a:lnRef idx="1">
+            <a:schemeClr val="accent1"/>
+          </a:lnRef>
+          <a:fillRef idx="3">
+            <a:schemeClr val="accent1"/>
+          </a:fillRef>
+          <a:effectRef idx="2">
+            <a:schemeClr val="accent1"/>
+          </a:effectRef>
+          <a:fontRef idx="minor">
+            <a:schemeClr val="lt1"/>
+          </a:fontRef>
+        </p:style>
+        <p:txBody>
+          <a:bodyPr rtlCol="0" anchor="ctr"/>
+          <a:lstStyle/>
+          <a:p>
+            <a:pPr algn="ctr"/>
+          </a:p>
+        </p:txBody>
+      </p:sp>
+      <p:sp>
+        <p:nvSpPr>
+          <p:cNvPr id="5" name="Rectangle 4"/>
+          <p:cNvSpPr/>
+          <p:nvPr/>
+        </p:nvSpPr>
+        <p:spPr>
+          <a:xfrm>
+            <a:off x="0" y="6793992"/>
+            <a:ext cx="12191695" cy="64008"/>
+          </a:xfrm>
+          <a:prstGeom prst="rect">
+            <a:avLst/>
+          </a:prstGeom>
+          <a:gradFill rotWithShape="1">
+            <a:gsLst>
+              <a:gs pos="0">
+                <a:srgbClr val="29B5E8"/>
+              </a:gs>
+              <a:gs pos="100000">
+                <a:srgbClr val="71D3DC"/>
+              </a:gs>
+            </a:gsLst>
+            <a:lin scaled="0" ang="16200000"/>
+          </a:gradFill>
+          <a:ln>
+            <a:noFill/>
+          </a:ln>
+        </p:spPr>
+        <p:style>
+          <a:lnRef idx="1">
+            <a:schemeClr val="accent1"/>
+          </a:lnRef>
+          <a:fillRef idx="3">
+            <a:schemeClr val="accent1"/>
+          </a:fillRef>
+          <a:effectRef idx="2">
+            <a:schemeClr val="accent1"/>
+          </a:effectRef>
+          <a:fontRef idx="minor">
+            <a:schemeClr val="lt1"/>
+          </a:fontRef>
+        </p:style>
+        <p:txBody>
+          <a:bodyPr rtlCol="0" anchor="ctr"/>
+          <a:lstStyle/>
+          <a:p>
+            <a:pPr algn="ctr"/>
+          </a:p>
+        </p:txBody>
+      </p:sp>
+      <p:pic>
+        <p:nvPicPr>
+          <p:cNvPr id="6" name="Picture 5" descr="snowflake_icon_white.png"/>
+          <p:cNvPicPr>
+            <a:picLocks noChangeAspect="1"/>
+          </p:cNvPicPr>
+          <p:nvPr/>
+        </p:nvPicPr>
+        <p:blipFill>
+          <a:blip r:embed="rId2"/>
+          <a:stretch>
+            <a:fillRect/>
+          </a:stretch>
+        </p:blipFill>
+        <p:spPr>
+          <a:xfrm>
+            <a:off x="11323015" y="320040"/>
+            <a:ext cx="449214" cy="411480"/>
+          </a:xfrm>
+          <a:prstGeom prst="rect">
+            <a:avLst/>
+          </a:prstGeom>
+        </p:spPr>
+      </p:pic>
+      <p:sp>
+        <p:nvSpPr>
+          <p:cNvPr id="7" name="Oval 6"/>
+          <p:cNvSpPr/>
+          <p:nvPr/>
+        </p:nvSpPr>
+        <p:spPr>
+          <a:xfrm>
+            <a:off x="822960" y="2103120"/>
+            <a:ext cx="457200" cy="457200"/>
+          </a:xfrm>
+          <a:prstGeom prst="ellipse">
+            <a:avLst/>
+          </a:prstGeom>
+          <a:solidFill>
+            <a:srgbClr val="29B5E8"/>
+          </a:solidFill>
+          <a:ln>
+            <a:noFill/>
+          </a:ln>
+        </p:spPr>
+        <p:style>
+          <a:lnRef idx="1">
+            <a:schemeClr val="accent1"/>
+          </a:lnRef>
+          <a:fillRef idx="3">
+            <a:schemeClr val="accent1"/>
+          </a:fillRef>
+          <a:effectRef idx="2">
+            <a:schemeClr val="accent1"/>
+          </a:effectRef>
+          <a:fontRef idx="minor">
+            <a:schemeClr val="lt1"/>
+          </a:fontRef>
+        </p:style>
+        <p:txBody>
+          <a:bodyPr rtlCol="0" anchor="ctr"/>
+          <a:lstStyle/>
+          <a:p>
+            <a:pPr algn="ctr"/>
+          </a:p>
+        </p:txBody>
+      </p:sp>
+      <p:sp>
+        <p:nvSpPr>
+          <p:cNvPr id="8" name="TextBox 7"/>
+          <p:cNvSpPr txBox="1"/>
+          <p:nvPr/>
+        </p:nvSpPr>
+        <p:spPr>
+          <a:xfrm>
+            <a:off x="822960" y="2103120"/>
+            <a:ext cx="457200" cy="457200"/>
+          </a:xfrm>
+          <a:prstGeom prst="rect">
+            <a:avLst/>
+          </a:prstGeom>
+          <a:noFill/>
+        </p:spPr>
+        <p:txBody>
+          <a:bodyPr wrap="square" lIns="73152" rIns="73152" tIns="36576" bIns="36576" anchor="ctr">
+            <a:spAutoFit/>
+          </a:bodyPr>
+          <a:lstStyle/>
+          <a:p>
+            <a:pPr algn="ctr">
+              <a:lnSpc>
+                <a:spcPts val="2300"/>
+              </a:lnSpc>
+            </a:pPr>
+            <a:r>
+              <a:rPr sz="1800" b="0" i="0">
+                <a:solidFill>
+                  <a:srgbClr val="FFFFFF"/>
+                </a:solidFill>
+                <a:latin typeface="Segoe UI"/>
+              </a:rPr>
+              <a:t>✦</a:t>
+            </a:r>
+          </a:p>
+        </p:txBody>
+      </p:sp>
+      <p:sp>
+        <p:nvSpPr>
+          <p:cNvPr id="9" name="TextBox 8"/>
+          <p:cNvSpPr txBox="1"/>
+          <p:nvPr/>
+        </p:nvSpPr>
+        <p:spPr>
+          <a:xfrm>
+            <a:off x="1554480" y="2011680"/>
+            <a:ext cx="9144000" cy="2286000"/>
+          </a:xfrm>
+          <a:prstGeom prst="rect">
+            <a:avLst/>
+          </a:prstGeom>
+          <a:noFill/>
+        </p:spPr>
+        <p:txBody>
+          <a:bodyPr wrap="square" lIns="73152" rIns="73152" tIns="36576" bIns="36576" anchor="t">
+            <a:spAutoFit/>
+          </a:bodyPr>
+          <a:lstStyle/>
+          <a:p>
+            <a:pPr algn="l">
+              <a:lnSpc>
+                <a:spcPts val="5400"/>
+              </a:lnSpc>
+            </a:pPr>
+            <a:r>
+              <a:rPr sz="5200" b="1" i="0">
+                <a:solidFill>
+                  <a:srgbClr val="FFFFFF"/>
+                </a:solidFill>
+                <a:latin typeface="Calibri Light"/>
+              </a:rPr>
+              <a:t>SUMMARY</a:t>
+            </a:r>
+          </a:p>
+        </p:txBody>
+      </p:sp>
+    </p:spTree>
+  </p:cSld>
+  <p:clrMapOvr>
+    <a:masterClrMapping/>
+  </p:clrMapOvr>
+</p:sld>
+</file>
+
+<file path=ppt/slides/slide56.xml><?xml version="1.0" encoding="utf-8"?>
+<p:sld xmlns:a="http://schemas.openxmlformats.org/drawingml/2006/main" xmlns:p="http://schemas.openxmlformats.org/presentationml/2006/main" xmlns:r="http://schemas.openxmlformats.org/officeDocument/2006/relationships">
+  <p:cSld>
+    <p:bg>
+      <p:bgPr>
+        <a:solidFill>
+          <a:srgbClr val="FFFFFF"/>
+        </a:solidFill>
+        <a:effectLst/>
+      </p:bgPr>
+    </p:bg>
+    <p:spTree>
+      <p:nvGrpSpPr>
+        <p:cNvPr id="1" name=""/>
+        <p:cNvGrpSpPr/>
+        <p:nvPr/>
+      </p:nvGrpSpPr>
+      <p:grpSpPr/>
+      <p:sp>
+        <p:nvSpPr>
+          <p:cNvPr id="2" name="Oval 1"/>
+          <p:cNvSpPr/>
+          <p:nvPr/>
+        </p:nvSpPr>
+        <p:spPr>
+          <a:xfrm>
+            <a:off x="9631375" y="-914400"/>
+            <a:ext cx="3200400" cy="3200400"/>
+          </a:xfrm>
+          <a:prstGeom prst="ellipse">
+            <a:avLst/>
+          </a:prstGeom>
+          <a:solidFill>
+            <a:srgbClr val="D6EFF8"/>
+          </a:solidFill>
+          <a:ln>
+            <a:noFill/>
+          </a:ln>
+        </p:spPr>
+        <p:style>
+          <a:lnRef idx="1">
+            <a:schemeClr val="accent1"/>
+          </a:lnRef>
+          <a:fillRef idx="3">
+            <a:schemeClr val="accent1"/>
+          </a:fillRef>
+          <a:effectRef idx="2">
+            <a:schemeClr val="accent1"/>
+          </a:effectRef>
+          <a:fontRef idx="minor">
+            <a:schemeClr val="lt1"/>
+          </a:fontRef>
+        </p:style>
+        <p:txBody>
+          <a:bodyPr rtlCol="0" anchor="ctr"/>
+          <a:lstStyle/>
+          <a:p>
+            <a:pPr algn="ctr"/>
+          </a:p>
+        </p:txBody>
+      </p:sp>
+      <p:sp>
+        <p:nvSpPr>
+          <p:cNvPr id="3" name="Oval 2"/>
+          <p:cNvSpPr/>
+          <p:nvPr/>
+        </p:nvSpPr>
+        <p:spPr>
+          <a:xfrm>
+            <a:off x="-640080" y="5029200"/>
+            <a:ext cx="1828800" cy="1828800"/>
+          </a:xfrm>
+          <a:prstGeom prst="ellipse">
+            <a:avLst/>
+          </a:prstGeom>
+          <a:solidFill>
+            <a:srgbClr val="E8F4FD"/>
+          </a:solidFill>
+          <a:ln>
+            <a:noFill/>
+          </a:ln>
+        </p:spPr>
+        <p:style>
+          <a:lnRef idx="1">
+            <a:schemeClr val="accent1"/>
+          </a:lnRef>
+          <a:fillRef idx="3">
+            <a:schemeClr val="accent1"/>
+          </a:fillRef>
+          <a:effectRef idx="2">
+            <a:schemeClr val="accent1"/>
+          </a:effectRef>
+          <a:fontRef idx="minor">
+            <a:schemeClr val="lt1"/>
+          </a:fontRef>
+        </p:style>
+        <p:txBody>
+          <a:bodyPr rtlCol="0" anchor="ctr"/>
+          <a:lstStyle/>
+          <a:p>
+            <a:pPr algn="ctr"/>
+          </a:p>
+        </p:txBody>
+      </p:sp>
+      <p:pic>
+        <p:nvPicPr>
+          <p:cNvPr id="4" name="Picture 3" descr="snowflake_icon_blue.png"/>
+          <p:cNvPicPr>
+            <a:picLocks noChangeAspect="1"/>
+          </p:cNvPicPr>
+          <p:nvPr/>
+        </p:nvPicPr>
+        <p:blipFill>
+          <a:blip r:embed="rId2"/>
+          <a:stretch>
+            <a:fillRect/>
+          </a:stretch>
+        </p:blipFill>
+        <p:spPr>
+          <a:xfrm>
+            <a:off x="11414455" y="320040"/>
+            <a:ext cx="349389" cy="320040"/>
+          </a:xfrm>
+          <a:prstGeom prst="rect">
+            <a:avLst/>
+          </a:prstGeom>
+        </p:spPr>
+      </p:pic>
+      <p:sp>
+        <p:nvSpPr>
+          <p:cNvPr id="5" name="Rectangle 4"/>
+          <p:cNvSpPr/>
+          <p:nvPr/>
+        </p:nvSpPr>
+        <p:spPr>
+          <a:xfrm>
+            <a:off x="548640" y="457200"/>
+            <a:ext cx="54864" cy="502920"/>
+          </a:xfrm>
+          <a:prstGeom prst="rect">
+            <a:avLst/>
+          </a:prstGeom>
+          <a:solidFill>
+            <a:srgbClr val="29B5E8"/>
+          </a:solidFill>
+          <a:ln>
+            <a:noFill/>
+          </a:ln>
+        </p:spPr>
+        <p:style>
+          <a:lnRef idx="1">
+            <a:schemeClr val="accent1"/>
+          </a:lnRef>
+          <a:fillRef idx="3">
+            <a:schemeClr val="accent1"/>
+          </a:fillRef>
+          <a:effectRef idx="2">
+            <a:schemeClr val="accent1"/>
+          </a:effectRef>
+          <a:fontRef idx="minor">
+            <a:schemeClr val="lt1"/>
+          </a:fontRef>
+        </p:style>
+        <p:txBody>
+          <a:bodyPr rtlCol="0" anchor="ctr"/>
+          <a:lstStyle/>
+          <a:p>
+            <a:pPr algn="ctr"/>
+          </a:p>
+        </p:txBody>
+      </p:sp>
+      <p:sp>
+        <p:nvSpPr>
+          <p:cNvPr id="6" name="TextBox 5"/>
+          <p:cNvSpPr txBox="1"/>
+          <p:nvPr/>
+        </p:nvSpPr>
+        <p:spPr>
+          <a:xfrm>
+            <a:off x="777240" y="411480"/>
+            <a:ext cx="10058400" cy="640080"/>
+          </a:xfrm>
+          <a:prstGeom prst="rect">
+            <a:avLst/>
+          </a:prstGeom>
+          <a:noFill/>
+        </p:spPr>
+        <p:txBody>
+          <a:bodyPr wrap="square" lIns="73152" rIns="73152" tIns="36576" bIns="36576" anchor="t">
+            <a:spAutoFit/>
+          </a:bodyPr>
+          <a:lstStyle/>
+          <a:p>
+            <a:pPr algn="l">
+              <a:lnSpc>
+                <a:spcPts val="3900"/>
+              </a:lnSpc>
+            </a:pPr>
+            <a:r>
+              <a:rPr sz="3000" b="1" i="0">
+                <a:solidFill>
+                  <a:srgbClr val="1B2A3D"/>
+                </a:solidFill>
+                <a:latin typeface="Calibri Light"/>
+              </a:rPr>
+              <a:t>Production-Ready Performance</a:t>
+            </a:r>
+          </a:p>
+        </p:txBody>
+      </p:sp>
+      <p:cxnSp>
+        <p:nvCxnSpPr>
+          <p:cNvPr id="7" name="Connector 6"/>
+          <p:cNvCxnSpPr/>
+          <p:nvPr/>
+        </p:nvCxnSpPr>
+        <p:spPr>
+          <a:xfrm>
+            <a:off x="548640" y="1234440"/>
+            <a:ext cx="11094415" cy="0"/>
+          </a:xfrm>
+          <a:prstGeom prst="line">
+            <a:avLst/>
+          </a:prstGeom>
+          <a:ln w="12700">
+            <a:solidFill>
+              <a:srgbClr val="DEE3EA"/>
+            </a:solidFill>
+          </a:ln>
+        </p:spPr>
+        <p:style>
+          <a:lnRef idx="2">
+            <a:schemeClr val="accent1"/>
+          </a:lnRef>
+          <a:fillRef idx="0">
+            <a:schemeClr val="accent1"/>
+          </a:fillRef>
+          <a:effectRef idx="1">
+            <a:schemeClr val="accent1"/>
+          </a:effectRef>
+          <a:fontRef idx="minor">
+            <a:schemeClr val="tx1"/>
+          </a:fontRef>
+        </p:style>
+      </p:cxnSp>
+      <p:sp>
+        <p:nvSpPr>
+          <p:cNvPr id="8" name="Rounded Rectangle 7"/>
+          <p:cNvSpPr/>
+          <p:nvPr/>
+        </p:nvSpPr>
+        <p:spPr>
+          <a:xfrm>
+            <a:off x="640080" y="1554480"/>
+            <a:ext cx="10911535" cy="804672"/>
+          </a:xfrm>
+          <a:prstGeom prst="roundRect">
+            <a:avLst/>
+          </a:prstGeom>
+          <a:solidFill>
+            <a:srgbClr val="EEF5FA"/>
+          </a:solidFill>
+          <a:ln>
+            <a:noFill/>
+          </a:ln>
+        </p:spPr>
+        <p:style>
+          <a:lnRef idx="1">
+            <a:schemeClr val="accent1"/>
+          </a:lnRef>
+          <a:fillRef idx="3">
+            <a:schemeClr val="accent1"/>
+          </a:fillRef>
+          <a:effectRef idx="2">
+            <a:schemeClr val="accent1"/>
+          </a:effectRef>
+          <a:fontRef idx="minor">
+            <a:schemeClr val="lt1"/>
+          </a:fontRef>
+        </p:style>
+        <p:txBody>
+          <a:bodyPr rtlCol="0" anchor="ctr"/>
+          <a:lstStyle/>
+          <a:p>
+            <a:pPr algn="ctr"/>
+          </a:p>
+        </p:txBody>
+      </p:sp>
+      <p:sp>
+        <p:nvSpPr>
+          <p:cNvPr id="9" name="Oval 8"/>
+          <p:cNvSpPr/>
+          <p:nvPr/>
+        </p:nvSpPr>
+        <p:spPr>
+          <a:xfrm>
+            <a:off x="914400" y="1691640"/>
+            <a:ext cx="411480" cy="411480"/>
+          </a:xfrm>
+          <a:prstGeom prst="ellipse">
+            <a:avLst/>
+          </a:prstGeom>
+          <a:solidFill>
+            <a:srgbClr val="29B5E8"/>
+          </a:solidFill>
+          <a:ln>
+            <a:noFill/>
+          </a:ln>
+        </p:spPr>
+        <p:style>
+          <a:lnRef idx="1">
+            <a:schemeClr val="accent1"/>
+          </a:lnRef>
+          <a:fillRef idx="3">
+            <a:schemeClr val="accent1"/>
+          </a:fillRef>
+          <a:effectRef idx="2">
+            <a:schemeClr val="accent1"/>
+          </a:effectRef>
+          <a:fontRef idx="minor">
+            <a:schemeClr val="lt1"/>
+          </a:fontRef>
+        </p:style>
+        <p:txBody>
+          <a:bodyPr rtlCol="0" anchor="ctr"/>
+          <a:lstStyle/>
+          <a:p>
+            <a:pPr algn="ctr"/>
+          </a:p>
+        </p:txBody>
+      </p:sp>
+      <p:sp>
+        <p:nvSpPr>
+          <p:cNvPr id="10" name="TextBox 9"/>
+          <p:cNvSpPr txBox="1"/>
+          <p:nvPr/>
+        </p:nvSpPr>
+        <p:spPr>
+          <a:xfrm>
+            <a:off x="914400" y="1691640"/>
+            <a:ext cx="411480" cy="411480"/>
+          </a:xfrm>
+          <a:prstGeom prst="rect">
+            <a:avLst/>
+          </a:prstGeom>
+          <a:noFill/>
+        </p:spPr>
+        <p:txBody>
+          <a:bodyPr wrap="square" lIns="73152" rIns="73152" tIns="36576" bIns="36576" anchor="ctr">
+            <a:spAutoFit/>
+          </a:bodyPr>
+          <a:lstStyle/>
+          <a:p>
+            <a:pPr algn="ctr">
+              <a:lnSpc>
+                <a:spcPts val="1600"/>
+              </a:lnSpc>
+            </a:pPr>
+            <a:r>
+              <a:rPr sz="1300" b="1" i="0">
+                <a:solidFill>
+                  <a:srgbClr val="FFFFFF"/>
+                </a:solidFill>
+                <a:latin typeface="Segoe UI"/>
+              </a:rPr>
+              <a:t>01</a:t>
+            </a:r>
+          </a:p>
+        </p:txBody>
+      </p:sp>
+      <p:sp>
+        <p:nvSpPr>
+          <p:cNvPr id="11" name="TextBox 10"/>
+          <p:cNvSpPr txBox="1"/>
+          <p:nvPr/>
+        </p:nvSpPr>
+        <p:spPr>
+          <a:xfrm>
+            <a:off x="1554480" y="1627632"/>
+            <a:ext cx="9601200" cy="768096"/>
+          </a:xfrm>
+          <a:prstGeom prst="rect">
+            <a:avLst/>
+          </a:prstGeom>
+          <a:noFill/>
+        </p:spPr>
+        <p:txBody>
+          <a:bodyPr wrap="square" lIns="73152" rIns="73152" tIns="36576" bIns="36576" anchor="ctr">
+            <a:spAutoFit/>
+          </a:bodyPr>
+          <a:lstStyle/>
+          <a:p>
+            <a:pPr algn="l">
+              <a:lnSpc>
+                <a:spcPts val="2000"/>
+              </a:lnSpc>
+            </a:pPr>
+            <a:r>
+              <a:rPr sz="1600" b="0" i="0">
+                <a:solidFill>
+                  <a:srgbClr val="2C3E50"/>
+                </a:solidFill>
+                <a:latin typeface="Segoe UI"/>
+              </a:rPr>
+              <a:t>Proven at scale — 1.2B rows × 1001 kolom full-scan dalam 2 menit 16 detik via single-query</a:t>
+            </a:r>
+          </a:p>
+        </p:txBody>
+      </p:sp>
+      <p:sp>
+        <p:nvSpPr>
+          <p:cNvPr id="12" name="Rounded Rectangle 11"/>
+          <p:cNvSpPr/>
+          <p:nvPr/>
+        </p:nvSpPr>
+        <p:spPr>
+          <a:xfrm>
+            <a:off x="640080" y="2468880"/>
+            <a:ext cx="10911535" cy="804672"/>
+          </a:xfrm>
+          <a:prstGeom prst="roundRect">
+            <a:avLst/>
+          </a:prstGeom>
+          <a:solidFill>
+            <a:srgbClr val="F4F8FB"/>
+          </a:solidFill>
+          <a:ln>
+            <a:noFill/>
+          </a:ln>
+        </p:spPr>
+        <p:style>
+          <a:lnRef idx="1">
+            <a:schemeClr val="accent1"/>
+          </a:lnRef>
+          <a:fillRef idx="3">
+            <a:schemeClr val="accent1"/>
+          </a:fillRef>
+          <a:effectRef idx="2">
+            <a:schemeClr val="accent1"/>
+          </a:effectRef>
+          <a:fontRef idx="minor">
+            <a:schemeClr val="lt1"/>
+          </a:fontRef>
+        </p:style>
+        <p:txBody>
+          <a:bodyPr rtlCol="0" anchor="ctr"/>
+          <a:lstStyle/>
+          <a:p>
+            <a:pPr algn="ctr"/>
+          </a:p>
+        </p:txBody>
+      </p:sp>
+      <p:sp>
+        <p:nvSpPr>
+          <p:cNvPr id="13" name="Oval 12"/>
+          <p:cNvSpPr/>
+          <p:nvPr/>
+        </p:nvSpPr>
+        <p:spPr>
+          <a:xfrm>
+            <a:off x="914400" y="2606040"/>
+            <a:ext cx="411480" cy="411480"/>
+          </a:xfrm>
+          <a:prstGeom prst="ellipse">
+            <a:avLst/>
+          </a:prstGeom>
+          <a:solidFill>
+            <a:srgbClr val="11567F"/>
+          </a:solidFill>
+          <a:ln>
+            <a:noFill/>
+          </a:ln>
+        </p:spPr>
+        <p:style>
+          <a:lnRef idx="1">
+            <a:schemeClr val="accent1"/>
+          </a:lnRef>
+          <a:fillRef idx="3">
+            <a:schemeClr val="accent1"/>
+          </a:fillRef>
+          <a:effectRef idx="2">
+            <a:schemeClr val="accent1"/>
+          </a:effectRef>
+          <a:fontRef idx="minor">
+            <a:schemeClr val="lt1"/>
+          </a:fontRef>
+        </p:style>
+        <p:txBody>
+          <a:bodyPr rtlCol="0" anchor="ctr"/>
+          <a:lstStyle/>
+          <a:p>
+            <a:pPr algn="ctr"/>
+          </a:p>
+        </p:txBody>
+      </p:sp>
+      <p:sp>
+        <p:nvSpPr>
+          <p:cNvPr id="14" name="TextBox 13"/>
+          <p:cNvSpPr txBox="1"/>
+          <p:nvPr/>
+        </p:nvSpPr>
+        <p:spPr>
+          <a:xfrm>
+            <a:off x="914400" y="2606040"/>
+            <a:ext cx="411480" cy="411480"/>
+          </a:xfrm>
+          <a:prstGeom prst="rect">
+            <a:avLst/>
+          </a:prstGeom>
+          <a:noFill/>
+        </p:spPr>
+        <p:txBody>
+          <a:bodyPr wrap="square" lIns="73152" rIns="73152" tIns="36576" bIns="36576" anchor="ctr">
+            <a:spAutoFit/>
+          </a:bodyPr>
+          <a:lstStyle/>
+          <a:p>
+            <a:pPr algn="ctr">
+              <a:lnSpc>
+                <a:spcPts val="1600"/>
+              </a:lnSpc>
+            </a:pPr>
+            <a:r>
+              <a:rPr sz="1300" b="1" i="0">
+                <a:solidFill>
+                  <a:srgbClr val="FFFFFF"/>
+                </a:solidFill>
+                <a:latin typeface="Segoe UI"/>
+              </a:rPr>
+              <a:t>02</a:t>
+            </a:r>
+          </a:p>
+        </p:txBody>
+      </p:sp>
+      <p:sp>
+        <p:nvSpPr>
+          <p:cNvPr id="15" name="TextBox 14"/>
+          <p:cNvSpPr txBox="1"/>
+          <p:nvPr/>
+        </p:nvSpPr>
+        <p:spPr>
+          <a:xfrm>
+            <a:off x="1554480" y="2542032"/>
+            <a:ext cx="9601200" cy="768096"/>
+          </a:xfrm>
+          <a:prstGeom prst="rect">
+            <a:avLst/>
+          </a:prstGeom>
+          <a:noFill/>
+        </p:spPr>
+        <p:txBody>
+          <a:bodyPr wrap="square" lIns="73152" rIns="73152" tIns="36576" bIns="36576" anchor="ctr">
+            <a:spAutoFit/>
+          </a:bodyPr>
+          <a:lstStyle/>
+          <a:p>
+            <a:pPr algn="l">
+              <a:lnSpc>
+                <a:spcPts val="2000"/>
+              </a:lnSpc>
+            </a:pPr>
+            <a:r>
+              <a:rPr sz="1600" b="0" i="0">
+                <a:solidFill>
+                  <a:srgbClr val="2C3E50"/>
+                </a:solidFill>
+                <a:latin typeface="Segoe UI"/>
+              </a:rPr>
+              <a:t>5× faster than per-partition loop — 1 RUN call menggantikan 8 sequential calls</a:t>
+            </a:r>
+          </a:p>
+        </p:txBody>
+      </p:sp>
+      <p:sp>
+        <p:nvSpPr>
+          <p:cNvPr id="16" name="Rounded Rectangle 15"/>
+          <p:cNvSpPr/>
+          <p:nvPr/>
+        </p:nvSpPr>
+        <p:spPr>
+          <a:xfrm>
+            <a:off x="640080" y="3383280"/>
+            <a:ext cx="10911535" cy="804672"/>
+          </a:xfrm>
+          <a:prstGeom prst="roundRect">
+            <a:avLst/>
+          </a:prstGeom>
+          <a:solidFill>
+            <a:srgbClr val="EEF5FA"/>
+          </a:solidFill>
+          <a:ln>
+            <a:noFill/>
+          </a:ln>
+        </p:spPr>
+        <p:style>
+          <a:lnRef idx="1">
+            <a:schemeClr val="accent1"/>
+          </a:lnRef>
+          <a:fillRef idx="3">
+            <a:schemeClr val="accent1"/>
+          </a:fillRef>
+          <a:effectRef idx="2">
+            <a:schemeClr val="accent1"/>
+          </a:effectRef>
+          <a:fontRef idx="minor">
+            <a:schemeClr val="lt1"/>
+          </a:fontRef>
+        </p:style>
+        <p:txBody>
+          <a:bodyPr rtlCol="0" anchor="ctr"/>
+          <a:lstStyle/>
+          <a:p>
+            <a:pPr algn="ctr"/>
+          </a:p>
+        </p:txBody>
+      </p:sp>
+      <p:sp>
+        <p:nvSpPr>
+          <p:cNvPr id="17" name="Oval 16"/>
+          <p:cNvSpPr/>
+          <p:nvPr/>
+        </p:nvSpPr>
+        <p:spPr>
+          <a:xfrm>
+            <a:off x="914400" y="3520440"/>
+            <a:ext cx="411480" cy="411480"/>
+          </a:xfrm>
+          <a:prstGeom prst="ellipse">
+            <a:avLst/>
+          </a:prstGeom>
+          <a:solidFill>
+            <a:srgbClr val="71D3DC"/>
+          </a:solidFill>
+          <a:ln>
+            <a:noFill/>
+          </a:ln>
+        </p:spPr>
+        <p:style>
+          <a:lnRef idx="1">
+            <a:schemeClr val="accent1"/>
+          </a:lnRef>
+          <a:fillRef idx="3">
+            <a:schemeClr val="accent1"/>
+          </a:fillRef>
+          <a:effectRef idx="2">
+            <a:schemeClr val="accent1"/>
+          </a:effectRef>
+          <a:fontRef idx="minor">
+            <a:schemeClr val="lt1"/>
+          </a:fontRef>
+        </p:style>
+        <p:txBody>
+          <a:bodyPr rtlCol="0" anchor="ctr"/>
+          <a:lstStyle/>
+          <a:p>
+            <a:pPr algn="ctr"/>
+          </a:p>
+        </p:txBody>
+      </p:sp>
+      <p:sp>
+        <p:nvSpPr>
+          <p:cNvPr id="18" name="TextBox 17"/>
+          <p:cNvSpPr txBox="1"/>
+          <p:nvPr/>
+        </p:nvSpPr>
+        <p:spPr>
+          <a:xfrm>
+            <a:off x="914400" y="3520440"/>
+            <a:ext cx="411480" cy="411480"/>
+          </a:xfrm>
+          <a:prstGeom prst="rect">
+            <a:avLst/>
+          </a:prstGeom>
+          <a:noFill/>
+        </p:spPr>
+        <p:txBody>
+          <a:bodyPr wrap="square" lIns="73152" rIns="73152" tIns="36576" bIns="36576" anchor="ctr">
+            <a:spAutoFit/>
+          </a:bodyPr>
+          <a:lstStyle/>
+          <a:p>
+            <a:pPr algn="ctr">
+              <a:lnSpc>
+                <a:spcPts val="1600"/>
+              </a:lnSpc>
+            </a:pPr>
+            <a:r>
+              <a:rPr sz="1300" b="1" i="0">
+                <a:solidFill>
+                  <a:srgbClr val="FFFFFF"/>
+                </a:solidFill>
+                <a:latin typeface="Segoe UI"/>
+              </a:rPr>
+              <a:t>03</a:t>
+            </a:r>
+          </a:p>
+        </p:txBody>
+      </p:sp>
+      <p:sp>
+        <p:nvSpPr>
+          <p:cNvPr id="19" name="TextBox 18"/>
+          <p:cNvSpPr txBox="1"/>
+          <p:nvPr/>
+        </p:nvSpPr>
+        <p:spPr>
+          <a:xfrm>
+            <a:off x="1554480" y="3456432"/>
+            <a:ext cx="9601200" cy="768096"/>
+          </a:xfrm>
+          <a:prstGeom prst="rect">
+            <a:avLst/>
+          </a:prstGeom>
+          <a:noFill/>
+        </p:spPr>
+        <p:txBody>
+          <a:bodyPr wrap="square" lIns="73152" rIns="73152" tIns="36576" bIns="36576" anchor="ctr">
+            <a:spAutoFit/>
+          </a:bodyPr>
+          <a:lstStyle/>
+          <a:p>
+            <a:pPr algn="l">
+              <a:lnSpc>
+                <a:spcPts val="2000"/>
+              </a:lnSpc>
+            </a:pPr>
+            <a:r>
+              <a:rPr sz="1600" b="0" i="0">
+                <a:solidFill>
+                  <a:srgbClr val="2C3E50"/>
+                </a:solidFill>
+                <a:latin typeface="Segoe UI"/>
+              </a:rPr>
+              <a:t>80% compute cost savings — 0.61 credits vs 3.02 credits per run @ GEN2_XLARGE</a:t>
+            </a:r>
+          </a:p>
+        </p:txBody>
+      </p:sp>
+      <p:sp>
+        <p:nvSpPr>
+          <p:cNvPr id="20" name="Rounded Rectangle 19"/>
+          <p:cNvSpPr/>
+          <p:nvPr/>
+        </p:nvSpPr>
+        <p:spPr>
+          <a:xfrm>
+            <a:off x="640080" y="4297680"/>
+            <a:ext cx="10911535" cy="804672"/>
+          </a:xfrm>
+          <a:prstGeom prst="roundRect">
+            <a:avLst/>
+          </a:prstGeom>
+          <a:solidFill>
+            <a:srgbClr val="F4F8FB"/>
+          </a:solidFill>
+          <a:ln>
+            <a:noFill/>
+          </a:ln>
+        </p:spPr>
+        <p:style>
+          <a:lnRef idx="1">
+            <a:schemeClr val="accent1"/>
+          </a:lnRef>
+          <a:fillRef idx="3">
+            <a:schemeClr val="accent1"/>
+          </a:fillRef>
+          <a:effectRef idx="2">
+            <a:schemeClr val="accent1"/>
+          </a:effectRef>
+          <a:fontRef idx="minor">
+            <a:schemeClr val="lt1"/>
+          </a:fontRef>
+        </p:style>
+        <p:txBody>
+          <a:bodyPr rtlCol="0" anchor="ctr"/>
+          <a:lstStyle/>
+          <a:p>
+            <a:pPr algn="ctr"/>
+          </a:p>
+        </p:txBody>
+      </p:sp>
+      <p:sp>
+        <p:nvSpPr>
+          <p:cNvPr id="21" name="Oval 20"/>
+          <p:cNvSpPr/>
+          <p:nvPr/>
+        </p:nvSpPr>
+        <p:spPr>
+          <a:xfrm>
+            <a:off x="914400" y="4434840"/>
+            <a:ext cx="411480" cy="411480"/>
+          </a:xfrm>
+          <a:prstGeom prst="ellipse">
+            <a:avLst/>
+          </a:prstGeom>
+          <a:solidFill>
+            <a:srgbClr val="FF9F36"/>
+          </a:solidFill>
+          <a:ln>
+            <a:noFill/>
+          </a:ln>
+        </p:spPr>
+        <p:style>
+          <a:lnRef idx="1">
+            <a:schemeClr val="accent1"/>
+          </a:lnRef>
+          <a:fillRef idx="3">
+            <a:schemeClr val="accent1"/>
+          </a:fillRef>
+          <a:effectRef idx="2">
+            <a:schemeClr val="accent1"/>
+          </a:effectRef>
+          <a:fontRef idx="minor">
+            <a:schemeClr val="lt1"/>
+          </a:fontRef>
+        </p:style>
+        <p:txBody>
+          <a:bodyPr rtlCol="0" anchor="ctr"/>
+          <a:lstStyle/>
+          <a:p>
+            <a:pPr algn="ctr"/>
+          </a:p>
+        </p:txBody>
+      </p:sp>
+      <p:sp>
+        <p:nvSpPr>
+          <p:cNvPr id="22" name="TextBox 21"/>
+          <p:cNvSpPr txBox="1"/>
+          <p:nvPr/>
+        </p:nvSpPr>
+        <p:spPr>
+          <a:xfrm>
+            <a:off x="914400" y="4434840"/>
+            <a:ext cx="411480" cy="411480"/>
+          </a:xfrm>
+          <a:prstGeom prst="rect">
+            <a:avLst/>
+          </a:prstGeom>
+          <a:noFill/>
+        </p:spPr>
+        <p:txBody>
+          <a:bodyPr wrap="square" lIns="73152" rIns="73152" tIns="36576" bIns="36576" anchor="ctr">
+            <a:spAutoFit/>
+          </a:bodyPr>
+          <a:lstStyle/>
+          <a:p>
+            <a:pPr algn="ctr">
+              <a:lnSpc>
+                <a:spcPts val="1600"/>
+              </a:lnSpc>
+            </a:pPr>
+            <a:r>
+              <a:rPr sz="1300" b="1" i="0">
+                <a:solidFill>
+                  <a:srgbClr val="FFFFFF"/>
+                </a:solidFill>
+                <a:latin typeface="Segoe UI"/>
+              </a:rPr>
+              <a:t>04</a:t>
+            </a:r>
+          </a:p>
+        </p:txBody>
+      </p:sp>
+      <p:sp>
+        <p:nvSpPr>
+          <p:cNvPr id="23" name="TextBox 22"/>
+          <p:cNvSpPr txBox="1"/>
+          <p:nvPr/>
+        </p:nvSpPr>
+        <p:spPr>
+          <a:xfrm>
+            <a:off x="1554480" y="4370832"/>
+            <a:ext cx="9601200" cy="768096"/>
+          </a:xfrm>
+          <a:prstGeom prst="rect">
+            <a:avLst/>
+          </a:prstGeom>
+          <a:noFill/>
+        </p:spPr>
+        <p:txBody>
+          <a:bodyPr wrap="square" lIns="73152" rIns="73152" tIns="36576" bIns="36576" anchor="ctr">
+            <a:spAutoFit/>
+          </a:bodyPr>
+          <a:lstStyle/>
+          <a:p>
+            <a:pPr algn="l">
+              <a:lnSpc>
+                <a:spcPts val="2000"/>
+              </a:lnSpc>
+            </a:pPr>
+            <a:r>
+              <a:rPr sz="1600" b="0" i="0">
+                <a:solidFill>
+                  <a:srgbClr val="2C3E50"/>
+                </a:solidFill>
+                <a:latin typeface="Segoe UI"/>
+              </a:rPr>
+              <a:t>3.37M unique audience tuples exported secara secure tanpa data movement</a:t>
+            </a:r>
+          </a:p>
+        </p:txBody>
+      </p:sp>
+      <p:sp>
+        <p:nvSpPr>
+          <p:cNvPr id="24" name="Rounded Rectangle 23"/>
+          <p:cNvSpPr/>
+          <p:nvPr/>
+        </p:nvSpPr>
+        <p:spPr>
+          <a:xfrm>
+            <a:off x="640080" y="5212080"/>
+            <a:ext cx="10911535" cy="804672"/>
+          </a:xfrm>
+          <a:prstGeom prst="roundRect">
+            <a:avLst/>
+          </a:prstGeom>
+          <a:solidFill>
+            <a:srgbClr val="EEF5FA"/>
+          </a:solidFill>
+          <a:ln>
+            <a:noFill/>
+          </a:ln>
+        </p:spPr>
+        <p:style>
+          <a:lnRef idx="1">
+            <a:schemeClr val="accent1"/>
+          </a:lnRef>
+          <a:fillRef idx="3">
+            <a:schemeClr val="accent1"/>
+          </a:fillRef>
+          <a:effectRef idx="2">
+            <a:schemeClr val="accent1"/>
+          </a:effectRef>
+          <a:fontRef idx="minor">
+            <a:schemeClr val="lt1"/>
+          </a:fontRef>
+        </p:style>
+        <p:txBody>
+          <a:bodyPr rtlCol="0" anchor="ctr"/>
+          <a:lstStyle/>
+          <a:p>
+            <a:pPr algn="ctr"/>
+          </a:p>
+        </p:txBody>
+      </p:sp>
+      <p:sp>
+        <p:nvSpPr>
+          <p:cNvPr id="25" name="Oval 24"/>
+          <p:cNvSpPr/>
+          <p:nvPr/>
+        </p:nvSpPr>
+        <p:spPr>
+          <a:xfrm>
+            <a:off x="914400" y="5349240"/>
+            <a:ext cx="411480" cy="411480"/>
+          </a:xfrm>
+          <a:prstGeom prst="ellipse">
+            <a:avLst/>
+          </a:prstGeom>
+          <a:solidFill>
+            <a:srgbClr val="29B5E8"/>
+          </a:solidFill>
+          <a:ln>
+            <a:noFill/>
+          </a:ln>
+        </p:spPr>
+        <p:style>
+          <a:lnRef idx="1">
+            <a:schemeClr val="accent1"/>
+          </a:lnRef>
+          <a:fillRef idx="3">
+            <a:schemeClr val="accent1"/>
+          </a:fillRef>
+          <a:effectRef idx="2">
+            <a:schemeClr val="accent1"/>
+          </a:effectRef>
+          <a:fontRef idx="minor">
+            <a:schemeClr val="lt1"/>
+          </a:fontRef>
+        </p:style>
+        <p:txBody>
+          <a:bodyPr rtlCol="0" anchor="ctr"/>
+          <a:lstStyle/>
+          <a:p>
+            <a:pPr algn="ctr"/>
+          </a:p>
+        </p:txBody>
+      </p:sp>
+      <p:sp>
+        <p:nvSpPr>
+          <p:cNvPr id="26" name="TextBox 25"/>
+          <p:cNvSpPr txBox="1"/>
+          <p:nvPr/>
+        </p:nvSpPr>
+        <p:spPr>
+          <a:xfrm>
+            <a:off x="914400" y="5349240"/>
+            <a:ext cx="411480" cy="411480"/>
+          </a:xfrm>
+          <a:prstGeom prst="rect">
+            <a:avLst/>
+          </a:prstGeom>
+          <a:noFill/>
+        </p:spPr>
+        <p:txBody>
+          <a:bodyPr wrap="square" lIns="73152" rIns="73152" tIns="36576" bIns="36576" anchor="ctr">
+            <a:spAutoFit/>
+          </a:bodyPr>
+          <a:lstStyle/>
+          <a:p>
+            <a:pPr algn="ctr">
+              <a:lnSpc>
+                <a:spcPts val="1600"/>
+              </a:lnSpc>
+            </a:pPr>
+            <a:r>
+              <a:rPr sz="1300" b="1" i="0">
+                <a:solidFill>
+                  <a:srgbClr val="FFFFFF"/>
+                </a:solidFill>
+                <a:latin typeface="Segoe UI"/>
+              </a:rPr>
+              <a:t>05</a:t>
+            </a:r>
+          </a:p>
+        </p:txBody>
+      </p:sp>
+      <p:sp>
+        <p:nvSpPr>
+          <p:cNvPr id="27" name="TextBox 26"/>
+          <p:cNvSpPr txBox="1"/>
+          <p:nvPr/>
+        </p:nvSpPr>
+        <p:spPr>
+          <a:xfrm>
+            <a:off x="1554480" y="5285232"/>
+            <a:ext cx="9601200" cy="768096"/>
+          </a:xfrm>
+          <a:prstGeom prst="rect">
+            <a:avLst/>
+          </a:prstGeom>
+          <a:noFill/>
+        </p:spPr>
+        <p:txBody>
+          <a:bodyPr wrap="square" lIns="73152" rIns="73152" tIns="36576" bIns="36576" anchor="ctr">
+            <a:spAutoFit/>
+          </a:bodyPr>
+          <a:lstStyle/>
+          <a:p>
+            <a:pPr algn="l">
+              <a:lnSpc>
+                <a:spcPts val="2000"/>
+              </a:lnSpc>
+            </a:pPr>
+            <a:r>
+              <a:rPr sz="1600" b="0" i="0">
+                <a:solidFill>
+                  <a:srgbClr val="2C3E50"/>
+                </a:solidFill>
+                <a:latin typeface="Segoe UI"/>
+              </a:rPr>
+              <a:t>Privacy-preserving by design — UU PDP &amp; POJK compliant dengan full audit trail</a:t>
+            </a:r>
+          </a:p>
+        </p:txBody>
+      </p:sp>
+      <p:sp>
+        <p:nvSpPr>
+          <p:cNvPr id="28" name="TextBox 27"/>
+          <p:cNvSpPr txBox="1"/>
+          <p:nvPr/>
+        </p:nvSpPr>
+        <p:spPr>
+          <a:xfrm>
+            <a:off x="548640" y="6446520"/>
+            <a:ext cx="9144000" cy="274320"/>
+          </a:xfrm>
+          <a:prstGeom prst="rect">
+            <a:avLst/>
+          </a:prstGeom>
+          <a:noFill/>
+        </p:spPr>
+        <p:txBody>
+          <a:bodyPr wrap="square" lIns="73152" rIns="73152" tIns="36576" bIns="36576" anchor="t">
+            <a:spAutoFit/>
+          </a:bodyPr>
+          <a:lstStyle/>
+          <a:p>
+            <a:pPr algn="l">
+              <a:lnSpc>
+                <a:spcPts val="1100"/>
+              </a:lnSpc>
+            </a:pPr>
+            <a:r>
+              <a:rPr sz="900" b="0" i="0">
+                <a:solidFill>
+                  <a:srgbClr val="95A5A6"/>
+                </a:solidFill>
+                <a:latin typeface="Segoe UI"/>
+              </a:rPr>
+              <a:t>DCR Collaboration API v2 | SFSEAPAC | 2026   ·   56 / 60</a:t>
+            </a:r>
+          </a:p>
+        </p:txBody>
+      </p:sp>
+    </p:spTree>
+  </p:cSld>
+  <p:clrMapOvr>
+    <a:masterClrMapping/>
+  </p:clrMapOvr>
+</p:sld>
+</file>
+
+<file path=ppt/slides/slide57.xml><?xml version="1.0" encoding="utf-8"?>
+<p:sld xmlns:a="http://schemas.openxmlformats.org/drawingml/2006/main" xmlns:p="http://schemas.openxmlformats.org/presentationml/2006/main" xmlns:r="http://schemas.openxmlformats.org/officeDocument/2006/relationships">
+  <p:cSld>
+    <p:bg>
+      <p:bgPr>
+        <a:solidFill>
+          <a:srgbClr val="FFFFFF"/>
+        </a:solidFill>
+        <a:effectLst/>
+      </p:bgPr>
+    </p:bg>
+    <p:spTree>
+      <p:nvGrpSpPr>
+        <p:cNvPr id="1" name=""/>
+        <p:cNvGrpSpPr/>
+        <p:nvPr/>
+      </p:nvGrpSpPr>
+      <p:grpSpPr/>
+      <p:sp>
+        <p:nvSpPr>
+          <p:cNvPr id="2" name="Oval 1"/>
+          <p:cNvSpPr/>
+          <p:nvPr/>
+        </p:nvSpPr>
+        <p:spPr>
+          <a:xfrm>
+            <a:off x="9631375" y="-914400"/>
+            <a:ext cx="3200400" cy="3200400"/>
+          </a:xfrm>
+          <a:prstGeom prst="ellipse">
+            <a:avLst/>
+          </a:prstGeom>
+          <a:solidFill>
+            <a:srgbClr val="D6EFF8"/>
+          </a:solidFill>
+          <a:ln>
+            <a:noFill/>
+          </a:ln>
+        </p:spPr>
+        <p:style>
+          <a:lnRef idx="1">
+            <a:schemeClr val="accent1"/>
+          </a:lnRef>
+          <a:fillRef idx="3">
+            <a:schemeClr val="accent1"/>
+          </a:fillRef>
+          <a:effectRef idx="2">
+            <a:schemeClr val="accent1"/>
+          </a:effectRef>
+          <a:fontRef idx="minor">
+            <a:schemeClr val="lt1"/>
+          </a:fontRef>
+        </p:style>
+        <p:txBody>
+          <a:bodyPr rtlCol="0" anchor="ctr"/>
+          <a:lstStyle/>
+          <a:p>
+            <a:pPr algn="ctr"/>
+          </a:p>
+        </p:txBody>
+      </p:sp>
+      <p:sp>
+        <p:nvSpPr>
+          <p:cNvPr id="3" name="Oval 2"/>
+          <p:cNvSpPr/>
+          <p:nvPr/>
+        </p:nvSpPr>
+        <p:spPr>
+          <a:xfrm>
+            <a:off x="-640080" y="5029200"/>
+            <a:ext cx="1828800" cy="1828800"/>
+          </a:xfrm>
+          <a:prstGeom prst="ellipse">
+            <a:avLst/>
+          </a:prstGeom>
+          <a:solidFill>
+            <a:srgbClr val="E8F4FD"/>
+          </a:solidFill>
+          <a:ln>
+            <a:noFill/>
+          </a:ln>
+        </p:spPr>
+        <p:style>
+          <a:lnRef idx="1">
+            <a:schemeClr val="accent1"/>
+          </a:lnRef>
+          <a:fillRef idx="3">
+            <a:schemeClr val="accent1"/>
+          </a:fillRef>
+          <a:effectRef idx="2">
+            <a:schemeClr val="accent1"/>
+          </a:effectRef>
+          <a:fontRef idx="minor">
+            <a:schemeClr val="lt1"/>
+          </a:fontRef>
+        </p:style>
+        <p:txBody>
+          <a:bodyPr rtlCol="0" anchor="ctr"/>
+          <a:lstStyle/>
+          <a:p>
+            <a:pPr algn="ctr"/>
+          </a:p>
+        </p:txBody>
+      </p:sp>
+      <p:pic>
+        <p:nvPicPr>
+          <p:cNvPr id="4" name="Picture 3" descr="snowflake_icon_blue.png"/>
+          <p:cNvPicPr>
+            <a:picLocks noChangeAspect="1"/>
+          </p:cNvPicPr>
+          <p:nvPr/>
+        </p:nvPicPr>
+        <p:blipFill>
+          <a:blip r:embed="rId2"/>
+          <a:stretch>
+            <a:fillRect/>
+          </a:stretch>
+        </p:blipFill>
+        <p:spPr>
+          <a:xfrm>
+            <a:off x="11414455" y="320040"/>
+            <a:ext cx="349389" cy="320040"/>
+          </a:xfrm>
+          <a:prstGeom prst="rect">
+            <a:avLst/>
+          </a:prstGeom>
+        </p:spPr>
+      </p:pic>
+      <p:sp>
+        <p:nvSpPr>
+          <p:cNvPr id="5" name="Rectangle 4"/>
+          <p:cNvSpPr/>
+          <p:nvPr/>
+        </p:nvSpPr>
+        <p:spPr>
+          <a:xfrm>
+            <a:off x="548640" y="457200"/>
+            <a:ext cx="54864" cy="502920"/>
+          </a:xfrm>
+          <a:prstGeom prst="rect">
+            <a:avLst/>
+          </a:prstGeom>
+          <a:solidFill>
+            <a:srgbClr val="29B5E8"/>
+          </a:solidFill>
+          <a:ln>
+            <a:noFill/>
+          </a:ln>
+        </p:spPr>
+        <p:style>
+          <a:lnRef idx="1">
+            <a:schemeClr val="accent1"/>
+          </a:lnRef>
+          <a:fillRef idx="3">
+            <a:schemeClr val="accent1"/>
+          </a:fillRef>
+          <a:effectRef idx="2">
+            <a:schemeClr val="accent1"/>
+          </a:effectRef>
+          <a:fontRef idx="minor">
+            <a:schemeClr val="lt1"/>
+          </a:fontRef>
+        </p:style>
+        <p:txBody>
+          <a:bodyPr rtlCol="0" anchor="ctr"/>
+          <a:lstStyle/>
+          <a:p>
+            <a:pPr algn="ctr"/>
+          </a:p>
+        </p:txBody>
+      </p:sp>
+      <p:sp>
+        <p:nvSpPr>
+          <p:cNvPr id="6" name="TextBox 5"/>
+          <p:cNvSpPr txBox="1"/>
+          <p:nvPr/>
+        </p:nvSpPr>
+        <p:spPr>
+          <a:xfrm>
+            <a:off x="777240" y="411480"/>
+            <a:ext cx="10058400" cy="640080"/>
+          </a:xfrm>
+          <a:prstGeom prst="rect">
+            <a:avLst/>
+          </a:prstGeom>
+          <a:noFill/>
+        </p:spPr>
+        <p:txBody>
+          <a:bodyPr wrap="square" lIns="73152" rIns="73152" tIns="36576" bIns="36576" anchor="t">
+            <a:spAutoFit/>
+          </a:bodyPr>
+          <a:lstStyle/>
+          <a:p>
+            <a:pPr algn="l">
+              <a:lnSpc>
+                <a:spcPts val="3900"/>
+              </a:lnSpc>
+            </a:pPr>
+            <a:r>
+              <a:rPr sz="3000" b="1" i="0">
+                <a:solidFill>
+                  <a:srgbClr val="1B2A3D"/>
+                </a:solidFill>
+                <a:latin typeface="Calibri Light"/>
+              </a:rPr>
+              <a:t>Bottom Line</a:t>
+            </a:r>
+          </a:p>
+        </p:txBody>
+      </p:sp>
+      <p:cxnSp>
+        <p:nvCxnSpPr>
+          <p:cNvPr id="7" name="Connector 6"/>
+          <p:cNvCxnSpPr/>
+          <p:nvPr/>
+        </p:nvCxnSpPr>
+        <p:spPr>
+          <a:xfrm>
+            <a:off x="548640" y="1234440"/>
+            <a:ext cx="11094415" cy="0"/>
+          </a:xfrm>
+          <a:prstGeom prst="line">
+            <a:avLst/>
+          </a:prstGeom>
+          <a:ln w="12700">
+            <a:solidFill>
+              <a:srgbClr val="DEE3EA"/>
+            </a:solidFill>
+          </a:ln>
+        </p:spPr>
+        <p:style>
+          <a:lnRef idx="2">
+            <a:schemeClr val="accent1"/>
+          </a:lnRef>
+          <a:fillRef idx="0">
+            <a:schemeClr val="accent1"/>
+          </a:fillRef>
+          <a:effectRef idx="1">
+            <a:schemeClr val="accent1"/>
+          </a:effectRef>
+          <a:fontRef idx="minor">
+            <a:schemeClr val="tx1"/>
+          </a:fontRef>
+        </p:style>
+      </p:cxnSp>
+      <p:sp>
+        <p:nvSpPr>
+          <p:cNvPr id="8" name="TextBox 7"/>
+          <p:cNvSpPr txBox="1"/>
+          <p:nvPr/>
+        </p:nvSpPr>
+        <p:spPr>
+          <a:xfrm>
+            <a:off x="731520" y="1508760"/>
+            <a:ext cx="10515600" cy="4754880"/>
+          </a:xfrm>
+          <a:prstGeom prst="rect">
+            <a:avLst/>
+          </a:prstGeom>
+          <a:noFill/>
+        </p:spPr>
+        <p:txBody>
+          <a:bodyPr wrap="square" lIns="73152" rIns="73152">
+            <a:spAutoFit/>
+          </a:bodyPr>
+          <a:lstStyle/>
+          <a:p>
+            <a:pPr>
+              <a:lnSpc>
+                <a:spcPts val="2500"/>
+              </a:lnSpc>
+              <a:spcAft>
+                <a:spcPts val="1000"/>
+              </a:spcAft>
+            </a:pPr>
+            <a:r>
+              <a:rPr sz="800">
+                <a:solidFill>
+                  <a:srgbClr val="29B5E8"/>
+                </a:solidFill>
+                <a:latin typeface="Segoe UI"/>
+              </a:rPr>
+              <a:t>●  </a:t>
+            </a:r>
+            <a:r>
+              <a:rPr sz="1600">
+                <a:solidFill>
+                  <a:srgbClr val="2C3E50"/>
+                </a:solidFill>
+                <a:latin typeface="Segoe UI"/>
+              </a:rPr>
+              <a:t>2m</a:t>
+            </a:r>
+          </a:p>
+          <a:p>
+            <a:pPr>
+              <a:lnSpc>
+                <a:spcPts val="2500"/>
+              </a:lnSpc>
+              <a:spcAft>
+                <a:spcPts val="1000"/>
+              </a:spcAft>
+            </a:pPr>
+            <a:r>
+              <a:rPr sz="800">
+                <a:solidFill>
+                  <a:srgbClr val="29B5E8"/>
+                </a:solidFill>
+                <a:latin typeface="Segoe UI"/>
+              </a:rPr>
+              <a:t>●  </a:t>
+            </a:r>
+            <a:r>
+              <a:rPr sz="1600">
+                <a:solidFill>
+                  <a:srgbClr val="2C3E50"/>
+                </a:solidFill>
+                <a:latin typeface="Segoe UI"/>
+              </a:rPr>
+              <a:t>16s End-to-end single-query full-scan</a:t>
+            </a:r>
+          </a:p>
+          <a:p>
+            <a:pPr>
+              <a:lnSpc>
+                <a:spcPts val="2500"/>
+              </a:lnSpc>
+              <a:spcAft>
+                <a:spcPts val="1000"/>
+              </a:spcAft>
+            </a:pPr>
+            <a:r>
+              <a:rPr sz="800">
+                <a:solidFill>
+                  <a:srgbClr val="29B5E8"/>
+                </a:solidFill>
+                <a:latin typeface="Segoe UI"/>
+              </a:rPr>
+              <a:t>●  </a:t>
+            </a:r>
+            <a:r>
+              <a:rPr sz="1600">
+                <a:solidFill>
+                  <a:srgbClr val="2C3E50"/>
+                </a:solidFill>
+                <a:latin typeface="Segoe UI"/>
+              </a:rPr>
+              <a:t>0.61</a:t>
+            </a:r>
+          </a:p>
+          <a:p>
+            <a:pPr>
+              <a:lnSpc>
+                <a:spcPts val="2500"/>
+              </a:lnSpc>
+              <a:spcAft>
+                <a:spcPts val="1000"/>
+              </a:spcAft>
+            </a:pPr>
+            <a:r>
+              <a:rPr sz="800">
+                <a:solidFill>
+                  <a:srgbClr val="29B5E8"/>
+                </a:solidFill>
+                <a:latin typeface="Segoe UI"/>
+              </a:rPr>
+              <a:t>●  </a:t>
+            </a:r>
+            <a:r>
+              <a:rPr sz="1600">
+                <a:solidFill>
+                  <a:srgbClr val="2C3E50"/>
+                </a:solidFill>
+                <a:latin typeface="Segoe UI"/>
+              </a:rPr>
+              <a:t>Credits per run (80% cheaper than loop)</a:t>
+            </a:r>
+          </a:p>
+          <a:p>
+            <a:pPr>
+              <a:lnSpc>
+                <a:spcPts val="2500"/>
+              </a:lnSpc>
+              <a:spcAft>
+                <a:spcPts val="1000"/>
+              </a:spcAft>
+            </a:pPr>
+            <a:r>
+              <a:rPr sz="800">
+                <a:solidFill>
+                  <a:srgbClr val="29B5E8"/>
+                </a:solidFill>
+                <a:latin typeface="Segoe UI"/>
+              </a:rPr>
+              <a:t>●  </a:t>
+            </a:r>
+            <a:r>
+              <a:rPr sz="1600">
+                <a:solidFill>
+                  <a:srgbClr val="2C3E50"/>
+                </a:solidFill>
+                <a:latin typeface="Segoe UI"/>
+              </a:rPr>
+              <a:t>1.2B</a:t>
+            </a:r>
+          </a:p>
+          <a:p>
+            <a:pPr>
+              <a:lnSpc>
+                <a:spcPts val="2500"/>
+              </a:lnSpc>
+              <a:spcAft>
+                <a:spcPts val="1000"/>
+              </a:spcAft>
+            </a:pPr>
+            <a:r>
+              <a:rPr sz="800">
+                <a:solidFill>
+                  <a:srgbClr val="29B5E8"/>
+                </a:solidFill>
+                <a:latin typeface="Segoe UI"/>
+              </a:rPr>
+              <a:t>●  </a:t>
+            </a:r>
+            <a:r>
+              <a:rPr sz="1600">
+                <a:solidFill>
+                  <a:srgbClr val="2C3E50"/>
+                </a:solidFill>
+                <a:latin typeface="Segoe UI"/>
+              </a:rPr>
+              <a:t>Provider rows fully scanned in 1 query</a:t>
+            </a:r>
+          </a:p>
+          <a:p>
+            <a:pPr>
+              <a:lnSpc>
+                <a:spcPts val="2500"/>
+              </a:lnSpc>
+              <a:spcAft>
+                <a:spcPts val="1000"/>
+              </a:spcAft>
+            </a:pPr>
+            <a:r>
+              <a:rPr sz="800">
+                <a:solidFill>
+                  <a:srgbClr val="29B5E8"/>
+                </a:solidFill>
+                <a:latin typeface="Segoe UI"/>
+              </a:rPr>
+              <a:t>●  </a:t>
+            </a:r>
+            <a:r>
+              <a:rPr sz="1600">
+                <a:solidFill>
+                  <a:srgbClr val="2C3E50"/>
+                </a:solidFill>
+                <a:latin typeface="Segoe UI"/>
+              </a:rPr>
+              <a:t>3.37M</a:t>
+            </a:r>
+          </a:p>
+          <a:p>
+            <a:pPr>
+              <a:lnSpc>
+                <a:spcPts val="2500"/>
+              </a:lnSpc>
+              <a:spcAft>
+                <a:spcPts val="1000"/>
+              </a:spcAft>
+            </a:pPr>
+            <a:r>
+              <a:rPr sz="800">
+                <a:solidFill>
+                  <a:srgbClr val="29B5E8"/>
+                </a:solidFill>
+                <a:latin typeface="Segoe UI"/>
+              </a:rPr>
+              <a:t>●  </a:t>
+            </a:r>
+            <a:r>
+              <a:rPr sz="1600">
+                <a:solidFill>
+                  <a:srgbClr val="2C3E50"/>
+                </a:solidFill>
+                <a:latin typeface="Segoe UI"/>
+              </a:rPr>
+              <a:t>Unique audience tuples (identical in both modes)</a:t>
+            </a:r>
+          </a:p>
+        </p:txBody>
+      </p:sp>
+      <p:sp>
+        <p:nvSpPr>
+          <p:cNvPr id="9" name="TextBox 8"/>
+          <p:cNvSpPr txBox="1"/>
+          <p:nvPr/>
+        </p:nvSpPr>
+        <p:spPr>
+          <a:xfrm>
+            <a:off x="548640" y="6446520"/>
+            <a:ext cx="9144000" cy="274320"/>
+          </a:xfrm>
+          <a:prstGeom prst="rect">
+            <a:avLst/>
+          </a:prstGeom>
+          <a:noFill/>
+        </p:spPr>
+        <p:txBody>
+          <a:bodyPr wrap="square" lIns="73152" rIns="73152" tIns="36576" bIns="36576" anchor="t">
+            <a:spAutoFit/>
+          </a:bodyPr>
+          <a:lstStyle/>
+          <a:p>
+            <a:pPr algn="l">
+              <a:lnSpc>
+                <a:spcPts val="1100"/>
+              </a:lnSpc>
+            </a:pPr>
+            <a:r>
+              <a:rPr sz="900" b="0" i="0">
+                <a:solidFill>
+                  <a:srgbClr val="95A5A6"/>
+                </a:solidFill>
+                <a:latin typeface="Segoe UI"/>
+              </a:rPr>
+              <a:t>DCR Collaboration API v2 | SFSEAPAC | 2026   ·   57 / 60</a:t>
+            </a:r>
+          </a:p>
+        </p:txBody>
+      </p:sp>
+    </p:spTree>
+  </p:cSld>
+  <p:clrMapOvr>
+    <a:masterClrMapping/>
+  </p:clrMapOvr>
+</p:sld>
+</file>
+
+<file path=ppt/slides/slide58.xml><?xml version="1.0" encoding="utf-8"?>
+<p:sld xmlns:a="http://schemas.openxmlformats.org/drawingml/2006/main" xmlns:p="http://schemas.openxmlformats.org/presentationml/2006/main" xmlns:r="http://schemas.openxmlformats.org/officeDocument/2006/relationships">
+  <p:cSld>
+    <p:bg>
+      <p:bgPr>
+        <a:solidFill>
+          <a:srgbClr val="FFFFFF"/>
+        </a:solidFill>
+        <a:effectLst/>
+      </p:bgPr>
+    </p:bg>
+    <p:spTree>
+      <p:nvGrpSpPr>
+        <p:cNvPr id="1" name=""/>
+        <p:cNvGrpSpPr/>
+        <p:nvPr/>
+      </p:nvGrpSpPr>
+      <p:grpSpPr/>
+      <p:sp>
+        <p:nvSpPr>
+          <p:cNvPr id="2" name="Oval 1"/>
+          <p:cNvSpPr/>
+          <p:nvPr/>
+        </p:nvSpPr>
+        <p:spPr>
+          <a:xfrm>
+            <a:off x="9631375" y="-914400"/>
+            <a:ext cx="3200400" cy="3200400"/>
+          </a:xfrm>
+          <a:prstGeom prst="ellipse">
+            <a:avLst/>
+          </a:prstGeom>
+          <a:solidFill>
+            <a:srgbClr val="D6EFF8"/>
+          </a:solidFill>
+          <a:ln>
+            <a:noFill/>
+          </a:ln>
+        </p:spPr>
+        <p:style>
+          <a:lnRef idx="1">
+            <a:schemeClr val="accent1"/>
+          </a:lnRef>
+          <a:fillRef idx="3">
+            <a:schemeClr val="accent1"/>
+          </a:fillRef>
+          <a:effectRef idx="2">
+            <a:schemeClr val="accent1"/>
+          </a:effectRef>
+          <a:fontRef idx="minor">
+            <a:schemeClr val="lt1"/>
+          </a:fontRef>
+        </p:style>
+        <p:txBody>
+          <a:bodyPr rtlCol="0" anchor="ctr"/>
+          <a:lstStyle/>
+          <a:p>
+            <a:pPr algn="ctr"/>
+          </a:p>
+        </p:txBody>
+      </p:sp>
+      <p:sp>
+        <p:nvSpPr>
+          <p:cNvPr id="3" name="Oval 2"/>
+          <p:cNvSpPr/>
+          <p:nvPr/>
+        </p:nvSpPr>
+        <p:spPr>
+          <a:xfrm>
+            <a:off x="-640080" y="5029200"/>
+            <a:ext cx="1828800" cy="1828800"/>
+          </a:xfrm>
+          <a:prstGeom prst="ellipse">
+            <a:avLst/>
+          </a:prstGeom>
+          <a:solidFill>
+            <a:srgbClr val="E8F4FD"/>
+          </a:solidFill>
+          <a:ln>
+            <a:noFill/>
+          </a:ln>
+        </p:spPr>
+        <p:style>
+          <a:lnRef idx="1">
+            <a:schemeClr val="accent1"/>
+          </a:lnRef>
+          <a:fillRef idx="3">
+            <a:schemeClr val="accent1"/>
+          </a:fillRef>
+          <a:effectRef idx="2">
+            <a:schemeClr val="accent1"/>
+          </a:effectRef>
+          <a:fontRef idx="minor">
+            <a:schemeClr val="lt1"/>
+          </a:fontRef>
+        </p:style>
+        <p:txBody>
+          <a:bodyPr rtlCol="0" anchor="ctr"/>
+          <a:lstStyle/>
+          <a:p>
+            <a:pPr algn="ctr"/>
+          </a:p>
+        </p:txBody>
+      </p:sp>
+      <p:pic>
+        <p:nvPicPr>
+          <p:cNvPr id="4" name="Picture 3" descr="snowflake_icon_blue.png"/>
+          <p:cNvPicPr>
+            <a:picLocks noChangeAspect="1"/>
+          </p:cNvPicPr>
+          <p:nvPr/>
+        </p:nvPicPr>
+        <p:blipFill>
+          <a:blip r:embed="rId2"/>
+          <a:stretch>
+            <a:fillRect/>
+          </a:stretch>
+        </p:blipFill>
+        <p:spPr>
+          <a:xfrm>
+            <a:off x="11414455" y="320040"/>
+            <a:ext cx="349389" cy="320040"/>
+          </a:xfrm>
+          <a:prstGeom prst="rect">
+            <a:avLst/>
+          </a:prstGeom>
+        </p:spPr>
+      </p:pic>
+      <p:sp>
+        <p:nvSpPr>
+          <p:cNvPr id="5" name="Rectangle 4"/>
+          <p:cNvSpPr/>
+          <p:nvPr/>
+        </p:nvSpPr>
+        <p:spPr>
+          <a:xfrm>
+            <a:off x="548640" y="457200"/>
+            <a:ext cx="54864" cy="502920"/>
+          </a:xfrm>
+          <a:prstGeom prst="rect">
+            <a:avLst/>
+          </a:prstGeom>
+          <a:solidFill>
+            <a:srgbClr val="29B5E8"/>
+          </a:solidFill>
+          <a:ln>
+            <a:noFill/>
+          </a:ln>
+        </p:spPr>
+        <p:style>
+          <a:lnRef idx="1">
+            <a:schemeClr val="accent1"/>
+          </a:lnRef>
+          <a:fillRef idx="3">
+            <a:schemeClr val="accent1"/>
+          </a:fillRef>
+          <a:effectRef idx="2">
+            <a:schemeClr val="accent1"/>
+          </a:effectRef>
+          <a:fontRef idx="minor">
+            <a:schemeClr val="lt1"/>
+          </a:fontRef>
+        </p:style>
+        <p:txBody>
+          <a:bodyPr rtlCol="0" anchor="ctr"/>
+          <a:lstStyle/>
+          <a:p>
+            <a:pPr algn="ctr"/>
+          </a:p>
+        </p:txBody>
+      </p:sp>
+      <p:sp>
+        <p:nvSpPr>
+          <p:cNvPr id="6" name="TextBox 5"/>
+          <p:cNvSpPr txBox="1"/>
+          <p:nvPr/>
+        </p:nvSpPr>
+        <p:spPr>
+          <a:xfrm>
+            <a:off x="777240" y="411480"/>
+            <a:ext cx="10058400" cy="640080"/>
+          </a:xfrm>
+          <a:prstGeom prst="rect">
+            <a:avLst/>
+          </a:prstGeom>
+          <a:noFill/>
+        </p:spPr>
+        <p:txBody>
+          <a:bodyPr wrap="square" lIns="73152" rIns="73152" tIns="36576" bIns="36576" anchor="t">
+            <a:spAutoFit/>
+          </a:bodyPr>
+          <a:lstStyle/>
+          <a:p>
+            <a:pPr algn="l">
+              <a:lnSpc>
+                <a:spcPts val="3900"/>
+              </a:lnSpc>
+            </a:pPr>
+            <a:r>
+              <a:rPr sz="3000" b="1" i="0">
+                <a:solidFill>
+                  <a:srgbClr val="1B2A3D"/>
+                </a:solidFill>
+                <a:latin typeface="Calibri Light"/>
+              </a:rPr>
+              <a:t>References &amp; Code Repository</a:t>
+            </a:r>
+          </a:p>
+        </p:txBody>
+      </p:sp>
+      <p:cxnSp>
+        <p:nvCxnSpPr>
+          <p:cNvPr id="7" name="Connector 6"/>
+          <p:cNvCxnSpPr/>
+          <p:nvPr/>
+        </p:nvCxnSpPr>
+        <p:spPr>
+          <a:xfrm>
+            <a:off x="548640" y="1234440"/>
+            <a:ext cx="11094415" cy="0"/>
+          </a:xfrm>
+          <a:prstGeom prst="line">
+            <a:avLst/>
+          </a:prstGeom>
+          <a:ln w="12700">
+            <a:solidFill>
+              <a:srgbClr val="DEE3EA"/>
+            </a:solidFill>
+          </a:ln>
+        </p:spPr>
+        <p:style>
+          <a:lnRef idx="2">
+            <a:schemeClr val="accent1"/>
+          </a:lnRef>
+          <a:fillRef idx="0">
+            <a:schemeClr val="accent1"/>
+          </a:fillRef>
+          <a:effectRef idx="1">
+            <a:schemeClr val="accent1"/>
+          </a:effectRef>
+          <a:fontRef idx="minor">
+            <a:schemeClr val="tx1"/>
+          </a:fontRef>
+        </p:style>
+      </p:cxnSp>
+      <p:sp>
+        <p:nvSpPr>
+          <p:cNvPr id="8" name="Rounded Rectangle 7"/>
+          <p:cNvSpPr/>
+          <p:nvPr/>
+        </p:nvSpPr>
+        <p:spPr>
+          <a:xfrm>
+            <a:off x="640080" y="1554480"/>
+            <a:ext cx="10911535" cy="804672"/>
+          </a:xfrm>
+          <a:prstGeom prst="roundRect">
+            <a:avLst/>
+          </a:prstGeom>
+          <a:solidFill>
+            <a:srgbClr val="EEF5FA"/>
+          </a:solidFill>
+          <a:ln>
+            <a:noFill/>
+          </a:ln>
+        </p:spPr>
+        <p:style>
+          <a:lnRef idx="1">
+            <a:schemeClr val="accent1"/>
+          </a:lnRef>
+          <a:fillRef idx="3">
+            <a:schemeClr val="accent1"/>
+          </a:fillRef>
+          <a:effectRef idx="2">
+            <a:schemeClr val="accent1"/>
+          </a:effectRef>
+          <a:fontRef idx="minor">
+            <a:schemeClr val="lt1"/>
+          </a:fontRef>
+        </p:style>
+        <p:txBody>
+          <a:bodyPr rtlCol="0" anchor="ctr"/>
+          <a:lstStyle/>
+          <a:p>
+            <a:pPr algn="ctr"/>
+          </a:p>
+        </p:txBody>
+      </p:sp>
+      <p:sp>
+        <p:nvSpPr>
+          <p:cNvPr id="9" name="Oval 8"/>
+          <p:cNvSpPr/>
+          <p:nvPr/>
+        </p:nvSpPr>
+        <p:spPr>
+          <a:xfrm>
+            <a:off x="914400" y="1691640"/>
+            <a:ext cx="411480" cy="411480"/>
+          </a:xfrm>
+          <a:prstGeom prst="ellipse">
+            <a:avLst/>
+          </a:prstGeom>
+          <a:solidFill>
+            <a:srgbClr val="29B5E8"/>
+          </a:solidFill>
+          <a:ln>
+            <a:noFill/>
+          </a:ln>
+        </p:spPr>
+        <p:style>
+          <a:lnRef idx="1">
+            <a:schemeClr val="accent1"/>
+          </a:lnRef>
+          <a:fillRef idx="3">
+            <a:schemeClr val="accent1"/>
+          </a:fillRef>
+          <a:effectRef idx="2">
+            <a:schemeClr val="accent1"/>
+          </a:effectRef>
+          <a:fontRef idx="minor">
+            <a:schemeClr val="lt1"/>
+          </a:fontRef>
+        </p:style>
+        <p:txBody>
+          <a:bodyPr rtlCol="0" anchor="ctr"/>
+          <a:lstStyle/>
+          <a:p>
+            <a:pPr algn="ctr"/>
+          </a:p>
+        </p:txBody>
+      </p:sp>
+      <p:sp>
+        <p:nvSpPr>
+          <p:cNvPr id="10" name="TextBox 9"/>
+          <p:cNvSpPr txBox="1"/>
+          <p:nvPr/>
+        </p:nvSpPr>
+        <p:spPr>
+          <a:xfrm>
+            <a:off x="914400" y="1691640"/>
+            <a:ext cx="411480" cy="411480"/>
+          </a:xfrm>
+          <a:prstGeom prst="rect">
+            <a:avLst/>
+          </a:prstGeom>
+          <a:noFill/>
+        </p:spPr>
+        <p:txBody>
+          <a:bodyPr wrap="square" lIns="73152" rIns="73152" tIns="36576" bIns="36576" anchor="ctr">
+            <a:spAutoFit/>
+          </a:bodyPr>
+          <a:lstStyle/>
+          <a:p>
+            <a:pPr algn="ctr">
+              <a:lnSpc>
+                <a:spcPts val="1600"/>
+              </a:lnSpc>
+            </a:pPr>
+            <a:r>
+              <a:rPr sz="1300" b="1" i="0">
+                <a:solidFill>
+                  <a:srgbClr val="FFFFFF"/>
+                </a:solidFill>
+                <a:latin typeface="Segoe UI"/>
+              </a:rPr>
+              <a:t>01</a:t>
+            </a:r>
+          </a:p>
+        </p:txBody>
+      </p:sp>
+      <p:sp>
+        <p:nvSpPr>
+          <p:cNvPr id="11" name="TextBox 10"/>
+          <p:cNvSpPr txBox="1"/>
+          <p:nvPr/>
+        </p:nvSpPr>
+        <p:spPr>
+          <a:xfrm>
+            <a:off x="1554480" y="1627632"/>
+            <a:ext cx="9601200" cy="768096"/>
+          </a:xfrm>
+          <a:prstGeom prst="rect">
+            <a:avLst/>
+          </a:prstGeom>
+          <a:noFill/>
+        </p:spPr>
+        <p:txBody>
+          <a:bodyPr wrap="square" lIns="73152" rIns="73152" tIns="36576" bIns="36576" anchor="ctr">
+            <a:spAutoFit/>
+          </a:bodyPr>
+          <a:lstStyle/>
+          <a:p>
+            <a:pPr algn="l">
+              <a:lnSpc>
+                <a:spcPts val="2000"/>
+              </a:lnSpc>
+            </a:pPr>
+            <a:r>
+              <a:rPr sz="1600" b="0" i="0">
+                <a:solidFill>
+                  <a:srgbClr val="2C3E50"/>
+                </a:solidFill>
+                <a:latin typeface="Segoe UI"/>
+              </a:rPr>
+              <a:t>GitHub — https://github.com/arzamuhammad/dcr-collaboration-api</a:t>
+            </a:r>
+          </a:p>
+        </p:txBody>
+      </p:sp>
+      <p:sp>
+        <p:nvSpPr>
+          <p:cNvPr id="12" name="Rounded Rectangle 11"/>
+          <p:cNvSpPr/>
+          <p:nvPr/>
+        </p:nvSpPr>
+        <p:spPr>
+          <a:xfrm>
+            <a:off x="640080" y="2468880"/>
+            <a:ext cx="10911535" cy="804672"/>
+          </a:xfrm>
+          <a:prstGeom prst="roundRect">
+            <a:avLst/>
+          </a:prstGeom>
+          <a:solidFill>
+            <a:srgbClr val="F4F8FB"/>
+          </a:solidFill>
+          <a:ln>
+            <a:noFill/>
+          </a:ln>
+        </p:spPr>
+        <p:style>
+          <a:lnRef idx="1">
+            <a:schemeClr val="accent1"/>
+          </a:lnRef>
+          <a:fillRef idx="3">
+            <a:schemeClr val="accent1"/>
+          </a:fillRef>
+          <a:effectRef idx="2">
+            <a:schemeClr val="accent1"/>
+          </a:effectRef>
+          <a:fontRef idx="minor">
+            <a:schemeClr val="lt1"/>
+          </a:fontRef>
+        </p:style>
+        <p:txBody>
+          <a:bodyPr rtlCol="0" anchor="ctr"/>
+          <a:lstStyle/>
+          <a:p>
+            <a:pPr algn="ctr"/>
+          </a:p>
+        </p:txBody>
+      </p:sp>
+      <p:sp>
+        <p:nvSpPr>
+          <p:cNvPr id="13" name="Oval 12"/>
+          <p:cNvSpPr/>
+          <p:nvPr/>
+        </p:nvSpPr>
+        <p:spPr>
+          <a:xfrm>
+            <a:off x="914400" y="2606040"/>
+            <a:ext cx="411480" cy="411480"/>
+          </a:xfrm>
+          <a:prstGeom prst="ellipse">
+            <a:avLst/>
+          </a:prstGeom>
+          <a:solidFill>
+            <a:srgbClr val="11567F"/>
+          </a:solidFill>
+          <a:ln>
+            <a:noFill/>
+          </a:ln>
+        </p:spPr>
+        <p:style>
+          <a:lnRef idx="1">
+            <a:schemeClr val="accent1"/>
+          </a:lnRef>
+          <a:fillRef idx="3">
+            <a:schemeClr val="accent1"/>
+          </a:fillRef>
+          <a:effectRef idx="2">
+            <a:schemeClr val="accent1"/>
+          </a:effectRef>
+          <a:fontRef idx="minor">
+            <a:schemeClr val="lt1"/>
+          </a:fontRef>
+        </p:style>
+        <p:txBody>
+          <a:bodyPr rtlCol="0" anchor="ctr"/>
+          <a:lstStyle/>
+          <a:p>
+            <a:pPr algn="ctr"/>
+          </a:p>
+        </p:txBody>
+      </p:sp>
+      <p:sp>
+        <p:nvSpPr>
+          <p:cNvPr id="14" name="TextBox 13"/>
+          <p:cNvSpPr txBox="1"/>
+          <p:nvPr/>
+        </p:nvSpPr>
+        <p:spPr>
+          <a:xfrm>
+            <a:off x="914400" y="2606040"/>
+            <a:ext cx="411480" cy="411480"/>
+          </a:xfrm>
+          <a:prstGeom prst="rect">
+            <a:avLst/>
+          </a:prstGeom>
+          <a:noFill/>
+        </p:spPr>
+        <p:txBody>
+          <a:bodyPr wrap="square" lIns="73152" rIns="73152" tIns="36576" bIns="36576" anchor="ctr">
+            <a:spAutoFit/>
+          </a:bodyPr>
+          <a:lstStyle/>
+          <a:p>
+            <a:pPr algn="ctr">
+              <a:lnSpc>
+                <a:spcPts val="1600"/>
+              </a:lnSpc>
+            </a:pPr>
+            <a:r>
+              <a:rPr sz="1300" b="1" i="0">
+                <a:solidFill>
+                  <a:srgbClr val="FFFFFF"/>
+                </a:solidFill>
+                <a:latin typeface="Segoe UI"/>
+              </a:rPr>
+              <a:t>02</a:t>
+            </a:r>
+          </a:p>
+        </p:txBody>
+      </p:sp>
+      <p:sp>
+        <p:nvSpPr>
+          <p:cNvPr id="15" name="TextBox 14"/>
+          <p:cNvSpPr txBox="1"/>
+          <p:nvPr/>
+        </p:nvSpPr>
+        <p:spPr>
+          <a:xfrm>
+            <a:off x="1554480" y="2542032"/>
+            <a:ext cx="9601200" cy="768096"/>
+          </a:xfrm>
+          <a:prstGeom prst="rect">
+            <a:avLst/>
+          </a:prstGeom>
+          <a:noFill/>
+        </p:spPr>
+        <p:txBody>
+          <a:bodyPr wrap="square" lIns="73152" rIns="73152" tIns="36576" bIns="36576" anchor="ctr">
+            <a:spAutoFit/>
+          </a:bodyPr>
+          <a:lstStyle/>
+          <a:p>
+            <a:pPr algn="l">
+              <a:lnSpc>
+                <a:spcPts val="2000"/>
+              </a:lnSpc>
+            </a:pPr>
+            <a:r>
+              <a:rPr sz="1600" b="0" i="0">
+                <a:solidFill>
+                  <a:srgbClr val="2C3E50"/>
+                </a:solidFill>
+                <a:latin typeface="Segoe UI"/>
+              </a:rPr>
+              <a:t>Contains — provider_workflow.sql, consumer_workflow.sql, README dengan battle-tested fixes</a:t>
+            </a:r>
+          </a:p>
+        </p:txBody>
+      </p:sp>
+      <p:sp>
+        <p:nvSpPr>
+          <p:cNvPr id="16" name="Rounded Rectangle 15"/>
+          <p:cNvSpPr/>
+          <p:nvPr/>
+        </p:nvSpPr>
+        <p:spPr>
+          <a:xfrm>
+            <a:off x="640080" y="3383280"/>
+            <a:ext cx="10911535" cy="804672"/>
+          </a:xfrm>
+          <a:prstGeom prst="roundRect">
+            <a:avLst/>
+          </a:prstGeom>
+          <a:solidFill>
+            <a:srgbClr val="EEF5FA"/>
+          </a:solidFill>
+          <a:ln>
+            <a:noFill/>
+          </a:ln>
+        </p:spPr>
+        <p:style>
+          <a:lnRef idx="1">
+            <a:schemeClr val="accent1"/>
+          </a:lnRef>
+          <a:fillRef idx="3">
+            <a:schemeClr val="accent1"/>
+          </a:fillRef>
+          <a:effectRef idx="2">
+            <a:schemeClr val="accent1"/>
+          </a:effectRef>
+          <a:fontRef idx="minor">
+            <a:schemeClr val="lt1"/>
+          </a:fontRef>
+        </p:style>
+        <p:txBody>
+          <a:bodyPr rtlCol="0" anchor="ctr"/>
+          <a:lstStyle/>
+          <a:p>
+            <a:pPr algn="ctr"/>
+          </a:p>
+        </p:txBody>
+      </p:sp>
+      <p:sp>
+        <p:nvSpPr>
+          <p:cNvPr id="17" name="Oval 16"/>
+          <p:cNvSpPr/>
+          <p:nvPr/>
+        </p:nvSpPr>
+        <p:spPr>
+          <a:xfrm>
+            <a:off x="914400" y="3520440"/>
+            <a:ext cx="411480" cy="411480"/>
+          </a:xfrm>
+          <a:prstGeom prst="ellipse">
+            <a:avLst/>
+          </a:prstGeom>
+          <a:solidFill>
+            <a:srgbClr val="71D3DC"/>
+          </a:solidFill>
+          <a:ln>
+            <a:noFill/>
+          </a:ln>
+        </p:spPr>
+        <p:style>
+          <a:lnRef idx="1">
+            <a:schemeClr val="accent1"/>
+          </a:lnRef>
+          <a:fillRef idx="3">
+            <a:schemeClr val="accent1"/>
+          </a:fillRef>
+          <a:effectRef idx="2">
+            <a:schemeClr val="accent1"/>
+          </a:effectRef>
+          <a:fontRef idx="minor">
+            <a:schemeClr val="lt1"/>
+          </a:fontRef>
+        </p:style>
+        <p:txBody>
+          <a:bodyPr rtlCol="0" anchor="ctr"/>
+          <a:lstStyle/>
+          <a:p>
+            <a:pPr algn="ctr"/>
+          </a:p>
+        </p:txBody>
+      </p:sp>
+      <p:sp>
+        <p:nvSpPr>
+          <p:cNvPr id="18" name="TextBox 17"/>
+          <p:cNvSpPr txBox="1"/>
+          <p:nvPr/>
+        </p:nvSpPr>
+        <p:spPr>
+          <a:xfrm>
+            <a:off x="914400" y="3520440"/>
+            <a:ext cx="411480" cy="411480"/>
+          </a:xfrm>
+          <a:prstGeom prst="rect">
+            <a:avLst/>
+          </a:prstGeom>
+          <a:noFill/>
+        </p:spPr>
+        <p:txBody>
+          <a:bodyPr wrap="square" lIns="73152" rIns="73152" tIns="36576" bIns="36576" anchor="ctr">
+            <a:spAutoFit/>
+          </a:bodyPr>
+          <a:lstStyle/>
+          <a:p>
+            <a:pPr algn="ctr">
+              <a:lnSpc>
+                <a:spcPts val="1600"/>
+              </a:lnSpc>
+            </a:pPr>
+            <a:r>
+              <a:rPr sz="1300" b="1" i="0">
+                <a:solidFill>
+                  <a:srgbClr val="FFFFFF"/>
+                </a:solidFill>
+                <a:latin typeface="Segoe UI"/>
+              </a:rPr>
+              <a:t>03</a:t>
+            </a:r>
+          </a:p>
+        </p:txBody>
+      </p:sp>
+      <p:sp>
+        <p:nvSpPr>
+          <p:cNvPr id="19" name="TextBox 18"/>
+          <p:cNvSpPr txBox="1"/>
+          <p:nvPr/>
+        </p:nvSpPr>
+        <p:spPr>
+          <a:xfrm>
+            <a:off x="1554480" y="3456432"/>
+            <a:ext cx="9601200" cy="768096"/>
+          </a:xfrm>
+          <a:prstGeom prst="rect">
+            <a:avLst/>
+          </a:prstGeom>
+          <a:noFill/>
+        </p:spPr>
+        <p:txBody>
+          <a:bodyPr wrap="square" lIns="73152" rIns="73152" tIns="36576" bIns="36576" anchor="ctr">
+            <a:spAutoFit/>
+          </a:bodyPr>
+          <a:lstStyle/>
+          <a:p>
+            <a:pPr algn="l">
+              <a:lnSpc>
+                <a:spcPts val="2000"/>
+              </a:lnSpc>
+            </a:pPr>
+            <a:r>
+              <a:rPr sz="1600" b="0" i="0">
+                <a:solidFill>
+                  <a:srgbClr val="2C3E50"/>
+                </a:solidFill>
+                <a:latin typeface="Segoe UI"/>
+              </a:rPr>
+              <a:t>Snowflake Docs — docs.snowflake.com/en/user-guide/cleanrooms/v2/about</a:t>
+            </a:r>
+          </a:p>
+        </p:txBody>
+      </p:sp>
+      <p:sp>
+        <p:nvSpPr>
+          <p:cNvPr id="20" name="Rounded Rectangle 19"/>
+          <p:cNvSpPr/>
+          <p:nvPr/>
+        </p:nvSpPr>
+        <p:spPr>
+          <a:xfrm>
+            <a:off x="640080" y="4297680"/>
+            <a:ext cx="10911535" cy="804672"/>
+          </a:xfrm>
+          <a:prstGeom prst="roundRect">
+            <a:avLst/>
+          </a:prstGeom>
+          <a:solidFill>
+            <a:srgbClr val="F4F8FB"/>
+          </a:solidFill>
+          <a:ln>
+            <a:noFill/>
+          </a:ln>
+        </p:spPr>
+        <p:style>
+          <a:lnRef idx="1">
+            <a:schemeClr val="accent1"/>
+          </a:lnRef>
+          <a:fillRef idx="3">
+            <a:schemeClr val="accent1"/>
+          </a:fillRef>
+          <a:effectRef idx="2">
+            <a:schemeClr val="accent1"/>
+          </a:effectRef>
+          <a:fontRef idx="minor">
+            <a:schemeClr val="lt1"/>
+          </a:fontRef>
+        </p:style>
+        <p:txBody>
+          <a:bodyPr rtlCol="0" anchor="ctr"/>
+          <a:lstStyle/>
+          <a:p>
+            <a:pPr algn="ctr"/>
+          </a:p>
+        </p:txBody>
+      </p:sp>
+      <p:sp>
+        <p:nvSpPr>
+          <p:cNvPr id="21" name="Oval 20"/>
+          <p:cNvSpPr/>
+          <p:nvPr/>
+        </p:nvSpPr>
+        <p:spPr>
+          <a:xfrm>
+            <a:off x="914400" y="4434840"/>
+            <a:ext cx="411480" cy="411480"/>
+          </a:xfrm>
+          <a:prstGeom prst="ellipse">
+            <a:avLst/>
+          </a:prstGeom>
+          <a:solidFill>
+            <a:srgbClr val="FF9F36"/>
+          </a:solidFill>
+          <a:ln>
+            <a:noFill/>
+          </a:ln>
+        </p:spPr>
+        <p:style>
+          <a:lnRef idx="1">
+            <a:schemeClr val="accent1"/>
+          </a:lnRef>
+          <a:fillRef idx="3">
+            <a:schemeClr val="accent1"/>
+          </a:fillRef>
+          <a:effectRef idx="2">
+            <a:schemeClr val="accent1"/>
+          </a:effectRef>
+          <a:fontRef idx="minor">
+            <a:schemeClr val="lt1"/>
+          </a:fontRef>
+        </p:style>
+        <p:txBody>
+          <a:bodyPr rtlCol="0" anchor="ctr"/>
+          <a:lstStyle/>
+          <a:p>
+            <a:pPr algn="ctr"/>
+          </a:p>
+        </p:txBody>
+      </p:sp>
+      <p:sp>
+        <p:nvSpPr>
+          <p:cNvPr id="22" name="TextBox 21"/>
+          <p:cNvSpPr txBox="1"/>
+          <p:nvPr/>
+        </p:nvSpPr>
+        <p:spPr>
+          <a:xfrm>
+            <a:off x="914400" y="4434840"/>
+            <a:ext cx="411480" cy="411480"/>
+          </a:xfrm>
+          <a:prstGeom prst="rect">
+            <a:avLst/>
+          </a:prstGeom>
+          <a:noFill/>
+        </p:spPr>
+        <p:txBody>
+          <a:bodyPr wrap="square" lIns="73152" rIns="73152" tIns="36576" bIns="36576" anchor="ctr">
+            <a:spAutoFit/>
+          </a:bodyPr>
+          <a:lstStyle/>
+          <a:p>
+            <a:pPr algn="ctr">
+              <a:lnSpc>
+                <a:spcPts val="1600"/>
+              </a:lnSpc>
+            </a:pPr>
+            <a:r>
+              <a:rPr sz="1300" b="1" i="0">
+                <a:solidFill>
+                  <a:srgbClr val="FFFFFF"/>
+                </a:solidFill>
+                <a:latin typeface="Segoe UI"/>
+              </a:rPr>
+              <a:t>04</a:t>
+            </a:r>
+          </a:p>
+        </p:txBody>
+      </p:sp>
+      <p:sp>
+        <p:nvSpPr>
+          <p:cNvPr id="23" name="TextBox 22"/>
+          <p:cNvSpPr txBox="1"/>
+          <p:nvPr/>
+        </p:nvSpPr>
+        <p:spPr>
+          <a:xfrm>
+            <a:off x="1554480" y="4370832"/>
+            <a:ext cx="9601200" cy="768096"/>
+          </a:xfrm>
+          <a:prstGeom prst="rect">
+            <a:avLst/>
+          </a:prstGeom>
+          <a:noFill/>
+        </p:spPr>
+        <p:txBody>
+          <a:bodyPr wrap="square" lIns="73152" rIns="73152" tIns="36576" bIns="36576" anchor="ctr">
+            <a:spAutoFit/>
+          </a:bodyPr>
+          <a:lstStyle/>
+          <a:p>
+            <a:pPr algn="l">
+              <a:lnSpc>
+                <a:spcPts val="2000"/>
+              </a:lnSpc>
+            </a:pPr>
+            <a:r>
+              <a:rPr sz="1600" b="0" i="0">
+                <a:solidFill>
+                  <a:srgbClr val="2C3E50"/>
+                </a:solidFill>
+                <a:latin typeface="Segoe UI"/>
+              </a:rPr>
+              <a:t>Spec Reference — docs.snowflake.com/en/user-guide/cleanrooms/v2/spec-reference</a:t>
+            </a:r>
+          </a:p>
+        </p:txBody>
+      </p:sp>
+      <p:sp>
+        <p:nvSpPr>
+          <p:cNvPr id="24" name="Rounded Rectangle 23"/>
+          <p:cNvSpPr/>
+          <p:nvPr/>
+        </p:nvSpPr>
+        <p:spPr>
+          <a:xfrm>
+            <a:off x="640080" y="5212080"/>
+            <a:ext cx="10911535" cy="804672"/>
+          </a:xfrm>
+          <a:prstGeom prst="roundRect">
+            <a:avLst/>
+          </a:prstGeom>
+          <a:solidFill>
+            <a:srgbClr val="EEF5FA"/>
+          </a:solidFill>
+          <a:ln>
+            <a:noFill/>
+          </a:ln>
+        </p:spPr>
+        <p:style>
+          <a:lnRef idx="1">
+            <a:schemeClr val="accent1"/>
+          </a:lnRef>
+          <a:fillRef idx="3">
+            <a:schemeClr val="accent1"/>
+          </a:fillRef>
+          <a:effectRef idx="2">
+            <a:schemeClr val="accent1"/>
+          </a:effectRef>
+          <a:fontRef idx="minor">
+            <a:schemeClr val="lt1"/>
+          </a:fontRef>
+        </p:style>
+        <p:txBody>
+          <a:bodyPr rtlCol="0" anchor="ctr"/>
+          <a:lstStyle/>
+          <a:p>
+            <a:pPr algn="ctr"/>
+          </a:p>
+        </p:txBody>
+      </p:sp>
+      <p:sp>
+        <p:nvSpPr>
+          <p:cNvPr id="25" name="Oval 24"/>
+          <p:cNvSpPr/>
+          <p:nvPr/>
+        </p:nvSpPr>
+        <p:spPr>
+          <a:xfrm>
+            <a:off x="914400" y="5349240"/>
+            <a:ext cx="411480" cy="411480"/>
+          </a:xfrm>
+          <a:prstGeom prst="ellipse">
+            <a:avLst/>
+          </a:prstGeom>
+          <a:solidFill>
+            <a:srgbClr val="29B5E8"/>
+          </a:solidFill>
+          <a:ln>
+            <a:noFill/>
+          </a:ln>
+        </p:spPr>
+        <p:style>
+          <a:lnRef idx="1">
+            <a:schemeClr val="accent1"/>
+          </a:lnRef>
+          <a:fillRef idx="3">
+            <a:schemeClr val="accent1"/>
+          </a:fillRef>
+          <a:effectRef idx="2">
+            <a:schemeClr val="accent1"/>
+          </a:effectRef>
+          <a:fontRef idx="minor">
+            <a:schemeClr val="lt1"/>
+          </a:fontRef>
+        </p:style>
+        <p:txBody>
+          <a:bodyPr rtlCol="0" anchor="ctr"/>
+          <a:lstStyle/>
+          <a:p>
+            <a:pPr algn="ctr"/>
+          </a:p>
+        </p:txBody>
+      </p:sp>
+      <p:sp>
+        <p:nvSpPr>
+          <p:cNvPr id="26" name="TextBox 25"/>
+          <p:cNvSpPr txBox="1"/>
+          <p:nvPr/>
+        </p:nvSpPr>
+        <p:spPr>
+          <a:xfrm>
+            <a:off x="914400" y="5349240"/>
+            <a:ext cx="411480" cy="411480"/>
+          </a:xfrm>
+          <a:prstGeom prst="rect">
+            <a:avLst/>
+          </a:prstGeom>
+          <a:noFill/>
+        </p:spPr>
+        <p:txBody>
+          <a:bodyPr wrap="square" lIns="73152" rIns="73152" tIns="36576" bIns="36576" anchor="ctr">
+            <a:spAutoFit/>
+          </a:bodyPr>
+          <a:lstStyle/>
+          <a:p>
+            <a:pPr algn="ctr">
+              <a:lnSpc>
+                <a:spcPts val="1600"/>
+              </a:lnSpc>
+            </a:pPr>
+            <a:r>
+              <a:rPr sz="1300" b="1" i="0">
+                <a:solidFill>
+                  <a:srgbClr val="FFFFFF"/>
+                </a:solidFill>
+                <a:latin typeface="Segoe UI"/>
+              </a:rPr>
+              <a:t>05</a:t>
+            </a:r>
+          </a:p>
+        </p:txBody>
+      </p:sp>
+      <p:sp>
+        <p:nvSpPr>
+          <p:cNvPr id="27" name="TextBox 26"/>
+          <p:cNvSpPr txBox="1"/>
+          <p:nvPr/>
+        </p:nvSpPr>
+        <p:spPr>
+          <a:xfrm>
+            <a:off x="1554480" y="5285232"/>
+            <a:ext cx="9601200" cy="768096"/>
+          </a:xfrm>
+          <a:prstGeom prst="rect">
+            <a:avLst/>
+          </a:prstGeom>
+          <a:noFill/>
+        </p:spPr>
+        <p:txBody>
+          <a:bodyPr wrap="square" lIns="73152" rIns="73152" tIns="36576" bIns="36576" anchor="ctr">
+            <a:spAutoFit/>
+          </a:bodyPr>
+          <a:lstStyle/>
+          <a:p>
+            <a:pPr algn="l">
+              <a:lnSpc>
+                <a:spcPts val="2000"/>
+              </a:lnSpc>
+            </a:pPr>
+            <a:r>
+              <a:rPr sz="1600" b="0" i="0">
+                <a:solidFill>
+                  <a:srgbClr val="2C3E50"/>
+                </a:solidFill>
+                <a:latin typeface="Segoe UI"/>
+              </a:rPr>
+              <a:t>API Reference — docs.snowflake.com/en/user-guide/cleanrooms/v2/v2-api-reference</a:t>
+            </a:r>
+          </a:p>
+        </p:txBody>
+      </p:sp>
+      <p:sp>
+        <p:nvSpPr>
+          <p:cNvPr id="28" name="TextBox 27"/>
+          <p:cNvSpPr txBox="1"/>
+          <p:nvPr/>
+        </p:nvSpPr>
+        <p:spPr>
+          <a:xfrm>
+            <a:off x="548640" y="6446520"/>
+            <a:ext cx="9144000" cy="274320"/>
+          </a:xfrm>
+          <a:prstGeom prst="rect">
+            <a:avLst/>
+          </a:prstGeom>
+          <a:noFill/>
+        </p:spPr>
+        <p:txBody>
+          <a:bodyPr wrap="square" lIns="73152" rIns="73152" tIns="36576" bIns="36576" anchor="t">
+            <a:spAutoFit/>
+          </a:bodyPr>
+          <a:lstStyle/>
+          <a:p>
+            <a:pPr algn="l">
+              <a:lnSpc>
+                <a:spcPts val="1100"/>
+              </a:lnSpc>
+            </a:pPr>
+            <a:r>
+              <a:rPr sz="900" b="0" i="0">
+                <a:solidFill>
+                  <a:srgbClr val="95A5A6"/>
+                </a:solidFill>
+                <a:latin typeface="Segoe UI"/>
+              </a:rPr>
+              <a:t>DCR Collaboration API v2 | SFSEAPAC | 2026   ·   58 / 60</a:t>
+            </a:r>
+          </a:p>
+        </p:txBody>
+      </p:sp>
+    </p:spTree>
+  </p:cSld>
+  <p:clrMapOvr>
+    <a:masterClrMapping/>
+  </p:clrMapOvr>
+</p:sld>
+</file>
+
+<file path=ppt/slides/slide59.xml><?xml version="1.0" encoding="utf-8"?>
 <p:sld xmlns:a="http://schemas.openxmlformats.org/drawingml/2006/main" xmlns:p="http://schemas.openxmlformats.org/presentationml/2006/main" xmlns:r="http://schemas.openxmlformats.org/officeDocument/2006/relationships">
   <p:cSld>
     <p:bg>
@@ -44011,447 +47765,6 @@
                 <a:latin typeface="Segoe UI"/>
               </a:rPr>
               <a:t>DCR Single-Query Benchmark</a:t>
-            </a:r>
-          </a:p>
-        </p:txBody>
-      </p:sp>
-    </p:spTree>
-  </p:cSld>
-  <p:clrMapOvr>
-    <a:masterClrMapping/>
-  </p:clrMapOvr>
-</p:sld>
-</file>
-
-<file path=ppt/slides/slide56.xml><?xml version="1.0" encoding="utf-8"?>
-<p:sld xmlns:a="http://schemas.openxmlformats.org/drawingml/2006/main" xmlns:p="http://schemas.openxmlformats.org/presentationml/2006/main" xmlns:r="http://schemas.openxmlformats.org/officeDocument/2006/relationships">
-  <p:cSld>
-    <p:bg>
-      <p:bgPr>
-        <a:solidFill>
-          <a:srgbClr val="1B2A3D"/>
-        </a:solidFill>
-        <a:effectLst/>
-      </p:bgPr>
-    </p:bg>
-    <p:spTree>
-      <p:nvGrpSpPr>
-        <p:cNvPr id="1" name=""/>
-        <p:cNvGrpSpPr/>
-        <p:nvPr/>
-      </p:nvGrpSpPr>
-      <p:grpSpPr/>
-      <p:sp>
-        <p:nvSpPr>
-          <p:cNvPr id="2" name="Oval 1"/>
-          <p:cNvSpPr/>
-          <p:nvPr/>
-        </p:nvSpPr>
-        <p:spPr>
-          <a:xfrm>
-            <a:off x="9905695" y="-731520"/>
-            <a:ext cx="2743200" cy="2743200"/>
-          </a:xfrm>
-          <a:prstGeom prst="ellipse">
-            <a:avLst/>
-          </a:prstGeom>
-          <a:solidFill>
-            <a:srgbClr val="223850"/>
-          </a:solidFill>
-          <a:ln>
-            <a:noFill/>
-          </a:ln>
-        </p:spPr>
-        <p:style>
-          <a:lnRef idx="1">
-            <a:schemeClr val="accent1"/>
-          </a:lnRef>
-          <a:fillRef idx="3">
-            <a:schemeClr val="accent1"/>
-          </a:fillRef>
-          <a:effectRef idx="2">
-            <a:schemeClr val="accent1"/>
-          </a:effectRef>
-          <a:fontRef idx="minor">
-            <a:schemeClr val="lt1"/>
-          </a:fontRef>
-        </p:style>
-        <p:txBody>
-          <a:bodyPr rtlCol="0" anchor="ctr"/>
-          <a:lstStyle/>
-          <a:p>
-            <a:pPr algn="ctr"/>
-          </a:p>
-        </p:txBody>
-      </p:sp>
-      <p:sp>
-        <p:nvSpPr>
-          <p:cNvPr id="3" name="Oval 2"/>
-          <p:cNvSpPr/>
-          <p:nvPr/>
-        </p:nvSpPr>
-        <p:spPr>
-          <a:xfrm>
-            <a:off x="8076895" y="5486400"/>
-            <a:ext cx="1828800" cy="1828800"/>
-          </a:xfrm>
-          <a:prstGeom prst="ellipse">
-            <a:avLst/>
-          </a:prstGeom>
-          <a:solidFill>
-            <a:srgbClr val="1F344C"/>
-          </a:solidFill>
-          <a:ln>
-            <a:noFill/>
-          </a:ln>
-        </p:spPr>
-        <p:style>
-          <a:lnRef idx="1">
-            <a:schemeClr val="accent1"/>
-          </a:lnRef>
-          <a:fillRef idx="3">
-            <a:schemeClr val="accent1"/>
-          </a:fillRef>
-          <a:effectRef idx="2">
-            <a:schemeClr val="accent1"/>
-          </a:effectRef>
-          <a:fontRef idx="minor">
-            <a:schemeClr val="lt1"/>
-          </a:fontRef>
-        </p:style>
-        <p:txBody>
-          <a:bodyPr rtlCol="0" anchor="ctr"/>
-          <a:lstStyle/>
-          <a:p>
-            <a:pPr algn="ctr"/>
-          </a:p>
-        </p:txBody>
-      </p:sp>
-      <p:sp>
-        <p:nvSpPr>
-          <p:cNvPr id="4" name="Oval 3"/>
-          <p:cNvSpPr/>
-          <p:nvPr/>
-        </p:nvSpPr>
-        <p:spPr>
-          <a:xfrm>
-            <a:off x="-457200" y="4572000"/>
-            <a:ext cx="1371600" cy="1371600"/>
-          </a:xfrm>
-          <a:prstGeom prst="ellipse">
-            <a:avLst/>
-          </a:prstGeom>
-          <a:solidFill>
-            <a:srgbClr val="20354D"/>
-          </a:solidFill>
-          <a:ln>
-            <a:noFill/>
-          </a:ln>
-        </p:spPr>
-        <p:style>
-          <a:lnRef idx="1">
-            <a:schemeClr val="accent1"/>
-          </a:lnRef>
-          <a:fillRef idx="3">
-            <a:schemeClr val="accent1"/>
-          </a:fillRef>
-          <a:effectRef idx="2">
-            <a:schemeClr val="accent1"/>
-          </a:effectRef>
-          <a:fontRef idx="minor">
-            <a:schemeClr val="lt1"/>
-          </a:fontRef>
-        </p:style>
-        <p:txBody>
-          <a:bodyPr rtlCol="0" anchor="ctr"/>
-          <a:lstStyle/>
-          <a:p>
-            <a:pPr algn="ctr"/>
-          </a:p>
-        </p:txBody>
-      </p:sp>
-      <p:sp>
-        <p:nvSpPr>
-          <p:cNvPr id="5" name="Rectangle 4"/>
-          <p:cNvSpPr/>
-          <p:nvPr/>
-        </p:nvSpPr>
-        <p:spPr>
-          <a:xfrm>
-            <a:off x="0" y="0"/>
-            <a:ext cx="12191695" cy="54864"/>
-          </a:xfrm>
-          <a:prstGeom prst="rect">
-            <a:avLst/>
-          </a:prstGeom>
-          <a:gradFill rotWithShape="1">
-            <a:gsLst>
-              <a:gs pos="0">
-                <a:srgbClr val="29B5E8"/>
-              </a:gs>
-              <a:gs pos="100000">
-                <a:srgbClr val="71D3DC"/>
-              </a:gs>
-            </a:gsLst>
-            <a:lin scaled="0" ang="16200000"/>
-          </a:gradFill>
-          <a:ln>
-            <a:noFill/>
-          </a:ln>
-        </p:spPr>
-        <p:style>
-          <a:lnRef idx="1">
-            <a:schemeClr val="accent1"/>
-          </a:lnRef>
-          <a:fillRef idx="3">
-            <a:schemeClr val="accent1"/>
-          </a:fillRef>
-          <a:effectRef idx="2">
-            <a:schemeClr val="accent1"/>
-          </a:effectRef>
-          <a:fontRef idx="minor">
-            <a:schemeClr val="lt1"/>
-          </a:fontRef>
-        </p:style>
-        <p:txBody>
-          <a:bodyPr rtlCol="0" anchor="ctr"/>
-          <a:lstStyle/>
-          <a:p>
-            <a:pPr algn="ctr"/>
-          </a:p>
-        </p:txBody>
-      </p:sp>
-      <p:sp>
-        <p:nvSpPr>
-          <p:cNvPr id="6" name="Rectangle 5"/>
-          <p:cNvSpPr/>
-          <p:nvPr/>
-        </p:nvSpPr>
-        <p:spPr>
-          <a:xfrm>
-            <a:off x="0" y="6803136"/>
-            <a:ext cx="12191695" cy="54864"/>
-          </a:xfrm>
-          <a:prstGeom prst="rect">
-            <a:avLst/>
-          </a:prstGeom>
-          <a:gradFill rotWithShape="1">
-            <a:gsLst>
-              <a:gs pos="0">
-                <a:srgbClr val="71D3DC"/>
-              </a:gs>
-              <a:gs pos="100000">
-                <a:srgbClr val="29B5E8"/>
-              </a:gs>
-            </a:gsLst>
-            <a:lin scaled="0" ang="16200000"/>
-          </a:gradFill>
-          <a:ln>
-            <a:noFill/>
-          </a:ln>
-        </p:spPr>
-        <p:style>
-          <a:lnRef idx="1">
-            <a:schemeClr val="accent1"/>
-          </a:lnRef>
-          <a:fillRef idx="3">
-            <a:schemeClr val="accent1"/>
-          </a:fillRef>
-          <a:effectRef idx="2">
-            <a:schemeClr val="accent1"/>
-          </a:effectRef>
-          <a:fontRef idx="minor">
-            <a:schemeClr val="lt1"/>
-          </a:fontRef>
-        </p:style>
-        <p:txBody>
-          <a:bodyPr rtlCol="0" anchor="ctr"/>
-          <a:lstStyle/>
-          <a:p>
-            <a:pPr algn="ctr"/>
-          </a:p>
-        </p:txBody>
-      </p:sp>
-      <p:pic>
-        <p:nvPicPr>
-          <p:cNvPr id="7" name="Picture 6" descr="snowflake_icon_white.png"/>
-          <p:cNvPicPr>
-            <a:picLocks noChangeAspect="1"/>
-          </p:cNvPicPr>
-          <p:nvPr/>
-        </p:nvPicPr>
-        <p:blipFill>
-          <a:blip r:embed="rId2"/>
-          <a:stretch>
-            <a:fillRect/>
-          </a:stretch>
-        </p:blipFill>
-        <p:spPr>
-          <a:xfrm>
-            <a:off x="5212080" y="1188720"/>
-            <a:ext cx="1197904" cy="1097280"/>
-          </a:xfrm>
-          <a:prstGeom prst="rect">
-            <a:avLst/>
-          </a:prstGeom>
-        </p:spPr>
-      </p:pic>
-      <p:sp>
-        <p:nvSpPr>
-          <p:cNvPr id="8" name="TextBox 7"/>
-          <p:cNvSpPr txBox="1"/>
-          <p:nvPr/>
-        </p:nvSpPr>
-        <p:spPr>
-          <a:xfrm>
-            <a:off x="822960" y="2926080"/>
-            <a:ext cx="10515600" cy="1371600"/>
-          </a:xfrm>
-          <a:prstGeom prst="rect">
-            <a:avLst/>
-          </a:prstGeom>
-          <a:noFill/>
-        </p:spPr>
-        <p:txBody>
-          <a:bodyPr wrap="square" lIns="73152" rIns="73152" tIns="36576" bIns="36576" anchor="t">
-            <a:spAutoFit/>
-          </a:bodyPr>
-          <a:lstStyle/>
-          <a:p>
-            <a:pPr algn="ctr">
-              <a:lnSpc>
-                <a:spcPts val="7800"/>
-              </a:lnSpc>
-            </a:pPr>
-            <a:r>
-              <a:rPr sz="6000" b="1" i="0">
-                <a:solidFill>
-                  <a:srgbClr val="FFFFFF"/>
-                </a:solidFill>
-                <a:latin typeface="Calibri Light"/>
-              </a:rPr>
-              <a:t>THANK YOU</a:t>
-            </a:r>
-          </a:p>
-        </p:txBody>
-      </p:sp>
-      <p:sp>
-        <p:nvSpPr>
-          <p:cNvPr id="9" name="TextBox 8"/>
-          <p:cNvSpPr txBox="1"/>
-          <p:nvPr/>
-        </p:nvSpPr>
-        <p:spPr>
-          <a:xfrm>
-            <a:off x="822960" y="4480560"/>
-            <a:ext cx="10515600" cy="548640"/>
-          </a:xfrm>
-          <a:prstGeom prst="rect">
-            <a:avLst/>
-          </a:prstGeom>
-          <a:noFill/>
-        </p:spPr>
-        <p:txBody>
-          <a:bodyPr wrap="square" lIns="73152" rIns="73152" tIns="36576" bIns="36576" anchor="t">
-            <a:spAutoFit/>
-          </a:bodyPr>
-          <a:lstStyle/>
-          <a:p>
-            <a:pPr algn="ctr">
-              <a:lnSpc>
-                <a:spcPts val="2600"/>
-              </a:lnSpc>
-            </a:pPr>
-            <a:r>
-              <a:rPr sz="2000" b="0" i="0">
-                <a:solidFill>
-                  <a:srgbClr val="71D3DC"/>
-                </a:solidFill>
-                <a:latin typeface="Segoe UI"/>
-              </a:rPr>
-              <a:t>github.com/arzamuhammad/dcr-collaboration-api</a:t>
-            </a:r>
-          </a:p>
-        </p:txBody>
-      </p:sp>
-      <p:sp>
-        <p:nvSpPr>
-          <p:cNvPr id="10" name="Rounded Rectangle 9"/>
-          <p:cNvSpPr/>
-          <p:nvPr/>
-        </p:nvSpPr>
-        <p:spPr>
-          <a:xfrm>
-            <a:off x="4114800" y="5394960"/>
-            <a:ext cx="3931920" cy="457200"/>
-          </a:xfrm>
-          <a:prstGeom prst="roundRect">
-            <a:avLst/>
-          </a:prstGeom>
-          <a:solidFill>
-            <a:srgbClr val="29B5E8"/>
-          </a:solidFill>
-          <a:ln>
-            <a:noFill/>
-          </a:ln>
-        </p:spPr>
-        <p:style>
-          <a:lnRef idx="1">
-            <a:schemeClr val="accent1"/>
-          </a:lnRef>
-          <a:fillRef idx="3">
-            <a:schemeClr val="accent1"/>
-          </a:fillRef>
-          <a:effectRef idx="2">
-            <a:schemeClr val="accent1"/>
-          </a:effectRef>
-          <a:fontRef idx="minor">
-            <a:schemeClr val="lt1"/>
-          </a:fontRef>
-        </p:style>
-        <p:txBody>
-          <a:bodyPr rtlCol="0" anchor="ctr"/>
-          <a:lstStyle/>
-          <a:p>
-            <a:pPr algn="ctr"/>
-          </a:p>
-        </p:txBody>
-      </p:sp>
-      <p:sp>
-        <p:nvSpPr>
-          <p:cNvPr id="11" name="TextBox 10"/>
-          <p:cNvSpPr txBox="1"/>
-          <p:nvPr/>
-        </p:nvSpPr>
-        <p:spPr>
-          <a:xfrm>
-            <a:off x="4114800" y="5394960"/>
-            <a:ext cx="3931920" cy="457200"/>
-          </a:xfrm>
-          <a:prstGeom prst="rect">
-            <a:avLst/>
-          </a:prstGeom>
-          <a:noFill/>
-        </p:spPr>
-        <p:txBody>
-          <a:bodyPr wrap="square" lIns="73152" rIns="73152" tIns="36576" bIns="36576" anchor="ctr">
-            <a:spAutoFit/>
-          </a:bodyPr>
-          <a:lstStyle/>
-          <a:p>
-            <a:pPr algn="ctr">
-              <a:lnSpc>
-                <a:spcPts val="1600"/>
-              </a:lnSpc>
-            </a:pPr>
-            <a:r>
-              <a:rPr sz="1300" b="1" i="0">
-                <a:solidFill>
-                  <a:srgbClr val="FFFFFF"/>
-                </a:solidFill>
-                <a:latin typeface="Segoe UI"/>
-              </a:rPr>
-              <a:t>ardiyan.muhammad@snowflake.com</a:t>
             </a:r>
           </a:p>
         </p:txBody>
@@ -44815,6 +48128,447 @@
 </p:sld>
 </file>
 
+<file path=ppt/slides/slide60.xml><?xml version="1.0" encoding="utf-8"?>
+<p:sld xmlns:a="http://schemas.openxmlformats.org/drawingml/2006/main" xmlns:p="http://schemas.openxmlformats.org/presentationml/2006/main" xmlns:r="http://schemas.openxmlformats.org/officeDocument/2006/relationships">
+  <p:cSld>
+    <p:bg>
+      <p:bgPr>
+        <a:solidFill>
+          <a:srgbClr val="1B2A3D"/>
+        </a:solidFill>
+        <a:effectLst/>
+      </p:bgPr>
+    </p:bg>
+    <p:spTree>
+      <p:nvGrpSpPr>
+        <p:cNvPr id="1" name=""/>
+        <p:cNvGrpSpPr/>
+        <p:nvPr/>
+      </p:nvGrpSpPr>
+      <p:grpSpPr/>
+      <p:sp>
+        <p:nvSpPr>
+          <p:cNvPr id="2" name="Oval 1"/>
+          <p:cNvSpPr/>
+          <p:nvPr/>
+        </p:nvSpPr>
+        <p:spPr>
+          <a:xfrm>
+            <a:off x="9905695" y="-731520"/>
+            <a:ext cx="2743200" cy="2743200"/>
+          </a:xfrm>
+          <a:prstGeom prst="ellipse">
+            <a:avLst/>
+          </a:prstGeom>
+          <a:solidFill>
+            <a:srgbClr val="223850"/>
+          </a:solidFill>
+          <a:ln>
+            <a:noFill/>
+          </a:ln>
+        </p:spPr>
+        <p:style>
+          <a:lnRef idx="1">
+            <a:schemeClr val="accent1"/>
+          </a:lnRef>
+          <a:fillRef idx="3">
+            <a:schemeClr val="accent1"/>
+          </a:fillRef>
+          <a:effectRef idx="2">
+            <a:schemeClr val="accent1"/>
+          </a:effectRef>
+          <a:fontRef idx="minor">
+            <a:schemeClr val="lt1"/>
+          </a:fontRef>
+        </p:style>
+        <p:txBody>
+          <a:bodyPr rtlCol="0" anchor="ctr"/>
+          <a:lstStyle/>
+          <a:p>
+            <a:pPr algn="ctr"/>
+          </a:p>
+        </p:txBody>
+      </p:sp>
+      <p:sp>
+        <p:nvSpPr>
+          <p:cNvPr id="3" name="Oval 2"/>
+          <p:cNvSpPr/>
+          <p:nvPr/>
+        </p:nvSpPr>
+        <p:spPr>
+          <a:xfrm>
+            <a:off x="8076895" y="5486400"/>
+            <a:ext cx="1828800" cy="1828800"/>
+          </a:xfrm>
+          <a:prstGeom prst="ellipse">
+            <a:avLst/>
+          </a:prstGeom>
+          <a:solidFill>
+            <a:srgbClr val="1F344C"/>
+          </a:solidFill>
+          <a:ln>
+            <a:noFill/>
+          </a:ln>
+        </p:spPr>
+        <p:style>
+          <a:lnRef idx="1">
+            <a:schemeClr val="accent1"/>
+          </a:lnRef>
+          <a:fillRef idx="3">
+            <a:schemeClr val="accent1"/>
+          </a:fillRef>
+          <a:effectRef idx="2">
+            <a:schemeClr val="accent1"/>
+          </a:effectRef>
+          <a:fontRef idx="minor">
+            <a:schemeClr val="lt1"/>
+          </a:fontRef>
+        </p:style>
+        <p:txBody>
+          <a:bodyPr rtlCol="0" anchor="ctr"/>
+          <a:lstStyle/>
+          <a:p>
+            <a:pPr algn="ctr"/>
+          </a:p>
+        </p:txBody>
+      </p:sp>
+      <p:sp>
+        <p:nvSpPr>
+          <p:cNvPr id="4" name="Oval 3"/>
+          <p:cNvSpPr/>
+          <p:nvPr/>
+        </p:nvSpPr>
+        <p:spPr>
+          <a:xfrm>
+            <a:off x="-457200" y="4572000"/>
+            <a:ext cx="1371600" cy="1371600"/>
+          </a:xfrm>
+          <a:prstGeom prst="ellipse">
+            <a:avLst/>
+          </a:prstGeom>
+          <a:solidFill>
+            <a:srgbClr val="20354D"/>
+          </a:solidFill>
+          <a:ln>
+            <a:noFill/>
+          </a:ln>
+        </p:spPr>
+        <p:style>
+          <a:lnRef idx="1">
+            <a:schemeClr val="accent1"/>
+          </a:lnRef>
+          <a:fillRef idx="3">
+            <a:schemeClr val="accent1"/>
+          </a:fillRef>
+          <a:effectRef idx="2">
+            <a:schemeClr val="accent1"/>
+          </a:effectRef>
+          <a:fontRef idx="minor">
+            <a:schemeClr val="lt1"/>
+          </a:fontRef>
+        </p:style>
+        <p:txBody>
+          <a:bodyPr rtlCol="0" anchor="ctr"/>
+          <a:lstStyle/>
+          <a:p>
+            <a:pPr algn="ctr"/>
+          </a:p>
+        </p:txBody>
+      </p:sp>
+      <p:sp>
+        <p:nvSpPr>
+          <p:cNvPr id="5" name="Rectangle 4"/>
+          <p:cNvSpPr/>
+          <p:nvPr/>
+        </p:nvSpPr>
+        <p:spPr>
+          <a:xfrm>
+            <a:off x="0" y="0"/>
+            <a:ext cx="12191695" cy="54864"/>
+          </a:xfrm>
+          <a:prstGeom prst="rect">
+            <a:avLst/>
+          </a:prstGeom>
+          <a:gradFill rotWithShape="1">
+            <a:gsLst>
+              <a:gs pos="0">
+                <a:srgbClr val="29B5E8"/>
+              </a:gs>
+              <a:gs pos="100000">
+                <a:srgbClr val="71D3DC"/>
+              </a:gs>
+            </a:gsLst>
+            <a:lin scaled="0" ang="16200000"/>
+          </a:gradFill>
+          <a:ln>
+            <a:noFill/>
+          </a:ln>
+        </p:spPr>
+        <p:style>
+          <a:lnRef idx="1">
+            <a:schemeClr val="accent1"/>
+          </a:lnRef>
+          <a:fillRef idx="3">
+            <a:schemeClr val="accent1"/>
+          </a:fillRef>
+          <a:effectRef idx="2">
+            <a:schemeClr val="accent1"/>
+          </a:effectRef>
+          <a:fontRef idx="minor">
+            <a:schemeClr val="lt1"/>
+          </a:fontRef>
+        </p:style>
+        <p:txBody>
+          <a:bodyPr rtlCol="0" anchor="ctr"/>
+          <a:lstStyle/>
+          <a:p>
+            <a:pPr algn="ctr"/>
+          </a:p>
+        </p:txBody>
+      </p:sp>
+      <p:sp>
+        <p:nvSpPr>
+          <p:cNvPr id="6" name="Rectangle 5"/>
+          <p:cNvSpPr/>
+          <p:nvPr/>
+        </p:nvSpPr>
+        <p:spPr>
+          <a:xfrm>
+            <a:off x="0" y="6803136"/>
+            <a:ext cx="12191695" cy="54864"/>
+          </a:xfrm>
+          <a:prstGeom prst="rect">
+            <a:avLst/>
+          </a:prstGeom>
+          <a:gradFill rotWithShape="1">
+            <a:gsLst>
+              <a:gs pos="0">
+                <a:srgbClr val="71D3DC"/>
+              </a:gs>
+              <a:gs pos="100000">
+                <a:srgbClr val="29B5E8"/>
+              </a:gs>
+            </a:gsLst>
+            <a:lin scaled="0" ang="16200000"/>
+          </a:gradFill>
+          <a:ln>
+            <a:noFill/>
+          </a:ln>
+        </p:spPr>
+        <p:style>
+          <a:lnRef idx="1">
+            <a:schemeClr val="accent1"/>
+          </a:lnRef>
+          <a:fillRef idx="3">
+            <a:schemeClr val="accent1"/>
+          </a:fillRef>
+          <a:effectRef idx="2">
+            <a:schemeClr val="accent1"/>
+          </a:effectRef>
+          <a:fontRef idx="minor">
+            <a:schemeClr val="lt1"/>
+          </a:fontRef>
+        </p:style>
+        <p:txBody>
+          <a:bodyPr rtlCol="0" anchor="ctr"/>
+          <a:lstStyle/>
+          <a:p>
+            <a:pPr algn="ctr"/>
+          </a:p>
+        </p:txBody>
+      </p:sp>
+      <p:pic>
+        <p:nvPicPr>
+          <p:cNvPr id="7" name="Picture 6" descr="snowflake_icon_white.png"/>
+          <p:cNvPicPr>
+            <a:picLocks noChangeAspect="1"/>
+          </p:cNvPicPr>
+          <p:nvPr/>
+        </p:nvPicPr>
+        <p:blipFill>
+          <a:blip r:embed="rId2"/>
+          <a:stretch>
+            <a:fillRect/>
+          </a:stretch>
+        </p:blipFill>
+        <p:spPr>
+          <a:xfrm>
+            <a:off x="5212080" y="1188720"/>
+            <a:ext cx="1197904" cy="1097280"/>
+          </a:xfrm>
+          <a:prstGeom prst="rect">
+            <a:avLst/>
+          </a:prstGeom>
+        </p:spPr>
+      </p:pic>
+      <p:sp>
+        <p:nvSpPr>
+          <p:cNvPr id="8" name="TextBox 7"/>
+          <p:cNvSpPr txBox="1"/>
+          <p:nvPr/>
+        </p:nvSpPr>
+        <p:spPr>
+          <a:xfrm>
+            <a:off x="822960" y="2926080"/>
+            <a:ext cx="10515600" cy="1371600"/>
+          </a:xfrm>
+          <a:prstGeom prst="rect">
+            <a:avLst/>
+          </a:prstGeom>
+          <a:noFill/>
+        </p:spPr>
+        <p:txBody>
+          <a:bodyPr wrap="square" lIns="73152" rIns="73152" tIns="36576" bIns="36576" anchor="t">
+            <a:spAutoFit/>
+          </a:bodyPr>
+          <a:lstStyle/>
+          <a:p>
+            <a:pPr algn="ctr">
+              <a:lnSpc>
+                <a:spcPts val="7800"/>
+              </a:lnSpc>
+            </a:pPr>
+            <a:r>
+              <a:rPr sz="6000" b="1" i="0">
+                <a:solidFill>
+                  <a:srgbClr val="FFFFFF"/>
+                </a:solidFill>
+                <a:latin typeface="Calibri Light"/>
+              </a:rPr>
+              <a:t>THANK YOU</a:t>
+            </a:r>
+          </a:p>
+        </p:txBody>
+      </p:sp>
+      <p:sp>
+        <p:nvSpPr>
+          <p:cNvPr id="9" name="TextBox 8"/>
+          <p:cNvSpPr txBox="1"/>
+          <p:nvPr/>
+        </p:nvSpPr>
+        <p:spPr>
+          <a:xfrm>
+            <a:off x="822960" y="4480560"/>
+            <a:ext cx="10515600" cy="548640"/>
+          </a:xfrm>
+          <a:prstGeom prst="rect">
+            <a:avLst/>
+          </a:prstGeom>
+          <a:noFill/>
+        </p:spPr>
+        <p:txBody>
+          <a:bodyPr wrap="square" lIns="73152" rIns="73152" tIns="36576" bIns="36576" anchor="t">
+            <a:spAutoFit/>
+          </a:bodyPr>
+          <a:lstStyle/>
+          <a:p>
+            <a:pPr algn="ctr">
+              <a:lnSpc>
+                <a:spcPts val="2600"/>
+              </a:lnSpc>
+            </a:pPr>
+            <a:r>
+              <a:rPr sz="2000" b="0" i="0">
+                <a:solidFill>
+                  <a:srgbClr val="71D3DC"/>
+                </a:solidFill>
+                <a:latin typeface="Segoe UI"/>
+              </a:rPr>
+              <a:t>github.com/arzamuhammad/dcr-collaboration-api</a:t>
+            </a:r>
+          </a:p>
+        </p:txBody>
+      </p:sp>
+      <p:sp>
+        <p:nvSpPr>
+          <p:cNvPr id="10" name="Rounded Rectangle 9"/>
+          <p:cNvSpPr/>
+          <p:nvPr/>
+        </p:nvSpPr>
+        <p:spPr>
+          <a:xfrm>
+            <a:off x="4114800" y="5394960"/>
+            <a:ext cx="3931920" cy="457200"/>
+          </a:xfrm>
+          <a:prstGeom prst="roundRect">
+            <a:avLst/>
+          </a:prstGeom>
+          <a:solidFill>
+            <a:srgbClr val="29B5E8"/>
+          </a:solidFill>
+          <a:ln>
+            <a:noFill/>
+          </a:ln>
+        </p:spPr>
+        <p:style>
+          <a:lnRef idx="1">
+            <a:schemeClr val="accent1"/>
+          </a:lnRef>
+          <a:fillRef idx="3">
+            <a:schemeClr val="accent1"/>
+          </a:fillRef>
+          <a:effectRef idx="2">
+            <a:schemeClr val="accent1"/>
+          </a:effectRef>
+          <a:fontRef idx="minor">
+            <a:schemeClr val="lt1"/>
+          </a:fontRef>
+        </p:style>
+        <p:txBody>
+          <a:bodyPr rtlCol="0" anchor="ctr"/>
+          <a:lstStyle/>
+          <a:p>
+            <a:pPr algn="ctr"/>
+          </a:p>
+        </p:txBody>
+      </p:sp>
+      <p:sp>
+        <p:nvSpPr>
+          <p:cNvPr id="11" name="TextBox 10"/>
+          <p:cNvSpPr txBox="1"/>
+          <p:nvPr/>
+        </p:nvSpPr>
+        <p:spPr>
+          <a:xfrm>
+            <a:off x="4114800" y="5394960"/>
+            <a:ext cx="3931920" cy="457200"/>
+          </a:xfrm>
+          <a:prstGeom prst="rect">
+            <a:avLst/>
+          </a:prstGeom>
+          <a:noFill/>
+        </p:spPr>
+        <p:txBody>
+          <a:bodyPr wrap="square" lIns="73152" rIns="73152" tIns="36576" bIns="36576" anchor="ctr">
+            <a:spAutoFit/>
+          </a:bodyPr>
+          <a:lstStyle/>
+          <a:p>
+            <a:pPr algn="ctr">
+              <a:lnSpc>
+                <a:spcPts val="1600"/>
+              </a:lnSpc>
+            </a:pPr>
+            <a:r>
+              <a:rPr sz="1300" b="1" i="0">
+                <a:solidFill>
+                  <a:srgbClr val="FFFFFF"/>
+                </a:solidFill>
+                <a:latin typeface="Segoe UI"/>
+              </a:rPr>
+              <a:t>ardiyan.muhammad@snowflake.com</a:t>
+            </a:r>
+          </a:p>
+        </p:txBody>
+      </p:sp>
+    </p:spTree>
+  </p:cSld>
+  <p:clrMapOvr>
+    <a:masterClrMapping/>
+  </p:clrMapOvr>
+</p:sld>
+</file>
+
 <file path=ppt/slides/slide7.xml><?xml version="1.0" encoding="utf-8"?>
 <p:sld xmlns:a="http://schemas.openxmlformats.org/drawingml/2006/main" xmlns:p="http://schemas.openxmlformats.org/presentationml/2006/main" xmlns:r="http://schemas.openxmlformats.org/officeDocument/2006/relationships">
   <p:cSld>
@@ -45715,7 +49469,7 @@
                 </a:solidFill>
                 <a:latin typeface="Segoe UI"/>
               </a:rPr>
-              <a:t>DCR Collaboration API v2 | SFSEAPAC | 2026   ·   7 / 56</a:t>
+              <a:t>DCR Collaboration API v2 | SFSEAPAC | 2026   ·   7 / 60</a:t>
             </a:r>
           </a:p>
         </p:txBody>
@@ -46827,7 +50581,7 @@
                 </a:solidFill>
                 <a:latin typeface="Segoe UI"/>
               </a:rPr>
-              <a:t>DCR Collaboration API v2 | SFSEAPAC | 2026   ·   8 / 56</a:t>
+              <a:t>DCR Collaboration API v2 | SFSEAPAC | 2026   ·   8 / 60</a:t>
             </a:r>
           </a:p>
         </p:txBody>

--- a/DCR_Collaboration_API_Presentation.pptx
+++ b/DCR_Collaboration_API_Presentation.pptx
@@ -65,6 +65,7 @@
     <p:sldId id="313" r:id="rId64"/>
     <p:sldId id="314" r:id="rId65"/>
     <p:sldId id="315" r:id="rId66"/>
+    <p:sldId id="316" r:id="rId67"/>
   </p:sldIdLst>
   <p:sldSz cx="12191695" cy="6858000" type="screen4x3"/>
   <p:notesSz cx="6858000" cy="9144000"/>
@@ -4165,7 +4166,7 @@
                 </a:solidFill>
                 <a:latin typeface="Segoe UI"/>
               </a:rPr>
-              <a:t>DCR Collaboration API v2 | SFSEAPAC | 2026   ·   10 / 60</a:t>
+              <a:t>DCR Collaboration API v2 | SFSEAPAC | 2026   ·   10 / 61</a:t>
             </a:r>
           </a:p>
         </p:txBody>
@@ -4648,7 +4649,7 @@
                 </a:solidFill>
                 <a:latin typeface="Segoe UI"/>
               </a:rPr>
-              <a:t>DCR Collaboration API v2 | SFSEAPAC | 2026   ·   11 / 60</a:t>
+              <a:t>DCR Collaboration API v2 | SFSEAPAC | 2026   ·   11 / 61</a:t>
             </a:r>
           </a:p>
         </p:txBody>
@@ -6111,7 +6112,7 @@
                 </a:solidFill>
                 <a:latin typeface="Segoe UI"/>
               </a:rPr>
-              <a:t>DCR Collaboration API v2 | SFSEAPAC | 2026   ·   13 / 60</a:t>
+              <a:t>DCR Collaboration API v2 | SFSEAPAC | 2026   ·   13 / 61</a:t>
             </a:r>
           </a:p>
         </p:txBody>
@@ -7223,7 +7224,7 @@
                 </a:solidFill>
                 <a:latin typeface="Segoe UI"/>
               </a:rPr>
-              <a:t>DCR Collaboration API v2 | SFSEAPAC | 2026   ·   14 / 60</a:t>
+              <a:t>DCR Collaboration API v2 | SFSEAPAC | 2026   ·   14 / 61</a:t>
             </a:r>
           </a:p>
         </p:txBody>
@@ -8522,7 +8523,7 @@
                 </a:solidFill>
                 <a:latin typeface="Segoe UI"/>
               </a:rPr>
-              <a:t>DCR Collaboration API v2 | SFSEAPAC | 2026   ·   16 / 60</a:t>
+              <a:t>DCR Collaboration API v2 | SFSEAPAC | 2026   ·   16 / 61</a:t>
             </a:r>
           </a:p>
         </p:txBody>
@@ -9470,7 +9471,7 @@
                 </a:solidFill>
                 <a:latin typeface="Segoe UI"/>
               </a:rPr>
-              <a:t>DCR Collaboration API v2 | SFSEAPAC | 2026   ·   17 / 60</a:t>
+              <a:t>DCR Collaboration API v2 | SFSEAPAC | 2026   ·   17 / 61</a:t>
             </a:r>
           </a:p>
         </p:txBody>
@@ -10582,7 +10583,7 @@
                 </a:solidFill>
                 <a:latin typeface="Segoe UI"/>
               </a:rPr>
-              <a:t>DCR Collaboration API v2 | SFSEAPAC | 2026   ·   18 / 60</a:t>
+              <a:t>DCR Collaboration API v2 | SFSEAPAC | 2026   ·   18 / 61</a:t>
             </a:r>
           </a:p>
         </p:txBody>
@@ -11530,7 +11531,7 @@
                 </a:solidFill>
                 <a:latin typeface="Segoe UI"/>
               </a:rPr>
-              <a:t>DCR Collaboration API v2 | SFSEAPAC | 2026   ·   19 / 60</a:t>
+              <a:t>DCR Collaboration API v2 | SFSEAPAC | 2026   ·   19 / 61</a:t>
             </a:r>
           </a:p>
         </p:txBody>
@@ -13099,7 +13100,7 @@
                 </a:solidFill>
                 <a:latin typeface="Segoe UI"/>
               </a:rPr>
-              <a:t>DCR Collaboration API v2 | SFSEAPAC | 2026   ·   2 / 60</a:t>
+              <a:t>DCR Collaboration API v2 | SFSEAPAC | 2026   ·   2 / 61</a:t>
             </a:r>
           </a:p>
         </p:txBody>
@@ -14211,7 +14212,7 @@
                 </a:solidFill>
                 <a:latin typeface="Segoe UI"/>
               </a:rPr>
-              <a:t>DCR Collaboration API v2 | SFSEAPAC | 2026   ·   20 / 60</a:t>
+              <a:t>DCR Collaboration API v2 | SFSEAPAC | 2026   ·   20 / 61</a:t>
             </a:r>
           </a:p>
         </p:txBody>
@@ -14946,7 +14947,7 @@
                 </a:solidFill>
                 <a:latin typeface="Segoe UI"/>
               </a:rPr>
-              <a:t>DCR Collaboration API v2 | SFSEAPAC | 2026   ·   21 / 60</a:t>
+              <a:t>DCR Collaboration API v2 | SFSEAPAC | 2026   ·   21 / 61</a:t>
             </a:r>
           </a:p>
         </p:txBody>
@@ -16245,7 +16246,7 @@
                 </a:solidFill>
                 <a:latin typeface="Segoe UI"/>
               </a:rPr>
-              <a:t>DCR Collaboration API v2 | SFSEAPAC | 2026   ·   23 / 60</a:t>
+              <a:t>DCR Collaboration API v2 | SFSEAPAC | 2026   ·   23 / 61</a:t>
             </a:r>
           </a:p>
         </p:txBody>
@@ -17357,7 +17358,7 @@
                 </a:solidFill>
                 <a:latin typeface="Segoe UI"/>
               </a:rPr>
-              <a:t>DCR Collaboration API v2 | SFSEAPAC | 2026   ·   24 / 60</a:t>
+              <a:t>DCR Collaboration API v2 | SFSEAPAC | 2026   ·   24 / 61</a:t>
             </a:r>
           </a:p>
         </p:txBody>
@@ -18305,7 +18306,7 @@
                 </a:solidFill>
                 <a:latin typeface="Segoe UI"/>
               </a:rPr>
-              <a:t>DCR Collaboration API v2 | SFSEAPAC | 2026   ·   25 / 60</a:t>
+              <a:t>DCR Collaboration API v2 | SFSEAPAC | 2026   ·   25 / 61</a:t>
             </a:r>
           </a:p>
         </p:txBody>
@@ -19218,7 +19219,7 @@
                 </a:solidFill>
                 <a:latin typeface="Segoe UI"/>
               </a:rPr>
-              <a:t>DCR Collaboration API v2 | SFSEAPAC | 2026   ·   26 / 60</a:t>
+              <a:t>DCR Collaboration API v2 | SFSEAPAC | 2026   ·   26 / 61</a:t>
             </a:r>
           </a:p>
         </p:txBody>
@@ -19701,7 +19702,7 @@
                 </a:solidFill>
                 <a:latin typeface="Segoe UI"/>
               </a:rPr>
-              <a:t>DCR Collaboration API v2 | SFSEAPAC | 2026   ·   27 / 60</a:t>
+              <a:t>DCR Collaboration API v2 | SFSEAPAC | 2026   ·   27 / 61</a:t>
             </a:r>
           </a:p>
         </p:txBody>
@@ -20813,7 +20814,7 @@
                 </a:solidFill>
                 <a:latin typeface="Segoe UI"/>
               </a:rPr>
-              <a:t>DCR Collaboration API v2 | SFSEAPAC | 2026   ·   28 / 60</a:t>
+              <a:t>DCR Collaboration API v2 | SFSEAPAC | 2026   ·   28 / 61</a:t>
             </a:r>
           </a:p>
         </p:txBody>
@@ -21998,7 +21999,7 @@
                 </a:solidFill>
                 <a:latin typeface="Segoe UI"/>
               </a:rPr>
-              <a:t>DCR Collaboration API v2 | SFSEAPAC | 2026   ·   30 / 60</a:t>
+              <a:t>DCR Collaboration API v2 | SFSEAPAC | 2026   ·   30 / 61</a:t>
             </a:r>
           </a:p>
         </p:txBody>
@@ -22537,7 +22538,7 @@
                 </a:solidFill>
                 <a:latin typeface="Segoe UI"/>
               </a:rPr>
-              <a:t>DCR Collaboration API v2 | SFSEAPAC | 2026   ·   31 / 60</a:t>
+              <a:t>DCR Collaboration API v2 | SFSEAPAC | 2026   ·   31 / 61</a:t>
             </a:r>
           </a:p>
         </p:txBody>
@@ -23076,7 +23077,7 @@
                 </a:solidFill>
                 <a:latin typeface="Segoe UI"/>
               </a:rPr>
-              <a:t>DCR Collaboration API v2 | SFSEAPAC | 2026   ·   32 / 60</a:t>
+              <a:t>DCR Collaboration API v2 | SFSEAPAC | 2026   ·   32 / 61</a:t>
             </a:r>
           </a:p>
         </p:txBody>
@@ -23559,7 +23560,7 @@
                 </a:solidFill>
                 <a:latin typeface="Segoe UI"/>
               </a:rPr>
-              <a:t>DCR Collaboration API v2 | SFSEAPAC | 2026   ·   33 / 60</a:t>
+              <a:t>DCR Collaboration API v2 | SFSEAPAC | 2026   ·   33 / 61</a:t>
             </a:r>
           </a:p>
         </p:txBody>
@@ -24042,7 +24043,7 @@
                 </a:solidFill>
                 <a:latin typeface="Segoe UI"/>
               </a:rPr>
-              <a:t>DCR Collaboration API v2 | SFSEAPAC | 2026   ·   34 / 60</a:t>
+              <a:t>DCR Collaboration API v2 | SFSEAPAC | 2026   ·   34 / 61</a:t>
             </a:r>
           </a:p>
         </p:txBody>
@@ -24525,7 +24526,7 @@
                 </a:solidFill>
                 <a:latin typeface="Segoe UI"/>
               </a:rPr>
-              <a:t>DCR Collaboration API v2 | SFSEAPAC | 2026   ·   35 / 60</a:t>
+              <a:t>DCR Collaboration API v2 | SFSEAPAC | 2026   ·   35 / 61</a:t>
             </a:r>
           </a:p>
         </p:txBody>
@@ -25637,7 +25638,7 @@
                 </a:solidFill>
                 <a:latin typeface="Segoe UI"/>
               </a:rPr>
-              <a:t>DCR Collaboration API v2 | SFSEAPAC | 2026   ·   36 / 60</a:t>
+              <a:t>DCR Collaboration API v2 | SFSEAPAC | 2026   ·   36 / 61</a:t>
             </a:r>
           </a:p>
         </p:txBody>
@@ -27100,7 +27101,7 @@
                 </a:solidFill>
                 <a:latin typeface="Segoe UI"/>
               </a:rPr>
-              <a:t>DCR Collaboration API v2 | SFSEAPAC | 2026   ·   38 / 60</a:t>
+              <a:t>DCR Collaboration API v2 | SFSEAPAC | 2026   ·   38 / 61</a:t>
             </a:r>
           </a:p>
         </p:txBody>
@@ -28153,7 +28154,7 @@
                 </a:solidFill>
                 <a:latin typeface="Segoe UI"/>
               </a:rPr>
-              <a:t>DCR Collaboration API v2 | SFSEAPAC | 2026   ·   39 / 60</a:t>
+              <a:t>DCR Collaboration API v2 | SFSEAPAC | 2026   ·   39 / 61</a:t>
             </a:r>
           </a:p>
         </p:txBody>
@@ -29265,7 +29266,7 @@
                 </a:solidFill>
                 <a:latin typeface="Segoe UI"/>
               </a:rPr>
-              <a:t>DCR Collaboration API v2 | SFSEAPAC | 2026   ·   4 / 60</a:t>
+              <a:t>DCR Collaboration API v2 | SFSEAPAC | 2026   ·   4 / 61</a:t>
             </a:r>
           </a:p>
         </p:txBody>
@@ -30318,7 +30319,7 @@
                 </a:solidFill>
                 <a:latin typeface="Segoe UI"/>
               </a:rPr>
-              <a:t>DCR Collaboration API v2 | SFSEAPAC | 2026   ·   40 / 60</a:t>
+              <a:t>DCR Collaboration API v2 | SFSEAPAC | 2026   ·   40 / 61</a:t>
             </a:r>
           </a:p>
         </p:txBody>
@@ -31371,7 +31372,7 @@
                 </a:solidFill>
                 <a:latin typeface="Segoe UI"/>
               </a:rPr>
-              <a:t>DCR Collaboration API v2 | SFSEAPAC | 2026   ·   41 / 60</a:t>
+              <a:t>DCR Collaboration API v2 | SFSEAPAC | 2026   ·   41 / 61</a:t>
             </a:r>
           </a:p>
         </p:txBody>
@@ -32473,7 +32474,7 @@
                 </a:solidFill>
                 <a:latin typeface="Segoe UI"/>
               </a:rPr>
-              <a:t>DCR Collaboration API v2 | SFSEAPAC | 2026   ·   42 / 60</a:t>
+              <a:t>DCR Collaboration API v2 | SFSEAPAC | 2026   ·   42 / 61</a:t>
             </a:r>
           </a:p>
         </p:txBody>
@@ -33519,7 +33520,7 @@
                 </a:solidFill>
                 <a:latin typeface="Segoe UI"/>
               </a:rPr>
-              <a:t>DCR Collaboration API v2 | SFSEAPAC | 2026   ·   43 / 60</a:t>
+              <a:t>DCR Collaboration API v2 | SFSEAPAC | 2026   ·   43 / 61</a:t>
             </a:r>
           </a:p>
         </p:txBody>
@@ -34631,7 +34632,7 @@
                 </a:solidFill>
                 <a:latin typeface="Segoe UI"/>
               </a:rPr>
-              <a:t>DCR Collaboration API v2 | SFSEAPAC | 2026   ·   44 / 60</a:t>
+              <a:t>DCR Collaboration API v2 | SFSEAPAC | 2026   ·   44 / 61</a:t>
             </a:r>
           </a:p>
         </p:txBody>
@@ -35743,7 +35744,7 @@
                 </a:solidFill>
                 <a:latin typeface="Segoe UI"/>
               </a:rPr>
-              <a:t>DCR Collaboration API v2 | SFSEAPAC | 2026   ·   45 / 60</a:t>
+              <a:t>DCR Collaboration API v2 | SFSEAPAC | 2026   ·   45 / 61</a:t>
             </a:r>
           </a:p>
         </p:txBody>
@@ -37147,7 +37148,7 @@
                 </a:solidFill>
                 <a:latin typeface="Segoe UI"/>
               </a:rPr>
-              <a:t>DCR Collaboration API v2 | SFSEAPAC | 2026   ·   47 / 60</a:t>
+              <a:t>DCR Collaboration API v2 | SFSEAPAC | 2026   ·   47 / 61</a:t>
             </a:r>
           </a:p>
         </p:txBody>
@@ -38193,7 +38194,7 @@
                 </a:solidFill>
                 <a:latin typeface="Segoe UI"/>
               </a:rPr>
-              <a:t>DCR Collaboration API v2 | SFSEAPAC | 2026   ·   48 / 60</a:t>
+              <a:t>DCR Collaboration API v2 | SFSEAPAC | 2026   ·   48 / 61</a:t>
             </a:r>
           </a:p>
         </p:txBody>
@@ -38704,7 +38705,7 @@
                 </a:solidFill>
                 <a:latin typeface="Segoe UI"/>
               </a:rPr>
-              <a:t>DCR Collaboration API v2 | SFSEAPAC | 2026   ·   49 / 60</a:t>
+              <a:t>DCR Collaboration API v2 | SFSEAPAC | 2026   ·   49 / 61</a:t>
             </a:r>
           </a:p>
         </p:txBody>
@@ -39355,7 +39356,7 @@
                 </a:solidFill>
                 <a:latin typeface="Segoe UI"/>
               </a:rPr>
-              <a:t>DCR Collaboration API v2 | SFSEAPAC | 2026   ·   5 / 60</a:t>
+              <a:t>DCR Collaboration API v2 | SFSEAPAC | 2026   ·   5 / 61</a:t>
             </a:r>
           </a:p>
         </p:txBody>
@@ -40467,7 +40468,7 @@
                 </a:solidFill>
                 <a:latin typeface="Segoe UI"/>
               </a:rPr>
-              <a:t>DCR Collaboration API v2 | SFSEAPAC | 2026   ·   50 / 60</a:t>
+              <a:t>DCR Collaboration API v2 | SFSEAPAC | 2026   ·   50 / 61</a:t>
             </a:r>
           </a:p>
         </p:txBody>
@@ -41520,7 +41521,7 @@
                 </a:solidFill>
                 <a:latin typeface="Segoe UI"/>
               </a:rPr>
-              <a:t>DCR Collaboration API v2 | SFSEAPAC | 2026   ·   51 / 60</a:t>
+              <a:t>DCR Collaboration API v2 | SFSEAPAC | 2026   ·   51 / 61</a:t>
             </a:r>
           </a:p>
         </p:txBody>
@@ -42566,7 +42567,7 @@
                 </a:solidFill>
                 <a:latin typeface="Segoe UI"/>
               </a:rPr>
-              <a:t>DCR Collaboration API v2 | SFSEAPAC | 2026   ·   52 / 60</a:t>
+              <a:t>DCR Collaboration API v2 | SFSEAPAC | 2026   ·   52 / 61</a:t>
             </a:r>
           </a:p>
         </p:txBody>
@@ -42784,7 +42785,7 @@
                 </a:solidFill>
                 <a:latin typeface="Calibri Light"/>
               </a:rPr>
-              <a:t>Sub-Step Breakdown — 1-Partition 1007 cols (XL vs 2XL)</a:t>
+              <a:t>1-Partition vs All-8-Partitions (1007 cols, GEN2_2XLARGE)</a:t>
             </a:r>
           </a:p>
         </p:txBody>
@@ -42832,8 +42833,8 @@
         </p:nvSpPr>
         <p:spPr>
           <a:xfrm>
-            <a:off x="640080" y="1554480"/>
-            <a:ext cx="10911535" cy="804672"/>
+            <a:off x="640080" y="1508760"/>
+            <a:ext cx="5318607" cy="4754880"/>
           </a:xfrm>
           <a:prstGeom prst="roundRect">
             <a:avLst/>
@@ -42869,16 +42870,16 @@
       </p:sp>
       <p:sp>
         <p:nvSpPr>
-          <p:cNvPr id="9" name="Oval 8"/>
+          <p:cNvPr id="9" name="Rectangle 8"/>
           <p:cNvSpPr/>
           <p:nvPr/>
         </p:nvSpPr>
         <p:spPr>
           <a:xfrm>
-            <a:off x="914400" y="1691640"/>
-            <a:ext cx="411480" cy="411480"/>
-          </a:xfrm>
-          <a:prstGeom prst="ellipse">
+            <a:off x="640080" y="1508760"/>
+            <a:ext cx="5318607" cy="54864"/>
+          </a:xfrm>
+          <a:prstGeom prst="rect">
             <a:avLst/>
           </a:prstGeom>
           <a:solidFill>
@@ -42912,14 +42913,57 @@
       </p:sp>
       <p:sp>
         <p:nvSpPr>
-          <p:cNvPr id="10" name="TextBox 9"/>
+          <p:cNvPr id="10" name="Oval 9"/>
+          <p:cNvSpPr/>
+          <p:nvPr/>
+        </p:nvSpPr>
+        <p:spPr>
+          <a:xfrm>
+            <a:off x="914400" y="1828800"/>
+            <a:ext cx="457200" cy="457200"/>
+          </a:xfrm>
+          <a:prstGeom prst="ellipse">
+            <a:avLst/>
+          </a:prstGeom>
+          <a:solidFill>
+            <a:srgbClr val="29B5E8"/>
+          </a:solidFill>
+          <a:ln>
+            <a:noFill/>
+          </a:ln>
+        </p:spPr>
+        <p:style>
+          <a:lnRef idx="1">
+            <a:schemeClr val="accent1"/>
+          </a:lnRef>
+          <a:fillRef idx="3">
+            <a:schemeClr val="accent1"/>
+          </a:fillRef>
+          <a:effectRef idx="2">
+            <a:schemeClr val="accent1"/>
+          </a:effectRef>
+          <a:fontRef idx="minor">
+            <a:schemeClr val="lt1"/>
+          </a:fontRef>
+        </p:style>
+        <p:txBody>
+          <a:bodyPr rtlCol="0" anchor="ctr"/>
+          <a:lstStyle/>
+          <a:p>
+            <a:pPr algn="ctr"/>
+          </a:p>
+        </p:txBody>
+      </p:sp>
+      <p:sp>
+        <p:nvSpPr>
+          <p:cNvPr id="11" name="TextBox 10"/>
           <p:cNvSpPr txBox="1"/>
           <p:nvPr/>
         </p:nvSpPr>
         <p:spPr>
           <a:xfrm>
-            <a:off x="914400" y="1691640"/>
-            <a:ext cx="411480" cy="411480"/>
+            <a:off x="914400" y="1828800"/>
+            <a:ext cx="457200" cy="457200"/>
           </a:xfrm>
           <a:prstGeom prst="rect">
             <a:avLst/>
@@ -42934,11 +42978,11 @@
           <a:p>
             <a:pPr algn="ctr">
               <a:lnSpc>
-                <a:spcPts val="1600"/>
-              </a:lnSpc>
-            </a:pPr>
-            <a:r>
-              <a:rPr sz="1300" b="1" i="0">
+                <a:spcPts val="1800"/>
+              </a:lnSpc>
+            </a:pPr>
+            <a:r>
+              <a:rPr sz="1400" b="1" i="0">
                 <a:solidFill>
                   <a:srgbClr val="FFFFFF"/>
                 </a:solidFill>
@@ -42951,14 +42995,14 @@
       </p:sp>
       <p:sp>
         <p:nvSpPr>
-          <p:cNvPr id="11" name="TextBox 10"/>
+          <p:cNvPr id="12" name="TextBox 11"/>
           <p:cNvSpPr txBox="1"/>
           <p:nvPr/>
         </p:nvSpPr>
         <p:spPr>
           <a:xfrm>
-            <a:off x="1554480" y="1627632"/>
-            <a:ext cx="9601200" cy="768096"/>
+            <a:off x="1508760" y="1856232"/>
+            <a:ext cx="4221327" cy="411480"/>
           </a:xfrm>
           <a:prstGeom prst="rect">
             <a:avLst/>
@@ -42973,37 +43017,207 @@
           <a:p>
             <a:pPr algn="l">
               <a:lnSpc>
-                <a:spcPts val="2000"/>
-              </a:lnSpc>
-            </a:pPr>
-            <a:r>
-              <a:rPr sz="1600" b="0" i="0">
+                <a:spcPts val="2300"/>
+              </a:lnSpc>
+            </a:pPr>
+            <a:r>
+              <a:rPr sz="1800" b="1" i="0">
+                <a:solidFill>
+                  <a:srgbClr val="11567F"/>
+                </a:solidFill>
+                <a:latin typeface="Calibri Light"/>
+              </a:rPr>
+              <a:t>1 Partition (150M × 1M)</a:t>
+            </a:r>
+          </a:p>
+        </p:txBody>
+      </p:sp>
+      <p:cxnSp>
+        <p:nvCxnSpPr>
+          <p:cNvPr id="13" name="Connector 12"/>
+          <p:cNvCxnSpPr/>
+          <p:nvPr/>
+        </p:nvCxnSpPr>
+        <p:spPr>
+          <a:xfrm>
+            <a:off x="822960" y="2468880"/>
+            <a:ext cx="4952847" cy="0"/>
+          </a:xfrm>
+          <a:prstGeom prst="line">
+            <a:avLst/>
+          </a:prstGeom>
+          <a:ln w="12700">
+            <a:solidFill>
+              <a:srgbClr val="D5DCE3"/>
+            </a:solidFill>
+          </a:ln>
+        </p:spPr>
+        <p:style>
+          <a:lnRef idx="2">
+            <a:schemeClr val="accent1"/>
+          </a:lnRef>
+          <a:fillRef idx="0">
+            <a:schemeClr val="accent1"/>
+          </a:fillRef>
+          <a:effectRef idx="1">
+            <a:schemeClr val="accent1"/>
+          </a:effectRef>
+          <a:fontRef idx="minor">
+            <a:schemeClr val="tx1"/>
+          </a:fontRef>
+        </p:style>
+      </p:cxnSp>
+      <p:sp>
+        <p:nvSpPr>
+          <p:cNvPr id="14" name="TextBox 13"/>
+          <p:cNvSpPr txBox="1"/>
+          <p:nvPr/>
+        </p:nvSpPr>
+        <p:spPr>
+          <a:xfrm>
+            <a:off x="822960" y="2606040"/>
+            <a:ext cx="4952847" cy="3383280"/>
+          </a:xfrm>
+          <a:prstGeom prst="rect">
+            <a:avLst/>
+          </a:prstGeom>
+          <a:noFill/>
+        </p:spPr>
+        <p:txBody>
+          <a:bodyPr wrap="square" lIns="73152" rIns="73152">
+            <a:spAutoFit/>
+          </a:bodyPr>
+          <a:lstStyle/>
+          <a:p>
+            <a:pPr>
+              <a:lnSpc>
+                <a:spcPts val="2400"/>
+              </a:lnSpc>
+              <a:spcAft>
+                <a:spcPts val="1000"/>
+              </a:spcAft>
+            </a:pPr>
+            <a:r>
+              <a:rPr sz="800">
+                <a:solidFill>
+                  <a:srgbClr val="29B5E8"/>
+                </a:solidFill>
+                <a:latin typeface="Segoe UI"/>
+              </a:rPr>
+              <a:t>●  </a:t>
+            </a:r>
+            <a:r>
+              <a:rPr sz="1500">
                 <a:solidFill>
                   <a:srgbClr val="2C3E50"/>
                 </a:solidFill>
                 <a:latin typeface="Segoe UI"/>
               </a:rPr>
-              <a:t>secure_run_v2 — XL: 4214 s (70m 15s) | 2XL: 2234 s (37m 14s) — 1.89× speedup</a:t>
-            </a:r>
-          </a:p>
-        </p:txBody>
-      </p:sp>
-      <p:sp>
-        <p:nvSpPr>
-          <p:cNvPr id="12" name="Rounded Rectangle 11"/>
+              <a:t>38 min 9s total</a:t>
+            </a:r>
+          </a:p>
+          <a:p>
+            <a:pPr>
+              <a:lnSpc>
+                <a:spcPts val="2400"/>
+              </a:lnSpc>
+              <a:spcAft>
+                <a:spcPts val="1000"/>
+              </a:spcAft>
+            </a:pPr>
+            <a:r>
+              <a:rPr sz="800">
+                <a:solidFill>
+                  <a:srgbClr val="29B5E8"/>
+                </a:solidFill>
+                <a:latin typeface="Segoe UI"/>
+              </a:rPr>
+              <a:t>●  </a:t>
+            </a:r>
+            <a:r>
+              <a:rPr sz="1500">
+                <a:solidFill>
+                  <a:srgbClr val="2C3E50"/>
+                </a:solidFill>
+                <a:latin typeface="Segoe UI"/>
+              </a:rPr>
+              <a:t>20.35 credits</a:t>
+            </a:r>
+          </a:p>
+          <a:p>
+            <a:pPr>
+              <a:lnSpc>
+                <a:spcPts val="2400"/>
+              </a:lnSpc>
+              <a:spcAft>
+                <a:spcPts val="1000"/>
+              </a:spcAft>
+            </a:pPr>
+            <a:r>
+              <a:rPr sz="800">
+                <a:solidFill>
+                  <a:srgbClr val="29B5E8"/>
+                </a:solidFill>
+                <a:latin typeface="Segoe UI"/>
+              </a:rPr>
+              <a:t>●  </a:t>
+            </a:r>
+            <a:r>
+              <a:rPr sz="1500">
+                <a:solidFill>
+                  <a:srgbClr val="2C3E50"/>
+                </a:solidFill>
+                <a:latin typeface="Segoe UI"/>
+              </a:rPr>
+              <a:t>700k rows exported</a:t>
+            </a:r>
+          </a:p>
+          <a:p>
+            <a:pPr>
+              <a:lnSpc>
+                <a:spcPts val="2400"/>
+              </a:lnSpc>
+              <a:spcAft>
+                <a:spcPts val="1000"/>
+              </a:spcAft>
+            </a:pPr>
+            <a:r>
+              <a:rPr sz="800">
+                <a:solidFill>
+                  <a:srgbClr val="29B5E8"/>
+                </a:solidFill>
+                <a:latin typeface="Segoe UI"/>
+              </a:rPr>
+              <a:t>●  </a:t>
+            </a:r>
+            <a:r>
+              <a:rPr sz="1500">
+                <a:solidFill>
+                  <a:srgbClr val="2C3E50"/>
+                </a:solidFill>
+                <a:latin typeface="Segoe UI"/>
+              </a:rPr>
+              <a:t>$79.4 per run</a:t>
+            </a:r>
+          </a:p>
+        </p:txBody>
+      </p:sp>
+      <p:sp>
+        <p:nvSpPr>
+          <p:cNvPr id="15" name="Rounded Rectangle 14"/>
           <p:cNvSpPr/>
           <p:nvPr/>
         </p:nvSpPr>
         <p:spPr>
           <a:xfrm>
-            <a:off x="640080" y="2468880"/>
-            <a:ext cx="10911535" cy="804672"/>
+            <a:off x="6233007" y="1508760"/>
+            <a:ext cx="5318607" cy="4754880"/>
           </a:xfrm>
           <a:prstGeom prst="roundRect">
             <a:avLst/>
           </a:prstGeom>
           <a:solidFill>
-            <a:srgbClr val="F4F8FB"/>
+            <a:srgbClr val="EEF5FA"/>
           </a:solidFill>
           <a:ln>
             <a:noFill/>
@@ -43033,16 +43247,16 @@
       </p:sp>
       <p:sp>
         <p:nvSpPr>
-          <p:cNvPr id="13" name="Oval 12"/>
+          <p:cNvPr id="16" name="Rectangle 15"/>
           <p:cNvSpPr/>
           <p:nvPr/>
         </p:nvSpPr>
         <p:spPr>
           <a:xfrm>
-            <a:off x="914400" y="2606040"/>
-            <a:ext cx="411480" cy="411480"/>
-          </a:xfrm>
-          <a:prstGeom prst="ellipse">
+            <a:off x="6233007" y="1508760"/>
+            <a:ext cx="5318607" cy="54864"/>
+          </a:xfrm>
+          <a:prstGeom prst="rect">
             <a:avLst/>
           </a:prstGeom>
           <a:solidFill>
@@ -43076,14 +43290,57 @@
       </p:sp>
       <p:sp>
         <p:nvSpPr>
-          <p:cNvPr id="14" name="TextBox 13"/>
+          <p:cNvPr id="17" name="Oval 16"/>
+          <p:cNvSpPr/>
+          <p:nvPr/>
+        </p:nvSpPr>
+        <p:spPr>
+          <a:xfrm>
+            <a:off x="6507327" y="1828800"/>
+            <a:ext cx="457200" cy="457200"/>
+          </a:xfrm>
+          <a:prstGeom prst="ellipse">
+            <a:avLst/>
+          </a:prstGeom>
+          <a:solidFill>
+            <a:srgbClr val="11567F"/>
+          </a:solidFill>
+          <a:ln>
+            <a:noFill/>
+          </a:ln>
+        </p:spPr>
+        <p:style>
+          <a:lnRef idx="1">
+            <a:schemeClr val="accent1"/>
+          </a:lnRef>
+          <a:fillRef idx="3">
+            <a:schemeClr val="accent1"/>
+          </a:fillRef>
+          <a:effectRef idx="2">
+            <a:schemeClr val="accent1"/>
+          </a:effectRef>
+          <a:fontRef idx="minor">
+            <a:schemeClr val="lt1"/>
+          </a:fontRef>
+        </p:style>
+        <p:txBody>
+          <a:bodyPr rtlCol="0" anchor="ctr"/>
+          <a:lstStyle/>
+          <a:p>
+            <a:pPr algn="ctr"/>
+          </a:p>
+        </p:txBody>
+      </p:sp>
+      <p:sp>
+        <p:nvSpPr>
+          <p:cNvPr id="18" name="TextBox 17"/>
           <p:cNvSpPr txBox="1"/>
           <p:nvPr/>
         </p:nvSpPr>
         <p:spPr>
           <a:xfrm>
-            <a:off x="914400" y="2606040"/>
-            <a:ext cx="411480" cy="411480"/>
+            <a:off x="6507327" y="1828800"/>
+            <a:ext cx="457200" cy="457200"/>
           </a:xfrm>
           <a:prstGeom prst="rect">
             <a:avLst/>
@@ -43098,11 +43355,11 @@
           <a:p>
             <a:pPr algn="ctr">
               <a:lnSpc>
-                <a:spcPts val="1600"/>
-              </a:lnSpc>
-            </a:pPr>
-            <a:r>
-              <a:rPr sz="1300" b="1" i="0">
+                <a:spcPts val="1800"/>
+              </a:lnSpc>
+            </a:pPr>
+            <a:r>
+              <a:rPr sz="1400" b="1" i="0">
                 <a:solidFill>
                   <a:srgbClr val="FFFFFF"/>
                 </a:solidFill>
@@ -43115,14 +43372,14 @@
       </p:sp>
       <p:sp>
         <p:nvSpPr>
-          <p:cNvPr id="15" name="TextBox 14"/>
+          <p:cNvPr id="19" name="TextBox 18"/>
           <p:cNvSpPr txBox="1"/>
           <p:nvPr/>
         </p:nvSpPr>
         <p:spPr>
           <a:xfrm>
-            <a:off x="1554480" y="2542032"/>
-            <a:ext cx="9601200" cy="768096"/>
+            <a:off x="7101687" y="1856232"/>
+            <a:ext cx="4221327" cy="411480"/>
           </a:xfrm>
           <a:prstGeom prst="rect">
             <a:avLst/>
@@ -43137,117 +43394,66 @@
           <a:p>
             <a:pPr algn="l">
               <a:lnSpc>
-                <a:spcPts val="2000"/>
-              </a:lnSpc>
-            </a:pPr>
-            <a:r>
-              <a:rPr sz="1600" b="0" i="0">
-                <a:solidFill>
-                  <a:srgbClr val="2C3E50"/>
-                </a:solidFill>
-                <a:latin typeface="Segoe UI"/>
-              </a:rPr>
-              <a:t>direct_activation_to_runner — XL: 12.3 s | 2XL: 10.4 s — 1.18× speedup</a:t>
-            </a:r>
-          </a:p>
-        </p:txBody>
-      </p:sp>
-      <p:sp>
-        <p:nvSpPr>
-          <p:cNvPr id="16" name="Rounded Rectangle 15"/>
-          <p:cNvSpPr/>
-          <p:nvPr/>
-        </p:nvSpPr>
-        <p:spPr>
-          <a:xfrm>
-            <a:off x="640080" y="3383280"/>
-            <a:ext cx="10911535" cy="804672"/>
-          </a:xfrm>
-          <a:prstGeom prst="roundRect">
-            <a:avLst/>
-          </a:prstGeom>
-          <a:solidFill>
-            <a:srgbClr val="EEF5FA"/>
-          </a:solidFill>
-          <a:ln>
-            <a:noFill/>
-          </a:ln>
-        </p:spPr>
-        <p:style>
-          <a:lnRef idx="1">
-            <a:schemeClr val="accent1"/>
-          </a:lnRef>
-          <a:fillRef idx="3">
-            <a:schemeClr val="accent1"/>
-          </a:fillRef>
-          <a:effectRef idx="2">
-            <a:schemeClr val="accent1"/>
-          </a:effectRef>
-          <a:fontRef idx="minor">
-            <a:schemeClr val="lt1"/>
-          </a:fontRef>
-        </p:style>
-        <p:txBody>
-          <a:bodyPr rtlCol="0" anchor="ctr"/>
-          <a:lstStyle/>
-          <a:p>
-            <a:pPr algn="ctr"/>
-          </a:p>
-        </p:txBody>
-      </p:sp>
-      <p:sp>
-        <p:nvSpPr>
-          <p:cNvPr id="17" name="Oval 16"/>
-          <p:cNvSpPr/>
-          <p:nvPr/>
-        </p:nvSpPr>
-        <p:spPr>
-          <a:xfrm>
-            <a:off x="914400" y="3520440"/>
-            <a:ext cx="411480" cy="411480"/>
-          </a:xfrm>
-          <a:prstGeom prst="ellipse">
-            <a:avLst/>
-          </a:prstGeom>
-          <a:solidFill>
-            <a:srgbClr val="71D3DC"/>
-          </a:solidFill>
-          <a:ln>
-            <a:noFill/>
-          </a:ln>
-        </p:spPr>
-        <p:style>
-          <a:lnRef idx="1">
-            <a:schemeClr val="accent1"/>
-          </a:lnRef>
-          <a:fillRef idx="3">
-            <a:schemeClr val="accent1"/>
-          </a:fillRef>
-          <a:effectRef idx="2">
-            <a:schemeClr val="accent1"/>
-          </a:effectRef>
-          <a:fontRef idx="minor">
-            <a:schemeClr val="lt1"/>
-          </a:fontRef>
-        </p:style>
-        <p:txBody>
-          <a:bodyPr rtlCol="0" anchor="ctr"/>
-          <a:lstStyle/>
-          <a:p>
-            <a:pPr algn="ctr"/>
-          </a:p>
-        </p:txBody>
-      </p:sp>
-      <p:sp>
-        <p:nvSpPr>
-          <p:cNvPr id="18" name="TextBox 17"/>
+                <a:spcPts val="2300"/>
+              </a:lnSpc>
+            </a:pPr>
+            <a:r>
+              <a:rPr sz="1800" b="1" i="0">
+                <a:solidFill>
+                  <a:srgbClr val="11567F"/>
+                </a:solidFill>
+                <a:latin typeface="Calibri Light"/>
+              </a:rPr>
+              <a:t>8 Partitions (1.2B × 8M)</a:t>
+            </a:r>
+          </a:p>
+        </p:txBody>
+      </p:sp>
+      <p:cxnSp>
+        <p:nvCxnSpPr>
+          <p:cNvPr id="20" name="Connector 19"/>
+          <p:cNvCxnSpPr/>
+          <p:nvPr/>
+        </p:nvCxnSpPr>
+        <p:spPr>
+          <a:xfrm>
+            <a:off x="6415887" y="2468880"/>
+            <a:ext cx="4952847" cy="0"/>
+          </a:xfrm>
+          <a:prstGeom prst="line">
+            <a:avLst/>
+          </a:prstGeom>
+          <a:ln w="12700">
+            <a:solidFill>
+              <a:srgbClr val="D5DCE3"/>
+            </a:solidFill>
+          </a:ln>
+        </p:spPr>
+        <p:style>
+          <a:lnRef idx="2">
+            <a:schemeClr val="accent1"/>
+          </a:lnRef>
+          <a:fillRef idx="0">
+            <a:schemeClr val="accent1"/>
+          </a:fillRef>
+          <a:effectRef idx="1">
+            <a:schemeClr val="accent1"/>
+          </a:effectRef>
+          <a:fontRef idx="minor">
+            <a:schemeClr val="tx1"/>
+          </a:fontRef>
+        </p:style>
+      </p:cxnSp>
+      <p:sp>
+        <p:nvSpPr>
+          <p:cNvPr id="21" name="TextBox 20"/>
           <p:cNvSpPr txBox="1"/>
           <p:nvPr/>
         </p:nvSpPr>
         <p:spPr>
           <a:xfrm>
-            <a:off x="914400" y="3520440"/>
-            <a:ext cx="411480" cy="411480"/>
+            <a:off x="6415887" y="2606040"/>
+            <a:ext cx="4952847" cy="3383280"/>
           </a:xfrm>
           <a:prstGeom prst="rect">
             <a:avLst/>
@@ -43255,398 +43461,127 @@
           <a:noFill/>
         </p:spPr>
         <p:txBody>
-          <a:bodyPr wrap="square" lIns="73152" rIns="73152" tIns="36576" bIns="36576" anchor="ctr">
+          <a:bodyPr wrap="square" lIns="73152" rIns="73152">
             <a:spAutoFit/>
           </a:bodyPr>
           <a:lstStyle/>
           <a:p>
-            <a:pPr algn="ctr">
-              <a:lnSpc>
-                <a:spcPts val="1600"/>
-              </a:lnSpc>
-            </a:pPr>
-            <a:r>
-              <a:rPr sz="1300" b="1" i="0">
-                <a:solidFill>
-                  <a:srgbClr val="FFFFFF"/>
-                </a:solidFill>
-                <a:latin typeface="Segoe UI"/>
-              </a:rPr>
-              <a:t>03</a:t>
-            </a:r>
-          </a:p>
-        </p:txBody>
-      </p:sp>
-      <p:sp>
-        <p:nvSpPr>
-          <p:cNvPr id="19" name="TextBox 18"/>
-          <p:cNvSpPr txBox="1"/>
-          <p:nvPr/>
-        </p:nvSpPr>
-        <p:spPr>
-          <a:xfrm>
-            <a:off x="1554480" y="3456432"/>
-            <a:ext cx="9601200" cy="768096"/>
-          </a:xfrm>
-          <a:prstGeom prst="rect">
-            <a:avLst/>
-          </a:prstGeom>
-          <a:noFill/>
-        </p:spPr>
-        <p:txBody>
-          <a:bodyPr wrap="square" lIns="73152" rIns="73152" tIns="36576" bIns="36576" anchor="ctr">
-            <a:spAutoFit/>
-          </a:bodyPr>
-          <a:lstStyle/>
-          <a:p>
-            <a:pPr algn="l">
-              <a:lnSpc>
-                <a:spcPts val="2000"/>
-              </a:lnSpc>
-            </a:pPr>
-            <a:r>
-              <a:rPr sz="1600" b="0" i="0">
+            <a:pPr>
+              <a:lnSpc>
+                <a:spcPts val="2400"/>
+              </a:lnSpc>
+              <a:spcAft>
+                <a:spcPts val="1000"/>
+              </a:spcAft>
+            </a:pPr>
+            <a:r>
+              <a:rPr sz="800">
+                <a:solidFill>
+                  <a:srgbClr val="11567F"/>
+                </a:solidFill>
+                <a:latin typeface="Segoe UI"/>
+              </a:rPr>
+              <a:t>●  </a:t>
+            </a:r>
+            <a:r>
+              <a:rPr sz="1500">
                 <a:solidFill>
                   <a:srgbClr val="2C3E50"/>
                 </a:solidFill>
                 <a:latin typeface="Segoe UI"/>
               </a:rPr>
-              <a:t>INSERT to SEGMENT_RECORDS — XL: 5.7 s | 2XL: 5.3 s — 1.07× speedup</a:t>
-            </a:r>
-          </a:p>
-        </p:txBody>
-      </p:sp>
-      <p:sp>
-        <p:nvSpPr>
-          <p:cNvPr id="20" name="Rounded Rectangle 19"/>
-          <p:cNvSpPr/>
-          <p:nvPr/>
-        </p:nvSpPr>
-        <p:spPr>
-          <a:xfrm>
-            <a:off x="640080" y="4297680"/>
-            <a:ext cx="10911535" cy="804672"/>
-          </a:xfrm>
-          <a:prstGeom prst="roundRect">
-            <a:avLst/>
-          </a:prstGeom>
-          <a:solidFill>
-            <a:srgbClr val="F4F8FB"/>
-          </a:solidFill>
-          <a:ln>
-            <a:noFill/>
-          </a:ln>
-        </p:spPr>
-        <p:style>
-          <a:lnRef idx="1">
-            <a:schemeClr val="accent1"/>
-          </a:lnRef>
-          <a:fillRef idx="3">
-            <a:schemeClr val="accent1"/>
-          </a:fillRef>
-          <a:effectRef idx="2">
-            <a:schemeClr val="accent1"/>
-          </a:effectRef>
-          <a:fontRef idx="minor">
-            <a:schemeClr val="lt1"/>
-          </a:fontRef>
-        </p:style>
-        <p:txBody>
-          <a:bodyPr rtlCol="0" anchor="ctr"/>
-          <a:lstStyle/>
-          <a:p>
-            <a:pPr algn="ctr"/>
-          </a:p>
-        </p:txBody>
-      </p:sp>
-      <p:sp>
-        <p:nvSpPr>
-          <p:cNvPr id="21" name="Oval 20"/>
-          <p:cNvSpPr/>
-          <p:nvPr/>
-        </p:nvSpPr>
-        <p:spPr>
-          <a:xfrm>
-            <a:off x="914400" y="4434840"/>
-            <a:ext cx="411480" cy="411480"/>
-          </a:xfrm>
-          <a:prstGeom prst="ellipse">
-            <a:avLst/>
-          </a:prstGeom>
-          <a:solidFill>
-            <a:srgbClr val="FF9F36"/>
-          </a:solidFill>
-          <a:ln>
-            <a:noFill/>
-          </a:ln>
-        </p:spPr>
-        <p:style>
-          <a:lnRef idx="1">
-            <a:schemeClr val="accent1"/>
-          </a:lnRef>
-          <a:fillRef idx="3">
-            <a:schemeClr val="accent1"/>
-          </a:fillRef>
-          <a:effectRef idx="2">
-            <a:schemeClr val="accent1"/>
-          </a:effectRef>
-          <a:fontRef idx="minor">
-            <a:schemeClr val="lt1"/>
-          </a:fontRef>
-        </p:style>
-        <p:txBody>
-          <a:bodyPr rtlCol="0" anchor="ctr"/>
-          <a:lstStyle/>
-          <a:p>
-            <a:pPr algn="ctr"/>
+              <a:t>45 min total (1.18× longer)</a:t>
+            </a:r>
+          </a:p>
+          <a:p>
+            <a:pPr>
+              <a:lnSpc>
+                <a:spcPts val="2400"/>
+              </a:lnSpc>
+              <a:spcAft>
+                <a:spcPts val="1000"/>
+              </a:spcAft>
+            </a:pPr>
+            <a:r>
+              <a:rPr sz="800">
+                <a:solidFill>
+                  <a:srgbClr val="11567F"/>
+                </a:solidFill>
+                <a:latin typeface="Segoe UI"/>
+              </a:rPr>
+              <a:t>●  </a:t>
+            </a:r>
+            <a:r>
+              <a:rPr sz="1500">
+                <a:solidFill>
+                  <a:srgbClr val="2C3E50"/>
+                </a:solidFill>
+                <a:latin typeface="Segoe UI"/>
+              </a:rPr>
+              <a:t>23.8 credits (+17%)</a:t>
+            </a:r>
+          </a:p>
+          <a:p>
+            <a:pPr>
+              <a:lnSpc>
+                <a:spcPts val="2400"/>
+              </a:lnSpc>
+              <a:spcAft>
+                <a:spcPts val="1000"/>
+              </a:spcAft>
+            </a:pPr>
+            <a:r>
+              <a:rPr sz="800">
+                <a:solidFill>
+                  <a:srgbClr val="11567F"/>
+                </a:solidFill>
+                <a:latin typeface="Segoe UI"/>
+              </a:rPr>
+              <a:t>●  </a:t>
+            </a:r>
+            <a:r>
+              <a:rPr sz="1500">
+                <a:solidFill>
+                  <a:srgbClr val="2C3E50"/>
+                </a:solidFill>
+                <a:latin typeface="Segoe UI"/>
+              </a:rPr>
+              <a:t>44.8M rows exported (64×)</a:t>
+            </a:r>
+          </a:p>
+          <a:p>
+            <a:pPr>
+              <a:lnSpc>
+                <a:spcPts val="2400"/>
+              </a:lnSpc>
+              <a:spcAft>
+                <a:spcPts val="1000"/>
+              </a:spcAft>
+            </a:pPr>
+            <a:r>
+              <a:rPr sz="800">
+                <a:solidFill>
+                  <a:srgbClr val="11567F"/>
+                </a:solidFill>
+                <a:latin typeface="Segoe UI"/>
+              </a:rPr>
+              <a:t>●  </a:t>
+            </a:r>
+            <a:r>
+              <a:rPr sz="1500">
+                <a:solidFill>
+                  <a:srgbClr val="2C3E50"/>
+                </a:solidFill>
+                <a:latin typeface="Segoe UI"/>
+              </a:rPr>
+              <a:t>$93.0 per run</a:t>
+            </a:r>
           </a:p>
         </p:txBody>
       </p:sp>
       <p:sp>
         <p:nvSpPr>
           <p:cNvPr id="22" name="TextBox 21"/>
-          <p:cNvSpPr txBox="1"/>
-          <p:nvPr/>
-        </p:nvSpPr>
-        <p:spPr>
-          <a:xfrm>
-            <a:off x="914400" y="4434840"/>
-            <a:ext cx="411480" cy="411480"/>
-          </a:xfrm>
-          <a:prstGeom prst="rect">
-            <a:avLst/>
-          </a:prstGeom>
-          <a:noFill/>
-        </p:spPr>
-        <p:txBody>
-          <a:bodyPr wrap="square" lIns="73152" rIns="73152" tIns="36576" bIns="36576" anchor="ctr">
-            <a:spAutoFit/>
-          </a:bodyPr>
-          <a:lstStyle/>
-          <a:p>
-            <a:pPr algn="ctr">
-              <a:lnSpc>
-                <a:spcPts val="1600"/>
-              </a:lnSpc>
-            </a:pPr>
-            <a:r>
-              <a:rPr sz="1300" b="1" i="0">
-                <a:solidFill>
-                  <a:srgbClr val="FFFFFF"/>
-                </a:solidFill>
-                <a:latin typeface="Segoe UI"/>
-              </a:rPr>
-              <a:t>04</a:t>
-            </a:r>
-          </a:p>
-        </p:txBody>
-      </p:sp>
-      <p:sp>
-        <p:nvSpPr>
-          <p:cNvPr id="23" name="TextBox 22"/>
-          <p:cNvSpPr txBox="1"/>
-          <p:nvPr/>
-        </p:nvSpPr>
-        <p:spPr>
-          <a:xfrm>
-            <a:off x="1554480" y="4370832"/>
-            <a:ext cx="9601200" cy="768096"/>
-          </a:xfrm>
-          <a:prstGeom prst="rect">
-            <a:avLst/>
-          </a:prstGeom>
-          <a:noFill/>
-        </p:spPr>
-        <p:txBody>
-          <a:bodyPr wrap="square" lIns="73152" rIns="73152" tIns="36576" bIns="36576" anchor="ctr">
-            <a:spAutoFit/>
-          </a:bodyPr>
-          <a:lstStyle/>
-          <a:p>
-            <a:pPr algn="l">
-              <a:lnSpc>
-                <a:spcPts val="2000"/>
-              </a:lnSpc>
-            </a:pPr>
-            <a:r>
-              <a:rPr sz="1600" b="0" i="0">
-                <a:solidFill>
-                  <a:srgbClr val="2C3E50"/>
-                </a:solidFill>
-                <a:latin typeface="Segoe UI"/>
-              </a:rPr>
-              <a:t>Total activation — XL: 71 min | 2XL: 38 min — 1.88× speedup</a:t>
-            </a:r>
-          </a:p>
-        </p:txBody>
-      </p:sp>
-      <p:sp>
-        <p:nvSpPr>
-          <p:cNvPr id="24" name="Rounded Rectangle 23"/>
-          <p:cNvSpPr/>
-          <p:nvPr/>
-        </p:nvSpPr>
-        <p:spPr>
-          <a:xfrm>
-            <a:off x="640080" y="5212080"/>
-            <a:ext cx="10911535" cy="804672"/>
-          </a:xfrm>
-          <a:prstGeom prst="roundRect">
-            <a:avLst/>
-          </a:prstGeom>
-          <a:solidFill>
-            <a:srgbClr val="EEF5FA"/>
-          </a:solidFill>
-          <a:ln>
-            <a:noFill/>
-          </a:ln>
-        </p:spPr>
-        <p:style>
-          <a:lnRef idx="1">
-            <a:schemeClr val="accent1"/>
-          </a:lnRef>
-          <a:fillRef idx="3">
-            <a:schemeClr val="accent1"/>
-          </a:fillRef>
-          <a:effectRef idx="2">
-            <a:schemeClr val="accent1"/>
-          </a:effectRef>
-          <a:fontRef idx="minor">
-            <a:schemeClr val="lt1"/>
-          </a:fontRef>
-        </p:style>
-        <p:txBody>
-          <a:bodyPr rtlCol="0" anchor="ctr"/>
-          <a:lstStyle/>
-          <a:p>
-            <a:pPr algn="ctr"/>
-          </a:p>
-        </p:txBody>
-      </p:sp>
-      <p:sp>
-        <p:nvSpPr>
-          <p:cNvPr id="25" name="Oval 24"/>
-          <p:cNvSpPr/>
-          <p:nvPr/>
-        </p:nvSpPr>
-        <p:spPr>
-          <a:xfrm>
-            <a:off x="914400" y="5349240"/>
-            <a:ext cx="411480" cy="411480"/>
-          </a:xfrm>
-          <a:prstGeom prst="ellipse">
-            <a:avLst/>
-          </a:prstGeom>
-          <a:solidFill>
-            <a:srgbClr val="29B5E8"/>
-          </a:solidFill>
-          <a:ln>
-            <a:noFill/>
-          </a:ln>
-        </p:spPr>
-        <p:style>
-          <a:lnRef idx="1">
-            <a:schemeClr val="accent1"/>
-          </a:lnRef>
-          <a:fillRef idx="3">
-            <a:schemeClr val="accent1"/>
-          </a:fillRef>
-          <a:effectRef idx="2">
-            <a:schemeClr val="accent1"/>
-          </a:effectRef>
-          <a:fontRef idx="minor">
-            <a:schemeClr val="lt1"/>
-          </a:fontRef>
-        </p:style>
-        <p:txBody>
-          <a:bodyPr rtlCol="0" anchor="ctr"/>
-          <a:lstStyle/>
-          <a:p>
-            <a:pPr algn="ctr"/>
-          </a:p>
-        </p:txBody>
-      </p:sp>
-      <p:sp>
-        <p:nvSpPr>
-          <p:cNvPr id="26" name="TextBox 25"/>
-          <p:cNvSpPr txBox="1"/>
-          <p:nvPr/>
-        </p:nvSpPr>
-        <p:spPr>
-          <a:xfrm>
-            <a:off x="914400" y="5349240"/>
-            <a:ext cx="411480" cy="411480"/>
-          </a:xfrm>
-          <a:prstGeom prst="rect">
-            <a:avLst/>
-          </a:prstGeom>
-          <a:noFill/>
-        </p:spPr>
-        <p:txBody>
-          <a:bodyPr wrap="square" lIns="73152" rIns="73152" tIns="36576" bIns="36576" anchor="ctr">
-            <a:spAutoFit/>
-          </a:bodyPr>
-          <a:lstStyle/>
-          <a:p>
-            <a:pPr algn="ctr">
-              <a:lnSpc>
-                <a:spcPts val="1600"/>
-              </a:lnSpc>
-            </a:pPr>
-            <a:r>
-              <a:rPr sz="1300" b="1" i="0">
-                <a:solidFill>
-                  <a:srgbClr val="FFFFFF"/>
-                </a:solidFill>
-                <a:latin typeface="Segoe UI"/>
-              </a:rPr>
-              <a:t>05</a:t>
-            </a:r>
-          </a:p>
-        </p:txBody>
-      </p:sp>
-      <p:sp>
-        <p:nvSpPr>
-          <p:cNvPr id="27" name="TextBox 26"/>
-          <p:cNvSpPr txBox="1"/>
-          <p:nvPr/>
-        </p:nvSpPr>
-        <p:spPr>
-          <a:xfrm>
-            <a:off x="1554480" y="5285232"/>
-            <a:ext cx="9601200" cy="768096"/>
-          </a:xfrm>
-          <a:prstGeom prst="rect">
-            <a:avLst/>
-          </a:prstGeom>
-          <a:noFill/>
-        </p:spPr>
-        <p:txBody>
-          <a:bodyPr wrap="square" lIns="73152" rIns="73152" tIns="36576" bIns="36576" anchor="ctr">
-            <a:spAutoFit/>
-          </a:bodyPr>
-          <a:lstStyle/>
-          <a:p>
-            <a:pPr algn="l">
-              <a:lnSpc>
-                <a:spcPts val="2000"/>
-              </a:lnSpc>
-            </a:pPr>
-            <a:r>
-              <a:rPr sz="1600" b="0" i="0">
-                <a:solidFill>
-                  <a:srgbClr val="2C3E50"/>
-                </a:solidFill>
-                <a:latin typeface="Segoe UI"/>
-              </a:rPr>
-              <a:t>secure_run_v2 DOMINATES 99% — write phase nyaris tidak scale dengan warehouse size</a:t>
-            </a:r>
-          </a:p>
-        </p:txBody>
-      </p:sp>
-      <p:sp>
-        <p:nvSpPr>
-          <p:cNvPr id="28" name="TextBox 27"/>
           <p:cNvSpPr txBox="1"/>
           <p:nvPr/>
         </p:nvSpPr>
@@ -43678,7 +43613,7 @@
                 </a:solidFill>
                 <a:latin typeface="Segoe UI"/>
               </a:rPr>
-              <a:t>DCR Collaboration API v2 | SFSEAPAC | 2026   ·   53 / 60</a:t>
+              <a:t>DCR Collaboration API v2 | SFSEAPAC | 2026   ·   53 / 61</a:t>
             </a:r>
           </a:p>
         </p:txBody>
@@ -43896,7 +43831,7 @@
                 </a:solidFill>
                 <a:latin typeface="Calibri Light"/>
               </a:rPr>
-              <a:t>Master Benchmark Matrix — All 8 Configurations</a:t>
+              <a:t>Sub-Step Breakdown — 1-Partition 1007 cols (XL vs 2XL)</a:t>
             </a:r>
           </a:p>
         </p:txBody>
@@ -43938,14 +43873,100 @@
       </p:cxnSp>
       <p:sp>
         <p:nvSpPr>
-          <p:cNvPr id="8" name="TextBox 7"/>
+          <p:cNvPr id="8" name="Rounded Rectangle 7"/>
+          <p:cNvSpPr/>
+          <p:nvPr/>
+        </p:nvSpPr>
+        <p:spPr>
+          <a:xfrm>
+            <a:off x="640080" y="1554480"/>
+            <a:ext cx="10911535" cy="804672"/>
+          </a:xfrm>
+          <a:prstGeom prst="roundRect">
+            <a:avLst/>
+          </a:prstGeom>
+          <a:solidFill>
+            <a:srgbClr val="EEF5FA"/>
+          </a:solidFill>
+          <a:ln>
+            <a:noFill/>
+          </a:ln>
+        </p:spPr>
+        <p:style>
+          <a:lnRef idx="1">
+            <a:schemeClr val="accent1"/>
+          </a:lnRef>
+          <a:fillRef idx="3">
+            <a:schemeClr val="accent1"/>
+          </a:fillRef>
+          <a:effectRef idx="2">
+            <a:schemeClr val="accent1"/>
+          </a:effectRef>
+          <a:fontRef idx="minor">
+            <a:schemeClr val="lt1"/>
+          </a:fontRef>
+        </p:style>
+        <p:txBody>
+          <a:bodyPr rtlCol="0" anchor="ctr"/>
+          <a:lstStyle/>
+          <a:p>
+            <a:pPr algn="ctr"/>
+          </a:p>
+        </p:txBody>
+      </p:sp>
+      <p:sp>
+        <p:nvSpPr>
+          <p:cNvPr id="9" name="Oval 8"/>
+          <p:cNvSpPr/>
+          <p:nvPr/>
+        </p:nvSpPr>
+        <p:spPr>
+          <a:xfrm>
+            <a:off x="914400" y="1691640"/>
+            <a:ext cx="411480" cy="411480"/>
+          </a:xfrm>
+          <a:prstGeom prst="ellipse">
+            <a:avLst/>
+          </a:prstGeom>
+          <a:solidFill>
+            <a:srgbClr val="29B5E8"/>
+          </a:solidFill>
+          <a:ln>
+            <a:noFill/>
+          </a:ln>
+        </p:spPr>
+        <p:style>
+          <a:lnRef idx="1">
+            <a:schemeClr val="accent1"/>
+          </a:lnRef>
+          <a:fillRef idx="3">
+            <a:schemeClr val="accent1"/>
+          </a:fillRef>
+          <a:effectRef idx="2">
+            <a:schemeClr val="accent1"/>
+          </a:effectRef>
+          <a:fontRef idx="minor">
+            <a:schemeClr val="lt1"/>
+          </a:fontRef>
+        </p:style>
+        <p:txBody>
+          <a:bodyPr rtlCol="0" anchor="ctr"/>
+          <a:lstStyle/>
+          <a:p>
+            <a:pPr algn="ctr"/>
+          </a:p>
+        </p:txBody>
+      </p:sp>
+      <p:sp>
+        <p:nvSpPr>
+          <p:cNvPr id="10" name="TextBox 9"/>
           <p:cNvSpPr txBox="1"/>
           <p:nvPr/>
         </p:nvSpPr>
         <p:spPr>
           <a:xfrm>
-            <a:off x="731520" y="1508760"/>
-            <a:ext cx="10515600" cy="4754880"/>
+            <a:off x="914400" y="1691640"/>
+            <a:ext cx="411480" cy="411480"/>
           </a:xfrm>
           <a:prstGeom prst="rect">
             <a:avLst/>
@@ -43953,239 +43974,726 @@
           <a:noFill/>
         </p:spPr>
         <p:txBody>
-          <a:bodyPr wrap="square" lIns="73152" rIns="73152">
+          <a:bodyPr wrap="square" lIns="73152" rIns="73152" tIns="36576" bIns="36576" anchor="ctr">
             <a:spAutoFit/>
           </a:bodyPr>
           <a:lstStyle/>
           <a:p>
-            <a:pPr>
-              <a:lnSpc>
-                <a:spcPts val="2500"/>
-              </a:lnSpc>
-              <a:spcAft>
-                <a:spcPts val="1000"/>
-              </a:spcAft>
-            </a:pPr>
-            <a:r>
-              <a:rPr sz="800">
-                <a:solidFill>
-                  <a:srgbClr val="29B5E8"/>
-                </a:solidFill>
-                <a:latin typeface="Segoe UI"/>
-              </a:rPr>
-              <a:t>●  </a:t>
-            </a:r>
-            <a:r>
-              <a:rPr sz="1600">
+            <a:pPr algn="ctr">
+              <a:lnSpc>
+                <a:spcPts val="1600"/>
+              </a:lnSpc>
+            </a:pPr>
+            <a:r>
+              <a:rPr sz="1300" b="1" i="0">
+                <a:solidFill>
+                  <a:srgbClr val="FFFFFF"/>
+                </a:solidFill>
+                <a:latin typeface="Segoe UI"/>
+              </a:rPr>
+              <a:t>01</a:t>
+            </a:r>
+          </a:p>
+        </p:txBody>
+      </p:sp>
+      <p:sp>
+        <p:nvSpPr>
+          <p:cNvPr id="11" name="TextBox 10"/>
+          <p:cNvSpPr txBox="1"/>
+          <p:nvPr/>
+        </p:nvSpPr>
+        <p:spPr>
+          <a:xfrm>
+            <a:off x="1554480" y="1627632"/>
+            <a:ext cx="9601200" cy="768096"/>
+          </a:xfrm>
+          <a:prstGeom prst="rect">
+            <a:avLst/>
+          </a:prstGeom>
+          <a:noFill/>
+        </p:spPr>
+        <p:txBody>
+          <a:bodyPr wrap="square" lIns="73152" rIns="73152" tIns="36576" bIns="36576" anchor="ctr">
+            <a:spAutoFit/>
+          </a:bodyPr>
+          <a:lstStyle/>
+          <a:p>
+            <a:pPr algn="l">
+              <a:lnSpc>
+                <a:spcPts val="2000"/>
+              </a:lnSpc>
+            </a:pPr>
+            <a:r>
+              <a:rPr sz="1600" b="0" i="0">
                 <a:solidFill>
                   <a:srgbClr val="2C3E50"/>
                 </a:solidFill>
                 <a:latin typeface="Segoe UI"/>
               </a:rPr>
-              <a:t>1-part analysis 6 cols @ XL — 39 s, 0.17 credits, $0.67</a:t>
-            </a:r>
-          </a:p>
-          <a:p>
-            <a:pPr>
-              <a:lnSpc>
-                <a:spcPts val="2500"/>
-              </a:lnSpc>
-              <a:spcAft>
-                <a:spcPts val="1000"/>
-              </a:spcAft>
-            </a:pPr>
-            <a:r>
-              <a:rPr sz="800">
-                <a:solidFill>
-                  <a:srgbClr val="29B5E8"/>
-                </a:solidFill>
-                <a:latin typeface="Segoe UI"/>
-              </a:rPr>
-              <a:t>●  </a:t>
-            </a:r>
-            <a:r>
-              <a:rPr sz="1600">
+              <a:t>secure_run_v2 — XL: 4214 s (70m 15s) | 2XL: 2234 s (37m 14s) — 1.89× speedup</a:t>
+            </a:r>
+          </a:p>
+        </p:txBody>
+      </p:sp>
+      <p:sp>
+        <p:nvSpPr>
+          <p:cNvPr id="12" name="Rounded Rectangle 11"/>
+          <p:cNvSpPr/>
+          <p:nvPr/>
+        </p:nvSpPr>
+        <p:spPr>
+          <a:xfrm>
+            <a:off x="640080" y="2468880"/>
+            <a:ext cx="10911535" cy="804672"/>
+          </a:xfrm>
+          <a:prstGeom prst="roundRect">
+            <a:avLst/>
+          </a:prstGeom>
+          <a:solidFill>
+            <a:srgbClr val="F4F8FB"/>
+          </a:solidFill>
+          <a:ln>
+            <a:noFill/>
+          </a:ln>
+        </p:spPr>
+        <p:style>
+          <a:lnRef idx="1">
+            <a:schemeClr val="accent1"/>
+          </a:lnRef>
+          <a:fillRef idx="3">
+            <a:schemeClr val="accent1"/>
+          </a:fillRef>
+          <a:effectRef idx="2">
+            <a:schemeClr val="accent1"/>
+          </a:effectRef>
+          <a:fontRef idx="minor">
+            <a:schemeClr val="lt1"/>
+          </a:fontRef>
+        </p:style>
+        <p:txBody>
+          <a:bodyPr rtlCol="0" anchor="ctr"/>
+          <a:lstStyle/>
+          <a:p>
+            <a:pPr algn="ctr"/>
+          </a:p>
+        </p:txBody>
+      </p:sp>
+      <p:sp>
+        <p:nvSpPr>
+          <p:cNvPr id="13" name="Oval 12"/>
+          <p:cNvSpPr/>
+          <p:nvPr/>
+        </p:nvSpPr>
+        <p:spPr>
+          <a:xfrm>
+            <a:off x="914400" y="2606040"/>
+            <a:ext cx="411480" cy="411480"/>
+          </a:xfrm>
+          <a:prstGeom prst="ellipse">
+            <a:avLst/>
+          </a:prstGeom>
+          <a:solidFill>
+            <a:srgbClr val="11567F"/>
+          </a:solidFill>
+          <a:ln>
+            <a:noFill/>
+          </a:ln>
+        </p:spPr>
+        <p:style>
+          <a:lnRef idx="1">
+            <a:schemeClr val="accent1"/>
+          </a:lnRef>
+          <a:fillRef idx="3">
+            <a:schemeClr val="accent1"/>
+          </a:fillRef>
+          <a:effectRef idx="2">
+            <a:schemeClr val="accent1"/>
+          </a:effectRef>
+          <a:fontRef idx="minor">
+            <a:schemeClr val="lt1"/>
+          </a:fontRef>
+        </p:style>
+        <p:txBody>
+          <a:bodyPr rtlCol="0" anchor="ctr"/>
+          <a:lstStyle/>
+          <a:p>
+            <a:pPr algn="ctr"/>
+          </a:p>
+        </p:txBody>
+      </p:sp>
+      <p:sp>
+        <p:nvSpPr>
+          <p:cNvPr id="14" name="TextBox 13"/>
+          <p:cNvSpPr txBox="1"/>
+          <p:nvPr/>
+        </p:nvSpPr>
+        <p:spPr>
+          <a:xfrm>
+            <a:off x="914400" y="2606040"/>
+            <a:ext cx="411480" cy="411480"/>
+          </a:xfrm>
+          <a:prstGeom prst="rect">
+            <a:avLst/>
+          </a:prstGeom>
+          <a:noFill/>
+        </p:spPr>
+        <p:txBody>
+          <a:bodyPr wrap="square" lIns="73152" rIns="73152" tIns="36576" bIns="36576" anchor="ctr">
+            <a:spAutoFit/>
+          </a:bodyPr>
+          <a:lstStyle/>
+          <a:p>
+            <a:pPr algn="ctr">
+              <a:lnSpc>
+                <a:spcPts val="1600"/>
+              </a:lnSpc>
+            </a:pPr>
+            <a:r>
+              <a:rPr sz="1300" b="1" i="0">
+                <a:solidFill>
+                  <a:srgbClr val="FFFFFF"/>
+                </a:solidFill>
+                <a:latin typeface="Segoe UI"/>
+              </a:rPr>
+              <a:t>02</a:t>
+            </a:r>
+          </a:p>
+        </p:txBody>
+      </p:sp>
+      <p:sp>
+        <p:nvSpPr>
+          <p:cNvPr id="15" name="TextBox 14"/>
+          <p:cNvSpPr txBox="1"/>
+          <p:nvPr/>
+        </p:nvSpPr>
+        <p:spPr>
+          <a:xfrm>
+            <a:off x="1554480" y="2542032"/>
+            <a:ext cx="9601200" cy="768096"/>
+          </a:xfrm>
+          <a:prstGeom prst="rect">
+            <a:avLst/>
+          </a:prstGeom>
+          <a:noFill/>
+        </p:spPr>
+        <p:txBody>
+          <a:bodyPr wrap="square" lIns="73152" rIns="73152" tIns="36576" bIns="36576" anchor="ctr">
+            <a:spAutoFit/>
+          </a:bodyPr>
+          <a:lstStyle/>
+          <a:p>
+            <a:pPr algn="l">
+              <a:lnSpc>
+                <a:spcPts val="2000"/>
+              </a:lnSpc>
+            </a:pPr>
+            <a:r>
+              <a:rPr sz="1600" b="0" i="0">
                 <a:solidFill>
                   <a:srgbClr val="2C3E50"/>
                 </a:solidFill>
                 <a:latin typeface="Segoe UI"/>
               </a:rPr>
-              <a:t>8-part analysis 6 cols @ XL — 57 s, 0.25 credits, $0.99</a:t>
-            </a:r>
-          </a:p>
-          <a:p>
-            <a:pPr>
-              <a:lnSpc>
-                <a:spcPts val="2500"/>
-              </a:lnSpc>
-              <a:spcAft>
-                <a:spcPts val="1000"/>
-              </a:spcAft>
-            </a:pPr>
-            <a:r>
-              <a:rPr sz="800">
-                <a:solidFill>
-                  <a:srgbClr val="29B5E8"/>
-                </a:solidFill>
-                <a:latin typeface="Segoe UI"/>
-              </a:rPr>
-              <a:t>●  </a:t>
-            </a:r>
-            <a:r>
-              <a:rPr sz="1600">
+              <a:t>direct_activation_to_runner — XL: 12.3 s | 2XL: 10.4 s — 1.18× speedup</a:t>
+            </a:r>
+          </a:p>
+        </p:txBody>
+      </p:sp>
+      <p:sp>
+        <p:nvSpPr>
+          <p:cNvPr id="16" name="Rounded Rectangle 15"/>
+          <p:cNvSpPr/>
+          <p:nvPr/>
+        </p:nvSpPr>
+        <p:spPr>
+          <a:xfrm>
+            <a:off x="640080" y="3383280"/>
+            <a:ext cx="10911535" cy="804672"/>
+          </a:xfrm>
+          <a:prstGeom prst="roundRect">
+            <a:avLst/>
+          </a:prstGeom>
+          <a:solidFill>
+            <a:srgbClr val="EEF5FA"/>
+          </a:solidFill>
+          <a:ln>
+            <a:noFill/>
+          </a:ln>
+        </p:spPr>
+        <p:style>
+          <a:lnRef idx="1">
+            <a:schemeClr val="accent1"/>
+          </a:lnRef>
+          <a:fillRef idx="3">
+            <a:schemeClr val="accent1"/>
+          </a:fillRef>
+          <a:effectRef idx="2">
+            <a:schemeClr val="accent1"/>
+          </a:effectRef>
+          <a:fontRef idx="minor">
+            <a:schemeClr val="lt1"/>
+          </a:fontRef>
+        </p:style>
+        <p:txBody>
+          <a:bodyPr rtlCol="0" anchor="ctr"/>
+          <a:lstStyle/>
+          <a:p>
+            <a:pPr algn="ctr"/>
+          </a:p>
+        </p:txBody>
+      </p:sp>
+      <p:sp>
+        <p:nvSpPr>
+          <p:cNvPr id="17" name="Oval 16"/>
+          <p:cNvSpPr/>
+          <p:nvPr/>
+        </p:nvSpPr>
+        <p:spPr>
+          <a:xfrm>
+            <a:off x="914400" y="3520440"/>
+            <a:ext cx="411480" cy="411480"/>
+          </a:xfrm>
+          <a:prstGeom prst="ellipse">
+            <a:avLst/>
+          </a:prstGeom>
+          <a:solidFill>
+            <a:srgbClr val="71D3DC"/>
+          </a:solidFill>
+          <a:ln>
+            <a:noFill/>
+          </a:ln>
+        </p:spPr>
+        <p:style>
+          <a:lnRef idx="1">
+            <a:schemeClr val="accent1"/>
+          </a:lnRef>
+          <a:fillRef idx="3">
+            <a:schemeClr val="accent1"/>
+          </a:fillRef>
+          <a:effectRef idx="2">
+            <a:schemeClr val="accent1"/>
+          </a:effectRef>
+          <a:fontRef idx="minor">
+            <a:schemeClr val="lt1"/>
+          </a:fontRef>
+        </p:style>
+        <p:txBody>
+          <a:bodyPr rtlCol="0" anchor="ctr"/>
+          <a:lstStyle/>
+          <a:p>
+            <a:pPr algn="ctr"/>
+          </a:p>
+        </p:txBody>
+      </p:sp>
+      <p:sp>
+        <p:nvSpPr>
+          <p:cNvPr id="18" name="TextBox 17"/>
+          <p:cNvSpPr txBox="1"/>
+          <p:nvPr/>
+        </p:nvSpPr>
+        <p:spPr>
+          <a:xfrm>
+            <a:off x="914400" y="3520440"/>
+            <a:ext cx="411480" cy="411480"/>
+          </a:xfrm>
+          <a:prstGeom prst="rect">
+            <a:avLst/>
+          </a:prstGeom>
+          <a:noFill/>
+        </p:spPr>
+        <p:txBody>
+          <a:bodyPr wrap="square" lIns="73152" rIns="73152" tIns="36576" bIns="36576" anchor="ctr">
+            <a:spAutoFit/>
+          </a:bodyPr>
+          <a:lstStyle/>
+          <a:p>
+            <a:pPr algn="ctr">
+              <a:lnSpc>
+                <a:spcPts val="1600"/>
+              </a:lnSpc>
+            </a:pPr>
+            <a:r>
+              <a:rPr sz="1300" b="1" i="0">
+                <a:solidFill>
+                  <a:srgbClr val="FFFFFF"/>
+                </a:solidFill>
+                <a:latin typeface="Segoe UI"/>
+              </a:rPr>
+              <a:t>03</a:t>
+            </a:r>
+          </a:p>
+        </p:txBody>
+      </p:sp>
+      <p:sp>
+        <p:nvSpPr>
+          <p:cNvPr id="19" name="TextBox 18"/>
+          <p:cNvSpPr txBox="1"/>
+          <p:nvPr/>
+        </p:nvSpPr>
+        <p:spPr>
+          <a:xfrm>
+            <a:off x="1554480" y="3456432"/>
+            <a:ext cx="9601200" cy="768096"/>
+          </a:xfrm>
+          <a:prstGeom prst="rect">
+            <a:avLst/>
+          </a:prstGeom>
+          <a:noFill/>
+        </p:spPr>
+        <p:txBody>
+          <a:bodyPr wrap="square" lIns="73152" rIns="73152" tIns="36576" bIns="36576" anchor="ctr">
+            <a:spAutoFit/>
+          </a:bodyPr>
+          <a:lstStyle/>
+          <a:p>
+            <a:pPr algn="l">
+              <a:lnSpc>
+                <a:spcPts val="2000"/>
+              </a:lnSpc>
+            </a:pPr>
+            <a:r>
+              <a:rPr sz="1600" b="0" i="0">
                 <a:solidFill>
                   <a:srgbClr val="2C3E50"/>
                 </a:solidFill>
                 <a:latin typeface="Segoe UI"/>
               </a:rPr>
-              <a:t>1-part activation 6 cols @ XL — 79 s, 0.35 credits, $1.37</a:t>
-            </a:r>
-          </a:p>
-          <a:p>
-            <a:pPr>
-              <a:lnSpc>
-                <a:spcPts val="2500"/>
-              </a:lnSpc>
-              <a:spcAft>
-                <a:spcPts val="1000"/>
-              </a:spcAft>
-            </a:pPr>
-            <a:r>
-              <a:rPr sz="800">
-                <a:solidFill>
-                  <a:srgbClr val="29B5E8"/>
-                </a:solidFill>
-                <a:latin typeface="Segoe UI"/>
-              </a:rPr>
-              <a:t>●  </a:t>
-            </a:r>
-            <a:r>
-              <a:rPr sz="1600">
+              <a:t>INSERT to SEGMENT_RECORDS — XL: 5.7 s | 2XL: 5.3 s — 1.07× speedup</a:t>
+            </a:r>
+          </a:p>
+        </p:txBody>
+      </p:sp>
+      <p:sp>
+        <p:nvSpPr>
+          <p:cNvPr id="20" name="Rounded Rectangle 19"/>
+          <p:cNvSpPr/>
+          <p:nvPr/>
+        </p:nvSpPr>
+        <p:spPr>
+          <a:xfrm>
+            <a:off x="640080" y="4297680"/>
+            <a:ext cx="10911535" cy="804672"/>
+          </a:xfrm>
+          <a:prstGeom prst="roundRect">
+            <a:avLst/>
+          </a:prstGeom>
+          <a:solidFill>
+            <a:srgbClr val="F4F8FB"/>
+          </a:solidFill>
+          <a:ln>
+            <a:noFill/>
+          </a:ln>
+        </p:spPr>
+        <p:style>
+          <a:lnRef idx="1">
+            <a:schemeClr val="accent1"/>
+          </a:lnRef>
+          <a:fillRef idx="3">
+            <a:schemeClr val="accent1"/>
+          </a:fillRef>
+          <a:effectRef idx="2">
+            <a:schemeClr val="accent1"/>
+          </a:effectRef>
+          <a:fontRef idx="minor">
+            <a:schemeClr val="lt1"/>
+          </a:fontRef>
+        </p:style>
+        <p:txBody>
+          <a:bodyPr rtlCol="0" anchor="ctr"/>
+          <a:lstStyle/>
+          <a:p>
+            <a:pPr algn="ctr"/>
+          </a:p>
+        </p:txBody>
+      </p:sp>
+      <p:sp>
+        <p:nvSpPr>
+          <p:cNvPr id="21" name="Oval 20"/>
+          <p:cNvSpPr/>
+          <p:nvPr/>
+        </p:nvSpPr>
+        <p:spPr>
+          <a:xfrm>
+            <a:off x="914400" y="4434840"/>
+            <a:ext cx="411480" cy="411480"/>
+          </a:xfrm>
+          <a:prstGeom prst="ellipse">
+            <a:avLst/>
+          </a:prstGeom>
+          <a:solidFill>
+            <a:srgbClr val="FF9F36"/>
+          </a:solidFill>
+          <a:ln>
+            <a:noFill/>
+          </a:ln>
+        </p:spPr>
+        <p:style>
+          <a:lnRef idx="1">
+            <a:schemeClr val="accent1"/>
+          </a:lnRef>
+          <a:fillRef idx="3">
+            <a:schemeClr val="accent1"/>
+          </a:fillRef>
+          <a:effectRef idx="2">
+            <a:schemeClr val="accent1"/>
+          </a:effectRef>
+          <a:fontRef idx="minor">
+            <a:schemeClr val="lt1"/>
+          </a:fontRef>
+        </p:style>
+        <p:txBody>
+          <a:bodyPr rtlCol="0" anchor="ctr"/>
+          <a:lstStyle/>
+          <a:p>
+            <a:pPr algn="ctr"/>
+          </a:p>
+        </p:txBody>
+      </p:sp>
+      <p:sp>
+        <p:nvSpPr>
+          <p:cNvPr id="22" name="TextBox 21"/>
+          <p:cNvSpPr txBox="1"/>
+          <p:nvPr/>
+        </p:nvSpPr>
+        <p:spPr>
+          <a:xfrm>
+            <a:off x="914400" y="4434840"/>
+            <a:ext cx="411480" cy="411480"/>
+          </a:xfrm>
+          <a:prstGeom prst="rect">
+            <a:avLst/>
+          </a:prstGeom>
+          <a:noFill/>
+        </p:spPr>
+        <p:txBody>
+          <a:bodyPr wrap="square" lIns="73152" rIns="73152" tIns="36576" bIns="36576" anchor="ctr">
+            <a:spAutoFit/>
+          </a:bodyPr>
+          <a:lstStyle/>
+          <a:p>
+            <a:pPr algn="ctr">
+              <a:lnSpc>
+                <a:spcPts val="1600"/>
+              </a:lnSpc>
+            </a:pPr>
+            <a:r>
+              <a:rPr sz="1300" b="1" i="0">
+                <a:solidFill>
+                  <a:srgbClr val="FFFFFF"/>
+                </a:solidFill>
+                <a:latin typeface="Segoe UI"/>
+              </a:rPr>
+              <a:t>04</a:t>
+            </a:r>
+          </a:p>
+        </p:txBody>
+      </p:sp>
+      <p:sp>
+        <p:nvSpPr>
+          <p:cNvPr id="23" name="TextBox 22"/>
+          <p:cNvSpPr txBox="1"/>
+          <p:nvPr/>
+        </p:nvSpPr>
+        <p:spPr>
+          <a:xfrm>
+            <a:off x="1554480" y="4370832"/>
+            <a:ext cx="9601200" cy="768096"/>
+          </a:xfrm>
+          <a:prstGeom prst="rect">
+            <a:avLst/>
+          </a:prstGeom>
+          <a:noFill/>
+        </p:spPr>
+        <p:txBody>
+          <a:bodyPr wrap="square" lIns="73152" rIns="73152" tIns="36576" bIns="36576" anchor="ctr">
+            <a:spAutoFit/>
+          </a:bodyPr>
+          <a:lstStyle/>
+          <a:p>
+            <a:pPr algn="l">
+              <a:lnSpc>
+                <a:spcPts val="2000"/>
+              </a:lnSpc>
+            </a:pPr>
+            <a:r>
+              <a:rPr sz="1600" b="0" i="0">
                 <a:solidFill>
                   <a:srgbClr val="2C3E50"/>
                 </a:solidFill>
                 <a:latin typeface="Segoe UI"/>
               </a:rPr>
-              <a:t>8-part activation 6 cols @ XL — 79 s, 0.35 credits, $1.37</a:t>
-            </a:r>
-          </a:p>
-          <a:p>
-            <a:pPr>
-              <a:lnSpc>
-                <a:spcPts val="2500"/>
-              </a:lnSpc>
-              <a:spcAft>
-                <a:spcPts val="1000"/>
-              </a:spcAft>
-            </a:pPr>
-            <a:r>
-              <a:rPr sz="800">
-                <a:solidFill>
-                  <a:srgbClr val="29B5E8"/>
-                </a:solidFill>
-                <a:latin typeface="Segoe UI"/>
-              </a:rPr>
-              <a:t>●  </a:t>
-            </a:r>
-            <a:r>
-              <a:rPr sz="1600">
+              <a:t>Total activation — XL: 71 min | 2XL: 38 min — 1.88× speedup</a:t>
+            </a:r>
+          </a:p>
+        </p:txBody>
+      </p:sp>
+      <p:sp>
+        <p:nvSpPr>
+          <p:cNvPr id="24" name="Rounded Rectangle 23"/>
+          <p:cNvSpPr/>
+          <p:nvPr/>
+        </p:nvSpPr>
+        <p:spPr>
+          <a:xfrm>
+            <a:off x="640080" y="5212080"/>
+            <a:ext cx="10911535" cy="804672"/>
+          </a:xfrm>
+          <a:prstGeom prst="roundRect">
+            <a:avLst/>
+          </a:prstGeom>
+          <a:solidFill>
+            <a:srgbClr val="EEF5FA"/>
+          </a:solidFill>
+          <a:ln>
+            <a:noFill/>
+          </a:ln>
+        </p:spPr>
+        <p:style>
+          <a:lnRef idx="1">
+            <a:schemeClr val="accent1"/>
+          </a:lnRef>
+          <a:fillRef idx="3">
+            <a:schemeClr val="accent1"/>
+          </a:fillRef>
+          <a:effectRef idx="2">
+            <a:schemeClr val="accent1"/>
+          </a:effectRef>
+          <a:fontRef idx="minor">
+            <a:schemeClr val="lt1"/>
+          </a:fontRef>
+        </p:style>
+        <p:txBody>
+          <a:bodyPr rtlCol="0" anchor="ctr"/>
+          <a:lstStyle/>
+          <a:p>
+            <a:pPr algn="ctr"/>
+          </a:p>
+        </p:txBody>
+      </p:sp>
+      <p:sp>
+        <p:nvSpPr>
+          <p:cNvPr id="25" name="Oval 24"/>
+          <p:cNvSpPr/>
+          <p:nvPr/>
+        </p:nvSpPr>
+        <p:spPr>
+          <a:xfrm>
+            <a:off x="914400" y="5349240"/>
+            <a:ext cx="411480" cy="411480"/>
+          </a:xfrm>
+          <a:prstGeom prst="ellipse">
+            <a:avLst/>
+          </a:prstGeom>
+          <a:solidFill>
+            <a:srgbClr val="29B5E8"/>
+          </a:solidFill>
+          <a:ln>
+            <a:noFill/>
+          </a:ln>
+        </p:spPr>
+        <p:style>
+          <a:lnRef idx="1">
+            <a:schemeClr val="accent1"/>
+          </a:lnRef>
+          <a:fillRef idx="3">
+            <a:schemeClr val="accent1"/>
+          </a:fillRef>
+          <a:effectRef idx="2">
+            <a:schemeClr val="accent1"/>
+          </a:effectRef>
+          <a:fontRef idx="minor">
+            <a:schemeClr val="lt1"/>
+          </a:fontRef>
+        </p:style>
+        <p:txBody>
+          <a:bodyPr rtlCol="0" anchor="ctr"/>
+          <a:lstStyle/>
+          <a:p>
+            <a:pPr algn="ctr"/>
+          </a:p>
+        </p:txBody>
+      </p:sp>
+      <p:sp>
+        <p:nvSpPr>
+          <p:cNvPr id="26" name="TextBox 25"/>
+          <p:cNvSpPr txBox="1"/>
+          <p:nvPr/>
+        </p:nvSpPr>
+        <p:spPr>
+          <a:xfrm>
+            <a:off x="914400" y="5349240"/>
+            <a:ext cx="411480" cy="411480"/>
+          </a:xfrm>
+          <a:prstGeom prst="rect">
+            <a:avLst/>
+          </a:prstGeom>
+          <a:noFill/>
+        </p:spPr>
+        <p:txBody>
+          <a:bodyPr wrap="square" lIns="73152" rIns="73152" tIns="36576" bIns="36576" anchor="ctr">
+            <a:spAutoFit/>
+          </a:bodyPr>
+          <a:lstStyle/>
+          <a:p>
+            <a:pPr algn="ctr">
+              <a:lnSpc>
+                <a:spcPts val="1600"/>
+              </a:lnSpc>
+            </a:pPr>
+            <a:r>
+              <a:rPr sz="1300" b="1" i="0">
+                <a:solidFill>
+                  <a:srgbClr val="FFFFFF"/>
+                </a:solidFill>
+                <a:latin typeface="Segoe UI"/>
+              </a:rPr>
+              <a:t>05</a:t>
+            </a:r>
+          </a:p>
+        </p:txBody>
+      </p:sp>
+      <p:sp>
+        <p:nvSpPr>
+          <p:cNvPr id="27" name="TextBox 26"/>
+          <p:cNvSpPr txBox="1"/>
+          <p:nvPr/>
+        </p:nvSpPr>
+        <p:spPr>
+          <a:xfrm>
+            <a:off x="1554480" y="5285232"/>
+            <a:ext cx="9601200" cy="768096"/>
+          </a:xfrm>
+          <a:prstGeom prst="rect">
+            <a:avLst/>
+          </a:prstGeom>
+          <a:noFill/>
+        </p:spPr>
+        <p:txBody>
+          <a:bodyPr wrap="square" lIns="73152" rIns="73152" tIns="36576" bIns="36576" anchor="ctr">
+            <a:spAutoFit/>
+          </a:bodyPr>
+          <a:lstStyle/>
+          <a:p>
+            <a:pPr algn="l">
+              <a:lnSpc>
+                <a:spcPts val="2000"/>
+              </a:lnSpc>
+            </a:pPr>
+            <a:r>
+              <a:rPr sz="1600" b="0" i="0">
                 <a:solidFill>
                   <a:srgbClr val="2C3E50"/>
                 </a:solidFill>
                 <a:latin typeface="Segoe UI"/>
               </a:rPr>
-              <a:t>1-part activation 1007 cols @ XL — 71 min, 19.04 credits, $74.3</a:t>
-            </a:r>
-          </a:p>
-          <a:p>
-            <a:pPr>
-              <a:lnSpc>
-                <a:spcPts val="2500"/>
-              </a:lnSpc>
-              <a:spcAft>
-                <a:spcPts val="1000"/>
-              </a:spcAft>
-            </a:pPr>
-            <a:r>
-              <a:rPr sz="800">
-                <a:solidFill>
-                  <a:srgbClr val="29B5E8"/>
-                </a:solidFill>
-                <a:latin typeface="Segoe UI"/>
-              </a:rPr>
-              <a:t>●  </a:t>
-            </a:r>
-            <a:r>
-              <a:rPr sz="1600">
-                <a:solidFill>
-                  <a:srgbClr val="2C3E50"/>
-                </a:solidFill>
-                <a:latin typeface="Segoe UI"/>
-              </a:rPr>
-              <a:t>8-part activation 1007 cols @ XL — 83 min, 22.2 credits, $86.6</a:t>
-            </a:r>
-          </a:p>
-          <a:p>
-            <a:pPr>
-              <a:lnSpc>
-                <a:spcPts val="2500"/>
-              </a:lnSpc>
-              <a:spcAft>
-                <a:spcPts val="1000"/>
-              </a:spcAft>
-            </a:pPr>
-            <a:r>
-              <a:rPr sz="800">
-                <a:solidFill>
-                  <a:srgbClr val="29B5E8"/>
-                </a:solidFill>
-                <a:latin typeface="Segoe UI"/>
-              </a:rPr>
-              <a:t>●  </a:t>
-            </a:r>
-            <a:r>
-              <a:rPr sz="1600">
-                <a:solidFill>
-                  <a:srgbClr val="2C3E50"/>
-                </a:solidFill>
-                <a:latin typeface="Segoe UI"/>
-              </a:rPr>
-              <a:t>8-part activation 1007 cols @ 2XL — 45 min, 23.8 credits, $93.0</a:t>
-            </a:r>
-          </a:p>
-          <a:p>
-            <a:pPr>
-              <a:lnSpc>
-                <a:spcPts val="2500"/>
-              </a:lnSpc>
-              <a:spcAft>
-                <a:spcPts val="1000"/>
-              </a:spcAft>
-            </a:pPr>
-            <a:r>
-              <a:rPr sz="800">
-                <a:solidFill>
-                  <a:srgbClr val="29B5E8"/>
-                </a:solidFill>
-                <a:latin typeface="Segoe UI"/>
-              </a:rPr>
-              <a:t>●  </a:t>
-            </a:r>
-            <a:r>
-              <a:rPr sz="1600">
-                <a:solidFill>
-                  <a:srgbClr val="2C3E50"/>
-                </a:solidFill>
-                <a:latin typeface="Segoe UI"/>
-              </a:rPr>
-              <a:t>1-part activation 1007 cols @ 2XL — 38 min, 20.35 credits, $79.4 ← NEW</a:t>
-            </a:r>
-          </a:p>
-        </p:txBody>
-      </p:sp>
-      <p:sp>
-        <p:nvSpPr>
-          <p:cNvPr id="9" name="TextBox 8"/>
+              <a:t>secure_run_v2 DOMINATES 99% — write phase nyaris tidak scale dengan warehouse size</a:t>
+            </a:r>
+          </a:p>
+        </p:txBody>
+      </p:sp>
+      <p:sp>
+        <p:nvSpPr>
+          <p:cNvPr id="28" name="TextBox 27"/>
           <p:cNvSpPr txBox="1"/>
           <p:nvPr/>
         </p:nvSpPr>
@@ -44217,7 +44725,7 @@
                 </a:solidFill>
                 <a:latin typeface="Segoe UI"/>
               </a:rPr>
-              <a:t>DCR Collaboration API v2 | SFSEAPAC | 2026   ·   54 / 60</a:t>
+              <a:t>DCR Collaboration API v2 | SFSEAPAC | 2026   ·   54 / 61</a:t>
             </a:r>
           </a:p>
         </p:txBody>
@@ -44231,6 +44739,545 @@
 </file>
 
 <file path=ppt/slides/slide55.xml><?xml version="1.0" encoding="utf-8"?>
+<p:sld xmlns:a="http://schemas.openxmlformats.org/drawingml/2006/main" xmlns:p="http://schemas.openxmlformats.org/presentationml/2006/main" xmlns:r="http://schemas.openxmlformats.org/officeDocument/2006/relationships">
+  <p:cSld>
+    <p:bg>
+      <p:bgPr>
+        <a:solidFill>
+          <a:srgbClr val="FFFFFF"/>
+        </a:solidFill>
+        <a:effectLst/>
+      </p:bgPr>
+    </p:bg>
+    <p:spTree>
+      <p:nvGrpSpPr>
+        <p:cNvPr id="1" name=""/>
+        <p:cNvGrpSpPr/>
+        <p:nvPr/>
+      </p:nvGrpSpPr>
+      <p:grpSpPr/>
+      <p:sp>
+        <p:nvSpPr>
+          <p:cNvPr id="2" name="Oval 1"/>
+          <p:cNvSpPr/>
+          <p:nvPr/>
+        </p:nvSpPr>
+        <p:spPr>
+          <a:xfrm>
+            <a:off x="9631375" y="-914400"/>
+            <a:ext cx="3200400" cy="3200400"/>
+          </a:xfrm>
+          <a:prstGeom prst="ellipse">
+            <a:avLst/>
+          </a:prstGeom>
+          <a:solidFill>
+            <a:srgbClr val="D6EFF8"/>
+          </a:solidFill>
+          <a:ln>
+            <a:noFill/>
+          </a:ln>
+        </p:spPr>
+        <p:style>
+          <a:lnRef idx="1">
+            <a:schemeClr val="accent1"/>
+          </a:lnRef>
+          <a:fillRef idx="3">
+            <a:schemeClr val="accent1"/>
+          </a:fillRef>
+          <a:effectRef idx="2">
+            <a:schemeClr val="accent1"/>
+          </a:effectRef>
+          <a:fontRef idx="minor">
+            <a:schemeClr val="lt1"/>
+          </a:fontRef>
+        </p:style>
+        <p:txBody>
+          <a:bodyPr rtlCol="0" anchor="ctr"/>
+          <a:lstStyle/>
+          <a:p>
+            <a:pPr algn="ctr"/>
+          </a:p>
+        </p:txBody>
+      </p:sp>
+      <p:sp>
+        <p:nvSpPr>
+          <p:cNvPr id="3" name="Oval 2"/>
+          <p:cNvSpPr/>
+          <p:nvPr/>
+        </p:nvSpPr>
+        <p:spPr>
+          <a:xfrm>
+            <a:off x="-640080" y="5029200"/>
+            <a:ext cx="1828800" cy="1828800"/>
+          </a:xfrm>
+          <a:prstGeom prst="ellipse">
+            <a:avLst/>
+          </a:prstGeom>
+          <a:solidFill>
+            <a:srgbClr val="E8F4FD"/>
+          </a:solidFill>
+          <a:ln>
+            <a:noFill/>
+          </a:ln>
+        </p:spPr>
+        <p:style>
+          <a:lnRef idx="1">
+            <a:schemeClr val="accent1"/>
+          </a:lnRef>
+          <a:fillRef idx="3">
+            <a:schemeClr val="accent1"/>
+          </a:fillRef>
+          <a:effectRef idx="2">
+            <a:schemeClr val="accent1"/>
+          </a:effectRef>
+          <a:fontRef idx="minor">
+            <a:schemeClr val="lt1"/>
+          </a:fontRef>
+        </p:style>
+        <p:txBody>
+          <a:bodyPr rtlCol="0" anchor="ctr"/>
+          <a:lstStyle/>
+          <a:p>
+            <a:pPr algn="ctr"/>
+          </a:p>
+        </p:txBody>
+      </p:sp>
+      <p:pic>
+        <p:nvPicPr>
+          <p:cNvPr id="4" name="Picture 3" descr="snowflake_icon_blue.png"/>
+          <p:cNvPicPr>
+            <a:picLocks noChangeAspect="1"/>
+          </p:cNvPicPr>
+          <p:nvPr/>
+        </p:nvPicPr>
+        <p:blipFill>
+          <a:blip r:embed="rId2"/>
+          <a:stretch>
+            <a:fillRect/>
+          </a:stretch>
+        </p:blipFill>
+        <p:spPr>
+          <a:xfrm>
+            <a:off x="11414455" y="320040"/>
+            <a:ext cx="349389" cy="320040"/>
+          </a:xfrm>
+          <a:prstGeom prst="rect">
+            <a:avLst/>
+          </a:prstGeom>
+        </p:spPr>
+      </p:pic>
+      <p:sp>
+        <p:nvSpPr>
+          <p:cNvPr id="5" name="Rectangle 4"/>
+          <p:cNvSpPr/>
+          <p:nvPr/>
+        </p:nvSpPr>
+        <p:spPr>
+          <a:xfrm>
+            <a:off x="548640" y="457200"/>
+            <a:ext cx="54864" cy="502920"/>
+          </a:xfrm>
+          <a:prstGeom prst="rect">
+            <a:avLst/>
+          </a:prstGeom>
+          <a:solidFill>
+            <a:srgbClr val="29B5E8"/>
+          </a:solidFill>
+          <a:ln>
+            <a:noFill/>
+          </a:ln>
+        </p:spPr>
+        <p:style>
+          <a:lnRef idx="1">
+            <a:schemeClr val="accent1"/>
+          </a:lnRef>
+          <a:fillRef idx="3">
+            <a:schemeClr val="accent1"/>
+          </a:fillRef>
+          <a:effectRef idx="2">
+            <a:schemeClr val="accent1"/>
+          </a:effectRef>
+          <a:fontRef idx="minor">
+            <a:schemeClr val="lt1"/>
+          </a:fontRef>
+        </p:style>
+        <p:txBody>
+          <a:bodyPr rtlCol="0" anchor="ctr"/>
+          <a:lstStyle/>
+          <a:p>
+            <a:pPr algn="ctr"/>
+          </a:p>
+        </p:txBody>
+      </p:sp>
+      <p:sp>
+        <p:nvSpPr>
+          <p:cNvPr id="6" name="TextBox 5"/>
+          <p:cNvSpPr txBox="1"/>
+          <p:nvPr/>
+        </p:nvSpPr>
+        <p:spPr>
+          <a:xfrm>
+            <a:off x="777240" y="411480"/>
+            <a:ext cx="10058400" cy="640080"/>
+          </a:xfrm>
+          <a:prstGeom prst="rect">
+            <a:avLst/>
+          </a:prstGeom>
+          <a:noFill/>
+        </p:spPr>
+        <p:txBody>
+          <a:bodyPr wrap="square" lIns="73152" rIns="73152" tIns="36576" bIns="36576" anchor="t">
+            <a:spAutoFit/>
+          </a:bodyPr>
+          <a:lstStyle/>
+          <a:p>
+            <a:pPr algn="l">
+              <a:lnSpc>
+                <a:spcPts val="3900"/>
+              </a:lnSpc>
+            </a:pPr>
+            <a:r>
+              <a:rPr sz="3000" b="1" i="0">
+                <a:solidFill>
+                  <a:srgbClr val="1B2A3D"/>
+                </a:solidFill>
+                <a:latin typeface="Calibri Light"/>
+              </a:rPr>
+              <a:t>Master Benchmark Matrix — All 8 Configurations</a:t>
+            </a:r>
+          </a:p>
+        </p:txBody>
+      </p:sp>
+      <p:cxnSp>
+        <p:nvCxnSpPr>
+          <p:cNvPr id="7" name="Connector 6"/>
+          <p:cNvCxnSpPr/>
+          <p:nvPr/>
+        </p:nvCxnSpPr>
+        <p:spPr>
+          <a:xfrm>
+            <a:off x="548640" y="1234440"/>
+            <a:ext cx="11094415" cy="0"/>
+          </a:xfrm>
+          <a:prstGeom prst="line">
+            <a:avLst/>
+          </a:prstGeom>
+          <a:ln w="12700">
+            <a:solidFill>
+              <a:srgbClr val="DEE3EA"/>
+            </a:solidFill>
+          </a:ln>
+        </p:spPr>
+        <p:style>
+          <a:lnRef idx="2">
+            <a:schemeClr val="accent1"/>
+          </a:lnRef>
+          <a:fillRef idx="0">
+            <a:schemeClr val="accent1"/>
+          </a:fillRef>
+          <a:effectRef idx="1">
+            <a:schemeClr val="accent1"/>
+          </a:effectRef>
+          <a:fontRef idx="minor">
+            <a:schemeClr val="tx1"/>
+          </a:fontRef>
+        </p:style>
+      </p:cxnSp>
+      <p:sp>
+        <p:nvSpPr>
+          <p:cNvPr id="8" name="TextBox 7"/>
+          <p:cNvSpPr txBox="1"/>
+          <p:nvPr/>
+        </p:nvSpPr>
+        <p:spPr>
+          <a:xfrm>
+            <a:off x="731520" y="1508760"/>
+            <a:ext cx="10515600" cy="4754880"/>
+          </a:xfrm>
+          <a:prstGeom prst="rect">
+            <a:avLst/>
+          </a:prstGeom>
+          <a:noFill/>
+        </p:spPr>
+        <p:txBody>
+          <a:bodyPr wrap="square" lIns="73152" rIns="73152">
+            <a:spAutoFit/>
+          </a:bodyPr>
+          <a:lstStyle/>
+          <a:p>
+            <a:pPr>
+              <a:lnSpc>
+                <a:spcPts val="2500"/>
+              </a:lnSpc>
+              <a:spcAft>
+                <a:spcPts val="1000"/>
+              </a:spcAft>
+            </a:pPr>
+            <a:r>
+              <a:rPr sz="800">
+                <a:solidFill>
+                  <a:srgbClr val="29B5E8"/>
+                </a:solidFill>
+                <a:latin typeface="Segoe UI"/>
+              </a:rPr>
+              <a:t>●  </a:t>
+            </a:r>
+            <a:r>
+              <a:rPr sz="1600">
+                <a:solidFill>
+                  <a:srgbClr val="2C3E50"/>
+                </a:solidFill>
+                <a:latin typeface="Segoe UI"/>
+              </a:rPr>
+              <a:t>1-part analysis 6 cols @ XL — 39 s, 0.17 credits, $0.67</a:t>
+            </a:r>
+          </a:p>
+          <a:p>
+            <a:pPr>
+              <a:lnSpc>
+                <a:spcPts val="2500"/>
+              </a:lnSpc>
+              <a:spcAft>
+                <a:spcPts val="1000"/>
+              </a:spcAft>
+            </a:pPr>
+            <a:r>
+              <a:rPr sz="800">
+                <a:solidFill>
+                  <a:srgbClr val="29B5E8"/>
+                </a:solidFill>
+                <a:latin typeface="Segoe UI"/>
+              </a:rPr>
+              <a:t>●  </a:t>
+            </a:r>
+            <a:r>
+              <a:rPr sz="1600">
+                <a:solidFill>
+                  <a:srgbClr val="2C3E50"/>
+                </a:solidFill>
+                <a:latin typeface="Segoe UI"/>
+              </a:rPr>
+              <a:t>8-part analysis 6 cols @ XL — 57 s, 0.25 credits, $0.99</a:t>
+            </a:r>
+          </a:p>
+          <a:p>
+            <a:pPr>
+              <a:lnSpc>
+                <a:spcPts val="2500"/>
+              </a:lnSpc>
+              <a:spcAft>
+                <a:spcPts val="1000"/>
+              </a:spcAft>
+            </a:pPr>
+            <a:r>
+              <a:rPr sz="800">
+                <a:solidFill>
+                  <a:srgbClr val="29B5E8"/>
+                </a:solidFill>
+                <a:latin typeface="Segoe UI"/>
+              </a:rPr>
+              <a:t>●  </a:t>
+            </a:r>
+            <a:r>
+              <a:rPr sz="1600">
+                <a:solidFill>
+                  <a:srgbClr val="2C3E50"/>
+                </a:solidFill>
+                <a:latin typeface="Segoe UI"/>
+              </a:rPr>
+              <a:t>1-part activation 6 cols @ XL — 79 s, 0.35 credits, $1.37</a:t>
+            </a:r>
+          </a:p>
+          <a:p>
+            <a:pPr>
+              <a:lnSpc>
+                <a:spcPts val="2500"/>
+              </a:lnSpc>
+              <a:spcAft>
+                <a:spcPts val="1000"/>
+              </a:spcAft>
+            </a:pPr>
+            <a:r>
+              <a:rPr sz="800">
+                <a:solidFill>
+                  <a:srgbClr val="29B5E8"/>
+                </a:solidFill>
+                <a:latin typeface="Segoe UI"/>
+              </a:rPr>
+              <a:t>●  </a:t>
+            </a:r>
+            <a:r>
+              <a:rPr sz="1600">
+                <a:solidFill>
+                  <a:srgbClr val="2C3E50"/>
+                </a:solidFill>
+                <a:latin typeface="Segoe UI"/>
+              </a:rPr>
+              <a:t>8-part activation 6 cols @ XL — 79 s, 0.35 credits, $1.37</a:t>
+            </a:r>
+          </a:p>
+          <a:p>
+            <a:pPr>
+              <a:lnSpc>
+                <a:spcPts val="2500"/>
+              </a:lnSpc>
+              <a:spcAft>
+                <a:spcPts val="1000"/>
+              </a:spcAft>
+            </a:pPr>
+            <a:r>
+              <a:rPr sz="800">
+                <a:solidFill>
+                  <a:srgbClr val="29B5E8"/>
+                </a:solidFill>
+                <a:latin typeface="Segoe UI"/>
+              </a:rPr>
+              <a:t>●  </a:t>
+            </a:r>
+            <a:r>
+              <a:rPr sz="1600">
+                <a:solidFill>
+                  <a:srgbClr val="2C3E50"/>
+                </a:solidFill>
+                <a:latin typeface="Segoe UI"/>
+              </a:rPr>
+              <a:t>1-part activation 1007 cols @ XL — 71 min, 19.04 credits, $74.3</a:t>
+            </a:r>
+          </a:p>
+          <a:p>
+            <a:pPr>
+              <a:lnSpc>
+                <a:spcPts val="2500"/>
+              </a:lnSpc>
+              <a:spcAft>
+                <a:spcPts val="1000"/>
+              </a:spcAft>
+            </a:pPr>
+            <a:r>
+              <a:rPr sz="800">
+                <a:solidFill>
+                  <a:srgbClr val="29B5E8"/>
+                </a:solidFill>
+                <a:latin typeface="Segoe UI"/>
+              </a:rPr>
+              <a:t>●  </a:t>
+            </a:r>
+            <a:r>
+              <a:rPr sz="1600">
+                <a:solidFill>
+                  <a:srgbClr val="2C3E50"/>
+                </a:solidFill>
+                <a:latin typeface="Segoe UI"/>
+              </a:rPr>
+              <a:t>8-part activation 1007 cols @ XL — 83 min, 22.2 credits, $86.6</a:t>
+            </a:r>
+          </a:p>
+          <a:p>
+            <a:pPr>
+              <a:lnSpc>
+                <a:spcPts val="2500"/>
+              </a:lnSpc>
+              <a:spcAft>
+                <a:spcPts val="1000"/>
+              </a:spcAft>
+            </a:pPr>
+            <a:r>
+              <a:rPr sz="800">
+                <a:solidFill>
+                  <a:srgbClr val="29B5E8"/>
+                </a:solidFill>
+                <a:latin typeface="Segoe UI"/>
+              </a:rPr>
+              <a:t>●  </a:t>
+            </a:r>
+            <a:r>
+              <a:rPr sz="1600">
+                <a:solidFill>
+                  <a:srgbClr val="2C3E50"/>
+                </a:solidFill>
+                <a:latin typeface="Segoe UI"/>
+              </a:rPr>
+              <a:t>8-part activation 1007 cols @ 2XL — 45 min, 23.8 credits, $93.0</a:t>
+            </a:r>
+          </a:p>
+          <a:p>
+            <a:pPr>
+              <a:lnSpc>
+                <a:spcPts val="2500"/>
+              </a:lnSpc>
+              <a:spcAft>
+                <a:spcPts val="1000"/>
+              </a:spcAft>
+            </a:pPr>
+            <a:r>
+              <a:rPr sz="800">
+                <a:solidFill>
+                  <a:srgbClr val="29B5E8"/>
+                </a:solidFill>
+                <a:latin typeface="Segoe UI"/>
+              </a:rPr>
+              <a:t>●  </a:t>
+            </a:r>
+            <a:r>
+              <a:rPr sz="1600">
+                <a:solidFill>
+                  <a:srgbClr val="2C3E50"/>
+                </a:solidFill>
+                <a:latin typeface="Segoe UI"/>
+              </a:rPr>
+              <a:t>1-part activation 1007 cols @ 2XL — 38 min, 20.35 credits, $79.4 ← NEW</a:t>
+            </a:r>
+          </a:p>
+        </p:txBody>
+      </p:sp>
+      <p:sp>
+        <p:nvSpPr>
+          <p:cNvPr id="9" name="TextBox 8"/>
+          <p:cNvSpPr txBox="1"/>
+          <p:nvPr/>
+        </p:nvSpPr>
+        <p:spPr>
+          <a:xfrm>
+            <a:off x="548640" y="6446520"/>
+            <a:ext cx="9144000" cy="274320"/>
+          </a:xfrm>
+          <a:prstGeom prst="rect">
+            <a:avLst/>
+          </a:prstGeom>
+          <a:noFill/>
+        </p:spPr>
+        <p:txBody>
+          <a:bodyPr wrap="square" lIns="73152" rIns="73152" tIns="36576" bIns="36576" anchor="t">
+            <a:spAutoFit/>
+          </a:bodyPr>
+          <a:lstStyle/>
+          <a:p>
+            <a:pPr algn="l">
+              <a:lnSpc>
+                <a:spcPts val="1100"/>
+              </a:lnSpc>
+            </a:pPr>
+            <a:r>
+              <a:rPr sz="900" b="0" i="0">
+                <a:solidFill>
+                  <a:srgbClr val="95A5A6"/>
+                </a:solidFill>
+                <a:latin typeface="Segoe UI"/>
+              </a:rPr>
+              <a:t>DCR Collaboration API v2 | SFSEAPAC | 2026   ·   55 / 61</a:t>
+            </a:r>
+          </a:p>
+        </p:txBody>
+      </p:sp>
+    </p:spTree>
+  </p:cSld>
+  <p:clrMapOvr>
+    <a:masterClrMapping/>
+  </p:clrMapOvr>
+</p:sld>
+</file>
+
+<file path=ppt/slides/slide56.xml><?xml version="1.0" encoding="utf-8"?>
 <p:sld xmlns:a="http://schemas.openxmlformats.org/drawingml/2006/main" xmlns:p="http://schemas.openxmlformats.org/presentationml/2006/main" xmlns:r="http://schemas.openxmlformats.org/officeDocument/2006/relationships">
   <p:cSld>
     <p:bg>
@@ -44569,1118 +45616,6 @@
                 <a:latin typeface="Calibri Light"/>
               </a:rPr>
               <a:t>SUMMARY</a:t>
-            </a:r>
-          </a:p>
-        </p:txBody>
-      </p:sp>
-    </p:spTree>
-  </p:cSld>
-  <p:clrMapOvr>
-    <a:masterClrMapping/>
-  </p:clrMapOvr>
-</p:sld>
-</file>
-
-<file path=ppt/slides/slide56.xml><?xml version="1.0" encoding="utf-8"?>
-<p:sld xmlns:a="http://schemas.openxmlformats.org/drawingml/2006/main" xmlns:p="http://schemas.openxmlformats.org/presentationml/2006/main" xmlns:r="http://schemas.openxmlformats.org/officeDocument/2006/relationships">
-  <p:cSld>
-    <p:bg>
-      <p:bgPr>
-        <a:solidFill>
-          <a:srgbClr val="FFFFFF"/>
-        </a:solidFill>
-        <a:effectLst/>
-      </p:bgPr>
-    </p:bg>
-    <p:spTree>
-      <p:nvGrpSpPr>
-        <p:cNvPr id="1" name=""/>
-        <p:cNvGrpSpPr/>
-        <p:nvPr/>
-      </p:nvGrpSpPr>
-      <p:grpSpPr/>
-      <p:sp>
-        <p:nvSpPr>
-          <p:cNvPr id="2" name="Oval 1"/>
-          <p:cNvSpPr/>
-          <p:nvPr/>
-        </p:nvSpPr>
-        <p:spPr>
-          <a:xfrm>
-            <a:off x="9631375" y="-914400"/>
-            <a:ext cx="3200400" cy="3200400"/>
-          </a:xfrm>
-          <a:prstGeom prst="ellipse">
-            <a:avLst/>
-          </a:prstGeom>
-          <a:solidFill>
-            <a:srgbClr val="D6EFF8"/>
-          </a:solidFill>
-          <a:ln>
-            <a:noFill/>
-          </a:ln>
-        </p:spPr>
-        <p:style>
-          <a:lnRef idx="1">
-            <a:schemeClr val="accent1"/>
-          </a:lnRef>
-          <a:fillRef idx="3">
-            <a:schemeClr val="accent1"/>
-          </a:fillRef>
-          <a:effectRef idx="2">
-            <a:schemeClr val="accent1"/>
-          </a:effectRef>
-          <a:fontRef idx="minor">
-            <a:schemeClr val="lt1"/>
-          </a:fontRef>
-        </p:style>
-        <p:txBody>
-          <a:bodyPr rtlCol="0" anchor="ctr"/>
-          <a:lstStyle/>
-          <a:p>
-            <a:pPr algn="ctr"/>
-          </a:p>
-        </p:txBody>
-      </p:sp>
-      <p:sp>
-        <p:nvSpPr>
-          <p:cNvPr id="3" name="Oval 2"/>
-          <p:cNvSpPr/>
-          <p:nvPr/>
-        </p:nvSpPr>
-        <p:spPr>
-          <a:xfrm>
-            <a:off x="-640080" y="5029200"/>
-            <a:ext cx="1828800" cy="1828800"/>
-          </a:xfrm>
-          <a:prstGeom prst="ellipse">
-            <a:avLst/>
-          </a:prstGeom>
-          <a:solidFill>
-            <a:srgbClr val="E8F4FD"/>
-          </a:solidFill>
-          <a:ln>
-            <a:noFill/>
-          </a:ln>
-        </p:spPr>
-        <p:style>
-          <a:lnRef idx="1">
-            <a:schemeClr val="accent1"/>
-          </a:lnRef>
-          <a:fillRef idx="3">
-            <a:schemeClr val="accent1"/>
-          </a:fillRef>
-          <a:effectRef idx="2">
-            <a:schemeClr val="accent1"/>
-          </a:effectRef>
-          <a:fontRef idx="minor">
-            <a:schemeClr val="lt1"/>
-          </a:fontRef>
-        </p:style>
-        <p:txBody>
-          <a:bodyPr rtlCol="0" anchor="ctr"/>
-          <a:lstStyle/>
-          <a:p>
-            <a:pPr algn="ctr"/>
-          </a:p>
-        </p:txBody>
-      </p:sp>
-      <p:pic>
-        <p:nvPicPr>
-          <p:cNvPr id="4" name="Picture 3" descr="snowflake_icon_blue.png"/>
-          <p:cNvPicPr>
-            <a:picLocks noChangeAspect="1"/>
-          </p:cNvPicPr>
-          <p:nvPr/>
-        </p:nvPicPr>
-        <p:blipFill>
-          <a:blip r:embed="rId2"/>
-          <a:stretch>
-            <a:fillRect/>
-          </a:stretch>
-        </p:blipFill>
-        <p:spPr>
-          <a:xfrm>
-            <a:off x="11414455" y="320040"/>
-            <a:ext cx="349389" cy="320040"/>
-          </a:xfrm>
-          <a:prstGeom prst="rect">
-            <a:avLst/>
-          </a:prstGeom>
-        </p:spPr>
-      </p:pic>
-      <p:sp>
-        <p:nvSpPr>
-          <p:cNvPr id="5" name="Rectangle 4"/>
-          <p:cNvSpPr/>
-          <p:nvPr/>
-        </p:nvSpPr>
-        <p:spPr>
-          <a:xfrm>
-            <a:off x="548640" y="457200"/>
-            <a:ext cx="54864" cy="502920"/>
-          </a:xfrm>
-          <a:prstGeom prst="rect">
-            <a:avLst/>
-          </a:prstGeom>
-          <a:solidFill>
-            <a:srgbClr val="29B5E8"/>
-          </a:solidFill>
-          <a:ln>
-            <a:noFill/>
-          </a:ln>
-        </p:spPr>
-        <p:style>
-          <a:lnRef idx="1">
-            <a:schemeClr val="accent1"/>
-          </a:lnRef>
-          <a:fillRef idx="3">
-            <a:schemeClr val="accent1"/>
-          </a:fillRef>
-          <a:effectRef idx="2">
-            <a:schemeClr val="accent1"/>
-          </a:effectRef>
-          <a:fontRef idx="minor">
-            <a:schemeClr val="lt1"/>
-          </a:fontRef>
-        </p:style>
-        <p:txBody>
-          <a:bodyPr rtlCol="0" anchor="ctr"/>
-          <a:lstStyle/>
-          <a:p>
-            <a:pPr algn="ctr"/>
-          </a:p>
-        </p:txBody>
-      </p:sp>
-      <p:sp>
-        <p:nvSpPr>
-          <p:cNvPr id="6" name="TextBox 5"/>
-          <p:cNvSpPr txBox="1"/>
-          <p:nvPr/>
-        </p:nvSpPr>
-        <p:spPr>
-          <a:xfrm>
-            <a:off x="777240" y="411480"/>
-            <a:ext cx="10058400" cy="640080"/>
-          </a:xfrm>
-          <a:prstGeom prst="rect">
-            <a:avLst/>
-          </a:prstGeom>
-          <a:noFill/>
-        </p:spPr>
-        <p:txBody>
-          <a:bodyPr wrap="square" lIns="73152" rIns="73152" tIns="36576" bIns="36576" anchor="t">
-            <a:spAutoFit/>
-          </a:bodyPr>
-          <a:lstStyle/>
-          <a:p>
-            <a:pPr algn="l">
-              <a:lnSpc>
-                <a:spcPts val="3900"/>
-              </a:lnSpc>
-            </a:pPr>
-            <a:r>
-              <a:rPr sz="3000" b="1" i="0">
-                <a:solidFill>
-                  <a:srgbClr val="1B2A3D"/>
-                </a:solidFill>
-                <a:latin typeface="Calibri Light"/>
-              </a:rPr>
-              <a:t>Production-Ready Performance</a:t>
-            </a:r>
-          </a:p>
-        </p:txBody>
-      </p:sp>
-      <p:cxnSp>
-        <p:nvCxnSpPr>
-          <p:cNvPr id="7" name="Connector 6"/>
-          <p:cNvCxnSpPr/>
-          <p:nvPr/>
-        </p:nvCxnSpPr>
-        <p:spPr>
-          <a:xfrm>
-            <a:off x="548640" y="1234440"/>
-            <a:ext cx="11094415" cy="0"/>
-          </a:xfrm>
-          <a:prstGeom prst="line">
-            <a:avLst/>
-          </a:prstGeom>
-          <a:ln w="12700">
-            <a:solidFill>
-              <a:srgbClr val="DEE3EA"/>
-            </a:solidFill>
-          </a:ln>
-        </p:spPr>
-        <p:style>
-          <a:lnRef idx="2">
-            <a:schemeClr val="accent1"/>
-          </a:lnRef>
-          <a:fillRef idx="0">
-            <a:schemeClr val="accent1"/>
-          </a:fillRef>
-          <a:effectRef idx="1">
-            <a:schemeClr val="accent1"/>
-          </a:effectRef>
-          <a:fontRef idx="minor">
-            <a:schemeClr val="tx1"/>
-          </a:fontRef>
-        </p:style>
-      </p:cxnSp>
-      <p:sp>
-        <p:nvSpPr>
-          <p:cNvPr id="8" name="Rounded Rectangle 7"/>
-          <p:cNvSpPr/>
-          <p:nvPr/>
-        </p:nvSpPr>
-        <p:spPr>
-          <a:xfrm>
-            <a:off x="640080" y="1554480"/>
-            <a:ext cx="10911535" cy="804672"/>
-          </a:xfrm>
-          <a:prstGeom prst="roundRect">
-            <a:avLst/>
-          </a:prstGeom>
-          <a:solidFill>
-            <a:srgbClr val="EEF5FA"/>
-          </a:solidFill>
-          <a:ln>
-            <a:noFill/>
-          </a:ln>
-        </p:spPr>
-        <p:style>
-          <a:lnRef idx="1">
-            <a:schemeClr val="accent1"/>
-          </a:lnRef>
-          <a:fillRef idx="3">
-            <a:schemeClr val="accent1"/>
-          </a:fillRef>
-          <a:effectRef idx="2">
-            <a:schemeClr val="accent1"/>
-          </a:effectRef>
-          <a:fontRef idx="minor">
-            <a:schemeClr val="lt1"/>
-          </a:fontRef>
-        </p:style>
-        <p:txBody>
-          <a:bodyPr rtlCol="0" anchor="ctr"/>
-          <a:lstStyle/>
-          <a:p>
-            <a:pPr algn="ctr"/>
-          </a:p>
-        </p:txBody>
-      </p:sp>
-      <p:sp>
-        <p:nvSpPr>
-          <p:cNvPr id="9" name="Oval 8"/>
-          <p:cNvSpPr/>
-          <p:nvPr/>
-        </p:nvSpPr>
-        <p:spPr>
-          <a:xfrm>
-            <a:off x="914400" y="1691640"/>
-            <a:ext cx="411480" cy="411480"/>
-          </a:xfrm>
-          <a:prstGeom prst="ellipse">
-            <a:avLst/>
-          </a:prstGeom>
-          <a:solidFill>
-            <a:srgbClr val="29B5E8"/>
-          </a:solidFill>
-          <a:ln>
-            <a:noFill/>
-          </a:ln>
-        </p:spPr>
-        <p:style>
-          <a:lnRef idx="1">
-            <a:schemeClr val="accent1"/>
-          </a:lnRef>
-          <a:fillRef idx="3">
-            <a:schemeClr val="accent1"/>
-          </a:fillRef>
-          <a:effectRef idx="2">
-            <a:schemeClr val="accent1"/>
-          </a:effectRef>
-          <a:fontRef idx="minor">
-            <a:schemeClr val="lt1"/>
-          </a:fontRef>
-        </p:style>
-        <p:txBody>
-          <a:bodyPr rtlCol="0" anchor="ctr"/>
-          <a:lstStyle/>
-          <a:p>
-            <a:pPr algn="ctr"/>
-          </a:p>
-        </p:txBody>
-      </p:sp>
-      <p:sp>
-        <p:nvSpPr>
-          <p:cNvPr id="10" name="TextBox 9"/>
-          <p:cNvSpPr txBox="1"/>
-          <p:nvPr/>
-        </p:nvSpPr>
-        <p:spPr>
-          <a:xfrm>
-            <a:off x="914400" y="1691640"/>
-            <a:ext cx="411480" cy="411480"/>
-          </a:xfrm>
-          <a:prstGeom prst="rect">
-            <a:avLst/>
-          </a:prstGeom>
-          <a:noFill/>
-        </p:spPr>
-        <p:txBody>
-          <a:bodyPr wrap="square" lIns="73152" rIns="73152" tIns="36576" bIns="36576" anchor="ctr">
-            <a:spAutoFit/>
-          </a:bodyPr>
-          <a:lstStyle/>
-          <a:p>
-            <a:pPr algn="ctr">
-              <a:lnSpc>
-                <a:spcPts val="1600"/>
-              </a:lnSpc>
-            </a:pPr>
-            <a:r>
-              <a:rPr sz="1300" b="1" i="0">
-                <a:solidFill>
-                  <a:srgbClr val="FFFFFF"/>
-                </a:solidFill>
-                <a:latin typeface="Segoe UI"/>
-              </a:rPr>
-              <a:t>01</a:t>
-            </a:r>
-          </a:p>
-        </p:txBody>
-      </p:sp>
-      <p:sp>
-        <p:nvSpPr>
-          <p:cNvPr id="11" name="TextBox 10"/>
-          <p:cNvSpPr txBox="1"/>
-          <p:nvPr/>
-        </p:nvSpPr>
-        <p:spPr>
-          <a:xfrm>
-            <a:off x="1554480" y="1627632"/>
-            <a:ext cx="9601200" cy="768096"/>
-          </a:xfrm>
-          <a:prstGeom prst="rect">
-            <a:avLst/>
-          </a:prstGeom>
-          <a:noFill/>
-        </p:spPr>
-        <p:txBody>
-          <a:bodyPr wrap="square" lIns="73152" rIns="73152" tIns="36576" bIns="36576" anchor="ctr">
-            <a:spAutoFit/>
-          </a:bodyPr>
-          <a:lstStyle/>
-          <a:p>
-            <a:pPr algn="l">
-              <a:lnSpc>
-                <a:spcPts val="2000"/>
-              </a:lnSpc>
-            </a:pPr>
-            <a:r>
-              <a:rPr sz="1600" b="0" i="0">
-                <a:solidFill>
-                  <a:srgbClr val="2C3E50"/>
-                </a:solidFill>
-                <a:latin typeface="Segoe UI"/>
-              </a:rPr>
-              <a:t>Proven at scale — 1.2B rows × 1001 kolom full-scan dalam 2 menit 16 detik via single-query</a:t>
-            </a:r>
-          </a:p>
-        </p:txBody>
-      </p:sp>
-      <p:sp>
-        <p:nvSpPr>
-          <p:cNvPr id="12" name="Rounded Rectangle 11"/>
-          <p:cNvSpPr/>
-          <p:nvPr/>
-        </p:nvSpPr>
-        <p:spPr>
-          <a:xfrm>
-            <a:off x="640080" y="2468880"/>
-            <a:ext cx="10911535" cy="804672"/>
-          </a:xfrm>
-          <a:prstGeom prst="roundRect">
-            <a:avLst/>
-          </a:prstGeom>
-          <a:solidFill>
-            <a:srgbClr val="F4F8FB"/>
-          </a:solidFill>
-          <a:ln>
-            <a:noFill/>
-          </a:ln>
-        </p:spPr>
-        <p:style>
-          <a:lnRef idx="1">
-            <a:schemeClr val="accent1"/>
-          </a:lnRef>
-          <a:fillRef idx="3">
-            <a:schemeClr val="accent1"/>
-          </a:fillRef>
-          <a:effectRef idx="2">
-            <a:schemeClr val="accent1"/>
-          </a:effectRef>
-          <a:fontRef idx="minor">
-            <a:schemeClr val="lt1"/>
-          </a:fontRef>
-        </p:style>
-        <p:txBody>
-          <a:bodyPr rtlCol="0" anchor="ctr"/>
-          <a:lstStyle/>
-          <a:p>
-            <a:pPr algn="ctr"/>
-          </a:p>
-        </p:txBody>
-      </p:sp>
-      <p:sp>
-        <p:nvSpPr>
-          <p:cNvPr id="13" name="Oval 12"/>
-          <p:cNvSpPr/>
-          <p:nvPr/>
-        </p:nvSpPr>
-        <p:spPr>
-          <a:xfrm>
-            <a:off x="914400" y="2606040"/>
-            <a:ext cx="411480" cy="411480"/>
-          </a:xfrm>
-          <a:prstGeom prst="ellipse">
-            <a:avLst/>
-          </a:prstGeom>
-          <a:solidFill>
-            <a:srgbClr val="11567F"/>
-          </a:solidFill>
-          <a:ln>
-            <a:noFill/>
-          </a:ln>
-        </p:spPr>
-        <p:style>
-          <a:lnRef idx="1">
-            <a:schemeClr val="accent1"/>
-          </a:lnRef>
-          <a:fillRef idx="3">
-            <a:schemeClr val="accent1"/>
-          </a:fillRef>
-          <a:effectRef idx="2">
-            <a:schemeClr val="accent1"/>
-          </a:effectRef>
-          <a:fontRef idx="minor">
-            <a:schemeClr val="lt1"/>
-          </a:fontRef>
-        </p:style>
-        <p:txBody>
-          <a:bodyPr rtlCol="0" anchor="ctr"/>
-          <a:lstStyle/>
-          <a:p>
-            <a:pPr algn="ctr"/>
-          </a:p>
-        </p:txBody>
-      </p:sp>
-      <p:sp>
-        <p:nvSpPr>
-          <p:cNvPr id="14" name="TextBox 13"/>
-          <p:cNvSpPr txBox="1"/>
-          <p:nvPr/>
-        </p:nvSpPr>
-        <p:spPr>
-          <a:xfrm>
-            <a:off x="914400" y="2606040"/>
-            <a:ext cx="411480" cy="411480"/>
-          </a:xfrm>
-          <a:prstGeom prst="rect">
-            <a:avLst/>
-          </a:prstGeom>
-          <a:noFill/>
-        </p:spPr>
-        <p:txBody>
-          <a:bodyPr wrap="square" lIns="73152" rIns="73152" tIns="36576" bIns="36576" anchor="ctr">
-            <a:spAutoFit/>
-          </a:bodyPr>
-          <a:lstStyle/>
-          <a:p>
-            <a:pPr algn="ctr">
-              <a:lnSpc>
-                <a:spcPts val="1600"/>
-              </a:lnSpc>
-            </a:pPr>
-            <a:r>
-              <a:rPr sz="1300" b="1" i="0">
-                <a:solidFill>
-                  <a:srgbClr val="FFFFFF"/>
-                </a:solidFill>
-                <a:latin typeface="Segoe UI"/>
-              </a:rPr>
-              <a:t>02</a:t>
-            </a:r>
-          </a:p>
-        </p:txBody>
-      </p:sp>
-      <p:sp>
-        <p:nvSpPr>
-          <p:cNvPr id="15" name="TextBox 14"/>
-          <p:cNvSpPr txBox="1"/>
-          <p:nvPr/>
-        </p:nvSpPr>
-        <p:spPr>
-          <a:xfrm>
-            <a:off x="1554480" y="2542032"/>
-            <a:ext cx="9601200" cy="768096"/>
-          </a:xfrm>
-          <a:prstGeom prst="rect">
-            <a:avLst/>
-          </a:prstGeom>
-          <a:noFill/>
-        </p:spPr>
-        <p:txBody>
-          <a:bodyPr wrap="square" lIns="73152" rIns="73152" tIns="36576" bIns="36576" anchor="ctr">
-            <a:spAutoFit/>
-          </a:bodyPr>
-          <a:lstStyle/>
-          <a:p>
-            <a:pPr algn="l">
-              <a:lnSpc>
-                <a:spcPts val="2000"/>
-              </a:lnSpc>
-            </a:pPr>
-            <a:r>
-              <a:rPr sz="1600" b="0" i="0">
-                <a:solidFill>
-                  <a:srgbClr val="2C3E50"/>
-                </a:solidFill>
-                <a:latin typeface="Segoe UI"/>
-              </a:rPr>
-              <a:t>5× faster than per-partition loop — 1 RUN call menggantikan 8 sequential calls</a:t>
-            </a:r>
-          </a:p>
-        </p:txBody>
-      </p:sp>
-      <p:sp>
-        <p:nvSpPr>
-          <p:cNvPr id="16" name="Rounded Rectangle 15"/>
-          <p:cNvSpPr/>
-          <p:nvPr/>
-        </p:nvSpPr>
-        <p:spPr>
-          <a:xfrm>
-            <a:off x="640080" y="3383280"/>
-            <a:ext cx="10911535" cy="804672"/>
-          </a:xfrm>
-          <a:prstGeom prst="roundRect">
-            <a:avLst/>
-          </a:prstGeom>
-          <a:solidFill>
-            <a:srgbClr val="EEF5FA"/>
-          </a:solidFill>
-          <a:ln>
-            <a:noFill/>
-          </a:ln>
-        </p:spPr>
-        <p:style>
-          <a:lnRef idx="1">
-            <a:schemeClr val="accent1"/>
-          </a:lnRef>
-          <a:fillRef idx="3">
-            <a:schemeClr val="accent1"/>
-          </a:fillRef>
-          <a:effectRef idx="2">
-            <a:schemeClr val="accent1"/>
-          </a:effectRef>
-          <a:fontRef idx="minor">
-            <a:schemeClr val="lt1"/>
-          </a:fontRef>
-        </p:style>
-        <p:txBody>
-          <a:bodyPr rtlCol="0" anchor="ctr"/>
-          <a:lstStyle/>
-          <a:p>
-            <a:pPr algn="ctr"/>
-          </a:p>
-        </p:txBody>
-      </p:sp>
-      <p:sp>
-        <p:nvSpPr>
-          <p:cNvPr id="17" name="Oval 16"/>
-          <p:cNvSpPr/>
-          <p:nvPr/>
-        </p:nvSpPr>
-        <p:spPr>
-          <a:xfrm>
-            <a:off x="914400" y="3520440"/>
-            <a:ext cx="411480" cy="411480"/>
-          </a:xfrm>
-          <a:prstGeom prst="ellipse">
-            <a:avLst/>
-          </a:prstGeom>
-          <a:solidFill>
-            <a:srgbClr val="71D3DC"/>
-          </a:solidFill>
-          <a:ln>
-            <a:noFill/>
-          </a:ln>
-        </p:spPr>
-        <p:style>
-          <a:lnRef idx="1">
-            <a:schemeClr val="accent1"/>
-          </a:lnRef>
-          <a:fillRef idx="3">
-            <a:schemeClr val="accent1"/>
-          </a:fillRef>
-          <a:effectRef idx="2">
-            <a:schemeClr val="accent1"/>
-          </a:effectRef>
-          <a:fontRef idx="minor">
-            <a:schemeClr val="lt1"/>
-          </a:fontRef>
-        </p:style>
-        <p:txBody>
-          <a:bodyPr rtlCol="0" anchor="ctr"/>
-          <a:lstStyle/>
-          <a:p>
-            <a:pPr algn="ctr"/>
-          </a:p>
-        </p:txBody>
-      </p:sp>
-      <p:sp>
-        <p:nvSpPr>
-          <p:cNvPr id="18" name="TextBox 17"/>
-          <p:cNvSpPr txBox="1"/>
-          <p:nvPr/>
-        </p:nvSpPr>
-        <p:spPr>
-          <a:xfrm>
-            <a:off x="914400" y="3520440"/>
-            <a:ext cx="411480" cy="411480"/>
-          </a:xfrm>
-          <a:prstGeom prst="rect">
-            <a:avLst/>
-          </a:prstGeom>
-          <a:noFill/>
-        </p:spPr>
-        <p:txBody>
-          <a:bodyPr wrap="square" lIns="73152" rIns="73152" tIns="36576" bIns="36576" anchor="ctr">
-            <a:spAutoFit/>
-          </a:bodyPr>
-          <a:lstStyle/>
-          <a:p>
-            <a:pPr algn="ctr">
-              <a:lnSpc>
-                <a:spcPts val="1600"/>
-              </a:lnSpc>
-            </a:pPr>
-            <a:r>
-              <a:rPr sz="1300" b="1" i="0">
-                <a:solidFill>
-                  <a:srgbClr val="FFFFFF"/>
-                </a:solidFill>
-                <a:latin typeface="Segoe UI"/>
-              </a:rPr>
-              <a:t>03</a:t>
-            </a:r>
-          </a:p>
-        </p:txBody>
-      </p:sp>
-      <p:sp>
-        <p:nvSpPr>
-          <p:cNvPr id="19" name="TextBox 18"/>
-          <p:cNvSpPr txBox="1"/>
-          <p:nvPr/>
-        </p:nvSpPr>
-        <p:spPr>
-          <a:xfrm>
-            <a:off x="1554480" y="3456432"/>
-            <a:ext cx="9601200" cy="768096"/>
-          </a:xfrm>
-          <a:prstGeom prst="rect">
-            <a:avLst/>
-          </a:prstGeom>
-          <a:noFill/>
-        </p:spPr>
-        <p:txBody>
-          <a:bodyPr wrap="square" lIns="73152" rIns="73152" tIns="36576" bIns="36576" anchor="ctr">
-            <a:spAutoFit/>
-          </a:bodyPr>
-          <a:lstStyle/>
-          <a:p>
-            <a:pPr algn="l">
-              <a:lnSpc>
-                <a:spcPts val="2000"/>
-              </a:lnSpc>
-            </a:pPr>
-            <a:r>
-              <a:rPr sz="1600" b="0" i="0">
-                <a:solidFill>
-                  <a:srgbClr val="2C3E50"/>
-                </a:solidFill>
-                <a:latin typeface="Segoe UI"/>
-              </a:rPr>
-              <a:t>80% compute cost savings — 0.61 credits vs 3.02 credits per run @ GEN2_XLARGE</a:t>
-            </a:r>
-          </a:p>
-        </p:txBody>
-      </p:sp>
-      <p:sp>
-        <p:nvSpPr>
-          <p:cNvPr id="20" name="Rounded Rectangle 19"/>
-          <p:cNvSpPr/>
-          <p:nvPr/>
-        </p:nvSpPr>
-        <p:spPr>
-          <a:xfrm>
-            <a:off x="640080" y="4297680"/>
-            <a:ext cx="10911535" cy="804672"/>
-          </a:xfrm>
-          <a:prstGeom prst="roundRect">
-            <a:avLst/>
-          </a:prstGeom>
-          <a:solidFill>
-            <a:srgbClr val="F4F8FB"/>
-          </a:solidFill>
-          <a:ln>
-            <a:noFill/>
-          </a:ln>
-        </p:spPr>
-        <p:style>
-          <a:lnRef idx="1">
-            <a:schemeClr val="accent1"/>
-          </a:lnRef>
-          <a:fillRef idx="3">
-            <a:schemeClr val="accent1"/>
-          </a:fillRef>
-          <a:effectRef idx="2">
-            <a:schemeClr val="accent1"/>
-          </a:effectRef>
-          <a:fontRef idx="minor">
-            <a:schemeClr val="lt1"/>
-          </a:fontRef>
-        </p:style>
-        <p:txBody>
-          <a:bodyPr rtlCol="0" anchor="ctr"/>
-          <a:lstStyle/>
-          <a:p>
-            <a:pPr algn="ctr"/>
-          </a:p>
-        </p:txBody>
-      </p:sp>
-      <p:sp>
-        <p:nvSpPr>
-          <p:cNvPr id="21" name="Oval 20"/>
-          <p:cNvSpPr/>
-          <p:nvPr/>
-        </p:nvSpPr>
-        <p:spPr>
-          <a:xfrm>
-            <a:off x="914400" y="4434840"/>
-            <a:ext cx="411480" cy="411480"/>
-          </a:xfrm>
-          <a:prstGeom prst="ellipse">
-            <a:avLst/>
-          </a:prstGeom>
-          <a:solidFill>
-            <a:srgbClr val="FF9F36"/>
-          </a:solidFill>
-          <a:ln>
-            <a:noFill/>
-          </a:ln>
-        </p:spPr>
-        <p:style>
-          <a:lnRef idx="1">
-            <a:schemeClr val="accent1"/>
-          </a:lnRef>
-          <a:fillRef idx="3">
-            <a:schemeClr val="accent1"/>
-          </a:fillRef>
-          <a:effectRef idx="2">
-            <a:schemeClr val="accent1"/>
-          </a:effectRef>
-          <a:fontRef idx="minor">
-            <a:schemeClr val="lt1"/>
-          </a:fontRef>
-        </p:style>
-        <p:txBody>
-          <a:bodyPr rtlCol="0" anchor="ctr"/>
-          <a:lstStyle/>
-          <a:p>
-            <a:pPr algn="ctr"/>
-          </a:p>
-        </p:txBody>
-      </p:sp>
-      <p:sp>
-        <p:nvSpPr>
-          <p:cNvPr id="22" name="TextBox 21"/>
-          <p:cNvSpPr txBox="1"/>
-          <p:nvPr/>
-        </p:nvSpPr>
-        <p:spPr>
-          <a:xfrm>
-            <a:off x="914400" y="4434840"/>
-            <a:ext cx="411480" cy="411480"/>
-          </a:xfrm>
-          <a:prstGeom prst="rect">
-            <a:avLst/>
-          </a:prstGeom>
-          <a:noFill/>
-        </p:spPr>
-        <p:txBody>
-          <a:bodyPr wrap="square" lIns="73152" rIns="73152" tIns="36576" bIns="36576" anchor="ctr">
-            <a:spAutoFit/>
-          </a:bodyPr>
-          <a:lstStyle/>
-          <a:p>
-            <a:pPr algn="ctr">
-              <a:lnSpc>
-                <a:spcPts val="1600"/>
-              </a:lnSpc>
-            </a:pPr>
-            <a:r>
-              <a:rPr sz="1300" b="1" i="0">
-                <a:solidFill>
-                  <a:srgbClr val="FFFFFF"/>
-                </a:solidFill>
-                <a:latin typeface="Segoe UI"/>
-              </a:rPr>
-              <a:t>04</a:t>
-            </a:r>
-          </a:p>
-        </p:txBody>
-      </p:sp>
-      <p:sp>
-        <p:nvSpPr>
-          <p:cNvPr id="23" name="TextBox 22"/>
-          <p:cNvSpPr txBox="1"/>
-          <p:nvPr/>
-        </p:nvSpPr>
-        <p:spPr>
-          <a:xfrm>
-            <a:off x="1554480" y="4370832"/>
-            <a:ext cx="9601200" cy="768096"/>
-          </a:xfrm>
-          <a:prstGeom prst="rect">
-            <a:avLst/>
-          </a:prstGeom>
-          <a:noFill/>
-        </p:spPr>
-        <p:txBody>
-          <a:bodyPr wrap="square" lIns="73152" rIns="73152" tIns="36576" bIns="36576" anchor="ctr">
-            <a:spAutoFit/>
-          </a:bodyPr>
-          <a:lstStyle/>
-          <a:p>
-            <a:pPr algn="l">
-              <a:lnSpc>
-                <a:spcPts val="2000"/>
-              </a:lnSpc>
-            </a:pPr>
-            <a:r>
-              <a:rPr sz="1600" b="0" i="0">
-                <a:solidFill>
-                  <a:srgbClr val="2C3E50"/>
-                </a:solidFill>
-                <a:latin typeface="Segoe UI"/>
-              </a:rPr>
-              <a:t>3.37M unique audience tuples exported secara secure tanpa data movement</a:t>
-            </a:r>
-          </a:p>
-        </p:txBody>
-      </p:sp>
-      <p:sp>
-        <p:nvSpPr>
-          <p:cNvPr id="24" name="Rounded Rectangle 23"/>
-          <p:cNvSpPr/>
-          <p:nvPr/>
-        </p:nvSpPr>
-        <p:spPr>
-          <a:xfrm>
-            <a:off x="640080" y="5212080"/>
-            <a:ext cx="10911535" cy="804672"/>
-          </a:xfrm>
-          <a:prstGeom prst="roundRect">
-            <a:avLst/>
-          </a:prstGeom>
-          <a:solidFill>
-            <a:srgbClr val="EEF5FA"/>
-          </a:solidFill>
-          <a:ln>
-            <a:noFill/>
-          </a:ln>
-        </p:spPr>
-        <p:style>
-          <a:lnRef idx="1">
-            <a:schemeClr val="accent1"/>
-          </a:lnRef>
-          <a:fillRef idx="3">
-            <a:schemeClr val="accent1"/>
-          </a:fillRef>
-          <a:effectRef idx="2">
-            <a:schemeClr val="accent1"/>
-          </a:effectRef>
-          <a:fontRef idx="minor">
-            <a:schemeClr val="lt1"/>
-          </a:fontRef>
-        </p:style>
-        <p:txBody>
-          <a:bodyPr rtlCol="0" anchor="ctr"/>
-          <a:lstStyle/>
-          <a:p>
-            <a:pPr algn="ctr"/>
-          </a:p>
-        </p:txBody>
-      </p:sp>
-      <p:sp>
-        <p:nvSpPr>
-          <p:cNvPr id="25" name="Oval 24"/>
-          <p:cNvSpPr/>
-          <p:nvPr/>
-        </p:nvSpPr>
-        <p:spPr>
-          <a:xfrm>
-            <a:off x="914400" y="5349240"/>
-            <a:ext cx="411480" cy="411480"/>
-          </a:xfrm>
-          <a:prstGeom prst="ellipse">
-            <a:avLst/>
-          </a:prstGeom>
-          <a:solidFill>
-            <a:srgbClr val="29B5E8"/>
-          </a:solidFill>
-          <a:ln>
-            <a:noFill/>
-          </a:ln>
-        </p:spPr>
-        <p:style>
-          <a:lnRef idx="1">
-            <a:schemeClr val="accent1"/>
-          </a:lnRef>
-          <a:fillRef idx="3">
-            <a:schemeClr val="accent1"/>
-          </a:fillRef>
-          <a:effectRef idx="2">
-            <a:schemeClr val="accent1"/>
-          </a:effectRef>
-          <a:fontRef idx="minor">
-            <a:schemeClr val="lt1"/>
-          </a:fontRef>
-        </p:style>
-        <p:txBody>
-          <a:bodyPr rtlCol="0" anchor="ctr"/>
-          <a:lstStyle/>
-          <a:p>
-            <a:pPr algn="ctr"/>
-          </a:p>
-        </p:txBody>
-      </p:sp>
-      <p:sp>
-        <p:nvSpPr>
-          <p:cNvPr id="26" name="TextBox 25"/>
-          <p:cNvSpPr txBox="1"/>
-          <p:nvPr/>
-        </p:nvSpPr>
-        <p:spPr>
-          <a:xfrm>
-            <a:off x="914400" y="5349240"/>
-            <a:ext cx="411480" cy="411480"/>
-          </a:xfrm>
-          <a:prstGeom prst="rect">
-            <a:avLst/>
-          </a:prstGeom>
-          <a:noFill/>
-        </p:spPr>
-        <p:txBody>
-          <a:bodyPr wrap="square" lIns="73152" rIns="73152" tIns="36576" bIns="36576" anchor="ctr">
-            <a:spAutoFit/>
-          </a:bodyPr>
-          <a:lstStyle/>
-          <a:p>
-            <a:pPr algn="ctr">
-              <a:lnSpc>
-                <a:spcPts val="1600"/>
-              </a:lnSpc>
-            </a:pPr>
-            <a:r>
-              <a:rPr sz="1300" b="1" i="0">
-                <a:solidFill>
-                  <a:srgbClr val="FFFFFF"/>
-                </a:solidFill>
-                <a:latin typeface="Segoe UI"/>
-              </a:rPr>
-              <a:t>05</a:t>
-            </a:r>
-          </a:p>
-        </p:txBody>
-      </p:sp>
-      <p:sp>
-        <p:nvSpPr>
-          <p:cNvPr id="27" name="TextBox 26"/>
-          <p:cNvSpPr txBox="1"/>
-          <p:nvPr/>
-        </p:nvSpPr>
-        <p:spPr>
-          <a:xfrm>
-            <a:off x="1554480" y="5285232"/>
-            <a:ext cx="9601200" cy="768096"/>
-          </a:xfrm>
-          <a:prstGeom prst="rect">
-            <a:avLst/>
-          </a:prstGeom>
-          <a:noFill/>
-        </p:spPr>
-        <p:txBody>
-          <a:bodyPr wrap="square" lIns="73152" rIns="73152" tIns="36576" bIns="36576" anchor="ctr">
-            <a:spAutoFit/>
-          </a:bodyPr>
-          <a:lstStyle/>
-          <a:p>
-            <a:pPr algn="l">
-              <a:lnSpc>
-                <a:spcPts val="2000"/>
-              </a:lnSpc>
-            </a:pPr>
-            <a:r>
-              <a:rPr sz="1600" b="0" i="0">
-                <a:solidFill>
-                  <a:srgbClr val="2C3E50"/>
-                </a:solidFill>
-                <a:latin typeface="Segoe UI"/>
-              </a:rPr>
-              <a:t>Privacy-preserving by design — UU PDP &amp; POJK compliant dengan full audit trail</a:t>
-            </a:r>
-          </a:p>
-        </p:txBody>
-      </p:sp>
-      <p:sp>
-        <p:nvSpPr>
-          <p:cNvPr id="28" name="TextBox 27"/>
-          <p:cNvSpPr txBox="1"/>
-          <p:nvPr/>
-        </p:nvSpPr>
-        <p:spPr>
-          <a:xfrm>
-            <a:off x="548640" y="6446520"/>
-            <a:ext cx="9144000" cy="274320"/>
-          </a:xfrm>
-          <a:prstGeom prst="rect">
-            <a:avLst/>
-          </a:prstGeom>
-          <a:noFill/>
-        </p:spPr>
-        <p:txBody>
-          <a:bodyPr wrap="square" lIns="73152" rIns="73152" tIns="36576" bIns="36576" anchor="t">
-            <a:spAutoFit/>
-          </a:bodyPr>
-          <a:lstStyle/>
-          <a:p>
-            <a:pPr algn="l">
-              <a:lnSpc>
-                <a:spcPts val="1100"/>
-              </a:lnSpc>
-            </a:pPr>
-            <a:r>
-              <a:rPr sz="900" b="0" i="0">
-                <a:solidFill>
-                  <a:srgbClr val="95A5A6"/>
-                </a:solidFill>
-                <a:latin typeface="Segoe UI"/>
-              </a:rPr>
-              <a:t>DCR Collaboration API v2 | SFSEAPAC | 2026   ·   56 / 60</a:t>
             </a:r>
           </a:p>
         </p:txBody>
@@ -45898,7 +45833,7 @@
                 </a:solidFill>
                 <a:latin typeface="Calibri Light"/>
               </a:rPr>
-              <a:t>Bottom Line</a:t>
+              <a:t>Production-Ready Performance</a:t>
             </a:r>
           </a:p>
         </p:txBody>
@@ -45940,14 +45875,100 @@
       </p:cxnSp>
       <p:sp>
         <p:nvSpPr>
-          <p:cNvPr id="8" name="TextBox 7"/>
+          <p:cNvPr id="8" name="Rounded Rectangle 7"/>
+          <p:cNvSpPr/>
+          <p:nvPr/>
+        </p:nvSpPr>
+        <p:spPr>
+          <a:xfrm>
+            <a:off x="640080" y="1554480"/>
+            <a:ext cx="10911535" cy="804672"/>
+          </a:xfrm>
+          <a:prstGeom prst="roundRect">
+            <a:avLst/>
+          </a:prstGeom>
+          <a:solidFill>
+            <a:srgbClr val="EEF5FA"/>
+          </a:solidFill>
+          <a:ln>
+            <a:noFill/>
+          </a:ln>
+        </p:spPr>
+        <p:style>
+          <a:lnRef idx="1">
+            <a:schemeClr val="accent1"/>
+          </a:lnRef>
+          <a:fillRef idx="3">
+            <a:schemeClr val="accent1"/>
+          </a:fillRef>
+          <a:effectRef idx="2">
+            <a:schemeClr val="accent1"/>
+          </a:effectRef>
+          <a:fontRef idx="minor">
+            <a:schemeClr val="lt1"/>
+          </a:fontRef>
+        </p:style>
+        <p:txBody>
+          <a:bodyPr rtlCol="0" anchor="ctr"/>
+          <a:lstStyle/>
+          <a:p>
+            <a:pPr algn="ctr"/>
+          </a:p>
+        </p:txBody>
+      </p:sp>
+      <p:sp>
+        <p:nvSpPr>
+          <p:cNvPr id="9" name="Oval 8"/>
+          <p:cNvSpPr/>
+          <p:nvPr/>
+        </p:nvSpPr>
+        <p:spPr>
+          <a:xfrm>
+            <a:off x="914400" y="1691640"/>
+            <a:ext cx="411480" cy="411480"/>
+          </a:xfrm>
+          <a:prstGeom prst="ellipse">
+            <a:avLst/>
+          </a:prstGeom>
+          <a:solidFill>
+            <a:srgbClr val="29B5E8"/>
+          </a:solidFill>
+          <a:ln>
+            <a:noFill/>
+          </a:ln>
+        </p:spPr>
+        <p:style>
+          <a:lnRef idx="1">
+            <a:schemeClr val="accent1"/>
+          </a:lnRef>
+          <a:fillRef idx="3">
+            <a:schemeClr val="accent1"/>
+          </a:fillRef>
+          <a:effectRef idx="2">
+            <a:schemeClr val="accent1"/>
+          </a:effectRef>
+          <a:fontRef idx="minor">
+            <a:schemeClr val="lt1"/>
+          </a:fontRef>
+        </p:style>
+        <p:txBody>
+          <a:bodyPr rtlCol="0" anchor="ctr"/>
+          <a:lstStyle/>
+          <a:p>
+            <a:pPr algn="ctr"/>
+          </a:p>
+        </p:txBody>
+      </p:sp>
+      <p:sp>
+        <p:nvSpPr>
+          <p:cNvPr id="10" name="TextBox 9"/>
           <p:cNvSpPr txBox="1"/>
           <p:nvPr/>
         </p:nvSpPr>
         <p:spPr>
           <a:xfrm>
-            <a:off x="731520" y="1508760"/>
-            <a:ext cx="10515600" cy="4754880"/>
+            <a:off x="914400" y="1691640"/>
+            <a:ext cx="411480" cy="411480"/>
           </a:xfrm>
           <a:prstGeom prst="rect">
             <a:avLst/>
@@ -45955,239 +45976,726 @@
           <a:noFill/>
         </p:spPr>
         <p:txBody>
-          <a:bodyPr wrap="square" lIns="73152" rIns="73152">
+          <a:bodyPr wrap="square" lIns="73152" rIns="73152" tIns="36576" bIns="36576" anchor="ctr">
             <a:spAutoFit/>
           </a:bodyPr>
           <a:lstStyle/>
           <a:p>
-            <a:pPr>
-              <a:lnSpc>
-                <a:spcPts val="2500"/>
-              </a:lnSpc>
-              <a:spcAft>
-                <a:spcPts val="1000"/>
-              </a:spcAft>
-            </a:pPr>
-            <a:r>
-              <a:rPr sz="800">
-                <a:solidFill>
-                  <a:srgbClr val="29B5E8"/>
-                </a:solidFill>
-                <a:latin typeface="Segoe UI"/>
-              </a:rPr>
-              <a:t>●  </a:t>
-            </a:r>
-            <a:r>
-              <a:rPr sz="1600">
+            <a:pPr algn="ctr">
+              <a:lnSpc>
+                <a:spcPts val="1600"/>
+              </a:lnSpc>
+            </a:pPr>
+            <a:r>
+              <a:rPr sz="1300" b="1" i="0">
+                <a:solidFill>
+                  <a:srgbClr val="FFFFFF"/>
+                </a:solidFill>
+                <a:latin typeface="Segoe UI"/>
+              </a:rPr>
+              <a:t>01</a:t>
+            </a:r>
+          </a:p>
+        </p:txBody>
+      </p:sp>
+      <p:sp>
+        <p:nvSpPr>
+          <p:cNvPr id="11" name="TextBox 10"/>
+          <p:cNvSpPr txBox="1"/>
+          <p:nvPr/>
+        </p:nvSpPr>
+        <p:spPr>
+          <a:xfrm>
+            <a:off x="1554480" y="1627632"/>
+            <a:ext cx="9601200" cy="768096"/>
+          </a:xfrm>
+          <a:prstGeom prst="rect">
+            <a:avLst/>
+          </a:prstGeom>
+          <a:noFill/>
+        </p:spPr>
+        <p:txBody>
+          <a:bodyPr wrap="square" lIns="73152" rIns="73152" tIns="36576" bIns="36576" anchor="ctr">
+            <a:spAutoFit/>
+          </a:bodyPr>
+          <a:lstStyle/>
+          <a:p>
+            <a:pPr algn="l">
+              <a:lnSpc>
+                <a:spcPts val="2000"/>
+              </a:lnSpc>
+            </a:pPr>
+            <a:r>
+              <a:rPr sz="1600" b="0" i="0">
                 <a:solidFill>
                   <a:srgbClr val="2C3E50"/>
                 </a:solidFill>
                 <a:latin typeface="Segoe UI"/>
               </a:rPr>
-              <a:t>2m</a:t>
-            </a:r>
-          </a:p>
-          <a:p>
-            <a:pPr>
-              <a:lnSpc>
-                <a:spcPts val="2500"/>
-              </a:lnSpc>
-              <a:spcAft>
-                <a:spcPts val="1000"/>
-              </a:spcAft>
-            </a:pPr>
-            <a:r>
-              <a:rPr sz="800">
-                <a:solidFill>
-                  <a:srgbClr val="29B5E8"/>
-                </a:solidFill>
-                <a:latin typeface="Segoe UI"/>
-              </a:rPr>
-              <a:t>●  </a:t>
-            </a:r>
-            <a:r>
-              <a:rPr sz="1600">
+              <a:t>Proven at scale — 1.2B rows × 1001 kolom full-scan dalam 2 menit 16 detik via single-query</a:t>
+            </a:r>
+          </a:p>
+        </p:txBody>
+      </p:sp>
+      <p:sp>
+        <p:nvSpPr>
+          <p:cNvPr id="12" name="Rounded Rectangle 11"/>
+          <p:cNvSpPr/>
+          <p:nvPr/>
+        </p:nvSpPr>
+        <p:spPr>
+          <a:xfrm>
+            <a:off x="640080" y="2468880"/>
+            <a:ext cx="10911535" cy="804672"/>
+          </a:xfrm>
+          <a:prstGeom prst="roundRect">
+            <a:avLst/>
+          </a:prstGeom>
+          <a:solidFill>
+            <a:srgbClr val="F4F8FB"/>
+          </a:solidFill>
+          <a:ln>
+            <a:noFill/>
+          </a:ln>
+        </p:spPr>
+        <p:style>
+          <a:lnRef idx="1">
+            <a:schemeClr val="accent1"/>
+          </a:lnRef>
+          <a:fillRef idx="3">
+            <a:schemeClr val="accent1"/>
+          </a:fillRef>
+          <a:effectRef idx="2">
+            <a:schemeClr val="accent1"/>
+          </a:effectRef>
+          <a:fontRef idx="minor">
+            <a:schemeClr val="lt1"/>
+          </a:fontRef>
+        </p:style>
+        <p:txBody>
+          <a:bodyPr rtlCol="0" anchor="ctr"/>
+          <a:lstStyle/>
+          <a:p>
+            <a:pPr algn="ctr"/>
+          </a:p>
+        </p:txBody>
+      </p:sp>
+      <p:sp>
+        <p:nvSpPr>
+          <p:cNvPr id="13" name="Oval 12"/>
+          <p:cNvSpPr/>
+          <p:nvPr/>
+        </p:nvSpPr>
+        <p:spPr>
+          <a:xfrm>
+            <a:off x="914400" y="2606040"/>
+            <a:ext cx="411480" cy="411480"/>
+          </a:xfrm>
+          <a:prstGeom prst="ellipse">
+            <a:avLst/>
+          </a:prstGeom>
+          <a:solidFill>
+            <a:srgbClr val="11567F"/>
+          </a:solidFill>
+          <a:ln>
+            <a:noFill/>
+          </a:ln>
+        </p:spPr>
+        <p:style>
+          <a:lnRef idx="1">
+            <a:schemeClr val="accent1"/>
+          </a:lnRef>
+          <a:fillRef idx="3">
+            <a:schemeClr val="accent1"/>
+          </a:fillRef>
+          <a:effectRef idx="2">
+            <a:schemeClr val="accent1"/>
+          </a:effectRef>
+          <a:fontRef idx="minor">
+            <a:schemeClr val="lt1"/>
+          </a:fontRef>
+        </p:style>
+        <p:txBody>
+          <a:bodyPr rtlCol="0" anchor="ctr"/>
+          <a:lstStyle/>
+          <a:p>
+            <a:pPr algn="ctr"/>
+          </a:p>
+        </p:txBody>
+      </p:sp>
+      <p:sp>
+        <p:nvSpPr>
+          <p:cNvPr id="14" name="TextBox 13"/>
+          <p:cNvSpPr txBox="1"/>
+          <p:nvPr/>
+        </p:nvSpPr>
+        <p:spPr>
+          <a:xfrm>
+            <a:off x="914400" y="2606040"/>
+            <a:ext cx="411480" cy="411480"/>
+          </a:xfrm>
+          <a:prstGeom prst="rect">
+            <a:avLst/>
+          </a:prstGeom>
+          <a:noFill/>
+        </p:spPr>
+        <p:txBody>
+          <a:bodyPr wrap="square" lIns="73152" rIns="73152" tIns="36576" bIns="36576" anchor="ctr">
+            <a:spAutoFit/>
+          </a:bodyPr>
+          <a:lstStyle/>
+          <a:p>
+            <a:pPr algn="ctr">
+              <a:lnSpc>
+                <a:spcPts val="1600"/>
+              </a:lnSpc>
+            </a:pPr>
+            <a:r>
+              <a:rPr sz="1300" b="1" i="0">
+                <a:solidFill>
+                  <a:srgbClr val="FFFFFF"/>
+                </a:solidFill>
+                <a:latin typeface="Segoe UI"/>
+              </a:rPr>
+              <a:t>02</a:t>
+            </a:r>
+          </a:p>
+        </p:txBody>
+      </p:sp>
+      <p:sp>
+        <p:nvSpPr>
+          <p:cNvPr id="15" name="TextBox 14"/>
+          <p:cNvSpPr txBox="1"/>
+          <p:nvPr/>
+        </p:nvSpPr>
+        <p:spPr>
+          <a:xfrm>
+            <a:off x="1554480" y="2542032"/>
+            <a:ext cx="9601200" cy="768096"/>
+          </a:xfrm>
+          <a:prstGeom prst="rect">
+            <a:avLst/>
+          </a:prstGeom>
+          <a:noFill/>
+        </p:spPr>
+        <p:txBody>
+          <a:bodyPr wrap="square" lIns="73152" rIns="73152" tIns="36576" bIns="36576" anchor="ctr">
+            <a:spAutoFit/>
+          </a:bodyPr>
+          <a:lstStyle/>
+          <a:p>
+            <a:pPr algn="l">
+              <a:lnSpc>
+                <a:spcPts val="2000"/>
+              </a:lnSpc>
+            </a:pPr>
+            <a:r>
+              <a:rPr sz="1600" b="0" i="0">
                 <a:solidFill>
                   <a:srgbClr val="2C3E50"/>
                 </a:solidFill>
                 <a:latin typeface="Segoe UI"/>
               </a:rPr>
-              <a:t>16s End-to-end single-query full-scan</a:t>
-            </a:r>
-          </a:p>
-          <a:p>
-            <a:pPr>
-              <a:lnSpc>
-                <a:spcPts val="2500"/>
-              </a:lnSpc>
-              <a:spcAft>
-                <a:spcPts val="1000"/>
-              </a:spcAft>
-            </a:pPr>
-            <a:r>
-              <a:rPr sz="800">
-                <a:solidFill>
-                  <a:srgbClr val="29B5E8"/>
-                </a:solidFill>
-                <a:latin typeface="Segoe UI"/>
-              </a:rPr>
-              <a:t>●  </a:t>
-            </a:r>
-            <a:r>
-              <a:rPr sz="1600">
+              <a:t>5× faster than per-partition loop — 1 RUN call menggantikan 8 sequential calls</a:t>
+            </a:r>
+          </a:p>
+        </p:txBody>
+      </p:sp>
+      <p:sp>
+        <p:nvSpPr>
+          <p:cNvPr id="16" name="Rounded Rectangle 15"/>
+          <p:cNvSpPr/>
+          <p:nvPr/>
+        </p:nvSpPr>
+        <p:spPr>
+          <a:xfrm>
+            <a:off x="640080" y="3383280"/>
+            <a:ext cx="10911535" cy="804672"/>
+          </a:xfrm>
+          <a:prstGeom prst="roundRect">
+            <a:avLst/>
+          </a:prstGeom>
+          <a:solidFill>
+            <a:srgbClr val="EEF5FA"/>
+          </a:solidFill>
+          <a:ln>
+            <a:noFill/>
+          </a:ln>
+        </p:spPr>
+        <p:style>
+          <a:lnRef idx="1">
+            <a:schemeClr val="accent1"/>
+          </a:lnRef>
+          <a:fillRef idx="3">
+            <a:schemeClr val="accent1"/>
+          </a:fillRef>
+          <a:effectRef idx="2">
+            <a:schemeClr val="accent1"/>
+          </a:effectRef>
+          <a:fontRef idx="minor">
+            <a:schemeClr val="lt1"/>
+          </a:fontRef>
+        </p:style>
+        <p:txBody>
+          <a:bodyPr rtlCol="0" anchor="ctr"/>
+          <a:lstStyle/>
+          <a:p>
+            <a:pPr algn="ctr"/>
+          </a:p>
+        </p:txBody>
+      </p:sp>
+      <p:sp>
+        <p:nvSpPr>
+          <p:cNvPr id="17" name="Oval 16"/>
+          <p:cNvSpPr/>
+          <p:nvPr/>
+        </p:nvSpPr>
+        <p:spPr>
+          <a:xfrm>
+            <a:off x="914400" y="3520440"/>
+            <a:ext cx="411480" cy="411480"/>
+          </a:xfrm>
+          <a:prstGeom prst="ellipse">
+            <a:avLst/>
+          </a:prstGeom>
+          <a:solidFill>
+            <a:srgbClr val="71D3DC"/>
+          </a:solidFill>
+          <a:ln>
+            <a:noFill/>
+          </a:ln>
+        </p:spPr>
+        <p:style>
+          <a:lnRef idx="1">
+            <a:schemeClr val="accent1"/>
+          </a:lnRef>
+          <a:fillRef idx="3">
+            <a:schemeClr val="accent1"/>
+          </a:fillRef>
+          <a:effectRef idx="2">
+            <a:schemeClr val="accent1"/>
+          </a:effectRef>
+          <a:fontRef idx="minor">
+            <a:schemeClr val="lt1"/>
+          </a:fontRef>
+        </p:style>
+        <p:txBody>
+          <a:bodyPr rtlCol="0" anchor="ctr"/>
+          <a:lstStyle/>
+          <a:p>
+            <a:pPr algn="ctr"/>
+          </a:p>
+        </p:txBody>
+      </p:sp>
+      <p:sp>
+        <p:nvSpPr>
+          <p:cNvPr id="18" name="TextBox 17"/>
+          <p:cNvSpPr txBox="1"/>
+          <p:nvPr/>
+        </p:nvSpPr>
+        <p:spPr>
+          <a:xfrm>
+            <a:off x="914400" y="3520440"/>
+            <a:ext cx="411480" cy="411480"/>
+          </a:xfrm>
+          <a:prstGeom prst="rect">
+            <a:avLst/>
+          </a:prstGeom>
+          <a:noFill/>
+        </p:spPr>
+        <p:txBody>
+          <a:bodyPr wrap="square" lIns="73152" rIns="73152" tIns="36576" bIns="36576" anchor="ctr">
+            <a:spAutoFit/>
+          </a:bodyPr>
+          <a:lstStyle/>
+          <a:p>
+            <a:pPr algn="ctr">
+              <a:lnSpc>
+                <a:spcPts val="1600"/>
+              </a:lnSpc>
+            </a:pPr>
+            <a:r>
+              <a:rPr sz="1300" b="1" i="0">
+                <a:solidFill>
+                  <a:srgbClr val="FFFFFF"/>
+                </a:solidFill>
+                <a:latin typeface="Segoe UI"/>
+              </a:rPr>
+              <a:t>03</a:t>
+            </a:r>
+          </a:p>
+        </p:txBody>
+      </p:sp>
+      <p:sp>
+        <p:nvSpPr>
+          <p:cNvPr id="19" name="TextBox 18"/>
+          <p:cNvSpPr txBox="1"/>
+          <p:nvPr/>
+        </p:nvSpPr>
+        <p:spPr>
+          <a:xfrm>
+            <a:off x="1554480" y="3456432"/>
+            <a:ext cx="9601200" cy="768096"/>
+          </a:xfrm>
+          <a:prstGeom prst="rect">
+            <a:avLst/>
+          </a:prstGeom>
+          <a:noFill/>
+        </p:spPr>
+        <p:txBody>
+          <a:bodyPr wrap="square" lIns="73152" rIns="73152" tIns="36576" bIns="36576" anchor="ctr">
+            <a:spAutoFit/>
+          </a:bodyPr>
+          <a:lstStyle/>
+          <a:p>
+            <a:pPr algn="l">
+              <a:lnSpc>
+                <a:spcPts val="2000"/>
+              </a:lnSpc>
+            </a:pPr>
+            <a:r>
+              <a:rPr sz="1600" b="0" i="0">
                 <a:solidFill>
                   <a:srgbClr val="2C3E50"/>
                 </a:solidFill>
                 <a:latin typeface="Segoe UI"/>
               </a:rPr>
-              <a:t>0.61</a:t>
-            </a:r>
-          </a:p>
-          <a:p>
-            <a:pPr>
-              <a:lnSpc>
-                <a:spcPts val="2500"/>
-              </a:lnSpc>
-              <a:spcAft>
-                <a:spcPts val="1000"/>
-              </a:spcAft>
-            </a:pPr>
-            <a:r>
-              <a:rPr sz="800">
-                <a:solidFill>
-                  <a:srgbClr val="29B5E8"/>
-                </a:solidFill>
-                <a:latin typeface="Segoe UI"/>
-              </a:rPr>
-              <a:t>●  </a:t>
-            </a:r>
-            <a:r>
-              <a:rPr sz="1600">
+              <a:t>80% compute cost savings — 0.61 credits vs 3.02 credits per run @ GEN2_XLARGE</a:t>
+            </a:r>
+          </a:p>
+        </p:txBody>
+      </p:sp>
+      <p:sp>
+        <p:nvSpPr>
+          <p:cNvPr id="20" name="Rounded Rectangle 19"/>
+          <p:cNvSpPr/>
+          <p:nvPr/>
+        </p:nvSpPr>
+        <p:spPr>
+          <a:xfrm>
+            <a:off x="640080" y="4297680"/>
+            <a:ext cx="10911535" cy="804672"/>
+          </a:xfrm>
+          <a:prstGeom prst="roundRect">
+            <a:avLst/>
+          </a:prstGeom>
+          <a:solidFill>
+            <a:srgbClr val="F4F8FB"/>
+          </a:solidFill>
+          <a:ln>
+            <a:noFill/>
+          </a:ln>
+        </p:spPr>
+        <p:style>
+          <a:lnRef idx="1">
+            <a:schemeClr val="accent1"/>
+          </a:lnRef>
+          <a:fillRef idx="3">
+            <a:schemeClr val="accent1"/>
+          </a:fillRef>
+          <a:effectRef idx="2">
+            <a:schemeClr val="accent1"/>
+          </a:effectRef>
+          <a:fontRef idx="minor">
+            <a:schemeClr val="lt1"/>
+          </a:fontRef>
+        </p:style>
+        <p:txBody>
+          <a:bodyPr rtlCol="0" anchor="ctr"/>
+          <a:lstStyle/>
+          <a:p>
+            <a:pPr algn="ctr"/>
+          </a:p>
+        </p:txBody>
+      </p:sp>
+      <p:sp>
+        <p:nvSpPr>
+          <p:cNvPr id="21" name="Oval 20"/>
+          <p:cNvSpPr/>
+          <p:nvPr/>
+        </p:nvSpPr>
+        <p:spPr>
+          <a:xfrm>
+            <a:off x="914400" y="4434840"/>
+            <a:ext cx="411480" cy="411480"/>
+          </a:xfrm>
+          <a:prstGeom prst="ellipse">
+            <a:avLst/>
+          </a:prstGeom>
+          <a:solidFill>
+            <a:srgbClr val="FF9F36"/>
+          </a:solidFill>
+          <a:ln>
+            <a:noFill/>
+          </a:ln>
+        </p:spPr>
+        <p:style>
+          <a:lnRef idx="1">
+            <a:schemeClr val="accent1"/>
+          </a:lnRef>
+          <a:fillRef idx="3">
+            <a:schemeClr val="accent1"/>
+          </a:fillRef>
+          <a:effectRef idx="2">
+            <a:schemeClr val="accent1"/>
+          </a:effectRef>
+          <a:fontRef idx="minor">
+            <a:schemeClr val="lt1"/>
+          </a:fontRef>
+        </p:style>
+        <p:txBody>
+          <a:bodyPr rtlCol="0" anchor="ctr"/>
+          <a:lstStyle/>
+          <a:p>
+            <a:pPr algn="ctr"/>
+          </a:p>
+        </p:txBody>
+      </p:sp>
+      <p:sp>
+        <p:nvSpPr>
+          <p:cNvPr id="22" name="TextBox 21"/>
+          <p:cNvSpPr txBox="1"/>
+          <p:nvPr/>
+        </p:nvSpPr>
+        <p:spPr>
+          <a:xfrm>
+            <a:off x="914400" y="4434840"/>
+            <a:ext cx="411480" cy="411480"/>
+          </a:xfrm>
+          <a:prstGeom prst="rect">
+            <a:avLst/>
+          </a:prstGeom>
+          <a:noFill/>
+        </p:spPr>
+        <p:txBody>
+          <a:bodyPr wrap="square" lIns="73152" rIns="73152" tIns="36576" bIns="36576" anchor="ctr">
+            <a:spAutoFit/>
+          </a:bodyPr>
+          <a:lstStyle/>
+          <a:p>
+            <a:pPr algn="ctr">
+              <a:lnSpc>
+                <a:spcPts val="1600"/>
+              </a:lnSpc>
+            </a:pPr>
+            <a:r>
+              <a:rPr sz="1300" b="1" i="0">
+                <a:solidFill>
+                  <a:srgbClr val="FFFFFF"/>
+                </a:solidFill>
+                <a:latin typeface="Segoe UI"/>
+              </a:rPr>
+              <a:t>04</a:t>
+            </a:r>
+          </a:p>
+        </p:txBody>
+      </p:sp>
+      <p:sp>
+        <p:nvSpPr>
+          <p:cNvPr id="23" name="TextBox 22"/>
+          <p:cNvSpPr txBox="1"/>
+          <p:nvPr/>
+        </p:nvSpPr>
+        <p:spPr>
+          <a:xfrm>
+            <a:off x="1554480" y="4370832"/>
+            <a:ext cx="9601200" cy="768096"/>
+          </a:xfrm>
+          <a:prstGeom prst="rect">
+            <a:avLst/>
+          </a:prstGeom>
+          <a:noFill/>
+        </p:spPr>
+        <p:txBody>
+          <a:bodyPr wrap="square" lIns="73152" rIns="73152" tIns="36576" bIns="36576" anchor="ctr">
+            <a:spAutoFit/>
+          </a:bodyPr>
+          <a:lstStyle/>
+          <a:p>
+            <a:pPr algn="l">
+              <a:lnSpc>
+                <a:spcPts val="2000"/>
+              </a:lnSpc>
+            </a:pPr>
+            <a:r>
+              <a:rPr sz="1600" b="0" i="0">
                 <a:solidFill>
                   <a:srgbClr val="2C3E50"/>
                 </a:solidFill>
                 <a:latin typeface="Segoe UI"/>
               </a:rPr>
-              <a:t>Credits per run (80% cheaper than loop)</a:t>
-            </a:r>
-          </a:p>
-          <a:p>
-            <a:pPr>
-              <a:lnSpc>
-                <a:spcPts val="2500"/>
-              </a:lnSpc>
-              <a:spcAft>
-                <a:spcPts val="1000"/>
-              </a:spcAft>
-            </a:pPr>
-            <a:r>
-              <a:rPr sz="800">
-                <a:solidFill>
-                  <a:srgbClr val="29B5E8"/>
-                </a:solidFill>
-                <a:latin typeface="Segoe UI"/>
-              </a:rPr>
-              <a:t>●  </a:t>
-            </a:r>
-            <a:r>
-              <a:rPr sz="1600">
+              <a:t>3.37M unique audience tuples exported secara secure tanpa data movement</a:t>
+            </a:r>
+          </a:p>
+        </p:txBody>
+      </p:sp>
+      <p:sp>
+        <p:nvSpPr>
+          <p:cNvPr id="24" name="Rounded Rectangle 23"/>
+          <p:cNvSpPr/>
+          <p:nvPr/>
+        </p:nvSpPr>
+        <p:spPr>
+          <a:xfrm>
+            <a:off x="640080" y="5212080"/>
+            <a:ext cx="10911535" cy="804672"/>
+          </a:xfrm>
+          <a:prstGeom prst="roundRect">
+            <a:avLst/>
+          </a:prstGeom>
+          <a:solidFill>
+            <a:srgbClr val="EEF5FA"/>
+          </a:solidFill>
+          <a:ln>
+            <a:noFill/>
+          </a:ln>
+        </p:spPr>
+        <p:style>
+          <a:lnRef idx="1">
+            <a:schemeClr val="accent1"/>
+          </a:lnRef>
+          <a:fillRef idx="3">
+            <a:schemeClr val="accent1"/>
+          </a:fillRef>
+          <a:effectRef idx="2">
+            <a:schemeClr val="accent1"/>
+          </a:effectRef>
+          <a:fontRef idx="minor">
+            <a:schemeClr val="lt1"/>
+          </a:fontRef>
+        </p:style>
+        <p:txBody>
+          <a:bodyPr rtlCol="0" anchor="ctr"/>
+          <a:lstStyle/>
+          <a:p>
+            <a:pPr algn="ctr"/>
+          </a:p>
+        </p:txBody>
+      </p:sp>
+      <p:sp>
+        <p:nvSpPr>
+          <p:cNvPr id="25" name="Oval 24"/>
+          <p:cNvSpPr/>
+          <p:nvPr/>
+        </p:nvSpPr>
+        <p:spPr>
+          <a:xfrm>
+            <a:off x="914400" y="5349240"/>
+            <a:ext cx="411480" cy="411480"/>
+          </a:xfrm>
+          <a:prstGeom prst="ellipse">
+            <a:avLst/>
+          </a:prstGeom>
+          <a:solidFill>
+            <a:srgbClr val="29B5E8"/>
+          </a:solidFill>
+          <a:ln>
+            <a:noFill/>
+          </a:ln>
+        </p:spPr>
+        <p:style>
+          <a:lnRef idx="1">
+            <a:schemeClr val="accent1"/>
+          </a:lnRef>
+          <a:fillRef idx="3">
+            <a:schemeClr val="accent1"/>
+          </a:fillRef>
+          <a:effectRef idx="2">
+            <a:schemeClr val="accent1"/>
+          </a:effectRef>
+          <a:fontRef idx="minor">
+            <a:schemeClr val="lt1"/>
+          </a:fontRef>
+        </p:style>
+        <p:txBody>
+          <a:bodyPr rtlCol="0" anchor="ctr"/>
+          <a:lstStyle/>
+          <a:p>
+            <a:pPr algn="ctr"/>
+          </a:p>
+        </p:txBody>
+      </p:sp>
+      <p:sp>
+        <p:nvSpPr>
+          <p:cNvPr id="26" name="TextBox 25"/>
+          <p:cNvSpPr txBox="1"/>
+          <p:nvPr/>
+        </p:nvSpPr>
+        <p:spPr>
+          <a:xfrm>
+            <a:off x="914400" y="5349240"/>
+            <a:ext cx="411480" cy="411480"/>
+          </a:xfrm>
+          <a:prstGeom prst="rect">
+            <a:avLst/>
+          </a:prstGeom>
+          <a:noFill/>
+        </p:spPr>
+        <p:txBody>
+          <a:bodyPr wrap="square" lIns="73152" rIns="73152" tIns="36576" bIns="36576" anchor="ctr">
+            <a:spAutoFit/>
+          </a:bodyPr>
+          <a:lstStyle/>
+          <a:p>
+            <a:pPr algn="ctr">
+              <a:lnSpc>
+                <a:spcPts val="1600"/>
+              </a:lnSpc>
+            </a:pPr>
+            <a:r>
+              <a:rPr sz="1300" b="1" i="0">
+                <a:solidFill>
+                  <a:srgbClr val="FFFFFF"/>
+                </a:solidFill>
+                <a:latin typeface="Segoe UI"/>
+              </a:rPr>
+              <a:t>05</a:t>
+            </a:r>
+          </a:p>
+        </p:txBody>
+      </p:sp>
+      <p:sp>
+        <p:nvSpPr>
+          <p:cNvPr id="27" name="TextBox 26"/>
+          <p:cNvSpPr txBox="1"/>
+          <p:nvPr/>
+        </p:nvSpPr>
+        <p:spPr>
+          <a:xfrm>
+            <a:off x="1554480" y="5285232"/>
+            <a:ext cx="9601200" cy="768096"/>
+          </a:xfrm>
+          <a:prstGeom prst="rect">
+            <a:avLst/>
+          </a:prstGeom>
+          <a:noFill/>
+        </p:spPr>
+        <p:txBody>
+          <a:bodyPr wrap="square" lIns="73152" rIns="73152" tIns="36576" bIns="36576" anchor="ctr">
+            <a:spAutoFit/>
+          </a:bodyPr>
+          <a:lstStyle/>
+          <a:p>
+            <a:pPr algn="l">
+              <a:lnSpc>
+                <a:spcPts val="2000"/>
+              </a:lnSpc>
+            </a:pPr>
+            <a:r>
+              <a:rPr sz="1600" b="0" i="0">
                 <a:solidFill>
                   <a:srgbClr val="2C3E50"/>
                 </a:solidFill>
                 <a:latin typeface="Segoe UI"/>
               </a:rPr>
-              <a:t>1.2B</a:t>
-            </a:r>
-          </a:p>
-          <a:p>
-            <a:pPr>
-              <a:lnSpc>
-                <a:spcPts val="2500"/>
-              </a:lnSpc>
-              <a:spcAft>
-                <a:spcPts val="1000"/>
-              </a:spcAft>
-            </a:pPr>
-            <a:r>
-              <a:rPr sz="800">
-                <a:solidFill>
-                  <a:srgbClr val="29B5E8"/>
-                </a:solidFill>
-                <a:latin typeface="Segoe UI"/>
-              </a:rPr>
-              <a:t>●  </a:t>
-            </a:r>
-            <a:r>
-              <a:rPr sz="1600">
-                <a:solidFill>
-                  <a:srgbClr val="2C3E50"/>
-                </a:solidFill>
-                <a:latin typeface="Segoe UI"/>
-              </a:rPr>
-              <a:t>Provider rows fully scanned in 1 query</a:t>
-            </a:r>
-          </a:p>
-          <a:p>
-            <a:pPr>
-              <a:lnSpc>
-                <a:spcPts val="2500"/>
-              </a:lnSpc>
-              <a:spcAft>
-                <a:spcPts val="1000"/>
-              </a:spcAft>
-            </a:pPr>
-            <a:r>
-              <a:rPr sz="800">
-                <a:solidFill>
-                  <a:srgbClr val="29B5E8"/>
-                </a:solidFill>
-                <a:latin typeface="Segoe UI"/>
-              </a:rPr>
-              <a:t>●  </a:t>
-            </a:r>
-            <a:r>
-              <a:rPr sz="1600">
-                <a:solidFill>
-                  <a:srgbClr val="2C3E50"/>
-                </a:solidFill>
-                <a:latin typeface="Segoe UI"/>
-              </a:rPr>
-              <a:t>3.37M</a:t>
-            </a:r>
-          </a:p>
-          <a:p>
-            <a:pPr>
-              <a:lnSpc>
-                <a:spcPts val="2500"/>
-              </a:lnSpc>
-              <a:spcAft>
-                <a:spcPts val="1000"/>
-              </a:spcAft>
-            </a:pPr>
-            <a:r>
-              <a:rPr sz="800">
-                <a:solidFill>
-                  <a:srgbClr val="29B5E8"/>
-                </a:solidFill>
-                <a:latin typeface="Segoe UI"/>
-              </a:rPr>
-              <a:t>●  </a:t>
-            </a:r>
-            <a:r>
-              <a:rPr sz="1600">
-                <a:solidFill>
-                  <a:srgbClr val="2C3E50"/>
-                </a:solidFill>
-                <a:latin typeface="Segoe UI"/>
-              </a:rPr>
-              <a:t>Unique audience tuples (identical in both modes)</a:t>
-            </a:r>
-          </a:p>
-        </p:txBody>
-      </p:sp>
-      <p:sp>
-        <p:nvSpPr>
-          <p:cNvPr id="9" name="TextBox 8"/>
+              <a:t>Privacy-preserving by design — UU PDP &amp; POJK compliant dengan full audit trail</a:t>
+            </a:r>
+          </a:p>
+        </p:txBody>
+      </p:sp>
+      <p:sp>
+        <p:nvSpPr>
+          <p:cNvPr id="28" name="TextBox 27"/>
           <p:cNvSpPr txBox="1"/>
           <p:nvPr/>
         </p:nvSpPr>
@@ -46219,7 +46727,7 @@
                 </a:solidFill>
                 <a:latin typeface="Segoe UI"/>
               </a:rPr>
-              <a:t>DCR Collaboration API v2 | SFSEAPAC | 2026   ·   57 / 60</a:t>
+              <a:t>DCR Collaboration API v2 | SFSEAPAC | 2026   ·   57 / 61</a:t>
             </a:r>
           </a:p>
         </p:txBody>
@@ -46437,7 +46945,7 @@
                 </a:solidFill>
                 <a:latin typeface="Calibri Light"/>
               </a:rPr>
-              <a:t>References &amp; Code Repository</a:t>
+              <a:t>Bottom Line</a:t>
             </a:r>
           </a:p>
         </p:txBody>
@@ -46479,100 +46987,14 @@
       </p:cxnSp>
       <p:sp>
         <p:nvSpPr>
-          <p:cNvPr id="8" name="Rounded Rectangle 7"/>
-          <p:cNvSpPr/>
-          <p:nvPr/>
-        </p:nvSpPr>
-        <p:spPr>
-          <a:xfrm>
-            <a:off x="640080" y="1554480"/>
-            <a:ext cx="10911535" cy="804672"/>
-          </a:xfrm>
-          <a:prstGeom prst="roundRect">
-            <a:avLst/>
-          </a:prstGeom>
-          <a:solidFill>
-            <a:srgbClr val="EEF5FA"/>
-          </a:solidFill>
-          <a:ln>
-            <a:noFill/>
-          </a:ln>
-        </p:spPr>
-        <p:style>
-          <a:lnRef idx="1">
-            <a:schemeClr val="accent1"/>
-          </a:lnRef>
-          <a:fillRef idx="3">
-            <a:schemeClr val="accent1"/>
-          </a:fillRef>
-          <a:effectRef idx="2">
-            <a:schemeClr val="accent1"/>
-          </a:effectRef>
-          <a:fontRef idx="minor">
-            <a:schemeClr val="lt1"/>
-          </a:fontRef>
-        </p:style>
-        <p:txBody>
-          <a:bodyPr rtlCol="0" anchor="ctr"/>
-          <a:lstStyle/>
-          <a:p>
-            <a:pPr algn="ctr"/>
-          </a:p>
-        </p:txBody>
-      </p:sp>
-      <p:sp>
-        <p:nvSpPr>
-          <p:cNvPr id="9" name="Oval 8"/>
-          <p:cNvSpPr/>
-          <p:nvPr/>
-        </p:nvSpPr>
-        <p:spPr>
-          <a:xfrm>
-            <a:off x="914400" y="1691640"/>
-            <a:ext cx="411480" cy="411480"/>
-          </a:xfrm>
-          <a:prstGeom prst="ellipse">
-            <a:avLst/>
-          </a:prstGeom>
-          <a:solidFill>
-            <a:srgbClr val="29B5E8"/>
-          </a:solidFill>
-          <a:ln>
-            <a:noFill/>
-          </a:ln>
-        </p:spPr>
-        <p:style>
-          <a:lnRef idx="1">
-            <a:schemeClr val="accent1"/>
-          </a:lnRef>
-          <a:fillRef idx="3">
-            <a:schemeClr val="accent1"/>
-          </a:fillRef>
-          <a:effectRef idx="2">
-            <a:schemeClr val="accent1"/>
-          </a:effectRef>
-          <a:fontRef idx="minor">
-            <a:schemeClr val="lt1"/>
-          </a:fontRef>
-        </p:style>
-        <p:txBody>
-          <a:bodyPr rtlCol="0" anchor="ctr"/>
-          <a:lstStyle/>
-          <a:p>
-            <a:pPr algn="ctr"/>
-          </a:p>
-        </p:txBody>
-      </p:sp>
-      <p:sp>
-        <p:nvSpPr>
-          <p:cNvPr id="10" name="TextBox 9"/>
+          <p:cNvPr id="8" name="TextBox 7"/>
           <p:cNvSpPr txBox="1"/>
           <p:nvPr/>
         </p:nvSpPr>
         <p:spPr>
           <a:xfrm>
-            <a:off x="914400" y="1691640"/>
-            <a:ext cx="411480" cy="411480"/>
+            <a:off x="731520" y="1508760"/>
+            <a:ext cx="10515600" cy="4754880"/>
           </a:xfrm>
           <a:prstGeom prst="rect">
             <a:avLst/>
@@ -46580,726 +47002,239 @@
           <a:noFill/>
         </p:spPr>
         <p:txBody>
-          <a:bodyPr wrap="square" lIns="73152" rIns="73152" tIns="36576" bIns="36576" anchor="ctr">
+          <a:bodyPr wrap="square" lIns="73152" rIns="73152">
             <a:spAutoFit/>
           </a:bodyPr>
           <a:lstStyle/>
           <a:p>
-            <a:pPr algn="ctr">
-              <a:lnSpc>
-                <a:spcPts val="1600"/>
-              </a:lnSpc>
-            </a:pPr>
-            <a:r>
-              <a:rPr sz="1300" b="1" i="0">
-                <a:solidFill>
-                  <a:srgbClr val="FFFFFF"/>
-                </a:solidFill>
-                <a:latin typeface="Segoe UI"/>
-              </a:rPr>
-              <a:t>01</a:t>
-            </a:r>
-          </a:p>
-        </p:txBody>
-      </p:sp>
-      <p:sp>
-        <p:nvSpPr>
-          <p:cNvPr id="11" name="TextBox 10"/>
-          <p:cNvSpPr txBox="1"/>
-          <p:nvPr/>
-        </p:nvSpPr>
-        <p:spPr>
-          <a:xfrm>
-            <a:off x="1554480" y="1627632"/>
-            <a:ext cx="9601200" cy="768096"/>
-          </a:xfrm>
-          <a:prstGeom prst="rect">
-            <a:avLst/>
-          </a:prstGeom>
-          <a:noFill/>
-        </p:spPr>
-        <p:txBody>
-          <a:bodyPr wrap="square" lIns="73152" rIns="73152" tIns="36576" bIns="36576" anchor="ctr">
-            <a:spAutoFit/>
-          </a:bodyPr>
-          <a:lstStyle/>
-          <a:p>
-            <a:pPr algn="l">
-              <a:lnSpc>
-                <a:spcPts val="2000"/>
-              </a:lnSpc>
-            </a:pPr>
-            <a:r>
-              <a:rPr sz="1600" b="0" i="0">
+            <a:pPr>
+              <a:lnSpc>
+                <a:spcPts val="2500"/>
+              </a:lnSpc>
+              <a:spcAft>
+                <a:spcPts val="1000"/>
+              </a:spcAft>
+            </a:pPr>
+            <a:r>
+              <a:rPr sz="800">
+                <a:solidFill>
+                  <a:srgbClr val="29B5E8"/>
+                </a:solidFill>
+                <a:latin typeface="Segoe UI"/>
+              </a:rPr>
+              <a:t>●  </a:t>
+            </a:r>
+            <a:r>
+              <a:rPr sz="1600">
                 <a:solidFill>
                   <a:srgbClr val="2C3E50"/>
                 </a:solidFill>
                 <a:latin typeface="Segoe UI"/>
               </a:rPr>
-              <a:t>GitHub — https://github.com/arzamuhammad/dcr-collaboration-api</a:t>
-            </a:r>
-          </a:p>
-        </p:txBody>
-      </p:sp>
-      <p:sp>
-        <p:nvSpPr>
-          <p:cNvPr id="12" name="Rounded Rectangle 11"/>
-          <p:cNvSpPr/>
-          <p:nvPr/>
-        </p:nvSpPr>
-        <p:spPr>
-          <a:xfrm>
-            <a:off x="640080" y="2468880"/>
-            <a:ext cx="10911535" cy="804672"/>
-          </a:xfrm>
-          <a:prstGeom prst="roundRect">
-            <a:avLst/>
-          </a:prstGeom>
-          <a:solidFill>
-            <a:srgbClr val="F4F8FB"/>
-          </a:solidFill>
-          <a:ln>
-            <a:noFill/>
-          </a:ln>
-        </p:spPr>
-        <p:style>
-          <a:lnRef idx="1">
-            <a:schemeClr val="accent1"/>
-          </a:lnRef>
-          <a:fillRef idx="3">
-            <a:schemeClr val="accent1"/>
-          </a:fillRef>
-          <a:effectRef idx="2">
-            <a:schemeClr val="accent1"/>
-          </a:effectRef>
-          <a:fontRef idx="minor">
-            <a:schemeClr val="lt1"/>
-          </a:fontRef>
-        </p:style>
-        <p:txBody>
-          <a:bodyPr rtlCol="0" anchor="ctr"/>
-          <a:lstStyle/>
-          <a:p>
-            <a:pPr algn="ctr"/>
-          </a:p>
-        </p:txBody>
-      </p:sp>
-      <p:sp>
-        <p:nvSpPr>
-          <p:cNvPr id="13" name="Oval 12"/>
-          <p:cNvSpPr/>
-          <p:nvPr/>
-        </p:nvSpPr>
-        <p:spPr>
-          <a:xfrm>
-            <a:off x="914400" y="2606040"/>
-            <a:ext cx="411480" cy="411480"/>
-          </a:xfrm>
-          <a:prstGeom prst="ellipse">
-            <a:avLst/>
-          </a:prstGeom>
-          <a:solidFill>
-            <a:srgbClr val="11567F"/>
-          </a:solidFill>
-          <a:ln>
-            <a:noFill/>
-          </a:ln>
-        </p:spPr>
-        <p:style>
-          <a:lnRef idx="1">
-            <a:schemeClr val="accent1"/>
-          </a:lnRef>
-          <a:fillRef idx="3">
-            <a:schemeClr val="accent1"/>
-          </a:fillRef>
-          <a:effectRef idx="2">
-            <a:schemeClr val="accent1"/>
-          </a:effectRef>
-          <a:fontRef idx="minor">
-            <a:schemeClr val="lt1"/>
-          </a:fontRef>
-        </p:style>
-        <p:txBody>
-          <a:bodyPr rtlCol="0" anchor="ctr"/>
-          <a:lstStyle/>
-          <a:p>
-            <a:pPr algn="ctr"/>
-          </a:p>
-        </p:txBody>
-      </p:sp>
-      <p:sp>
-        <p:nvSpPr>
-          <p:cNvPr id="14" name="TextBox 13"/>
-          <p:cNvSpPr txBox="1"/>
-          <p:nvPr/>
-        </p:nvSpPr>
-        <p:spPr>
-          <a:xfrm>
-            <a:off x="914400" y="2606040"/>
-            <a:ext cx="411480" cy="411480"/>
-          </a:xfrm>
-          <a:prstGeom prst="rect">
-            <a:avLst/>
-          </a:prstGeom>
-          <a:noFill/>
-        </p:spPr>
-        <p:txBody>
-          <a:bodyPr wrap="square" lIns="73152" rIns="73152" tIns="36576" bIns="36576" anchor="ctr">
-            <a:spAutoFit/>
-          </a:bodyPr>
-          <a:lstStyle/>
-          <a:p>
-            <a:pPr algn="ctr">
-              <a:lnSpc>
-                <a:spcPts val="1600"/>
-              </a:lnSpc>
-            </a:pPr>
-            <a:r>
-              <a:rPr sz="1300" b="1" i="0">
-                <a:solidFill>
-                  <a:srgbClr val="FFFFFF"/>
-                </a:solidFill>
-                <a:latin typeface="Segoe UI"/>
-              </a:rPr>
-              <a:t>02</a:t>
-            </a:r>
-          </a:p>
-        </p:txBody>
-      </p:sp>
-      <p:sp>
-        <p:nvSpPr>
-          <p:cNvPr id="15" name="TextBox 14"/>
-          <p:cNvSpPr txBox="1"/>
-          <p:nvPr/>
-        </p:nvSpPr>
-        <p:spPr>
-          <a:xfrm>
-            <a:off x="1554480" y="2542032"/>
-            <a:ext cx="9601200" cy="768096"/>
-          </a:xfrm>
-          <a:prstGeom prst="rect">
-            <a:avLst/>
-          </a:prstGeom>
-          <a:noFill/>
-        </p:spPr>
-        <p:txBody>
-          <a:bodyPr wrap="square" lIns="73152" rIns="73152" tIns="36576" bIns="36576" anchor="ctr">
-            <a:spAutoFit/>
-          </a:bodyPr>
-          <a:lstStyle/>
-          <a:p>
-            <a:pPr algn="l">
-              <a:lnSpc>
-                <a:spcPts val="2000"/>
-              </a:lnSpc>
-            </a:pPr>
-            <a:r>
-              <a:rPr sz="1600" b="0" i="0">
+              <a:t>2m</a:t>
+            </a:r>
+          </a:p>
+          <a:p>
+            <a:pPr>
+              <a:lnSpc>
+                <a:spcPts val="2500"/>
+              </a:lnSpc>
+              <a:spcAft>
+                <a:spcPts val="1000"/>
+              </a:spcAft>
+            </a:pPr>
+            <a:r>
+              <a:rPr sz="800">
+                <a:solidFill>
+                  <a:srgbClr val="29B5E8"/>
+                </a:solidFill>
+                <a:latin typeface="Segoe UI"/>
+              </a:rPr>
+              <a:t>●  </a:t>
+            </a:r>
+            <a:r>
+              <a:rPr sz="1600">
                 <a:solidFill>
                   <a:srgbClr val="2C3E50"/>
                 </a:solidFill>
                 <a:latin typeface="Segoe UI"/>
               </a:rPr>
-              <a:t>Contains — provider_workflow.sql, consumer_workflow.sql, README dengan battle-tested fixes</a:t>
-            </a:r>
-          </a:p>
-        </p:txBody>
-      </p:sp>
-      <p:sp>
-        <p:nvSpPr>
-          <p:cNvPr id="16" name="Rounded Rectangle 15"/>
-          <p:cNvSpPr/>
-          <p:nvPr/>
-        </p:nvSpPr>
-        <p:spPr>
-          <a:xfrm>
-            <a:off x="640080" y="3383280"/>
-            <a:ext cx="10911535" cy="804672"/>
-          </a:xfrm>
-          <a:prstGeom prst="roundRect">
-            <a:avLst/>
-          </a:prstGeom>
-          <a:solidFill>
-            <a:srgbClr val="EEF5FA"/>
-          </a:solidFill>
-          <a:ln>
-            <a:noFill/>
-          </a:ln>
-        </p:spPr>
-        <p:style>
-          <a:lnRef idx="1">
-            <a:schemeClr val="accent1"/>
-          </a:lnRef>
-          <a:fillRef idx="3">
-            <a:schemeClr val="accent1"/>
-          </a:fillRef>
-          <a:effectRef idx="2">
-            <a:schemeClr val="accent1"/>
-          </a:effectRef>
-          <a:fontRef idx="minor">
-            <a:schemeClr val="lt1"/>
-          </a:fontRef>
-        </p:style>
-        <p:txBody>
-          <a:bodyPr rtlCol="0" anchor="ctr"/>
-          <a:lstStyle/>
-          <a:p>
-            <a:pPr algn="ctr"/>
-          </a:p>
-        </p:txBody>
-      </p:sp>
-      <p:sp>
-        <p:nvSpPr>
-          <p:cNvPr id="17" name="Oval 16"/>
-          <p:cNvSpPr/>
-          <p:nvPr/>
-        </p:nvSpPr>
-        <p:spPr>
-          <a:xfrm>
-            <a:off x="914400" y="3520440"/>
-            <a:ext cx="411480" cy="411480"/>
-          </a:xfrm>
-          <a:prstGeom prst="ellipse">
-            <a:avLst/>
-          </a:prstGeom>
-          <a:solidFill>
-            <a:srgbClr val="71D3DC"/>
-          </a:solidFill>
-          <a:ln>
-            <a:noFill/>
-          </a:ln>
-        </p:spPr>
-        <p:style>
-          <a:lnRef idx="1">
-            <a:schemeClr val="accent1"/>
-          </a:lnRef>
-          <a:fillRef idx="3">
-            <a:schemeClr val="accent1"/>
-          </a:fillRef>
-          <a:effectRef idx="2">
-            <a:schemeClr val="accent1"/>
-          </a:effectRef>
-          <a:fontRef idx="minor">
-            <a:schemeClr val="lt1"/>
-          </a:fontRef>
-        </p:style>
-        <p:txBody>
-          <a:bodyPr rtlCol="0" anchor="ctr"/>
-          <a:lstStyle/>
-          <a:p>
-            <a:pPr algn="ctr"/>
-          </a:p>
-        </p:txBody>
-      </p:sp>
-      <p:sp>
-        <p:nvSpPr>
-          <p:cNvPr id="18" name="TextBox 17"/>
-          <p:cNvSpPr txBox="1"/>
-          <p:nvPr/>
-        </p:nvSpPr>
-        <p:spPr>
-          <a:xfrm>
-            <a:off x="914400" y="3520440"/>
-            <a:ext cx="411480" cy="411480"/>
-          </a:xfrm>
-          <a:prstGeom prst="rect">
-            <a:avLst/>
-          </a:prstGeom>
-          <a:noFill/>
-        </p:spPr>
-        <p:txBody>
-          <a:bodyPr wrap="square" lIns="73152" rIns="73152" tIns="36576" bIns="36576" anchor="ctr">
-            <a:spAutoFit/>
-          </a:bodyPr>
-          <a:lstStyle/>
-          <a:p>
-            <a:pPr algn="ctr">
-              <a:lnSpc>
-                <a:spcPts val="1600"/>
-              </a:lnSpc>
-            </a:pPr>
-            <a:r>
-              <a:rPr sz="1300" b="1" i="0">
-                <a:solidFill>
-                  <a:srgbClr val="FFFFFF"/>
-                </a:solidFill>
-                <a:latin typeface="Segoe UI"/>
-              </a:rPr>
-              <a:t>03</a:t>
-            </a:r>
-          </a:p>
-        </p:txBody>
-      </p:sp>
-      <p:sp>
-        <p:nvSpPr>
-          <p:cNvPr id="19" name="TextBox 18"/>
-          <p:cNvSpPr txBox="1"/>
-          <p:nvPr/>
-        </p:nvSpPr>
-        <p:spPr>
-          <a:xfrm>
-            <a:off x="1554480" y="3456432"/>
-            <a:ext cx="9601200" cy="768096"/>
-          </a:xfrm>
-          <a:prstGeom prst="rect">
-            <a:avLst/>
-          </a:prstGeom>
-          <a:noFill/>
-        </p:spPr>
-        <p:txBody>
-          <a:bodyPr wrap="square" lIns="73152" rIns="73152" tIns="36576" bIns="36576" anchor="ctr">
-            <a:spAutoFit/>
-          </a:bodyPr>
-          <a:lstStyle/>
-          <a:p>
-            <a:pPr algn="l">
-              <a:lnSpc>
-                <a:spcPts val="2000"/>
-              </a:lnSpc>
-            </a:pPr>
-            <a:r>
-              <a:rPr sz="1600" b="0" i="0">
+              <a:t>16s End-to-end single-query full-scan</a:t>
+            </a:r>
+          </a:p>
+          <a:p>
+            <a:pPr>
+              <a:lnSpc>
+                <a:spcPts val="2500"/>
+              </a:lnSpc>
+              <a:spcAft>
+                <a:spcPts val="1000"/>
+              </a:spcAft>
+            </a:pPr>
+            <a:r>
+              <a:rPr sz="800">
+                <a:solidFill>
+                  <a:srgbClr val="29B5E8"/>
+                </a:solidFill>
+                <a:latin typeface="Segoe UI"/>
+              </a:rPr>
+              <a:t>●  </a:t>
+            </a:r>
+            <a:r>
+              <a:rPr sz="1600">
                 <a:solidFill>
                   <a:srgbClr val="2C3E50"/>
                 </a:solidFill>
                 <a:latin typeface="Segoe UI"/>
               </a:rPr>
-              <a:t>Snowflake Docs — docs.snowflake.com/en/user-guide/cleanrooms/v2/about</a:t>
-            </a:r>
-          </a:p>
-        </p:txBody>
-      </p:sp>
-      <p:sp>
-        <p:nvSpPr>
-          <p:cNvPr id="20" name="Rounded Rectangle 19"/>
-          <p:cNvSpPr/>
-          <p:nvPr/>
-        </p:nvSpPr>
-        <p:spPr>
-          <a:xfrm>
-            <a:off x="640080" y="4297680"/>
-            <a:ext cx="10911535" cy="804672"/>
-          </a:xfrm>
-          <a:prstGeom prst="roundRect">
-            <a:avLst/>
-          </a:prstGeom>
-          <a:solidFill>
-            <a:srgbClr val="F4F8FB"/>
-          </a:solidFill>
-          <a:ln>
-            <a:noFill/>
-          </a:ln>
-        </p:spPr>
-        <p:style>
-          <a:lnRef idx="1">
-            <a:schemeClr val="accent1"/>
-          </a:lnRef>
-          <a:fillRef idx="3">
-            <a:schemeClr val="accent1"/>
-          </a:fillRef>
-          <a:effectRef idx="2">
-            <a:schemeClr val="accent1"/>
-          </a:effectRef>
-          <a:fontRef idx="minor">
-            <a:schemeClr val="lt1"/>
-          </a:fontRef>
-        </p:style>
-        <p:txBody>
-          <a:bodyPr rtlCol="0" anchor="ctr"/>
-          <a:lstStyle/>
-          <a:p>
-            <a:pPr algn="ctr"/>
-          </a:p>
-        </p:txBody>
-      </p:sp>
-      <p:sp>
-        <p:nvSpPr>
-          <p:cNvPr id="21" name="Oval 20"/>
-          <p:cNvSpPr/>
-          <p:nvPr/>
-        </p:nvSpPr>
-        <p:spPr>
-          <a:xfrm>
-            <a:off x="914400" y="4434840"/>
-            <a:ext cx="411480" cy="411480"/>
-          </a:xfrm>
-          <a:prstGeom prst="ellipse">
-            <a:avLst/>
-          </a:prstGeom>
-          <a:solidFill>
-            <a:srgbClr val="FF9F36"/>
-          </a:solidFill>
-          <a:ln>
-            <a:noFill/>
-          </a:ln>
-        </p:spPr>
-        <p:style>
-          <a:lnRef idx="1">
-            <a:schemeClr val="accent1"/>
-          </a:lnRef>
-          <a:fillRef idx="3">
-            <a:schemeClr val="accent1"/>
-          </a:fillRef>
-          <a:effectRef idx="2">
-            <a:schemeClr val="accent1"/>
-          </a:effectRef>
-          <a:fontRef idx="minor">
-            <a:schemeClr val="lt1"/>
-          </a:fontRef>
-        </p:style>
-        <p:txBody>
-          <a:bodyPr rtlCol="0" anchor="ctr"/>
-          <a:lstStyle/>
-          <a:p>
-            <a:pPr algn="ctr"/>
-          </a:p>
-        </p:txBody>
-      </p:sp>
-      <p:sp>
-        <p:nvSpPr>
-          <p:cNvPr id="22" name="TextBox 21"/>
-          <p:cNvSpPr txBox="1"/>
-          <p:nvPr/>
-        </p:nvSpPr>
-        <p:spPr>
-          <a:xfrm>
-            <a:off x="914400" y="4434840"/>
-            <a:ext cx="411480" cy="411480"/>
-          </a:xfrm>
-          <a:prstGeom prst="rect">
-            <a:avLst/>
-          </a:prstGeom>
-          <a:noFill/>
-        </p:spPr>
-        <p:txBody>
-          <a:bodyPr wrap="square" lIns="73152" rIns="73152" tIns="36576" bIns="36576" anchor="ctr">
-            <a:spAutoFit/>
-          </a:bodyPr>
-          <a:lstStyle/>
-          <a:p>
-            <a:pPr algn="ctr">
-              <a:lnSpc>
-                <a:spcPts val="1600"/>
-              </a:lnSpc>
-            </a:pPr>
-            <a:r>
-              <a:rPr sz="1300" b="1" i="0">
-                <a:solidFill>
-                  <a:srgbClr val="FFFFFF"/>
-                </a:solidFill>
-                <a:latin typeface="Segoe UI"/>
-              </a:rPr>
-              <a:t>04</a:t>
-            </a:r>
-          </a:p>
-        </p:txBody>
-      </p:sp>
-      <p:sp>
-        <p:nvSpPr>
-          <p:cNvPr id="23" name="TextBox 22"/>
-          <p:cNvSpPr txBox="1"/>
-          <p:nvPr/>
-        </p:nvSpPr>
-        <p:spPr>
-          <a:xfrm>
-            <a:off x="1554480" y="4370832"/>
-            <a:ext cx="9601200" cy="768096"/>
-          </a:xfrm>
-          <a:prstGeom prst="rect">
-            <a:avLst/>
-          </a:prstGeom>
-          <a:noFill/>
-        </p:spPr>
-        <p:txBody>
-          <a:bodyPr wrap="square" lIns="73152" rIns="73152" tIns="36576" bIns="36576" anchor="ctr">
-            <a:spAutoFit/>
-          </a:bodyPr>
-          <a:lstStyle/>
-          <a:p>
-            <a:pPr algn="l">
-              <a:lnSpc>
-                <a:spcPts val="2000"/>
-              </a:lnSpc>
-            </a:pPr>
-            <a:r>
-              <a:rPr sz="1600" b="0" i="0">
+              <a:t>0.61</a:t>
+            </a:r>
+          </a:p>
+          <a:p>
+            <a:pPr>
+              <a:lnSpc>
+                <a:spcPts val="2500"/>
+              </a:lnSpc>
+              <a:spcAft>
+                <a:spcPts val="1000"/>
+              </a:spcAft>
+            </a:pPr>
+            <a:r>
+              <a:rPr sz="800">
+                <a:solidFill>
+                  <a:srgbClr val="29B5E8"/>
+                </a:solidFill>
+                <a:latin typeface="Segoe UI"/>
+              </a:rPr>
+              <a:t>●  </a:t>
+            </a:r>
+            <a:r>
+              <a:rPr sz="1600">
                 <a:solidFill>
                   <a:srgbClr val="2C3E50"/>
                 </a:solidFill>
                 <a:latin typeface="Segoe UI"/>
               </a:rPr>
-              <a:t>Spec Reference — docs.snowflake.com/en/user-guide/cleanrooms/v2/spec-reference</a:t>
-            </a:r>
-          </a:p>
-        </p:txBody>
-      </p:sp>
-      <p:sp>
-        <p:nvSpPr>
-          <p:cNvPr id="24" name="Rounded Rectangle 23"/>
-          <p:cNvSpPr/>
-          <p:nvPr/>
-        </p:nvSpPr>
-        <p:spPr>
-          <a:xfrm>
-            <a:off x="640080" y="5212080"/>
-            <a:ext cx="10911535" cy="804672"/>
-          </a:xfrm>
-          <a:prstGeom prst="roundRect">
-            <a:avLst/>
-          </a:prstGeom>
-          <a:solidFill>
-            <a:srgbClr val="EEF5FA"/>
-          </a:solidFill>
-          <a:ln>
-            <a:noFill/>
-          </a:ln>
-        </p:spPr>
-        <p:style>
-          <a:lnRef idx="1">
-            <a:schemeClr val="accent1"/>
-          </a:lnRef>
-          <a:fillRef idx="3">
-            <a:schemeClr val="accent1"/>
-          </a:fillRef>
-          <a:effectRef idx="2">
-            <a:schemeClr val="accent1"/>
-          </a:effectRef>
-          <a:fontRef idx="minor">
-            <a:schemeClr val="lt1"/>
-          </a:fontRef>
-        </p:style>
-        <p:txBody>
-          <a:bodyPr rtlCol="0" anchor="ctr"/>
-          <a:lstStyle/>
-          <a:p>
-            <a:pPr algn="ctr"/>
-          </a:p>
-        </p:txBody>
-      </p:sp>
-      <p:sp>
-        <p:nvSpPr>
-          <p:cNvPr id="25" name="Oval 24"/>
-          <p:cNvSpPr/>
-          <p:nvPr/>
-        </p:nvSpPr>
-        <p:spPr>
-          <a:xfrm>
-            <a:off x="914400" y="5349240"/>
-            <a:ext cx="411480" cy="411480"/>
-          </a:xfrm>
-          <a:prstGeom prst="ellipse">
-            <a:avLst/>
-          </a:prstGeom>
-          <a:solidFill>
-            <a:srgbClr val="29B5E8"/>
-          </a:solidFill>
-          <a:ln>
-            <a:noFill/>
-          </a:ln>
-        </p:spPr>
-        <p:style>
-          <a:lnRef idx="1">
-            <a:schemeClr val="accent1"/>
-          </a:lnRef>
-          <a:fillRef idx="3">
-            <a:schemeClr val="accent1"/>
-          </a:fillRef>
-          <a:effectRef idx="2">
-            <a:schemeClr val="accent1"/>
-          </a:effectRef>
-          <a:fontRef idx="minor">
-            <a:schemeClr val="lt1"/>
-          </a:fontRef>
-        </p:style>
-        <p:txBody>
-          <a:bodyPr rtlCol="0" anchor="ctr"/>
-          <a:lstStyle/>
-          <a:p>
-            <a:pPr algn="ctr"/>
-          </a:p>
-        </p:txBody>
-      </p:sp>
-      <p:sp>
-        <p:nvSpPr>
-          <p:cNvPr id="26" name="TextBox 25"/>
-          <p:cNvSpPr txBox="1"/>
-          <p:nvPr/>
-        </p:nvSpPr>
-        <p:spPr>
-          <a:xfrm>
-            <a:off x="914400" y="5349240"/>
-            <a:ext cx="411480" cy="411480"/>
-          </a:xfrm>
-          <a:prstGeom prst="rect">
-            <a:avLst/>
-          </a:prstGeom>
-          <a:noFill/>
-        </p:spPr>
-        <p:txBody>
-          <a:bodyPr wrap="square" lIns="73152" rIns="73152" tIns="36576" bIns="36576" anchor="ctr">
-            <a:spAutoFit/>
-          </a:bodyPr>
-          <a:lstStyle/>
-          <a:p>
-            <a:pPr algn="ctr">
-              <a:lnSpc>
-                <a:spcPts val="1600"/>
-              </a:lnSpc>
-            </a:pPr>
-            <a:r>
-              <a:rPr sz="1300" b="1" i="0">
-                <a:solidFill>
-                  <a:srgbClr val="FFFFFF"/>
-                </a:solidFill>
-                <a:latin typeface="Segoe UI"/>
-              </a:rPr>
-              <a:t>05</a:t>
-            </a:r>
-          </a:p>
-        </p:txBody>
-      </p:sp>
-      <p:sp>
-        <p:nvSpPr>
-          <p:cNvPr id="27" name="TextBox 26"/>
-          <p:cNvSpPr txBox="1"/>
-          <p:nvPr/>
-        </p:nvSpPr>
-        <p:spPr>
-          <a:xfrm>
-            <a:off x="1554480" y="5285232"/>
-            <a:ext cx="9601200" cy="768096"/>
-          </a:xfrm>
-          <a:prstGeom prst="rect">
-            <a:avLst/>
-          </a:prstGeom>
-          <a:noFill/>
-        </p:spPr>
-        <p:txBody>
-          <a:bodyPr wrap="square" lIns="73152" rIns="73152" tIns="36576" bIns="36576" anchor="ctr">
-            <a:spAutoFit/>
-          </a:bodyPr>
-          <a:lstStyle/>
-          <a:p>
-            <a:pPr algn="l">
-              <a:lnSpc>
-                <a:spcPts val="2000"/>
-              </a:lnSpc>
-            </a:pPr>
-            <a:r>
-              <a:rPr sz="1600" b="0" i="0">
+              <a:t>Credits per run (80% cheaper than loop)</a:t>
+            </a:r>
+          </a:p>
+          <a:p>
+            <a:pPr>
+              <a:lnSpc>
+                <a:spcPts val="2500"/>
+              </a:lnSpc>
+              <a:spcAft>
+                <a:spcPts val="1000"/>
+              </a:spcAft>
+            </a:pPr>
+            <a:r>
+              <a:rPr sz="800">
+                <a:solidFill>
+                  <a:srgbClr val="29B5E8"/>
+                </a:solidFill>
+                <a:latin typeface="Segoe UI"/>
+              </a:rPr>
+              <a:t>●  </a:t>
+            </a:r>
+            <a:r>
+              <a:rPr sz="1600">
                 <a:solidFill>
                   <a:srgbClr val="2C3E50"/>
                 </a:solidFill>
                 <a:latin typeface="Segoe UI"/>
               </a:rPr>
-              <a:t>API Reference — docs.snowflake.com/en/user-guide/cleanrooms/v2/v2-api-reference</a:t>
-            </a:r>
-          </a:p>
-        </p:txBody>
-      </p:sp>
-      <p:sp>
-        <p:nvSpPr>
-          <p:cNvPr id="28" name="TextBox 27"/>
+              <a:t>1.2B</a:t>
+            </a:r>
+          </a:p>
+          <a:p>
+            <a:pPr>
+              <a:lnSpc>
+                <a:spcPts val="2500"/>
+              </a:lnSpc>
+              <a:spcAft>
+                <a:spcPts val="1000"/>
+              </a:spcAft>
+            </a:pPr>
+            <a:r>
+              <a:rPr sz="800">
+                <a:solidFill>
+                  <a:srgbClr val="29B5E8"/>
+                </a:solidFill>
+                <a:latin typeface="Segoe UI"/>
+              </a:rPr>
+              <a:t>●  </a:t>
+            </a:r>
+            <a:r>
+              <a:rPr sz="1600">
+                <a:solidFill>
+                  <a:srgbClr val="2C3E50"/>
+                </a:solidFill>
+                <a:latin typeface="Segoe UI"/>
+              </a:rPr>
+              <a:t>Provider rows fully scanned in 1 query</a:t>
+            </a:r>
+          </a:p>
+          <a:p>
+            <a:pPr>
+              <a:lnSpc>
+                <a:spcPts val="2500"/>
+              </a:lnSpc>
+              <a:spcAft>
+                <a:spcPts val="1000"/>
+              </a:spcAft>
+            </a:pPr>
+            <a:r>
+              <a:rPr sz="800">
+                <a:solidFill>
+                  <a:srgbClr val="29B5E8"/>
+                </a:solidFill>
+                <a:latin typeface="Segoe UI"/>
+              </a:rPr>
+              <a:t>●  </a:t>
+            </a:r>
+            <a:r>
+              <a:rPr sz="1600">
+                <a:solidFill>
+                  <a:srgbClr val="2C3E50"/>
+                </a:solidFill>
+                <a:latin typeface="Segoe UI"/>
+              </a:rPr>
+              <a:t>3.37M</a:t>
+            </a:r>
+          </a:p>
+          <a:p>
+            <a:pPr>
+              <a:lnSpc>
+                <a:spcPts val="2500"/>
+              </a:lnSpc>
+              <a:spcAft>
+                <a:spcPts val="1000"/>
+              </a:spcAft>
+            </a:pPr>
+            <a:r>
+              <a:rPr sz="800">
+                <a:solidFill>
+                  <a:srgbClr val="29B5E8"/>
+                </a:solidFill>
+                <a:latin typeface="Segoe UI"/>
+              </a:rPr>
+              <a:t>●  </a:t>
+            </a:r>
+            <a:r>
+              <a:rPr sz="1600">
+                <a:solidFill>
+                  <a:srgbClr val="2C3E50"/>
+                </a:solidFill>
+                <a:latin typeface="Segoe UI"/>
+              </a:rPr>
+              <a:t>Unique audience tuples (identical in both modes)</a:t>
+            </a:r>
+          </a:p>
+        </p:txBody>
+      </p:sp>
+      <p:sp>
+        <p:nvSpPr>
+          <p:cNvPr id="9" name="TextBox 8"/>
           <p:cNvSpPr txBox="1"/>
           <p:nvPr/>
         </p:nvSpPr>
@@ -47331,7 +47266,7 @@
                 </a:solidFill>
                 <a:latin typeface="Segoe UI"/>
               </a:rPr>
-              <a:t>DCR Collaboration API v2 | SFSEAPAC | 2026   ·   58 / 60</a:t>
+              <a:t>DCR Collaboration API v2 | SFSEAPAC | 2026   ·   58 / 61</a:t>
             </a:r>
           </a:p>
         </p:txBody>
@@ -47350,7 +47285,7 @@
     <p:bg>
       <p:bgPr>
         <a:solidFill>
-          <a:srgbClr val="0D1B2A"/>
+          <a:srgbClr val="FFFFFF"/>
         </a:solidFill>
         <a:effectLst/>
       </p:bgPr>
@@ -47370,14 +47305,14 @@
         </p:nvSpPr>
         <p:spPr>
           <a:xfrm>
-            <a:off x="9905695" y="-731520"/>
-            <a:ext cx="2743200" cy="2743200"/>
+            <a:off x="9631375" y="-914400"/>
+            <a:ext cx="3200400" cy="3200400"/>
           </a:xfrm>
           <a:prstGeom prst="ellipse">
             <a:avLst/>
           </a:prstGeom>
           <a:solidFill>
-            <a:srgbClr val="223850"/>
+            <a:srgbClr val="D6EFF8"/>
           </a:solidFill>
           <a:ln>
             <a:noFill/>
@@ -47413,14 +47348,14 @@
         </p:nvSpPr>
         <p:spPr>
           <a:xfrm>
-            <a:off x="8076895" y="5486400"/>
+            <a:off x="-640080" y="5029200"/>
             <a:ext cx="1828800" cy="1828800"/>
           </a:xfrm>
           <a:prstGeom prst="ellipse">
             <a:avLst/>
           </a:prstGeom>
           <a:solidFill>
-            <a:srgbClr val="1F344C"/>
+            <a:srgbClr val="E8F4FD"/>
           </a:solidFill>
           <a:ln>
             <a:noFill/>
@@ -47448,103 +47383,9 @@
           </a:p>
         </p:txBody>
       </p:sp>
-      <p:sp>
-        <p:nvSpPr>
-          <p:cNvPr id="4" name="Oval 3"/>
-          <p:cNvSpPr/>
-          <p:nvPr/>
-        </p:nvSpPr>
-        <p:spPr>
-          <a:xfrm>
-            <a:off x="-457200" y="4572000"/>
-            <a:ext cx="1371600" cy="1371600"/>
-          </a:xfrm>
-          <a:prstGeom prst="ellipse">
-            <a:avLst/>
-          </a:prstGeom>
-          <a:solidFill>
-            <a:srgbClr val="20354D"/>
-          </a:solidFill>
-          <a:ln>
-            <a:noFill/>
-          </a:ln>
-        </p:spPr>
-        <p:style>
-          <a:lnRef idx="1">
-            <a:schemeClr val="accent1"/>
-          </a:lnRef>
-          <a:fillRef idx="3">
-            <a:schemeClr val="accent1"/>
-          </a:fillRef>
-          <a:effectRef idx="2">
-            <a:schemeClr val="accent1"/>
-          </a:effectRef>
-          <a:fontRef idx="minor">
-            <a:schemeClr val="lt1"/>
-          </a:fontRef>
-        </p:style>
-        <p:txBody>
-          <a:bodyPr rtlCol="0" anchor="ctr"/>
-          <a:lstStyle/>
-          <a:p>
-            <a:pPr algn="ctr"/>
-          </a:p>
-        </p:txBody>
-      </p:sp>
-      <p:sp>
-        <p:nvSpPr>
-          <p:cNvPr id="5" name="Rectangle 4"/>
-          <p:cNvSpPr/>
-          <p:nvPr/>
-        </p:nvSpPr>
-        <p:spPr>
-          <a:xfrm>
-            <a:off x="0" y="0"/>
-            <a:ext cx="12191695" cy="54864"/>
-          </a:xfrm>
-          <a:prstGeom prst="rect">
-            <a:avLst/>
-          </a:prstGeom>
-          <a:gradFill rotWithShape="1">
-            <a:gsLst>
-              <a:gs pos="0">
-                <a:srgbClr val="29B5E8"/>
-              </a:gs>
-              <a:gs pos="100000">
-                <a:srgbClr val="71D3DC"/>
-              </a:gs>
-            </a:gsLst>
-            <a:lin scaled="0" ang="16200000"/>
-          </a:gradFill>
-          <a:ln>
-            <a:noFill/>
-          </a:ln>
-        </p:spPr>
-        <p:style>
-          <a:lnRef idx="1">
-            <a:schemeClr val="accent1"/>
-          </a:lnRef>
-          <a:fillRef idx="3">
-            <a:schemeClr val="accent1"/>
-          </a:fillRef>
-          <a:effectRef idx="2">
-            <a:schemeClr val="accent1"/>
-          </a:effectRef>
-          <a:fontRef idx="minor">
-            <a:schemeClr val="lt1"/>
-          </a:fontRef>
-        </p:style>
-        <p:txBody>
-          <a:bodyPr rtlCol="0" anchor="ctr"/>
-          <a:lstStyle/>
-          <a:p>
-            <a:pPr algn="ctr"/>
-          </a:p>
-        </p:txBody>
-      </p:sp>
       <p:pic>
         <p:nvPicPr>
-          <p:cNvPr id="6" name="Picture 5" descr="snowflake_icon_white.png"/>
+          <p:cNvPr id="4" name="Picture 3" descr="snowflake_icon_blue.png"/>
           <p:cNvPicPr>
             <a:picLocks noChangeAspect="1"/>
           </p:cNvPicPr>
@@ -47558,8 +47399,8 @@
         </p:blipFill>
         <p:spPr>
           <a:xfrm>
-            <a:off x="11368735" y="320040"/>
-            <a:ext cx="399301" cy="365760"/>
+            <a:off x="11414455" y="320040"/>
+            <a:ext cx="349389" cy="320040"/>
           </a:xfrm>
           <a:prstGeom prst="rect">
             <a:avLst/>
@@ -47568,135 +47409,14 @@
       </p:pic>
       <p:sp>
         <p:nvSpPr>
-          <p:cNvPr id="7" name="Oval 6"/>
+          <p:cNvPr id="5" name="Rectangle 4"/>
           <p:cNvSpPr/>
           <p:nvPr/>
         </p:nvSpPr>
         <p:spPr>
           <a:xfrm>
-            <a:off x="914400" y="1371600"/>
-            <a:ext cx="1097280" cy="1097280"/>
-          </a:xfrm>
-          <a:prstGeom prst="ellipse">
-            <a:avLst/>
-          </a:prstGeom>
-          <a:solidFill>
-            <a:srgbClr val="15283C"/>
-          </a:solidFill>
-          <a:ln>
-            <a:noFill/>
-          </a:ln>
-        </p:spPr>
-        <p:style>
-          <a:lnRef idx="1">
-            <a:schemeClr val="accent1"/>
-          </a:lnRef>
-          <a:fillRef idx="3">
-            <a:schemeClr val="accent1"/>
-          </a:fillRef>
-          <a:effectRef idx="2">
-            <a:schemeClr val="accent1"/>
-          </a:effectRef>
-          <a:fontRef idx="minor">
-            <a:schemeClr val="lt1"/>
-          </a:fontRef>
-        </p:style>
-        <p:txBody>
-          <a:bodyPr rtlCol="0" anchor="ctr"/>
-          <a:lstStyle/>
-          <a:p>
-            <a:pPr algn="ctr"/>
-          </a:p>
-        </p:txBody>
-      </p:sp>
-      <p:sp>
-        <p:nvSpPr>
-          <p:cNvPr id="8" name="TextBox 7"/>
-          <p:cNvSpPr txBox="1"/>
-          <p:nvPr/>
-        </p:nvSpPr>
-        <p:spPr>
-          <a:xfrm>
-            <a:off x="777240" y="1005840"/>
-            <a:ext cx="1371600" cy="1645920"/>
-          </a:xfrm>
-          <a:prstGeom prst="rect">
-            <a:avLst/>
-          </a:prstGeom>
-          <a:noFill/>
-        </p:spPr>
-        <p:txBody>
-          <a:bodyPr wrap="square" lIns="73152" rIns="73152" tIns="36576" bIns="36576" anchor="t">
-            <a:spAutoFit/>
-          </a:bodyPr>
-          <a:lstStyle/>
-          <a:p>
-            <a:pPr algn="l">
-              <a:lnSpc>
-                <a:spcPts val="15600"/>
-              </a:lnSpc>
-            </a:pPr>
-            <a:r>
-              <a:rPr sz="12000" b="0" i="0">
-                <a:solidFill>
-                  <a:srgbClr val="29B5E8"/>
-                </a:solidFill>
-                <a:latin typeface="Georgia"/>
-              </a:rPr>
-              <a:t>“</a:t>
-            </a:r>
-          </a:p>
-        </p:txBody>
-      </p:sp>
-      <p:sp>
-        <p:nvSpPr>
-          <p:cNvPr id="9" name="TextBox 8"/>
-          <p:cNvSpPr txBox="1"/>
-          <p:nvPr/>
-        </p:nvSpPr>
-        <p:spPr>
-          <a:xfrm>
-            <a:off x="1371600" y="2560320"/>
-            <a:ext cx="9601200" cy="2560320"/>
-          </a:xfrm>
-          <a:prstGeom prst="rect">
-            <a:avLst/>
-          </a:prstGeom>
-          <a:noFill/>
-        </p:spPr>
-        <p:txBody>
-          <a:bodyPr wrap="square" lIns="73152" rIns="73152" tIns="36576" bIns="36576" anchor="t">
-            <a:spAutoFit/>
-          </a:bodyPr>
-          <a:lstStyle/>
-          <a:p>
-            <a:pPr algn="l">
-              <a:lnSpc>
-                <a:spcPts val="3900"/>
-              </a:lnSpc>
-            </a:pPr>
-            <a:r>
-              <a:rPr sz="2600" b="0" i="1">
-                <a:solidFill>
-                  <a:srgbClr val="FFFFFF"/>
-                </a:solidFill>
-                <a:latin typeface="Georgia"/>
-              </a:rPr>
-              <a:t>1.2B rows joined with 8M in 2 minutes 16 seconds, 0.61 credits, single query, zero raw data exchange — this is the future of secure multi-party analytics.</a:t>
-            </a:r>
-          </a:p>
-        </p:txBody>
-      </p:sp>
-      <p:sp>
-        <p:nvSpPr>
-          <p:cNvPr id="10" name="Rectangle 9"/>
-          <p:cNvSpPr/>
-          <p:nvPr/>
-        </p:nvSpPr>
-        <p:spPr>
-          <a:xfrm>
-            <a:off x="1371600" y="5394960"/>
-            <a:ext cx="731520" cy="36576"/>
+            <a:off x="548640" y="457200"/>
+            <a:ext cx="54864" cy="502920"/>
           </a:xfrm>
           <a:prstGeom prst="rect">
             <a:avLst/>
@@ -47732,14 +47452,14 @@
       </p:sp>
       <p:sp>
         <p:nvSpPr>
-          <p:cNvPr id="11" name="TextBox 10"/>
+          <p:cNvPr id="6" name="TextBox 5"/>
           <p:cNvSpPr txBox="1"/>
           <p:nvPr/>
         </p:nvSpPr>
         <p:spPr>
           <a:xfrm>
-            <a:off x="1371600" y="5577840"/>
-            <a:ext cx="7315200" cy="365760"/>
+            <a:off x="777240" y="411480"/>
+            <a:ext cx="10058400" cy="640080"/>
           </a:xfrm>
           <a:prstGeom prst="rect">
             <a:avLst/>
@@ -47754,17 +47474,911 @@
           <a:p>
             <a:pPr algn="l">
               <a:lnSpc>
-                <a:spcPts val="1800"/>
-              </a:lnSpc>
-            </a:pPr>
-            <a:r>
-              <a:rPr sz="1400" b="1" i="0">
-                <a:solidFill>
-                  <a:srgbClr val="71D3DC"/>
-                </a:solidFill>
-                <a:latin typeface="Segoe UI"/>
-              </a:rPr>
-              <a:t>DCR Single-Query Benchmark</a:t>
+                <a:spcPts val="3900"/>
+              </a:lnSpc>
+            </a:pPr>
+            <a:r>
+              <a:rPr sz="3000" b="1" i="0">
+                <a:solidFill>
+                  <a:srgbClr val="1B2A3D"/>
+                </a:solidFill>
+                <a:latin typeface="Calibri Light"/>
+              </a:rPr>
+              <a:t>References &amp; Code Repository</a:t>
+            </a:r>
+          </a:p>
+        </p:txBody>
+      </p:sp>
+      <p:cxnSp>
+        <p:nvCxnSpPr>
+          <p:cNvPr id="7" name="Connector 6"/>
+          <p:cNvCxnSpPr/>
+          <p:nvPr/>
+        </p:nvCxnSpPr>
+        <p:spPr>
+          <a:xfrm>
+            <a:off x="548640" y="1234440"/>
+            <a:ext cx="11094415" cy="0"/>
+          </a:xfrm>
+          <a:prstGeom prst="line">
+            <a:avLst/>
+          </a:prstGeom>
+          <a:ln w="12700">
+            <a:solidFill>
+              <a:srgbClr val="DEE3EA"/>
+            </a:solidFill>
+          </a:ln>
+        </p:spPr>
+        <p:style>
+          <a:lnRef idx="2">
+            <a:schemeClr val="accent1"/>
+          </a:lnRef>
+          <a:fillRef idx="0">
+            <a:schemeClr val="accent1"/>
+          </a:fillRef>
+          <a:effectRef idx="1">
+            <a:schemeClr val="accent1"/>
+          </a:effectRef>
+          <a:fontRef idx="minor">
+            <a:schemeClr val="tx1"/>
+          </a:fontRef>
+        </p:style>
+      </p:cxnSp>
+      <p:sp>
+        <p:nvSpPr>
+          <p:cNvPr id="8" name="Rounded Rectangle 7"/>
+          <p:cNvSpPr/>
+          <p:nvPr/>
+        </p:nvSpPr>
+        <p:spPr>
+          <a:xfrm>
+            <a:off x="640080" y="1554480"/>
+            <a:ext cx="10911535" cy="804672"/>
+          </a:xfrm>
+          <a:prstGeom prst="roundRect">
+            <a:avLst/>
+          </a:prstGeom>
+          <a:solidFill>
+            <a:srgbClr val="EEF5FA"/>
+          </a:solidFill>
+          <a:ln>
+            <a:noFill/>
+          </a:ln>
+        </p:spPr>
+        <p:style>
+          <a:lnRef idx="1">
+            <a:schemeClr val="accent1"/>
+          </a:lnRef>
+          <a:fillRef idx="3">
+            <a:schemeClr val="accent1"/>
+          </a:fillRef>
+          <a:effectRef idx="2">
+            <a:schemeClr val="accent1"/>
+          </a:effectRef>
+          <a:fontRef idx="minor">
+            <a:schemeClr val="lt1"/>
+          </a:fontRef>
+        </p:style>
+        <p:txBody>
+          <a:bodyPr rtlCol="0" anchor="ctr"/>
+          <a:lstStyle/>
+          <a:p>
+            <a:pPr algn="ctr"/>
+          </a:p>
+        </p:txBody>
+      </p:sp>
+      <p:sp>
+        <p:nvSpPr>
+          <p:cNvPr id="9" name="Oval 8"/>
+          <p:cNvSpPr/>
+          <p:nvPr/>
+        </p:nvSpPr>
+        <p:spPr>
+          <a:xfrm>
+            <a:off x="914400" y="1691640"/>
+            <a:ext cx="411480" cy="411480"/>
+          </a:xfrm>
+          <a:prstGeom prst="ellipse">
+            <a:avLst/>
+          </a:prstGeom>
+          <a:solidFill>
+            <a:srgbClr val="29B5E8"/>
+          </a:solidFill>
+          <a:ln>
+            <a:noFill/>
+          </a:ln>
+        </p:spPr>
+        <p:style>
+          <a:lnRef idx="1">
+            <a:schemeClr val="accent1"/>
+          </a:lnRef>
+          <a:fillRef idx="3">
+            <a:schemeClr val="accent1"/>
+          </a:fillRef>
+          <a:effectRef idx="2">
+            <a:schemeClr val="accent1"/>
+          </a:effectRef>
+          <a:fontRef idx="minor">
+            <a:schemeClr val="lt1"/>
+          </a:fontRef>
+        </p:style>
+        <p:txBody>
+          <a:bodyPr rtlCol="0" anchor="ctr"/>
+          <a:lstStyle/>
+          <a:p>
+            <a:pPr algn="ctr"/>
+          </a:p>
+        </p:txBody>
+      </p:sp>
+      <p:sp>
+        <p:nvSpPr>
+          <p:cNvPr id="10" name="TextBox 9"/>
+          <p:cNvSpPr txBox="1"/>
+          <p:nvPr/>
+        </p:nvSpPr>
+        <p:spPr>
+          <a:xfrm>
+            <a:off x="914400" y="1691640"/>
+            <a:ext cx="411480" cy="411480"/>
+          </a:xfrm>
+          <a:prstGeom prst="rect">
+            <a:avLst/>
+          </a:prstGeom>
+          <a:noFill/>
+        </p:spPr>
+        <p:txBody>
+          <a:bodyPr wrap="square" lIns="73152" rIns="73152" tIns="36576" bIns="36576" anchor="ctr">
+            <a:spAutoFit/>
+          </a:bodyPr>
+          <a:lstStyle/>
+          <a:p>
+            <a:pPr algn="ctr">
+              <a:lnSpc>
+                <a:spcPts val="1600"/>
+              </a:lnSpc>
+            </a:pPr>
+            <a:r>
+              <a:rPr sz="1300" b="1" i="0">
+                <a:solidFill>
+                  <a:srgbClr val="FFFFFF"/>
+                </a:solidFill>
+                <a:latin typeface="Segoe UI"/>
+              </a:rPr>
+              <a:t>01</a:t>
+            </a:r>
+          </a:p>
+        </p:txBody>
+      </p:sp>
+      <p:sp>
+        <p:nvSpPr>
+          <p:cNvPr id="11" name="TextBox 10"/>
+          <p:cNvSpPr txBox="1"/>
+          <p:nvPr/>
+        </p:nvSpPr>
+        <p:spPr>
+          <a:xfrm>
+            <a:off x="1554480" y="1627632"/>
+            <a:ext cx="9601200" cy="768096"/>
+          </a:xfrm>
+          <a:prstGeom prst="rect">
+            <a:avLst/>
+          </a:prstGeom>
+          <a:noFill/>
+        </p:spPr>
+        <p:txBody>
+          <a:bodyPr wrap="square" lIns="73152" rIns="73152" tIns="36576" bIns="36576" anchor="ctr">
+            <a:spAutoFit/>
+          </a:bodyPr>
+          <a:lstStyle/>
+          <a:p>
+            <a:pPr algn="l">
+              <a:lnSpc>
+                <a:spcPts val="2000"/>
+              </a:lnSpc>
+            </a:pPr>
+            <a:r>
+              <a:rPr sz="1600" b="0" i="0">
+                <a:solidFill>
+                  <a:srgbClr val="2C3E50"/>
+                </a:solidFill>
+                <a:latin typeface="Segoe UI"/>
+              </a:rPr>
+              <a:t>GitHub — https://github.com/arzamuhammad/dcr-collaboration-api</a:t>
+            </a:r>
+          </a:p>
+        </p:txBody>
+      </p:sp>
+      <p:sp>
+        <p:nvSpPr>
+          <p:cNvPr id="12" name="Rounded Rectangle 11"/>
+          <p:cNvSpPr/>
+          <p:nvPr/>
+        </p:nvSpPr>
+        <p:spPr>
+          <a:xfrm>
+            <a:off x="640080" y="2468880"/>
+            <a:ext cx="10911535" cy="804672"/>
+          </a:xfrm>
+          <a:prstGeom prst="roundRect">
+            <a:avLst/>
+          </a:prstGeom>
+          <a:solidFill>
+            <a:srgbClr val="F4F8FB"/>
+          </a:solidFill>
+          <a:ln>
+            <a:noFill/>
+          </a:ln>
+        </p:spPr>
+        <p:style>
+          <a:lnRef idx="1">
+            <a:schemeClr val="accent1"/>
+          </a:lnRef>
+          <a:fillRef idx="3">
+            <a:schemeClr val="accent1"/>
+          </a:fillRef>
+          <a:effectRef idx="2">
+            <a:schemeClr val="accent1"/>
+          </a:effectRef>
+          <a:fontRef idx="minor">
+            <a:schemeClr val="lt1"/>
+          </a:fontRef>
+        </p:style>
+        <p:txBody>
+          <a:bodyPr rtlCol="0" anchor="ctr"/>
+          <a:lstStyle/>
+          <a:p>
+            <a:pPr algn="ctr"/>
+          </a:p>
+        </p:txBody>
+      </p:sp>
+      <p:sp>
+        <p:nvSpPr>
+          <p:cNvPr id="13" name="Oval 12"/>
+          <p:cNvSpPr/>
+          <p:nvPr/>
+        </p:nvSpPr>
+        <p:spPr>
+          <a:xfrm>
+            <a:off x="914400" y="2606040"/>
+            <a:ext cx="411480" cy="411480"/>
+          </a:xfrm>
+          <a:prstGeom prst="ellipse">
+            <a:avLst/>
+          </a:prstGeom>
+          <a:solidFill>
+            <a:srgbClr val="11567F"/>
+          </a:solidFill>
+          <a:ln>
+            <a:noFill/>
+          </a:ln>
+        </p:spPr>
+        <p:style>
+          <a:lnRef idx="1">
+            <a:schemeClr val="accent1"/>
+          </a:lnRef>
+          <a:fillRef idx="3">
+            <a:schemeClr val="accent1"/>
+          </a:fillRef>
+          <a:effectRef idx="2">
+            <a:schemeClr val="accent1"/>
+          </a:effectRef>
+          <a:fontRef idx="minor">
+            <a:schemeClr val="lt1"/>
+          </a:fontRef>
+        </p:style>
+        <p:txBody>
+          <a:bodyPr rtlCol="0" anchor="ctr"/>
+          <a:lstStyle/>
+          <a:p>
+            <a:pPr algn="ctr"/>
+          </a:p>
+        </p:txBody>
+      </p:sp>
+      <p:sp>
+        <p:nvSpPr>
+          <p:cNvPr id="14" name="TextBox 13"/>
+          <p:cNvSpPr txBox="1"/>
+          <p:nvPr/>
+        </p:nvSpPr>
+        <p:spPr>
+          <a:xfrm>
+            <a:off x="914400" y="2606040"/>
+            <a:ext cx="411480" cy="411480"/>
+          </a:xfrm>
+          <a:prstGeom prst="rect">
+            <a:avLst/>
+          </a:prstGeom>
+          <a:noFill/>
+        </p:spPr>
+        <p:txBody>
+          <a:bodyPr wrap="square" lIns="73152" rIns="73152" tIns="36576" bIns="36576" anchor="ctr">
+            <a:spAutoFit/>
+          </a:bodyPr>
+          <a:lstStyle/>
+          <a:p>
+            <a:pPr algn="ctr">
+              <a:lnSpc>
+                <a:spcPts val="1600"/>
+              </a:lnSpc>
+            </a:pPr>
+            <a:r>
+              <a:rPr sz="1300" b="1" i="0">
+                <a:solidFill>
+                  <a:srgbClr val="FFFFFF"/>
+                </a:solidFill>
+                <a:latin typeface="Segoe UI"/>
+              </a:rPr>
+              <a:t>02</a:t>
+            </a:r>
+          </a:p>
+        </p:txBody>
+      </p:sp>
+      <p:sp>
+        <p:nvSpPr>
+          <p:cNvPr id="15" name="TextBox 14"/>
+          <p:cNvSpPr txBox="1"/>
+          <p:nvPr/>
+        </p:nvSpPr>
+        <p:spPr>
+          <a:xfrm>
+            <a:off x="1554480" y="2542032"/>
+            <a:ext cx="9601200" cy="768096"/>
+          </a:xfrm>
+          <a:prstGeom prst="rect">
+            <a:avLst/>
+          </a:prstGeom>
+          <a:noFill/>
+        </p:spPr>
+        <p:txBody>
+          <a:bodyPr wrap="square" lIns="73152" rIns="73152" tIns="36576" bIns="36576" anchor="ctr">
+            <a:spAutoFit/>
+          </a:bodyPr>
+          <a:lstStyle/>
+          <a:p>
+            <a:pPr algn="l">
+              <a:lnSpc>
+                <a:spcPts val="2000"/>
+              </a:lnSpc>
+            </a:pPr>
+            <a:r>
+              <a:rPr sz="1600" b="0" i="0">
+                <a:solidFill>
+                  <a:srgbClr val="2C3E50"/>
+                </a:solidFill>
+                <a:latin typeface="Segoe UI"/>
+              </a:rPr>
+              <a:t>Contains — provider_workflow.sql, consumer_workflow.sql, README dengan battle-tested fixes</a:t>
+            </a:r>
+          </a:p>
+        </p:txBody>
+      </p:sp>
+      <p:sp>
+        <p:nvSpPr>
+          <p:cNvPr id="16" name="Rounded Rectangle 15"/>
+          <p:cNvSpPr/>
+          <p:nvPr/>
+        </p:nvSpPr>
+        <p:spPr>
+          <a:xfrm>
+            <a:off x="640080" y="3383280"/>
+            <a:ext cx="10911535" cy="804672"/>
+          </a:xfrm>
+          <a:prstGeom prst="roundRect">
+            <a:avLst/>
+          </a:prstGeom>
+          <a:solidFill>
+            <a:srgbClr val="EEF5FA"/>
+          </a:solidFill>
+          <a:ln>
+            <a:noFill/>
+          </a:ln>
+        </p:spPr>
+        <p:style>
+          <a:lnRef idx="1">
+            <a:schemeClr val="accent1"/>
+          </a:lnRef>
+          <a:fillRef idx="3">
+            <a:schemeClr val="accent1"/>
+          </a:fillRef>
+          <a:effectRef idx="2">
+            <a:schemeClr val="accent1"/>
+          </a:effectRef>
+          <a:fontRef idx="minor">
+            <a:schemeClr val="lt1"/>
+          </a:fontRef>
+        </p:style>
+        <p:txBody>
+          <a:bodyPr rtlCol="0" anchor="ctr"/>
+          <a:lstStyle/>
+          <a:p>
+            <a:pPr algn="ctr"/>
+          </a:p>
+        </p:txBody>
+      </p:sp>
+      <p:sp>
+        <p:nvSpPr>
+          <p:cNvPr id="17" name="Oval 16"/>
+          <p:cNvSpPr/>
+          <p:nvPr/>
+        </p:nvSpPr>
+        <p:spPr>
+          <a:xfrm>
+            <a:off x="914400" y="3520440"/>
+            <a:ext cx="411480" cy="411480"/>
+          </a:xfrm>
+          <a:prstGeom prst="ellipse">
+            <a:avLst/>
+          </a:prstGeom>
+          <a:solidFill>
+            <a:srgbClr val="71D3DC"/>
+          </a:solidFill>
+          <a:ln>
+            <a:noFill/>
+          </a:ln>
+        </p:spPr>
+        <p:style>
+          <a:lnRef idx="1">
+            <a:schemeClr val="accent1"/>
+          </a:lnRef>
+          <a:fillRef idx="3">
+            <a:schemeClr val="accent1"/>
+          </a:fillRef>
+          <a:effectRef idx="2">
+            <a:schemeClr val="accent1"/>
+          </a:effectRef>
+          <a:fontRef idx="minor">
+            <a:schemeClr val="lt1"/>
+          </a:fontRef>
+        </p:style>
+        <p:txBody>
+          <a:bodyPr rtlCol="0" anchor="ctr"/>
+          <a:lstStyle/>
+          <a:p>
+            <a:pPr algn="ctr"/>
+          </a:p>
+        </p:txBody>
+      </p:sp>
+      <p:sp>
+        <p:nvSpPr>
+          <p:cNvPr id="18" name="TextBox 17"/>
+          <p:cNvSpPr txBox="1"/>
+          <p:nvPr/>
+        </p:nvSpPr>
+        <p:spPr>
+          <a:xfrm>
+            <a:off x="914400" y="3520440"/>
+            <a:ext cx="411480" cy="411480"/>
+          </a:xfrm>
+          <a:prstGeom prst="rect">
+            <a:avLst/>
+          </a:prstGeom>
+          <a:noFill/>
+        </p:spPr>
+        <p:txBody>
+          <a:bodyPr wrap="square" lIns="73152" rIns="73152" tIns="36576" bIns="36576" anchor="ctr">
+            <a:spAutoFit/>
+          </a:bodyPr>
+          <a:lstStyle/>
+          <a:p>
+            <a:pPr algn="ctr">
+              <a:lnSpc>
+                <a:spcPts val="1600"/>
+              </a:lnSpc>
+            </a:pPr>
+            <a:r>
+              <a:rPr sz="1300" b="1" i="0">
+                <a:solidFill>
+                  <a:srgbClr val="FFFFFF"/>
+                </a:solidFill>
+                <a:latin typeface="Segoe UI"/>
+              </a:rPr>
+              <a:t>03</a:t>
+            </a:r>
+          </a:p>
+        </p:txBody>
+      </p:sp>
+      <p:sp>
+        <p:nvSpPr>
+          <p:cNvPr id="19" name="TextBox 18"/>
+          <p:cNvSpPr txBox="1"/>
+          <p:nvPr/>
+        </p:nvSpPr>
+        <p:spPr>
+          <a:xfrm>
+            <a:off x="1554480" y="3456432"/>
+            <a:ext cx="9601200" cy="768096"/>
+          </a:xfrm>
+          <a:prstGeom prst="rect">
+            <a:avLst/>
+          </a:prstGeom>
+          <a:noFill/>
+        </p:spPr>
+        <p:txBody>
+          <a:bodyPr wrap="square" lIns="73152" rIns="73152" tIns="36576" bIns="36576" anchor="ctr">
+            <a:spAutoFit/>
+          </a:bodyPr>
+          <a:lstStyle/>
+          <a:p>
+            <a:pPr algn="l">
+              <a:lnSpc>
+                <a:spcPts val="2000"/>
+              </a:lnSpc>
+            </a:pPr>
+            <a:r>
+              <a:rPr sz="1600" b="0" i="0">
+                <a:solidFill>
+                  <a:srgbClr val="2C3E50"/>
+                </a:solidFill>
+                <a:latin typeface="Segoe UI"/>
+              </a:rPr>
+              <a:t>Snowflake Docs — docs.snowflake.com/en/user-guide/cleanrooms/v2/about</a:t>
+            </a:r>
+          </a:p>
+        </p:txBody>
+      </p:sp>
+      <p:sp>
+        <p:nvSpPr>
+          <p:cNvPr id="20" name="Rounded Rectangle 19"/>
+          <p:cNvSpPr/>
+          <p:nvPr/>
+        </p:nvSpPr>
+        <p:spPr>
+          <a:xfrm>
+            <a:off x="640080" y="4297680"/>
+            <a:ext cx="10911535" cy="804672"/>
+          </a:xfrm>
+          <a:prstGeom prst="roundRect">
+            <a:avLst/>
+          </a:prstGeom>
+          <a:solidFill>
+            <a:srgbClr val="F4F8FB"/>
+          </a:solidFill>
+          <a:ln>
+            <a:noFill/>
+          </a:ln>
+        </p:spPr>
+        <p:style>
+          <a:lnRef idx="1">
+            <a:schemeClr val="accent1"/>
+          </a:lnRef>
+          <a:fillRef idx="3">
+            <a:schemeClr val="accent1"/>
+          </a:fillRef>
+          <a:effectRef idx="2">
+            <a:schemeClr val="accent1"/>
+          </a:effectRef>
+          <a:fontRef idx="minor">
+            <a:schemeClr val="lt1"/>
+          </a:fontRef>
+        </p:style>
+        <p:txBody>
+          <a:bodyPr rtlCol="0" anchor="ctr"/>
+          <a:lstStyle/>
+          <a:p>
+            <a:pPr algn="ctr"/>
+          </a:p>
+        </p:txBody>
+      </p:sp>
+      <p:sp>
+        <p:nvSpPr>
+          <p:cNvPr id="21" name="Oval 20"/>
+          <p:cNvSpPr/>
+          <p:nvPr/>
+        </p:nvSpPr>
+        <p:spPr>
+          <a:xfrm>
+            <a:off x="914400" y="4434840"/>
+            <a:ext cx="411480" cy="411480"/>
+          </a:xfrm>
+          <a:prstGeom prst="ellipse">
+            <a:avLst/>
+          </a:prstGeom>
+          <a:solidFill>
+            <a:srgbClr val="FF9F36"/>
+          </a:solidFill>
+          <a:ln>
+            <a:noFill/>
+          </a:ln>
+        </p:spPr>
+        <p:style>
+          <a:lnRef idx="1">
+            <a:schemeClr val="accent1"/>
+          </a:lnRef>
+          <a:fillRef idx="3">
+            <a:schemeClr val="accent1"/>
+          </a:fillRef>
+          <a:effectRef idx="2">
+            <a:schemeClr val="accent1"/>
+          </a:effectRef>
+          <a:fontRef idx="minor">
+            <a:schemeClr val="lt1"/>
+          </a:fontRef>
+        </p:style>
+        <p:txBody>
+          <a:bodyPr rtlCol="0" anchor="ctr"/>
+          <a:lstStyle/>
+          <a:p>
+            <a:pPr algn="ctr"/>
+          </a:p>
+        </p:txBody>
+      </p:sp>
+      <p:sp>
+        <p:nvSpPr>
+          <p:cNvPr id="22" name="TextBox 21"/>
+          <p:cNvSpPr txBox="1"/>
+          <p:nvPr/>
+        </p:nvSpPr>
+        <p:spPr>
+          <a:xfrm>
+            <a:off x="914400" y="4434840"/>
+            <a:ext cx="411480" cy="411480"/>
+          </a:xfrm>
+          <a:prstGeom prst="rect">
+            <a:avLst/>
+          </a:prstGeom>
+          <a:noFill/>
+        </p:spPr>
+        <p:txBody>
+          <a:bodyPr wrap="square" lIns="73152" rIns="73152" tIns="36576" bIns="36576" anchor="ctr">
+            <a:spAutoFit/>
+          </a:bodyPr>
+          <a:lstStyle/>
+          <a:p>
+            <a:pPr algn="ctr">
+              <a:lnSpc>
+                <a:spcPts val="1600"/>
+              </a:lnSpc>
+            </a:pPr>
+            <a:r>
+              <a:rPr sz="1300" b="1" i="0">
+                <a:solidFill>
+                  <a:srgbClr val="FFFFFF"/>
+                </a:solidFill>
+                <a:latin typeface="Segoe UI"/>
+              </a:rPr>
+              <a:t>04</a:t>
+            </a:r>
+          </a:p>
+        </p:txBody>
+      </p:sp>
+      <p:sp>
+        <p:nvSpPr>
+          <p:cNvPr id="23" name="TextBox 22"/>
+          <p:cNvSpPr txBox="1"/>
+          <p:nvPr/>
+        </p:nvSpPr>
+        <p:spPr>
+          <a:xfrm>
+            <a:off x="1554480" y="4370832"/>
+            <a:ext cx="9601200" cy="768096"/>
+          </a:xfrm>
+          <a:prstGeom prst="rect">
+            <a:avLst/>
+          </a:prstGeom>
+          <a:noFill/>
+        </p:spPr>
+        <p:txBody>
+          <a:bodyPr wrap="square" lIns="73152" rIns="73152" tIns="36576" bIns="36576" anchor="ctr">
+            <a:spAutoFit/>
+          </a:bodyPr>
+          <a:lstStyle/>
+          <a:p>
+            <a:pPr algn="l">
+              <a:lnSpc>
+                <a:spcPts val="2000"/>
+              </a:lnSpc>
+            </a:pPr>
+            <a:r>
+              <a:rPr sz="1600" b="0" i="0">
+                <a:solidFill>
+                  <a:srgbClr val="2C3E50"/>
+                </a:solidFill>
+                <a:latin typeface="Segoe UI"/>
+              </a:rPr>
+              <a:t>Spec Reference — docs.snowflake.com/en/user-guide/cleanrooms/v2/spec-reference</a:t>
+            </a:r>
+          </a:p>
+        </p:txBody>
+      </p:sp>
+      <p:sp>
+        <p:nvSpPr>
+          <p:cNvPr id="24" name="Rounded Rectangle 23"/>
+          <p:cNvSpPr/>
+          <p:nvPr/>
+        </p:nvSpPr>
+        <p:spPr>
+          <a:xfrm>
+            <a:off x="640080" y="5212080"/>
+            <a:ext cx="10911535" cy="804672"/>
+          </a:xfrm>
+          <a:prstGeom prst="roundRect">
+            <a:avLst/>
+          </a:prstGeom>
+          <a:solidFill>
+            <a:srgbClr val="EEF5FA"/>
+          </a:solidFill>
+          <a:ln>
+            <a:noFill/>
+          </a:ln>
+        </p:spPr>
+        <p:style>
+          <a:lnRef idx="1">
+            <a:schemeClr val="accent1"/>
+          </a:lnRef>
+          <a:fillRef idx="3">
+            <a:schemeClr val="accent1"/>
+          </a:fillRef>
+          <a:effectRef idx="2">
+            <a:schemeClr val="accent1"/>
+          </a:effectRef>
+          <a:fontRef idx="minor">
+            <a:schemeClr val="lt1"/>
+          </a:fontRef>
+        </p:style>
+        <p:txBody>
+          <a:bodyPr rtlCol="0" anchor="ctr"/>
+          <a:lstStyle/>
+          <a:p>
+            <a:pPr algn="ctr"/>
+          </a:p>
+        </p:txBody>
+      </p:sp>
+      <p:sp>
+        <p:nvSpPr>
+          <p:cNvPr id="25" name="Oval 24"/>
+          <p:cNvSpPr/>
+          <p:nvPr/>
+        </p:nvSpPr>
+        <p:spPr>
+          <a:xfrm>
+            <a:off x="914400" y="5349240"/>
+            <a:ext cx="411480" cy="411480"/>
+          </a:xfrm>
+          <a:prstGeom prst="ellipse">
+            <a:avLst/>
+          </a:prstGeom>
+          <a:solidFill>
+            <a:srgbClr val="29B5E8"/>
+          </a:solidFill>
+          <a:ln>
+            <a:noFill/>
+          </a:ln>
+        </p:spPr>
+        <p:style>
+          <a:lnRef idx="1">
+            <a:schemeClr val="accent1"/>
+          </a:lnRef>
+          <a:fillRef idx="3">
+            <a:schemeClr val="accent1"/>
+          </a:fillRef>
+          <a:effectRef idx="2">
+            <a:schemeClr val="accent1"/>
+          </a:effectRef>
+          <a:fontRef idx="minor">
+            <a:schemeClr val="lt1"/>
+          </a:fontRef>
+        </p:style>
+        <p:txBody>
+          <a:bodyPr rtlCol="0" anchor="ctr"/>
+          <a:lstStyle/>
+          <a:p>
+            <a:pPr algn="ctr"/>
+          </a:p>
+        </p:txBody>
+      </p:sp>
+      <p:sp>
+        <p:nvSpPr>
+          <p:cNvPr id="26" name="TextBox 25"/>
+          <p:cNvSpPr txBox="1"/>
+          <p:nvPr/>
+        </p:nvSpPr>
+        <p:spPr>
+          <a:xfrm>
+            <a:off x="914400" y="5349240"/>
+            <a:ext cx="411480" cy="411480"/>
+          </a:xfrm>
+          <a:prstGeom prst="rect">
+            <a:avLst/>
+          </a:prstGeom>
+          <a:noFill/>
+        </p:spPr>
+        <p:txBody>
+          <a:bodyPr wrap="square" lIns="73152" rIns="73152" tIns="36576" bIns="36576" anchor="ctr">
+            <a:spAutoFit/>
+          </a:bodyPr>
+          <a:lstStyle/>
+          <a:p>
+            <a:pPr algn="ctr">
+              <a:lnSpc>
+                <a:spcPts val="1600"/>
+              </a:lnSpc>
+            </a:pPr>
+            <a:r>
+              <a:rPr sz="1300" b="1" i="0">
+                <a:solidFill>
+                  <a:srgbClr val="FFFFFF"/>
+                </a:solidFill>
+                <a:latin typeface="Segoe UI"/>
+              </a:rPr>
+              <a:t>05</a:t>
+            </a:r>
+          </a:p>
+        </p:txBody>
+      </p:sp>
+      <p:sp>
+        <p:nvSpPr>
+          <p:cNvPr id="27" name="TextBox 26"/>
+          <p:cNvSpPr txBox="1"/>
+          <p:nvPr/>
+        </p:nvSpPr>
+        <p:spPr>
+          <a:xfrm>
+            <a:off x="1554480" y="5285232"/>
+            <a:ext cx="9601200" cy="768096"/>
+          </a:xfrm>
+          <a:prstGeom prst="rect">
+            <a:avLst/>
+          </a:prstGeom>
+          <a:noFill/>
+        </p:spPr>
+        <p:txBody>
+          <a:bodyPr wrap="square" lIns="73152" rIns="73152" tIns="36576" bIns="36576" anchor="ctr">
+            <a:spAutoFit/>
+          </a:bodyPr>
+          <a:lstStyle/>
+          <a:p>
+            <a:pPr algn="l">
+              <a:lnSpc>
+                <a:spcPts val="2000"/>
+              </a:lnSpc>
+            </a:pPr>
+            <a:r>
+              <a:rPr sz="1600" b="0" i="0">
+                <a:solidFill>
+                  <a:srgbClr val="2C3E50"/>
+                </a:solidFill>
+                <a:latin typeface="Segoe UI"/>
+              </a:rPr>
+              <a:t>API Reference — docs.snowflake.com/en/user-guide/cleanrooms/v2/v2-api-reference</a:t>
+            </a:r>
+          </a:p>
+        </p:txBody>
+      </p:sp>
+      <p:sp>
+        <p:nvSpPr>
+          <p:cNvPr id="28" name="TextBox 27"/>
+          <p:cNvSpPr txBox="1"/>
+          <p:nvPr/>
+        </p:nvSpPr>
+        <p:spPr>
+          <a:xfrm>
+            <a:off x="548640" y="6446520"/>
+            <a:ext cx="9144000" cy="274320"/>
+          </a:xfrm>
+          <a:prstGeom prst="rect">
+            <a:avLst/>
+          </a:prstGeom>
+          <a:noFill/>
+        </p:spPr>
+        <p:txBody>
+          <a:bodyPr wrap="square" lIns="73152" rIns="73152" tIns="36576" bIns="36576" anchor="t">
+            <a:spAutoFit/>
+          </a:bodyPr>
+          <a:lstStyle/>
+          <a:p>
+            <a:pPr algn="l">
+              <a:lnSpc>
+                <a:spcPts val="1100"/>
+              </a:lnSpc>
+            </a:pPr>
+            <a:r>
+              <a:rPr sz="900" b="0" i="0">
+                <a:solidFill>
+                  <a:srgbClr val="95A5A6"/>
+                </a:solidFill>
+                <a:latin typeface="Segoe UI"/>
+              </a:rPr>
+              <a:t>DCR Collaboration API v2 | SFSEAPAC | 2026   ·   59 / 61</a:t>
             </a:r>
           </a:p>
         </p:txBody>
@@ -48134,6 +48748,439 @@
     <p:bg>
       <p:bgPr>
         <a:solidFill>
+          <a:srgbClr val="0D1B2A"/>
+        </a:solidFill>
+        <a:effectLst/>
+      </p:bgPr>
+    </p:bg>
+    <p:spTree>
+      <p:nvGrpSpPr>
+        <p:cNvPr id="1" name=""/>
+        <p:cNvGrpSpPr/>
+        <p:nvPr/>
+      </p:nvGrpSpPr>
+      <p:grpSpPr/>
+      <p:sp>
+        <p:nvSpPr>
+          <p:cNvPr id="2" name="Oval 1"/>
+          <p:cNvSpPr/>
+          <p:nvPr/>
+        </p:nvSpPr>
+        <p:spPr>
+          <a:xfrm>
+            <a:off x="9905695" y="-731520"/>
+            <a:ext cx="2743200" cy="2743200"/>
+          </a:xfrm>
+          <a:prstGeom prst="ellipse">
+            <a:avLst/>
+          </a:prstGeom>
+          <a:solidFill>
+            <a:srgbClr val="223850"/>
+          </a:solidFill>
+          <a:ln>
+            <a:noFill/>
+          </a:ln>
+        </p:spPr>
+        <p:style>
+          <a:lnRef idx="1">
+            <a:schemeClr val="accent1"/>
+          </a:lnRef>
+          <a:fillRef idx="3">
+            <a:schemeClr val="accent1"/>
+          </a:fillRef>
+          <a:effectRef idx="2">
+            <a:schemeClr val="accent1"/>
+          </a:effectRef>
+          <a:fontRef idx="minor">
+            <a:schemeClr val="lt1"/>
+          </a:fontRef>
+        </p:style>
+        <p:txBody>
+          <a:bodyPr rtlCol="0" anchor="ctr"/>
+          <a:lstStyle/>
+          <a:p>
+            <a:pPr algn="ctr"/>
+          </a:p>
+        </p:txBody>
+      </p:sp>
+      <p:sp>
+        <p:nvSpPr>
+          <p:cNvPr id="3" name="Oval 2"/>
+          <p:cNvSpPr/>
+          <p:nvPr/>
+        </p:nvSpPr>
+        <p:spPr>
+          <a:xfrm>
+            <a:off x="8076895" y="5486400"/>
+            <a:ext cx="1828800" cy="1828800"/>
+          </a:xfrm>
+          <a:prstGeom prst="ellipse">
+            <a:avLst/>
+          </a:prstGeom>
+          <a:solidFill>
+            <a:srgbClr val="1F344C"/>
+          </a:solidFill>
+          <a:ln>
+            <a:noFill/>
+          </a:ln>
+        </p:spPr>
+        <p:style>
+          <a:lnRef idx="1">
+            <a:schemeClr val="accent1"/>
+          </a:lnRef>
+          <a:fillRef idx="3">
+            <a:schemeClr val="accent1"/>
+          </a:fillRef>
+          <a:effectRef idx="2">
+            <a:schemeClr val="accent1"/>
+          </a:effectRef>
+          <a:fontRef idx="minor">
+            <a:schemeClr val="lt1"/>
+          </a:fontRef>
+        </p:style>
+        <p:txBody>
+          <a:bodyPr rtlCol="0" anchor="ctr"/>
+          <a:lstStyle/>
+          <a:p>
+            <a:pPr algn="ctr"/>
+          </a:p>
+        </p:txBody>
+      </p:sp>
+      <p:sp>
+        <p:nvSpPr>
+          <p:cNvPr id="4" name="Oval 3"/>
+          <p:cNvSpPr/>
+          <p:nvPr/>
+        </p:nvSpPr>
+        <p:spPr>
+          <a:xfrm>
+            <a:off x="-457200" y="4572000"/>
+            <a:ext cx="1371600" cy="1371600"/>
+          </a:xfrm>
+          <a:prstGeom prst="ellipse">
+            <a:avLst/>
+          </a:prstGeom>
+          <a:solidFill>
+            <a:srgbClr val="20354D"/>
+          </a:solidFill>
+          <a:ln>
+            <a:noFill/>
+          </a:ln>
+        </p:spPr>
+        <p:style>
+          <a:lnRef idx="1">
+            <a:schemeClr val="accent1"/>
+          </a:lnRef>
+          <a:fillRef idx="3">
+            <a:schemeClr val="accent1"/>
+          </a:fillRef>
+          <a:effectRef idx="2">
+            <a:schemeClr val="accent1"/>
+          </a:effectRef>
+          <a:fontRef idx="minor">
+            <a:schemeClr val="lt1"/>
+          </a:fontRef>
+        </p:style>
+        <p:txBody>
+          <a:bodyPr rtlCol="0" anchor="ctr"/>
+          <a:lstStyle/>
+          <a:p>
+            <a:pPr algn="ctr"/>
+          </a:p>
+        </p:txBody>
+      </p:sp>
+      <p:sp>
+        <p:nvSpPr>
+          <p:cNvPr id="5" name="Rectangle 4"/>
+          <p:cNvSpPr/>
+          <p:nvPr/>
+        </p:nvSpPr>
+        <p:spPr>
+          <a:xfrm>
+            <a:off x="0" y="0"/>
+            <a:ext cx="12191695" cy="54864"/>
+          </a:xfrm>
+          <a:prstGeom prst="rect">
+            <a:avLst/>
+          </a:prstGeom>
+          <a:gradFill rotWithShape="1">
+            <a:gsLst>
+              <a:gs pos="0">
+                <a:srgbClr val="29B5E8"/>
+              </a:gs>
+              <a:gs pos="100000">
+                <a:srgbClr val="71D3DC"/>
+              </a:gs>
+            </a:gsLst>
+            <a:lin scaled="0" ang="16200000"/>
+          </a:gradFill>
+          <a:ln>
+            <a:noFill/>
+          </a:ln>
+        </p:spPr>
+        <p:style>
+          <a:lnRef idx="1">
+            <a:schemeClr val="accent1"/>
+          </a:lnRef>
+          <a:fillRef idx="3">
+            <a:schemeClr val="accent1"/>
+          </a:fillRef>
+          <a:effectRef idx="2">
+            <a:schemeClr val="accent1"/>
+          </a:effectRef>
+          <a:fontRef idx="minor">
+            <a:schemeClr val="lt1"/>
+          </a:fontRef>
+        </p:style>
+        <p:txBody>
+          <a:bodyPr rtlCol="0" anchor="ctr"/>
+          <a:lstStyle/>
+          <a:p>
+            <a:pPr algn="ctr"/>
+          </a:p>
+        </p:txBody>
+      </p:sp>
+      <p:pic>
+        <p:nvPicPr>
+          <p:cNvPr id="6" name="Picture 5" descr="snowflake_icon_white.png"/>
+          <p:cNvPicPr>
+            <a:picLocks noChangeAspect="1"/>
+          </p:cNvPicPr>
+          <p:nvPr/>
+        </p:nvPicPr>
+        <p:blipFill>
+          <a:blip r:embed="rId2"/>
+          <a:stretch>
+            <a:fillRect/>
+          </a:stretch>
+        </p:blipFill>
+        <p:spPr>
+          <a:xfrm>
+            <a:off x="11368735" y="320040"/>
+            <a:ext cx="399301" cy="365760"/>
+          </a:xfrm>
+          <a:prstGeom prst="rect">
+            <a:avLst/>
+          </a:prstGeom>
+        </p:spPr>
+      </p:pic>
+      <p:sp>
+        <p:nvSpPr>
+          <p:cNvPr id="7" name="Oval 6"/>
+          <p:cNvSpPr/>
+          <p:nvPr/>
+        </p:nvSpPr>
+        <p:spPr>
+          <a:xfrm>
+            <a:off x="914400" y="1371600"/>
+            <a:ext cx="1097280" cy="1097280"/>
+          </a:xfrm>
+          <a:prstGeom prst="ellipse">
+            <a:avLst/>
+          </a:prstGeom>
+          <a:solidFill>
+            <a:srgbClr val="15283C"/>
+          </a:solidFill>
+          <a:ln>
+            <a:noFill/>
+          </a:ln>
+        </p:spPr>
+        <p:style>
+          <a:lnRef idx="1">
+            <a:schemeClr val="accent1"/>
+          </a:lnRef>
+          <a:fillRef idx="3">
+            <a:schemeClr val="accent1"/>
+          </a:fillRef>
+          <a:effectRef idx="2">
+            <a:schemeClr val="accent1"/>
+          </a:effectRef>
+          <a:fontRef idx="minor">
+            <a:schemeClr val="lt1"/>
+          </a:fontRef>
+        </p:style>
+        <p:txBody>
+          <a:bodyPr rtlCol="0" anchor="ctr"/>
+          <a:lstStyle/>
+          <a:p>
+            <a:pPr algn="ctr"/>
+          </a:p>
+        </p:txBody>
+      </p:sp>
+      <p:sp>
+        <p:nvSpPr>
+          <p:cNvPr id="8" name="TextBox 7"/>
+          <p:cNvSpPr txBox="1"/>
+          <p:nvPr/>
+        </p:nvSpPr>
+        <p:spPr>
+          <a:xfrm>
+            <a:off x="777240" y="1005840"/>
+            <a:ext cx="1371600" cy="1645920"/>
+          </a:xfrm>
+          <a:prstGeom prst="rect">
+            <a:avLst/>
+          </a:prstGeom>
+          <a:noFill/>
+        </p:spPr>
+        <p:txBody>
+          <a:bodyPr wrap="square" lIns="73152" rIns="73152" tIns="36576" bIns="36576" anchor="t">
+            <a:spAutoFit/>
+          </a:bodyPr>
+          <a:lstStyle/>
+          <a:p>
+            <a:pPr algn="l">
+              <a:lnSpc>
+                <a:spcPts val="15600"/>
+              </a:lnSpc>
+            </a:pPr>
+            <a:r>
+              <a:rPr sz="12000" b="0" i="0">
+                <a:solidFill>
+                  <a:srgbClr val="29B5E8"/>
+                </a:solidFill>
+                <a:latin typeface="Georgia"/>
+              </a:rPr>
+              <a:t>“</a:t>
+            </a:r>
+          </a:p>
+        </p:txBody>
+      </p:sp>
+      <p:sp>
+        <p:nvSpPr>
+          <p:cNvPr id="9" name="TextBox 8"/>
+          <p:cNvSpPr txBox="1"/>
+          <p:nvPr/>
+        </p:nvSpPr>
+        <p:spPr>
+          <a:xfrm>
+            <a:off x="1371600" y="2560320"/>
+            <a:ext cx="9601200" cy="2560320"/>
+          </a:xfrm>
+          <a:prstGeom prst="rect">
+            <a:avLst/>
+          </a:prstGeom>
+          <a:noFill/>
+        </p:spPr>
+        <p:txBody>
+          <a:bodyPr wrap="square" lIns="73152" rIns="73152" tIns="36576" bIns="36576" anchor="t">
+            <a:spAutoFit/>
+          </a:bodyPr>
+          <a:lstStyle/>
+          <a:p>
+            <a:pPr algn="l">
+              <a:lnSpc>
+                <a:spcPts val="3900"/>
+              </a:lnSpc>
+            </a:pPr>
+            <a:r>
+              <a:rPr sz="2600" b="0" i="1">
+                <a:solidFill>
+                  <a:srgbClr val="FFFFFF"/>
+                </a:solidFill>
+                <a:latin typeface="Georgia"/>
+              </a:rPr>
+              <a:t>1.2B rows joined with 8M in 2 minutes 16 seconds, 0.61 credits, single query, zero raw data exchange — this is the future of secure multi-party analytics.</a:t>
+            </a:r>
+          </a:p>
+        </p:txBody>
+      </p:sp>
+      <p:sp>
+        <p:nvSpPr>
+          <p:cNvPr id="10" name="Rectangle 9"/>
+          <p:cNvSpPr/>
+          <p:nvPr/>
+        </p:nvSpPr>
+        <p:spPr>
+          <a:xfrm>
+            <a:off x="1371600" y="5394960"/>
+            <a:ext cx="731520" cy="36576"/>
+          </a:xfrm>
+          <a:prstGeom prst="rect">
+            <a:avLst/>
+          </a:prstGeom>
+          <a:solidFill>
+            <a:srgbClr val="29B5E8"/>
+          </a:solidFill>
+          <a:ln>
+            <a:noFill/>
+          </a:ln>
+        </p:spPr>
+        <p:style>
+          <a:lnRef idx="1">
+            <a:schemeClr val="accent1"/>
+          </a:lnRef>
+          <a:fillRef idx="3">
+            <a:schemeClr val="accent1"/>
+          </a:fillRef>
+          <a:effectRef idx="2">
+            <a:schemeClr val="accent1"/>
+          </a:effectRef>
+          <a:fontRef idx="minor">
+            <a:schemeClr val="lt1"/>
+          </a:fontRef>
+        </p:style>
+        <p:txBody>
+          <a:bodyPr rtlCol="0" anchor="ctr"/>
+          <a:lstStyle/>
+          <a:p>
+            <a:pPr algn="ctr"/>
+          </a:p>
+        </p:txBody>
+      </p:sp>
+      <p:sp>
+        <p:nvSpPr>
+          <p:cNvPr id="11" name="TextBox 10"/>
+          <p:cNvSpPr txBox="1"/>
+          <p:nvPr/>
+        </p:nvSpPr>
+        <p:spPr>
+          <a:xfrm>
+            <a:off x="1371600" y="5577840"/>
+            <a:ext cx="7315200" cy="365760"/>
+          </a:xfrm>
+          <a:prstGeom prst="rect">
+            <a:avLst/>
+          </a:prstGeom>
+          <a:noFill/>
+        </p:spPr>
+        <p:txBody>
+          <a:bodyPr wrap="square" lIns="73152" rIns="73152" tIns="36576" bIns="36576" anchor="t">
+            <a:spAutoFit/>
+          </a:bodyPr>
+          <a:lstStyle/>
+          <a:p>
+            <a:pPr algn="l">
+              <a:lnSpc>
+                <a:spcPts val="1800"/>
+              </a:lnSpc>
+            </a:pPr>
+            <a:r>
+              <a:rPr sz="1400" b="1" i="0">
+                <a:solidFill>
+                  <a:srgbClr val="71D3DC"/>
+                </a:solidFill>
+                <a:latin typeface="Segoe UI"/>
+              </a:rPr>
+              <a:t>DCR Single-Query Benchmark</a:t>
+            </a:r>
+          </a:p>
+        </p:txBody>
+      </p:sp>
+    </p:spTree>
+  </p:cSld>
+  <p:clrMapOvr>
+    <a:masterClrMapping/>
+  </p:clrMapOvr>
+</p:sld>
+</file>
+
+<file path=ppt/slides/slide61.xml><?xml version="1.0" encoding="utf-8"?>
+<p:sld xmlns:a="http://schemas.openxmlformats.org/drawingml/2006/main" xmlns:p="http://schemas.openxmlformats.org/presentationml/2006/main" xmlns:r="http://schemas.openxmlformats.org/officeDocument/2006/relationships">
+  <p:cSld>
+    <p:bg>
+      <p:bgPr>
+        <a:solidFill>
           <a:srgbClr val="1B2A3D"/>
         </a:solidFill>
         <a:effectLst/>
@@ -49469,7 +50516,7 @@
                 </a:solidFill>
                 <a:latin typeface="Segoe UI"/>
               </a:rPr>
-              <a:t>DCR Collaboration API v2 | SFSEAPAC | 2026   ·   7 / 60</a:t>
+              <a:t>DCR Collaboration API v2 | SFSEAPAC | 2026   ·   7 / 61</a:t>
             </a:r>
           </a:p>
         </p:txBody>
@@ -50581,7 +51628,7 @@
                 </a:solidFill>
                 <a:latin typeface="Segoe UI"/>
               </a:rPr>
-              <a:t>DCR Collaboration API v2 | SFSEAPAC | 2026   ·   8 / 60</a:t>
+              <a:t>DCR Collaboration API v2 | SFSEAPAC | 2026   ·   8 / 61</a:t>
             </a:r>
           </a:p>
         </p:txBody>
